--- a/ppt/答辩PPT_v3.pptx
+++ b/ppt/答辩PPT_v3.pptx
@@ -4,9 +4,6 @@
   <p:sldMasterIdLst>
     <p:sldMasterId id="2147483648" r:id="rId1"/>
   </p:sldMasterIdLst>
-  <p:notesMasterIdLst>
-    <p:notesMasterId r:id="rId16"/>
-  </p:notesMasterIdLst>
   <p:sldIdLst>
     <p:sldId id="256" r:id="rId2"/>
     <p:sldId id="257" r:id="rId3"/>
@@ -20,10 +17,12 @@
     <p:sldId id="265" r:id="rId11"/>
     <p:sldId id="266" r:id="rId12"/>
     <p:sldId id="267" r:id="rId13"/>
-    <p:sldId id="269" r:id="rId14"/>
-    <p:sldId id="268" r:id="rId15"/>
+    <p:sldId id="268" r:id="rId14"/>
   </p:sldIdLst>
-  <p:sldSz cx="9144000" cy="5143500" type="screen16x9"/>
+  <p:notesMasterIdLst>
+    <p:notesMasterId r:id="rId15"/>
+  </p:notesMasterIdLst>
+  <p:sldSz cx="9144000" cy="5143500"/>
   <p:notesSz cx="5143500" cy="9144000"/>
   <p:defaultTextStyle>
     <a:lvl1pPr marL="0" algn="l" defTabSz="914400" rtl="0" eaLnBrk="1" latinLnBrk="0" hangingPunct="1">
@@ -117,11 +116,6 @@
       </a:defRPr>
     </a:lvl9pPr>
   </p:defaultTextStyle>
-  <p:extLst>
-    <p:ext uri="{EFAFB233-063F-42B5-8137-9DF3F51BA10A}">
-      <p15:sldGuideLst xmlns:p15="http://schemas.microsoft.com/office/powerpoint/2012/main"/>
-    </p:ext>
-  </p:extLst>
 </p:presentation>
 </file>
 
@@ -147,10 +141,234 @@
           <a:chExt cx="0" cy="0"/>
         </a:xfrm>
       </p:grpSpPr>
+      <p:sp>
+        <p:nvSpPr>
+          <p:cNvPr id="2" name="Header Placeholder 1"/>
+          <p:cNvSpPr>
+            <a:spLocks noGrp="1"/>
+          </p:cNvSpPr>
+          <p:nvPr>
+            <p:ph type="hdr" sz="quarter"/>
+          </p:nvPr>
+        </p:nvSpPr>
+        <p:spPr>
+          <a:xfrm>
+            <a:off x="0" y="0"/>
+            <a:ext cx="2971800" cy="458788"/>
+          </a:xfrm>
+          <a:prstGeom prst="rect">
+            <a:avLst/>
+          </a:prstGeom>
+        </p:spPr>
+        <p:txBody>
+          <a:bodyPr vert="horz" lIns="91440" tIns="45720" rIns="91440" bIns="45720" rtlCol="0"/>
+          <a:lstStyle>
+            <a:lvl1pPr algn="l">
+              <a:defRPr sz="1200"/>
+            </a:lvl1pPr>
+          </a:lstStyle>
+          <a:p>
+            <a:endParaRPr lang="en-US"/>
+          </a:p>
+        </p:txBody>
+      </p:sp>
+      <p:sp>
+        <p:nvSpPr>
+          <p:cNvPr id="3" name="Date Placeholder 2"/>
+          <p:cNvSpPr>
+            <a:spLocks noGrp="1"/>
+          </p:cNvSpPr>
+          <p:nvPr>
+            <p:ph type="dt" idx="1"/>
+          </p:nvPr>
+        </p:nvSpPr>
+        <p:spPr>
+          <a:xfrm>
+            <a:off x="3884613" y="0"/>
+            <a:ext cx="2971800" cy="458788"/>
+          </a:xfrm>
+          <a:prstGeom prst="rect">
+            <a:avLst/>
+          </a:prstGeom>
+        </p:spPr>
+        <p:txBody>
+          <a:bodyPr vert="horz" lIns="91440" tIns="45720" rIns="91440" bIns="45720" rtlCol="0"/>
+          <a:lstStyle>
+            <a:lvl1pPr algn="r">
+              <a:defRPr sz="1200"/>
+            </a:lvl1pPr>
+          </a:lstStyle>
+          <a:p>
+            <a:fld id="{5282F153-3F37-0F45-9E97-73ACFA13230C}" type="datetimeFigureOut">
+              <a:rPr lang="en-US"/>
+              <a:t>7/23/19</a:t>
+            </a:fld>
+            <a:endParaRPr lang="en-US"/>
+          </a:p>
+        </p:txBody>
+      </p:sp>
+      <p:sp>
+        <p:nvSpPr>
+          <p:cNvPr id="4" name="Slide Image Placeholder 3"/>
+          <p:cNvSpPr>
+            <a:spLocks noGrp="1" noRot="1" noChangeAspect="1"/>
+          </p:cNvSpPr>
+          <p:nvPr>
+            <p:ph type="sldImg" idx="2"/>
+          </p:nvPr>
+        </p:nvSpPr>
+        <p:spPr>
+          <a:xfrm>
+            <a:off x="685800" y="1143000"/>
+            <a:ext cx="5486400" cy="3086100"/>
+          </a:xfrm>
+          <a:prstGeom prst="rect">
+            <a:avLst/>
+          </a:prstGeom>
+          <a:noFill/>
+          <a:ln w="12700">
+            <a:solidFill>
+              <a:prstClr val="black"/>
+            </a:solidFill>
+          </a:ln>
+        </p:spPr>
+        <p:txBody>
+          <a:bodyPr vert="horz" lIns="91440" tIns="45720" rIns="91440" bIns="45720" rtlCol="0" anchor="ctr"/>
+          <a:lstStyle/>
+          <a:p>
+            <a:endParaRPr lang="en-US"/>
+          </a:p>
+        </p:txBody>
+      </p:sp>
+      <p:sp>
+        <p:nvSpPr>
+          <p:cNvPr id="5" name="Notes Placeholder 4"/>
+          <p:cNvSpPr>
+            <a:spLocks noGrp="1"/>
+          </p:cNvSpPr>
+          <p:nvPr>
+            <p:ph type="body" sz="quarter" idx="3"/>
+          </p:nvPr>
+        </p:nvSpPr>
+        <p:spPr>
+          <a:xfrm>
+            <a:off x="685800" y="4400550"/>
+            <a:ext cx="5486400" cy="3600450"/>
+          </a:xfrm>
+          <a:prstGeom prst="rect">
+            <a:avLst/>
+          </a:prstGeom>
+        </p:spPr>
+        <p:txBody>
+          <a:bodyPr vert="horz" lIns="91440" tIns="45720" rIns="91440" bIns="45720" rtlCol="0"/>
+          <a:lstStyle/>
+          <a:p>
+            <a:pPr lvl="0"/>
+            <a:r>
+              <a:rPr lang="en-US"/>
+              <a:t>Click to edit Master text styles</a:t>
+            </a:r>
+          </a:p>
+          <a:p>
+            <a:pPr lvl="1"/>
+            <a:r>
+              <a:rPr lang="en-US"/>
+              <a:t>Second level</a:t>
+            </a:r>
+          </a:p>
+          <a:p>
+            <a:pPr lvl="2"/>
+            <a:r>
+              <a:rPr lang="en-US"/>
+              <a:t>Third level</a:t>
+            </a:r>
+          </a:p>
+          <a:p>
+            <a:pPr lvl="3"/>
+            <a:r>
+              <a:rPr lang="en-US"/>
+              <a:t>Fourth level</a:t>
+            </a:r>
+          </a:p>
+          <a:p>
+            <a:pPr lvl="4"/>
+            <a:r>
+              <a:rPr lang="en-US"/>
+              <a:t>Fifth level</a:t>
+            </a:r>
+          </a:p>
+        </p:txBody>
+      </p:sp>
+      <p:sp>
+        <p:nvSpPr>
+          <p:cNvPr id="6" name="Footer Placeholder 5"/>
+          <p:cNvSpPr>
+            <a:spLocks noGrp="1"/>
+          </p:cNvSpPr>
+          <p:nvPr>
+            <p:ph type="ftr" sz="quarter" idx="4"/>
+          </p:nvPr>
+        </p:nvSpPr>
+        <p:spPr>
+          <a:xfrm>
+            <a:off x="0" y="8685213"/>
+            <a:ext cx="2971800" cy="458787"/>
+          </a:xfrm>
+          <a:prstGeom prst="rect">
+            <a:avLst/>
+          </a:prstGeom>
+        </p:spPr>
+        <p:txBody>
+          <a:bodyPr vert="horz" lIns="91440" tIns="45720" rIns="91440" bIns="45720" rtlCol="0" anchor="b"/>
+          <a:lstStyle>
+            <a:lvl1pPr algn="l">
+              <a:defRPr sz="1200"/>
+            </a:lvl1pPr>
+          </a:lstStyle>
+          <a:p>
+            <a:endParaRPr lang="en-US"/>
+          </a:p>
+        </p:txBody>
+      </p:sp>
+      <p:sp>
+        <p:nvSpPr>
+          <p:cNvPr id="7" name="Slide Number Placeholder 6"/>
+          <p:cNvSpPr>
+            <a:spLocks noGrp="1"/>
+          </p:cNvSpPr>
+          <p:nvPr>
+            <p:ph type="sldNum" sz="quarter" idx="5"/>
+          </p:nvPr>
+        </p:nvSpPr>
+        <p:spPr>
+          <a:xfrm>
+            <a:off x="3884613" y="8685213"/>
+            <a:ext cx="2971800" cy="458787"/>
+          </a:xfrm>
+          <a:prstGeom prst="rect">
+            <a:avLst/>
+          </a:prstGeom>
+        </p:spPr>
+        <p:txBody>
+          <a:bodyPr vert="horz" lIns="91440" tIns="45720" rIns="91440" bIns="45720" rtlCol="0" anchor="b"/>
+          <a:lstStyle>
+            <a:lvl1pPr algn="r">
+              <a:defRPr sz="1200"/>
+            </a:lvl1pPr>
+          </a:lstStyle>
+          <a:p>
+            <a:fld id="{CE5E9CC1-C706-0F49-92D6-E571CC5EEA8F}" type="slidenum">
+              <a:rPr lang="en-US"/>
+              <a:t>‹#›</a:t>
+            </a:fld>
+            <a:endParaRPr lang="en-US"/>
+          </a:p>
+        </p:txBody>
+      </p:sp>
     </p:spTree>
     <p:extLst>
       <p:ext uri="{BB962C8B-B14F-4D97-AF65-F5344CB8AC3E}">
-        <p14:creationId xmlns:p14="http://schemas.microsoft.com/office/powerpoint/2010/main" val="451632268"/>
+        <p14:creationId xmlns:p14="http://schemas.microsoft.com/office/powerpoint/2010/main" val="1024086991"/>
       </p:ext>
     </p:extLst>
   </p:cSld>
@@ -294,6 +512,10 @@
           <a:bodyPr/>
           <a:lstStyle/>
           <a:p>
+            <a:r>
+              <a:rPr lang="en-US" dirty="0"/>
+              <a:t/>
+            </a:r>
             <a:endParaRPr lang="en-US" dirty="0"/>
           </a:p>
         </p:txBody>
@@ -378,6 +600,10 @@
           <a:bodyPr/>
           <a:lstStyle/>
           <a:p>
+            <a:r>
+              <a:rPr lang="en-US" dirty="0"/>
+              <a:t/>
+            </a:r>
             <a:endParaRPr lang="en-US" dirty="0"/>
           </a:p>
         </p:txBody>
@@ -462,6 +688,10 @@
           <a:bodyPr/>
           <a:lstStyle/>
           <a:p>
+            <a:r>
+              <a:rPr lang="en-US" dirty="0"/>
+              <a:t/>
+            </a:r>
             <a:endParaRPr lang="en-US" dirty="0"/>
           </a:p>
         </p:txBody>
@@ -546,6 +776,10 @@
           <a:bodyPr/>
           <a:lstStyle/>
           <a:p>
+            <a:r>
+              <a:rPr lang="en-US" dirty="0"/>
+              <a:t/>
+            </a:r>
             <a:endParaRPr lang="en-US" dirty="0"/>
           </a:p>
         </p:txBody>
@@ -630,6 +864,10 @@
           <a:bodyPr/>
           <a:lstStyle/>
           <a:p>
+            <a:r>
+              <a:rPr lang="en-US" dirty="0"/>
+              <a:t/>
+            </a:r>
             <a:endParaRPr lang="en-US" dirty="0"/>
           </a:p>
         </p:txBody>
@@ -651,7 +889,7 @@
           <a:p>
             <a:fld id="{F7021451-1387-4CA6-816F-3879F97B5CBC}" type="slidenum">
               <a:rPr lang="en-US"/>
-              <a:t>14</a:t>
+              <a:t>13</a:t>
             </a:fld>
             <a:endParaRPr lang="en-US"/>
           </a:p>
@@ -714,6 +952,10 @@
           <a:bodyPr/>
           <a:lstStyle/>
           <a:p>
+            <a:r>
+              <a:rPr lang="en-US" dirty="0"/>
+              <a:t/>
+            </a:r>
             <a:endParaRPr lang="en-US" dirty="0"/>
           </a:p>
         </p:txBody>
@@ -798,6 +1040,10 @@
           <a:bodyPr/>
           <a:lstStyle/>
           <a:p>
+            <a:r>
+              <a:rPr lang="en-US" dirty="0"/>
+              <a:t/>
+            </a:r>
             <a:endParaRPr lang="en-US" dirty="0"/>
           </a:p>
         </p:txBody>
@@ -882,6 +1128,10 @@
           <a:bodyPr/>
           <a:lstStyle/>
           <a:p>
+            <a:r>
+              <a:rPr lang="en-US" dirty="0"/>
+              <a:t/>
+            </a:r>
             <a:endParaRPr lang="en-US" dirty="0"/>
           </a:p>
         </p:txBody>
@@ -966,6 +1216,10 @@
           <a:bodyPr/>
           <a:lstStyle/>
           <a:p>
+            <a:r>
+              <a:rPr lang="en-US" dirty="0"/>
+              <a:t/>
+            </a:r>
             <a:endParaRPr lang="en-US" dirty="0"/>
           </a:p>
         </p:txBody>
@@ -1050,6 +1304,10 @@
           <a:bodyPr/>
           <a:lstStyle/>
           <a:p>
+            <a:r>
+              <a:rPr lang="en-US" dirty="0"/>
+              <a:t/>
+            </a:r>
             <a:endParaRPr lang="en-US" dirty="0"/>
           </a:p>
         </p:txBody>
@@ -1134,6 +1392,10 @@
           <a:bodyPr/>
           <a:lstStyle/>
           <a:p>
+            <a:r>
+              <a:rPr lang="en-US" dirty="0"/>
+              <a:t/>
+            </a:r>
             <a:endParaRPr lang="en-US" dirty="0"/>
           </a:p>
         </p:txBody>
@@ -1218,6 +1480,10 @@
           <a:bodyPr/>
           <a:lstStyle/>
           <a:p>
+            <a:r>
+              <a:rPr lang="en-US" dirty="0"/>
+              <a:t/>
+            </a:r>
             <a:endParaRPr lang="en-US" dirty="0"/>
           </a:p>
         </p:txBody>
@@ -1302,6 +1568,10 @@
           <a:bodyPr/>
           <a:lstStyle/>
           <a:p>
+            <a:r>
+              <a:rPr lang="en-US" dirty="0"/>
+              <a:t/>
+            </a:r>
             <a:endParaRPr lang="en-US" dirty="0"/>
           </a:p>
         </p:txBody>
@@ -1375,11 +1645,6 @@
 <file path=ppt/slideMasters/slideMaster1.xml><?xml version="1.0" encoding="utf-8"?>
 <p:sldMaster xmlns:a="http://schemas.openxmlformats.org/drawingml/2006/main" xmlns:r="http://schemas.openxmlformats.org/officeDocument/2006/relationships" xmlns:p="http://schemas.openxmlformats.org/presentationml/2006/main">
   <p:cSld>
-    <p:bg>
-      <p:bgRef idx="1001">
-        <a:schemeClr val="bg1"/>
-      </p:bgRef>
-    </p:bg>
     <p:spTree>
       <p:nvGrpSpPr>
         <p:cNvPr id="1" name=""/>
@@ -1662,7 +1927,6 @@
         <a:solidFill>
           <a:srgbClr val="0B1D3A"/>
         </a:solidFill>
-        <a:effectLst/>
       </p:bgPr>
     </p:bg>
     <p:spTree>
@@ -1742,7 +2006,7 @@
           <a:bodyPr wrap="square" lIns="0" tIns="0" rIns="0" bIns="0" rtlCol="0" anchor="ctr"/>
           <a:lstStyle/>
           <a:p>
-            <a:pPr marL="0" indent="0">
+            <a:pPr indent="0" marL="0">
               <a:buNone/>
             </a:pPr>
             <a:r>
@@ -1781,7 +2045,7 @@
           <a:bodyPr wrap="square" lIns="0" tIns="0" rIns="0" bIns="0" rtlCol="0" anchor="ctr"/>
           <a:lstStyle/>
           <a:p>
-            <a:pPr marL="0" indent="0">
+            <a:pPr indent="0" marL="0">
               <a:buNone/>
             </a:pPr>
             <a:r>
@@ -1840,7 +2104,7 @@
           <a:bodyPr wrap="square" lIns="0" tIns="0" rIns="0" bIns="0" rtlCol="0" anchor="ctr"/>
           <a:lstStyle/>
           <a:p>
-            <a:pPr marL="0" indent="0">
+            <a:pPr indent="0" marL="0">
               <a:buNone/>
             </a:pPr>
             <a:r>
@@ -1852,33 +2116,22 @@
                 <a:ea typeface="Calibri" pitchFamily="34" charset="-122"/>
                 <a:cs typeface="Calibri" pitchFamily="34" charset="-120"/>
               </a:rPr>
-              <a:t>财经数据分析综合实践 · </a:t>
-            </a:r>
-            <a:r>
-              <a:rPr lang="en-US" sz="1300" dirty="0" err="1">
-                <a:solidFill>
-                  <a:srgbClr val="94A3B8"/>
-                </a:solidFill>
-                <a:latin typeface="Calibri" pitchFamily="34" charset="0"/>
-                <a:ea typeface="Calibri" pitchFamily="34" charset="-122"/>
-                <a:cs typeface="Calibri" pitchFamily="34" charset="-120"/>
-              </a:rPr>
-              <a:t>课程设计答辩</a:t>
+              <a:t>财经数据分析综合实践 · 第十四讲 · 课程设计答辩</a:t>
             </a:r>
             <a:endParaRPr lang="en-US" sz="1300" dirty="0"/>
           </a:p>
           <a:p>
-            <a:pPr marL="0" indent="0">
+            <a:pPr indent="0" marL="0">
               <a:buNone/>
             </a:pPr>
             <a:endParaRPr lang="en-US" sz="1300" dirty="0"/>
           </a:p>
           <a:p>
-            <a:pPr marL="0" indent="0">
-              <a:buNone/>
-            </a:pPr>
-            <a:r>
-              <a:rPr lang="zh-CN" altLang="en-US" sz="1400" dirty="0">
+            <a:pPr indent="0" marL="0">
+              <a:buNone/>
+            </a:pPr>
+            <a:r>
+              <a:rPr lang="en-US" sz="1400" dirty="0">
                 <a:solidFill>
                   <a:srgbClr val="FFFFFF"/>
                 </a:solidFill>
@@ -1886,34 +2139,12 @@
                 <a:ea typeface="Calibri" pitchFamily="34" charset="-122"/>
                 <a:cs typeface="Calibri" pitchFamily="34" charset="-120"/>
               </a:rPr>
-              <a:t>四</a:t>
-            </a:r>
-            <a:r>
-              <a:rPr lang="en-US" sz="1400" dirty="0">
-                <a:solidFill>
-                  <a:srgbClr val="FFFFFF"/>
-                </a:solidFill>
-                <a:latin typeface="Calibri" pitchFamily="34" charset="0"/>
-                <a:ea typeface="Calibri" pitchFamily="34" charset="-122"/>
-                <a:cs typeface="Calibri" pitchFamily="34" charset="-120"/>
-              </a:rPr>
-              <a:t>组：</a:t>
-            </a:r>
-            <a:r>
-              <a:rPr lang="zh-CN" altLang="en-US" sz="1400" dirty="0">
-                <a:solidFill>
-                  <a:srgbClr val="FFFFFF"/>
-                </a:solidFill>
-                <a:latin typeface="Calibri" pitchFamily="34" charset="0"/>
-                <a:ea typeface="Calibri" pitchFamily="34" charset="-122"/>
-                <a:cs typeface="Calibri" pitchFamily="34" charset="-120"/>
-              </a:rPr>
-              <a:t>李世祺</a:t>
+              <a:t>组员：张三 · 李四 · 王五 </a:t>
             </a:r>
             <a:endParaRPr lang="en-US" sz="1300" dirty="0"/>
           </a:p>
           <a:p>
-            <a:pPr marL="0" indent="0">
+            <a:pPr indent="0" marL="0">
               <a:buNone/>
             </a:pPr>
             <a:r>
@@ -1952,7 +2183,7 @@
           <a:bodyPr wrap="square" rtlCol="0" anchor="ctr"/>
           <a:lstStyle/>
           <a:p>
-            <a:pPr marL="0" indent="0" algn="r">
+            <a:pPr algn="r" indent="0" marL="0">
               <a:buNone/>
             </a:pPr>
             <a:r>
@@ -1986,7 +2217,6 @@
         <a:solidFill>
           <a:srgbClr val="F7F9FC"/>
         </a:solidFill>
-        <a:effectLst/>
       </p:bgPr>
     </p:bg>
     <p:spTree>
@@ -2024,7 +2254,7 @@
           <a:bodyPr wrap="square" lIns="0" tIns="0" rIns="0" bIns="0" rtlCol="0" anchor="ctr"/>
           <a:lstStyle/>
           <a:p>
-            <a:pPr marL="0" indent="0">
+            <a:pPr indent="0" marL="0">
               <a:buNone/>
             </a:pPr>
             <a:r>
@@ -2063,7 +2293,7 @@
           <a:bodyPr wrap="square" lIns="0" tIns="0" rIns="0" bIns="0" rtlCol="0" anchor="ctr"/>
           <a:lstStyle/>
           <a:p>
-            <a:pPr marL="0" indent="0">
+            <a:pPr indent="0" marL="0">
               <a:buNone/>
             </a:pPr>
             <a:r>
@@ -2097,41 +2327,17 @@
         </p:nvGraphicFramePr>
         <p:xfrm>
           <a:off x="457200" y="1115568"/>
-          <a:ext cx="3749040" cy="1200912"/>
+          <a:ext cx="3931920" cy="1234440"/>
         </p:xfrm>
         <a:graphic>
           <a:graphicData uri="http://schemas.openxmlformats.org/drawingml/2006/table">
             <a:tbl>
               <a:tblPr/>
               <a:tblGrid>
-                <a:gridCol w="1005840">
-                  <a:extLst>
-                    <a:ext uri="{9D8B030D-6E8A-4147-A177-3AD203B41FA5}">
-                      <a16:colId xmlns:a16="http://schemas.microsoft.com/office/drawing/2014/main" val="20000"/>
-                    </a:ext>
-                  </a:extLst>
-                </a:gridCol>
-                <a:gridCol w="914400">
-                  <a:extLst>
-                    <a:ext uri="{9D8B030D-6E8A-4147-A177-3AD203B41FA5}">
-                      <a16:colId xmlns:a16="http://schemas.microsoft.com/office/drawing/2014/main" val="20001"/>
-                    </a:ext>
-                  </a:extLst>
-                </a:gridCol>
-                <a:gridCol w="914400">
-                  <a:extLst>
-                    <a:ext uri="{9D8B030D-6E8A-4147-A177-3AD203B41FA5}">
-                      <a16:colId xmlns:a16="http://schemas.microsoft.com/office/drawing/2014/main" val="20002"/>
-                    </a:ext>
-                  </a:extLst>
-                </a:gridCol>
-                <a:gridCol w="914400">
-                  <a:extLst>
-                    <a:ext uri="{9D8B030D-6E8A-4147-A177-3AD203B41FA5}">
-                      <a16:colId xmlns:a16="http://schemas.microsoft.com/office/drawing/2014/main" val="20003"/>
-                    </a:ext>
-                  </a:extLst>
-                </a:gridCol>
+                <a:gridCol w="1005840"/>
+                <a:gridCol w="914400"/>
+                <a:gridCol w="914400"/>
+                <a:gridCol w="914400"/>
               </a:tblGrid>
               <a:tr h="256032">
                 <a:tc>
@@ -2139,7 +2345,7 @@
                     <a:bodyPr/>
                     <a:lstStyle/>
                     <a:p>
-                      <a:pPr marL="0" indent="0">
+                      <a:pPr indent="0" marL="0">
                         <a:buNone/>
                       </a:pPr>
                       <a:r>
@@ -2160,7 +2366,7 @@
                       </a:endParaRPr>
                     </a:p>
                   </a:txBody>
-                  <a:tcPr>
+                  <a:tcPr marL="91440" marR="91440" marT="45720" marB="45720">
                     <a:lnL w="6350" cap="flat" cmpd="sng" algn="ctr">
                       <a:solidFill>
                         <a:srgbClr val="E8ECF1"/>
@@ -2207,7 +2413,7 @@
                     <a:bodyPr/>
                     <a:lstStyle/>
                     <a:p>
-                      <a:pPr marL="0" indent="0">
+                      <a:pPr indent="0" marL="0">
                         <a:buNone/>
                       </a:pPr>
                       <a:r>
@@ -2228,7 +2434,7 @@
                       </a:endParaRPr>
                     </a:p>
                   </a:txBody>
-                  <a:tcPr>
+                  <a:tcPr marL="91440" marR="91440" marT="45720" marB="45720">
                     <a:lnL w="6350" cap="flat" cmpd="sng" algn="ctr">
                       <a:solidFill>
                         <a:srgbClr val="E8ECF1"/>
@@ -2275,7 +2481,7 @@
                     <a:bodyPr/>
                     <a:lstStyle/>
                     <a:p>
-                      <a:pPr marL="0" indent="0">
+                      <a:pPr indent="0" marL="0">
                         <a:buNone/>
                       </a:pPr>
                       <a:r>
@@ -2296,7 +2502,7 @@
                       </a:endParaRPr>
                     </a:p>
                   </a:txBody>
-                  <a:tcPr>
+                  <a:tcPr marL="91440" marR="91440" marT="45720" marB="45720">
                     <a:lnL w="6350" cap="flat" cmpd="sng" algn="ctr">
                       <a:solidFill>
                         <a:srgbClr val="E8ECF1"/>
@@ -2343,7 +2549,7 @@
                     <a:bodyPr/>
                     <a:lstStyle/>
                     <a:p>
-                      <a:pPr marL="0" indent="0">
+                      <a:pPr indent="0" marL="0">
                         <a:buNone/>
                       </a:pPr>
                       <a:r>
@@ -2364,7 +2570,7 @@
                       </a:endParaRPr>
                     </a:p>
                   </a:txBody>
-                  <a:tcPr>
+                  <a:tcPr marL="91440" marR="91440" marT="45720" marB="45720">
                     <a:lnL w="6350" cap="flat" cmpd="sng" algn="ctr">
                       <a:solidFill>
                         <a:srgbClr val="E8ECF1"/>
@@ -2406,11 +2612,6 @@
                     </a:solidFill>
                   </a:tcPr>
                 </a:tc>
-                <a:extLst>
-                  <a:ext uri="{0D108BD9-81ED-4DB2-BD59-A6C34878D82A}">
-                    <a16:rowId xmlns:a16="http://schemas.microsoft.com/office/drawing/2014/main" val="10000"/>
-                  </a:ext>
-                </a:extLst>
               </a:tr>
               <a:tr h="228600">
                 <a:tc>
@@ -2418,7 +2619,7 @@
                     <a:bodyPr/>
                     <a:lstStyle/>
                     <a:p>
-                      <a:pPr marL="0" indent="0">
+                      <a:pPr indent="0" marL="0">
                         <a:buNone/>
                       </a:pPr>
                       <a:r>
@@ -2439,7 +2640,7 @@
                       </a:endParaRPr>
                     </a:p>
                   </a:txBody>
-                  <a:tcPr>
+                  <a:tcPr marL="91440" marR="91440" marT="45720" marB="45720">
                     <a:lnL w="6350" cap="flat" cmpd="sng" algn="ctr">
                       <a:solidFill>
                         <a:srgbClr val="E8ECF1"/>
@@ -2483,7 +2684,7 @@
                     <a:bodyPr/>
                     <a:lstStyle/>
                     <a:p>
-                      <a:pPr marL="0" indent="0">
+                      <a:pPr indent="0" marL="0">
                         <a:buNone/>
                       </a:pPr>
                       <a:r>
@@ -2504,7 +2705,7 @@
                       </a:endParaRPr>
                     </a:p>
                   </a:txBody>
-                  <a:tcPr>
+                  <a:tcPr marL="91440" marR="91440" marT="45720" marB="45720">
                     <a:lnL w="6350" cap="flat" cmpd="sng" algn="ctr">
                       <a:solidFill>
                         <a:srgbClr val="E8ECF1"/>
@@ -2548,7 +2749,7 @@
                     <a:bodyPr/>
                     <a:lstStyle/>
                     <a:p>
-                      <a:pPr marL="0" indent="0">
+                      <a:pPr indent="0" marL="0">
                         <a:buNone/>
                       </a:pPr>
                       <a:r>
@@ -2569,7 +2770,7 @@
                       </a:endParaRPr>
                     </a:p>
                   </a:txBody>
-                  <a:tcPr>
+                  <a:tcPr marL="91440" marR="91440" marT="45720" marB="45720">
                     <a:lnL w="6350" cap="flat" cmpd="sng" algn="ctr">
                       <a:solidFill>
                         <a:srgbClr val="E8ECF1"/>
@@ -2613,7 +2814,7 @@
                     <a:bodyPr/>
                     <a:lstStyle/>
                     <a:p>
-                      <a:pPr marL="0" indent="0">
+                      <a:pPr indent="0" marL="0">
                         <a:buNone/>
                       </a:pPr>
                       <a:r>
@@ -2634,7 +2835,7 @@
                       </a:endParaRPr>
                     </a:p>
                   </a:txBody>
-                  <a:tcPr>
+                  <a:tcPr marL="91440" marR="91440" marT="45720" marB="45720">
                     <a:lnL w="6350" cap="flat" cmpd="sng" algn="ctr">
                       <a:solidFill>
                         <a:srgbClr val="E8ECF1"/>
@@ -2673,11 +2874,6 @@
                     </a:lnB>
                   </a:tcPr>
                 </a:tc>
-                <a:extLst>
-                  <a:ext uri="{0D108BD9-81ED-4DB2-BD59-A6C34878D82A}">
-                    <a16:rowId xmlns:a16="http://schemas.microsoft.com/office/drawing/2014/main" val="10001"/>
-                  </a:ext>
-                </a:extLst>
               </a:tr>
               <a:tr h="228600">
                 <a:tc>
@@ -2685,7 +2881,7 @@
                     <a:bodyPr/>
                     <a:lstStyle/>
                     <a:p>
-                      <a:pPr marL="0" indent="0">
+                      <a:pPr indent="0" marL="0">
                         <a:buNone/>
                       </a:pPr>
                       <a:r>
@@ -2706,7 +2902,7 @@
                       </a:endParaRPr>
                     </a:p>
                   </a:txBody>
-                  <a:tcPr>
+                  <a:tcPr marL="91440" marR="91440" marT="45720" marB="45720">
                     <a:lnL w="6350" cap="flat" cmpd="sng" algn="ctr">
                       <a:solidFill>
                         <a:srgbClr val="E8ECF1"/>
@@ -2750,7 +2946,7 @@
                     <a:bodyPr/>
                     <a:lstStyle/>
                     <a:p>
-                      <a:pPr marL="0" indent="0">
+                      <a:pPr indent="0" marL="0">
                         <a:buNone/>
                       </a:pPr>
                       <a:r>
@@ -2771,7 +2967,7 @@
                       </a:endParaRPr>
                     </a:p>
                   </a:txBody>
-                  <a:tcPr>
+                  <a:tcPr marL="91440" marR="91440" marT="45720" marB="45720">
                     <a:lnL w="6350" cap="flat" cmpd="sng" algn="ctr">
                       <a:solidFill>
                         <a:srgbClr val="E8ECF1"/>
@@ -2815,7 +3011,7 @@
                     <a:bodyPr/>
                     <a:lstStyle/>
                     <a:p>
-                      <a:pPr marL="0" indent="0">
+                      <a:pPr indent="0" marL="0">
                         <a:buNone/>
                       </a:pPr>
                       <a:r>
@@ -2836,7 +3032,7 @@
                       </a:endParaRPr>
                     </a:p>
                   </a:txBody>
-                  <a:tcPr>
+                  <a:tcPr marL="91440" marR="91440" marT="45720" marB="45720">
                     <a:lnL w="6350" cap="flat" cmpd="sng" algn="ctr">
                       <a:solidFill>
                         <a:srgbClr val="E8ECF1"/>
@@ -2880,7 +3076,7 @@
                     <a:bodyPr/>
                     <a:lstStyle/>
                     <a:p>
-                      <a:pPr marL="0" indent="0">
+                      <a:pPr indent="0" marL="0">
                         <a:buNone/>
                       </a:pPr>
                       <a:r>
@@ -2901,7 +3097,7 @@
                       </a:endParaRPr>
                     </a:p>
                   </a:txBody>
-                  <a:tcPr>
+                  <a:tcPr marL="91440" marR="91440" marT="45720" marB="45720">
                     <a:lnL w="6350" cap="flat" cmpd="sng" algn="ctr">
                       <a:solidFill>
                         <a:srgbClr val="E8ECF1"/>
@@ -2940,11 +3136,6 @@
                     </a:lnB>
                   </a:tcPr>
                 </a:tc>
-                <a:extLst>
-                  <a:ext uri="{0D108BD9-81ED-4DB2-BD59-A6C34878D82A}">
-                    <a16:rowId xmlns:a16="http://schemas.microsoft.com/office/drawing/2014/main" val="10002"/>
-                  </a:ext>
-                </a:extLst>
               </a:tr>
               <a:tr h="228600">
                 <a:tc>
@@ -2952,7 +3143,7 @@
                     <a:bodyPr/>
                     <a:lstStyle/>
                     <a:p>
-                      <a:pPr marL="0" indent="0">
+                      <a:pPr indent="0" marL="0">
                         <a:buNone/>
                       </a:pPr>
                       <a:r>
@@ -2973,7 +3164,7 @@
                       </a:endParaRPr>
                     </a:p>
                   </a:txBody>
-                  <a:tcPr>
+                  <a:tcPr marL="91440" marR="91440" marT="45720" marB="45720">
                     <a:lnL w="6350" cap="flat" cmpd="sng" algn="ctr">
                       <a:solidFill>
                         <a:srgbClr val="E8ECF1"/>
@@ -3017,7 +3208,7 @@
                     <a:bodyPr/>
                     <a:lstStyle/>
                     <a:p>
-                      <a:pPr marL="0" indent="0">
+                      <a:pPr indent="0" marL="0">
                         <a:buNone/>
                       </a:pPr>
                       <a:r>
@@ -3038,7 +3229,7 @@
                       </a:endParaRPr>
                     </a:p>
                   </a:txBody>
-                  <a:tcPr>
+                  <a:tcPr marL="91440" marR="91440" marT="45720" marB="45720">
                     <a:lnL w="6350" cap="flat" cmpd="sng" algn="ctr">
                       <a:solidFill>
                         <a:srgbClr val="E8ECF1"/>
@@ -3082,7 +3273,7 @@
                     <a:bodyPr/>
                     <a:lstStyle/>
                     <a:p>
-                      <a:pPr marL="0" indent="0">
+                      <a:pPr indent="0" marL="0">
                         <a:buNone/>
                       </a:pPr>
                       <a:r>
@@ -3103,7 +3294,7 @@
                       </a:endParaRPr>
                     </a:p>
                   </a:txBody>
-                  <a:tcPr>
+                  <a:tcPr marL="91440" marR="91440" marT="45720" marB="45720">
                     <a:lnL w="6350" cap="flat" cmpd="sng" algn="ctr">
                       <a:solidFill>
                         <a:srgbClr val="E8ECF1"/>
@@ -3147,7 +3338,7 @@
                     <a:bodyPr/>
                     <a:lstStyle/>
                     <a:p>
-                      <a:pPr marL="0" indent="0">
+                      <a:pPr indent="0" marL="0">
                         <a:buNone/>
                       </a:pPr>
                       <a:r>
@@ -3168,7 +3359,7 @@
                       </a:endParaRPr>
                     </a:p>
                   </a:txBody>
-                  <a:tcPr>
+                  <a:tcPr marL="91440" marR="91440" marT="45720" marB="45720">
                     <a:lnL w="6350" cap="flat" cmpd="sng" algn="ctr">
                       <a:solidFill>
                         <a:srgbClr val="E8ECF1"/>
@@ -3207,11 +3398,6 @@
                     </a:lnB>
                   </a:tcPr>
                 </a:tc>
-                <a:extLst>
-                  <a:ext uri="{0D108BD9-81ED-4DB2-BD59-A6C34878D82A}">
-                    <a16:rowId xmlns:a16="http://schemas.microsoft.com/office/drawing/2014/main" val="10003"/>
-                  </a:ext>
-                </a:extLst>
               </a:tr>
               <a:tr h="228600">
                 <a:tc>
@@ -3219,7 +3405,7 @@
                     <a:bodyPr/>
                     <a:lstStyle/>
                     <a:p>
-                      <a:pPr marL="0" indent="0">
+                      <a:pPr indent="0" marL="0">
                         <a:buNone/>
                       </a:pPr>
                       <a:r>
@@ -3240,7 +3426,7 @@
                       </a:endParaRPr>
                     </a:p>
                   </a:txBody>
-                  <a:tcPr>
+                  <a:tcPr marL="91440" marR="91440" marT="45720" marB="45720">
                     <a:lnL w="6350" cap="flat" cmpd="sng" algn="ctr">
                       <a:solidFill>
                         <a:srgbClr val="E8ECF1"/>
@@ -3284,7 +3470,7 @@
                     <a:bodyPr/>
                     <a:lstStyle/>
                     <a:p>
-                      <a:pPr marL="0" indent="0">
+                      <a:pPr indent="0" marL="0">
                         <a:buNone/>
                       </a:pPr>
                       <a:r>
@@ -3305,7 +3491,7 @@
                       </a:endParaRPr>
                     </a:p>
                   </a:txBody>
-                  <a:tcPr>
+                  <a:tcPr marL="91440" marR="91440" marT="45720" marB="45720">
                     <a:lnL w="6350" cap="flat" cmpd="sng" algn="ctr">
                       <a:solidFill>
                         <a:srgbClr val="E8ECF1"/>
@@ -3349,7 +3535,7 @@
                     <a:bodyPr/>
                     <a:lstStyle/>
                     <a:p>
-                      <a:pPr marL="0" indent="0">
+                      <a:pPr indent="0" marL="0">
                         <a:buNone/>
                       </a:pPr>
                       <a:r>
@@ -3370,7 +3556,7 @@
                       </a:endParaRPr>
                     </a:p>
                   </a:txBody>
-                  <a:tcPr>
+                  <a:tcPr marL="91440" marR="91440" marT="45720" marB="45720">
                     <a:lnL w="6350" cap="flat" cmpd="sng" algn="ctr">
                       <a:solidFill>
                         <a:srgbClr val="E8ECF1"/>
@@ -3414,7 +3600,7 @@
                     <a:bodyPr/>
                     <a:lstStyle/>
                     <a:p>
-                      <a:pPr marL="0" indent="0">
+                      <a:pPr indent="0" marL="0">
                         <a:buNone/>
                       </a:pPr>
                       <a:r>
@@ -3435,7 +3621,7 @@
                       </a:endParaRPr>
                     </a:p>
                   </a:txBody>
-                  <a:tcPr>
+                  <a:tcPr marL="91440" marR="91440" marT="45720" marB="45720">
                     <a:lnL w="6350" cap="flat" cmpd="sng" algn="ctr">
                       <a:solidFill>
                         <a:srgbClr val="E8ECF1"/>
@@ -3474,11 +3660,6 @@
                     </a:lnB>
                   </a:tcPr>
                 </a:tc>
-                <a:extLst>
-                  <a:ext uri="{0D108BD9-81ED-4DB2-BD59-A6C34878D82A}">
-                    <a16:rowId xmlns:a16="http://schemas.microsoft.com/office/drawing/2014/main" val="10004"/>
-                  </a:ext>
-                </a:extLst>
               </a:tr>
             </a:tbl>
           </a:graphicData>
@@ -3505,7 +3686,7 @@
           <a:bodyPr wrap="square" lIns="0" tIns="0" rIns="0" bIns="0" rtlCol="0" anchor="ctr"/>
           <a:lstStyle/>
           <a:p>
-            <a:pPr marL="0" indent="0">
+            <a:pPr indent="0" marL="0">
               <a:buNone/>
             </a:pPr>
             <a:r>
@@ -3539,34 +3720,16 @@
         </p:nvGraphicFramePr>
         <p:xfrm>
           <a:off x="4754880" y="1115568"/>
-          <a:ext cx="3566160" cy="964692"/>
+          <a:ext cx="3931920" cy="777240"/>
         </p:xfrm>
         <a:graphic>
           <a:graphicData uri="http://schemas.openxmlformats.org/drawingml/2006/table">
             <a:tbl>
               <a:tblPr/>
               <a:tblGrid>
-                <a:gridCol w="1188720">
-                  <a:extLst>
-                    <a:ext uri="{9D8B030D-6E8A-4147-A177-3AD203B41FA5}">
-                      <a16:colId xmlns:a16="http://schemas.microsoft.com/office/drawing/2014/main" val="20000"/>
-                    </a:ext>
-                  </a:extLst>
-                </a:gridCol>
-                <a:gridCol w="1188720">
-                  <a:extLst>
-                    <a:ext uri="{9D8B030D-6E8A-4147-A177-3AD203B41FA5}">
-                      <a16:colId xmlns:a16="http://schemas.microsoft.com/office/drawing/2014/main" val="20001"/>
-                    </a:ext>
-                  </a:extLst>
-                </a:gridCol>
-                <a:gridCol w="1188720">
-                  <a:extLst>
-                    <a:ext uri="{9D8B030D-6E8A-4147-A177-3AD203B41FA5}">
-                      <a16:colId xmlns:a16="http://schemas.microsoft.com/office/drawing/2014/main" val="20002"/>
-                    </a:ext>
-                  </a:extLst>
-                </a:gridCol>
+                <a:gridCol w="1188720"/>
+                <a:gridCol w="1188720"/>
+                <a:gridCol w="1188720"/>
               </a:tblGrid>
               <a:tr h="256032">
                 <a:tc>
@@ -3574,7 +3737,7 @@
                     <a:bodyPr/>
                     <a:lstStyle/>
                     <a:p>
-                      <a:pPr marL="0" indent="0">
+                      <a:pPr indent="0" marL="0">
                         <a:buNone/>
                       </a:pPr>
                       <a:r>
@@ -3595,7 +3758,7 @@
                       </a:endParaRPr>
                     </a:p>
                   </a:txBody>
-                  <a:tcPr>
+                  <a:tcPr marL="91440" marR="91440" marT="45720" marB="45720">
                     <a:lnL w="6350" cap="flat" cmpd="sng" algn="ctr">
                       <a:solidFill>
                         <a:srgbClr val="E8ECF1"/>
@@ -3642,7 +3805,7 @@
                     <a:bodyPr/>
                     <a:lstStyle/>
                     <a:p>
-                      <a:pPr marL="0" indent="0">
+                      <a:pPr indent="0" marL="0">
                         <a:buNone/>
                       </a:pPr>
                       <a:r>
@@ -3663,7 +3826,7 @@
                       </a:endParaRPr>
                     </a:p>
                   </a:txBody>
-                  <a:tcPr>
+                  <a:tcPr marL="91440" marR="91440" marT="45720" marB="45720">
                     <a:lnL w="6350" cap="flat" cmpd="sng" algn="ctr">
                       <a:solidFill>
                         <a:srgbClr val="E8ECF1"/>
@@ -3710,7 +3873,7 @@
                     <a:bodyPr/>
                     <a:lstStyle/>
                     <a:p>
-                      <a:pPr marL="0" indent="0">
+                      <a:pPr indent="0" marL="0">
                         <a:buNone/>
                       </a:pPr>
                       <a:r>
@@ -3731,7 +3894,7 @@
                       </a:endParaRPr>
                     </a:p>
                   </a:txBody>
-                  <a:tcPr>
+                  <a:tcPr marL="91440" marR="91440" marT="45720" marB="45720">
                     <a:lnL w="6350" cap="flat" cmpd="sng" algn="ctr">
                       <a:solidFill>
                         <a:srgbClr val="E8ECF1"/>
@@ -3773,11 +3936,6 @@
                     </a:solidFill>
                   </a:tcPr>
                 </a:tc>
-                <a:extLst>
-                  <a:ext uri="{0D108BD9-81ED-4DB2-BD59-A6C34878D82A}">
-                    <a16:rowId xmlns:a16="http://schemas.microsoft.com/office/drawing/2014/main" val="10000"/>
-                  </a:ext>
-                </a:extLst>
               </a:tr>
               <a:tr h="228600">
                 <a:tc>
@@ -3785,7 +3943,7 @@
                     <a:bodyPr/>
                     <a:lstStyle/>
                     <a:p>
-                      <a:pPr marL="0" indent="0">
+                      <a:pPr indent="0" marL="0">
                         <a:buNone/>
                       </a:pPr>
                       <a:r>
@@ -3806,7 +3964,7 @@
                       </a:endParaRPr>
                     </a:p>
                   </a:txBody>
-                  <a:tcPr>
+                  <a:tcPr marL="91440" marR="91440" marT="45720" marB="45720">
                     <a:lnL w="6350" cap="flat" cmpd="sng" algn="ctr">
                       <a:solidFill>
                         <a:srgbClr val="E8ECF1"/>
@@ -3850,7 +4008,7 @@
                     <a:bodyPr/>
                     <a:lstStyle/>
                     <a:p>
-                      <a:pPr marL="0" indent="0">
+                      <a:pPr indent="0" marL="0">
                         <a:buNone/>
                       </a:pPr>
                       <a:r>
@@ -3871,7 +4029,7 @@
                       </a:endParaRPr>
                     </a:p>
                   </a:txBody>
-                  <a:tcPr>
+                  <a:tcPr marL="91440" marR="91440" marT="45720" marB="45720">
                     <a:lnL w="6350" cap="flat" cmpd="sng" algn="ctr">
                       <a:solidFill>
                         <a:srgbClr val="E8ECF1"/>
@@ -3915,7 +4073,7 @@
                     <a:bodyPr/>
                     <a:lstStyle/>
                     <a:p>
-                      <a:pPr marL="0" indent="0">
+                      <a:pPr indent="0" marL="0">
                         <a:buNone/>
                       </a:pPr>
                       <a:r>
@@ -3936,7 +4094,7 @@
                       </a:endParaRPr>
                     </a:p>
                   </a:txBody>
-                  <a:tcPr>
+                  <a:tcPr marL="91440" marR="91440" marT="45720" marB="45720">
                     <a:lnL w="6350" cap="flat" cmpd="sng" algn="ctr">
                       <a:solidFill>
                         <a:srgbClr val="E8ECF1"/>
@@ -3975,11 +4133,6 @@
                     </a:lnB>
                   </a:tcPr>
                 </a:tc>
-                <a:extLst>
-                  <a:ext uri="{0D108BD9-81ED-4DB2-BD59-A6C34878D82A}">
-                    <a16:rowId xmlns:a16="http://schemas.microsoft.com/office/drawing/2014/main" val="10001"/>
-                  </a:ext>
-                </a:extLst>
               </a:tr>
               <a:tr h="228600">
                 <a:tc>
@@ -3987,7 +4140,7 @@
                     <a:bodyPr/>
                     <a:lstStyle/>
                     <a:p>
-                      <a:pPr marL="0" indent="0">
+                      <a:pPr indent="0" marL="0">
                         <a:buNone/>
                       </a:pPr>
                       <a:r>
@@ -4008,7 +4161,7 @@
                       </a:endParaRPr>
                     </a:p>
                   </a:txBody>
-                  <a:tcPr>
+                  <a:tcPr marL="91440" marR="91440" marT="45720" marB="45720">
                     <a:lnL w="6350" cap="flat" cmpd="sng" algn="ctr">
                       <a:solidFill>
                         <a:srgbClr val="E8ECF1"/>
@@ -4052,7 +4205,7 @@
                     <a:bodyPr/>
                     <a:lstStyle/>
                     <a:p>
-                      <a:pPr marL="0" indent="0">
+                      <a:pPr indent="0" marL="0">
                         <a:buNone/>
                       </a:pPr>
                       <a:r>
@@ -4073,7 +4226,7 @@
                       </a:endParaRPr>
                     </a:p>
                   </a:txBody>
-                  <a:tcPr>
+                  <a:tcPr marL="91440" marR="91440" marT="45720" marB="45720">
                     <a:lnL w="6350" cap="flat" cmpd="sng" algn="ctr">
                       <a:solidFill>
                         <a:srgbClr val="E8ECF1"/>
@@ -4117,7 +4270,7 @@
                     <a:bodyPr/>
                     <a:lstStyle/>
                     <a:p>
-                      <a:pPr marL="0" indent="0">
+                      <a:pPr indent="0" marL="0">
                         <a:buNone/>
                       </a:pPr>
                       <a:r>
@@ -4138,7 +4291,7 @@
                       </a:endParaRPr>
                     </a:p>
                   </a:txBody>
-                  <a:tcPr>
+                  <a:tcPr marL="91440" marR="91440" marT="45720" marB="45720">
                     <a:lnL w="6350" cap="flat" cmpd="sng" algn="ctr">
                       <a:solidFill>
                         <a:srgbClr val="E8ECF1"/>
@@ -4177,11 +4330,6 @@
                     </a:lnB>
                   </a:tcPr>
                 </a:tc>
-                <a:extLst>
-                  <a:ext uri="{0D108BD9-81ED-4DB2-BD59-A6C34878D82A}">
-                    <a16:rowId xmlns:a16="http://schemas.microsoft.com/office/drawing/2014/main" val="10002"/>
-                  </a:ext>
-                </a:extLst>
               </a:tr>
               <a:tr h="228600">
                 <a:tc>
@@ -4189,7 +4337,7 @@
                     <a:bodyPr/>
                     <a:lstStyle/>
                     <a:p>
-                      <a:pPr marL="0" indent="0">
+                      <a:pPr indent="0" marL="0">
                         <a:buNone/>
                       </a:pPr>
                       <a:r>
@@ -4210,7 +4358,7 @@
                       </a:endParaRPr>
                     </a:p>
                   </a:txBody>
-                  <a:tcPr>
+                  <a:tcPr marL="91440" marR="91440" marT="45720" marB="45720">
                     <a:lnL w="6350" cap="flat" cmpd="sng" algn="ctr">
                       <a:solidFill>
                         <a:srgbClr val="E8ECF1"/>
@@ -4254,7 +4402,7 @@
                     <a:bodyPr/>
                     <a:lstStyle/>
                     <a:p>
-                      <a:pPr marL="0" indent="0">
+                      <a:pPr indent="0" marL="0">
                         <a:buNone/>
                       </a:pPr>
                       <a:r>
@@ -4275,7 +4423,7 @@
                       </a:endParaRPr>
                     </a:p>
                   </a:txBody>
-                  <a:tcPr>
+                  <a:tcPr marL="91440" marR="91440" marT="45720" marB="45720">
                     <a:lnL w="6350" cap="flat" cmpd="sng" algn="ctr">
                       <a:solidFill>
                         <a:srgbClr val="E8ECF1"/>
@@ -4319,7 +4467,7 @@
                     <a:bodyPr/>
                     <a:lstStyle/>
                     <a:p>
-                      <a:pPr marL="0" indent="0">
+                      <a:pPr indent="0" marL="0">
                         <a:buNone/>
                       </a:pPr>
                       <a:r>
@@ -4340,7 +4488,7 @@
                       </a:endParaRPr>
                     </a:p>
                   </a:txBody>
-                  <a:tcPr>
+                  <a:tcPr marL="91440" marR="91440" marT="45720" marB="45720">
                     <a:lnL w="6350" cap="flat" cmpd="sng" algn="ctr">
                       <a:solidFill>
                         <a:srgbClr val="E8ECF1"/>
@@ -4379,11 +4527,6 @@
                     </a:lnB>
                   </a:tcPr>
                 </a:tc>
-                <a:extLst>
-                  <a:ext uri="{0D108BD9-81ED-4DB2-BD59-A6C34878D82A}">
-                    <a16:rowId xmlns:a16="http://schemas.microsoft.com/office/drawing/2014/main" val="10003"/>
-                  </a:ext>
-                </a:extLst>
               </a:tr>
             </a:tbl>
           </a:graphicData>
@@ -4410,7 +4553,7 @@
           <a:bodyPr wrap="square" lIns="0" tIns="0" rIns="0" bIns="0" rtlCol="0" anchor="ctr"/>
           <a:lstStyle/>
           <a:p>
-            <a:pPr marL="0" indent="0">
+            <a:pPr indent="0" marL="0">
               <a:buNone/>
             </a:pPr>
             <a:r>
@@ -4444,48 +4587,18 @@
         </p:nvGraphicFramePr>
         <p:xfrm>
           <a:off x="457200" y="2788920"/>
-          <a:ext cx="7178040" cy="987552"/>
+          <a:ext cx="8229600" cy="868680"/>
         </p:xfrm>
         <a:graphic>
           <a:graphicData uri="http://schemas.openxmlformats.org/drawingml/2006/table">
             <a:tbl>
               <a:tblPr/>
               <a:tblGrid>
-                <a:gridCol w="1371600">
-                  <a:extLst>
-                    <a:ext uri="{9D8B030D-6E8A-4147-A177-3AD203B41FA5}">
-                      <a16:colId xmlns:a16="http://schemas.microsoft.com/office/drawing/2014/main" val="20000"/>
-                    </a:ext>
-                  </a:extLst>
-                </a:gridCol>
-                <a:gridCol w="1371600">
-                  <a:extLst>
-                    <a:ext uri="{9D8B030D-6E8A-4147-A177-3AD203B41FA5}">
-                      <a16:colId xmlns:a16="http://schemas.microsoft.com/office/drawing/2014/main" val="20001"/>
-                    </a:ext>
-                  </a:extLst>
-                </a:gridCol>
-                <a:gridCol w="1371600">
-                  <a:extLst>
-                    <a:ext uri="{9D8B030D-6E8A-4147-A177-3AD203B41FA5}">
-                      <a16:colId xmlns:a16="http://schemas.microsoft.com/office/drawing/2014/main" val="20002"/>
-                    </a:ext>
-                  </a:extLst>
-                </a:gridCol>
-                <a:gridCol w="1371600">
-                  <a:extLst>
-                    <a:ext uri="{9D8B030D-6E8A-4147-A177-3AD203B41FA5}">
-                      <a16:colId xmlns:a16="http://schemas.microsoft.com/office/drawing/2014/main" val="20003"/>
-                    </a:ext>
-                  </a:extLst>
-                </a:gridCol>
-                <a:gridCol w="1691640">
-                  <a:extLst>
-                    <a:ext uri="{9D8B030D-6E8A-4147-A177-3AD203B41FA5}">
-                      <a16:colId xmlns:a16="http://schemas.microsoft.com/office/drawing/2014/main" val="20004"/>
-                    </a:ext>
-                  </a:extLst>
-                </a:gridCol>
+                <a:gridCol w="1371600"/>
+                <a:gridCol w="1371600"/>
+                <a:gridCol w="1371600"/>
+                <a:gridCol w="1371600"/>
+                <a:gridCol w="1691640"/>
               </a:tblGrid>
               <a:tr h="256032">
                 <a:tc>
@@ -4493,7 +4606,7 @@
                     <a:bodyPr/>
                     <a:lstStyle/>
                     <a:p>
-                      <a:pPr marL="0" indent="0">
+                      <a:pPr indent="0" marL="0">
                         <a:buNone/>
                       </a:pPr>
                       <a:r>
@@ -4514,7 +4627,7 @@
                       </a:endParaRPr>
                     </a:p>
                   </a:txBody>
-                  <a:tcPr>
+                  <a:tcPr marL="91440" marR="91440" marT="45720" marB="45720">
                     <a:lnL w="6350" cap="flat" cmpd="sng" algn="ctr">
                       <a:solidFill>
                         <a:srgbClr val="E8ECF1"/>
@@ -4561,7 +4674,7 @@
                     <a:bodyPr/>
                     <a:lstStyle/>
                     <a:p>
-                      <a:pPr marL="0" indent="0">
+                      <a:pPr indent="0" marL="0">
                         <a:buNone/>
                       </a:pPr>
                       <a:r>
@@ -4582,7 +4695,7 @@
                       </a:endParaRPr>
                     </a:p>
                   </a:txBody>
-                  <a:tcPr>
+                  <a:tcPr marL="91440" marR="91440" marT="45720" marB="45720">
                     <a:lnL w="6350" cap="flat" cmpd="sng" algn="ctr">
                       <a:solidFill>
                         <a:srgbClr val="E8ECF1"/>
@@ -4629,7 +4742,7 @@
                     <a:bodyPr/>
                     <a:lstStyle/>
                     <a:p>
-                      <a:pPr marL="0" indent="0">
+                      <a:pPr indent="0" marL="0">
                         <a:buNone/>
                       </a:pPr>
                       <a:r>
@@ -4650,7 +4763,7 @@
                       </a:endParaRPr>
                     </a:p>
                   </a:txBody>
-                  <a:tcPr>
+                  <a:tcPr marL="91440" marR="91440" marT="45720" marB="45720">
                     <a:lnL w="6350" cap="flat" cmpd="sng" algn="ctr">
                       <a:solidFill>
                         <a:srgbClr val="E8ECF1"/>
@@ -4697,7 +4810,7 @@
                     <a:bodyPr/>
                     <a:lstStyle/>
                     <a:p>
-                      <a:pPr marL="0" indent="0">
+                      <a:pPr indent="0" marL="0">
                         <a:buNone/>
                       </a:pPr>
                       <a:r>
@@ -4718,7 +4831,7 @@
                       </a:endParaRPr>
                     </a:p>
                   </a:txBody>
-                  <a:tcPr>
+                  <a:tcPr marL="91440" marR="91440" marT="45720" marB="45720">
                     <a:lnL w="6350" cap="flat" cmpd="sng" algn="ctr">
                       <a:solidFill>
                         <a:srgbClr val="E8ECF1"/>
@@ -4765,7 +4878,7 @@
                     <a:bodyPr/>
                     <a:lstStyle/>
                     <a:p>
-                      <a:pPr marL="0" indent="0">
+                      <a:pPr indent="0" marL="0">
                         <a:buNone/>
                       </a:pPr>
                       <a:r>
@@ -4786,7 +4899,7 @@
                       </a:endParaRPr>
                     </a:p>
                   </a:txBody>
-                  <a:tcPr>
+                  <a:tcPr marL="91440" marR="91440" marT="45720" marB="45720">
                     <a:lnL w="6350" cap="flat" cmpd="sng" algn="ctr">
                       <a:solidFill>
                         <a:srgbClr val="E8ECF1"/>
@@ -4828,11 +4941,6 @@
                     </a:solidFill>
                   </a:tcPr>
                 </a:tc>
-                <a:extLst>
-                  <a:ext uri="{0D108BD9-81ED-4DB2-BD59-A6C34878D82A}">
-                    <a16:rowId xmlns:a16="http://schemas.microsoft.com/office/drawing/2014/main" val="10000"/>
-                  </a:ext>
-                </a:extLst>
               </a:tr>
               <a:tr h="228600">
                 <a:tc>
@@ -4840,7 +4948,7 @@
                     <a:bodyPr/>
                     <a:lstStyle/>
                     <a:p>
-                      <a:pPr marL="0" indent="0">
+                      <a:pPr indent="0" marL="0">
                         <a:buNone/>
                       </a:pPr>
                       <a:r>
@@ -4861,7 +4969,7 @@
                       </a:endParaRPr>
                     </a:p>
                   </a:txBody>
-                  <a:tcPr>
+                  <a:tcPr marL="91440" marR="91440" marT="45720" marB="45720">
                     <a:lnL w="6350" cap="flat" cmpd="sng" algn="ctr">
                       <a:solidFill>
                         <a:srgbClr val="E8ECF1"/>
@@ -4905,7 +5013,7 @@
                     <a:bodyPr/>
                     <a:lstStyle/>
                     <a:p>
-                      <a:pPr marL="0" indent="0">
+                      <a:pPr indent="0" marL="0">
                         <a:buNone/>
                       </a:pPr>
                       <a:r>
@@ -4926,7 +5034,7 @@
                       </a:endParaRPr>
                     </a:p>
                   </a:txBody>
-                  <a:tcPr>
+                  <a:tcPr marL="91440" marR="91440" marT="45720" marB="45720">
                     <a:lnL w="6350" cap="flat" cmpd="sng" algn="ctr">
                       <a:solidFill>
                         <a:srgbClr val="E8ECF1"/>
@@ -4970,7 +5078,7 @@
                     <a:bodyPr/>
                     <a:lstStyle/>
                     <a:p>
-                      <a:pPr marL="0" indent="0">
+                      <a:pPr indent="0" marL="0">
                         <a:buNone/>
                       </a:pPr>
                       <a:r>
@@ -4991,7 +5099,7 @@
                       </a:endParaRPr>
                     </a:p>
                   </a:txBody>
-                  <a:tcPr>
+                  <a:tcPr marL="91440" marR="91440" marT="45720" marB="45720">
                     <a:lnL w="6350" cap="flat" cmpd="sng" algn="ctr">
                       <a:solidFill>
                         <a:srgbClr val="E8ECF1"/>
@@ -5035,7 +5143,7 @@
                     <a:bodyPr/>
                     <a:lstStyle/>
                     <a:p>
-                      <a:pPr marL="0" indent="0">
+                      <a:pPr indent="0" marL="0">
                         <a:buNone/>
                       </a:pPr>
                       <a:r>
@@ -5056,7 +5164,7 @@
                       </a:endParaRPr>
                     </a:p>
                   </a:txBody>
-                  <a:tcPr>
+                  <a:tcPr marL="91440" marR="91440" marT="45720" marB="45720">
                     <a:lnL w="6350" cap="flat" cmpd="sng" algn="ctr">
                       <a:solidFill>
                         <a:srgbClr val="E8ECF1"/>
@@ -5100,7 +5208,7 @@
                     <a:bodyPr/>
                     <a:lstStyle/>
                     <a:p>
-                      <a:pPr marL="0" indent="0">
+                      <a:pPr indent="0" marL="0">
                         <a:buNone/>
                       </a:pPr>
                       <a:r>
@@ -5121,7 +5229,7 @@
                       </a:endParaRPr>
                     </a:p>
                   </a:txBody>
-                  <a:tcPr>
+                  <a:tcPr marL="91440" marR="91440" marT="45720" marB="45720">
                     <a:lnL w="6350" cap="flat" cmpd="sng" algn="ctr">
                       <a:solidFill>
                         <a:srgbClr val="E8ECF1"/>
@@ -5160,11 +5268,6 @@
                     </a:lnB>
                   </a:tcPr>
                 </a:tc>
-                <a:extLst>
-                  <a:ext uri="{0D108BD9-81ED-4DB2-BD59-A6C34878D82A}">
-                    <a16:rowId xmlns:a16="http://schemas.microsoft.com/office/drawing/2014/main" val="10001"/>
-                  </a:ext>
-                </a:extLst>
               </a:tr>
               <a:tr h="228600">
                 <a:tc>
@@ -5172,7 +5275,7 @@
                     <a:bodyPr/>
                     <a:lstStyle/>
                     <a:p>
-                      <a:pPr marL="0" indent="0">
+                      <a:pPr indent="0" marL="0">
                         <a:buNone/>
                       </a:pPr>
                       <a:r>
@@ -5193,7 +5296,7 @@
                       </a:endParaRPr>
                     </a:p>
                   </a:txBody>
-                  <a:tcPr>
+                  <a:tcPr marL="91440" marR="91440" marT="45720" marB="45720">
                     <a:lnL w="6350" cap="flat" cmpd="sng" algn="ctr">
                       <a:solidFill>
                         <a:srgbClr val="E8ECF1"/>
@@ -5237,7 +5340,7 @@
                     <a:bodyPr/>
                     <a:lstStyle/>
                     <a:p>
-                      <a:pPr marL="0" indent="0">
+                      <a:pPr indent="0" marL="0">
                         <a:buNone/>
                       </a:pPr>
                       <a:r>
@@ -5258,7 +5361,7 @@
                       </a:endParaRPr>
                     </a:p>
                   </a:txBody>
-                  <a:tcPr>
+                  <a:tcPr marL="91440" marR="91440" marT="45720" marB="45720">
                     <a:lnL w="6350" cap="flat" cmpd="sng" algn="ctr">
                       <a:solidFill>
                         <a:srgbClr val="E8ECF1"/>
@@ -5302,7 +5405,7 @@
                     <a:bodyPr/>
                     <a:lstStyle/>
                     <a:p>
-                      <a:pPr marL="0" indent="0">
+                      <a:pPr indent="0" marL="0">
                         <a:buNone/>
                       </a:pPr>
                       <a:r>
@@ -5323,7 +5426,7 @@
                       </a:endParaRPr>
                     </a:p>
                   </a:txBody>
-                  <a:tcPr>
+                  <a:tcPr marL="91440" marR="91440" marT="45720" marB="45720">
                     <a:lnL w="6350" cap="flat" cmpd="sng" algn="ctr">
                       <a:solidFill>
                         <a:srgbClr val="E8ECF1"/>
@@ -5367,7 +5470,7 @@
                     <a:bodyPr/>
                     <a:lstStyle/>
                     <a:p>
-                      <a:pPr marL="0" indent="0">
+                      <a:pPr indent="0" marL="0">
                         <a:buNone/>
                       </a:pPr>
                       <a:r>
@@ -5388,7 +5491,7 @@
                       </a:endParaRPr>
                     </a:p>
                   </a:txBody>
-                  <a:tcPr>
+                  <a:tcPr marL="91440" marR="91440" marT="45720" marB="45720">
                     <a:lnL w="6350" cap="flat" cmpd="sng" algn="ctr">
                       <a:solidFill>
                         <a:srgbClr val="E8ECF1"/>
@@ -5432,7 +5535,7 @@
                     <a:bodyPr/>
                     <a:lstStyle/>
                     <a:p>
-                      <a:pPr marL="0" indent="0">
+                      <a:pPr indent="0" marL="0">
                         <a:buNone/>
                       </a:pPr>
                       <a:r>
@@ -5453,7 +5556,7 @@
                       </a:endParaRPr>
                     </a:p>
                   </a:txBody>
-                  <a:tcPr>
+                  <a:tcPr marL="91440" marR="91440" marT="45720" marB="45720">
                     <a:lnL w="6350" cap="flat" cmpd="sng" algn="ctr">
                       <a:solidFill>
                         <a:srgbClr val="E8ECF1"/>
@@ -5492,11 +5595,6 @@
                     </a:lnB>
                   </a:tcPr>
                 </a:tc>
-                <a:extLst>
-                  <a:ext uri="{0D108BD9-81ED-4DB2-BD59-A6C34878D82A}">
-                    <a16:rowId xmlns:a16="http://schemas.microsoft.com/office/drawing/2014/main" val="10002"/>
-                  </a:ext>
-                </a:extLst>
               </a:tr>
               <a:tr h="228600">
                 <a:tc>
@@ -5504,7 +5602,7 @@
                     <a:bodyPr/>
                     <a:lstStyle/>
                     <a:p>
-                      <a:pPr marL="0" indent="0">
+                      <a:pPr indent="0" marL="0">
                         <a:buNone/>
                       </a:pPr>
                       <a:r>
@@ -5525,7 +5623,7 @@
                       </a:endParaRPr>
                     </a:p>
                   </a:txBody>
-                  <a:tcPr>
+                  <a:tcPr marL="91440" marR="91440" marT="45720" marB="45720">
                     <a:lnL w="6350" cap="flat" cmpd="sng" algn="ctr">
                       <a:solidFill>
                         <a:srgbClr val="E8ECF1"/>
@@ -5569,7 +5667,7 @@
                     <a:bodyPr/>
                     <a:lstStyle/>
                     <a:p>
-                      <a:pPr marL="0" indent="0">
+                      <a:pPr indent="0" marL="0">
                         <a:buNone/>
                       </a:pPr>
                       <a:r>
@@ -5590,7 +5688,7 @@
                       </a:endParaRPr>
                     </a:p>
                   </a:txBody>
-                  <a:tcPr>
+                  <a:tcPr marL="91440" marR="91440" marT="45720" marB="45720">
                     <a:lnL w="6350" cap="flat" cmpd="sng" algn="ctr">
                       <a:solidFill>
                         <a:srgbClr val="E8ECF1"/>
@@ -5634,7 +5732,7 @@
                     <a:bodyPr/>
                     <a:lstStyle/>
                     <a:p>
-                      <a:pPr marL="0" indent="0">
+                      <a:pPr indent="0" marL="0">
                         <a:buNone/>
                       </a:pPr>
                       <a:r>
@@ -5655,7 +5753,7 @@
                       </a:endParaRPr>
                     </a:p>
                   </a:txBody>
-                  <a:tcPr>
+                  <a:tcPr marL="91440" marR="91440" marT="45720" marB="45720">
                     <a:lnL w="6350" cap="flat" cmpd="sng" algn="ctr">
                       <a:solidFill>
                         <a:srgbClr val="E8ECF1"/>
@@ -5699,7 +5797,7 @@
                     <a:bodyPr/>
                     <a:lstStyle/>
                     <a:p>
-                      <a:pPr marL="0" indent="0">
+                      <a:pPr indent="0" marL="0">
                         <a:buNone/>
                       </a:pPr>
                       <a:r>
@@ -5720,7 +5818,7 @@
                       </a:endParaRPr>
                     </a:p>
                   </a:txBody>
-                  <a:tcPr>
+                  <a:tcPr marL="91440" marR="91440" marT="45720" marB="45720">
                     <a:lnL w="6350" cap="flat" cmpd="sng" algn="ctr">
                       <a:solidFill>
                         <a:srgbClr val="E8ECF1"/>
@@ -5764,7 +5862,7 @@
                     <a:bodyPr/>
                     <a:lstStyle/>
                     <a:p>
-                      <a:pPr marL="0" indent="0">
+                      <a:pPr indent="0" marL="0">
                         <a:buNone/>
                       </a:pPr>
                       <a:r>
@@ -5785,7 +5883,7 @@
                       </a:endParaRPr>
                     </a:p>
                   </a:txBody>
-                  <a:tcPr>
+                  <a:tcPr marL="91440" marR="91440" marT="45720" marB="45720">
                     <a:lnL w="6350" cap="flat" cmpd="sng" algn="ctr">
                       <a:solidFill>
                         <a:srgbClr val="E8ECF1"/>
@@ -5824,11 +5922,6 @@
                     </a:lnB>
                   </a:tcPr>
                 </a:tc>
-                <a:extLst>
-                  <a:ext uri="{0D108BD9-81ED-4DB2-BD59-A6C34878D82A}">
-                    <a16:rowId xmlns:a16="http://schemas.microsoft.com/office/drawing/2014/main" val="10003"/>
-                  </a:ext>
-                </a:extLst>
               </a:tr>
             </a:tbl>
           </a:graphicData>
@@ -5875,7 +5968,7 @@
           <a:bodyPr wrap="square" lIns="0" tIns="0" rIns="0" bIns="0" rtlCol="0" anchor="ctr"/>
           <a:lstStyle/>
           <a:p>
-            <a:pPr marL="0" indent="0">
+            <a:pPr indent="0" marL="0">
               <a:buNone/>
             </a:pPr>
             <a:r>
@@ -5889,6 +5982,9 @@
               </a:rPr>
               <a:t>样本外结论：</a:t>
             </a:r>
+            <a:pPr indent="0" marL="0">
+              <a:buNone/>
+            </a:pPr>
             <a:r>
               <a:rPr lang="en-US" sz="1050" dirty="0">
                 <a:solidFill>
@@ -5900,6 +5996,9 @@
               </a:rPr>
               <a:t>5只标的超额全部为正。Sharpe从1.6-1.8衰减至1.2-1.5，但仍显著高于基准(0.5-0.7)。</a:t>
             </a:r>
+            <a:pPr indent="0" marL="0">
+              <a:buNone/>
+            </a:pPr>
             <a:r>
               <a:rPr lang="en-US" sz="1050" b="1" dirty="0">
                 <a:solidFill>
@@ -5917,7 +6016,7 @@
       </p:sp>
       <p:sp>
         <p:nvSpPr>
-          <p:cNvPr id="4" name="Text 6"/>
+          <p:cNvPr id="11" name="Text 6"/>
           <p:cNvSpPr/>
           <p:nvPr/>
         </p:nvSpPr>
@@ -5936,7 +6035,7 @@
           <a:bodyPr wrap="square" lIns="0" tIns="0" rIns="0" bIns="0" rtlCol="0" anchor="ctr"/>
           <a:lstStyle/>
           <a:p>
-            <a:pPr marL="0" indent="0">
+            <a:pPr indent="0" marL="0">
               <a:buNone/>
             </a:pPr>
             <a:r>
@@ -5975,7 +6074,7 @@
           <a:bodyPr wrap="square" lIns="0" tIns="0" rIns="0" bIns="0" rtlCol="0" anchor="ctr"/>
           <a:lstStyle/>
           <a:p>
-            <a:pPr marL="0" indent="0">
+            <a:pPr indent="0" marL="0">
               <a:buNone/>
             </a:pPr>
             <a:r>
@@ -6014,7 +6113,7 @@
           <a:bodyPr wrap="square" rtlCol="0" anchor="ctr"/>
           <a:lstStyle/>
           <a:p>
-            <a:pPr marL="0" indent="0" algn="r">
+            <a:pPr algn="r" indent="0" marL="0">
               <a:buNone/>
             </a:pPr>
             <a:r>
@@ -6048,7 +6147,6 @@
         <a:solidFill>
           <a:srgbClr val="F7F9FC"/>
         </a:solidFill>
-        <a:effectLst/>
       </p:bgPr>
     </p:bg>
     <p:spTree>
@@ -6086,7 +6184,7 @@
           <a:bodyPr wrap="square" lIns="0" tIns="0" rIns="0" bIns="0" rtlCol="0" anchor="ctr"/>
           <a:lstStyle/>
           <a:p>
-            <a:pPr marL="0" indent="0">
+            <a:pPr indent="0" marL="0">
               <a:buNone/>
             </a:pPr>
             <a:r>
@@ -6123,7 +6221,7 @@
           </a:solidFill>
           <a:ln/>
           <a:effectLst>
-            <a:outerShdw blurRad="50800" dist="19050" dir="8100000" algn="bl" rotWithShape="0">
+            <a:outerShdw sx="100000" sy="100000" kx="0" ky="0" algn="bl" rotWithShape="0" blurRad="50800" dist="19050" dir="8100000">
               <a:srgbClr val="000000">
                 <a:alpha val="8000"/>
               </a:srgbClr>
@@ -6172,7 +6270,7 @@
           <a:bodyPr wrap="square" lIns="0" tIns="0" rIns="0" bIns="0" rtlCol="0" anchor="ctr"/>
           <a:lstStyle/>
           <a:p>
-            <a:pPr marL="0" indent="0">
+            <a:pPr indent="0" marL="0">
               <a:buNone/>
             </a:pPr>
             <a:r>
@@ -6211,7 +6309,7 @@
           <a:bodyPr wrap="square" lIns="0" tIns="0" rIns="0" bIns="0" rtlCol="0" anchor="t"/>
           <a:lstStyle/>
           <a:p>
-            <a:pPr marL="0" indent="0">
+            <a:pPr indent="0" marL="0">
               <a:buNone/>
             </a:pPr>
             <a:r>
@@ -6228,7 +6326,7 @@
             <a:endParaRPr lang="en-US" sz="1000" dirty="0"/>
           </a:p>
           <a:p>
-            <a:pPr marL="0" indent="0">
+            <a:pPr indent="0" marL="0">
               <a:buNone/>
             </a:pPr>
             <a:r>
@@ -6245,7 +6343,7 @@
             <a:endParaRPr lang="en-US" sz="1000" dirty="0"/>
           </a:p>
           <a:p>
-            <a:pPr marL="0" indent="0">
+            <a:pPr indent="0" marL="0">
               <a:buNone/>
             </a:pPr>
             <a:r>
@@ -6262,7 +6360,7 @@
             <a:endParaRPr lang="en-US" sz="1000" dirty="0"/>
           </a:p>
           <a:p>
-            <a:pPr marL="0" indent="0">
+            <a:pPr indent="0" marL="0">
               <a:buNone/>
             </a:pPr>
             <a:r>
@@ -6279,7 +6377,7 @@
             <a:endParaRPr lang="en-US" sz="1000" dirty="0"/>
           </a:p>
           <a:p>
-            <a:pPr marL="0" indent="0">
+            <a:pPr indent="0" marL="0">
               <a:buNone/>
             </a:pPr>
             <a:r>
@@ -6316,7 +6414,7 @@
           </a:solidFill>
           <a:ln/>
           <a:effectLst>
-            <a:outerShdw blurRad="50800" dist="19050" dir="8100000" algn="bl" rotWithShape="0">
+            <a:outerShdw sx="100000" sy="100000" kx="0" ky="0" algn="bl" rotWithShape="0" blurRad="50800" dist="19050" dir="8100000">
               <a:srgbClr val="000000">
                 <a:alpha val="8000"/>
               </a:srgbClr>
@@ -6365,7 +6463,7 @@
           <a:bodyPr wrap="square" lIns="0" tIns="0" rIns="0" bIns="0" rtlCol="0" anchor="ctr"/>
           <a:lstStyle/>
           <a:p>
-            <a:pPr marL="0" indent="0">
+            <a:pPr indent="0" marL="0">
               <a:buNone/>
             </a:pPr>
             <a:r>
@@ -6404,7 +6502,7 @@
           <a:bodyPr wrap="square" lIns="0" tIns="0" rIns="0" bIns="0" rtlCol="0" anchor="t"/>
           <a:lstStyle/>
           <a:p>
-            <a:pPr marL="0" indent="0">
+            <a:pPr indent="0" marL="0">
               <a:buNone/>
             </a:pPr>
             <a:r>
@@ -6421,7 +6519,7 @@
             <a:endParaRPr lang="en-US" sz="1000" dirty="0"/>
           </a:p>
           <a:p>
-            <a:pPr marL="0" indent="0">
+            <a:pPr indent="0" marL="0">
               <a:buNone/>
             </a:pPr>
             <a:r>
@@ -6438,7 +6536,7 @@
             <a:endParaRPr lang="en-US" sz="1000" dirty="0"/>
           </a:p>
           <a:p>
-            <a:pPr marL="0" indent="0">
+            <a:pPr indent="0" marL="0">
               <a:buNone/>
             </a:pPr>
             <a:r>
@@ -6455,7 +6553,7 @@
             <a:endParaRPr lang="en-US" sz="1000" dirty="0"/>
           </a:p>
           <a:p>
-            <a:pPr marL="0" indent="0">
+            <a:pPr indent="0" marL="0">
               <a:buNone/>
             </a:pPr>
             <a:r>
@@ -6472,7 +6570,7 @@
             <a:endParaRPr lang="en-US" sz="1000" dirty="0"/>
           </a:p>
           <a:p>
-            <a:pPr marL="0" indent="0">
+            <a:pPr indent="0" marL="0">
               <a:buNone/>
             </a:pPr>
             <a:r>
@@ -6509,7 +6607,7 @@
           </a:solidFill>
           <a:ln/>
           <a:effectLst>
-            <a:outerShdw blurRad="50800" dist="19050" dir="8100000" algn="bl" rotWithShape="0">
+            <a:outerShdw sx="100000" sy="100000" kx="0" ky="0" algn="bl" rotWithShape="0" blurRad="50800" dist="19050" dir="8100000">
               <a:srgbClr val="000000">
                 <a:alpha val="8000"/>
               </a:srgbClr>
@@ -6558,7 +6656,7 @@
           <a:bodyPr wrap="square" lIns="0" tIns="0" rIns="0" bIns="0" rtlCol="0" anchor="ctr"/>
           <a:lstStyle/>
           <a:p>
-            <a:pPr marL="0" indent="0">
+            <a:pPr indent="0" marL="0">
               <a:buNone/>
             </a:pPr>
             <a:r>
@@ -6597,7 +6695,7 @@
           <a:bodyPr wrap="square" lIns="0" tIns="0" rIns="0" bIns="0" rtlCol="0" anchor="t"/>
           <a:lstStyle/>
           <a:p>
-            <a:pPr marL="0" indent="0">
+            <a:pPr indent="0" marL="0">
               <a:buNone/>
             </a:pPr>
             <a:r>
@@ -6614,7 +6712,7 @@
             <a:endParaRPr lang="en-US" sz="1000" dirty="0"/>
           </a:p>
           <a:p>
-            <a:pPr marL="0" indent="0">
+            <a:pPr indent="0" marL="0">
               <a:buNone/>
             </a:pPr>
             <a:r>
@@ -6631,7 +6729,7 @@
             <a:endParaRPr lang="en-US" sz="1000" dirty="0"/>
           </a:p>
           <a:p>
-            <a:pPr marL="0" indent="0">
+            <a:pPr indent="0" marL="0">
               <a:buNone/>
             </a:pPr>
             <a:r>
@@ -6648,7 +6746,7 @@
             <a:endParaRPr lang="en-US" sz="1000" dirty="0"/>
           </a:p>
           <a:p>
-            <a:pPr marL="0" indent="0">
+            <a:pPr indent="0" marL="0">
               <a:buNone/>
             </a:pPr>
             <a:r>
@@ -6665,7 +6763,7 @@
             <a:endParaRPr lang="en-US" sz="1000" dirty="0"/>
           </a:p>
           <a:p>
-            <a:pPr marL="0" indent="0">
+            <a:pPr indent="0" marL="0">
               <a:buNone/>
             </a:pPr>
             <a:r>
@@ -6702,7 +6800,7 @@
           </a:solidFill>
           <a:ln/>
           <a:effectLst>
-            <a:outerShdw blurRad="50800" dist="19050" dir="8100000" algn="bl" rotWithShape="0">
+            <a:outerShdw sx="100000" sy="100000" kx="0" ky="0" algn="bl" rotWithShape="0" blurRad="50800" dist="19050" dir="8100000">
               <a:srgbClr val="000000">
                 <a:alpha val="8000"/>
               </a:srgbClr>
@@ -6751,7 +6849,7 @@
           <a:bodyPr wrap="square" lIns="0" tIns="0" rIns="0" bIns="0" rtlCol="0" anchor="ctr"/>
           <a:lstStyle/>
           <a:p>
-            <a:pPr marL="0" indent="0">
+            <a:pPr indent="0" marL="0">
               <a:buNone/>
             </a:pPr>
             <a:r>
@@ -6790,7 +6888,7 @@
           <a:bodyPr wrap="square" lIns="0" tIns="0" rIns="0" bIns="0" rtlCol="0" anchor="t"/>
           <a:lstStyle/>
           <a:p>
-            <a:pPr marL="0" indent="0">
+            <a:pPr indent="0" marL="0">
               <a:buNone/>
             </a:pPr>
             <a:r>
@@ -6807,7 +6905,7 @@
             <a:endParaRPr lang="en-US" sz="1300" dirty="0"/>
           </a:p>
           <a:p>
-            <a:pPr marL="0" indent="0">
+            <a:pPr indent="0" marL="0">
               <a:buNone/>
             </a:pPr>
             <a:r>
@@ -6824,7 +6922,7 @@
             <a:endParaRPr lang="en-US" sz="1300" dirty="0"/>
           </a:p>
           <a:p>
-            <a:pPr marL="0" indent="0">
+            <a:pPr indent="0" marL="0">
               <a:buNone/>
             </a:pPr>
             <a:r>
@@ -6841,13 +6939,13 @@
             <a:endParaRPr lang="en-US" sz="1300" dirty="0"/>
           </a:p>
           <a:p>
-            <a:pPr marL="0" indent="0">
+            <a:pPr indent="0" marL="0">
               <a:buNone/>
             </a:pPr>
             <a:endParaRPr lang="en-US" sz="1300" dirty="0"/>
           </a:p>
           <a:p>
-            <a:pPr marL="0" indent="0">
+            <a:pPr indent="0" marL="0">
               <a:buNone/>
             </a:pPr>
             <a:r>
@@ -6864,7 +6962,7 @@
             <a:endParaRPr lang="en-US" sz="1300" dirty="0"/>
           </a:p>
           <a:p>
-            <a:pPr marL="0" indent="0">
+            <a:pPr indent="0" marL="0">
               <a:buNone/>
             </a:pPr>
             <a:r>
@@ -6881,7 +6979,7 @@
             <a:endParaRPr lang="en-US" sz="1300" dirty="0"/>
           </a:p>
           <a:p>
-            <a:pPr marL="0" indent="0">
+            <a:pPr indent="0" marL="0">
               <a:buNone/>
             </a:pPr>
             <a:r>
@@ -6920,7 +7018,7 @@
           <a:bodyPr wrap="square" lIns="0" tIns="0" rIns="0" bIns="0" rtlCol="0" anchor="ctr"/>
           <a:lstStyle/>
           <a:p>
-            <a:pPr marL="0" indent="0">
+            <a:pPr indent="0" marL="0">
               <a:buNone/>
             </a:pPr>
             <a:r>
@@ -6959,7 +7057,7 @@
           <a:bodyPr wrap="square" lIns="0" tIns="0" rIns="0" bIns="0" rtlCol="0" anchor="t"/>
           <a:lstStyle/>
           <a:p>
-            <a:pPr marL="0" indent="0">
+            <a:pPr indent="0" marL="0">
               <a:buNone/>
             </a:pPr>
             <a:r>
@@ -6976,7 +7074,7 @@
             <a:endParaRPr lang="en-US" sz="950" dirty="0"/>
           </a:p>
           <a:p>
-            <a:pPr marL="0" indent="0">
+            <a:pPr indent="0" marL="0">
               <a:buNone/>
             </a:pPr>
             <a:r>
@@ -6993,7 +7091,7 @@
             <a:endParaRPr lang="en-US" sz="950" dirty="0"/>
           </a:p>
           <a:p>
-            <a:pPr marL="0" indent="0">
+            <a:pPr indent="0" marL="0">
               <a:buNone/>
             </a:pPr>
             <a:r>
@@ -7010,7 +7108,7 @@
             <a:endParaRPr lang="en-US" sz="950" dirty="0"/>
           </a:p>
           <a:p>
-            <a:pPr marL="0" indent="0">
+            <a:pPr indent="0" marL="0">
               <a:buNone/>
             </a:pPr>
             <a:r>
@@ -7027,7 +7125,7 @@
             <a:endParaRPr lang="en-US" sz="950" dirty="0"/>
           </a:p>
           <a:p>
-            <a:pPr marL="0" indent="0">
+            <a:pPr indent="0" marL="0">
               <a:buNone/>
             </a:pPr>
             <a:r>
@@ -7044,7 +7142,7 @@
             <a:endParaRPr lang="en-US" sz="950" dirty="0"/>
           </a:p>
           <a:p>
-            <a:pPr marL="0" indent="0">
+            <a:pPr indent="0" marL="0">
               <a:buNone/>
             </a:pPr>
             <a:r>
@@ -7083,7 +7181,7 @@
           <a:bodyPr wrap="square" lIns="0" tIns="0" rIns="0" bIns="0" rtlCol="0" anchor="ctr"/>
           <a:lstStyle/>
           <a:p>
-            <a:pPr marL="0" indent="0">
+            <a:pPr indent="0" marL="0">
               <a:buNone/>
             </a:pPr>
             <a:r>
@@ -7122,7 +7220,7 @@
           <a:bodyPr wrap="square" rtlCol="0" anchor="ctr"/>
           <a:lstStyle/>
           <a:p>
-            <a:pPr marL="0" indent="0" algn="r">
+            <a:pPr algn="r" indent="0" marL="0">
               <a:buNone/>
             </a:pPr>
             <a:r>
@@ -7156,7 +7254,6 @@
         <a:solidFill>
           <a:srgbClr val="F7F9FC"/>
         </a:solidFill>
-        <a:effectLst/>
       </p:bgPr>
     </p:bg>
     <p:spTree>
@@ -7194,7 +7291,7 @@
           <a:bodyPr wrap="square" lIns="0" tIns="0" rIns="0" bIns="0" rtlCol="0" anchor="ctr"/>
           <a:lstStyle/>
           <a:p>
-            <a:pPr marL="0" indent="0">
+            <a:pPr indent="0" marL="0">
               <a:buNone/>
             </a:pPr>
             <a:r>
@@ -7233,7 +7330,7 @@
           <a:bodyPr wrap="square" lIns="0" tIns="0" rIns="0" bIns="0" rtlCol="0" anchor="ctr"/>
           <a:lstStyle/>
           <a:p>
-            <a:pPr marL="0" indent="0">
+            <a:pPr indent="0" marL="0">
               <a:buNone/>
             </a:pPr>
             <a:r>
@@ -7292,7 +7389,7 @@
           <a:bodyPr wrap="square" lIns="0" tIns="0" rIns="0" bIns="0" rtlCol="0" anchor="ctr"/>
           <a:lstStyle/>
           <a:p>
-            <a:pPr marL="0" indent="0" algn="ctr">
+            <a:pPr algn="ctr" indent="0" marL="0">
               <a:buNone/>
             </a:pPr>
             <a:r>
@@ -7331,7 +7428,7 @@
           <a:bodyPr wrap="square" lIns="0" tIns="0" rIns="0" bIns="0" rtlCol="0" anchor="ctr"/>
           <a:lstStyle/>
           <a:p>
-            <a:pPr marL="0" indent="0">
+            <a:pPr indent="0" marL="0">
               <a:buNone/>
             </a:pPr>
             <a:r>
@@ -7345,6 +7442,9 @@
               </a:rPr>
               <a:t>复合信号全面优于单一指标</a:t>
             </a:r>
+            <a:pPr indent="0" marL="0">
+              <a:buNone/>
+            </a:pPr>
             <a:r>
               <a:rPr lang="en-US" sz="1000" dirty="0">
                 <a:solidFill>
@@ -7401,7 +7501,7 @@
           <a:bodyPr wrap="square" lIns="0" tIns="0" rIns="0" bIns="0" rtlCol="0" anchor="ctr"/>
           <a:lstStyle/>
           <a:p>
-            <a:pPr marL="0" indent="0" algn="ctr">
+            <a:pPr algn="ctr" indent="0" marL="0">
               <a:buNone/>
             </a:pPr>
             <a:r>
@@ -7440,7 +7540,7 @@
           <a:bodyPr wrap="square" lIns="0" tIns="0" rIns="0" bIns="0" rtlCol="0" anchor="ctr"/>
           <a:lstStyle/>
           <a:p>
-            <a:pPr marL="0" indent="0">
+            <a:pPr indent="0" marL="0">
               <a:buNone/>
             </a:pPr>
             <a:r>
@@ -7454,6 +7554,9 @@
               </a:rPr>
               <a:t>动态仓位有效控制回撤</a:t>
             </a:r>
+            <a:pPr indent="0" marL="0">
+              <a:buNone/>
+            </a:pPr>
             <a:r>
               <a:rPr lang="en-US" sz="1000" dirty="0">
                 <a:solidFill>
@@ -7510,7 +7613,7 @@
           <a:bodyPr wrap="square" lIns="0" tIns="0" rIns="0" bIns="0" rtlCol="0" anchor="ctr"/>
           <a:lstStyle/>
           <a:p>
-            <a:pPr marL="0" indent="0" algn="ctr">
+            <a:pPr algn="ctr" indent="0" marL="0">
               <a:buNone/>
             </a:pPr>
             <a:r>
@@ -7549,7 +7652,7 @@
           <a:bodyPr wrap="square" lIns="0" tIns="0" rIns="0" bIns="0" rtlCol="0" anchor="ctr"/>
           <a:lstStyle/>
           <a:p>
-            <a:pPr marL="0" indent="0">
+            <a:pPr indent="0" marL="0">
               <a:buNone/>
             </a:pPr>
             <a:r>
@@ -7563,6 +7666,9 @@
               </a:rPr>
               <a:t>低换手是核心优势</a:t>
             </a:r>
+            <a:pPr indent="0" marL="0">
+              <a:buNone/>
+            </a:pPr>
             <a:r>
               <a:rPr lang="en-US" sz="1000" dirty="0">
                 <a:solidFill>
@@ -7619,7 +7725,7 @@
           <a:bodyPr wrap="square" lIns="0" tIns="0" rIns="0" bIns="0" rtlCol="0" anchor="ctr"/>
           <a:lstStyle/>
           <a:p>
-            <a:pPr marL="0" indent="0" algn="ctr">
+            <a:pPr algn="ctr" indent="0" marL="0">
               <a:buNone/>
             </a:pPr>
             <a:r>
@@ -7658,7 +7764,7 @@
           <a:bodyPr wrap="square" lIns="0" tIns="0" rIns="0" bIns="0" rtlCol="0" anchor="ctr"/>
           <a:lstStyle/>
           <a:p>
-            <a:pPr marL="0" indent="0">
+            <a:pPr indent="0" marL="0">
               <a:buNone/>
             </a:pPr>
             <a:r>
@@ -7672,6 +7778,9 @@
               </a:rPr>
               <a:t>策略具有初步稳健性</a:t>
             </a:r>
+            <a:pPr indent="0" marL="0">
+              <a:buNone/>
+            </a:pPr>
             <a:r>
               <a:rPr lang="en-US" sz="1000" dirty="0">
                 <a:solidFill>
@@ -7728,7 +7837,7 @@
           <a:bodyPr wrap="square" lIns="0" tIns="0" rIns="0" bIns="0" rtlCol="0" anchor="ctr"/>
           <a:lstStyle/>
           <a:p>
-            <a:pPr marL="0" indent="0" algn="ctr">
+            <a:pPr algn="ctr" indent="0" marL="0">
               <a:buNone/>
             </a:pPr>
             <a:r>
@@ -7767,7 +7876,7 @@
           <a:bodyPr wrap="square" lIns="0" tIns="0" rIns="0" bIns="0" rtlCol="0" anchor="ctr"/>
           <a:lstStyle/>
           <a:p>
-            <a:pPr marL="0" indent="0">
+            <a:pPr indent="0" marL="0">
               <a:buNone/>
             </a:pPr>
             <a:r>
@@ -7781,6 +7890,9 @@
               </a:rPr>
               <a:t>端到端闭环</a:t>
             </a:r>
+            <a:pPr indent="0" marL="0">
+              <a:buNone/>
+            </a:pPr>
             <a:r>
               <a:rPr lang="en-US" sz="1000" dirty="0">
                 <a:solidFill>
@@ -7837,7 +7949,7 @@
           <a:bodyPr wrap="square" lIns="0" tIns="0" rIns="0" bIns="0" rtlCol="0" anchor="ctr"/>
           <a:lstStyle/>
           <a:p>
-            <a:pPr marL="0" indent="0">
+            <a:pPr indent="0" marL="0">
               <a:buNone/>
             </a:pPr>
             <a:r>
@@ -7876,7 +7988,7 @@
           <a:bodyPr wrap="square" lIns="0" tIns="0" rIns="0" bIns="0" rtlCol="0" anchor="t"/>
           <a:lstStyle/>
           <a:p>
-            <a:pPr marL="0" indent="0">
+            <a:pPr indent="0" marL="0">
               <a:buNone/>
             </a:pPr>
             <a:r>
@@ -7893,7 +8005,7 @@
             <a:endParaRPr lang="en-US" sz="950" dirty="0"/>
           </a:p>
           <a:p>
-            <a:pPr marL="0" indent="0">
+            <a:pPr indent="0" marL="0">
               <a:buNone/>
             </a:pPr>
             <a:r>
@@ -7910,7 +8022,7 @@
             <a:endParaRPr lang="en-US" sz="950" dirty="0"/>
           </a:p>
           <a:p>
-            <a:pPr marL="0" indent="0">
+            <a:pPr indent="0" marL="0">
               <a:buNone/>
             </a:pPr>
             <a:r>
@@ -7927,7 +8039,7 @@
             <a:endParaRPr lang="en-US" sz="950" dirty="0"/>
           </a:p>
           <a:p>
-            <a:pPr marL="0" indent="0">
+            <a:pPr indent="0" marL="0">
               <a:buNone/>
             </a:pPr>
             <a:r>
@@ -7944,7 +8056,7 @@
             <a:endParaRPr lang="en-US" sz="950" dirty="0"/>
           </a:p>
           <a:p>
-            <a:pPr marL="0" indent="0">
+            <a:pPr indent="0" marL="0">
               <a:buNone/>
             </a:pPr>
             <a:r>
@@ -7961,7 +8073,7 @@
             <a:endParaRPr lang="en-US" sz="950" dirty="0"/>
           </a:p>
           <a:p>
-            <a:pPr marL="0" indent="0">
+            <a:pPr indent="0" marL="0">
               <a:buNone/>
             </a:pPr>
             <a:r>
@@ -7987,7 +8099,7 @@
         </p:nvSpPr>
         <p:spPr>
           <a:xfrm>
-            <a:off x="391258" y="4901184"/>
+            <a:off x="457200" y="4709160"/>
             <a:ext cx="8229600" cy="274320"/>
           </a:xfrm>
           <a:prstGeom prst="rect">
@@ -8000,7 +8112,7 @@
           <a:bodyPr wrap="square" lIns="0" tIns="0" rIns="0" bIns="0" rtlCol="0" anchor="ctr"/>
           <a:lstStyle/>
           <a:p>
-            <a:pPr marL="0" indent="0">
+            <a:pPr indent="0" marL="0">
               <a:buNone/>
             </a:pPr>
             <a:r>
@@ -8039,7 +8151,7 @@
           <a:bodyPr wrap="square" rtlCol="0" anchor="ctr"/>
           <a:lstStyle/>
           <a:p>
-            <a:pPr marL="0" indent="0" algn="r">
+            <a:pPr algn="r" indent="0" marL="0">
               <a:buNone/>
             </a:pPr>
             <a:r>
@@ -8067,73 +8179,12 @@
 
 <file path=ppt/slides/slide13.xml><?xml version="1.0" encoding="utf-8"?>
 <p:sld xmlns:a="http://schemas.openxmlformats.org/drawingml/2006/main" xmlns:r="http://schemas.openxmlformats.org/officeDocument/2006/relationships" xmlns:p="http://schemas.openxmlformats.org/presentationml/2006/main">
-  <p:cSld>
-    <p:spTree>
-      <p:nvGrpSpPr>
-        <p:cNvPr id="1" name=""/>
-        <p:cNvGrpSpPr/>
-        <p:nvPr/>
-      </p:nvGrpSpPr>
-      <p:grpSpPr>
-        <a:xfrm>
-          <a:off x="0" y="0"/>
-          <a:ext cx="0" cy="0"/>
-          <a:chOff x="0" y="0"/>
-          <a:chExt cx="0" cy="0"/>
-        </a:xfrm>
-      </p:grpSpPr>
-      <p:pic>
-        <p:nvPicPr>
-          <p:cNvPr id="3" name="图片 2">
-            <a:extLst>
-              <a:ext uri="{FF2B5EF4-FFF2-40B4-BE49-F238E27FC236}">
-                <a16:creationId xmlns:a16="http://schemas.microsoft.com/office/drawing/2014/main" id="{FE987520-A685-D545-AB1B-5B6CC581CA02}"/>
-              </a:ext>
-            </a:extLst>
-          </p:cNvPr>
-          <p:cNvPicPr>
-            <a:picLocks noChangeAspect="1"/>
-          </p:cNvPicPr>
-          <p:nvPr/>
-        </p:nvPicPr>
-        <p:blipFill>
-          <a:blip r:embed="rId2"/>
-          <a:stretch>
-            <a:fillRect/>
-          </a:stretch>
-        </p:blipFill>
-        <p:spPr>
-          <a:xfrm>
-            <a:off x="0" y="0"/>
-            <a:ext cx="8462596" cy="5143500"/>
-          </a:xfrm>
-          <a:prstGeom prst="rect">
-            <a:avLst/>
-          </a:prstGeom>
-        </p:spPr>
-      </p:pic>
-    </p:spTree>
-    <p:extLst>
-      <p:ext uri="{BB962C8B-B14F-4D97-AF65-F5344CB8AC3E}">
-        <p14:creationId xmlns:p14="http://schemas.microsoft.com/office/powerpoint/2010/main" val="3139459600"/>
-      </p:ext>
-    </p:extLst>
-  </p:cSld>
-  <p:clrMapOvr>
-    <a:masterClrMapping/>
-  </p:clrMapOvr>
-</p:sld>
-</file>
-
-<file path=ppt/slides/slide14.xml><?xml version="1.0" encoding="utf-8"?>
-<p:sld xmlns:a="http://schemas.openxmlformats.org/drawingml/2006/main" xmlns:r="http://schemas.openxmlformats.org/officeDocument/2006/relationships" xmlns:p="http://schemas.openxmlformats.org/presentationml/2006/main">
   <p:cSld name="Slide 13">
     <p:bg>
       <p:bgPr>
         <a:solidFill>
           <a:srgbClr val="0B1D3A"/>
         </a:solidFill>
-        <a:effectLst/>
       </p:bgPr>
     </p:bg>
     <p:spTree>
@@ -8178,7 +8229,7 @@
         </p:nvSpPr>
         <p:spPr>
           <a:xfrm>
-            <a:off x="548640" y="1369842"/>
+            <a:off x="548640" y="1097280"/>
             <a:ext cx="7315200" cy="822960"/>
           </a:xfrm>
           <a:prstGeom prst="rect">
@@ -8191,7 +8242,7 @@
           <a:bodyPr wrap="square" lIns="0" tIns="0" rIns="0" bIns="0" rtlCol="0" anchor="ctr"/>
           <a:lstStyle/>
           <a:p>
-            <a:pPr marL="0" indent="0">
+            <a:pPr indent="0" marL="0">
               <a:buNone/>
             </a:pPr>
             <a:r>
@@ -8230,9 +8281,20 @@
           <a:bodyPr wrap="square" lIns="0" tIns="0" rIns="0" bIns="0" rtlCol="0" anchor="ctr"/>
           <a:lstStyle/>
           <a:p>
-            <a:pPr marL="0" indent="0">
-              <a:buNone/>
-            </a:pPr>
+            <a:pPr indent="0" marL="0">
+              <a:buNone/>
+            </a:pPr>
+            <a:r>
+              <a:rPr lang="en-US" sz="2400" dirty="0">
+                <a:solidFill>
+                  <a:srgbClr val="10B981"/>
+                </a:solidFill>
+                <a:latin typeface="Calibri Light" pitchFamily="34" charset="0"/>
+                <a:ea typeface="Calibri Light" pitchFamily="34" charset="-122"/>
+                <a:cs typeface="Calibri Light" pitchFamily="34" charset="-120"/>
+              </a:rPr>
+              <a:t>请评委老师提问</a:t>
+            </a:r>
             <a:endParaRPr lang="en-US" sz="2400" dirty="0"/>
           </a:p>
         </p:txBody>
@@ -8278,11 +8340,11 @@
           <a:bodyPr wrap="square" lIns="0" tIns="0" rIns="0" bIns="0" rtlCol="0" anchor="t"/>
           <a:lstStyle/>
           <a:p>
-            <a:pPr marL="0" indent="0">
-              <a:buNone/>
-            </a:pPr>
-            <a:r>
-              <a:rPr lang="en-US" sz="1300" dirty="0" err="1">
+            <a:pPr indent="0" marL="0">
+              <a:buNone/>
+            </a:pPr>
+            <a:r>
+              <a:rPr lang="en-US" sz="1300" dirty="0">
                 <a:solidFill>
                   <a:srgbClr val="94A3B8"/>
                 </a:solidFill>
@@ -8290,10 +8352,61 @@
                 <a:ea typeface="Calibri" pitchFamily="34" charset="-122"/>
                 <a:cs typeface="Calibri" pitchFamily="34" charset="-120"/>
               </a:rPr>
+              <a:t>GitHub：</a:t>
+            </a:r>
+            <a:pPr indent="0" marL="0">
+              <a:buNone/>
+            </a:pPr>
+            <a:r>
+              <a:rPr lang="en-US" sz="1300" dirty="0">
+                <a:solidFill>
+                  <a:srgbClr val="4A90D9"/>
+                </a:solidFill>
+                <a:latin typeface="Calibri" pitchFamily="34" charset="0"/>
+                <a:ea typeface="Calibri" pitchFamily="34" charset="-122"/>
+                <a:cs typeface="Calibri" pitchFamily="34" charset="-120"/>
+              </a:rPr>
+              <a:t>github.com/&lt;username&gt;/quant-strategy</a:t>
+            </a:r>
+            <a:pPr indent="0" marL="0">
+              <a:buNone/>
+            </a:pPr>
+            <a:r>
+              <a:rPr lang="en-US" sz="1100" dirty="0">
+                <a:solidFill>
+                  <a:srgbClr val="FFFFFF"/>
+                </a:solidFill>
+                <a:latin typeface="Calibri" pitchFamily="34" charset="0"/>
+                <a:ea typeface="Calibri" pitchFamily="34" charset="-122"/>
+                <a:cs typeface="Calibri" pitchFamily="34" charset="-120"/>
+              </a:rPr>
+              <a:t>  (代码 + README + 39个测试)</a:t>
+            </a:r>
+            <a:pPr indent="0" marL="0">
+              <a:buNone/>
+            </a:pPr>
+            <a:endParaRPr lang="en-US" sz="1300" dirty="0"/>
+          </a:p>
+          <a:p>
+            <a:pPr indent="0" marL="0">
+              <a:buNone/>
+            </a:pPr>
+            <a:r>
+              <a:rPr lang="en-US" sz="1300" dirty="0">
+                <a:solidFill>
+                  <a:srgbClr val="94A3B8"/>
+                </a:solidFill>
+                <a:latin typeface="Calibri" pitchFamily="34" charset="0"/>
+                <a:ea typeface="Calibri" pitchFamily="34" charset="-122"/>
+                <a:cs typeface="Calibri" pitchFamily="34" charset="-120"/>
+              </a:rPr>
               <a:t>Dashboard：</a:t>
             </a:r>
-            <a:r>
-              <a:rPr lang="en-US" sz="1300" dirty="0" err="1">
+            <a:pPr indent="0" marL="0">
+              <a:buNone/>
+            </a:pPr>
+            <a:r>
+              <a:rPr lang="en-US" sz="1300" dirty="0">
                 <a:solidFill>
                   <a:srgbClr val="4A90D9"/>
                 </a:solidFill>
@@ -8301,26 +8414,19 @@
                 <a:ea typeface="Calibri" pitchFamily="34" charset="-122"/>
                 <a:cs typeface="Calibri" pitchFamily="34" charset="-120"/>
               </a:rPr>
-              <a:t>http</a:t>
-            </a:r>
-            <a:r>
-              <a:rPr lang="en-US" sz="1300" dirty="0">
-                <a:solidFill>
-                  <a:srgbClr val="4A90D9"/>
-                </a:solidFill>
-                <a:latin typeface="Calibri" pitchFamily="34" charset="0"/>
-                <a:ea typeface="Calibri" pitchFamily="34" charset="-122"/>
-                <a:cs typeface="Calibri" pitchFamily="34" charset="-120"/>
-              </a:rPr>
-              <a:t>://localhost:8501  </a:t>
-            </a:r>
-          </a:p>
-          <a:p>
-            <a:pPr marL="0" indent="0">
-              <a:buNone/>
-            </a:pPr>
-            <a:r>
-              <a:rPr lang="en-US" sz="1200" dirty="0" err="1">
+              <a:t>http://localhost:8501  (现场运行中)</a:t>
+            </a:r>
+            <a:pPr indent="0" marL="0">
+              <a:buNone/>
+            </a:pPr>
+            <a:endParaRPr lang="en-US" sz="1300" dirty="0"/>
+          </a:p>
+          <a:p>
+            <a:pPr indent="0" marL="0">
+              <a:buNone/>
+            </a:pPr>
+            <a:r>
+              <a:rPr lang="en-US" sz="1200" dirty="0">
                 <a:solidFill>
                   <a:srgbClr val="94A3B8"/>
                 </a:solidFill>
@@ -8328,18 +8434,7 @@
                 <a:ea typeface="Calibri" pitchFamily="34" charset="-122"/>
                 <a:cs typeface="Calibri" pitchFamily="34" charset="-120"/>
               </a:rPr>
-              <a:t>完整代码</a:t>
-            </a:r>
-            <a:r>
-              <a:rPr lang="en-US" sz="1200" dirty="0">
-                <a:solidFill>
-                  <a:srgbClr val="94A3B8"/>
-                </a:solidFill>
-                <a:latin typeface="Calibri" pitchFamily="34" charset="0"/>
-                <a:ea typeface="Calibri" pitchFamily="34" charset="-122"/>
-                <a:cs typeface="Calibri" pitchFamily="34" charset="-120"/>
-              </a:rPr>
-              <a:t> · 39个测试 · 参数可调 · 开源可复现</a:t>
+              <a:t>完整代码 · 39个测试 · 参数可调 · 样本外验证 · 开源可复现</a:t>
             </a:r>
             <a:endParaRPr lang="en-US" sz="1300" dirty="0"/>
           </a:p>
@@ -8366,7 +8461,7 @@
           <a:bodyPr wrap="square" rtlCol="0" anchor="ctr"/>
           <a:lstStyle/>
           <a:p>
-            <a:pPr marL="0" indent="0" algn="r">
+            <a:pPr algn="r" indent="0" marL="0">
               <a:buNone/>
             </a:pPr>
             <a:r>
@@ -8400,7 +8495,6 @@
         <a:solidFill>
           <a:srgbClr val="F7F9FC"/>
         </a:solidFill>
-        <a:effectLst/>
       </p:bgPr>
     </p:bg>
     <p:spTree>
@@ -8438,7 +8532,7 @@
           <a:bodyPr wrap="square" lIns="0" tIns="0" rIns="0" bIns="0" rtlCol="0" anchor="ctr"/>
           <a:lstStyle/>
           <a:p>
-            <a:pPr marL="0" indent="0">
+            <a:pPr indent="0" marL="0">
               <a:buNone/>
             </a:pPr>
             <a:r>
@@ -8497,7 +8591,7 @@
           <a:bodyPr wrap="square" lIns="0" tIns="0" rIns="0" bIns="0" rtlCol="0" anchor="ctr"/>
           <a:lstStyle/>
           <a:p>
-            <a:pPr marL="0" indent="0" algn="ctr">
+            <a:pPr algn="ctr" indent="0" marL="0">
               <a:buNone/>
             </a:pPr>
             <a:r>
@@ -8536,7 +8630,7 @@
           <a:bodyPr wrap="square" lIns="0" tIns="0" rIns="0" bIns="0" rtlCol="0" anchor="ctr"/>
           <a:lstStyle/>
           <a:p>
-            <a:pPr marL="0" indent="0">
+            <a:pPr indent="0" marL="0">
               <a:buNone/>
             </a:pPr>
             <a:r>
@@ -8575,7 +8669,7 @@
           <a:bodyPr wrap="square" lIns="0" tIns="0" rIns="0" bIns="0" rtlCol="0" anchor="ctr"/>
           <a:lstStyle/>
           <a:p>
-            <a:pPr marL="0" indent="0">
+            <a:pPr indent="0" marL="0">
               <a:buNone/>
             </a:pPr>
             <a:r>
@@ -8657,7 +8751,7 @@
           <a:bodyPr wrap="square" lIns="0" tIns="0" rIns="0" bIns="0" rtlCol="0" anchor="ctr"/>
           <a:lstStyle/>
           <a:p>
-            <a:pPr marL="0" indent="0" algn="ctr">
+            <a:pPr algn="ctr" indent="0" marL="0">
               <a:buNone/>
             </a:pPr>
             <a:r>
@@ -8696,7 +8790,7 @@
           <a:bodyPr wrap="square" lIns="0" tIns="0" rIns="0" bIns="0" rtlCol="0" anchor="ctr"/>
           <a:lstStyle/>
           <a:p>
-            <a:pPr marL="0" indent="0">
+            <a:pPr indent="0" marL="0">
               <a:buNone/>
             </a:pPr>
             <a:r>
@@ -8735,7 +8829,7 @@
           <a:bodyPr wrap="square" lIns="0" tIns="0" rIns="0" bIns="0" rtlCol="0" anchor="ctr"/>
           <a:lstStyle/>
           <a:p>
-            <a:pPr marL="0" indent="0">
+            <a:pPr indent="0" marL="0">
               <a:buNone/>
             </a:pPr>
             <a:r>
@@ -8817,7 +8911,7 @@
           <a:bodyPr wrap="square" lIns="0" tIns="0" rIns="0" bIns="0" rtlCol="0" anchor="ctr"/>
           <a:lstStyle/>
           <a:p>
-            <a:pPr marL="0" indent="0" algn="ctr">
+            <a:pPr algn="ctr" indent="0" marL="0">
               <a:buNone/>
             </a:pPr>
             <a:r>
@@ -8856,7 +8950,7 @@
           <a:bodyPr wrap="square" lIns="0" tIns="0" rIns="0" bIns="0" rtlCol="0" anchor="ctr"/>
           <a:lstStyle/>
           <a:p>
-            <a:pPr marL="0" indent="0">
+            <a:pPr indent="0" marL="0">
               <a:buNone/>
             </a:pPr>
             <a:r>
@@ -8895,7 +8989,7 @@
           <a:bodyPr wrap="square" lIns="0" tIns="0" rIns="0" bIns="0" rtlCol="0" anchor="ctr"/>
           <a:lstStyle/>
           <a:p>
-            <a:pPr marL="0" indent="0">
+            <a:pPr indent="0" marL="0">
               <a:buNone/>
             </a:pPr>
             <a:r>
@@ -8977,7 +9071,7 @@
           <a:bodyPr wrap="square" lIns="0" tIns="0" rIns="0" bIns="0" rtlCol="0" anchor="ctr"/>
           <a:lstStyle/>
           <a:p>
-            <a:pPr marL="0" indent="0" algn="ctr">
+            <a:pPr algn="ctr" indent="0" marL="0">
               <a:buNone/>
             </a:pPr>
             <a:r>
@@ -9016,7 +9110,7 @@
           <a:bodyPr wrap="square" lIns="0" tIns="0" rIns="0" bIns="0" rtlCol="0" anchor="ctr"/>
           <a:lstStyle/>
           <a:p>
-            <a:pPr marL="0" indent="0">
+            <a:pPr indent="0" marL="0">
               <a:buNone/>
             </a:pPr>
             <a:r>
@@ -9055,7 +9149,7 @@
           <a:bodyPr wrap="square" lIns="0" tIns="0" rIns="0" bIns="0" rtlCol="0" anchor="ctr"/>
           <a:lstStyle/>
           <a:p>
-            <a:pPr marL="0" indent="0">
+            <a:pPr indent="0" marL="0">
               <a:buNone/>
             </a:pPr>
             <a:r>
@@ -9092,7 +9186,7 @@
           </a:solidFill>
           <a:ln/>
           <a:effectLst>
-            <a:outerShdw blurRad="50800" dist="19050" dir="8100000" algn="bl" rotWithShape="0">
+            <a:outerShdw sx="100000" sy="100000" kx="0" ky="0" algn="bl" rotWithShape="0" blurRad="50800" dist="19050" dir="8100000">
               <a:srgbClr val="000000">
                 <a:alpha val="8000"/>
               </a:srgbClr>
@@ -9121,7 +9215,7 @@
           <a:bodyPr wrap="square" lIns="0" tIns="0" rIns="0" bIns="0" rtlCol="0" anchor="ctr"/>
           <a:lstStyle/>
           <a:p>
-            <a:pPr marL="0" indent="0" algn="ctr">
+            <a:pPr algn="ctr" indent="0" marL="0">
               <a:buNone/>
             </a:pPr>
             <a:r>
@@ -9180,7 +9274,7 @@
           <a:bodyPr wrap="square" lIns="0" tIns="0" rIns="0" bIns="0" rtlCol="0" anchor="t"/>
           <a:lstStyle/>
           <a:p>
-            <a:pPr marL="0" indent="0">
+            <a:pPr indent="0" marL="0">
               <a:buNone/>
             </a:pPr>
             <a:r>
@@ -9197,7 +9291,7 @@
             <a:endParaRPr lang="en-US" sz="1000" dirty="0"/>
           </a:p>
           <a:p>
-            <a:pPr marL="0" indent="0">
+            <a:pPr indent="0" marL="0">
               <a:buNone/>
             </a:pPr>
             <a:r>
@@ -9214,7 +9308,7 @@
             <a:endParaRPr lang="en-US" sz="1000" dirty="0"/>
           </a:p>
           <a:p>
-            <a:pPr marL="0" indent="0">
+            <a:pPr indent="0" marL="0">
               <a:buNone/>
             </a:pPr>
             <a:r>
@@ -9231,7 +9325,7 @@
             <a:endParaRPr lang="en-US" sz="1000" dirty="0"/>
           </a:p>
           <a:p>
-            <a:pPr marL="0" indent="0">
+            <a:pPr indent="0" marL="0">
               <a:buNone/>
             </a:pPr>
             <a:r>
@@ -9248,7 +9342,7 @@
             <a:endParaRPr lang="en-US" sz="1000" dirty="0"/>
           </a:p>
           <a:p>
-            <a:pPr marL="0" indent="0">
+            <a:pPr indent="0" marL="0">
               <a:buNone/>
             </a:pPr>
             <a:r>
@@ -9265,7 +9359,7 @@
             <a:endParaRPr lang="en-US" sz="1000" dirty="0"/>
           </a:p>
           <a:p>
-            <a:pPr marL="0" indent="0">
+            <a:pPr indent="0" marL="0">
               <a:buNone/>
             </a:pPr>
             <a:r>
@@ -9282,7 +9376,7 @@
             <a:endParaRPr lang="en-US" sz="1000" dirty="0"/>
           </a:p>
           <a:p>
-            <a:pPr marL="0" indent="0">
+            <a:pPr indent="0" marL="0">
               <a:buNone/>
             </a:pPr>
             <a:r>
@@ -9299,7 +9393,7 @@
             <a:endParaRPr lang="en-US" sz="1000" dirty="0"/>
           </a:p>
           <a:p>
-            <a:pPr marL="0" indent="0">
+            <a:pPr indent="0" marL="0">
               <a:buNone/>
             </a:pPr>
             <a:r>
@@ -9338,7 +9432,7 @@
           <a:bodyPr wrap="square" lIns="0" tIns="0" rIns="0" bIns="0" rtlCol="0" anchor="ctr"/>
           <a:lstStyle/>
           <a:p>
-            <a:pPr marL="0" indent="0">
+            <a:pPr indent="0" marL="0">
               <a:buNone/>
             </a:pPr>
             <a:r>
@@ -9377,7 +9471,7 @@
           <a:bodyPr wrap="square" rtlCol="0" anchor="ctr"/>
           <a:lstStyle/>
           <a:p>
-            <a:pPr marL="0" indent="0" algn="r">
+            <a:pPr algn="r" indent="0" marL="0">
               <a:buNone/>
             </a:pPr>
             <a:r>
@@ -9411,7 +9505,6 @@
         <a:solidFill>
           <a:srgbClr val="F7F9FC"/>
         </a:solidFill>
-        <a:effectLst/>
       </p:bgPr>
     </p:bg>
     <p:spTree>
@@ -9449,7 +9542,7 @@
           <a:bodyPr wrap="square" lIns="0" tIns="0" rIns="0" bIns="0" rtlCol="0" anchor="ctr"/>
           <a:lstStyle/>
           <a:p>
-            <a:pPr marL="0" indent="0">
+            <a:pPr indent="0" marL="0">
               <a:buNone/>
             </a:pPr>
             <a:r>
@@ -9486,7 +9579,7 @@
           </a:solidFill>
           <a:ln/>
           <a:effectLst>
-            <a:outerShdw blurRad="50800" dist="19050" dir="8100000" algn="bl" rotWithShape="0">
+            <a:outerShdw sx="100000" sy="100000" kx="0" ky="0" algn="bl" rotWithShape="0" blurRad="50800" dist="19050" dir="8100000">
               <a:srgbClr val="000000">
                 <a:alpha val="8000"/>
               </a:srgbClr>
@@ -9535,7 +9628,7 @@
           <a:bodyPr wrap="square" lIns="0" tIns="0" rIns="0" bIns="0" rtlCol="0" anchor="ctr"/>
           <a:lstStyle/>
           <a:p>
-            <a:pPr marL="0" indent="0">
+            <a:pPr indent="0" marL="0">
               <a:buNone/>
             </a:pPr>
             <a:r>
@@ -9574,7 +9667,7 @@
           <a:bodyPr wrap="square" lIns="0" tIns="0" rIns="0" bIns="0" rtlCol="0" anchor="t"/>
           <a:lstStyle/>
           <a:p>
-            <a:pPr marL="0" indent="0">
+            <a:pPr indent="0" marL="0">
               <a:buNone/>
             </a:pPr>
             <a:r>
@@ -9611,7 +9704,7 @@
           </a:solidFill>
           <a:ln/>
           <a:effectLst>
-            <a:outerShdw blurRad="50800" dist="19050" dir="8100000" algn="bl" rotWithShape="0">
+            <a:outerShdw sx="100000" sy="100000" kx="0" ky="0" algn="bl" rotWithShape="0" blurRad="50800" dist="19050" dir="8100000">
               <a:srgbClr val="000000">
                 <a:alpha val="8000"/>
               </a:srgbClr>
@@ -9660,7 +9753,7 @@
           <a:bodyPr wrap="square" lIns="0" tIns="0" rIns="0" bIns="0" rtlCol="0" anchor="ctr"/>
           <a:lstStyle/>
           <a:p>
-            <a:pPr marL="0" indent="0">
+            <a:pPr indent="0" marL="0">
               <a:buNone/>
             </a:pPr>
             <a:r>
@@ -9699,7 +9792,7 @@
           <a:bodyPr wrap="square" lIns="0" tIns="0" rIns="0" bIns="0" rtlCol="0" anchor="t"/>
           <a:lstStyle/>
           <a:p>
-            <a:pPr marL="0" indent="0">
+            <a:pPr indent="0" marL="0">
               <a:buNone/>
             </a:pPr>
             <a:r>
@@ -9736,7 +9829,7 @@
           </a:solidFill>
           <a:ln/>
           <a:effectLst>
-            <a:outerShdw blurRad="50800" dist="19050" dir="8100000" algn="bl" rotWithShape="0">
+            <a:outerShdw sx="100000" sy="100000" kx="0" ky="0" algn="bl" rotWithShape="0" blurRad="50800" dist="19050" dir="8100000">
               <a:srgbClr val="000000">
                 <a:alpha val="8000"/>
               </a:srgbClr>
@@ -9785,7 +9878,7 @@
           <a:bodyPr wrap="square" lIns="0" tIns="0" rIns="0" bIns="0" rtlCol="0" anchor="ctr"/>
           <a:lstStyle/>
           <a:p>
-            <a:pPr marL="0" indent="0">
+            <a:pPr indent="0" marL="0">
               <a:buNone/>
             </a:pPr>
             <a:r>
@@ -9824,7 +9917,7 @@
           <a:bodyPr wrap="square" lIns="0" tIns="0" rIns="0" bIns="0" rtlCol="0" anchor="t"/>
           <a:lstStyle/>
           <a:p>
-            <a:pPr marL="0" indent="0">
+            <a:pPr indent="0" marL="0">
               <a:buNone/>
             </a:pPr>
             <a:r>
@@ -9863,7 +9956,7 @@
           <a:bodyPr wrap="square" lIns="0" tIns="0" rIns="0" bIns="0" rtlCol="0" anchor="ctr"/>
           <a:lstStyle/>
           <a:p>
-            <a:pPr marL="0" indent="0" algn="ctr">
+            <a:pPr algn="ctr" indent="0" marL="0">
               <a:buNone/>
             </a:pPr>
             <a:r>
@@ -9900,7 +9993,7 @@
           </a:solidFill>
           <a:ln/>
           <a:effectLst>
-            <a:outerShdw blurRad="50800" dist="19050" dir="8100000" algn="bl" rotWithShape="0">
+            <a:outerShdw sx="100000" sy="100000" kx="0" ky="0" algn="bl" rotWithShape="0" blurRad="50800" dist="19050" dir="8100000">
               <a:srgbClr val="000000">
                 <a:alpha val="8000"/>
               </a:srgbClr>
@@ -9949,7 +10042,7 @@
           <a:bodyPr wrap="square" lIns="0" tIns="0" rIns="0" bIns="0" rtlCol="0" anchor="ctr"/>
           <a:lstStyle/>
           <a:p>
-            <a:pPr marL="0" indent="0">
+            <a:pPr indent="0" marL="0">
               <a:buNone/>
             </a:pPr>
             <a:r>
@@ -9988,7 +10081,7 @@
           <a:bodyPr wrap="square" lIns="0" tIns="0" rIns="0" bIns="0" rtlCol="0" anchor="ctr"/>
           <a:lstStyle/>
           <a:p>
-            <a:pPr marL="0" indent="0">
+            <a:pPr indent="0" marL="0">
               <a:buNone/>
             </a:pPr>
             <a:r>
@@ -10027,7 +10120,7 @@
           <a:bodyPr wrap="square" lIns="0" tIns="0" rIns="0" bIns="0" rtlCol="0" anchor="t"/>
           <a:lstStyle/>
           <a:p>
-            <a:pPr marL="0" indent="0">
+            <a:pPr indent="0" marL="0">
               <a:buNone/>
             </a:pPr>
             <a:r>
@@ -10044,7 +10137,7 @@
             <a:endParaRPr lang="en-US" sz="1000" dirty="0"/>
           </a:p>
           <a:p>
-            <a:pPr marL="0" indent="0">
+            <a:pPr indent="0" marL="0">
               <a:buNone/>
             </a:pPr>
             <a:r>
@@ -10103,7 +10196,7 @@
           <a:bodyPr wrap="square" lIns="0" tIns="0" rIns="0" bIns="0" rtlCol="0" anchor="ctr"/>
           <a:lstStyle/>
           <a:p>
-            <a:pPr marL="0" indent="0">
+            <a:pPr indent="0" marL="0">
               <a:buNone/>
             </a:pPr>
             <a:r>
@@ -10142,7 +10235,7 @@
           <a:bodyPr wrap="square" lIns="0" tIns="0" rIns="0" bIns="0" rtlCol="0" anchor="t"/>
           <a:lstStyle/>
           <a:p>
-            <a:pPr marL="0" indent="0">
+            <a:pPr indent="0" marL="0">
               <a:buNone/>
             </a:pPr>
             <a:r>
@@ -10159,7 +10252,7 @@
             <a:endParaRPr lang="en-US" sz="1000" dirty="0"/>
           </a:p>
           <a:p>
-            <a:pPr marL="0" indent="0">
+            <a:pPr indent="0" marL="0">
               <a:buNone/>
             </a:pPr>
             <a:r>
@@ -10218,7 +10311,7 @@
           <a:bodyPr wrap="square" lIns="0" tIns="0" rIns="0" bIns="0" rtlCol="0" anchor="ctr"/>
           <a:lstStyle/>
           <a:p>
-            <a:pPr marL="0" indent="0">
+            <a:pPr indent="0" marL="0">
               <a:buNone/>
             </a:pPr>
             <a:r>
@@ -10257,7 +10350,7 @@
           <a:bodyPr wrap="square" lIns="0" tIns="0" rIns="0" bIns="0" rtlCol="0" anchor="t"/>
           <a:lstStyle/>
           <a:p>
-            <a:pPr marL="0" indent="0">
+            <a:pPr indent="0" marL="0">
               <a:buNone/>
             </a:pPr>
             <a:r>
@@ -10274,7 +10367,7 @@
             <a:endParaRPr lang="en-US" sz="1000" dirty="0"/>
           </a:p>
           <a:p>
-            <a:pPr marL="0" indent="0">
+            <a:pPr indent="0" marL="0">
               <a:buNone/>
             </a:pPr>
             <a:r>
@@ -10313,7 +10406,7 @@
           <a:bodyPr wrap="square" rtlCol="0" anchor="ctr"/>
           <a:lstStyle/>
           <a:p>
-            <a:pPr marL="0" indent="0" algn="r">
+            <a:pPr algn="r" indent="0" marL="0">
               <a:buNone/>
             </a:pPr>
             <a:r>
@@ -10347,7 +10440,6 @@
         <a:solidFill>
           <a:srgbClr val="F7F9FC"/>
         </a:solidFill>
-        <a:effectLst/>
       </p:bgPr>
     </p:bg>
     <p:spTree>
@@ -10385,7 +10477,7 @@
           <a:bodyPr wrap="square" lIns="0" tIns="0" rIns="0" bIns="0" rtlCol="0" anchor="ctr"/>
           <a:lstStyle/>
           <a:p>
-            <a:pPr marL="0" indent="0">
+            <a:pPr indent="0" marL="0">
               <a:buNone/>
             </a:pPr>
             <a:r>
@@ -10419,27 +10511,15 @@
         </p:nvGraphicFramePr>
         <p:xfrm>
           <a:off x="457200" y="1005840"/>
-          <a:ext cx="4389120" cy="1417320"/>
+          <a:ext cx="4389120" cy="1554480"/>
         </p:xfrm>
         <a:graphic>
           <a:graphicData uri="http://schemas.openxmlformats.org/drawingml/2006/table">
             <a:tbl>
               <a:tblPr/>
               <a:tblGrid>
-                <a:gridCol w="1463040">
-                  <a:extLst>
-                    <a:ext uri="{9D8B030D-6E8A-4147-A177-3AD203B41FA5}">
-                      <a16:colId xmlns:a16="http://schemas.microsoft.com/office/drawing/2014/main" val="20000"/>
-                    </a:ext>
-                  </a:extLst>
-                </a:gridCol>
-                <a:gridCol w="2926080">
-                  <a:extLst>
-                    <a:ext uri="{9D8B030D-6E8A-4147-A177-3AD203B41FA5}">
-                      <a16:colId xmlns:a16="http://schemas.microsoft.com/office/drawing/2014/main" val="20001"/>
-                    </a:ext>
-                  </a:extLst>
-                </a:gridCol>
+                <a:gridCol w="1463040"/>
+                <a:gridCol w="2926080"/>
               </a:tblGrid>
               <a:tr h="320040">
                 <a:tc>
@@ -10447,7 +10527,7 @@
                     <a:bodyPr/>
                     <a:lstStyle/>
                     <a:p>
-                      <a:pPr marL="0" indent="0">
+                      <a:pPr indent="0" marL="0">
                         <a:buNone/>
                       </a:pPr>
                       <a:r>
@@ -10468,7 +10548,7 @@
                       </a:endParaRPr>
                     </a:p>
                   </a:txBody>
-                  <a:tcPr>
+                  <a:tcPr marL="91440" marR="91440" marT="45720" marB="45720">
                     <a:lnL w="6350" cap="flat" cmpd="sng" algn="ctr">
                       <a:solidFill>
                         <a:srgbClr val="E8ECF1"/>
@@ -10515,7 +10595,7 @@
                     <a:bodyPr/>
                     <a:lstStyle/>
                     <a:p>
-                      <a:pPr marL="0" indent="0">
+                      <a:pPr indent="0" marL="0">
                         <a:buNone/>
                       </a:pPr>
                       <a:r>
@@ -10536,7 +10616,7 @@
                       </a:endParaRPr>
                     </a:p>
                   </a:txBody>
-                  <a:tcPr>
+                  <a:tcPr marL="91440" marR="91440" marT="45720" marB="45720">
                     <a:lnL w="6350" cap="flat" cmpd="sng" algn="ctr">
                       <a:solidFill>
                         <a:srgbClr val="E8ECF1"/>
@@ -10578,11 +10658,6 @@
                     </a:solidFill>
                   </a:tcPr>
                 </a:tc>
-                <a:extLst>
-                  <a:ext uri="{0D108BD9-81ED-4DB2-BD59-A6C34878D82A}">
-                    <a16:rowId xmlns:a16="http://schemas.microsoft.com/office/drawing/2014/main" val="10000"/>
-                  </a:ext>
-                </a:extLst>
               </a:tr>
               <a:tr h="274320">
                 <a:tc>
@@ -10590,7 +10665,7 @@
                     <a:bodyPr/>
                     <a:lstStyle/>
                     <a:p>
-                      <a:pPr marL="0" indent="0">
+                      <a:pPr indent="0" marL="0">
                         <a:buNone/>
                       </a:pPr>
                       <a:r>
@@ -10611,7 +10686,7 @@
                       </a:endParaRPr>
                     </a:p>
                   </a:txBody>
-                  <a:tcPr>
+                  <a:tcPr marL="91440" marR="91440" marT="45720" marB="45720">
                     <a:lnL w="6350" cap="flat" cmpd="sng" algn="ctr">
                       <a:solidFill>
                         <a:srgbClr val="E8ECF1"/>
@@ -10655,7 +10730,7 @@
                     <a:bodyPr/>
                     <a:lstStyle/>
                     <a:p>
-                      <a:pPr marL="0" indent="0">
+                      <a:pPr indent="0" marL="0">
                         <a:buNone/>
                       </a:pPr>
                       <a:r>
@@ -10676,7 +10751,7 @@
                       </a:endParaRPr>
                     </a:p>
                   </a:txBody>
-                  <a:tcPr>
+                  <a:tcPr marL="91440" marR="91440" marT="45720" marB="45720">
                     <a:lnL w="6350" cap="flat" cmpd="sng" algn="ctr">
                       <a:solidFill>
                         <a:srgbClr val="E8ECF1"/>
@@ -10715,11 +10790,6 @@
                     </a:lnB>
                   </a:tcPr>
                 </a:tc>
-                <a:extLst>
-                  <a:ext uri="{0D108BD9-81ED-4DB2-BD59-A6C34878D82A}">
-                    <a16:rowId xmlns:a16="http://schemas.microsoft.com/office/drawing/2014/main" val="10001"/>
-                  </a:ext>
-                </a:extLst>
               </a:tr>
               <a:tr h="274320">
                 <a:tc>
@@ -10727,7 +10797,7 @@
                     <a:bodyPr/>
                     <a:lstStyle/>
                     <a:p>
-                      <a:pPr marL="0" indent="0">
+                      <a:pPr indent="0" marL="0">
                         <a:buNone/>
                       </a:pPr>
                       <a:r>
@@ -10748,7 +10818,7 @@
                       </a:endParaRPr>
                     </a:p>
                   </a:txBody>
-                  <a:tcPr>
+                  <a:tcPr marL="91440" marR="91440" marT="45720" marB="45720">
                     <a:lnL w="6350" cap="flat" cmpd="sng" algn="ctr">
                       <a:solidFill>
                         <a:srgbClr val="E8ECF1"/>
@@ -10792,7 +10862,7 @@
                     <a:bodyPr/>
                     <a:lstStyle/>
                     <a:p>
-                      <a:pPr marL="0" indent="0">
+                      <a:pPr indent="0" marL="0">
                         <a:buNone/>
                       </a:pPr>
                       <a:r>
@@ -10813,7 +10883,7 @@
                       </a:endParaRPr>
                     </a:p>
                   </a:txBody>
-                  <a:tcPr>
+                  <a:tcPr marL="91440" marR="91440" marT="45720" marB="45720">
                     <a:lnL w="6350" cap="flat" cmpd="sng" algn="ctr">
                       <a:solidFill>
                         <a:srgbClr val="E8ECF1"/>
@@ -10852,11 +10922,6 @@
                     </a:lnB>
                   </a:tcPr>
                 </a:tc>
-                <a:extLst>
-                  <a:ext uri="{0D108BD9-81ED-4DB2-BD59-A6C34878D82A}">
-                    <a16:rowId xmlns:a16="http://schemas.microsoft.com/office/drawing/2014/main" val="10002"/>
-                  </a:ext>
-                </a:extLst>
               </a:tr>
               <a:tr h="274320">
                 <a:tc>
@@ -10864,7 +10929,7 @@
                     <a:bodyPr/>
                     <a:lstStyle/>
                     <a:p>
-                      <a:pPr marL="0" indent="0">
+                      <a:pPr indent="0" marL="0">
                         <a:buNone/>
                       </a:pPr>
                       <a:r>
@@ -10885,7 +10950,7 @@
                       </a:endParaRPr>
                     </a:p>
                   </a:txBody>
-                  <a:tcPr>
+                  <a:tcPr marL="91440" marR="91440" marT="45720" marB="45720">
                     <a:lnL w="6350" cap="flat" cmpd="sng" algn="ctr">
                       <a:solidFill>
                         <a:srgbClr val="E8ECF1"/>
@@ -10929,7 +10994,7 @@
                     <a:bodyPr/>
                     <a:lstStyle/>
                     <a:p>
-                      <a:pPr marL="0" indent="0">
+                      <a:pPr indent="0" marL="0">
                         <a:buNone/>
                       </a:pPr>
                       <a:r>
@@ -10950,7 +11015,7 @@
                       </a:endParaRPr>
                     </a:p>
                   </a:txBody>
-                  <a:tcPr>
+                  <a:tcPr marL="91440" marR="91440" marT="45720" marB="45720">
                     <a:lnL w="6350" cap="flat" cmpd="sng" algn="ctr">
                       <a:solidFill>
                         <a:srgbClr val="E8ECF1"/>
@@ -10989,11 +11054,6 @@
                     </a:lnB>
                   </a:tcPr>
                 </a:tc>
-                <a:extLst>
-                  <a:ext uri="{0D108BD9-81ED-4DB2-BD59-A6C34878D82A}">
-                    <a16:rowId xmlns:a16="http://schemas.microsoft.com/office/drawing/2014/main" val="10003"/>
-                  </a:ext>
-                </a:extLst>
               </a:tr>
               <a:tr h="274320">
                 <a:tc>
@@ -11001,7 +11061,7 @@
                     <a:bodyPr/>
                     <a:lstStyle/>
                     <a:p>
-                      <a:pPr marL="0" indent="0">
+                      <a:pPr indent="0" marL="0">
                         <a:buNone/>
                       </a:pPr>
                       <a:r>
@@ -11022,7 +11082,7 @@
                       </a:endParaRPr>
                     </a:p>
                   </a:txBody>
-                  <a:tcPr>
+                  <a:tcPr marL="91440" marR="91440" marT="45720" marB="45720">
                     <a:lnL w="6350" cap="flat" cmpd="sng" algn="ctr">
                       <a:solidFill>
                         <a:srgbClr val="E8ECF1"/>
@@ -11066,7 +11126,7 @@
                     <a:bodyPr/>
                     <a:lstStyle/>
                     <a:p>
-                      <a:pPr marL="0" indent="0">
+                      <a:pPr indent="0" marL="0">
                         <a:buNone/>
                       </a:pPr>
                       <a:r>
@@ -11087,7 +11147,7 @@
                       </a:endParaRPr>
                     </a:p>
                   </a:txBody>
-                  <a:tcPr>
+                  <a:tcPr marL="91440" marR="91440" marT="45720" marB="45720">
                     <a:lnL w="6350" cap="flat" cmpd="sng" algn="ctr">
                       <a:solidFill>
                         <a:srgbClr val="E8ECF1"/>
@@ -11126,11 +11186,6 @@
                     </a:lnB>
                   </a:tcPr>
                 </a:tc>
-                <a:extLst>
-                  <a:ext uri="{0D108BD9-81ED-4DB2-BD59-A6C34878D82A}">
-                    <a16:rowId xmlns:a16="http://schemas.microsoft.com/office/drawing/2014/main" val="10004"/>
-                  </a:ext>
-                </a:extLst>
               </a:tr>
             </a:tbl>
           </a:graphicData>
@@ -11155,7 +11210,7 @@
           </a:solidFill>
           <a:ln/>
           <a:effectLst>
-            <a:outerShdw blurRad="50800" dist="19050" dir="8100000" algn="bl" rotWithShape="0">
+            <a:outerShdw sx="100000" sy="100000" kx="0" ky="0" algn="bl" rotWithShape="0" blurRad="50800" dist="19050" dir="8100000">
               <a:srgbClr val="000000">
                 <a:alpha val="8000"/>
               </a:srgbClr>
@@ -11165,7 +11220,7 @@
       </p:sp>
       <p:sp>
         <p:nvSpPr>
-          <p:cNvPr id="3" name="Text 2"/>
+          <p:cNvPr id="5" name="Text 2"/>
           <p:cNvSpPr/>
           <p:nvPr/>
         </p:nvSpPr>
@@ -11184,7 +11239,7 @@
           <a:bodyPr wrap="square" lIns="0" tIns="0" rIns="0" bIns="0" rtlCol="0" anchor="ctr"/>
           <a:lstStyle/>
           <a:p>
-            <a:pPr marL="0" indent="0">
+            <a:pPr indent="0" marL="0">
               <a:buNone/>
             </a:pPr>
             <a:r>
@@ -11223,7 +11278,7 @@
           <a:bodyPr wrap="square" lIns="0" tIns="0" rIns="0" bIns="0" rtlCol="0" anchor="t"/>
           <a:lstStyle/>
           <a:p>
-            <a:pPr marL="0" indent="0">
+            <a:pPr indent="0" marL="0">
               <a:lnSpc>
                 <a:spcPct val="150000"/>
               </a:lnSpc>
@@ -11238,12 +11293,9 @@
                 <a:ea typeface="Calibri" pitchFamily="34" charset="-122"/>
                 <a:cs typeface="Calibri" pitchFamily="34" charset="-120"/>
               </a:rPr>
-              <a:t>贵州茅台  五粮液  </a:t>
-            </a:r>
-            <a:endParaRPr lang="en-US" sz="900" dirty="0"/>
-          </a:p>
-          <a:p>
-            <a:pPr marL="0" indent="0">
+              <a:t>贵州茅台  </a:t>
+            </a:r>
+            <a:pPr indent="0" marL="0">
               <a:lnSpc>
                 <a:spcPct val="150000"/>
               </a:lnSpc>
@@ -11258,23 +11310,12 @@
                 <a:ea typeface="Calibri" pitchFamily="34" charset="-122"/>
                 <a:cs typeface="Calibri" pitchFamily="34" charset="-120"/>
               </a:rPr>
-              <a:t>伊利股份  </a:t>
-            </a:r>
-            <a:r>
-              <a:rPr lang="en-US" sz="900" dirty="0">
-                <a:solidFill>
-                  <a:srgbClr val="2D6FB5"/>
-                </a:solidFill>
-                <a:latin typeface="Calibri" pitchFamily="34" charset="0"/>
-                <a:ea typeface="Calibri" pitchFamily="34" charset="-122"/>
-                <a:cs typeface="Calibri" pitchFamily="34" charset="-120"/>
-              </a:rPr>
-              <a:t>中国平安  </a:t>
+              <a:t>五粮液  </a:t>
             </a:r>
             <a:endParaRPr lang="en-US" sz="900" dirty="0"/>
           </a:p>
           <a:p>
-            <a:pPr marL="0" indent="0">
+            <a:pPr indent="0" marL="0">
               <a:lnSpc>
                 <a:spcPct val="150000"/>
               </a:lnSpc>
@@ -11283,29 +11324,15 @@
             <a:r>
               <a:rPr lang="en-US" sz="900" dirty="0">
                 <a:solidFill>
-                  <a:srgbClr val="2D6FB5"/>
-                </a:solidFill>
-                <a:latin typeface="Calibri" pitchFamily="34" charset="0"/>
-                <a:ea typeface="Calibri" pitchFamily="34" charset="-122"/>
-                <a:cs typeface="Calibri" pitchFamily="34" charset="-120"/>
-              </a:rPr>
-              <a:t>招商银行  </a:t>
-            </a:r>
-            <a:r>
-              <a:rPr lang="en-US" sz="900" dirty="0">
-                <a:solidFill>
-                  <a:srgbClr val="7C3AED"/>
-                </a:solidFill>
-                <a:latin typeface="Calibri" pitchFamily="34" charset="0"/>
-                <a:ea typeface="Calibri" pitchFamily="34" charset="-122"/>
-                <a:cs typeface="Calibri" pitchFamily="34" charset="-120"/>
-              </a:rPr>
-              <a:t>宁德时代  </a:t>
-            </a:r>
-            <a:endParaRPr lang="en-US" sz="900" dirty="0"/>
-          </a:p>
-          <a:p>
-            <a:pPr marL="0" indent="0">
+                  <a:srgbClr val="EF4444"/>
+                </a:solidFill>
+                <a:latin typeface="Calibri" pitchFamily="34" charset="0"/>
+                <a:ea typeface="Calibri" pitchFamily="34" charset="-122"/>
+                <a:cs typeface="Calibri" pitchFamily="34" charset="-120"/>
+              </a:rPr>
+              <a:t>伊利股份  </a:t>
+            </a:r>
+            <a:pPr indent="0" marL="0">
               <a:lnSpc>
                 <a:spcPct val="150000"/>
               </a:lnSpc>
@@ -11314,29 +11341,18 @@
             <a:r>
               <a:rPr lang="en-US" sz="900" dirty="0">
                 <a:solidFill>
-                  <a:srgbClr val="7C3AED"/>
-                </a:solidFill>
-                <a:latin typeface="Calibri" pitchFamily="34" charset="0"/>
-                <a:ea typeface="Calibri" pitchFamily="34" charset="-122"/>
-                <a:cs typeface="Calibri" pitchFamily="34" charset="-120"/>
-              </a:rPr>
-              <a:t>海康威视  </a:t>
-            </a:r>
-            <a:r>
-              <a:rPr lang="en-US" sz="900" dirty="0">
-                <a:solidFill>
-                  <a:srgbClr val="0891B2"/>
-                </a:solidFill>
-                <a:latin typeface="Calibri" pitchFamily="34" charset="0"/>
-                <a:ea typeface="Calibri" pitchFamily="34" charset="-122"/>
-                <a:cs typeface="Calibri" pitchFamily="34" charset="-120"/>
-              </a:rPr>
-              <a:t>恒瑞医药  </a:t>
+                  <a:srgbClr val="2D6FB5"/>
+                </a:solidFill>
+                <a:latin typeface="Calibri" pitchFamily="34" charset="0"/>
+                <a:ea typeface="Calibri" pitchFamily="34" charset="-122"/>
+                <a:cs typeface="Calibri" pitchFamily="34" charset="-120"/>
+              </a:rPr>
+              <a:t>中国平安  </a:t>
             </a:r>
             <a:endParaRPr lang="en-US" sz="900" dirty="0"/>
           </a:p>
           <a:p>
-            <a:pPr marL="0" indent="0">
+            <a:pPr indent="0" marL="0">
               <a:lnSpc>
                 <a:spcPct val="150000"/>
               </a:lnSpc>
@@ -11345,13 +11361,104 @@
             <a:r>
               <a:rPr lang="en-US" sz="900" dirty="0">
                 <a:solidFill>
+                  <a:srgbClr val="2D6FB5"/>
+                </a:solidFill>
+                <a:latin typeface="Calibri" pitchFamily="34" charset="0"/>
+                <a:ea typeface="Calibri" pitchFamily="34" charset="-122"/>
+                <a:cs typeface="Calibri" pitchFamily="34" charset="-120"/>
+              </a:rPr>
+              <a:t>招商银行  </a:t>
+            </a:r>
+            <a:pPr indent="0" marL="0">
+              <a:lnSpc>
+                <a:spcPct val="150000"/>
+              </a:lnSpc>
+              <a:buNone/>
+            </a:pPr>
+            <a:r>
+              <a:rPr lang="en-US" sz="900" dirty="0">
+                <a:solidFill>
+                  <a:srgbClr val="7C3AED"/>
+                </a:solidFill>
+                <a:latin typeface="Calibri" pitchFamily="34" charset="0"/>
+                <a:ea typeface="Calibri" pitchFamily="34" charset="-122"/>
+                <a:cs typeface="Calibri" pitchFamily="34" charset="-120"/>
+              </a:rPr>
+              <a:t>宁德时代  </a:t>
+            </a:r>
+            <a:endParaRPr lang="en-US" sz="900" dirty="0"/>
+          </a:p>
+          <a:p>
+            <a:pPr indent="0" marL="0">
+              <a:lnSpc>
+                <a:spcPct val="150000"/>
+              </a:lnSpc>
+              <a:buNone/>
+            </a:pPr>
+            <a:r>
+              <a:rPr lang="en-US" sz="900" dirty="0">
+                <a:solidFill>
+                  <a:srgbClr val="7C3AED"/>
+                </a:solidFill>
+                <a:latin typeface="Calibri" pitchFamily="34" charset="0"/>
+                <a:ea typeface="Calibri" pitchFamily="34" charset="-122"/>
+                <a:cs typeface="Calibri" pitchFamily="34" charset="-120"/>
+              </a:rPr>
+              <a:t>海康威视  </a:t>
+            </a:r>
+            <a:pPr indent="0" marL="0">
+              <a:lnSpc>
+                <a:spcPct val="150000"/>
+              </a:lnSpc>
+              <a:buNone/>
+            </a:pPr>
+            <a:r>
+              <a:rPr lang="en-US" sz="900" dirty="0">
+                <a:solidFill>
                   <a:srgbClr val="0891B2"/>
                 </a:solidFill>
                 <a:latin typeface="Calibri" pitchFamily="34" charset="0"/>
                 <a:ea typeface="Calibri" pitchFamily="34" charset="-122"/>
                 <a:cs typeface="Calibri" pitchFamily="34" charset="-120"/>
               </a:rPr>
-              <a:t>隆基绿能  美的集团  </a:t>
+              <a:t>恒瑞医药  </a:t>
+            </a:r>
+            <a:endParaRPr lang="en-US" sz="900" dirty="0"/>
+          </a:p>
+          <a:p>
+            <a:pPr indent="0" marL="0">
+              <a:lnSpc>
+                <a:spcPct val="150000"/>
+              </a:lnSpc>
+              <a:buNone/>
+            </a:pPr>
+            <a:r>
+              <a:rPr lang="en-US" sz="900" dirty="0">
+                <a:solidFill>
+                  <a:srgbClr val="0891B2"/>
+                </a:solidFill>
+                <a:latin typeface="Calibri" pitchFamily="34" charset="0"/>
+                <a:ea typeface="Calibri" pitchFamily="34" charset="-122"/>
+                <a:cs typeface="Calibri" pitchFamily="34" charset="-120"/>
+              </a:rPr>
+              <a:t>隆基绿能  </a:t>
+            </a:r>
+            <a:pPr indent="0" marL="0">
+              <a:lnSpc>
+                <a:spcPct val="150000"/>
+              </a:lnSpc>
+              <a:buNone/>
+            </a:pPr>
+            <a:r>
+              <a:rPr lang="en-US" sz="900" dirty="0">
+                <a:solidFill>
+                  <a:srgbClr val="0891B2"/>
+                </a:solidFill>
+                <a:latin typeface="Calibri" pitchFamily="34" charset="0"/>
+                <a:ea typeface="Calibri" pitchFamily="34" charset="-122"/>
+                <a:cs typeface="Calibri" pitchFamily="34" charset="-120"/>
+              </a:rPr>
+              <a:t>美的集团  </a:t>
             </a:r>
             <a:endParaRPr lang="en-US" sz="900" dirty="0"/>
           </a:p>
@@ -11378,7 +11485,7 @@
           <a:bodyPr wrap="square" lIns="0" tIns="0" rIns="0" bIns="0" rtlCol="0" anchor="ctr"/>
           <a:lstStyle/>
           <a:p>
-            <a:pPr marL="0" indent="0">
+            <a:pPr indent="0" marL="0">
               <a:buNone/>
             </a:pPr>
             <a:r>
@@ -11415,7 +11522,7 @@
           </a:solidFill>
           <a:ln/>
           <a:effectLst>
-            <a:outerShdw blurRad="50800" dist="19050" dir="8100000" algn="bl" rotWithShape="0">
+            <a:outerShdw sx="100000" sy="100000" kx="0" ky="0" algn="bl" rotWithShape="0" blurRad="50800" dist="19050" dir="8100000">
               <a:srgbClr val="000000">
                 <a:alpha val="8000"/>
               </a:srgbClr>
@@ -11444,7 +11551,7 @@
           <a:bodyPr wrap="square" lIns="0" tIns="0" rIns="0" bIns="0" rtlCol="0" anchor="ctr"/>
           <a:lstStyle/>
           <a:p>
-            <a:pPr marL="0" indent="0" algn="ctr">
+            <a:pPr algn="ctr" indent="0" marL="0">
               <a:buNone/>
             </a:pPr>
             <a:r>
@@ -11461,7 +11568,7 @@
             <a:endParaRPr lang="en-US" sz="950" dirty="0"/>
           </a:p>
           <a:p>
-            <a:pPr marL="0" indent="0" algn="ctr">
+            <a:pPr algn="ctr" indent="0" marL="0">
               <a:buNone/>
             </a:pPr>
             <a:r>
@@ -11500,7 +11607,7 @@
           <a:bodyPr wrap="square" lIns="0" tIns="0" rIns="0" bIns="0" rtlCol="0" anchor="ctr"/>
           <a:lstStyle/>
           <a:p>
-            <a:pPr marL="0" indent="0" algn="ctr">
+            <a:pPr algn="ctr" indent="0" marL="0">
               <a:buNone/>
             </a:pPr>
             <a:r>
@@ -11537,7 +11644,7 @@
           </a:solidFill>
           <a:ln/>
           <a:effectLst>
-            <a:outerShdw blurRad="50800" dist="19050" dir="8100000" algn="bl" rotWithShape="0">
+            <a:outerShdw sx="100000" sy="100000" kx="0" ky="0" algn="bl" rotWithShape="0" blurRad="50800" dist="19050" dir="8100000">
               <a:srgbClr val="000000">
                 <a:alpha val="8000"/>
               </a:srgbClr>
@@ -11566,7 +11673,7 @@
           <a:bodyPr wrap="square" lIns="0" tIns="0" rIns="0" bIns="0" rtlCol="0" anchor="ctr"/>
           <a:lstStyle/>
           <a:p>
-            <a:pPr marL="0" indent="0" algn="ctr">
+            <a:pPr algn="ctr" indent="0" marL="0">
               <a:buNone/>
             </a:pPr>
             <a:r>
@@ -11583,7 +11690,7 @@
             <a:endParaRPr lang="en-US" sz="950" dirty="0"/>
           </a:p>
           <a:p>
-            <a:pPr marL="0" indent="0" algn="ctr">
+            <a:pPr algn="ctr" indent="0" marL="0">
               <a:buNone/>
             </a:pPr>
             <a:r>
@@ -11622,7 +11729,7 @@
           <a:bodyPr wrap="square" lIns="0" tIns="0" rIns="0" bIns="0" rtlCol="0" anchor="ctr"/>
           <a:lstStyle/>
           <a:p>
-            <a:pPr marL="0" indent="0" algn="ctr">
+            <a:pPr algn="ctr" indent="0" marL="0">
               <a:buNone/>
             </a:pPr>
             <a:r>
@@ -11659,7 +11766,7 @@
           </a:solidFill>
           <a:ln/>
           <a:effectLst>
-            <a:outerShdw blurRad="50800" dist="19050" dir="8100000" algn="bl" rotWithShape="0">
+            <a:outerShdw sx="100000" sy="100000" kx="0" ky="0" algn="bl" rotWithShape="0" blurRad="50800" dist="19050" dir="8100000">
               <a:srgbClr val="000000">
                 <a:alpha val="8000"/>
               </a:srgbClr>
@@ -11688,7 +11795,7 @@
           <a:bodyPr wrap="square" lIns="0" tIns="0" rIns="0" bIns="0" rtlCol="0" anchor="ctr"/>
           <a:lstStyle/>
           <a:p>
-            <a:pPr marL="0" indent="0" algn="ctr">
+            <a:pPr algn="ctr" indent="0" marL="0">
               <a:buNone/>
             </a:pPr>
             <a:r>
@@ -11705,7 +11812,7 @@
             <a:endParaRPr lang="en-US" sz="950" dirty="0"/>
           </a:p>
           <a:p>
-            <a:pPr marL="0" indent="0" algn="ctr">
+            <a:pPr algn="ctr" indent="0" marL="0">
               <a:buNone/>
             </a:pPr>
             <a:r>
@@ -11744,7 +11851,7 @@
           <a:bodyPr wrap="square" lIns="0" tIns="0" rIns="0" bIns="0" rtlCol="0" anchor="ctr"/>
           <a:lstStyle/>
           <a:p>
-            <a:pPr marL="0" indent="0" algn="ctr">
+            <a:pPr algn="ctr" indent="0" marL="0">
               <a:buNone/>
             </a:pPr>
             <a:r>
@@ -11781,7 +11888,7 @@
           </a:solidFill>
           <a:ln/>
           <a:effectLst>
-            <a:outerShdw blurRad="50800" dist="19050" dir="8100000" algn="bl" rotWithShape="0">
+            <a:outerShdw sx="100000" sy="100000" kx="0" ky="0" algn="bl" rotWithShape="0" blurRad="50800" dist="19050" dir="8100000">
               <a:srgbClr val="000000">
                 <a:alpha val="8000"/>
               </a:srgbClr>
@@ -11810,7 +11917,7 @@
           <a:bodyPr wrap="square" lIns="0" tIns="0" rIns="0" bIns="0" rtlCol="0" anchor="ctr"/>
           <a:lstStyle/>
           <a:p>
-            <a:pPr marL="0" indent="0" algn="ctr">
+            <a:pPr algn="ctr" indent="0" marL="0">
               <a:buNone/>
             </a:pPr>
             <a:r>
@@ -11827,7 +11934,7 @@
             <a:endParaRPr lang="en-US" sz="950" dirty="0"/>
           </a:p>
           <a:p>
-            <a:pPr marL="0" indent="0" algn="ctr">
+            <a:pPr algn="ctr" indent="0" marL="0">
               <a:buNone/>
             </a:pPr>
             <a:r>
@@ -11866,7 +11973,7 @@
           <a:bodyPr wrap="square" lIns="0" tIns="0" rIns="0" bIns="0" rtlCol="0" anchor="ctr"/>
           <a:lstStyle/>
           <a:p>
-            <a:pPr marL="0" indent="0" algn="ctr">
+            <a:pPr algn="ctr" indent="0" marL="0">
               <a:buNone/>
             </a:pPr>
             <a:r>
@@ -11903,7 +12010,7 @@
           </a:solidFill>
           <a:ln/>
           <a:effectLst>
-            <a:outerShdw blurRad="50800" dist="19050" dir="8100000" algn="bl" rotWithShape="0">
+            <a:outerShdw sx="100000" sy="100000" kx="0" ky="0" algn="bl" rotWithShape="0" blurRad="50800" dist="19050" dir="8100000">
               <a:srgbClr val="000000">
                 <a:alpha val="8000"/>
               </a:srgbClr>
@@ -11932,7 +12039,7 @@
           <a:bodyPr wrap="square" lIns="0" tIns="0" rIns="0" bIns="0" rtlCol="0" anchor="ctr"/>
           <a:lstStyle/>
           <a:p>
-            <a:pPr marL="0" indent="0" algn="ctr">
+            <a:pPr algn="ctr" indent="0" marL="0">
               <a:buNone/>
             </a:pPr>
             <a:r>
@@ -11949,7 +12056,7 @@
             <a:endParaRPr lang="en-US" sz="950" dirty="0"/>
           </a:p>
           <a:p>
-            <a:pPr marL="0" indent="0" algn="ctr">
+            <a:pPr algn="ctr" indent="0" marL="0">
               <a:buNone/>
             </a:pPr>
             <a:r>
@@ -11988,7 +12095,7 @@
           <a:bodyPr wrap="square" lIns="0" tIns="0" rIns="0" bIns="0" rtlCol="0" anchor="ctr"/>
           <a:lstStyle/>
           <a:p>
-            <a:pPr marL="0" indent="0" algn="ctr">
+            <a:pPr algn="ctr" indent="0" marL="0">
               <a:buNone/>
             </a:pPr>
             <a:r>
@@ -12025,7 +12132,7 @@
           </a:solidFill>
           <a:ln/>
           <a:effectLst>
-            <a:outerShdw blurRad="50800" dist="19050" dir="8100000" algn="bl" rotWithShape="0">
+            <a:outerShdw sx="100000" sy="100000" kx="0" ky="0" algn="bl" rotWithShape="0" blurRad="50800" dist="19050" dir="8100000">
               <a:srgbClr val="000000">
                 <a:alpha val="8000"/>
               </a:srgbClr>
@@ -12054,7 +12161,7 @@
           <a:bodyPr wrap="square" lIns="0" tIns="0" rIns="0" bIns="0" rtlCol="0" anchor="ctr"/>
           <a:lstStyle/>
           <a:p>
-            <a:pPr marL="0" indent="0" algn="ctr">
+            <a:pPr algn="ctr" indent="0" marL="0">
               <a:buNone/>
             </a:pPr>
             <a:r>
@@ -12071,7 +12178,7 @@
             <a:endParaRPr lang="en-US" sz="950" dirty="0"/>
           </a:p>
           <a:p>
-            <a:pPr marL="0" indent="0" algn="ctr">
+            <a:pPr algn="ctr" indent="0" marL="0">
               <a:buNone/>
             </a:pPr>
             <a:r>
@@ -12130,7 +12237,7 @@
           <a:bodyPr wrap="square" lIns="0" tIns="0" rIns="0" bIns="0" rtlCol="0" anchor="ctr"/>
           <a:lstStyle/>
           <a:p>
-            <a:pPr marL="0" indent="0">
+            <a:pPr indent="0" marL="0">
               <a:buNone/>
             </a:pPr>
             <a:r>
@@ -12144,6 +12251,9 @@
               </a:rPr>
               <a:t>时间跨度：2022.01 - 2025.12 (4年, ~1000交易日)  |  </a:t>
             </a:r>
+            <a:pPr indent="0" marL="0">
+              <a:buNone/>
+            </a:pPr>
             <a:r>
               <a:rPr lang="en-US" sz="1000" b="1" dirty="0">
                 <a:solidFill>
@@ -12155,6 +12265,9 @@
               </a:rPr>
               <a:t>样本外测试：2026 Q1 (60交易日，完全独立)  |  </a:t>
             </a:r>
+            <a:pPr indent="0" marL="0">
+              <a:buNone/>
+            </a:pPr>
             <a:r>
               <a:rPr lang="en-US" sz="1000" dirty="0">
                 <a:solidFill>
@@ -12191,7 +12304,7 @@
           <a:bodyPr wrap="square" rtlCol="0" anchor="ctr"/>
           <a:lstStyle/>
           <a:p>
-            <a:pPr marL="0" indent="0" algn="r">
+            <a:pPr algn="r" indent="0" marL="0">
               <a:buNone/>
             </a:pPr>
             <a:r>
@@ -12225,7 +12338,6 @@
         <a:solidFill>
           <a:srgbClr val="F7F9FC"/>
         </a:solidFill>
-        <a:effectLst/>
       </p:bgPr>
     </p:bg>
     <p:spTree>
@@ -12263,7 +12375,7 @@
           <a:bodyPr wrap="square" lIns="0" tIns="0" rIns="0" bIns="0" rtlCol="0" anchor="ctr"/>
           <a:lstStyle/>
           <a:p>
-            <a:pPr marL="0" indent="0">
+            <a:pPr indent="0" marL="0">
               <a:buNone/>
             </a:pPr>
             <a:r>
@@ -12300,7 +12412,7 @@
           </a:solidFill>
           <a:ln/>
           <a:effectLst>
-            <a:outerShdw blurRad="50800" dist="19050" dir="8100000" algn="bl" rotWithShape="0">
+            <a:outerShdw sx="100000" sy="100000" kx="0" ky="0" algn="bl" rotWithShape="0" blurRad="50800" dist="19050" dir="8100000">
               <a:srgbClr val="000000">
                 <a:alpha val="8000"/>
               </a:srgbClr>
@@ -12349,7 +12461,7 @@
           <a:bodyPr wrap="square" lIns="0" tIns="0" rIns="0" bIns="0" rtlCol="0" anchor="ctr"/>
           <a:lstStyle/>
           <a:p>
-            <a:pPr marL="0" indent="0">
+            <a:pPr indent="0" marL="0">
               <a:buNone/>
             </a:pPr>
             <a:r>
@@ -12388,7 +12500,7 @@
           <a:bodyPr wrap="square" lIns="0" tIns="0" rIns="0" bIns="0" rtlCol="0" anchor="t"/>
           <a:lstStyle/>
           <a:p>
-            <a:pPr marL="0" indent="0">
+            <a:pPr indent="0" marL="0">
               <a:spcAft>
                 <a:spcPts val="200"/>
               </a:spcAft>
@@ -12408,7 +12520,7 @@
             <a:endParaRPr lang="en-US" sz="1000" dirty="0"/>
           </a:p>
           <a:p>
-            <a:pPr marL="0" indent="0">
+            <a:pPr indent="0" marL="0">
               <a:spcAft>
                 <a:spcPts val="200"/>
               </a:spcAft>
@@ -12428,7 +12540,7 @@
             <a:endParaRPr lang="en-US" sz="1000" dirty="0"/>
           </a:p>
           <a:p>
-            <a:pPr marL="0" indent="0">
+            <a:pPr indent="0" marL="0">
               <a:spcAft>
                 <a:spcPts val="200"/>
               </a:spcAft>
@@ -12448,7 +12560,7 @@
             <a:endParaRPr lang="en-US" sz="1000" dirty="0"/>
           </a:p>
           <a:p>
-            <a:pPr marL="0" indent="0">
+            <a:pPr indent="0" marL="0">
               <a:spcAft>
                 <a:spcPts val="200"/>
               </a:spcAft>
@@ -12457,7 +12569,7 @@
             <a:endParaRPr lang="en-US" sz="1000" dirty="0"/>
           </a:p>
           <a:p>
-            <a:pPr marL="0" indent="0">
+            <a:pPr indent="0" marL="0">
               <a:spcAft>
                 <a:spcPts val="200"/>
               </a:spcAft>
@@ -12477,7 +12589,7 @@
             <a:endParaRPr lang="en-US" sz="1000" dirty="0"/>
           </a:p>
           <a:p>
-            <a:pPr marL="0" indent="0">
+            <a:pPr indent="0" marL="0">
               <a:spcAft>
                 <a:spcPts val="200"/>
               </a:spcAft>
@@ -12497,7 +12609,7 @@
             <a:endParaRPr lang="en-US" sz="1000" dirty="0"/>
           </a:p>
           <a:p>
-            <a:pPr marL="0" indent="0">
+            <a:pPr indent="0" marL="0">
               <a:spcAft>
                 <a:spcPts val="200"/>
               </a:spcAft>
@@ -12517,7 +12629,7 @@
             <a:endParaRPr lang="en-US" sz="1000" dirty="0"/>
           </a:p>
           <a:p>
-            <a:pPr marL="0" indent="0">
+            <a:pPr indent="0" marL="0">
               <a:spcAft>
                 <a:spcPts val="200"/>
               </a:spcAft>
@@ -12526,7 +12638,7 @@
             <a:endParaRPr lang="en-US" sz="1000" dirty="0"/>
           </a:p>
           <a:p>
-            <a:pPr marL="0" indent="0">
+            <a:pPr indent="0" marL="0">
               <a:spcAft>
                 <a:spcPts val="200"/>
               </a:spcAft>
@@ -12546,7 +12658,7 @@
             <a:endParaRPr lang="en-US" sz="1000" dirty="0"/>
           </a:p>
           <a:p>
-            <a:pPr marL="0" indent="0">
+            <a:pPr indent="0" marL="0">
               <a:spcAft>
                 <a:spcPts val="200"/>
               </a:spcAft>
@@ -12566,7 +12678,7 @@
             <a:endParaRPr lang="en-US" sz="1000" dirty="0"/>
           </a:p>
           <a:p>
-            <a:pPr marL="0" indent="0">
+            <a:pPr indent="0" marL="0">
               <a:spcAft>
                 <a:spcPts val="200"/>
               </a:spcAft>
@@ -12586,7 +12698,7 @@
             <a:endParaRPr lang="en-US" sz="1000" dirty="0"/>
           </a:p>
           <a:p>
-            <a:pPr marL="0" indent="0">
+            <a:pPr indent="0" marL="0">
               <a:spcAft>
                 <a:spcPts val="200"/>
               </a:spcAft>
@@ -12595,7 +12707,7 @@
             <a:endParaRPr lang="en-US" sz="1000" dirty="0"/>
           </a:p>
           <a:p>
-            <a:pPr marL="0" indent="0">
+            <a:pPr indent="0" marL="0">
               <a:spcAft>
                 <a:spcPts val="200"/>
               </a:spcAft>
@@ -12615,7 +12727,7 @@
             <a:endParaRPr lang="en-US" sz="1000" dirty="0"/>
           </a:p>
           <a:p>
-            <a:pPr marL="0" indent="0">
+            <a:pPr indent="0" marL="0">
               <a:spcAft>
                 <a:spcPts val="200"/>
               </a:spcAft>
@@ -12635,7 +12747,7 @@
             <a:endParaRPr lang="en-US" sz="1000" dirty="0"/>
           </a:p>
           <a:p>
-            <a:pPr marL="0" indent="0">
+            <a:pPr indent="0" marL="0">
               <a:spcAft>
                 <a:spcPts val="200"/>
               </a:spcAft>
@@ -12675,7 +12787,7 @@
           </a:solidFill>
           <a:ln/>
           <a:effectLst>
-            <a:outerShdw blurRad="50800" dist="19050" dir="8100000" algn="bl" rotWithShape="0">
+            <a:outerShdw sx="100000" sy="100000" kx="0" ky="0" algn="bl" rotWithShape="0" blurRad="50800" dist="19050" dir="8100000">
               <a:srgbClr val="000000">
                 <a:alpha val="8000"/>
               </a:srgbClr>
@@ -12724,7 +12836,7 @@
           <a:bodyPr wrap="square" lIns="0" tIns="0" rIns="0" bIns="0" rtlCol="0" anchor="ctr"/>
           <a:lstStyle/>
           <a:p>
-            <a:pPr marL="0" indent="0">
+            <a:pPr indent="0" marL="0">
               <a:buNone/>
             </a:pPr>
             <a:r>
@@ -12763,7 +12875,7 @@
           <a:bodyPr wrap="square" lIns="0" tIns="0" rIns="0" bIns="0" rtlCol="0" anchor="t"/>
           <a:lstStyle/>
           <a:p>
-            <a:pPr marL="0" indent="0">
+            <a:pPr indent="0" marL="0">
               <a:spcAft>
                 <a:spcPts val="200"/>
               </a:spcAft>
@@ -12783,7 +12895,7 @@
             <a:endParaRPr lang="en-US" sz="1000" dirty="0"/>
           </a:p>
           <a:p>
-            <a:pPr marL="0" indent="0">
+            <a:pPr indent="0" marL="0">
               <a:spcAft>
                 <a:spcPts val="200"/>
               </a:spcAft>
@@ -12803,7 +12915,7 @@
             <a:endParaRPr lang="en-US" sz="1000" dirty="0"/>
           </a:p>
           <a:p>
-            <a:pPr marL="0" indent="0">
+            <a:pPr indent="0" marL="0">
               <a:spcAft>
                 <a:spcPts val="200"/>
               </a:spcAft>
@@ -12823,7 +12935,7 @@
             <a:endParaRPr lang="en-US" sz="1000" dirty="0"/>
           </a:p>
           <a:p>
-            <a:pPr marL="0" indent="0">
+            <a:pPr indent="0" marL="0">
               <a:spcAft>
                 <a:spcPts val="200"/>
               </a:spcAft>
@@ -12843,7 +12955,7 @@
             <a:endParaRPr lang="en-US" sz="1000" dirty="0"/>
           </a:p>
           <a:p>
-            <a:pPr marL="0" indent="0">
+            <a:pPr indent="0" marL="0">
               <a:spcAft>
                 <a:spcPts val="200"/>
               </a:spcAft>
@@ -12863,7 +12975,7 @@
             <a:endParaRPr lang="en-US" sz="1000" dirty="0"/>
           </a:p>
           <a:p>
-            <a:pPr marL="0" indent="0">
+            <a:pPr indent="0" marL="0">
               <a:spcAft>
                 <a:spcPts val="200"/>
               </a:spcAft>
@@ -12883,7 +12995,7 @@
             <a:endParaRPr lang="en-US" sz="1000" dirty="0"/>
           </a:p>
           <a:p>
-            <a:pPr marL="0" indent="0">
+            <a:pPr indent="0" marL="0">
               <a:spcAft>
                 <a:spcPts val="200"/>
               </a:spcAft>
@@ -12892,7 +13004,7 @@
             <a:endParaRPr lang="en-US" sz="1000" dirty="0"/>
           </a:p>
           <a:p>
-            <a:pPr marL="0" indent="0">
+            <a:pPr indent="0" marL="0">
               <a:spcAft>
                 <a:spcPts val="200"/>
               </a:spcAft>
@@ -12912,7 +13024,7 @@
             <a:endParaRPr lang="en-US" sz="1000" dirty="0"/>
           </a:p>
           <a:p>
-            <a:pPr marL="0" indent="0">
+            <a:pPr indent="0" marL="0">
               <a:spcAft>
                 <a:spcPts val="200"/>
               </a:spcAft>
@@ -12932,7 +13044,7 @@
             <a:endParaRPr lang="en-US" sz="1000" dirty="0"/>
           </a:p>
           <a:p>
-            <a:pPr marL="0" indent="0">
+            <a:pPr indent="0" marL="0">
               <a:spcAft>
                 <a:spcPts val="200"/>
               </a:spcAft>
@@ -12952,7 +13064,7 @@
             <a:endParaRPr lang="en-US" sz="1000" dirty="0"/>
           </a:p>
           <a:p>
-            <a:pPr marL="0" indent="0">
+            <a:pPr indent="0" marL="0">
               <a:spcAft>
                 <a:spcPts val="200"/>
               </a:spcAft>
@@ -12961,7 +13073,7 @@
             <a:endParaRPr lang="en-US" sz="1000" dirty="0"/>
           </a:p>
           <a:p>
-            <a:pPr marL="0" indent="0">
+            <a:pPr indent="0" marL="0">
               <a:spcAft>
                 <a:spcPts val="200"/>
               </a:spcAft>
@@ -12981,7 +13093,7 @@
             <a:endParaRPr lang="en-US" sz="1000" dirty="0"/>
           </a:p>
           <a:p>
-            <a:pPr marL="0" indent="0">
+            <a:pPr indent="0" marL="0">
               <a:spcAft>
                 <a:spcPts val="200"/>
               </a:spcAft>
@@ -13001,7 +13113,7 @@
             <a:endParaRPr lang="en-US" sz="1000" dirty="0"/>
           </a:p>
           <a:p>
-            <a:pPr marL="0" indent="0">
+            <a:pPr indent="0" marL="0">
               <a:spcAft>
                 <a:spcPts val="200"/>
               </a:spcAft>
@@ -13021,7 +13133,7 @@
             <a:endParaRPr lang="en-US" sz="1000" dirty="0"/>
           </a:p>
           <a:p>
-            <a:pPr marL="0" indent="0">
+            <a:pPr indent="0" marL="0">
               <a:spcAft>
                 <a:spcPts val="200"/>
               </a:spcAft>
@@ -13061,7 +13173,7 @@
           </a:solidFill>
           <a:ln/>
           <a:effectLst>
-            <a:outerShdw blurRad="50800" dist="19050" dir="8100000" algn="bl" rotWithShape="0">
+            <a:outerShdw sx="100000" sy="100000" kx="0" ky="0" algn="bl" rotWithShape="0" blurRad="50800" dist="19050" dir="8100000">
               <a:srgbClr val="000000">
                 <a:alpha val="8000"/>
               </a:srgbClr>
@@ -13110,7 +13222,7 @@
           <a:bodyPr wrap="square" lIns="0" tIns="0" rIns="0" bIns="0" rtlCol="0" anchor="ctr"/>
           <a:lstStyle/>
           <a:p>
-            <a:pPr marL="0" indent="0">
+            <a:pPr indent="0" marL="0">
               <a:buNone/>
             </a:pPr>
             <a:r>
@@ -13149,7 +13261,7 @@
           <a:bodyPr wrap="square" lIns="0" tIns="0" rIns="0" bIns="0" rtlCol="0" anchor="t"/>
           <a:lstStyle/>
           <a:p>
-            <a:pPr marL="0" indent="0">
+            <a:pPr indent="0" marL="0">
               <a:spcAft>
                 <a:spcPts val="200"/>
               </a:spcAft>
@@ -13169,7 +13281,7 @@
             <a:endParaRPr lang="en-US" sz="1000" dirty="0"/>
           </a:p>
           <a:p>
-            <a:pPr marL="0" indent="0">
+            <a:pPr indent="0" marL="0">
               <a:spcAft>
                 <a:spcPts val="200"/>
               </a:spcAft>
@@ -13189,7 +13301,7 @@
             <a:endParaRPr lang="en-US" sz="1000" dirty="0"/>
           </a:p>
           <a:p>
-            <a:pPr marL="0" indent="0">
+            <a:pPr indent="0" marL="0">
               <a:spcAft>
                 <a:spcPts val="200"/>
               </a:spcAft>
@@ -13209,7 +13321,7 @@
             <a:endParaRPr lang="en-US" sz="1000" dirty="0"/>
           </a:p>
           <a:p>
-            <a:pPr marL="0" indent="0">
+            <a:pPr indent="0" marL="0">
               <a:spcAft>
                 <a:spcPts val="200"/>
               </a:spcAft>
@@ -13229,7 +13341,7 @@
             <a:endParaRPr lang="en-US" sz="1000" dirty="0"/>
           </a:p>
           <a:p>
-            <a:pPr marL="0" indent="0">
+            <a:pPr indent="0" marL="0">
               <a:spcAft>
                 <a:spcPts val="200"/>
               </a:spcAft>
@@ -13249,7 +13361,7 @@
             <a:endParaRPr lang="en-US" sz="1000" dirty="0"/>
           </a:p>
           <a:p>
-            <a:pPr marL="0" indent="0">
+            <a:pPr indent="0" marL="0">
               <a:spcAft>
                 <a:spcPts val="200"/>
               </a:spcAft>
@@ -13258,7 +13370,7 @@
             <a:endParaRPr lang="en-US" sz="1000" dirty="0"/>
           </a:p>
           <a:p>
-            <a:pPr marL="0" indent="0">
+            <a:pPr indent="0" marL="0">
               <a:spcAft>
                 <a:spcPts val="200"/>
               </a:spcAft>
@@ -13278,7 +13390,7 @@
             <a:endParaRPr lang="en-US" sz="1000" dirty="0"/>
           </a:p>
           <a:p>
-            <a:pPr marL="0" indent="0">
+            <a:pPr indent="0" marL="0">
               <a:spcAft>
                 <a:spcPts val="200"/>
               </a:spcAft>
@@ -13298,7 +13410,7 @@
             <a:endParaRPr lang="en-US" sz="1000" dirty="0"/>
           </a:p>
           <a:p>
-            <a:pPr marL="0" indent="0">
+            <a:pPr indent="0" marL="0">
               <a:spcAft>
                 <a:spcPts val="200"/>
               </a:spcAft>
@@ -13318,7 +13430,7 @@
             <a:endParaRPr lang="en-US" sz="1000" dirty="0"/>
           </a:p>
           <a:p>
-            <a:pPr marL="0" indent="0">
+            <a:pPr indent="0" marL="0">
               <a:spcAft>
                 <a:spcPts val="200"/>
               </a:spcAft>
@@ -13327,7 +13439,7 @@
             <a:endParaRPr lang="en-US" sz="1000" dirty="0"/>
           </a:p>
           <a:p>
-            <a:pPr marL="0" indent="0">
+            <a:pPr indent="0" marL="0">
               <a:spcAft>
                 <a:spcPts val="200"/>
               </a:spcAft>
@@ -13347,7 +13459,7 @@
             <a:endParaRPr lang="en-US" sz="1000" dirty="0"/>
           </a:p>
           <a:p>
-            <a:pPr marL="0" indent="0">
+            <a:pPr indent="0" marL="0">
               <a:spcAft>
                 <a:spcPts val="200"/>
               </a:spcAft>
@@ -13367,7 +13479,7 @@
             <a:endParaRPr lang="en-US" sz="1000" dirty="0"/>
           </a:p>
           <a:p>
-            <a:pPr marL="0" indent="0">
+            <a:pPr indent="0" marL="0">
               <a:spcAft>
                 <a:spcPts val="200"/>
               </a:spcAft>
@@ -13387,7 +13499,7 @@
             <a:endParaRPr lang="en-US" sz="1000" dirty="0"/>
           </a:p>
           <a:p>
-            <a:pPr marL="0" indent="0">
+            <a:pPr indent="0" marL="0">
               <a:spcAft>
                 <a:spcPts val="200"/>
               </a:spcAft>
@@ -13407,7 +13519,7 @@
             <a:endParaRPr lang="en-US" sz="1000" dirty="0"/>
           </a:p>
           <a:p>
-            <a:pPr marL="0" indent="0">
+            <a:pPr indent="0" marL="0">
               <a:spcAft>
                 <a:spcPts val="200"/>
               </a:spcAft>
@@ -13449,7 +13561,7 @@
           <a:bodyPr wrap="square" lIns="0" tIns="0" rIns="0" bIns="0" rtlCol="0" anchor="ctr"/>
           <a:lstStyle/>
           <a:p>
-            <a:pPr marL="0" indent="0">
+            <a:pPr indent="0" marL="0">
               <a:buNone/>
             </a:pPr>
             <a:r>
@@ -13488,7 +13600,7 @@
           <a:bodyPr wrap="square" rtlCol="0" anchor="ctr"/>
           <a:lstStyle/>
           <a:p>
-            <a:pPr marL="0" indent="0" algn="r">
+            <a:pPr algn="r" indent="0" marL="0">
               <a:buNone/>
             </a:pPr>
             <a:r>
@@ -13522,7 +13634,6 @@
         <a:solidFill>
           <a:srgbClr val="F7F9FC"/>
         </a:solidFill>
-        <a:effectLst/>
       </p:bgPr>
     </p:bg>
     <p:spTree>
@@ -13560,7 +13671,7 @@
           <a:bodyPr wrap="square" lIns="0" tIns="0" rIns="0" bIns="0" rtlCol="0" anchor="ctr"/>
           <a:lstStyle/>
           <a:p>
-            <a:pPr marL="0" indent="0">
+            <a:pPr indent="0" marL="0">
               <a:buNone/>
             </a:pPr>
             <a:r>
@@ -13597,7 +13708,7 @@
           </a:solidFill>
           <a:ln/>
           <a:effectLst>
-            <a:outerShdw blurRad="50800" dist="19050" dir="8100000" algn="bl" rotWithShape="0">
+            <a:outerShdw sx="100000" sy="100000" kx="0" ky="0" algn="bl" rotWithShape="0" blurRad="50800" dist="19050" dir="8100000">
               <a:srgbClr val="000000">
                 <a:alpha val="8000"/>
               </a:srgbClr>
@@ -13646,7 +13757,7 @@
           <a:bodyPr wrap="square" lIns="0" tIns="0" rIns="0" bIns="0" rtlCol="0" anchor="ctr"/>
           <a:lstStyle/>
           <a:p>
-            <a:pPr marL="0" indent="0">
+            <a:pPr indent="0" marL="0">
               <a:buNone/>
             </a:pPr>
             <a:r>
@@ -13685,7 +13796,7 @@
           <a:bodyPr wrap="square" lIns="0" tIns="0" rIns="0" bIns="0" rtlCol="0" anchor="t"/>
           <a:lstStyle/>
           <a:p>
-            <a:pPr marL="0" indent="0">
+            <a:pPr indent="0" marL="0">
               <a:buNone/>
             </a:pPr>
             <a:r>
@@ -13702,7 +13813,7 @@
             <a:endParaRPr lang="en-US" sz="1000" dirty="0"/>
           </a:p>
           <a:p>
-            <a:pPr marL="0" indent="0">
+            <a:pPr indent="0" marL="0">
               <a:buNone/>
             </a:pPr>
             <a:r>
@@ -13719,13 +13830,13 @@
             <a:endParaRPr lang="en-US" sz="1000" dirty="0"/>
           </a:p>
           <a:p>
-            <a:pPr marL="0" indent="0">
+            <a:pPr indent="0" marL="0">
               <a:buNone/>
             </a:pPr>
             <a:endParaRPr lang="en-US" sz="1000" dirty="0"/>
           </a:p>
           <a:p>
-            <a:pPr marL="0" indent="0">
+            <a:pPr indent="0" marL="0">
               <a:buNone/>
             </a:pPr>
             <a:r>
@@ -13742,7 +13853,7 @@
             <a:endParaRPr lang="en-US" sz="1000" dirty="0"/>
           </a:p>
           <a:p>
-            <a:pPr marL="0" indent="0">
+            <a:pPr indent="0" marL="0">
               <a:buNone/>
             </a:pPr>
             <a:r>
@@ -13759,7 +13870,7 @@
             <a:endParaRPr lang="en-US" sz="1000" dirty="0"/>
           </a:p>
           <a:p>
-            <a:pPr marL="0" indent="0">
+            <a:pPr indent="0" marL="0">
               <a:buNone/>
             </a:pPr>
             <a:r>
@@ -13796,7 +13907,7 @@
           </a:solidFill>
           <a:ln/>
           <a:effectLst>
-            <a:outerShdw blurRad="50800" dist="19050" dir="8100000" algn="bl" rotWithShape="0">
+            <a:outerShdw sx="100000" sy="100000" kx="0" ky="0" algn="bl" rotWithShape="0" blurRad="50800" dist="19050" dir="8100000">
               <a:srgbClr val="000000">
                 <a:alpha val="8000"/>
               </a:srgbClr>
@@ -13845,7 +13956,7 @@
           <a:bodyPr wrap="square" lIns="0" tIns="0" rIns="0" bIns="0" rtlCol="0" anchor="ctr"/>
           <a:lstStyle/>
           <a:p>
-            <a:pPr marL="0" indent="0">
+            <a:pPr indent="0" marL="0">
               <a:buNone/>
             </a:pPr>
             <a:r>
@@ -13884,7 +13995,7 @@
           <a:bodyPr wrap="square" lIns="0" tIns="0" rIns="0" bIns="0" rtlCol="0" anchor="t"/>
           <a:lstStyle/>
           <a:p>
-            <a:pPr marL="0" indent="0">
+            <a:pPr indent="0" marL="0">
               <a:buNone/>
             </a:pPr>
             <a:r>
@@ -13901,7 +14012,7 @@
             <a:endParaRPr lang="en-US" sz="1000" dirty="0"/>
           </a:p>
           <a:p>
-            <a:pPr marL="0" indent="0">
+            <a:pPr indent="0" marL="0">
               <a:buNone/>
             </a:pPr>
             <a:r>
@@ -13918,13 +14029,13 @@
             <a:endParaRPr lang="en-US" sz="1000" dirty="0"/>
           </a:p>
           <a:p>
-            <a:pPr marL="0" indent="0">
+            <a:pPr indent="0" marL="0">
               <a:buNone/>
             </a:pPr>
             <a:endParaRPr lang="en-US" sz="1000" dirty="0"/>
           </a:p>
           <a:p>
-            <a:pPr marL="0" indent="0">
+            <a:pPr indent="0" marL="0">
               <a:buNone/>
             </a:pPr>
             <a:r>
@@ -13941,7 +14052,7 @@
             <a:endParaRPr lang="en-US" sz="1000" dirty="0"/>
           </a:p>
           <a:p>
-            <a:pPr marL="0" indent="0">
+            <a:pPr indent="0" marL="0">
               <a:buNone/>
             </a:pPr>
             <a:r>
@@ -13958,7 +14069,7 @@
             <a:endParaRPr lang="en-US" sz="1000" dirty="0"/>
           </a:p>
           <a:p>
-            <a:pPr marL="0" indent="0">
+            <a:pPr indent="0" marL="0">
               <a:buNone/>
             </a:pPr>
             <a:r>
@@ -14037,7 +14148,7 @@
           <a:bodyPr wrap="square" lIns="0" tIns="0" rIns="0" bIns="0" rtlCol="0" anchor="ctr"/>
           <a:lstStyle/>
           <a:p>
-            <a:pPr marL="0" indent="0">
+            <a:pPr indent="0" marL="0">
               <a:buNone/>
             </a:pPr>
             <a:r>
@@ -14076,7 +14187,7 @@
           <a:bodyPr wrap="square" lIns="0" tIns="0" rIns="0" bIns="0" rtlCol="0" anchor="ctr"/>
           <a:lstStyle/>
           <a:p>
-            <a:pPr marL="0" indent="0">
+            <a:pPr indent="0" marL="0">
               <a:buNone/>
             </a:pPr>
             <a:r>
@@ -14090,6 +14201,9 @@
               </a:rPr>
               <a:t>signal_raw =   </a:t>
             </a:r>
+            <a:pPr indent="0" marL="0">
+              <a:buNone/>
+            </a:pPr>
             <a:r>
               <a:rPr lang="en-US" sz="1100" b="1" dirty="0">
                 <a:solidFill>
@@ -14101,6 +14215,9 @@
               </a:rPr>
               <a:t>𝟙[MA(5)&gt;MA(20)]</a:t>
             </a:r>
+            <a:pPr indent="0" marL="0">
+              <a:buNone/>
+            </a:pPr>
             <a:r>
               <a:rPr lang="en-US" sz="1100" dirty="0">
                 <a:solidFill>
@@ -14112,6 +14229,9 @@
               </a:rPr>
               <a:t>  ∧  </a:t>
             </a:r>
+            <a:pPr indent="0" marL="0">
+              <a:buNone/>
+            </a:pPr>
             <a:r>
               <a:rPr lang="en-US" sz="1100" b="1" dirty="0">
                 <a:solidFill>
@@ -14123,6 +14243,9 @@
               </a:rPr>
               <a:t>𝟙[MACD柱&gt;0]</a:t>
             </a:r>
+            <a:pPr indent="0" marL="0">
+              <a:buNone/>
+            </a:pPr>
             <a:r>
               <a:rPr lang="en-US" sz="1100" dirty="0">
                 <a:solidFill>
@@ -14134,6 +14257,9 @@
               </a:rPr>
               <a:t>  ∧  </a:t>
             </a:r>
+            <a:pPr indent="0" marL="0">
+              <a:buNone/>
+            </a:pPr>
             <a:r>
               <a:rPr lang="en-US" sz="1100" b="1" dirty="0">
                 <a:solidFill>
@@ -14145,6 +14271,9 @@
               </a:rPr>
               <a:t>𝟙[RSI&lt;70]</a:t>
             </a:r>
+            <a:pPr indent="0" marL="0">
+              <a:buNone/>
+            </a:pPr>
             <a:r>
               <a:rPr lang="en-US" sz="1100" dirty="0">
                 <a:solidFill>
@@ -14156,6 +14285,9 @@
               </a:rPr>
               <a:t>  ∧  </a:t>
             </a:r>
+            <a:pPr indent="0" marL="0">
+              <a:buNone/>
+            </a:pPr>
             <a:r>
               <a:rPr lang="en-US" sz="1100" b="1" dirty="0">
                 <a:solidFill>
@@ -14167,6 +14299,9 @@
               </a:rPr>
               <a:t>𝟙[close&gt;BBˡᵒʷᵉʳ]</a:t>
             </a:r>
+            <a:pPr indent="0" marL="0">
+              <a:buNone/>
+            </a:pPr>
             <a:r>
               <a:rPr lang="en-US" sz="1100" dirty="0">
                 <a:solidFill>
@@ -14178,6 +14313,9 @@
               </a:rPr>
               <a:t>  ∧  </a:t>
             </a:r>
+            <a:pPr indent="0" marL="0">
+              <a:buNone/>
+            </a:pPr>
             <a:r>
               <a:rPr lang="en-US" sz="1100" b="1" dirty="0">
                 <a:solidFill>
@@ -14214,7 +14352,7 @@
           <a:bodyPr wrap="square" lIns="0" tIns="0" rIns="0" bIns="0" rtlCol="0" anchor="t"/>
           <a:lstStyle/>
           <a:p>
-            <a:pPr marL="0" indent="0">
+            <a:pPr indent="0" marL="0">
               <a:buNone/>
             </a:pPr>
             <a:r>
@@ -14231,7 +14369,7 @@
             <a:endParaRPr lang="en-US" sz="1150" dirty="0"/>
           </a:p>
           <a:p>
-            <a:pPr marL="0" indent="0">
+            <a:pPr indent="0" marL="0">
               <a:buNone/>
             </a:pPr>
             <a:r>
@@ -14248,7 +14386,7 @@
             <a:endParaRPr lang="en-US" sz="1150" dirty="0"/>
           </a:p>
           <a:p>
-            <a:pPr marL="0" indent="0">
+            <a:pPr indent="0" marL="0">
               <a:buNone/>
             </a:pPr>
             <a:r>
@@ -14265,7 +14403,7 @@
             <a:endParaRPr lang="en-US" sz="1150" dirty="0"/>
           </a:p>
           <a:p>
-            <a:pPr marL="0" indent="0">
+            <a:pPr indent="0" marL="0">
               <a:buNone/>
             </a:pPr>
             <a:r>
@@ -14324,7 +14462,7 @@
           <a:bodyPr wrap="square" lIns="0" tIns="0" rIns="0" bIns="0" rtlCol="0" anchor="ctr"/>
           <a:lstStyle/>
           <a:p>
-            <a:pPr marL="0" indent="0">
+            <a:pPr indent="0" marL="0">
               <a:buNone/>
             </a:pPr>
             <a:r>
@@ -14363,7 +14501,7 @@
           <a:bodyPr wrap="square" lIns="0" tIns="0" rIns="0" bIns="0" rtlCol="0" anchor="t"/>
           <a:lstStyle/>
           <a:p>
-            <a:pPr marL="0" indent="0">
+            <a:pPr indent="0" marL="0">
               <a:spcAft>
                 <a:spcPts val="200"/>
               </a:spcAft>
@@ -14383,7 +14521,7 @@
             <a:endParaRPr lang="en-US" sz="1000" dirty="0"/>
           </a:p>
           <a:p>
-            <a:pPr marL="0" indent="0">
+            <a:pPr indent="0" marL="0">
               <a:spcAft>
                 <a:spcPts val="200"/>
               </a:spcAft>
@@ -14403,7 +14541,7 @@
             <a:endParaRPr lang="en-US" sz="1000" dirty="0"/>
           </a:p>
           <a:p>
-            <a:pPr marL="0" indent="0">
+            <a:pPr indent="0" marL="0">
               <a:spcAft>
                 <a:spcPts val="200"/>
               </a:spcAft>
@@ -14423,7 +14561,7 @@
             <a:endParaRPr lang="en-US" sz="1000" dirty="0"/>
           </a:p>
           <a:p>
-            <a:pPr marL="0" indent="0">
+            <a:pPr indent="0" marL="0">
               <a:spcAft>
                 <a:spcPts val="200"/>
               </a:spcAft>
@@ -14443,7 +14581,7 @@
             <a:endParaRPr lang="en-US" sz="1000" dirty="0"/>
           </a:p>
           <a:p>
-            <a:pPr marL="0" indent="0">
+            <a:pPr indent="0" marL="0">
               <a:spcAft>
                 <a:spcPts val="200"/>
               </a:spcAft>
@@ -14485,7 +14623,7 @@
           <a:bodyPr wrap="square" rtlCol="0" anchor="ctr"/>
           <a:lstStyle/>
           <a:p>
-            <a:pPr marL="0" indent="0" algn="r">
+            <a:pPr algn="r" indent="0" marL="0">
               <a:buNone/>
             </a:pPr>
             <a:r>
@@ -14519,7 +14657,6 @@
         <a:solidFill>
           <a:srgbClr val="F7F9FC"/>
         </a:solidFill>
-        <a:effectLst/>
       </p:bgPr>
     </p:bg>
     <p:spTree>
@@ -14557,7 +14694,7 @@
           <a:bodyPr wrap="square" lIns="0" tIns="0" rIns="0" bIns="0" rtlCol="0" anchor="ctr"/>
           <a:lstStyle/>
           <a:p>
-            <a:pPr marL="0" indent="0">
+            <a:pPr indent="0" marL="0">
               <a:buNone/>
             </a:pPr>
             <a:r>
@@ -14594,7 +14731,7 @@
           </a:solidFill>
           <a:ln/>
           <a:effectLst>
-            <a:outerShdw blurRad="50800" dist="19050" dir="8100000" algn="bl" rotWithShape="0">
+            <a:outerShdw sx="100000" sy="100000" kx="0" ky="0" algn="bl" rotWithShape="0" blurRad="50800" dist="19050" dir="8100000">
               <a:srgbClr val="000000">
                 <a:alpha val="8000"/>
               </a:srgbClr>
@@ -14643,7 +14780,7 @@
           <a:bodyPr wrap="square" lIns="0" tIns="0" rIns="0" bIns="0" rtlCol="0" anchor="ctr"/>
           <a:lstStyle/>
           <a:p>
-            <a:pPr marL="0" indent="0">
+            <a:pPr indent="0" marL="0">
               <a:buNone/>
             </a:pPr>
             <a:r>
@@ -14682,7 +14819,7 @@
           <a:bodyPr wrap="square" lIns="0" tIns="0" rIns="0" bIns="0" rtlCol="0" anchor="t"/>
           <a:lstStyle/>
           <a:p>
-            <a:pPr marL="0" indent="0">
+            <a:pPr indent="0" marL="0">
               <a:spcAft>
                 <a:spcPts val="200"/>
               </a:spcAft>
@@ -14702,7 +14839,7 @@
             <a:endParaRPr lang="en-US" sz="850" dirty="0"/>
           </a:p>
           <a:p>
-            <a:pPr marL="0" indent="0">
+            <a:pPr indent="0" marL="0">
               <a:spcAft>
                 <a:spcPts val="200"/>
               </a:spcAft>
@@ -14722,7 +14859,7 @@
             <a:endParaRPr lang="en-US" sz="850" dirty="0"/>
           </a:p>
           <a:p>
-            <a:pPr marL="0" indent="0">
+            <a:pPr indent="0" marL="0">
               <a:spcAft>
                 <a:spcPts val="200"/>
               </a:spcAft>
@@ -14742,7 +14879,7 @@
             <a:endParaRPr lang="en-US" sz="850" dirty="0"/>
           </a:p>
           <a:p>
-            <a:pPr marL="0" indent="0">
+            <a:pPr indent="0" marL="0">
               <a:spcAft>
                 <a:spcPts val="200"/>
               </a:spcAft>
@@ -14762,7 +14899,7 @@
             <a:endParaRPr lang="en-US" sz="850" dirty="0"/>
           </a:p>
           <a:p>
-            <a:pPr marL="0" indent="0">
+            <a:pPr indent="0" marL="0">
               <a:spcAft>
                 <a:spcPts val="200"/>
               </a:spcAft>
@@ -14782,7 +14919,7 @@
             <a:endParaRPr lang="en-US" sz="850" dirty="0"/>
           </a:p>
           <a:p>
-            <a:pPr marL="0" indent="0">
+            <a:pPr indent="0" marL="0">
               <a:spcAft>
                 <a:spcPts val="200"/>
               </a:spcAft>
@@ -14802,7 +14939,7 @@
             <a:endParaRPr lang="en-US" sz="850" dirty="0"/>
           </a:p>
           <a:p>
-            <a:pPr marL="0" indent="0">
+            <a:pPr indent="0" marL="0">
               <a:spcAft>
                 <a:spcPts val="200"/>
               </a:spcAft>
@@ -14822,7 +14959,7 @@
             <a:endParaRPr lang="en-US" sz="850" dirty="0"/>
           </a:p>
           <a:p>
-            <a:pPr marL="0" indent="0">
+            <a:pPr indent="0" marL="0">
               <a:spcAft>
                 <a:spcPts val="200"/>
               </a:spcAft>
@@ -14842,7 +14979,7 @@
             <a:endParaRPr lang="en-US" sz="850" dirty="0"/>
           </a:p>
           <a:p>
-            <a:pPr marL="0" indent="0">
+            <a:pPr indent="0" marL="0">
               <a:spcAft>
                 <a:spcPts val="200"/>
               </a:spcAft>
@@ -14851,7 +14988,7 @@
             <a:endParaRPr lang="en-US" sz="850" dirty="0"/>
           </a:p>
           <a:p>
-            <a:pPr marL="0" indent="0">
+            <a:pPr indent="0" marL="0">
               <a:spcAft>
                 <a:spcPts val="200"/>
               </a:spcAft>
@@ -14871,7 +15008,7 @@
             <a:endParaRPr lang="en-US" sz="850" dirty="0"/>
           </a:p>
           <a:p>
-            <a:pPr marL="0" indent="0">
+            <a:pPr indent="0" marL="0">
               <a:spcAft>
                 <a:spcPts val="200"/>
               </a:spcAft>
@@ -14891,7 +15028,7 @@
             <a:endParaRPr lang="en-US" sz="850" dirty="0"/>
           </a:p>
           <a:p>
-            <a:pPr marL="0" indent="0">
+            <a:pPr indent="0" marL="0">
               <a:spcAft>
                 <a:spcPts val="200"/>
               </a:spcAft>
@@ -14931,7 +15068,7 @@
           </a:solidFill>
           <a:ln/>
           <a:effectLst>
-            <a:outerShdw blurRad="50800" dist="19050" dir="8100000" algn="bl" rotWithShape="0">
+            <a:outerShdw sx="100000" sy="100000" kx="0" ky="0" algn="bl" rotWithShape="0" blurRad="50800" dist="19050" dir="8100000">
               <a:srgbClr val="000000">
                 <a:alpha val="8000"/>
               </a:srgbClr>
@@ -14980,7 +15117,7 @@
           <a:bodyPr wrap="square" lIns="0" tIns="0" rIns="0" bIns="0" rtlCol="0" anchor="ctr"/>
           <a:lstStyle/>
           <a:p>
-            <a:pPr marL="0" indent="0">
+            <a:pPr indent="0" marL="0">
               <a:buNone/>
             </a:pPr>
             <a:r>
@@ -15019,7 +15156,7 @@
           <a:bodyPr wrap="square" lIns="0" tIns="0" rIns="0" bIns="0" rtlCol="0" anchor="t"/>
           <a:lstStyle/>
           <a:p>
-            <a:pPr marL="0" indent="0">
+            <a:pPr indent="0" marL="0">
               <a:spcAft>
                 <a:spcPts val="200"/>
               </a:spcAft>
@@ -15039,7 +15176,7 @@
             <a:endParaRPr lang="en-US" sz="800" dirty="0"/>
           </a:p>
           <a:p>
-            <a:pPr marL="0" indent="0">
+            <a:pPr indent="0" marL="0">
               <a:spcAft>
                 <a:spcPts val="200"/>
               </a:spcAft>
@@ -15059,7 +15196,7 @@
             <a:endParaRPr lang="en-US" sz="800" dirty="0"/>
           </a:p>
           <a:p>
-            <a:pPr marL="0" indent="0">
+            <a:pPr indent="0" marL="0">
               <a:spcAft>
                 <a:spcPts val="200"/>
               </a:spcAft>
@@ -15079,7 +15216,7 @@
             <a:endParaRPr lang="en-US" sz="800" dirty="0"/>
           </a:p>
           <a:p>
-            <a:pPr marL="0" indent="0">
+            <a:pPr indent="0" marL="0">
               <a:spcAft>
                 <a:spcPts val="200"/>
               </a:spcAft>
@@ -15099,7 +15236,7 @@
             <a:endParaRPr lang="en-US" sz="800" dirty="0"/>
           </a:p>
           <a:p>
-            <a:pPr marL="0" indent="0">
+            <a:pPr indent="0" marL="0">
               <a:spcAft>
                 <a:spcPts val="200"/>
               </a:spcAft>
@@ -15119,7 +15256,7 @@
             <a:endParaRPr lang="en-US" sz="800" dirty="0"/>
           </a:p>
           <a:p>
-            <a:pPr marL="0" indent="0">
+            <a:pPr indent="0" marL="0">
               <a:spcAft>
                 <a:spcPts val="200"/>
               </a:spcAft>
@@ -15128,7 +15265,7 @@
             <a:endParaRPr lang="en-US" sz="800" dirty="0"/>
           </a:p>
           <a:p>
-            <a:pPr marL="0" indent="0">
+            <a:pPr indent="0" marL="0">
               <a:spcAft>
                 <a:spcPts val="200"/>
               </a:spcAft>
@@ -15148,7 +15285,7 @@
             <a:endParaRPr lang="en-US" sz="800" dirty="0"/>
           </a:p>
           <a:p>
-            <a:pPr marL="0" indent="0">
+            <a:pPr indent="0" marL="0">
               <a:spcAft>
                 <a:spcPts val="200"/>
               </a:spcAft>
@@ -15168,7 +15305,7 @@
             <a:endParaRPr lang="en-US" sz="800" dirty="0"/>
           </a:p>
           <a:p>
-            <a:pPr marL="0" indent="0">
+            <a:pPr indent="0" marL="0">
               <a:spcAft>
                 <a:spcPts val="200"/>
               </a:spcAft>
@@ -15177,7 +15314,7 @@
             <a:endParaRPr lang="en-US" sz="800" dirty="0"/>
           </a:p>
           <a:p>
-            <a:pPr marL="0" indent="0">
+            <a:pPr indent="0" marL="0">
               <a:spcAft>
                 <a:spcPts val="200"/>
               </a:spcAft>
@@ -15197,7 +15334,7 @@
             <a:endParaRPr lang="en-US" sz="800" dirty="0"/>
           </a:p>
           <a:p>
-            <a:pPr marL="0" indent="0">
+            <a:pPr indent="0" marL="0">
               <a:spcAft>
                 <a:spcPts val="200"/>
               </a:spcAft>
@@ -15217,7 +15354,7 @@
             <a:endParaRPr lang="en-US" sz="800" dirty="0"/>
           </a:p>
           <a:p>
-            <a:pPr marL="0" indent="0">
+            <a:pPr indent="0" marL="0">
               <a:spcAft>
                 <a:spcPts val="200"/>
               </a:spcAft>
@@ -15299,7 +15436,7 @@
           <a:bodyPr wrap="square" lIns="0" tIns="0" rIns="0" bIns="0" rtlCol="0" anchor="ctr"/>
           <a:lstStyle/>
           <a:p>
-            <a:pPr marL="0" indent="0">
+            <a:pPr indent="0" marL="0">
               <a:buNone/>
             </a:pPr>
             <a:r>
@@ -15338,7 +15475,7 @@
           <a:bodyPr wrap="square" lIns="0" tIns="0" rIns="0" bIns="0" rtlCol="0" anchor="t"/>
           <a:lstStyle/>
           <a:p>
-            <a:pPr marL="0" indent="0">
+            <a:pPr indent="0" marL="0">
               <a:spcAft>
                 <a:spcPts val="200"/>
               </a:spcAft>
@@ -15358,7 +15495,7 @@
             <a:endParaRPr lang="en-US" sz="900" dirty="0"/>
           </a:p>
           <a:p>
-            <a:pPr marL="0" indent="0">
+            <a:pPr indent="0" marL="0">
               <a:spcAft>
                 <a:spcPts val="200"/>
               </a:spcAft>
@@ -15378,7 +15515,7 @@
             <a:endParaRPr lang="en-US" sz="900" dirty="0"/>
           </a:p>
           <a:p>
-            <a:pPr marL="0" indent="0">
+            <a:pPr indent="0" marL="0">
               <a:spcAft>
                 <a:spcPts val="200"/>
               </a:spcAft>
@@ -15398,7 +15535,7 @@
             <a:endParaRPr lang="en-US" sz="900" dirty="0"/>
           </a:p>
           <a:p>
-            <a:pPr marL="0" indent="0">
+            <a:pPr indent="0" marL="0">
               <a:spcAft>
                 <a:spcPts val="200"/>
               </a:spcAft>
@@ -15418,7 +15555,7 @@
             <a:endParaRPr lang="en-US" sz="900" dirty="0"/>
           </a:p>
           <a:p>
-            <a:pPr marL="0" indent="0">
+            <a:pPr indent="0" marL="0">
               <a:spcAft>
                 <a:spcPts val="200"/>
               </a:spcAft>
@@ -15460,7 +15597,7 @@
           <a:bodyPr wrap="square" lIns="0" tIns="0" rIns="0" bIns="0" rtlCol="0" anchor="ctr"/>
           <a:lstStyle/>
           <a:p>
-            <a:pPr marL="0" indent="0">
+            <a:pPr indent="0" marL="0">
               <a:buNone/>
             </a:pPr>
             <a:r>
@@ -15499,7 +15636,7 @@
           <a:bodyPr wrap="square" lIns="0" tIns="0" rIns="0" bIns="0" rtlCol="0" anchor="t"/>
           <a:lstStyle/>
           <a:p>
-            <a:pPr marL="0" indent="0">
+            <a:pPr indent="0" marL="0">
               <a:buNone/>
             </a:pPr>
             <a:r>
@@ -15516,7 +15653,7 @@
             <a:endParaRPr lang="en-US" sz="900" dirty="0"/>
           </a:p>
           <a:p>
-            <a:pPr marL="0" indent="0">
+            <a:pPr indent="0" marL="0">
               <a:buNone/>
             </a:pPr>
             <a:r>
@@ -15533,7 +15670,7 @@
             <a:endParaRPr lang="en-US" sz="900" dirty="0"/>
           </a:p>
           <a:p>
-            <a:pPr marL="0" indent="0">
+            <a:pPr indent="0" marL="0">
               <a:buNone/>
             </a:pPr>
             <a:r>
@@ -15550,13 +15687,13 @@
             <a:endParaRPr lang="en-US" sz="900" dirty="0"/>
           </a:p>
           <a:p>
-            <a:pPr marL="0" indent="0">
+            <a:pPr indent="0" marL="0">
               <a:buNone/>
             </a:pPr>
             <a:endParaRPr lang="en-US" sz="900" dirty="0"/>
           </a:p>
           <a:p>
-            <a:pPr marL="0" indent="0">
+            <a:pPr indent="0" marL="0">
               <a:buNone/>
             </a:pPr>
             <a:r>
@@ -15573,7 +15710,7 @@
             <a:endParaRPr lang="en-US" sz="900" dirty="0"/>
           </a:p>
           <a:p>
-            <a:pPr marL="0" indent="0">
+            <a:pPr indent="0" marL="0">
               <a:buNone/>
             </a:pPr>
             <a:r>
@@ -15590,7 +15727,7 @@
             <a:endParaRPr lang="en-US" sz="900" dirty="0"/>
           </a:p>
           <a:p>
-            <a:pPr marL="0" indent="0">
+            <a:pPr indent="0" marL="0">
               <a:buNone/>
             </a:pPr>
             <a:r>
@@ -15607,7 +15744,7 @@
             <a:endParaRPr lang="en-US" sz="900" dirty="0"/>
           </a:p>
           <a:p>
-            <a:pPr marL="0" indent="0">
+            <a:pPr indent="0" marL="0">
               <a:buNone/>
             </a:pPr>
             <a:r>
@@ -15624,13 +15761,13 @@
             <a:endParaRPr lang="en-US" sz="900" dirty="0"/>
           </a:p>
           <a:p>
-            <a:pPr marL="0" indent="0">
+            <a:pPr indent="0" marL="0">
               <a:buNone/>
             </a:pPr>
             <a:endParaRPr lang="en-US" sz="900" dirty="0"/>
           </a:p>
           <a:p>
-            <a:pPr marL="0" indent="0">
+            <a:pPr indent="0" marL="0">
               <a:buNone/>
             </a:pPr>
             <a:r>
@@ -15669,7 +15806,7 @@
           <a:bodyPr wrap="square" rtlCol="0" anchor="ctr"/>
           <a:lstStyle/>
           <a:p>
-            <a:pPr marL="0" indent="0" algn="r">
+            <a:pPr algn="r" indent="0" marL="0">
               <a:buNone/>
             </a:pPr>
             <a:r>
@@ -15703,7 +15840,6 @@
         <a:solidFill>
           <a:srgbClr val="F7F9FC"/>
         </a:solidFill>
-        <a:effectLst/>
       </p:bgPr>
     </p:bg>
     <p:spTree>
@@ -15741,7 +15877,7 @@
           <a:bodyPr wrap="square" lIns="0" tIns="0" rIns="0" bIns="0" rtlCol="0" anchor="ctr"/>
           <a:lstStyle/>
           <a:p>
-            <a:pPr marL="0" indent="0">
+            <a:pPr indent="0" marL="0">
               <a:buNone/>
             </a:pPr>
             <a:r>
@@ -15778,7 +15914,7 @@
           </a:solidFill>
           <a:ln/>
           <a:effectLst>
-            <a:outerShdw blurRad="50800" dist="19050" dir="8100000" algn="bl" rotWithShape="0">
+            <a:outerShdw sx="100000" sy="100000" kx="0" ky="0" algn="bl" rotWithShape="0" blurRad="50800" dist="19050" dir="8100000">
               <a:srgbClr val="000000">
                 <a:alpha val="8000"/>
               </a:srgbClr>
@@ -15827,7 +15963,7 @@
           <a:bodyPr wrap="square" lIns="0" tIns="0" rIns="0" bIns="0" rtlCol="0" anchor="ctr"/>
           <a:lstStyle/>
           <a:p>
-            <a:pPr marL="0" indent="0">
+            <a:pPr indent="0" marL="0">
               <a:buNone/>
             </a:pPr>
             <a:r>
@@ -15866,7 +16002,7 @@
           <a:bodyPr wrap="square" lIns="0" tIns="0" rIns="0" bIns="0" rtlCol="0" anchor="t"/>
           <a:lstStyle/>
           <a:p>
-            <a:pPr marL="0" indent="0">
+            <a:pPr indent="0" marL="0">
               <a:buNone/>
             </a:pPr>
             <a:r>
@@ -15883,7 +16019,7 @@
             <a:endParaRPr lang="en-US" sz="1000" dirty="0"/>
           </a:p>
           <a:p>
-            <a:pPr marL="0" indent="0">
+            <a:pPr indent="0" marL="0">
               <a:buNone/>
             </a:pPr>
             <a:r>
@@ -15900,7 +16036,7 @@
             <a:endParaRPr lang="en-US" sz="1000" dirty="0"/>
           </a:p>
           <a:p>
-            <a:pPr marL="0" indent="0">
+            <a:pPr indent="0" marL="0">
               <a:buNone/>
             </a:pPr>
             <a:r>
@@ -15917,7 +16053,7 @@
             <a:endParaRPr lang="en-US" sz="1000" dirty="0"/>
           </a:p>
           <a:p>
-            <a:pPr marL="0" indent="0">
+            <a:pPr indent="0" marL="0">
               <a:buNone/>
             </a:pPr>
             <a:r>
@@ -15934,7 +16070,7 @@
             <a:endParaRPr lang="en-US" sz="1000" dirty="0"/>
           </a:p>
           <a:p>
-            <a:pPr marL="0" indent="0">
+            <a:pPr indent="0" marL="0">
               <a:buNone/>
             </a:pPr>
             <a:r>
@@ -15951,13 +16087,13 @@
             <a:endParaRPr lang="en-US" sz="1000" dirty="0"/>
           </a:p>
           <a:p>
-            <a:pPr marL="0" indent="0">
+            <a:pPr indent="0" marL="0">
               <a:buNone/>
             </a:pPr>
             <a:endParaRPr lang="en-US" sz="1000" dirty="0"/>
           </a:p>
           <a:p>
-            <a:pPr marL="0" indent="0">
+            <a:pPr indent="0" marL="0">
               <a:buNone/>
             </a:pPr>
             <a:r>
@@ -15974,7 +16110,7 @@
             <a:endParaRPr lang="en-US" sz="1000" dirty="0"/>
           </a:p>
           <a:p>
-            <a:pPr marL="0" indent="0">
+            <a:pPr indent="0" marL="0">
               <a:buNone/>
             </a:pPr>
             <a:r>
@@ -16011,7 +16147,7 @@
           </a:solidFill>
           <a:ln/>
           <a:effectLst>
-            <a:outerShdw blurRad="50800" dist="19050" dir="8100000" algn="bl" rotWithShape="0">
+            <a:outerShdw sx="100000" sy="100000" kx="0" ky="0" algn="bl" rotWithShape="0" blurRad="50800" dist="19050" dir="8100000">
               <a:srgbClr val="000000">
                 <a:alpha val="8000"/>
               </a:srgbClr>
@@ -16060,7 +16196,7 @@
           <a:bodyPr wrap="square" lIns="0" tIns="0" rIns="0" bIns="0" rtlCol="0" anchor="ctr"/>
           <a:lstStyle/>
           <a:p>
-            <a:pPr marL="0" indent="0">
+            <a:pPr indent="0" marL="0">
               <a:buNone/>
             </a:pPr>
             <a:r>
@@ -16099,7 +16235,7 @@
           <a:bodyPr wrap="square" lIns="0" tIns="0" rIns="0" bIns="0" rtlCol="0" anchor="t"/>
           <a:lstStyle/>
           <a:p>
-            <a:pPr marL="0" indent="0">
+            <a:pPr indent="0" marL="0">
               <a:buNone/>
             </a:pPr>
             <a:r>
@@ -16116,7 +16252,7 @@
             <a:endParaRPr lang="en-US" sz="1000" dirty="0"/>
           </a:p>
           <a:p>
-            <a:pPr marL="0" indent="0">
+            <a:pPr indent="0" marL="0">
               <a:buNone/>
             </a:pPr>
             <a:r>
@@ -16133,7 +16269,7 @@
             <a:endParaRPr lang="en-US" sz="1000" dirty="0"/>
           </a:p>
           <a:p>
-            <a:pPr marL="0" indent="0">
+            <a:pPr indent="0" marL="0">
               <a:buNone/>
             </a:pPr>
             <a:r>
@@ -16150,7 +16286,7 @@
             <a:endParaRPr lang="en-US" sz="1000" dirty="0"/>
           </a:p>
           <a:p>
-            <a:pPr marL="0" indent="0">
+            <a:pPr indent="0" marL="0">
               <a:buNone/>
             </a:pPr>
             <a:r>
@@ -16167,13 +16303,13 @@
             <a:endParaRPr lang="en-US" sz="1000" dirty="0"/>
           </a:p>
           <a:p>
-            <a:pPr marL="0" indent="0">
+            <a:pPr indent="0" marL="0">
               <a:buNone/>
             </a:pPr>
             <a:endParaRPr lang="en-US" sz="1000" dirty="0"/>
           </a:p>
           <a:p>
-            <a:pPr marL="0" indent="0">
+            <a:pPr indent="0" marL="0">
               <a:buNone/>
             </a:pPr>
             <a:r>
@@ -16190,7 +16326,7 @@
             <a:endParaRPr lang="en-US" sz="1000" dirty="0"/>
           </a:p>
           <a:p>
-            <a:pPr marL="0" indent="0">
+            <a:pPr indent="0" marL="0">
               <a:buNone/>
             </a:pPr>
             <a:r>
@@ -16227,7 +16363,7 @@
           </a:solidFill>
           <a:ln/>
           <a:effectLst>
-            <a:outerShdw blurRad="50800" dist="19050" dir="8100000" algn="bl" rotWithShape="0">
+            <a:outerShdw sx="100000" sy="100000" kx="0" ky="0" algn="bl" rotWithShape="0" blurRad="50800" dist="19050" dir="8100000">
               <a:srgbClr val="000000">
                 <a:alpha val="8000"/>
               </a:srgbClr>
@@ -16276,7 +16412,7 @@
           <a:bodyPr wrap="square" lIns="0" tIns="0" rIns="0" bIns="0" rtlCol="0" anchor="ctr"/>
           <a:lstStyle/>
           <a:p>
-            <a:pPr marL="0" indent="0">
+            <a:pPr indent="0" marL="0">
               <a:buNone/>
             </a:pPr>
             <a:r>
@@ -16315,7 +16451,7 @@
           <a:bodyPr wrap="square" lIns="0" tIns="0" rIns="0" bIns="0" rtlCol="0" anchor="t"/>
           <a:lstStyle/>
           <a:p>
-            <a:pPr marL="0" indent="0">
+            <a:pPr indent="0" marL="0">
               <a:buNone/>
             </a:pPr>
             <a:r>
@@ -16332,13 +16468,13 @@
             <a:endParaRPr lang="en-US" sz="1000" dirty="0"/>
           </a:p>
           <a:p>
-            <a:pPr marL="0" indent="0">
+            <a:pPr indent="0" marL="0">
               <a:buNone/>
             </a:pPr>
             <a:endParaRPr lang="en-US" sz="1000" dirty="0"/>
           </a:p>
           <a:p>
-            <a:pPr marL="0" indent="0">
+            <a:pPr indent="0" marL="0">
               <a:buNone/>
             </a:pPr>
             <a:r>
@@ -16355,7 +16491,7 @@
             <a:endParaRPr lang="en-US" sz="1000" dirty="0"/>
           </a:p>
           <a:p>
-            <a:pPr marL="0" indent="0">
+            <a:pPr indent="0" marL="0">
               <a:buNone/>
             </a:pPr>
             <a:r>
@@ -16372,7 +16508,7 @@
             <a:endParaRPr lang="en-US" sz="1000" dirty="0"/>
           </a:p>
           <a:p>
-            <a:pPr marL="0" indent="0">
+            <a:pPr indent="0" marL="0">
               <a:buNone/>
             </a:pPr>
             <a:r>
@@ -16389,13 +16525,13 @@
             <a:endParaRPr lang="en-US" sz="1000" dirty="0"/>
           </a:p>
           <a:p>
-            <a:pPr marL="0" indent="0">
+            <a:pPr indent="0" marL="0">
               <a:buNone/>
             </a:pPr>
             <a:endParaRPr lang="en-US" sz="1000" dirty="0"/>
           </a:p>
           <a:p>
-            <a:pPr marL="0" indent="0">
+            <a:pPr indent="0" marL="0">
               <a:buNone/>
             </a:pPr>
             <a:r>
@@ -16434,7 +16570,7 @@
           <a:bodyPr wrap="square" rtlCol="0" anchor="ctr"/>
           <a:lstStyle/>
           <a:p>
-            <a:pPr marL="0" indent="0" algn="r">
+            <a:pPr algn="r" indent="0" marL="0">
               <a:buNone/>
             </a:pPr>
             <a:r>
@@ -16468,7 +16604,6 @@
         <a:solidFill>
           <a:srgbClr val="F7F9FC"/>
         </a:solidFill>
-        <a:effectLst/>
       </p:bgPr>
     </p:bg>
     <p:spTree>
@@ -16506,7 +16641,7 @@
           <a:bodyPr wrap="square" lIns="0" tIns="0" rIns="0" bIns="0" rtlCol="0" anchor="ctr"/>
           <a:lstStyle/>
           <a:p>
-            <a:pPr marL="0" indent="0">
+            <a:pPr indent="0" marL="0">
               <a:buNone/>
             </a:pPr>
             <a:r>
@@ -16545,7 +16680,7 @@
           <a:bodyPr wrap="square" lIns="0" tIns="0" rIns="0" bIns="0" rtlCol="0" anchor="ctr"/>
           <a:lstStyle/>
           <a:p>
-            <a:pPr marL="0" indent="0" algn="ctr">
+            <a:pPr algn="ctr" indent="0" marL="0">
               <a:buNone/>
             </a:pPr>
             <a:r>
@@ -16584,7 +16719,7 @@
           <a:bodyPr wrap="square" lIns="0" tIns="0" rIns="0" bIns="0" rtlCol="0" anchor="ctr"/>
           <a:lstStyle/>
           <a:p>
-            <a:pPr marL="0" indent="0" algn="ctr">
+            <a:pPr algn="ctr" indent="0" marL="0">
               <a:buNone/>
             </a:pPr>
             <a:r>
@@ -16623,7 +16758,7 @@
           <a:bodyPr wrap="square" lIns="0" tIns="0" rIns="0" bIns="0" rtlCol="0" anchor="ctr"/>
           <a:lstStyle/>
           <a:p>
-            <a:pPr marL="0" indent="0" algn="ctr">
+            <a:pPr algn="ctr" indent="0" marL="0">
               <a:buNone/>
             </a:pPr>
             <a:r>
@@ -16662,7 +16797,7 @@
           <a:bodyPr wrap="square" lIns="0" tIns="0" rIns="0" bIns="0" rtlCol="0" anchor="ctr"/>
           <a:lstStyle/>
           <a:p>
-            <a:pPr marL="0" indent="0" algn="ctr">
+            <a:pPr algn="ctr" indent="0" marL="0">
               <a:buNone/>
             </a:pPr>
             <a:r>
@@ -16701,7 +16836,7 @@
           <a:bodyPr wrap="square" lIns="0" tIns="0" rIns="0" bIns="0" rtlCol="0" anchor="ctr"/>
           <a:lstStyle/>
           <a:p>
-            <a:pPr marL="0" indent="0" algn="ctr">
+            <a:pPr algn="ctr" indent="0" marL="0">
               <a:buNone/>
             </a:pPr>
             <a:r>
@@ -16740,7 +16875,7 @@
           <a:bodyPr wrap="square" lIns="0" tIns="0" rIns="0" bIns="0" rtlCol="0" anchor="ctr"/>
           <a:lstStyle/>
           <a:p>
-            <a:pPr marL="0" indent="0" algn="ctr">
+            <a:pPr algn="ctr" indent="0" marL="0">
               <a:buNone/>
             </a:pPr>
             <a:r>
@@ -16779,7 +16914,7 @@
           <a:bodyPr wrap="square" lIns="0" tIns="0" rIns="0" bIns="0" rtlCol="0" anchor="ctr"/>
           <a:lstStyle/>
           <a:p>
-            <a:pPr marL="0" indent="0" algn="ctr">
+            <a:pPr algn="ctr" indent="0" marL="0">
               <a:buNone/>
             </a:pPr>
             <a:r>
@@ -16818,7 +16953,7 @@
           <a:bodyPr wrap="square" lIns="0" tIns="0" rIns="0" bIns="0" rtlCol="0" anchor="ctr"/>
           <a:lstStyle/>
           <a:p>
-            <a:pPr marL="0" indent="0" algn="ctr">
+            <a:pPr algn="ctr" indent="0" marL="0">
               <a:buNone/>
             </a:pPr>
             <a:r>
@@ -16857,7 +16992,7 @@
           <a:bodyPr wrap="square" lIns="0" tIns="0" rIns="0" bIns="0" rtlCol="0" anchor="ctr"/>
           <a:lstStyle/>
           <a:p>
-            <a:pPr marL="0" indent="0" algn="ctr">
+            <a:pPr algn="ctr" indent="0" marL="0">
               <a:buNone/>
             </a:pPr>
             <a:r>
@@ -16896,7 +17031,7 @@
           <a:bodyPr wrap="square" lIns="0" tIns="0" rIns="0" bIns="0" rtlCol="0" anchor="ctr"/>
           <a:lstStyle/>
           <a:p>
-            <a:pPr marL="0" indent="0" algn="ctr">
+            <a:pPr algn="ctr" indent="0" marL="0">
               <a:buNone/>
             </a:pPr>
             <a:r>
@@ -16935,7 +17070,7 @@
           <a:bodyPr wrap="square" lIns="0" tIns="0" rIns="0" bIns="0" rtlCol="0" anchor="ctr"/>
           <a:lstStyle/>
           <a:p>
-            <a:pPr marL="0" indent="0" algn="ctr">
+            <a:pPr algn="ctr" indent="0" marL="0">
               <a:buNone/>
             </a:pPr>
             <a:r>
@@ -16974,7 +17109,7 @@
           <a:bodyPr wrap="square" lIns="0" tIns="0" rIns="0" bIns="0" rtlCol="0" anchor="ctr"/>
           <a:lstStyle/>
           <a:p>
-            <a:pPr marL="0" indent="0" algn="ctr">
+            <a:pPr algn="ctr" indent="0" marL="0">
               <a:buNone/>
             </a:pPr>
             <a:r>
@@ -17013,7 +17148,7 @@
           <a:bodyPr wrap="square" lIns="0" tIns="0" rIns="0" bIns="0" rtlCol="0" anchor="ctr"/>
           <a:lstStyle/>
           <a:p>
-            <a:pPr marL="0" indent="0" algn="ctr">
+            <a:pPr algn="ctr" indent="0" marL="0">
               <a:buNone/>
             </a:pPr>
             <a:r>
@@ -17052,7 +17187,7 @@
           <a:bodyPr wrap="square" lIns="0" tIns="0" rIns="0" bIns="0" rtlCol="0" anchor="ctr"/>
           <a:lstStyle/>
           <a:p>
-            <a:pPr marL="0" indent="0" algn="ctr">
+            <a:pPr algn="ctr" indent="0" marL="0">
               <a:buNone/>
             </a:pPr>
             <a:r>
@@ -17091,7 +17226,7 @@
           <a:bodyPr wrap="square" lIns="0" tIns="0" rIns="0" bIns="0" rtlCol="0" anchor="ctr"/>
           <a:lstStyle/>
           <a:p>
-            <a:pPr marL="0" indent="0" algn="ctr">
+            <a:pPr algn="ctr" indent="0" marL="0">
               <a:buNone/>
             </a:pPr>
             <a:r>
@@ -17111,7 +17246,7 @@
       </p:sp>
       <p:graphicFrame>
         <p:nvGraphicFramePr>
-          <p:cNvPr id="18" name="Table 0"/>
+          <p:cNvPr id="10" name="Table 0"/>
           <p:cNvGraphicFramePr>
             <a:graphicFrameLocks noGrp="1"/>
           </p:cNvGraphicFramePr>
@@ -17125,55 +17260,19 @@
         </p:nvGraphicFramePr>
         <p:xfrm>
           <a:off x="457200" y="1600200"/>
-          <a:ext cx="6766560" cy="1511808"/>
+          <a:ext cx="8229600" cy="1645920"/>
         </p:xfrm>
         <a:graphic>
           <a:graphicData uri="http://schemas.openxmlformats.org/drawingml/2006/table">
             <a:tbl>
               <a:tblPr/>
               <a:tblGrid>
-                <a:gridCol w="1554480">
-                  <a:extLst>
-                    <a:ext uri="{9D8B030D-6E8A-4147-A177-3AD203B41FA5}">
-                      <a16:colId xmlns:a16="http://schemas.microsoft.com/office/drawing/2014/main" val="20000"/>
-                    </a:ext>
-                  </a:extLst>
-                </a:gridCol>
-                <a:gridCol w="1097280">
-                  <a:extLst>
-                    <a:ext uri="{9D8B030D-6E8A-4147-A177-3AD203B41FA5}">
-                      <a16:colId xmlns:a16="http://schemas.microsoft.com/office/drawing/2014/main" val="20001"/>
-                    </a:ext>
-                  </a:extLst>
-                </a:gridCol>
-                <a:gridCol w="1097280">
-                  <a:extLst>
-                    <a:ext uri="{9D8B030D-6E8A-4147-A177-3AD203B41FA5}">
-                      <a16:colId xmlns:a16="http://schemas.microsoft.com/office/drawing/2014/main" val="20002"/>
-                    </a:ext>
-                  </a:extLst>
-                </a:gridCol>
-                <a:gridCol w="1097280">
-                  <a:extLst>
-                    <a:ext uri="{9D8B030D-6E8A-4147-A177-3AD203B41FA5}">
-                      <a16:colId xmlns:a16="http://schemas.microsoft.com/office/drawing/2014/main" val="20003"/>
-                    </a:ext>
-                  </a:extLst>
-                </a:gridCol>
-                <a:gridCol w="822960">
-                  <a:extLst>
-                    <a:ext uri="{9D8B030D-6E8A-4147-A177-3AD203B41FA5}">
-                      <a16:colId xmlns:a16="http://schemas.microsoft.com/office/drawing/2014/main" val="20004"/>
-                    </a:ext>
-                  </a:extLst>
-                </a:gridCol>
-                <a:gridCol w="1097280">
-                  <a:extLst>
-                    <a:ext uri="{9D8B030D-6E8A-4147-A177-3AD203B41FA5}">
-                      <a16:colId xmlns:a16="http://schemas.microsoft.com/office/drawing/2014/main" val="20005"/>
-                    </a:ext>
-                  </a:extLst>
-                </a:gridCol>
+                <a:gridCol w="1554480"/>
+                <a:gridCol w="1097280"/>
+                <a:gridCol w="1097280"/>
+                <a:gridCol w="1097280"/>
+                <a:gridCol w="822960"/>
+                <a:gridCol w="1097280"/>
               </a:tblGrid>
               <a:tr h="292608">
                 <a:tc>
@@ -17181,7 +17280,7 @@
                     <a:bodyPr/>
                     <a:lstStyle/>
                     <a:p>
-                      <a:pPr marL="0" indent="0">
+                      <a:pPr indent="0" marL="0">
                         <a:buNone/>
                       </a:pPr>
                       <a:r>
@@ -17202,7 +17301,7 @@
                       </a:endParaRPr>
                     </a:p>
                   </a:txBody>
-                  <a:tcPr>
+                  <a:tcPr marL="91440" marR="91440" marT="45720" marB="45720">
                     <a:lnL w="6350" cap="flat" cmpd="sng" algn="ctr">
                       <a:solidFill>
                         <a:srgbClr val="E8ECF1"/>
@@ -17249,7 +17348,7 @@
                     <a:bodyPr/>
                     <a:lstStyle/>
                     <a:p>
-                      <a:pPr marL="0" indent="0">
+                      <a:pPr indent="0" marL="0">
                         <a:buNone/>
                       </a:pPr>
                       <a:r>
@@ -17270,7 +17369,7 @@
                       </a:endParaRPr>
                     </a:p>
                   </a:txBody>
-                  <a:tcPr>
+                  <a:tcPr marL="91440" marR="91440" marT="45720" marB="45720">
                     <a:lnL w="6350" cap="flat" cmpd="sng" algn="ctr">
                       <a:solidFill>
                         <a:srgbClr val="E8ECF1"/>
@@ -17317,7 +17416,7 @@
                     <a:bodyPr/>
                     <a:lstStyle/>
                     <a:p>
-                      <a:pPr marL="0" indent="0">
+                      <a:pPr indent="0" marL="0">
                         <a:buNone/>
                       </a:pPr>
                       <a:r>
@@ -17338,7 +17437,7 @@
                       </a:endParaRPr>
                     </a:p>
                   </a:txBody>
-                  <a:tcPr>
+                  <a:tcPr marL="91440" marR="91440" marT="45720" marB="45720">
                     <a:lnL w="6350" cap="flat" cmpd="sng" algn="ctr">
                       <a:solidFill>
                         <a:srgbClr val="E8ECF1"/>
@@ -17385,7 +17484,7 @@
                     <a:bodyPr/>
                     <a:lstStyle/>
                     <a:p>
-                      <a:pPr marL="0" indent="0">
+                      <a:pPr indent="0" marL="0">
                         <a:buNone/>
                       </a:pPr>
                       <a:r>
@@ -17406,7 +17505,7 @@
                       </a:endParaRPr>
                     </a:p>
                   </a:txBody>
-                  <a:tcPr>
+                  <a:tcPr marL="91440" marR="91440" marT="45720" marB="45720">
                     <a:lnL w="6350" cap="flat" cmpd="sng" algn="ctr">
                       <a:solidFill>
                         <a:srgbClr val="E8ECF1"/>
@@ -17453,7 +17552,7 @@
                     <a:bodyPr/>
                     <a:lstStyle/>
                     <a:p>
-                      <a:pPr marL="0" indent="0">
+                      <a:pPr indent="0" marL="0">
                         <a:buNone/>
                       </a:pPr>
                       <a:r>
@@ -17474,7 +17573,7 @@
                       </a:endParaRPr>
                     </a:p>
                   </a:txBody>
-                  <a:tcPr>
+                  <a:tcPr marL="91440" marR="91440" marT="45720" marB="45720">
                     <a:lnL w="6350" cap="flat" cmpd="sng" algn="ctr">
                       <a:solidFill>
                         <a:srgbClr val="E8ECF1"/>
@@ -17521,7 +17620,7 @@
                     <a:bodyPr/>
                     <a:lstStyle/>
                     <a:p>
-                      <a:pPr marL="0" indent="0">
+                      <a:pPr indent="0" marL="0">
                         <a:buNone/>
                       </a:pPr>
                       <a:r>
@@ -17542,7 +17641,7 @@
                       </a:endParaRPr>
                     </a:p>
                   </a:txBody>
-                  <a:tcPr>
+                  <a:tcPr marL="91440" marR="91440" marT="45720" marB="45720">
                     <a:lnL w="6350" cap="flat" cmpd="sng" algn="ctr">
                       <a:solidFill>
                         <a:srgbClr val="E8ECF1"/>
@@ -17584,11 +17683,6 @@
                     </a:solidFill>
                   </a:tcPr>
                 </a:tc>
-                <a:extLst>
-                  <a:ext uri="{0D108BD9-81ED-4DB2-BD59-A6C34878D82A}">
-                    <a16:rowId xmlns:a16="http://schemas.microsoft.com/office/drawing/2014/main" val="10000"/>
-                  </a:ext>
-                </a:extLst>
               </a:tr>
               <a:tr h="237744">
                 <a:tc>
@@ -17596,7 +17690,7 @@
                     <a:bodyPr/>
                     <a:lstStyle/>
                     <a:p>
-                      <a:pPr marL="0" indent="0">
+                      <a:pPr indent="0" marL="0">
                         <a:buNone/>
                       </a:pPr>
                       <a:r>
@@ -17617,7 +17711,7 @@
                       </a:endParaRPr>
                     </a:p>
                   </a:txBody>
-                  <a:tcPr>
+                  <a:tcPr marL="91440" marR="91440" marT="45720" marB="45720">
                     <a:lnL w="6350" cap="flat" cmpd="sng" algn="ctr">
                       <a:solidFill>
                         <a:srgbClr val="E8ECF1"/>
@@ -17661,7 +17755,7 @@
                     <a:bodyPr/>
                     <a:lstStyle/>
                     <a:p>
-                      <a:pPr marL="0" indent="0">
+                      <a:pPr indent="0" marL="0">
                         <a:buNone/>
                       </a:pPr>
                       <a:r>
@@ -17682,7 +17776,7 @@
                       </a:endParaRPr>
                     </a:p>
                   </a:txBody>
-                  <a:tcPr>
+                  <a:tcPr marL="91440" marR="91440" marT="45720" marB="45720">
                     <a:lnL w="6350" cap="flat" cmpd="sng" algn="ctr">
                       <a:solidFill>
                         <a:srgbClr val="E8ECF1"/>
@@ -17726,7 +17820,7 @@
                     <a:bodyPr/>
                     <a:lstStyle/>
                     <a:p>
-                      <a:pPr marL="0" indent="0">
+                      <a:pPr indent="0" marL="0">
                         <a:buNone/>
                       </a:pPr>
                       <a:r>
@@ -17747,7 +17841,7 @@
                       </a:endParaRPr>
                     </a:p>
                   </a:txBody>
-                  <a:tcPr>
+                  <a:tcPr marL="91440" marR="91440" marT="45720" marB="45720">
                     <a:lnL w="6350" cap="flat" cmpd="sng" algn="ctr">
                       <a:solidFill>
                         <a:srgbClr val="E8ECF1"/>
@@ -17791,7 +17885,7 @@
                     <a:bodyPr/>
                     <a:lstStyle/>
                     <a:p>
-                      <a:pPr marL="0" indent="0">
+                      <a:pPr indent="0" marL="0">
                         <a:buNone/>
                       </a:pPr>
                       <a:r>
@@ -17812,7 +17906,7 @@
                       </a:endParaRPr>
                     </a:p>
                   </a:txBody>
-                  <a:tcPr>
+                  <a:tcPr marL="91440" marR="91440" marT="45720" marB="45720">
                     <a:lnL w="6350" cap="flat" cmpd="sng" algn="ctr">
                       <a:solidFill>
                         <a:srgbClr val="E8ECF1"/>
@@ -17856,7 +17950,7 @@
                     <a:bodyPr/>
                     <a:lstStyle/>
                     <a:p>
-                      <a:pPr marL="0" indent="0">
+                      <a:pPr indent="0" marL="0">
                         <a:buNone/>
                       </a:pPr>
                       <a:r>
@@ -17877,7 +17971,7 @@
                       </a:endParaRPr>
                     </a:p>
                   </a:txBody>
-                  <a:tcPr>
+                  <a:tcPr marL="91440" marR="91440" marT="45720" marB="45720">
                     <a:lnL w="6350" cap="flat" cmpd="sng" algn="ctr">
                       <a:solidFill>
                         <a:srgbClr val="E8ECF1"/>
@@ -17921,7 +18015,7 @@
                     <a:bodyPr/>
                     <a:lstStyle/>
                     <a:p>
-                      <a:pPr marL="0" indent="0">
+                      <a:pPr indent="0" marL="0">
                         <a:buNone/>
                       </a:pPr>
                       <a:r>
@@ -17942,7 +18036,7 @@
                       </a:endParaRPr>
                     </a:p>
                   </a:txBody>
-                  <a:tcPr>
+                  <a:tcPr marL="91440" marR="91440" marT="45720" marB="45720">
                     <a:lnL w="6350" cap="flat" cmpd="sng" algn="ctr">
                       <a:solidFill>
                         <a:srgbClr val="E8ECF1"/>
@@ -17981,11 +18075,6 @@
                     </a:lnB>
                   </a:tcPr>
                 </a:tc>
-                <a:extLst>
-                  <a:ext uri="{0D108BD9-81ED-4DB2-BD59-A6C34878D82A}">
-                    <a16:rowId xmlns:a16="http://schemas.microsoft.com/office/drawing/2014/main" val="10001"/>
-                  </a:ext>
-                </a:extLst>
               </a:tr>
               <a:tr h="237744">
                 <a:tc>
@@ -17993,7 +18082,7 @@
                     <a:bodyPr/>
                     <a:lstStyle/>
                     <a:p>
-                      <a:pPr marL="0" indent="0">
+                      <a:pPr indent="0" marL="0">
                         <a:buNone/>
                       </a:pPr>
                       <a:r>
@@ -18014,7 +18103,7 @@
                       </a:endParaRPr>
                     </a:p>
                   </a:txBody>
-                  <a:tcPr>
+                  <a:tcPr marL="91440" marR="91440" marT="45720" marB="45720">
                     <a:lnL w="6350" cap="flat" cmpd="sng" algn="ctr">
                       <a:solidFill>
                         <a:srgbClr val="E8ECF1"/>
@@ -18058,7 +18147,7 @@
                     <a:bodyPr/>
                     <a:lstStyle/>
                     <a:p>
-                      <a:pPr marL="0" indent="0">
+                      <a:pPr indent="0" marL="0">
                         <a:buNone/>
                       </a:pPr>
                       <a:r>
@@ -18079,7 +18168,7 @@
                       </a:endParaRPr>
                     </a:p>
                   </a:txBody>
-                  <a:tcPr>
+                  <a:tcPr marL="91440" marR="91440" marT="45720" marB="45720">
                     <a:lnL w="6350" cap="flat" cmpd="sng" algn="ctr">
                       <a:solidFill>
                         <a:srgbClr val="E8ECF1"/>
@@ -18123,7 +18212,7 @@
                     <a:bodyPr/>
                     <a:lstStyle/>
                     <a:p>
-                      <a:pPr marL="0" indent="0">
+                      <a:pPr indent="0" marL="0">
                         <a:buNone/>
                       </a:pPr>
                       <a:r>
@@ -18144,7 +18233,7 @@
                       </a:endParaRPr>
                     </a:p>
                   </a:txBody>
-                  <a:tcPr>
+                  <a:tcPr marL="91440" marR="91440" marT="45720" marB="45720">
                     <a:lnL w="6350" cap="flat" cmpd="sng" algn="ctr">
                       <a:solidFill>
                         <a:srgbClr val="E8ECF1"/>
@@ -18188,7 +18277,7 @@
                     <a:bodyPr/>
                     <a:lstStyle/>
                     <a:p>
-                      <a:pPr marL="0" indent="0">
+                      <a:pPr indent="0" marL="0">
                         <a:buNone/>
                       </a:pPr>
                       <a:r>
@@ -18209,7 +18298,7 @@
                       </a:endParaRPr>
                     </a:p>
                   </a:txBody>
-                  <a:tcPr>
+                  <a:tcPr marL="91440" marR="91440" marT="45720" marB="45720">
                     <a:lnL w="6350" cap="flat" cmpd="sng" algn="ctr">
                       <a:solidFill>
                         <a:srgbClr val="E8ECF1"/>
@@ -18253,7 +18342,7 @@
                     <a:bodyPr/>
                     <a:lstStyle/>
                     <a:p>
-                      <a:pPr marL="0" indent="0">
+                      <a:pPr indent="0" marL="0">
                         <a:buNone/>
                       </a:pPr>
                       <a:r>
@@ -18274,7 +18363,7 @@
                       </a:endParaRPr>
                     </a:p>
                   </a:txBody>
-                  <a:tcPr>
+                  <a:tcPr marL="91440" marR="91440" marT="45720" marB="45720">
                     <a:lnL w="6350" cap="flat" cmpd="sng" algn="ctr">
                       <a:solidFill>
                         <a:srgbClr val="E8ECF1"/>
@@ -18318,7 +18407,7 @@
                     <a:bodyPr/>
                     <a:lstStyle/>
                     <a:p>
-                      <a:pPr marL="0" indent="0">
+                      <a:pPr indent="0" marL="0">
                         <a:buNone/>
                       </a:pPr>
                       <a:r>
@@ -18339,7 +18428,7 @@
                       </a:endParaRPr>
                     </a:p>
                   </a:txBody>
-                  <a:tcPr>
+                  <a:tcPr marL="91440" marR="91440" marT="45720" marB="45720">
                     <a:lnL w="6350" cap="flat" cmpd="sng" algn="ctr">
                       <a:solidFill>
                         <a:srgbClr val="E8ECF1"/>
@@ -18378,11 +18467,6 @@
                     </a:lnB>
                   </a:tcPr>
                 </a:tc>
-                <a:extLst>
-                  <a:ext uri="{0D108BD9-81ED-4DB2-BD59-A6C34878D82A}">
-                    <a16:rowId xmlns:a16="http://schemas.microsoft.com/office/drawing/2014/main" val="10002"/>
-                  </a:ext>
-                </a:extLst>
               </a:tr>
               <a:tr h="237744">
                 <a:tc>
@@ -18390,7 +18474,7 @@
                     <a:bodyPr/>
                     <a:lstStyle/>
                     <a:p>
-                      <a:pPr marL="0" indent="0">
+                      <a:pPr indent="0" marL="0">
                         <a:buNone/>
                       </a:pPr>
                       <a:r>
@@ -18411,7 +18495,7 @@
                       </a:endParaRPr>
                     </a:p>
                   </a:txBody>
-                  <a:tcPr>
+                  <a:tcPr marL="91440" marR="91440" marT="45720" marB="45720">
                     <a:lnL w="6350" cap="flat" cmpd="sng" algn="ctr">
                       <a:solidFill>
                         <a:srgbClr val="E8ECF1"/>
@@ -18455,7 +18539,7 @@
                     <a:bodyPr/>
                     <a:lstStyle/>
                     <a:p>
-                      <a:pPr marL="0" indent="0">
+                      <a:pPr indent="0" marL="0">
                         <a:buNone/>
                       </a:pPr>
                       <a:r>
@@ -18476,7 +18560,7 @@
                       </a:endParaRPr>
                     </a:p>
                   </a:txBody>
-                  <a:tcPr>
+                  <a:tcPr marL="91440" marR="91440" marT="45720" marB="45720">
                     <a:lnL w="6350" cap="flat" cmpd="sng" algn="ctr">
                       <a:solidFill>
                         <a:srgbClr val="E8ECF1"/>
@@ -18520,7 +18604,7 @@
                     <a:bodyPr/>
                     <a:lstStyle/>
                     <a:p>
-                      <a:pPr marL="0" indent="0">
+                      <a:pPr indent="0" marL="0">
                         <a:buNone/>
                       </a:pPr>
                       <a:r>
@@ -18541,7 +18625,7 @@
                       </a:endParaRPr>
                     </a:p>
                   </a:txBody>
-                  <a:tcPr>
+                  <a:tcPr marL="91440" marR="91440" marT="45720" marB="45720">
                     <a:lnL w="6350" cap="flat" cmpd="sng" algn="ctr">
                       <a:solidFill>
                         <a:srgbClr val="E8ECF1"/>
@@ -18585,7 +18669,7 @@
                     <a:bodyPr/>
                     <a:lstStyle/>
                     <a:p>
-                      <a:pPr marL="0" indent="0">
+                      <a:pPr indent="0" marL="0">
                         <a:buNone/>
                       </a:pPr>
                       <a:r>
@@ -18606,7 +18690,7 @@
                       </a:endParaRPr>
                     </a:p>
                   </a:txBody>
-                  <a:tcPr>
+                  <a:tcPr marL="91440" marR="91440" marT="45720" marB="45720">
                     <a:lnL w="6350" cap="flat" cmpd="sng" algn="ctr">
                       <a:solidFill>
                         <a:srgbClr val="E8ECF1"/>
@@ -18650,7 +18734,7 @@
                     <a:bodyPr/>
                     <a:lstStyle/>
                     <a:p>
-                      <a:pPr marL="0" indent="0">
+                      <a:pPr indent="0" marL="0">
                         <a:buNone/>
                       </a:pPr>
                       <a:r>
@@ -18671,7 +18755,7 @@
                       </a:endParaRPr>
                     </a:p>
                   </a:txBody>
-                  <a:tcPr>
+                  <a:tcPr marL="91440" marR="91440" marT="45720" marB="45720">
                     <a:lnL w="6350" cap="flat" cmpd="sng" algn="ctr">
                       <a:solidFill>
                         <a:srgbClr val="E8ECF1"/>
@@ -18715,7 +18799,7 @@
                     <a:bodyPr/>
                     <a:lstStyle/>
                     <a:p>
-                      <a:pPr marL="0" indent="0">
+                      <a:pPr indent="0" marL="0">
                         <a:buNone/>
                       </a:pPr>
                       <a:r>
@@ -18736,7 +18820,7 @@
                       </a:endParaRPr>
                     </a:p>
                   </a:txBody>
-                  <a:tcPr>
+                  <a:tcPr marL="91440" marR="91440" marT="45720" marB="45720">
                     <a:lnL w="6350" cap="flat" cmpd="sng" algn="ctr">
                       <a:solidFill>
                         <a:srgbClr val="E8ECF1"/>
@@ -18775,11 +18859,6 @@
                     </a:lnB>
                   </a:tcPr>
                 </a:tc>
-                <a:extLst>
-                  <a:ext uri="{0D108BD9-81ED-4DB2-BD59-A6C34878D82A}">
-                    <a16:rowId xmlns:a16="http://schemas.microsoft.com/office/drawing/2014/main" val="10003"/>
-                  </a:ext>
-                </a:extLst>
               </a:tr>
               <a:tr h="237744">
                 <a:tc>
@@ -18787,7 +18866,7 @@
                     <a:bodyPr/>
                     <a:lstStyle/>
                     <a:p>
-                      <a:pPr marL="0" indent="0">
+                      <a:pPr indent="0" marL="0">
                         <a:buNone/>
                       </a:pPr>
                       <a:r>
@@ -18808,7 +18887,7 @@
                       </a:endParaRPr>
                     </a:p>
                   </a:txBody>
-                  <a:tcPr>
+                  <a:tcPr marL="91440" marR="91440" marT="45720" marB="45720">
                     <a:lnL w="6350" cap="flat" cmpd="sng" algn="ctr">
                       <a:solidFill>
                         <a:srgbClr val="E8ECF1"/>
@@ -18852,7 +18931,7 @@
                     <a:bodyPr/>
                     <a:lstStyle/>
                     <a:p>
-                      <a:pPr marL="0" indent="0">
+                      <a:pPr indent="0" marL="0">
                         <a:buNone/>
                       </a:pPr>
                       <a:r>
@@ -18873,7 +18952,7 @@
                       </a:endParaRPr>
                     </a:p>
                   </a:txBody>
-                  <a:tcPr>
+                  <a:tcPr marL="91440" marR="91440" marT="45720" marB="45720">
                     <a:lnL w="6350" cap="flat" cmpd="sng" algn="ctr">
                       <a:solidFill>
                         <a:srgbClr val="E8ECF1"/>
@@ -18917,7 +18996,7 @@
                     <a:bodyPr/>
                     <a:lstStyle/>
                     <a:p>
-                      <a:pPr marL="0" indent="0">
+                      <a:pPr indent="0" marL="0">
                         <a:buNone/>
                       </a:pPr>
                       <a:r>
@@ -18938,7 +19017,7 @@
                       </a:endParaRPr>
                     </a:p>
                   </a:txBody>
-                  <a:tcPr>
+                  <a:tcPr marL="91440" marR="91440" marT="45720" marB="45720">
                     <a:lnL w="6350" cap="flat" cmpd="sng" algn="ctr">
                       <a:solidFill>
                         <a:srgbClr val="E8ECF1"/>
@@ -18982,7 +19061,7 @@
                     <a:bodyPr/>
                     <a:lstStyle/>
                     <a:p>
-                      <a:pPr marL="0" indent="0">
+                      <a:pPr indent="0" marL="0">
                         <a:buNone/>
                       </a:pPr>
                       <a:r>
@@ -19003,7 +19082,7 @@
                       </a:endParaRPr>
                     </a:p>
                   </a:txBody>
-                  <a:tcPr>
+                  <a:tcPr marL="91440" marR="91440" marT="45720" marB="45720">
                     <a:lnL w="6350" cap="flat" cmpd="sng" algn="ctr">
                       <a:solidFill>
                         <a:srgbClr val="E8ECF1"/>
@@ -19047,7 +19126,7 @@
                     <a:bodyPr/>
                     <a:lstStyle/>
                     <a:p>
-                      <a:pPr marL="0" indent="0">
+                      <a:pPr indent="0" marL="0">
                         <a:buNone/>
                       </a:pPr>
                       <a:r>
@@ -19068,7 +19147,7 @@
                       </a:endParaRPr>
                     </a:p>
                   </a:txBody>
-                  <a:tcPr>
+                  <a:tcPr marL="91440" marR="91440" marT="45720" marB="45720">
                     <a:lnL w="6350" cap="flat" cmpd="sng" algn="ctr">
                       <a:solidFill>
                         <a:srgbClr val="E8ECF1"/>
@@ -19112,7 +19191,7 @@
                     <a:bodyPr/>
                     <a:lstStyle/>
                     <a:p>
-                      <a:pPr marL="0" indent="0">
+                      <a:pPr indent="0" marL="0">
                         <a:buNone/>
                       </a:pPr>
                       <a:r>
@@ -19133,7 +19212,7 @@
                       </a:endParaRPr>
                     </a:p>
                   </a:txBody>
-                  <a:tcPr>
+                  <a:tcPr marL="91440" marR="91440" marT="45720" marB="45720">
                     <a:lnL w="6350" cap="flat" cmpd="sng" algn="ctr">
                       <a:solidFill>
                         <a:srgbClr val="E8ECF1"/>
@@ -19172,11 +19251,6 @@
                     </a:lnB>
                   </a:tcPr>
                 </a:tc>
-                <a:extLst>
-                  <a:ext uri="{0D108BD9-81ED-4DB2-BD59-A6C34878D82A}">
-                    <a16:rowId xmlns:a16="http://schemas.microsoft.com/office/drawing/2014/main" val="10004"/>
-                  </a:ext>
-                </a:extLst>
               </a:tr>
               <a:tr h="237744">
                 <a:tc>
@@ -19184,7 +19258,7 @@
                     <a:bodyPr/>
                     <a:lstStyle/>
                     <a:p>
-                      <a:pPr marL="0" indent="0">
+                      <a:pPr indent="0" marL="0">
                         <a:buNone/>
                       </a:pPr>
                       <a:r>
@@ -19205,7 +19279,7 @@
                       </a:endParaRPr>
                     </a:p>
                   </a:txBody>
-                  <a:tcPr>
+                  <a:tcPr marL="91440" marR="91440" marT="45720" marB="45720">
                     <a:lnL w="6350" cap="flat" cmpd="sng" algn="ctr">
                       <a:solidFill>
                         <a:srgbClr val="E8ECF1"/>
@@ -19249,7 +19323,7 @@
                     <a:bodyPr/>
                     <a:lstStyle/>
                     <a:p>
-                      <a:pPr marL="0" indent="0">
+                      <a:pPr indent="0" marL="0">
                         <a:buNone/>
                       </a:pPr>
                       <a:r>
@@ -19270,7 +19344,7 @@
                       </a:endParaRPr>
                     </a:p>
                   </a:txBody>
-                  <a:tcPr>
+                  <a:tcPr marL="91440" marR="91440" marT="45720" marB="45720">
                     <a:lnL w="6350" cap="flat" cmpd="sng" algn="ctr">
                       <a:solidFill>
                         <a:srgbClr val="E8ECF1"/>
@@ -19314,7 +19388,7 @@
                     <a:bodyPr/>
                     <a:lstStyle/>
                     <a:p>
-                      <a:pPr marL="0" indent="0">
+                      <a:pPr indent="0" marL="0">
                         <a:buNone/>
                       </a:pPr>
                       <a:r>
@@ -19335,7 +19409,7 @@
                       </a:endParaRPr>
                     </a:p>
                   </a:txBody>
-                  <a:tcPr>
+                  <a:tcPr marL="91440" marR="91440" marT="45720" marB="45720">
                     <a:lnL w="6350" cap="flat" cmpd="sng" algn="ctr">
                       <a:solidFill>
                         <a:srgbClr val="E8ECF1"/>
@@ -19379,7 +19453,7 @@
                     <a:bodyPr/>
                     <a:lstStyle/>
                     <a:p>
-                      <a:pPr marL="0" indent="0">
+                      <a:pPr indent="0" marL="0">
                         <a:buNone/>
                       </a:pPr>
                       <a:r>
@@ -19400,7 +19474,7 @@
                       </a:endParaRPr>
                     </a:p>
                   </a:txBody>
-                  <a:tcPr>
+                  <a:tcPr marL="91440" marR="91440" marT="45720" marB="45720">
                     <a:lnL w="6350" cap="flat" cmpd="sng" algn="ctr">
                       <a:solidFill>
                         <a:srgbClr val="E8ECF1"/>
@@ -19444,7 +19518,7 @@
                     <a:bodyPr/>
                     <a:lstStyle/>
                     <a:p>
-                      <a:pPr marL="0" indent="0">
+                      <a:pPr indent="0" marL="0">
                         <a:buNone/>
                       </a:pPr>
                       <a:r>
@@ -19465,7 +19539,7 @@
                       </a:endParaRPr>
                     </a:p>
                   </a:txBody>
-                  <a:tcPr>
+                  <a:tcPr marL="91440" marR="91440" marT="45720" marB="45720">
                     <a:lnL w="6350" cap="flat" cmpd="sng" algn="ctr">
                       <a:solidFill>
                         <a:srgbClr val="E8ECF1"/>
@@ -19509,7 +19583,7 @@
                     <a:bodyPr/>
                     <a:lstStyle/>
                     <a:p>
-                      <a:pPr marL="0" indent="0">
+                      <a:pPr indent="0" marL="0">
                         <a:buNone/>
                       </a:pPr>
                       <a:r>
@@ -19530,7 +19604,7 @@
                       </a:endParaRPr>
                     </a:p>
                   </a:txBody>
-                  <a:tcPr>
+                  <a:tcPr marL="91440" marR="91440" marT="45720" marB="45720">
                     <a:lnL w="6350" cap="flat" cmpd="sng" algn="ctr">
                       <a:solidFill>
                         <a:srgbClr val="E8ECF1"/>
@@ -19569,11 +19643,6 @@
                     </a:lnB>
                   </a:tcPr>
                 </a:tc>
-                <a:extLst>
-                  <a:ext uri="{0D108BD9-81ED-4DB2-BD59-A6C34878D82A}">
-                    <a16:rowId xmlns:a16="http://schemas.microsoft.com/office/drawing/2014/main" val="10005"/>
-                  </a:ext>
-                </a:extLst>
               </a:tr>
             </a:tbl>
           </a:graphicData>
@@ -19598,7 +19667,7 @@
           </a:solidFill>
           <a:ln/>
           <a:effectLst>
-            <a:outerShdw blurRad="50800" dist="19050" dir="8100000" algn="bl" rotWithShape="0">
+            <a:outerShdw sx="100000" sy="100000" kx="0" ky="0" algn="bl" rotWithShape="0" blurRad="50800" dist="19050" dir="8100000">
               <a:srgbClr val="000000">
                 <a:alpha val="8000"/>
               </a:srgbClr>
@@ -19627,7 +19696,7 @@
           <a:bodyPr wrap="square" lIns="0" tIns="0" rIns="0" bIns="0" rtlCol="0" anchor="ctr"/>
           <a:lstStyle/>
           <a:p>
-            <a:pPr marL="0" indent="0">
+            <a:pPr indent="0" marL="0">
               <a:buNone/>
             </a:pPr>
             <a:r>
@@ -19666,7 +19735,7 @@
           <a:bodyPr wrap="square" lIns="0" tIns="0" rIns="0" bIns="0" rtlCol="0" anchor="ctr"/>
           <a:lstStyle/>
           <a:p>
-            <a:pPr marL="0" indent="0">
+            <a:pPr indent="0" marL="0">
               <a:buNone/>
             </a:pPr>
             <a:r>
@@ -19680,6 +19749,9 @@
               </a:rPr>
               <a:t>行业普适性：</a:t>
             </a:r>
+            <a:pPr indent="0" marL="0">
+              <a:buNone/>
+            </a:pPr>
             <a:r>
               <a:rPr lang="en-US" sz="1000" dirty="0">
                 <a:solidFill>
@@ -19716,7 +19788,7 @@
           <a:bodyPr wrap="square" lIns="0" tIns="0" rIns="0" bIns="0" rtlCol="0" anchor="ctr"/>
           <a:lstStyle/>
           <a:p>
-            <a:pPr marL="0" indent="0">
+            <a:pPr indent="0" marL="0">
               <a:buNone/>
             </a:pPr>
             <a:r>
@@ -19730,6 +19802,9 @@
               </a:rPr>
               <a:t>回撤一致性：</a:t>
             </a:r>
+            <a:pPr indent="0" marL="0">
+              <a:buNone/>
+            </a:pPr>
             <a:r>
               <a:rPr lang="en-US" sz="1000" dirty="0">
                 <a:solidFill>
@@ -19766,7 +19841,7 @@
           <a:bodyPr wrap="square" lIns="0" tIns="0" rIns="0" bIns="0" rtlCol="0" anchor="ctr"/>
           <a:lstStyle/>
           <a:p>
-            <a:pPr marL="0" indent="0">
+            <a:pPr indent="0" marL="0">
               <a:buNone/>
             </a:pPr>
             <a:r>
@@ -19780,6 +19855,9 @@
               </a:rPr>
               <a:t>超额稳健性：</a:t>
             </a:r>
+            <a:pPr indent="0" marL="0">
+              <a:buNone/>
+            </a:pPr>
             <a:r>
               <a:rPr lang="en-US" sz="1000" dirty="0">
                 <a:solidFill>
@@ -19816,7 +19894,7 @@
           <a:bodyPr wrap="square" lIns="0" tIns="0" rIns="0" bIns="0" rtlCol="0" anchor="ctr"/>
           <a:lstStyle/>
           <a:p>
-            <a:pPr marL="0" indent="0">
+            <a:pPr indent="0" marL="0">
               <a:buNone/>
             </a:pPr>
             <a:r>
@@ -19830,6 +19908,9 @@
               </a:rPr>
               <a:t>对比单一指标：</a:t>
             </a:r>
+            <a:pPr indent="0" marL="0">
+              <a:buNone/>
+            </a:pPr>
             <a:r>
               <a:rPr lang="en-US" sz="1000" dirty="0">
                 <a:solidFill>
@@ -19866,7 +19947,7 @@
           <a:bodyPr wrap="square" rtlCol="0" anchor="ctr"/>
           <a:lstStyle/>
           <a:p>
-            <a:pPr marL="0" indent="0" algn="r">
+            <a:pPr algn="r" indent="0" marL="0">
               <a:buNone/>
             </a:pPr>
             <a:r>
@@ -20185,299 +20266,4 @@
     </a:ext>
   </a:extLst>
 </a:theme>
-</file>
-
-<file path=ppt/theme/theme2.xml><?xml version="1.0" encoding="utf-8"?>
-<a:theme xmlns:a="http://schemas.openxmlformats.org/drawingml/2006/main" name="Office 主题​​">
-  <a:themeElements>
-    <a:clrScheme name="Office">
-      <a:dk1>
-        <a:sysClr val="windowText" lastClr="000000"/>
-      </a:dk1>
-      <a:lt1>
-        <a:sysClr val="window" lastClr="FFFFFF"/>
-      </a:lt1>
-      <a:dk2>
-        <a:srgbClr val="44546A"/>
-      </a:dk2>
-      <a:lt2>
-        <a:srgbClr val="E7E6E6"/>
-      </a:lt2>
-      <a:accent1>
-        <a:srgbClr val="4472C4"/>
-      </a:accent1>
-      <a:accent2>
-        <a:srgbClr val="ED7D31"/>
-      </a:accent2>
-      <a:accent3>
-        <a:srgbClr val="A5A5A5"/>
-      </a:accent3>
-      <a:accent4>
-        <a:srgbClr val="FFC000"/>
-      </a:accent4>
-      <a:accent5>
-        <a:srgbClr val="5B9BD5"/>
-      </a:accent5>
-      <a:accent6>
-        <a:srgbClr val="70AD47"/>
-      </a:accent6>
-      <a:hlink>
-        <a:srgbClr val="0563C1"/>
-      </a:hlink>
-      <a:folHlink>
-        <a:srgbClr val="954F72"/>
-      </a:folHlink>
-    </a:clrScheme>
-    <a:fontScheme name="Office">
-      <a:majorFont>
-        <a:latin typeface="等线 Light" panose="020F0302020204030204"/>
-        <a:ea typeface=""/>
-        <a:cs typeface=""/>
-        <a:font script="Jpan" typeface="游ゴシック Light"/>
-        <a:font script="Hang" typeface="맑은 고딕"/>
-        <a:font script="Hans" typeface="等线 Light"/>
-        <a:font script="Hant" typeface="新細明體"/>
-        <a:font script="Arab" typeface="Times New Roman"/>
-        <a:font script="Hebr" typeface="Times New Roman"/>
-        <a:font script="Thai" typeface="Angsana New"/>
-        <a:font script="Ethi" typeface="Nyala"/>
-        <a:font script="Beng" typeface="Vrinda"/>
-        <a:font script="Gujr" typeface="Shruti"/>
-        <a:font script="Khmr" typeface="MoolBoran"/>
-        <a:font script="Knda" typeface="Tunga"/>
-        <a:font script="Guru" typeface="Raavi"/>
-        <a:font script="Cans" typeface="Euphemia"/>
-        <a:font script="Cher" typeface="Plantagenet Cherokee"/>
-        <a:font script="Yiii" typeface="Microsoft Yi Baiti"/>
-        <a:font script="Tibt" typeface="Microsoft Himalaya"/>
-        <a:font script="Thaa" typeface="MV Boli"/>
-        <a:font script="Deva" typeface="Mangal"/>
-        <a:font script="Telu" typeface="Gautami"/>
-        <a:font script="Taml" typeface="Latha"/>
-        <a:font script="Syrc" typeface="Estrangelo Edessa"/>
-        <a:font script="Orya" typeface="Kalinga"/>
-        <a:font script="Mlym" typeface="Kartika"/>
-        <a:font script="Laoo" typeface="DokChampa"/>
-        <a:font script="Sinh" typeface="Iskoola Pota"/>
-        <a:font script="Mong" typeface="Mongolian Baiti"/>
-        <a:font script="Viet" typeface="Times New Roman"/>
-        <a:font script="Uigh" typeface="Microsoft Uighur"/>
-        <a:font script="Geor" typeface="Sylfaen"/>
-        <a:font script="Armn" typeface="Arial"/>
-        <a:font script="Bugi" typeface="Leelawadee UI"/>
-        <a:font script="Bopo" typeface="Microsoft JhengHei"/>
-        <a:font script="Java" typeface="Javanese Text"/>
-        <a:font script="Lisu" typeface="Segoe UI"/>
-        <a:font script="Mymr" typeface="Myanmar Text"/>
-        <a:font script="Nkoo" typeface="Ebrima"/>
-        <a:font script="Olck" typeface="Nirmala UI"/>
-        <a:font script="Osma" typeface="Ebrima"/>
-        <a:font script="Phag" typeface="Phagspa"/>
-        <a:font script="Syrn" typeface="Estrangelo Edessa"/>
-        <a:font script="Syrj" typeface="Estrangelo Edessa"/>
-        <a:font script="Syre" typeface="Estrangelo Edessa"/>
-        <a:font script="Sora" typeface="Nirmala UI"/>
-        <a:font script="Tale" typeface="Microsoft Tai Le"/>
-        <a:font script="Talu" typeface="Microsoft New Tai Lue"/>
-        <a:font script="Tfng" typeface="Ebrima"/>
-      </a:majorFont>
-      <a:minorFont>
-        <a:latin typeface="等线" panose="020F0502020204030204"/>
-        <a:ea typeface=""/>
-        <a:cs typeface=""/>
-        <a:font script="Jpan" typeface="游ゴシック"/>
-        <a:font script="Hang" typeface="맑은 고딕"/>
-        <a:font script="Hans" typeface="等线"/>
-        <a:font script="Hant" typeface="新細明體"/>
-        <a:font script="Arab" typeface="Arial"/>
-        <a:font script="Hebr" typeface="Arial"/>
-        <a:font script="Thai" typeface="Cordia New"/>
-        <a:font script="Ethi" typeface="Nyala"/>
-        <a:font script="Beng" typeface="Vrinda"/>
-        <a:font script="Gujr" typeface="Shruti"/>
-        <a:font script="Khmr" typeface="DaunPenh"/>
-        <a:font script="Knda" typeface="Tunga"/>
-        <a:font script="Guru" typeface="Raavi"/>
-        <a:font script="Cans" typeface="Euphemia"/>
-        <a:font script="Cher" typeface="Plantagenet Cherokee"/>
-        <a:font script="Yiii" typeface="Microsoft Yi Baiti"/>
-        <a:font script="Tibt" typeface="Microsoft Himalaya"/>
-        <a:font script="Thaa" typeface="MV Boli"/>
-        <a:font script="Deva" typeface="Mangal"/>
-        <a:font script="Telu" typeface="Gautami"/>
-        <a:font script="Taml" typeface="Latha"/>
-        <a:font script="Syrc" typeface="Estrangelo Edessa"/>
-        <a:font script="Orya" typeface="Kalinga"/>
-        <a:font script="Mlym" typeface="Kartika"/>
-        <a:font script="Laoo" typeface="DokChampa"/>
-        <a:font script="Sinh" typeface="Iskoola Pota"/>
-        <a:font script="Mong" typeface="Mongolian Baiti"/>
-        <a:font script="Viet" typeface="Arial"/>
-        <a:font script="Uigh" typeface="Microsoft Uighur"/>
-        <a:font script="Geor" typeface="Sylfaen"/>
-        <a:font script="Armn" typeface="Arial"/>
-        <a:font script="Bugi" typeface="Leelawadee UI"/>
-        <a:font script="Bopo" typeface="Microsoft JhengHei"/>
-        <a:font script="Java" typeface="Javanese Text"/>
-        <a:font script="Lisu" typeface="Segoe UI"/>
-        <a:font script="Mymr" typeface="Myanmar Text"/>
-        <a:font script="Nkoo" typeface="Ebrima"/>
-        <a:font script="Olck" typeface="Nirmala UI"/>
-        <a:font script="Osma" typeface="Ebrima"/>
-        <a:font script="Phag" typeface="Phagspa"/>
-        <a:font script="Syrn" typeface="Estrangelo Edessa"/>
-        <a:font script="Syrj" typeface="Estrangelo Edessa"/>
-        <a:font script="Syre" typeface="Estrangelo Edessa"/>
-        <a:font script="Sora" typeface="Nirmala UI"/>
-        <a:font script="Tale" typeface="Microsoft Tai Le"/>
-        <a:font script="Talu" typeface="Microsoft New Tai Lue"/>
-        <a:font script="Tfng" typeface="Ebrima"/>
-      </a:minorFont>
-    </a:fontScheme>
-    <a:fmtScheme name="Office">
-      <a:fillStyleLst>
-        <a:solidFill>
-          <a:schemeClr val="phClr"/>
-        </a:solidFill>
-        <a:gradFill rotWithShape="1">
-          <a:gsLst>
-            <a:gs pos="0">
-              <a:schemeClr val="phClr">
-                <a:lumMod val="110000"/>
-                <a:satMod val="105000"/>
-                <a:tint val="67000"/>
-              </a:schemeClr>
-            </a:gs>
-            <a:gs pos="50000">
-              <a:schemeClr val="phClr">
-                <a:lumMod val="105000"/>
-                <a:satMod val="103000"/>
-                <a:tint val="73000"/>
-              </a:schemeClr>
-            </a:gs>
-            <a:gs pos="100000">
-              <a:schemeClr val="phClr">
-                <a:lumMod val="105000"/>
-                <a:satMod val="109000"/>
-                <a:tint val="81000"/>
-              </a:schemeClr>
-            </a:gs>
-          </a:gsLst>
-          <a:lin ang="5400000" scaled="0"/>
-        </a:gradFill>
-        <a:gradFill rotWithShape="1">
-          <a:gsLst>
-            <a:gs pos="0">
-              <a:schemeClr val="phClr">
-                <a:satMod val="103000"/>
-                <a:lumMod val="102000"/>
-                <a:tint val="94000"/>
-              </a:schemeClr>
-            </a:gs>
-            <a:gs pos="50000">
-              <a:schemeClr val="phClr">
-                <a:satMod val="110000"/>
-                <a:lumMod val="100000"/>
-                <a:shade val="100000"/>
-              </a:schemeClr>
-            </a:gs>
-            <a:gs pos="100000">
-              <a:schemeClr val="phClr">
-                <a:lumMod val="99000"/>
-                <a:satMod val="120000"/>
-                <a:shade val="78000"/>
-              </a:schemeClr>
-            </a:gs>
-          </a:gsLst>
-          <a:lin ang="5400000" scaled="0"/>
-        </a:gradFill>
-      </a:fillStyleLst>
-      <a:lnStyleLst>
-        <a:ln w="6350" cap="flat" cmpd="sng" algn="ctr">
-          <a:solidFill>
-            <a:schemeClr val="phClr"/>
-          </a:solidFill>
-          <a:prstDash val="solid"/>
-          <a:miter lim="800000"/>
-        </a:ln>
-        <a:ln w="12700" cap="flat" cmpd="sng" algn="ctr">
-          <a:solidFill>
-            <a:schemeClr val="phClr"/>
-          </a:solidFill>
-          <a:prstDash val="solid"/>
-          <a:miter lim="800000"/>
-        </a:ln>
-        <a:ln w="19050" cap="flat" cmpd="sng" algn="ctr">
-          <a:solidFill>
-            <a:schemeClr val="phClr"/>
-          </a:solidFill>
-          <a:prstDash val="solid"/>
-          <a:miter lim="800000"/>
-        </a:ln>
-      </a:lnStyleLst>
-      <a:effectStyleLst>
-        <a:effectStyle>
-          <a:effectLst/>
-        </a:effectStyle>
-        <a:effectStyle>
-          <a:effectLst/>
-        </a:effectStyle>
-        <a:effectStyle>
-          <a:effectLst>
-            <a:outerShdw blurRad="57150" dist="19050" dir="5400000" algn="ctr" rotWithShape="0">
-              <a:srgbClr val="000000">
-                <a:alpha val="63000"/>
-              </a:srgbClr>
-            </a:outerShdw>
-          </a:effectLst>
-        </a:effectStyle>
-      </a:effectStyleLst>
-      <a:bgFillStyleLst>
-        <a:solidFill>
-          <a:schemeClr val="phClr"/>
-        </a:solidFill>
-        <a:solidFill>
-          <a:schemeClr val="phClr">
-            <a:tint val="95000"/>
-            <a:satMod val="170000"/>
-          </a:schemeClr>
-        </a:solidFill>
-        <a:gradFill rotWithShape="1">
-          <a:gsLst>
-            <a:gs pos="0">
-              <a:schemeClr val="phClr">
-                <a:tint val="93000"/>
-                <a:satMod val="150000"/>
-                <a:shade val="98000"/>
-                <a:lumMod val="102000"/>
-              </a:schemeClr>
-            </a:gs>
-            <a:gs pos="50000">
-              <a:schemeClr val="phClr">
-                <a:tint val="98000"/>
-                <a:satMod val="130000"/>
-                <a:shade val="90000"/>
-                <a:lumMod val="103000"/>
-              </a:schemeClr>
-            </a:gs>
-            <a:gs pos="100000">
-              <a:schemeClr val="phClr">
-                <a:shade val="63000"/>
-                <a:satMod val="120000"/>
-              </a:schemeClr>
-            </a:gs>
-          </a:gsLst>
-          <a:lin ang="5400000" scaled="0"/>
-        </a:gradFill>
-      </a:bgFillStyleLst>
-    </a:fmtScheme>
-  </a:themeElements>
-  <a:objectDefaults/>
-  <a:extraClrSchemeLst/>
-  <a:extLst>
-    <a:ext uri="{05A4C25C-085E-4340-85A3-A5531E510DB2}">
-      <thm15:themeFamily xmlns:thm15="http://schemas.microsoft.com/office/thememl/2012/main" name="Office Theme" id="{62F939B6-93AF-4DB8-9C6B-D6C7DFDC589F}" vid="{4A3C46E8-61CC-4603-A589-7422A47A8E4A}"/>
-    </a:ext>
-  </a:extLst>
-</a:theme>
 </file>
--- a/ppt/答辩PPT_v3.pptx
+++ b/ppt/答辩PPT_v3.pptx
@@ -8366,7 +8366,7 @@
                 <a:ea typeface="Calibri" pitchFamily="34" charset="-122"/>
                 <a:cs typeface="Calibri" pitchFamily="34" charset="-120"/>
               </a:rPr>
-              <a:t>github.com/&lt;username&gt;/quant-strategy</a:t>
+              <a:t>github.com/7changecahng/quant-strategy</a:t>
             </a:r>
             <a:pPr indent="0" marL="0">
               <a:buNone/>

--- a/ppt/答辩PPT_v3.pptx
+++ b/ppt/答辩PPT_v3.pptx
@@ -4,6 +4,9 @@
   <p:sldMasterIdLst>
     <p:sldMasterId id="2147483648" r:id="rId1"/>
   </p:sldMasterIdLst>
+  <p:notesMasterIdLst>
+    <p:notesMasterId r:id="rId15"/>
+  </p:notesMasterIdLst>
   <p:sldIdLst>
     <p:sldId id="256" r:id="rId2"/>
     <p:sldId id="257" r:id="rId3"/>
@@ -19,10 +22,7 @@
     <p:sldId id="267" r:id="rId13"/>
     <p:sldId id="268" r:id="rId14"/>
   </p:sldIdLst>
-  <p:notesMasterIdLst>
-    <p:notesMasterId r:id="rId15"/>
-  </p:notesMasterIdLst>
-  <p:sldSz cx="9144000" cy="5143500"/>
+  <p:sldSz cx="9144000" cy="5143500" type="screen16x9"/>
   <p:notesSz cx="5143500" cy="9144000"/>
   <p:defaultTextStyle>
     <a:lvl1pPr marL="0" algn="l" defTabSz="914400" rtl="0" eaLnBrk="1" latinLnBrk="0" hangingPunct="1">
@@ -116,6 +116,11 @@
       </a:defRPr>
     </a:lvl9pPr>
   </p:defaultTextStyle>
+  <p:extLst>
+    <p:ext uri="{EFAFB233-063F-42B5-8137-9DF3F51BA10A}">
+      <p15:sldGuideLst xmlns:p15="http://schemas.microsoft.com/office/powerpoint/2012/main"/>
+    </p:ext>
+  </p:extLst>
 </p:presentation>
 </file>
 
@@ -141,234 +146,10 @@
           <a:chExt cx="0" cy="0"/>
         </a:xfrm>
       </p:grpSpPr>
-      <p:sp>
-        <p:nvSpPr>
-          <p:cNvPr id="2" name="Header Placeholder 1"/>
-          <p:cNvSpPr>
-            <a:spLocks noGrp="1"/>
-          </p:cNvSpPr>
-          <p:nvPr>
-            <p:ph type="hdr" sz="quarter"/>
-          </p:nvPr>
-        </p:nvSpPr>
-        <p:spPr>
-          <a:xfrm>
-            <a:off x="0" y="0"/>
-            <a:ext cx="2971800" cy="458788"/>
-          </a:xfrm>
-          <a:prstGeom prst="rect">
-            <a:avLst/>
-          </a:prstGeom>
-        </p:spPr>
-        <p:txBody>
-          <a:bodyPr vert="horz" lIns="91440" tIns="45720" rIns="91440" bIns="45720" rtlCol="0"/>
-          <a:lstStyle>
-            <a:lvl1pPr algn="l">
-              <a:defRPr sz="1200"/>
-            </a:lvl1pPr>
-          </a:lstStyle>
-          <a:p>
-            <a:endParaRPr lang="en-US"/>
-          </a:p>
-        </p:txBody>
-      </p:sp>
-      <p:sp>
-        <p:nvSpPr>
-          <p:cNvPr id="3" name="Date Placeholder 2"/>
-          <p:cNvSpPr>
-            <a:spLocks noGrp="1"/>
-          </p:cNvSpPr>
-          <p:nvPr>
-            <p:ph type="dt" idx="1"/>
-          </p:nvPr>
-        </p:nvSpPr>
-        <p:spPr>
-          <a:xfrm>
-            <a:off x="3884613" y="0"/>
-            <a:ext cx="2971800" cy="458788"/>
-          </a:xfrm>
-          <a:prstGeom prst="rect">
-            <a:avLst/>
-          </a:prstGeom>
-        </p:spPr>
-        <p:txBody>
-          <a:bodyPr vert="horz" lIns="91440" tIns="45720" rIns="91440" bIns="45720" rtlCol="0"/>
-          <a:lstStyle>
-            <a:lvl1pPr algn="r">
-              <a:defRPr sz="1200"/>
-            </a:lvl1pPr>
-          </a:lstStyle>
-          <a:p>
-            <a:fld id="{5282F153-3F37-0F45-9E97-73ACFA13230C}" type="datetimeFigureOut">
-              <a:rPr lang="en-US"/>
-              <a:t>7/23/19</a:t>
-            </a:fld>
-            <a:endParaRPr lang="en-US"/>
-          </a:p>
-        </p:txBody>
-      </p:sp>
-      <p:sp>
-        <p:nvSpPr>
-          <p:cNvPr id="4" name="Slide Image Placeholder 3"/>
-          <p:cNvSpPr>
-            <a:spLocks noGrp="1" noRot="1" noChangeAspect="1"/>
-          </p:cNvSpPr>
-          <p:nvPr>
-            <p:ph type="sldImg" idx="2"/>
-          </p:nvPr>
-        </p:nvSpPr>
-        <p:spPr>
-          <a:xfrm>
-            <a:off x="685800" y="1143000"/>
-            <a:ext cx="5486400" cy="3086100"/>
-          </a:xfrm>
-          <a:prstGeom prst="rect">
-            <a:avLst/>
-          </a:prstGeom>
-          <a:noFill/>
-          <a:ln w="12700">
-            <a:solidFill>
-              <a:prstClr val="black"/>
-            </a:solidFill>
-          </a:ln>
-        </p:spPr>
-        <p:txBody>
-          <a:bodyPr vert="horz" lIns="91440" tIns="45720" rIns="91440" bIns="45720" rtlCol="0" anchor="ctr"/>
-          <a:lstStyle/>
-          <a:p>
-            <a:endParaRPr lang="en-US"/>
-          </a:p>
-        </p:txBody>
-      </p:sp>
-      <p:sp>
-        <p:nvSpPr>
-          <p:cNvPr id="5" name="Notes Placeholder 4"/>
-          <p:cNvSpPr>
-            <a:spLocks noGrp="1"/>
-          </p:cNvSpPr>
-          <p:nvPr>
-            <p:ph type="body" sz="quarter" idx="3"/>
-          </p:nvPr>
-        </p:nvSpPr>
-        <p:spPr>
-          <a:xfrm>
-            <a:off x="685800" y="4400550"/>
-            <a:ext cx="5486400" cy="3600450"/>
-          </a:xfrm>
-          <a:prstGeom prst="rect">
-            <a:avLst/>
-          </a:prstGeom>
-        </p:spPr>
-        <p:txBody>
-          <a:bodyPr vert="horz" lIns="91440" tIns="45720" rIns="91440" bIns="45720" rtlCol="0"/>
-          <a:lstStyle/>
-          <a:p>
-            <a:pPr lvl="0"/>
-            <a:r>
-              <a:rPr lang="en-US"/>
-              <a:t>Click to edit Master text styles</a:t>
-            </a:r>
-          </a:p>
-          <a:p>
-            <a:pPr lvl="1"/>
-            <a:r>
-              <a:rPr lang="en-US"/>
-              <a:t>Second level</a:t>
-            </a:r>
-          </a:p>
-          <a:p>
-            <a:pPr lvl="2"/>
-            <a:r>
-              <a:rPr lang="en-US"/>
-              <a:t>Third level</a:t>
-            </a:r>
-          </a:p>
-          <a:p>
-            <a:pPr lvl="3"/>
-            <a:r>
-              <a:rPr lang="en-US"/>
-              <a:t>Fourth level</a:t>
-            </a:r>
-          </a:p>
-          <a:p>
-            <a:pPr lvl="4"/>
-            <a:r>
-              <a:rPr lang="en-US"/>
-              <a:t>Fifth level</a:t>
-            </a:r>
-          </a:p>
-        </p:txBody>
-      </p:sp>
-      <p:sp>
-        <p:nvSpPr>
-          <p:cNvPr id="6" name="Footer Placeholder 5"/>
-          <p:cNvSpPr>
-            <a:spLocks noGrp="1"/>
-          </p:cNvSpPr>
-          <p:nvPr>
-            <p:ph type="ftr" sz="quarter" idx="4"/>
-          </p:nvPr>
-        </p:nvSpPr>
-        <p:spPr>
-          <a:xfrm>
-            <a:off x="0" y="8685213"/>
-            <a:ext cx="2971800" cy="458787"/>
-          </a:xfrm>
-          <a:prstGeom prst="rect">
-            <a:avLst/>
-          </a:prstGeom>
-        </p:spPr>
-        <p:txBody>
-          <a:bodyPr vert="horz" lIns="91440" tIns="45720" rIns="91440" bIns="45720" rtlCol="0" anchor="b"/>
-          <a:lstStyle>
-            <a:lvl1pPr algn="l">
-              <a:defRPr sz="1200"/>
-            </a:lvl1pPr>
-          </a:lstStyle>
-          <a:p>
-            <a:endParaRPr lang="en-US"/>
-          </a:p>
-        </p:txBody>
-      </p:sp>
-      <p:sp>
-        <p:nvSpPr>
-          <p:cNvPr id="7" name="Slide Number Placeholder 6"/>
-          <p:cNvSpPr>
-            <a:spLocks noGrp="1"/>
-          </p:cNvSpPr>
-          <p:nvPr>
-            <p:ph type="sldNum" sz="quarter" idx="5"/>
-          </p:nvPr>
-        </p:nvSpPr>
-        <p:spPr>
-          <a:xfrm>
-            <a:off x="3884613" y="8685213"/>
-            <a:ext cx="2971800" cy="458787"/>
-          </a:xfrm>
-          <a:prstGeom prst="rect">
-            <a:avLst/>
-          </a:prstGeom>
-        </p:spPr>
-        <p:txBody>
-          <a:bodyPr vert="horz" lIns="91440" tIns="45720" rIns="91440" bIns="45720" rtlCol="0" anchor="b"/>
-          <a:lstStyle>
-            <a:lvl1pPr algn="r">
-              <a:defRPr sz="1200"/>
-            </a:lvl1pPr>
-          </a:lstStyle>
-          <a:p>
-            <a:fld id="{CE5E9CC1-C706-0F49-92D6-E571CC5EEA8F}" type="slidenum">
-              <a:rPr lang="en-US"/>
-              <a:t>‹#›</a:t>
-            </a:fld>
-            <a:endParaRPr lang="en-US"/>
-          </a:p>
-        </p:txBody>
-      </p:sp>
     </p:spTree>
     <p:extLst>
       <p:ext uri="{BB962C8B-B14F-4D97-AF65-F5344CB8AC3E}">
-        <p14:creationId xmlns:p14="http://schemas.microsoft.com/office/powerpoint/2010/main" val="1024086991"/>
+        <p14:creationId xmlns:p14="http://schemas.microsoft.com/office/powerpoint/2010/main" val="2145348221"/>
       </p:ext>
     </p:extLst>
   </p:cSld>
@@ -512,10 +293,6 @@
           <a:bodyPr/>
           <a:lstStyle/>
           <a:p>
-            <a:r>
-              <a:rPr lang="en-US" dirty="0"/>
-              <a:t/>
-            </a:r>
             <a:endParaRPr lang="en-US" dirty="0"/>
           </a:p>
         </p:txBody>
@@ -600,10 +377,6 @@
           <a:bodyPr/>
           <a:lstStyle/>
           <a:p>
-            <a:r>
-              <a:rPr lang="en-US" dirty="0"/>
-              <a:t/>
-            </a:r>
             <a:endParaRPr lang="en-US" dirty="0"/>
           </a:p>
         </p:txBody>
@@ -688,10 +461,6 @@
           <a:bodyPr/>
           <a:lstStyle/>
           <a:p>
-            <a:r>
-              <a:rPr lang="en-US" dirty="0"/>
-              <a:t/>
-            </a:r>
             <a:endParaRPr lang="en-US" dirty="0"/>
           </a:p>
         </p:txBody>
@@ -776,10 +545,6 @@
           <a:bodyPr/>
           <a:lstStyle/>
           <a:p>
-            <a:r>
-              <a:rPr lang="en-US" dirty="0"/>
-              <a:t/>
-            </a:r>
             <a:endParaRPr lang="en-US" dirty="0"/>
           </a:p>
         </p:txBody>
@@ -864,10 +629,6 @@
           <a:bodyPr/>
           <a:lstStyle/>
           <a:p>
-            <a:r>
-              <a:rPr lang="en-US" dirty="0"/>
-              <a:t/>
-            </a:r>
             <a:endParaRPr lang="en-US" dirty="0"/>
           </a:p>
         </p:txBody>
@@ -952,10 +713,6 @@
           <a:bodyPr/>
           <a:lstStyle/>
           <a:p>
-            <a:r>
-              <a:rPr lang="en-US" dirty="0"/>
-              <a:t/>
-            </a:r>
             <a:endParaRPr lang="en-US" dirty="0"/>
           </a:p>
         </p:txBody>
@@ -1040,10 +797,6 @@
           <a:bodyPr/>
           <a:lstStyle/>
           <a:p>
-            <a:r>
-              <a:rPr lang="en-US" dirty="0"/>
-              <a:t/>
-            </a:r>
             <a:endParaRPr lang="en-US" dirty="0"/>
           </a:p>
         </p:txBody>
@@ -1128,10 +881,6 @@
           <a:bodyPr/>
           <a:lstStyle/>
           <a:p>
-            <a:r>
-              <a:rPr lang="en-US" dirty="0"/>
-              <a:t/>
-            </a:r>
             <a:endParaRPr lang="en-US" dirty="0"/>
           </a:p>
         </p:txBody>
@@ -1216,10 +965,6 @@
           <a:bodyPr/>
           <a:lstStyle/>
           <a:p>
-            <a:r>
-              <a:rPr lang="en-US" dirty="0"/>
-              <a:t/>
-            </a:r>
             <a:endParaRPr lang="en-US" dirty="0"/>
           </a:p>
         </p:txBody>
@@ -1304,10 +1049,6 @@
           <a:bodyPr/>
           <a:lstStyle/>
           <a:p>
-            <a:r>
-              <a:rPr lang="en-US" dirty="0"/>
-              <a:t/>
-            </a:r>
             <a:endParaRPr lang="en-US" dirty="0"/>
           </a:p>
         </p:txBody>
@@ -1392,10 +1133,6 @@
           <a:bodyPr/>
           <a:lstStyle/>
           <a:p>
-            <a:r>
-              <a:rPr lang="en-US" dirty="0"/>
-              <a:t/>
-            </a:r>
             <a:endParaRPr lang="en-US" dirty="0"/>
           </a:p>
         </p:txBody>
@@ -1480,10 +1217,6 @@
           <a:bodyPr/>
           <a:lstStyle/>
           <a:p>
-            <a:r>
-              <a:rPr lang="en-US" dirty="0"/>
-              <a:t/>
-            </a:r>
             <a:endParaRPr lang="en-US" dirty="0"/>
           </a:p>
         </p:txBody>
@@ -1568,10 +1301,6 @@
           <a:bodyPr/>
           <a:lstStyle/>
           <a:p>
-            <a:r>
-              <a:rPr lang="en-US" dirty="0"/>
-              <a:t/>
-            </a:r>
             <a:endParaRPr lang="en-US" dirty="0"/>
           </a:p>
         </p:txBody>
@@ -1645,6 +1374,11 @@
 <file path=ppt/slideMasters/slideMaster1.xml><?xml version="1.0" encoding="utf-8"?>
 <p:sldMaster xmlns:a="http://schemas.openxmlformats.org/drawingml/2006/main" xmlns:r="http://schemas.openxmlformats.org/officeDocument/2006/relationships" xmlns:p="http://schemas.openxmlformats.org/presentationml/2006/main">
   <p:cSld>
+    <p:bg>
+      <p:bgRef idx="1001">
+        <a:schemeClr val="bg1"/>
+      </p:bgRef>
+    </p:bg>
     <p:spTree>
       <p:nvGrpSpPr>
         <p:cNvPr id="1" name=""/>
@@ -1927,6 +1661,7 @@
         <a:solidFill>
           <a:srgbClr val="0B1D3A"/>
         </a:solidFill>
+        <a:effectLst/>
       </p:bgPr>
     </p:bg>
     <p:spTree>
@@ -2006,7 +1741,7 @@
           <a:bodyPr wrap="square" lIns="0" tIns="0" rIns="0" bIns="0" rtlCol="0" anchor="ctr"/>
           <a:lstStyle/>
           <a:p>
-            <a:pPr indent="0" marL="0">
+            <a:pPr marL="0" indent="0">
               <a:buNone/>
             </a:pPr>
             <a:r>
@@ -2045,7 +1780,7 @@
           <a:bodyPr wrap="square" lIns="0" tIns="0" rIns="0" bIns="0" rtlCol="0" anchor="ctr"/>
           <a:lstStyle/>
           <a:p>
-            <a:pPr indent="0" marL="0">
+            <a:pPr marL="0" indent="0">
               <a:buNone/>
             </a:pPr>
             <a:r>
@@ -2104,7 +1839,7 @@
           <a:bodyPr wrap="square" lIns="0" tIns="0" rIns="0" bIns="0" rtlCol="0" anchor="ctr"/>
           <a:lstStyle/>
           <a:p>
-            <a:pPr indent="0" marL="0">
+            <a:pPr marL="0" indent="0">
               <a:buNone/>
             </a:pPr>
             <a:r>
@@ -2121,15 +1856,26 @@
             <a:endParaRPr lang="en-US" sz="1300" dirty="0"/>
           </a:p>
           <a:p>
-            <a:pPr indent="0" marL="0">
+            <a:pPr marL="0" indent="0">
               <a:buNone/>
             </a:pPr>
             <a:endParaRPr lang="en-US" sz="1300" dirty="0"/>
           </a:p>
           <a:p>
-            <a:pPr indent="0" marL="0">
-              <a:buNone/>
-            </a:pPr>
+            <a:pPr marL="0" indent="0">
+              <a:buNone/>
+            </a:pPr>
+            <a:r>
+              <a:rPr lang="zh-CN" altLang="en-US" sz="1400" dirty="0">
+                <a:solidFill>
+                  <a:srgbClr val="FFFFFF"/>
+                </a:solidFill>
+                <a:latin typeface="Calibri" pitchFamily="34" charset="0"/>
+                <a:ea typeface="Calibri" pitchFamily="34" charset="-122"/>
+                <a:cs typeface="Calibri" pitchFamily="34" charset="-120"/>
+              </a:rPr>
+              <a:t>四</a:t>
+            </a:r>
             <a:r>
               <a:rPr lang="en-US" sz="1400" dirty="0">
                 <a:solidFill>
@@ -2139,12 +1885,23 @@
                 <a:ea typeface="Calibri" pitchFamily="34" charset="-122"/>
                 <a:cs typeface="Calibri" pitchFamily="34" charset="-120"/>
               </a:rPr>
-              <a:t>组员：张三 · 李四 · 王五 </a:t>
+              <a:t>组：</a:t>
+            </a:r>
+            <a:r>
+              <a:rPr lang="zh-CN" altLang="en-US" sz="1400" dirty="0">
+                <a:solidFill>
+                  <a:srgbClr val="FFFFFF"/>
+                </a:solidFill>
+                <a:latin typeface="Calibri" pitchFamily="34" charset="0"/>
+                <a:ea typeface="Calibri" pitchFamily="34" charset="-122"/>
+                <a:cs typeface="Calibri" pitchFamily="34" charset="-120"/>
+              </a:rPr>
+              <a:t>李世祺</a:t>
             </a:r>
             <a:endParaRPr lang="en-US" sz="1300" dirty="0"/>
           </a:p>
           <a:p>
-            <a:pPr indent="0" marL="0">
+            <a:pPr marL="0" indent="0">
               <a:buNone/>
             </a:pPr>
             <a:r>
@@ -2183,7 +1940,7 @@
           <a:bodyPr wrap="square" rtlCol="0" anchor="ctr"/>
           <a:lstStyle/>
           <a:p>
-            <a:pPr algn="r" indent="0" marL="0">
+            <a:pPr marL="0" indent="0" algn="r">
               <a:buNone/>
             </a:pPr>
             <a:r>
@@ -2217,6 +1974,7 @@
         <a:solidFill>
           <a:srgbClr val="F7F9FC"/>
         </a:solidFill>
+        <a:effectLst/>
       </p:bgPr>
     </p:bg>
     <p:spTree>
@@ -2254,7 +2012,7 @@
           <a:bodyPr wrap="square" lIns="0" tIns="0" rIns="0" bIns="0" rtlCol="0" anchor="ctr"/>
           <a:lstStyle/>
           <a:p>
-            <a:pPr indent="0" marL="0">
+            <a:pPr marL="0" indent="0">
               <a:buNone/>
             </a:pPr>
             <a:r>
@@ -2293,7 +2051,7 @@
           <a:bodyPr wrap="square" lIns="0" tIns="0" rIns="0" bIns="0" rtlCol="0" anchor="ctr"/>
           <a:lstStyle/>
           <a:p>
-            <a:pPr indent="0" marL="0">
+            <a:pPr marL="0" indent="0">
               <a:buNone/>
             </a:pPr>
             <a:r>
@@ -2327,17 +2085,41 @@
         </p:nvGraphicFramePr>
         <p:xfrm>
           <a:off x="457200" y="1115568"/>
-          <a:ext cx="3931920" cy="1234440"/>
+          <a:ext cx="3749040" cy="1200912"/>
         </p:xfrm>
         <a:graphic>
           <a:graphicData uri="http://schemas.openxmlformats.org/drawingml/2006/table">
             <a:tbl>
               <a:tblPr/>
               <a:tblGrid>
-                <a:gridCol w="1005840"/>
-                <a:gridCol w="914400"/>
-                <a:gridCol w="914400"/>
-                <a:gridCol w="914400"/>
+                <a:gridCol w="1005840">
+                  <a:extLst>
+                    <a:ext uri="{9D8B030D-6E8A-4147-A177-3AD203B41FA5}">
+                      <a16:colId xmlns:a16="http://schemas.microsoft.com/office/drawing/2014/main" val="20000"/>
+                    </a:ext>
+                  </a:extLst>
+                </a:gridCol>
+                <a:gridCol w="914400">
+                  <a:extLst>
+                    <a:ext uri="{9D8B030D-6E8A-4147-A177-3AD203B41FA5}">
+                      <a16:colId xmlns:a16="http://schemas.microsoft.com/office/drawing/2014/main" val="20001"/>
+                    </a:ext>
+                  </a:extLst>
+                </a:gridCol>
+                <a:gridCol w="914400">
+                  <a:extLst>
+                    <a:ext uri="{9D8B030D-6E8A-4147-A177-3AD203B41FA5}">
+                      <a16:colId xmlns:a16="http://schemas.microsoft.com/office/drawing/2014/main" val="20002"/>
+                    </a:ext>
+                  </a:extLst>
+                </a:gridCol>
+                <a:gridCol w="914400">
+                  <a:extLst>
+                    <a:ext uri="{9D8B030D-6E8A-4147-A177-3AD203B41FA5}">
+                      <a16:colId xmlns:a16="http://schemas.microsoft.com/office/drawing/2014/main" val="20003"/>
+                    </a:ext>
+                  </a:extLst>
+                </a:gridCol>
               </a:tblGrid>
               <a:tr h="256032">
                 <a:tc>
@@ -2345,7 +2127,7 @@
                     <a:bodyPr/>
                     <a:lstStyle/>
                     <a:p>
-                      <a:pPr indent="0" marL="0">
+                      <a:pPr marL="0" indent="0">
                         <a:buNone/>
                       </a:pPr>
                       <a:r>
@@ -2366,7 +2148,7 @@
                       </a:endParaRPr>
                     </a:p>
                   </a:txBody>
-                  <a:tcPr marL="91440" marR="91440" marT="45720" marB="45720">
+                  <a:tcPr>
                     <a:lnL w="6350" cap="flat" cmpd="sng" algn="ctr">
                       <a:solidFill>
                         <a:srgbClr val="E8ECF1"/>
@@ -2413,7 +2195,7 @@
                     <a:bodyPr/>
                     <a:lstStyle/>
                     <a:p>
-                      <a:pPr indent="0" marL="0">
+                      <a:pPr marL="0" indent="0">
                         <a:buNone/>
                       </a:pPr>
                       <a:r>
@@ -2434,7 +2216,7 @@
                       </a:endParaRPr>
                     </a:p>
                   </a:txBody>
-                  <a:tcPr marL="91440" marR="91440" marT="45720" marB="45720">
+                  <a:tcPr>
                     <a:lnL w="6350" cap="flat" cmpd="sng" algn="ctr">
                       <a:solidFill>
                         <a:srgbClr val="E8ECF1"/>
@@ -2481,7 +2263,7 @@
                     <a:bodyPr/>
                     <a:lstStyle/>
                     <a:p>
-                      <a:pPr indent="0" marL="0">
+                      <a:pPr marL="0" indent="0">
                         <a:buNone/>
                       </a:pPr>
                       <a:r>
@@ -2502,7 +2284,7 @@
                       </a:endParaRPr>
                     </a:p>
                   </a:txBody>
-                  <a:tcPr marL="91440" marR="91440" marT="45720" marB="45720">
+                  <a:tcPr>
                     <a:lnL w="6350" cap="flat" cmpd="sng" algn="ctr">
                       <a:solidFill>
                         <a:srgbClr val="E8ECF1"/>
@@ -2549,7 +2331,7 @@
                     <a:bodyPr/>
                     <a:lstStyle/>
                     <a:p>
-                      <a:pPr indent="0" marL="0">
+                      <a:pPr marL="0" indent="0">
                         <a:buNone/>
                       </a:pPr>
                       <a:r>
@@ -2570,7 +2352,7 @@
                       </a:endParaRPr>
                     </a:p>
                   </a:txBody>
-                  <a:tcPr marL="91440" marR="91440" marT="45720" marB="45720">
+                  <a:tcPr>
                     <a:lnL w="6350" cap="flat" cmpd="sng" algn="ctr">
                       <a:solidFill>
                         <a:srgbClr val="E8ECF1"/>
@@ -2612,6 +2394,11 @@
                     </a:solidFill>
                   </a:tcPr>
                 </a:tc>
+                <a:extLst>
+                  <a:ext uri="{0D108BD9-81ED-4DB2-BD59-A6C34878D82A}">
+                    <a16:rowId xmlns:a16="http://schemas.microsoft.com/office/drawing/2014/main" val="10000"/>
+                  </a:ext>
+                </a:extLst>
               </a:tr>
               <a:tr h="228600">
                 <a:tc>
@@ -2619,7 +2406,7 @@
                     <a:bodyPr/>
                     <a:lstStyle/>
                     <a:p>
-                      <a:pPr indent="0" marL="0">
+                      <a:pPr marL="0" indent="0">
                         <a:buNone/>
                       </a:pPr>
                       <a:r>
@@ -2640,7 +2427,7 @@
                       </a:endParaRPr>
                     </a:p>
                   </a:txBody>
-                  <a:tcPr marL="91440" marR="91440" marT="45720" marB="45720">
+                  <a:tcPr>
                     <a:lnL w="6350" cap="flat" cmpd="sng" algn="ctr">
                       <a:solidFill>
                         <a:srgbClr val="E8ECF1"/>
@@ -2684,7 +2471,7 @@
                     <a:bodyPr/>
                     <a:lstStyle/>
                     <a:p>
-                      <a:pPr indent="0" marL="0">
+                      <a:pPr marL="0" indent="0">
                         <a:buNone/>
                       </a:pPr>
                       <a:r>
@@ -2705,7 +2492,7 @@
                       </a:endParaRPr>
                     </a:p>
                   </a:txBody>
-                  <a:tcPr marL="91440" marR="91440" marT="45720" marB="45720">
+                  <a:tcPr>
                     <a:lnL w="6350" cap="flat" cmpd="sng" algn="ctr">
                       <a:solidFill>
                         <a:srgbClr val="E8ECF1"/>
@@ -2749,7 +2536,7 @@
                     <a:bodyPr/>
                     <a:lstStyle/>
                     <a:p>
-                      <a:pPr indent="0" marL="0">
+                      <a:pPr marL="0" indent="0">
                         <a:buNone/>
                       </a:pPr>
                       <a:r>
@@ -2770,7 +2557,7 @@
                       </a:endParaRPr>
                     </a:p>
                   </a:txBody>
-                  <a:tcPr marL="91440" marR="91440" marT="45720" marB="45720">
+                  <a:tcPr>
                     <a:lnL w="6350" cap="flat" cmpd="sng" algn="ctr">
                       <a:solidFill>
                         <a:srgbClr val="E8ECF1"/>
@@ -2814,7 +2601,7 @@
                     <a:bodyPr/>
                     <a:lstStyle/>
                     <a:p>
-                      <a:pPr indent="0" marL="0">
+                      <a:pPr marL="0" indent="0">
                         <a:buNone/>
                       </a:pPr>
                       <a:r>
@@ -2835,7 +2622,7 @@
                       </a:endParaRPr>
                     </a:p>
                   </a:txBody>
-                  <a:tcPr marL="91440" marR="91440" marT="45720" marB="45720">
+                  <a:tcPr>
                     <a:lnL w="6350" cap="flat" cmpd="sng" algn="ctr">
                       <a:solidFill>
                         <a:srgbClr val="E8ECF1"/>
@@ -2874,6 +2661,11 @@
                     </a:lnB>
                   </a:tcPr>
                 </a:tc>
+                <a:extLst>
+                  <a:ext uri="{0D108BD9-81ED-4DB2-BD59-A6C34878D82A}">
+                    <a16:rowId xmlns:a16="http://schemas.microsoft.com/office/drawing/2014/main" val="10001"/>
+                  </a:ext>
+                </a:extLst>
               </a:tr>
               <a:tr h="228600">
                 <a:tc>
@@ -2881,7 +2673,7 @@
                     <a:bodyPr/>
                     <a:lstStyle/>
                     <a:p>
-                      <a:pPr indent="0" marL="0">
+                      <a:pPr marL="0" indent="0">
                         <a:buNone/>
                       </a:pPr>
                       <a:r>
@@ -2902,7 +2694,7 @@
                       </a:endParaRPr>
                     </a:p>
                   </a:txBody>
-                  <a:tcPr marL="91440" marR="91440" marT="45720" marB="45720">
+                  <a:tcPr>
                     <a:lnL w="6350" cap="flat" cmpd="sng" algn="ctr">
                       <a:solidFill>
                         <a:srgbClr val="E8ECF1"/>
@@ -2946,7 +2738,7 @@
                     <a:bodyPr/>
                     <a:lstStyle/>
                     <a:p>
-                      <a:pPr indent="0" marL="0">
+                      <a:pPr marL="0" indent="0">
                         <a:buNone/>
                       </a:pPr>
                       <a:r>
@@ -2967,7 +2759,7 @@
                       </a:endParaRPr>
                     </a:p>
                   </a:txBody>
-                  <a:tcPr marL="91440" marR="91440" marT="45720" marB="45720">
+                  <a:tcPr>
                     <a:lnL w="6350" cap="flat" cmpd="sng" algn="ctr">
                       <a:solidFill>
                         <a:srgbClr val="E8ECF1"/>
@@ -3011,7 +2803,7 @@
                     <a:bodyPr/>
                     <a:lstStyle/>
                     <a:p>
-                      <a:pPr indent="0" marL="0">
+                      <a:pPr marL="0" indent="0">
                         <a:buNone/>
                       </a:pPr>
                       <a:r>
@@ -3032,7 +2824,7 @@
                       </a:endParaRPr>
                     </a:p>
                   </a:txBody>
-                  <a:tcPr marL="91440" marR="91440" marT="45720" marB="45720">
+                  <a:tcPr>
                     <a:lnL w="6350" cap="flat" cmpd="sng" algn="ctr">
                       <a:solidFill>
                         <a:srgbClr val="E8ECF1"/>
@@ -3076,7 +2868,7 @@
                     <a:bodyPr/>
                     <a:lstStyle/>
                     <a:p>
-                      <a:pPr indent="0" marL="0">
+                      <a:pPr marL="0" indent="0">
                         <a:buNone/>
                       </a:pPr>
                       <a:r>
@@ -3097,7 +2889,7 @@
                       </a:endParaRPr>
                     </a:p>
                   </a:txBody>
-                  <a:tcPr marL="91440" marR="91440" marT="45720" marB="45720">
+                  <a:tcPr>
                     <a:lnL w="6350" cap="flat" cmpd="sng" algn="ctr">
                       <a:solidFill>
                         <a:srgbClr val="E8ECF1"/>
@@ -3136,6 +2928,11 @@
                     </a:lnB>
                   </a:tcPr>
                 </a:tc>
+                <a:extLst>
+                  <a:ext uri="{0D108BD9-81ED-4DB2-BD59-A6C34878D82A}">
+                    <a16:rowId xmlns:a16="http://schemas.microsoft.com/office/drawing/2014/main" val="10002"/>
+                  </a:ext>
+                </a:extLst>
               </a:tr>
               <a:tr h="228600">
                 <a:tc>
@@ -3143,7 +2940,7 @@
                     <a:bodyPr/>
                     <a:lstStyle/>
                     <a:p>
-                      <a:pPr indent="0" marL="0">
+                      <a:pPr marL="0" indent="0">
                         <a:buNone/>
                       </a:pPr>
                       <a:r>
@@ -3164,7 +2961,7 @@
                       </a:endParaRPr>
                     </a:p>
                   </a:txBody>
-                  <a:tcPr marL="91440" marR="91440" marT="45720" marB="45720">
+                  <a:tcPr>
                     <a:lnL w="6350" cap="flat" cmpd="sng" algn="ctr">
                       <a:solidFill>
                         <a:srgbClr val="E8ECF1"/>
@@ -3208,7 +3005,7 @@
                     <a:bodyPr/>
                     <a:lstStyle/>
                     <a:p>
-                      <a:pPr indent="0" marL="0">
+                      <a:pPr marL="0" indent="0">
                         <a:buNone/>
                       </a:pPr>
                       <a:r>
@@ -3229,7 +3026,7 @@
                       </a:endParaRPr>
                     </a:p>
                   </a:txBody>
-                  <a:tcPr marL="91440" marR="91440" marT="45720" marB="45720">
+                  <a:tcPr>
                     <a:lnL w="6350" cap="flat" cmpd="sng" algn="ctr">
                       <a:solidFill>
                         <a:srgbClr val="E8ECF1"/>
@@ -3273,7 +3070,7 @@
                     <a:bodyPr/>
                     <a:lstStyle/>
                     <a:p>
-                      <a:pPr indent="0" marL="0">
+                      <a:pPr marL="0" indent="0">
                         <a:buNone/>
                       </a:pPr>
                       <a:r>
@@ -3294,7 +3091,7 @@
                       </a:endParaRPr>
                     </a:p>
                   </a:txBody>
-                  <a:tcPr marL="91440" marR="91440" marT="45720" marB="45720">
+                  <a:tcPr>
                     <a:lnL w="6350" cap="flat" cmpd="sng" algn="ctr">
                       <a:solidFill>
                         <a:srgbClr val="E8ECF1"/>
@@ -3338,7 +3135,7 @@
                     <a:bodyPr/>
                     <a:lstStyle/>
                     <a:p>
-                      <a:pPr indent="0" marL="0">
+                      <a:pPr marL="0" indent="0">
                         <a:buNone/>
                       </a:pPr>
                       <a:r>
@@ -3359,7 +3156,7 @@
                       </a:endParaRPr>
                     </a:p>
                   </a:txBody>
-                  <a:tcPr marL="91440" marR="91440" marT="45720" marB="45720">
+                  <a:tcPr>
                     <a:lnL w="6350" cap="flat" cmpd="sng" algn="ctr">
                       <a:solidFill>
                         <a:srgbClr val="E8ECF1"/>
@@ -3398,6 +3195,11 @@
                     </a:lnB>
                   </a:tcPr>
                 </a:tc>
+                <a:extLst>
+                  <a:ext uri="{0D108BD9-81ED-4DB2-BD59-A6C34878D82A}">
+                    <a16:rowId xmlns:a16="http://schemas.microsoft.com/office/drawing/2014/main" val="10003"/>
+                  </a:ext>
+                </a:extLst>
               </a:tr>
               <a:tr h="228600">
                 <a:tc>
@@ -3405,7 +3207,7 @@
                     <a:bodyPr/>
                     <a:lstStyle/>
                     <a:p>
-                      <a:pPr indent="0" marL="0">
+                      <a:pPr marL="0" indent="0">
                         <a:buNone/>
                       </a:pPr>
                       <a:r>
@@ -3426,7 +3228,7 @@
                       </a:endParaRPr>
                     </a:p>
                   </a:txBody>
-                  <a:tcPr marL="91440" marR="91440" marT="45720" marB="45720">
+                  <a:tcPr>
                     <a:lnL w="6350" cap="flat" cmpd="sng" algn="ctr">
                       <a:solidFill>
                         <a:srgbClr val="E8ECF1"/>
@@ -3470,7 +3272,7 @@
                     <a:bodyPr/>
                     <a:lstStyle/>
                     <a:p>
-                      <a:pPr indent="0" marL="0">
+                      <a:pPr marL="0" indent="0">
                         <a:buNone/>
                       </a:pPr>
                       <a:r>
@@ -3491,7 +3293,7 @@
                       </a:endParaRPr>
                     </a:p>
                   </a:txBody>
-                  <a:tcPr marL="91440" marR="91440" marT="45720" marB="45720">
+                  <a:tcPr>
                     <a:lnL w="6350" cap="flat" cmpd="sng" algn="ctr">
                       <a:solidFill>
                         <a:srgbClr val="E8ECF1"/>
@@ -3535,7 +3337,7 @@
                     <a:bodyPr/>
                     <a:lstStyle/>
                     <a:p>
-                      <a:pPr indent="0" marL="0">
+                      <a:pPr marL="0" indent="0">
                         <a:buNone/>
                       </a:pPr>
                       <a:r>
@@ -3556,7 +3358,7 @@
                       </a:endParaRPr>
                     </a:p>
                   </a:txBody>
-                  <a:tcPr marL="91440" marR="91440" marT="45720" marB="45720">
+                  <a:tcPr>
                     <a:lnL w="6350" cap="flat" cmpd="sng" algn="ctr">
                       <a:solidFill>
                         <a:srgbClr val="E8ECF1"/>
@@ -3600,7 +3402,7 @@
                     <a:bodyPr/>
                     <a:lstStyle/>
                     <a:p>
-                      <a:pPr indent="0" marL="0">
+                      <a:pPr marL="0" indent="0">
                         <a:buNone/>
                       </a:pPr>
                       <a:r>
@@ -3621,7 +3423,7 @@
                       </a:endParaRPr>
                     </a:p>
                   </a:txBody>
-                  <a:tcPr marL="91440" marR="91440" marT="45720" marB="45720">
+                  <a:tcPr>
                     <a:lnL w="6350" cap="flat" cmpd="sng" algn="ctr">
                       <a:solidFill>
                         <a:srgbClr val="E8ECF1"/>
@@ -3660,6 +3462,11 @@
                     </a:lnB>
                   </a:tcPr>
                 </a:tc>
+                <a:extLst>
+                  <a:ext uri="{0D108BD9-81ED-4DB2-BD59-A6C34878D82A}">
+                    <a16:rowId xmlns:a16="http://schemas.microsoft.com/office/drawing/2014/main" val="10004"/>
+                  </a:ext>
+                </a:extLst>
               </a:tr>
             </a:tbl>
           </a:graphicData>
@@ -3686,7 +3493,7 @@
           <a:bodyPr wrap="square" lIns="0" tIns="0" rIns="0" bIns="0" rtlCol="0" anchor="ctr"/>
           <a:lstStyle/>
           <a:p>
-            <a:pPr indent="0" marL="0">
+            <a:pPr marL="0" indent="0">
               <a:buNone/>
             </a:pPr>
             <a:r>
@@ -3720,16 +3527,34 @@
         </p:nvGraphicFramePr>
         <p:xfrm>
           <a:off x="4754880" y="1115568"/>
-          <a:ext cx="3931920" cy="777240"/>
+          <a:ext cx="3566160" cy="964692"/>
         </p:xfrm>
         <a:graphic>
           <a:graphicData uri="http://schemas.openxmlformats.org/drawingml/2006/table">
             <a:tbl>
               <a:tblPr/>
               <a:tblGrid>
-                <a:gridCol w="1188720"/>
-                <a:gridCol w="1188720"/>
-                <a:gridCol w="1188720"/>
+                <a:gridCol w="1188720">
+                  <a:extLst>
+                    <a:ext uri="{9D8B030D-6E8A-4147-A177-3AD203B41FA5}">
+                      <a16:colId xmlns:a16="http://schemas.microsoft.com/office/drawing/2014/main" val="20000"/>
+                    </a:ext>
+                  </a:extLst>
+                </a:gridCol>
+                <a:gridCol w="1188720">
+                  <a:extLst>
+                    <a:ext uri="{9D8B030D-6E8A-4147-A177-3AD203B41FA5}">
+                      <a16:colId xmlns:a16="http://schemas.microsoft.com/office/drawing/2014/main" val="20001"/>
+                    </a:ext>
+                  </a:extLst>
+                </a:gridCol>
+                <a:gridCol w="1188720">
+                  <a:extLst>
+                    <a:ext uri="{9D8B030D-6E8A-4147-A177-3AD203B41FA5}">
+                      <a16:colId xmlns:a16="http://schemas.microsoft.com/office/drawing/2014/main" val="20002"/>
+                    </a:ext>
+                  </a:extLst>
+                </a:gridCol>
               </a:tblGrid>
               <a:tr h="256032">
                 <a:tc>
@@ -3737,7 +3562,7 @@
                     <a:bodyPr/>
                     <a:lstStyle/>
                     <a:p>
-                      <a:pPr indent="0" marL="0">
+                      <a:pPr marL="0" indent="0">
                         <a:buNone/>
                       </a:pPr>
                       <a:r>
@@ -3758,7 +3583,7 @@
                       </a:endParaRPr>
                     </a:p>
                   </a:txBody>
-                  <a:tcPr marL="91440" marR="91440" marT="45720" marB="45720">
+                  <a:tcPr>
                     <a:lnL w="6350" cap="flat" cmpd="sng" algn="ctr">
                       <a:solidFill>
                         <a:srgbClr val="E8ECF1"/>
@@ -3805,7 +3630,7 @@
                     <a:bodyPr/>
                     <a:lstStyle/>
                     <a:p>
-                      <a:pPr indent="0" marL="0">
+                      <a:pPr marL="0" indent="0">
                         <a:buNone/>
                       </a:pPr>
                       <a:r>
@@ -3826,7 +3651,7 @@
                       </a:endParaRPr>
                     </a:p>
                   </a:txBody>
-                  <a:tcPr marL="91440" marR="91440" marT="45720" marB="45720">
+                  <a:tcPr>
                     <a:lnL w="6350" cap="flat" cmpd="sng" algn="ctr">
                       <a:solidFill>
                         <a:srgbClr val="E8ECF1"/>
@@ -3873,7 +3698,7 @@
                     <a:bodyPr/>
                     <a:lstStyle/>
                     <a:p>
-                      <a:pPr indent="0" marL="0">
+                      <a:pPr marL="0" indent="0">
                         <a:buNone/>
                       </a:pPr>
                       <a:r>
@@ -3894,7 +3719,7 @@
                       </a:endParaRPr>
                     </a:p>
                   </a:txBody>
-                  <a:tcPr marL="91440" marR="91440" marT="45720" marB="45720">
+                  <a:tcPr>
                     <a:lnL w="6350" cap="flat" cmpd="sng" algn="ctr">
                       <a:solidFill>
                         <a:srgbClr val="E8ECF1"/>
@@ -3936,6 +3761,11 @@
                     </a:solidFill>
                   </a:tcPr>
                 </a:tc>
+                <a:extLst>
+                  <a:ext uri="{0D108BD9-81ED-4DB2-BD59-A6C34878D82A}">
+                    <a16:rowId xmlns:a16="http://schemas.microsoft.com/office/drawing/2014/main" val="10000"/>
+                  </a:ext>
+                </a:extLst>
               </a:tr>
               <a:tr h="228600">
                 <a:tc>
@@ -3943,7 +3773,7 @@
                     <a:bodyPr/>
                     <a:lstStyle/>
                     <a:p>
-                      <a:pPr indent="0" marL="0">
+                      <a:pPr marL="0" indent="0">
                         <a:buNone/>
                       </a:pPr>
                       <a:r>
@@ -3964,7 +3794,7 @@
                       </a:endParaRPr>
                     </a:p>
                   </a:txBody>
-                  <a:tcPr marL="91440" marR="91440" marT="45720" marB="45720">
+                  <a:tcPr>
                     <a:lnL w="6350" cap="flat" cmpd="sng" algn="ctr">
                       <a:solidFill>
                         <a:srgbClr val="E8ECF1"/>
@@ -4008,7 +3838,7 @@
                     <a:bodyPr/>
                     <a:lstStyle/>
                     <a:p>
-                      <a:pPr indent="0" marL="0">
+                      <a:pPr marL="0" indent="0">
                         <a:buNone/>
                       </a:pPr>
                       <a:r>
@@ -4029,7 +3859,7 @@
                       </a:endParaRPr>
                     </a:p>
                   </a:txBody>
-                  <a:tcPr marL="91440" marR="91440" marT="45720" marB="45720">
+                  <a:tcPr>
                     <a:lnL w="6350" cap="flat" cmpd="sng" algn="ctr">
                       <a:solidFill>
                         <a:srgbClr val="E8ECF1"/>
@@ -4073,7 +3903,7 @@
                     <a:bodyPr/>
                     <a:lstStyle/>
                     <a:p>
-                      <a:pPr indent="0" marL="0">
+                      <a:pPr marL="0" indent="0">
                         <a:buNone/>
                       </a:pPr>
                       <a:r>
@@ -4094,7 +3924,7 @@
                       </a:endParaRPr>
                     </a:p>
                   </a:txBody>
-                  <a:tcPr marL="91440" marR="91440" marT="45720" marB="45720">
+                  <a:tcPr>
                     <a:lnL w="6350" cap="flat" cmpd="sng" algn="ctr">
                       <a:solidFill>
                         <a:srgbClr val="E8ECF1"/>
@@ -4133,6 +3963,11 @@
                     </a:lnB>
                   </a:tcPr>
                 </a:tc>
+                <a:extLst>
+                  <a:ext uri="{0D108BD9-81ED-4DB2-BD59-A6C34878D82A}">
+                    <a16:rowId xmlns:a16="http://schemas.microsoft.com/office/drawing/2014/main" val="10001"/>
+                  </a:ext>
+                </a:extLst>
               </a:tr>
               <a:tr h="228600">
                 <a:tc>
@@ -4140,7 +3975,7 @@
                     <a:bodyPr/>
                     <a:lstStyle/>
                     <a:p>
-                      <a:pPr indent="0" marL="0">
+                      <a:pPr marL="0" indent="0">
                         <a:buNone/>
                       </a:pPr>
                       <a:r>
@@ -4161,7 +3996,7 @@
                       </a:endParaRPr>
                     </a:p>
                   </a:txBody>
-                  <a:tcPr marL="91440" marR="91440" marT="45720" marB="45720">
+                  <a:tcPr>
                     <a:lnL w="6350" cap="flat" cmpd="sng" algn="ctr">
                       <a:solidFill>
                         <a:srgbClr val="E8ECF1"/>
@@ -4205,7 +4040,7 @@
                     <a:bodyPr/>
                     <a:lstStyle/>
                     <a:p>
-                      <a:pPr indent="0" marL="0">
+                      <a:pPr marL="0" indent="0">
                         <a:buNone/>
                       </a:pPr>
                       <a:r>
@@ -4226,7 +4061,7 @@
                       </a:endParaRPr>
                     </a:p>
                   </a:txBody>
-                  <a:tcPr marL="91440" marR="91440" marT="45720" marB="45720">
+                  <a:tcPr>
                     <a:lnL w="6350" cap="flat" cmpd="sng" algn="ctr">
                       <a:solidFill>
                         <a:srgbClr val="E8ECF1"/>
@@ -4270,7 +4105,7 @@
                     <a:bodyPr/>
                     <a:lstStyle/>
                     <a:p>
-                      <a:pPr indent="0" marL="0">
+                      <a:pPr marL="0" indent="0">
                         <a:buNone/>
                       </a:pPr>
                       <a:r>
@@ -4291,7 +4126,7 @@
                       </a:endParaRPr>
                     </a:p>
                   </a:txBody>
-                  <a:tcPr marL="91440" marR="91440" marT="45720" marB="45720">
+                  <a:tcPr>
                     <a:lnL w="6350" cap="flat" cmpd="sng" algn="ctr">
                       <a:solidFill>
                         <a:srgbClr val="E8ECF1"/>
@@ -4330,6 +4165,11 @@
                     </a:lnB>
                   </a:tcPr>
                 </a:tc>
+                <a:extLst>
+                  <a:ext uri="{0D108BD9-81ED-4DB2-BD59-A6C34878D82A}">
+                    <a16:rowId xmlns:a16="http://schemas.microsoft.com/office/drawing/2014/main" val="10002"/>
+                  </a:ext>
+                </a:extLst>
               </a:tr>
               <a:tr h="228600">
                 <a:tc>
@@ -4337,7 +4177,7 @@
                     <a:bodyPr/>
                     <a:lstStyle/>
                     <a:p>
-                      <a:pPr indent="0" marL="0">
+                      <a:pPr marL="0" indent="0">
                         <a:buNone/>
                       </a:pPr>
                       <a:r>
@@ -4358,7 +4198,7 @@
                       </a:endParaRPr>
                     </a:p>
                   </a:txBody>
-                  <a:tcPr marL="91440" marR="91440" marT="45720" marB="45720">
+                  <a:tcPr>
                     <a:lnL w="6350" cap="flat" cmpd="sng" algn="ctr">
                       <a:solidFill>
                         <a:srgbClr val="E8ECF1"/>
@@ -4402,7 +4242,7 @@
                     <a:bodyPr/>
                     <a:lstStyle/>
                     <a:p>
-                      <a:pPr indent="0" marL="0">
+                      <a:pPr marL="0" indent="0">
                         <a:buNone/>
                       </a:pPr>
                       <a:r>
@@ -4423,7 +4263,7 @@
                       </a:endParaRPr>
                     </a:p>
                   </a:txBody>
-                  <a:tcPr marL="91440" marR="91440" marT="45720" marB="45720">
+                  <a:tcPr>
                     <a:lnL w="6350" cap="flat" cmpd="sng" algn="ctr">
                       <a:solidFill>
                         <a:srgbClr val="E8ECF1"/>
@@ -4467,7 +4307,7 @@
                     <a:bodyPr/>
                     <a:lstStyle/>
                     <a:p>
-                      <a:pPr indent="0" marL="0">
+                      <a:pPr marL="0" indent="0">
                         <a:buNone/>
                       </a:pPr>
                       <a:r>
@@ -4488,7 +4328,7 @@
                       </a:endParaRPr>
                     </a:p>
                   </a:txBody>
-                  <a:tcPr marL="91440" marR="91440" marT="45720" marB="45720">
+                  <a:tcPr>
                     <a:lnL w="6350" cap="flat" cmpd="sng" algn="ctr">
                       <a:solidFill>
                         <a:srgbClr val="E8ECF1"/>
@@ -4527,6 +4367,11 @@
                     </a:lnB>
                   </a:tcPr>
                 </a:tc>
+                <a:extLst>
+                  <a:ext uri="{0D108BD9-81ED-4DB2-BD59-A6C34878D82A}">
+                    <a16:rowId xmlns:a16="http://schemas.microsoft.com/office/drawing/2014/main" val="10003"/>
+                  </a:ext>
+                </a:extLst>
               </a:tr>
             </a:tbl>
           </a:graphicData>
@@ -4553,7 +4398,7 @@
           <a:bodyPr wrap="square" lIns="0" tIns="0" rIns="0" bIns="0" rtlCol="0" anchor="ctr"/>
           <a:lstStyle/>
           <a:p>
-            <a:pPr indent="0" marL="0">
+            <a:pPr marL="0" indent="0">
               <a:buNone/>
             </a:pPr>
             <a:r>
@@ -4587,18 +4432,48 @@
         </p:nvGraphicFramePr>
         <p:xfrm>
           <a:off x="457200" y="2788920"/>
-          <a:ext cx="8229600" cy="868680"/>
+          <a:ext cx="7178040" cy="987552"/>
         </p:xfrm>
         <a:graphic>
           <a:graphicData uri="http://schemas.openxmlformats.org/drawingml/2006/table">
             <a:tbl>
               <a:tblPr/>
               <a:tblGrid>
-                <a:gridCol w="1371600"/>
-                <a:gridCol w="1371600"/>
-                <a:gridCol w="1371600"/>
-                <a:gridCol w="1371600"/>
-                <a:gridCol w="1691640"/>
+                <a:gridCol w="1371600">
+                  <a:extLst>
+                    <a:ext uri="{9D8B030D-6E8A-4147-A177-3AD203B41FA5}">
+                      <a16:colId xmlns:a16="http://schemas.microsoft.com/office/drawing/2014/main" val="20000"/>
+                    </a:ext>
+                  </a:extLst>
+                </a:gridCol>
+                <a:gridCol w="1371600">
+                  <a:extLst>
+                    <a:ext uri="{9D8B030D-6E8A-4147-A177-3AD203B41FA5}">
+                      <a16:colId xmlns:a16="http://schemas.microsoft.com/office/drawing/2014/main" val="20001"/>
+                    </a:ext>
+                  </a:extLst>
+                </a:gridCol>
+                <a:gridCol w="1371600">
+                  <a:extLst>
+                    <a:ext uri="{9D8B030D-6E8A-4147-A177-3AD203B41FA5}">
+                      <a16:colId xmlns:a16="http://schemas.microsoft.com/office/drawing/2014/main" val="20002"/>
+                    </a:ext>
+                  </a:extLst>
+                </a:gridCol>
+                <a:gridCol w="1371600">
+                  <a:extLst>
+                    <a:ext uri="{9D8B030D-6E8A-4147-A177-3AD203B41FA5}">
+                      <a16:colId xmlns:a16="http://schemas.microsoft.com/office/drawing/2014/main" val="20003"/>
+                    </a:ext>
+                  </a:extLst>
+                </a:gridCol>
+                <a:gridCol w="1691640">
+                  <a:extLst>
+                    <a:ext uri="{9D8B030D-6E8A-4147-A177-3AD203B41FA5}">
+                      <a16:colId xmlns:a16="http://schemas.microsoft.com/office/drawing/2014/main" val="20004"/>
+                    </a:ext>
+                  </a:extLst>
+                </a:gridCol>
               </a:tblGrid>
               <a:tr h="256032">
                 <a:tc>
@@ -4606,7 +4481,7 @@
                     <a:bodyPr/>
                     <a:lstStyle/>
                     <a:p>
-                      <a:pPr indent="0" marL="0">
+                      <a:pPr marL="0" indent="0">
                         <a:buNone/>
                       </a:pPr>
                       <a:r>
@@ -4627,7 +4502,7 @@
                       </a:endParaRPr>
                     </a:p>
                   </a:txBody>
-                  <a:tcPr marL="91440" marR="91440" marT="45720" marB="45720">
+                  <a:tcPr>
                     <a:lnL w="6350" cap="flat" cmpd="sng" algn="ctr">
                       <a:solidFill>
                         <a:srgbClr val="E8ECF1"/>
@@ -4674,7 +4549,7 @@
                     <a:bodyPr/>
                     <a:lstStyle/>
                     <a:p>
-                      <a:pPr indent="0" marL="0">
+                      <a:pPr marL="0" indent="0">
                         <a:buNone/>
                       </a:pPr>
                       <a:r>
@@ -4695,7 +4570,7 @@
                       </a:endParaRPr>
                     </a:p>
                   </a:txBody>
-                  <a:tcPr marL="91440" marR="91440" marT="45720" marB="45720">
+                  <a:tcPr>
                     <a:lnL w="6350" cap="flat" cmpd="sng" algn="ctr">
                       <a:solidFill>
                         <a:srgbClr val="E8ECF1"/>
@@ -4742,7 +4617,7 @@
                     <a:bodyPr/>
                     <a:lstStyle/>
                     <a:p>
-                      <a:pPr indent="0" marL="0">
+                      <a:pPr marL="0" indent="0">
                         <a:buNone/>
                       </a:pPr>
                       <a:r>
@@ -4763,7 +4638,7 @@
                       </a:endParaRPr>
                     </a:p>
                   </a:txBody>
-                  <a:tcPr marL="91440" marR="91440" marT="45720" marB="45720">
+                  <a:tcPr>
                     <a:lnL w="6350" cap="flat" cmpd="sng" algn="ctr">
                       <a:solidFill>
                         <a:srgbClr val="E8ECF1"/>
@@ -4810,7 +4685,7 @@
                     <a:bodyPr/>
                     <a:lstStyle/>
                     <a:p>
-                      <a:pPr indent="0" marL="0">
+                      <a:pPr marL="0" indent="0">
                         <a:buNone/>
                       </a:pPr>
                       <a:r>
@@ -4831,7 +4706,7 @@
                       </a:endParaRPr>
                     </a:p>
                   </a:txBody>
-                  <a:tcPr marL="91440" marR="91440" marT="45720" marB="45720">
+                  <a:tcPr>
                     <a:lnL w="6350" cap="flat" cmpd="sng" algn="ctr">
                       <a:solidFill>
                         <a:srgbClr val="E8ECF1"/>
@@ -4878,7 +4753,7 @@
                     <a:bodyPr/>
                     <a:lstStyle/>
                     <a:p>
-                      <a:pPr indent="0" marL="0">
+                      <a:pPr marL="0" indent="0">
                         <a:buNone/>
                       </a:pPr>
                       <a:r>
@@ -4899,7 +4774,7 @@
                       </a:endParaRPr>
                     </a:p>
                   </a:txBody>
-                  <a:tcPr marL="91440" marR="91440" marT="45720" marB="45720">
+                  <a:tcPr>
                     <a:lnL w="6350" cap="flat" cmpd="sng" algn="ctr">
                       <a:solidFill>
                         <a:srgbClr val="E8ECF1"/>
@@ -4941,6 +4816,11 @@
                     </a:solidFill>
                   </a:tcPr>
                 </a:tc>
+                <a:extLst>
+                  <a:ext uri="{0D108BD9-81ED-4DB2-BD59-A6C34878D82A}">
+                    <a16:rowId xmlns:a16="http://schemas.microsoft.com/office/drawing/2014/main" val="10000"/>
+                  </a:ext>
+                </a:extLst>
               </a:tr>
               <a:tr h="228600">
                 <a:tc>
@@ -4948,7 +4828,7 @@
                     <a:bodyPr/>
                     <a:lstStyle/>
                     <a:p>
-                      <a:pPr indent="0" marL="0">
+                      <a:pPr marL="0" indent="0">
                         <a:buNone/>
                       </a:pPr>
                       <a:r>
@@ -4969,7 +4849,7 @@
                       </a:endParaRPr>
                     </a:p>
                   </a:txBody>
-                  <a:tcPr marL="91440" marR="91440" marT="45720" marB="45720">
+                  <a:tcPr>
                     <a:lnL w="6350" cap="flat" cmpd="sng" algn="ctr">
                       <a:solidFill>
                         <a:srgbClr val="E8ECF1"/>
@@ -5013,7 +4893,7 @@
                     <a:bodyPr/>
                     <a:lstStyle/>
                     <a:p>
-                      <a:pPr indent="0" marL="0">
+                      <a:pPr marL="0" indent="0">
                         <a:buNone/>
                       </a:pPr>
                       <a:r>
@@ -5034,7 +4914,7 @@
                       </a:endParaRPr>
                     </a:p>
                   </a:txBody>
-                  <a:tcPr marL="91440" marR="91440" marT="45720" marB="45720">
+                  <a:tcPr>
                     <a:lnL w="6350" cap="flat" cmpd="sng" algn="ctr">
                       <a:solidFill>
                         <a:srgbClr val="E8ECF1"/>
@@ -5078,7 +4958,7 @@
                     <a:bodyPr/>
                     <a:lstStyle/>
                     <a:p>
-                      <a:pPr indent="0" marL="0">
+                      <a:pPr marL="0" indent="0">
                         <a:buNone/>
                       </a:pPr>
                       <a:r>
@@ -5099,7 +4979,7 @@
                       </a:endParaRPr>
                     </a:p>
                   </a:txBody>
-                  <a:tcPr marL="91440" marR="91440" marT="45720" marB="45720">
+                  <a:tcPr>
                     <a:lnL w="6350" cap="flat" cmpd="sng" algn="ctr">
                       <a:solidFill>
                         <a:srgbClr val="E8ECF1"/>
@@ -5143,7 +5023,7 @@
                     <a:bodyPr/>
                     <a:lstStyle/>
                     <a:p>
-                      <a:pPr indent="0" marL="0">
+                      <a:pPr marL="0" indent="0">
                         <a:buNone/>
                       </a:pPr>
                       <a:r>
@@ -5164,7 +5044,7 @@
                       </a:endParaRPr>
                     </a:p>
                   </a:txBody>
-                  <a:tcPr marL="91440" marR="91440" marT="45720" marB="45720">
+                  <a:tcPr>
                     <a:lnL w="6350" cap="flat" cmpd="sng" algn="ctr">
                       <a:solidFill>
                         <a:srgbClr val="E8ECF1"/>
@@ -5208,7 +5088,7 @@
                     <a:bodyPr/>
                     <a:lstStyle/>
                     <a:p>
-                      <a:pPr indent="0" marL="0">
+                      <a:pPr marL="0" indent="0">
                         <a:buNone/>
                       </a:pPr>
                       <a:r>
@@ -5229,7 +5109,7 @@
                       </a:endParaRPr>
                     </a:p>
                   </a:txBody>
-                  <a:tcPr marL="91440" marR="91440" marT="45720" marB="45720">
+                  <a:tcPr>
                     <a:lnL w="6350" cap="flat" cmpd="sng" algn="ctr">
                       <a:solidFill>
                         <a:srgbClr val="E8ECF1"/>
@@ -5268,6 +5148,11 @@
                     </a:lnB>
                   </a:tcPr>
                 </a:tc>
+                <a:extLst>
+                  <a:ext uri="{0D108BD9-81ED-4DB2-BD59-A6C34878D82A}">
+                    <a16:rowId xmlns:a16="http://schemas.microsoft.com/office/drawing/2014/main" val="10001"/>
+                  </a:ext>
+                </a:extLst>
               </a:tr>
               <a:tr h="228600">
                 <a:tc>
@@ -5275,7 +5160,7 @@
                     <a:bodyPr/>
                     <a:lstStyle/>
                     <a:p>
-                      <a:pPr indent="0" marL="0">
+                      <a:pPr marL="0" indent="0">
                         <a:buNone/>
                       </a:pPr>
                       <a:r>
@@ -5296,7 +5181,7 @@
                       </a:endParaRPr>
                     </a:p>
                   </a:txBody>
-                  <a:tcPr marL="91440" marR="91440" marT="45720" marB="45720">
+                  <a:tcPr>
                     <a:lnL w="6350" cap="flat" cmpd="sng" algn="ctr">
                       <a:solidFill>
                         <a:srgbClr val="E8ECF1"/>
@@ -5340,7 +5225,7 @@
                     <a:bodyPr/>
                     <a:lstStyle/>
                     <a:p>
-                      <a:pPr indent="0" marL="0">
+                      <a:pPr marL="0" indent="0">
                         <a:buNone/>
                       </a:pPr>
                       <a:r>
@@ -5361,7 +5246,7 @@
                       </a:endParaRPr>
                     </a:p>
                   </a:txBody>
-                  <a:tcPr marL="91440" marR="91440" marT="45720" marB="45720">
+                  <a:tcPr>
                     <a:lnL w="6350" cap="flat" cmpd="sng" algn="ctr">
                       <a:solidFill>
                         <a:srgbClr val="E8ECF1"/>
@@ -5405,7 +5290,7 @@
                     <a:bodyPr/>
                     <a:lstStyle/>
                     <a:p>
-                      <a:pPr indent="0" marL="0">
+                      <a:pPr marL="0" indent="0">
                         <a:buNone/>
                       </a:pPr>
                       <a:r>
@@ -5426,7 +5311,7 @@
                       </a:endParaRPr>
                     </a:p>
                   </a:txBody>
-                  <a:tcPr marL="91440" marR="91440" marT="45720" marB="45720">
+                  <a:tcPr>
                     <a:lnL w="6350" cap="flat" cmpd="sng" algn="ctr">
                       <a:solidFill>
                         <a:srgbClr val="E8ECF1"/>
@@ -5470,7 +5355,7 @@
                     <a:bodyPr/>
                     <a:lstStyle/>
                     <a:p>
-                      <a:pPr indent="0" marL="0">
+                      <a:pPr marL="0" indent="0">
                         <a:buNone/>
                       </a:pPr>
                       <a:r>
@@ -5491,7 +5376,7 @@
                       </a:endParaRPr>
                     </a:p>
                   </a:txBody>
-                  <a:tcPr marL="91440" marR="91440" marT="45720" marB="45720">
+                  <a:tcPr>
                     <a:lnL w="6350" cap="flat" cmpd="sng" algn="ctr">
                       <a:solidFill>
                         <a:srgbClr val="E8ECF1"/>
@@ -5535,7 +5420,7 @@
                     <a:bodyPr/>
                     <a:lstStyle/>
                     <a:p>
-                      <a:pPr indent="0" marL="0">
+                      <a:pPr marL="0" indent="0">
                         <a:buNone/>
                       </a:pPr>
                       <a:r>
@@ -5556,7 +5441,7 @@
                       </a:endParaRPr>
                     </a:p>
                   </a:txBody>
-                  <a:tcPr marL="91440" marR="91440" marT="45720" marB="45720">
+                  <a:tcPr>
                     <a:lnL w="6350" cap="flat" cmpd="sng" algn="ctr">
                       <a:solidFill>
                         <a:srgbClr val="E8ECF1"/>
@@ -5595,6 +5480,11 @@
                     </a:lnB>
                   </a:tcPr>
                 </a:tc>
+                <a:extLst>
+                  <a:ext uri="{0D108BD9-81ED-4DB2-BD59-A6C34878D82A}">
+                    <a16:rowId xmlns:a16="http://schemas.microsoft.com/office/drawing/2014/main" val="10002"/>
+                  </a:ext>
+                </a:extLst>
               </a:tr>
               <a:tr h="228600">
                 <a:tc>
@@ -5602,7 +5492,7 @@
                     <a:bodyPr/>
                     <a:lstStyle/>
                     <a:p>
-                      <a:pPr indent="0" marL="0">
+                      <a:pPr marL="0" indent="0">
                         <a:buNone/>
                       </a:pPr>
                       <a:r>
@@ -5623,7 +5513,7 @@
                       </a:endParaRPr>
                     </a:p>
                   </a:txBody>
-                  <a:tcPr marL="91440" marR="91440" marT="45720" marB="45720">
+                  <a:tcPr>
                     <a:lnL w="6350" cap="flat" cmpd="sng" algn="ctr">
                       <a:solidFill>
                         <a:srgbClr val="E8ECF1"/>
@@ -5667,7 +5557,7 @@
                     <a:bodyPr/>
                     <a:lstStyle/>
                     <a:p>
-                      <a:pPr indent="0" marL="0">
+                      <a:pPr marL="0" indent="0">
                         <a:buNone/>
                       </a:pPr>
                       <a:r>
@@ -5688,7 +5578,7 @@
                       </a:endParaRPr>
                     </a:p>
                   </a:txBody>
-                  <a:tcPr marL="91440" marR="91440" marT="45720" marB="45720">
+                  <a:tcPr>
                     <a:lnL w="6350" cap="flat" cmpd="sng" algn="ctr">
                       <a:solidFill>
                         <a:srgbClr val="E8ECF1"/>
@@ -5732,7 +5622,7 @@
                     <a:bodyPr/>
                     <a:lstStyle/>
                     <a:p>
-                      <a:pPr indent="0" marL="0">
+                      <a:pPr marL="0" indent="0">
                         <a:buNone/>
                       </a:pPr>
                       <a:r>
@@ -5753,7 +5643,7 @@
                       </a:endParaRPr>
                     </a:p>
                   </a:txBody>
-                  <a:tcPr marL="91440" marR="91440" marT="45720" marB="45720">
+                  <a:tcPr>
                     <a:lnL w="6350" cap="flat" cmpd="sng" algn="ctr">
                       <a:solidFill>
                         <a:srgbClr val="E8ECF1"/>
@@ -5797,7 +5687,7 @@
                     <a:bodyPr/>
                     <a:lstStyle/>
                     <a:p>
-                      <a:pPr indent="0" marL="0">
+                      <a:pPr marL="0" indent="0">
                         <a:buNone/>
                       </a:pPr>
                       <a:r>
@@ -5818,7 +5708,7 @@
                       </a:endParaRPr>
                     </a:p>
                   </a:txBody>
-                  <a:tcPr marL="91440" marR="91440" marT="45720" marB="45720">
+                  <a:tcPr>
                     <a:lnL w="6350" cap="flat" cmpd="sng" algn="ctr">
                       <a:solidFill>
                         <a:srgbClr val="E8ECF1"/>
@@ -5862,7 +5752,7 @@
                     <a:bodyPr/>
                     <a:lstStyle/>
                     <a:p>
-                      <a:pPr indent="0" marL="0">
+                      <a:pPr marL="0" indent="0">
                         <a:buNone/>
                       </a:pPr>
                       <a:r>
@@ -5883,7 +5773,7 @@
                       </a:endParaRPr>
                     </a:p>
                   </a:txBody>
-                  <a:tcPr marL="91440" marR="91440" marT="45720" marB="45720">
+                  <a:tcPr>
                     <a:lnL w="6350" cap="flat" cmpd="sng" algn="ctr">
                       <a:solidFill>
                         <a:srgbClr val="E8ECF1"/>
@@ -5922,6 +5812,11 @@
                     </a:lnB>
                   </a:tcPr>
                 </a:tc>
+                <a:extLst>
+                  <a:ext uri="{0D108BD9-81ED-4DB2-BD59-A6C34878D82A}">
+                    <a16:rowId xmlns:a16="http://schemas.microsoft.com/office/drawing/2014/main" val="10003"/>
+                  </a:ext>
+                </a:extLst>
               </a:tr>
             </a:tbl>
           </a:graphicData>
@@ -5968,7 +5863,7 @@
           <a:bodyPr wrap="square" lIns="0" tIns="0" rIns="0" bIns="0" rtlCol="0" anchor="ctr"/>
           <a:lstStyle/>
           <a:p>
-            <a:pPr indent="0" marL="0">
+            <a:pPr marL="0" indent="0">
               <a:buNone/>
             </a:pPr>
             <a:r>
@@ -5982,9 +5877,6 @@
               </a:rPr>
               <a:t>样本外结论：</a:t>
             </a:r>
-            <a:pPr indent="0" marL="0">
-              <a:buNone/>
-            </a:pPr>
             <a:r>
               <a:rPr lang="en-US" sz="1050" dirty="0">
                 <a:solidFill>
@@ -5996,9 +5888,6 @@
               </a:rPr>
               <a:t>5只标的超额全部为正。Sharpe从1.6-1.8衰减至1.2-1.5，但仍显著高于基准(0.5-0.7)。</a:t>
             </a:r>
-            <a:pPr indent="0" marL="0">
-              <a:buNone/>
-            </a:pPr>
             <a:r>
               <a:rPr lang="en-US" sz="1050" b="1" dirty="0">
                 <a:solidFill>
@@ -6016,7 +5905,7 @@
       </p:sp>
       <p:sp>
         <p:nvSpPr>
-          <p:cNvPr id="11" name="Text 6"/>
+          <p:cNvPr id="4" name="Text 6"/>
           <p:cNvSpPr/>
           <p:nvPr/>
         </p:nvSpPr>
@@ -6035,7 +5924,7 @@
           <a:bodyPr wrap="square" lIns="0" tIns="0" rIns="0" bIns="0" rtlCol="0" anchor="ctr"/>
           <a:lstStyle/>
           <a:p>
-            <a:pPr indent="0" marL="0">
+            <a:pPr marL="0" indent="0">
               <a:buNone/>
             </a:pPr>
             <a:r>
@@ -6074,7 +5963,7 @@
           <a:bodyPr wrap="square" lIns="0" tIns="0" rIns="0" bIns="0" rtlCol="0" anchor="ctr"/>
           <a:lstStyle/>
           <a:p>
-            <a:pPr indent="0" marL="0">
+            <a:pPr marL="0" indent="0">
               <a:buNone/>
             </a:pPr>
             <a:r>
@@ -6113,7 +6002,7 @@
           <a:bodyPr wrap="square" rtlCol="0" anchor="ctr"/>
           <a:lstStyle/>
           <a:p>
-            <a:pPr algn="r" indent="0" marL="0">
+            <a:pPr marL="0" indent="0" algn="r">
               <a:buNone/>
             </a:pPr>
             <a:r>
@@ -6147,6 +6036,7 @@
         <a:solidFill>
           <a:srgbClr val="F7F9FC"/>
         </a:solidFill>
+        <a:effectLst/>
       </p:bgPr>
     </p:bg>
     <p:spTree>
@@ -6184,7 +6074,7 @@
           <a:bodyPr wrap="square" lIns="0" tIns="0" rIns="0" bIns="0" rtlCol="0" anchor="ctr"/>
           <a:lstStyle/>
           <a:p>
-            <a:pPr indent="0" marL="0">
+            <a:pPr marL="0" indent="0">
               <a:buNone/>
             </a:pPr>
             <a:r>
@@ -6221,7 +6111,7 @@
           </a:solidFill>
           <a:ln/>
           <a:effectLst>
-            <a:outerShdw sx="100000" sy="100000" kx="0" ky="0" algn="bl" rotWithShape="0" blurRad="50800" dist="19050" dir="8100000">
+            <a:outerShdw blurRad="50800" dist="19050" dir="8100000" algn="bl" rotWithShape="0">
               <a:srgbClr val="000000">
                 <a:alpha val="8000"/>
               </a:srgbClr>
@@ -6270,7 +6160,7 @@
           <a:bodyPr wrap="square" lIns="0" tIns="0" rIns="0" bIns="0" rtlCol="0" anchor="ctr"/>
           <a:lstStyle/>
           <a:p>
-            <a:pPr indent="0" marL="0">
+            <a:pPr marL="0" indent="0">
               <a:buNone/>
             </a:pPr>
             <a:r>
@@ -6309,7 +6199,7 @@
           <a:bodyPr wrap="square" lIns="0" tIns="0" rIns="0" bIns="0" rtlCol="0" anchor="t"/>
           <a:lstStyle/>
           <a:p>
-            <a:pPr indent="0" marL="0">
+            <a:pPr marL="0" indent="0">
               <a:buNone/>
             </a:pPr>
             <a:r>
@@ -6326,7 +6216,7 @@
             <a:endParaRPr lang="en-US" sz="1000" dirty="0"/>
           </a:p>
           <a:p>
-            <a:pPr indent="0" marL="0">
+            <a:pPr marL="0" indent="0">
               <a:buNone/>
             </a:pPr>
             <a:r>
@@ -6343,7 +6233,7 @@
             <a:endParaRPr lang="en-US" sz="1000" dirty="0"/>
           </a:p>
           <a:p>
-            <a:pPr indent="0" marL="0">
+            <a:pPr marL="0" indent="0">
               <a:buNone/>
             </a:pPr>
             <a:r>
@@ -6360,7 +6250,7 @@
             <a:endParaRPr lang="en-US" sz="1000" dirty="0"/>
           </a:p>
           <a:p>
-            <a:pPr indent="0" marL="0">
+            <a:pPr marL="0" indent="0">
               <a:buNone/>
             </a:pPr>
             <a:r>
@@ -6377,7 +6267,7 @@
             <a:endParaRPr lang="en-US" sz="1000" dirty="0"/>
           </a:p>
           <a:p>
-            <a:pPr indent="0" marL="0">
+            <a:pPr marL="0" indent="0">
               <a:buNone/>
             </a:pPr>
             <a:r>
@@ -6414,7 +6304,7 @@
           </a:solidFill>
           <a:ln/>
           <a:effectLst>
-            <a:outerShdw sx="100000" sy="100000" kx="0" ky="0" algn="bl" rotWithShape="0" blurRad="50800" dist="19050" dir="8100000">
+            <a:outerShdw blurRad="50800" dist="19050" dir="8100000" algn="bl" rotWithShape="0">
               <a:srgbClr val="000000">
                 <a:alpha val="8000"/>
               </a:srgbClr>
@@ -6463,7 +6353,7 @@
           <a:bodyPr wrap="square" lIns="0" tIns="0" rIns="0" bIns="0" rtlCol="0" anchor="ctr"/>
           <a:lstStyle/>
           <a:p>
-            <a:pPr indent="0" marL="0">
+            <a:pPr marL="0" indent="0">
               <a:buNone/>
             </a:pPr>
             <a:r>
@@ -6502,7 +6392,7 @@
           <a:bodyPr wrap="square" lIns="0" tIns="0" rIns="0" bIns="0" rtlCol="0" anchor="t"/>
           <a:lstStyle/>
           <a:p>
-            <a:pPr indent="0" marL="0">
+            <a:pPr marL="0" indent="0">
               <a:buNone/>
             </a:pPr>
             <a:r>
@@ -6519,7 +6409,7 @@
             <a:endParaRPr lang="en-US" sz="1000" dirty="0"/>
           </a:p>
           <a:p>
-            <a:pPr indent="0" marL="0">
+            <a:pPr marL="0" indent="0">
               <a:buNone/>
             </a:pPr>
             <a:r>
@@ -6536,7 +6426,7 @@
             <a:endParaRPr lang="en-US" sz="1000" dirty="0"/>
           </a:p>
           <a:p>
-            <a:pPr indent="0" marL="0">
+            <a:pPr marL="0" indent="0">
               <a:buNone/>
             </a:pPr>
             <a:r>
@@ -6553,7 +6443,7 @@
             <a:endParaRPr lang="en-US" sz="1000" dirty="0"/>
           </a:p>
           <a:p>
-            <a:pPr indent="0" marL="0">
+            <a:pPr marL="0" indent="0">
               <a:buNone/>
             </a:pPr>
             <a:r>
@@ -6570,7 +6460,7 @@
             <a:endParaRPr lang="en-US" sz="1000" dirty="0"/>
           </a:p>
           <a:p>
-            <a:pPr indent="0" marL="0">
+            <a:pPr marL="0" indent="0">
               <a:buNone/>
             </a:pPr>
             <a:r>
@@ -6607,7 +6497,7 @@
           </a:solidFill>
           <a:ln/>
           <a:effectLst>
-            <a:outerShdw sx="100000" sy="100000" kx="0" ky="0" algn="bl" rotWithShape="0" blurRad="50800" dist="19050" dir="8100000">
+            <a:outerShdw blurRad="50800" dist="19050" dir="8100000" algn="bl" rotWithShape="0">
               <a:srgbClr val="000000">
                 <a:alpha val="8000"/>
               </a:srgbClr>
@@ -6656,7 +6546,7 @@
           <a:bodyPr wrap="square" lIns="0" tIns="0" rIns="0" bIns="0" rtlCol="0" anchor="ctr"/>
           <a:lstStyle/>
           <a:p>
-            <a:pPr indent="0" marL="0">
+            <a:pPr marL="0" indent="0">
               <a:buNone/>
             </a:pPr>
             <a:r>
@@ -6695,7 +6585,7 @@
           <a:bodyPr wrap="square" lIns="0" tIns="0" rIns="0" bIns="0" rtlCol="0" anchor="t"/>
           <a:lstStyle/>
           <a:p>
-            <a:pPr indent="0" marL="0">
+            <a:pPr marL="0" indent="0">
               <a:buNone/>
             </a:pPr>
             <a:r>
@@ -6712,7 +6602,7 @@
             <a:endParaRPr lang="en-US" sz="1000" dirty="0"/>
           </a:p>
           <a:p>
-            <a:pPr indent="0" marL="0">
+            <a:pPr marL="0" indent="0">
               <a:buNone/>
             </a:pPr>
             <a:r>
@@ -6729,7 +6619,7 @@
             <a:endParaRPr lang="en-US" sz="1000" dirty="0"/>
           </a:p>
           <a:p>
-            <a:pPr indent="0" marL="0">
+            <a:pPr marL="0" indent="0">
               <a:buNone/>
             </a:pPr>
             <a:r>
@@ -6746,7 +6636,7 @@
             <a:endParaRPr lang="en-US" sz="1000" dirty="0"/>
           </a:p>
           <a:p>
-            <a:pPr indent="0" marL="0">
+            <a:pPr marL="0" indent="0">
               <a:buNone/>
             </a:pPr>
             <a:r>
@@ -6763,7 +6653,7 @@
             <a:endParaRPr lang="en-US" sz="1000" dirty="0"/>
           </a:p>
           <a:p>
-            <a:pPr indent="0" marL="0">
+            <a:pPr marL="0" indent="0">
               <a:buNone/>
             </a:pPr>
             <a:r>
@@ -6800,7 +6690,7 @@
           </a:solidFill>
           <a:ln/>
           <a:effectLst>
-            <a:outerShdw sx="100000" sy="100000" kx="0" ky="0" algn="bl" rotWithShape="0" blurRad="50800" dist="19050" dir="8100000">
+            <a:outerShdw blurRad="50800" dist="19050" dir="8100000" algn="bl" rotWithShape="0">
               <a:srgbClr val="000000">
                 <a:alpha val="8000"/>
               </a:srgbClr>
@@ -6849,7 +6739,7 @@
           <a:bodyPr wrap="square" lIns="0" tIns="0" rIns="0" bIns="0" rtlCol="0" anchor="ctr"/>
           <a:lstStyle/>
           <a:p>
-            <a:pPr indent="0" marL="0">
+            <a:pPr marL="0" indent="0">
               <a:buNone/>
             </a:pPr>
             <a:r>
@@ -6888,7 +6778,7 @@
           <a:bodyPr wrap="square" lIns="0" tIns="0" rIns="0" bIns="0" rtlCol="0" anchor="t"/>
           <a:lstStyle/>
           <a:p>
-            <a:pPr indent="0" marL="0">
+            <a:pPr marL="0" indent="0">
               <a:buNone/>
             </a:pPr>
             <a:r>
@@ -6905,7 +6795,7 @@
             <a:endParaRPr lang="en-US" sz="1300" dirty="0"/>
           </a:p>
           <a:p>
-            <a:pPr indent="0" marL="0">
+            <a:pPr marL="0" indent="0">
               <a:buNone/>
             </a:pPr>
             <a:r>
@@ -6922,7 +6812,7 @@
             <a:endParaRPr lang="en-US" sz="1300" dirty="0"/>
           </a:p>
           <a:p>
-            <a:pPr indent="0" marL="0">
+            <a:pPr marL="0" indent="0">
               <a:buNone/>
             </a:pPr>
             <a:r>
@@ -6939,13 +6829,13 @@
             <a:endParaRPr lang="en-US" sz="1300" dirty="0"/>
           </a:p>
           <a:p>
-            <a:pPr indent="0" marL="0">
+            <a:pPr marL="0" indent="0">
               <a:buNone/>
             </a:pPr>
             <a:endParaRPr lang="en-US" sz="1300" dirty="0"/>
           </a:p>
           <a:p>
-            <a:pPr indent="0" marL="0">
+            <a:pPr marL="0" indent="0">
               <a:buNone/>
             </a:pPr>
             <a:r>
@@ -6962,7 +6852,7 @@
             <a:endParaRPr lang="en-US" sz="1300" dirty="0"/>
           </a:p>
           <a:p>
-            <a:pPr indent="0" marL="0">
+            <a:pPr marL="0" indent="0">
               <a:buNone/>
             </a:pPr>
             <a:r>
@@ -6979,7 +6869,7 @@
             <a:endParaRPr lang="en-US" sz="1300" dirty="0"/>
           </a:p>
           <a:p>
-            <a:pPr indent="0" marL="0">
+            <a:pPr marL="0" indent="0">
               <a:buNone/>
             </a:pPr>
             <a:r>
@@ -7018,7 +6908,7 @@
           <a:bodyPr wrap="square" lIns="0" tIns="0" rIns="0" bIns="0" rtlCol="0" anchor="ctr"/>
           <a:lstStyle/>
           <a:p>
-            <a:pPr indent="0" marL="0">
+            <a:pPr marL="0" indent="0">
               <a:buNone/>
             </a:pPr>
             <a:r>
@@ -7057,7 +6947,7 @@
           <a:bodyPr wrap="square" lIns="0" tIns="0" rIns="0" bIns="0" rtlCol="0" anchor="t"/>
           <a:lstStyle/>
           <a:p>
-            <a:pPr indent="0" marL="0">
+            <a:pPr marL="0" indent="0">
               <a:buNone/>
             </a:pPr>
             <a:r>
@@ -7074,7 +6964,7 @@
             <a:endParaRPr lang="en-US" sz="950" dirty="0"/>
           </a:p>
           <a:p>
-            <a:pPr indent="0" marL="0">
+            <a:pPr marL="0" indent="0">
               <a:buNone/>
             </a:pPr>
             <a:r>
@@ -7091,7 +6981,7 @@
             <a:endParaRPr lang="en-US" sz="950" dirty="0"/>
           </a:p>
           <a:p>
-            <a:pPr indent="0" marL="0">
+            <a:pPr marL="0" indent="0">
               <a:buNone/>
             </a:pPr>
             <a:r>
@@ -7108,7 +6998,7 @@
             <a:endParaRPr lang="en-US" sz="950" dirty="0"/>
           </a:p>
           <a:p>
-            <a:pPr indent="0" marL="0">
+            <a:pPr marL="0" indent="0">
               <a:buNone/>
             </a:pPr>
             <a:r>
@@ -7125,7 +7015,7 @@
             <a:endParaRPr lang="en-US" sz="950" dirty="0"/>
           </a:p>
           <a:p>
-            <a:pPr indent="0" marL="0">
+            <a:pPr marL="0" indent="0">
               <a:buNone/>
             </a:pPr>
             <a:r>
@@ -7142,7 +7032,7 @@
             <a:endParaRPr lang="en-US" sz="950" dirty="0"/>
           </a:p>
           <a:p>
-            <a:pPr indent="0" marL="0">
+            <a:pPr marL="0" indent="0">
               <a:buNone/>
             </a:pPr>
             <a:r>
@@ -7181,7 +7071,7 @@
           <a:bodyPr wrap="square" lIns="0" tIns="0" rIns="0" bIns="0" rtlCol="0" anchor="ctr"/>
           <a:lstStyle/>
           <a:p>
-            <a:pPr indent="0" marL="0">
+            <a:pPr marL="0" indent="0">
               <a:buNone/>
             </a:pPr>
             <a:r>
@@ -7220,7 +7110,7 @@
           <a:bodyPr wrap="square" rtlCol="0" anchor="ctr"/>
           <a:lstStyle/>
           <a:p>
-            <a:pPr algn="r" indent="0" marL="0">
+            <a:pPr marL="0" indent="0" algn="r">
               <a:buNone/>
             </a:pPr>
             <a:r>
@@ -7254,6 +7144,7 @@
         <a:solidFill>
           <a:srgbClr val="F7F9FC"/>
         </a:solidFill>
+        <a:effectLst/>
       </p:bgPr>
     </p:bg>
     <p:spTree>
@@ -7291,7 +7182,7 @@
           <a:bodyPr wrap="square" lIns="0" tIns="0" rIns="0" bIns="0" rtlCol="0" anchor="ctr"/>
           <a:lstStyle/>
           <a:p>
-            <a:pPr indent="0" marL="0">
+            <a:pPr marL="0" indent="0">
               <a:buNone/>
             </a:pPr>
             <a:r>
@@ -7330,7 +7221,7 @@
           <a:bodyPr wrap="square" lIns="0" tIns="0" rIns="0" bIns="0" rtlCol="0" anchor="ctr"/>
           <a:lstStyle/>
           <a:p>
-            <a:pPr indent="0" marL="0">
+            <a:pPr marL="0" indent="0">
               <a:buNone/>
             </a:pPr>
             <a:r>
@@ -7389,7 +7280,7 @@
           <a:bodyPr wrap="square" lIns="0" tIns="0" rIns="0" bIns="0" rtlCol="0" anchor="ctr"/>
           <a:lstStyle/>
           <a:p>
-            <a:pPr algn="ctr" indent="0" marL="0">
+            <a:pPr marL="0" indent="0" algn="ctr">
               <a:buNone/>
             </a:pPr>
             <a:r>
@@ -7428,7 +7319,7 @@
           <a:bodyPr wrap="square" lIns="0" tIns="0" rIns="0" bIns="0" rtlCol="0" anchor="ctr"/>
           <a:lstStyle/>
           <a:p>
-            <a:pPr indent="0" marL="0">
+            <a:pPr marL="0" indent="0">
               <a:buNone/>
             </a:pPr>
             <a:r>
@@ -7442,9 +7333,6 @@
               </a:rPr>
               <a:t>复合信号全面优于单一指标</a:t>
             </a:r>
-            <a:pPr indent="0" marL="0">
-              <a:buNone/>
-            </a:pPr>
             <a:r>
               <a:rPr lang="en-US" sz="1000" dirty="0">
                 <a:solidFill>
@@ -7501,7 +7389,7 @@
           <a:bodyPr wrap="square" lIns="0" tIns="0" rIns="0" bIns="0" rtlCol="0" anchor="ctr"/>
           <a:lstStyle/>
           <a:p>
-            <a:pPr algn="ctr" indent="0" marL="0">
+            <a:pPr marL="0" indent="0" algn="ctr">
               <a:buNone/>
             </a:pPr>
             <a:r>
@@ -7540,7 +7428,7 @@
           <a:bodyPr wrap="square" lIns="0" tIns="0" rIns="0" bIns="0" rtlCol="0" anchor="ctr"/>
           <a:lstStyle/>
           <a:p>
-            <a:pPr indent="0" marL="0">
+            <a:pPr marL="0" indent="0">
               <a:buNone/>
             </a:pPr>
             <a:r>
@@ -7554,9 +7442,6 @@
               </a:rPr>
               <a:t>动态仓位有效控制回撤</a:t>
             </a:r>
-            <a:pPr indent="0" marL="0">
-              <a:buNone/>
-            </a:pPr>
             <a:r>
               <a:rPr lang="en-US" sz="1000" dirty="0">
                 <a:solidFill>
@@ -7613,7 +7498,7 @@
           <a:bodyPr wrap="square" lIns="0" tIns="0" rIns="0" bIns="0" rtlCol="0" anchor="ctr"/>
           <a:lstStyle/>
           <a:p>
-            <a:pPr algn="ctr" indent="0" marL="0">
+            <a:pPr marL="0" indent="0" algn="ctr">
               <a:buNone/>
             </a:pPr>
             <a:r>
@@ -7652,7 +7537,7 @@
           <a:bodyPr wrap="square" lIns="0" tIns="0" rIns="0" bIns="0" rtlCol="0" anchor="ctr"/>
           <a:lstStyle/>
           <a:p>
-            <a:pPr indent="0" marL="0">
+            <a:pPr marL="0" indent="0">
               <a:buNone/>
             </a:pPr>
             <a:r>
@@ -7666,9 +7551,6 @@
               </a:rPr>
               <a:t>低换手是核心优势</a:t>
             </a:r>
-            <a:pPr indent="0" marL="0">
-              <a:buNone/>
-            </a:pPr>
             <a:r>
               <a:rPr lang="en-US" sz="1000" dirty="0">
                 <a:solidFill>
@@ -7725,7 +7607,7 @@
           <a:bodyPr wrap="square" lIns="0" tIns="0" rIns="0" bIns="0" rtlCol="0" anchor="ctr"/>
           <a:lstStyle/>
           <a:p>
-            <a:pPr algn="ctr" indent="0" marL="0">
+            <a:pPr marL="0" indent="0" algn="ctr">
               <a:buNone/>
             </a:pPr>
             <a:r>
@@ -7764,7 +7646,7 @@
           <a:bodyPr wrap="square" lIns="0" tIns="0" rIns="0" bIns="0" rtlCol="0" anchor="ctr"/>
           <a:lstStyle/>
           <a:p>
-            <a:pPr indent="0" marL="0">
+            <a:pPr marL="0" indent="0">
               <a:buNone/>
             </a:pPr>
             <a:r>
@@ -7778,9 +7660,6 @@
               </a:rPr>
               <a:t>策略具有初步稳健性</a:t>
             </a:r>
-            <a:pPr indent="0" marL="0">
-              <a:buNone/>
-            </a:pPr>
             <a:r>
               <a:rPr lang="en-US" sz="1000" dirty="0">
                 <a:solidFill>
@@ -7837,7 +7716,7 @@
           <a:bodyPr wrap="square" lIns="0" tIns="0" rIns="0" bIns="0" rtlCol="0" anchor="ctr"/>
           <a:lstStyle/>
           <a:p>
-            <a:pPr algn="ctr" indent="0" marL="0">
+            <a:pPr marL="0" indent="0" algn="ctr">
               <a:buNone/>
             </a:pPr>
             <a:r>
@@ -7876,7 +7755,7 @@
           <a:bodyPr wrap="square" lIns="0" tIns="0" rIns="0" bIns="0" rtlCol="0" anchor="ctr"/>
           <a:lstStyle/>
           <a:p>
-            <a:pPr indent="0" marL="0">
+            <a:pPr marL="0" indent="0">
               <a:buNone/>
             </a:pPr>
             <a:r>
@@ -7890,9 +7769,6 @@
               </a:rPr>
               <a:t>端到端闭环</a:t>
             </a:r>
-            <a:pPr indent="0" marL="0">
-              <a:buNone/>
-            </a:pPr>
             <a:r>
               <a:rPr lang="en-US" sz="1000" dirty="0">
                 <a:solidFill>
@@ -7949,7 +7825,7 @@
           <a:bodyPr wrap="square" lIns="0" tIns="0" rIns="0" bIns="0" rtlCol="0" anchor="ctr"/>
           <a:lstStyle/>
           <a:p>
-            <a:pPr indent="0" marL="0">
+            <a:pPr marL="0" indent="0">
               <a:buNone/>
             </a:pPr>
             <a:r>
@@ -7988,7 +7864,7 @@
           <a:bodyPr wrap="square" lIns="0" tIns="0" rIns="0" bIns="0" rtlCol="0" anchor="t"/>
           <a:lstStyle/>
           <a:p>
-            <a:pPr indent="0" marL="0">
+            <a:pPr marL="0" indent="0">
               <a:buNone/>
             </a:pPr>
             <a:r>
@@ -8005,7 +7881,7 @@
             <a:endParaRPr lang="en-US" sz="950" dirty="0"/>
           </a:p>
           <a:p>
-            <a:pPr indent="0" marL="0">
+            <a:pPr marL="0" indent="0">
               <a:buNone/>
             </a:pPr>
             <a:r>
@@ -8022,7 +7898,7 @@
             <a:endParaRPr lang="en-US" sz="950" dirty="0"/>
           </a:p>
           <a:p>
-            <a:pPr indent="0" marL="0">
+            <a:pPr marL="0" indent="0">
               <a:buNone/>
             </a:pPr>
             <a:r>
@@ -8039,7 +7915,7 @@
             <a:endParaRPr lang="en-US" sz="950" dirty="0"/>
           </a:p>
           <a:p>
-            <a:pPr indent="0" marL="0">
+            <a:pPr marL="0" indent="0">
               <a:buNone/>
             </a:pPr>
             <a:r>
@@ -8056,7 +7932,7 @@
             <a:endParaRPr lang="en-US" sz="950" dirty="0"/>
           </a:p>
           <a:p>
-            <a:pPr indent="0" marL="0">
+            <a:pPr marL="0" indent="0">
               <a:buNone/>
             </a:pPr>
             <a:r>
@@ -8073,7 +7949,7 @@
             <a:endParaRPr lang="en-US" sz="950" dirty="0"/>
           </a:p>
           <a:p>
-            <a:pPr indent="0" marL="0">
+            <a:pPr marL="0" indent="0">
               <a:buNone/>
             </a:pPr>
             <a:r>
@@ -8112,7 +7988,7 @@
           <a:bodyPr wrap="square" lIns="0" tIns="0" rIns="0" bIns="0" rtlCol="0" anchor="ctr"/>
           <a:lstStyle/>
           <a:p>
-            <a:pPr indent="0" marL="0">
+            <a:pPr marL="0" indent="0">
               <a:buNone/>
             </a:pPr>
             <a:r>
@@ -8151,7 +8027,7 @@
           <a:bodyPr wrap="square" rtlCol="0" anchor="ctr"/>
           <a:lstStyle/>
           <a:p>
-            <a:pPr algn="r" indent="0" marL="0">
+            <a:pPr marL="0" indent="0" algn="r">
               <a:buNone/>
             </a:pPr>
             <a:r>
@@ -8185,6 +8061,7 @@
         <a:solidFill>
           <a:srgbClr val="0B1D3A"/>
         </a:solidFill>
+        <a:effectLst/>
       </p:bgPr>
     </p:bg>
     <p:spTree>
@@ -8242,7 +8119,7 @@
           <a:bodyPr wrap="square" lIns="0" tIns="0" rIns="0" bIns="0" rtlCol="0" anchor="ctr"/>
           <a:lstStyle/>
           <a:p>
-            <a:pPr indent="0" marL="0">
+            <a:pPr marL="0" indent="0">
               <a:buNone/>
             </a:pPr>
             <a:r>
@@ -8281,7 +8158,7 @@
           <a:bodyPr wrap="square" lIns="0" tIns="0" rIns="0" bIns="0" rtlCol="0" anchor="ctr"/>
           <a:lstStyle/>
           <a:p>
-            <a:pPr indent="0" marL="0">
+            <a:pPr marL="0" indent="0">
               <a:buNone/>
             </a:pPr>
             <a:r>
@@ -8340,7 +8217,7 @@
           <a:bodyPr wrap="square" lIns="0" tIns="0" rIns="0" bIns="0" rtlCol="0" anchor="t"/>
           <a:lstStyle/>
           <a:p>
-            <a:pPr indent="0" marL="0">
+            <a:pPr marL="0" indent="0">
               <a:buNone/>
             </a:pPr>
             <a:r>
@@ -8354,9 +8231,6 @@
               </a:rPr>
               <a:t>GitHub：</a:t>
             </a:r>
-            <a:pPr indent="0" marL="0">
-              <a:buNone/>
-            </a:pPr>
             <a:r>
               <a:rPr lang="en-US" sz="1300" dirty="0">
                 <a:solidFill>
@@ -8368,9 +8242,6 @@
               </a:rPr>
               <a:t>github.com/7changecahng/quant-strategy</a:t>
             </a:r>
-            <a:pPr indent="0" marL="0">
-              <a:buNone/>
-            </a:pPr>
             <a:r>
               <a:rPr lang="en-US" sz="1100" dirty="0">
                 <a:solidFill>
@@ -8382,13 +8253,10 @@
               </a:rPr>
               <a:t>  (代码 + README + 39个测试)</a:t>
             </a:r>
-            <a:pPr indent="0" marL="0">
-              <a:buNone/>
-            </a:pPr>
             <a:endParaRPr lang="en-US" sz="1300" dirty="0"/>
           </a:p>
           <a:p>
-            <a:pPr indent="0" marL="0">
+            <a:pPr marL="0" indent="0">
               <a:buNone/>
             </a:pPr>
             <a:r>
@@ -8402,9 +8270,6 @@
               </a:rPr>
               <a:t>Dashboard：</a:t>
             </a:r>
-            <a:pPr indent="0" marL="0">
-              <a:buNone/>
-            </a:pPr>
             <a:r>
               <a:rPr lang="en-US" sz="1300" dirty="0">
                 <a:solidFill>
@@ -8416,13 +8281,10 @@
               </a:rPr>
               <a:t>http://localhost:8501  (现场运行中)</a:t>
             </a:r>
-            <a:pPr indent="0" marL="0">
-              <a:buNone/>
-            </a:pPr>
             <a:endParaRPr lang="en-US" sz="1300" dirty="0"/>
           </a:p>
           <a:p>
-            <a:pPr indent="0" marL="0">
+            <a:pPr marL="0" indent="0">
               <a:buNone/>
             </a:pPr>
             <a:r>
@@ -8461,7 +8323,7 @@
           <a:bodyPr wrap="square" rtlCol="0" anchor="ctr"/>
           <a:lstStyle/>
           <a:p>
-            <a:pPr algn="r" indent="0" marL="0">
+            <a:pPr marL="0" indent="0" algn="r">
               <a:buNone/>
             </a:pPr>
             <a:r>
@@ -8495,6 +8357,7 @@
         <a:solidFill>
           <a:srgbClr val="F7F9FC"/>
         </a:solidFill>
+        <a:effectLst/>
       </p:bgPr>
     </p:bg>
     <p:spTree>
@@ -8532,7 +8395,7 @@
           <a:bodyPr wrap="square" lIns="0" tIns="0" rIns="0" bIns="0" rtlCol="0" anchor="ctr"/>
           <a:lstStyle/>
           <a:p>
-            <a:pPr indent="0" marL="0">
+            <a:pPr marL="0" indent="0">
               <a:buNone/>
             </a:pPr>
             <a:r>
@@ -8591,7 +8454,7 @@
           <a:bodyPr wrap="square" lIns="0" tIns="0" rIns="0" bIns="0" rtlCol="0" anchor="ctr"/>
           <a:lstStyle/>
           <a:p>
-            <a:pPr algn="ctr" indent="0" marL="0">
+            <a:pPr marL="0" indent="0" algn="ctr">
               <a:buNone/>
             </a:pPr>
             <a:r>
@@ -8630,7 +8493,7 @@
           <a:bodyPr wrap="square" lIns="0" tIns="0" rIns="0" bIns="0" rtlCol="0" anchor="ctr"/>
           <a:lstStyle/>
           <a:p>
-            <a:pPr indent="0" marL="0">
+            <a:pPr marL="0" indent="0">
               <a:buNone/>
             </a:pPr>
             <a:r>
@@ -8669,7 +8532,7 @@
           <a:bodyPr wrap="square" lIns="0" tIns="0" rIns="0" bIns="0" rtlCol="0" anchor="ctr"/>
           <a:lstStyle/>
           <a:p>
-            <a:pPr indent="0" marL="0">
+            <a:pPr marL="0" indent="0">
               <a:buNone/>
             </a:pPr>
             <a:r>
@@ -8751,7 +8614,7 @@
           <a:bodyPr wrap="square" lIns="0" tIns="0" rIns="0" bIns="0" rtlCol="0" anchor="ctr"/>
           <a:lstStyle/>
           <a:p>
-            <a:pPr algn="ctr" indent="0" marL="0">
+            <a:pPr marL="0" indent="0" algn="ctr">
               <a:buNone/>
             </a:pPr>
             <a:r>
@@ -8790,7 +8653,7 @@
           <a:bodyPr wrap="square" lIns="0" tIns="0" rIns="0" bIns="0" rtlCol="0" anchor="ctr"/>
           <a:lstStyle/>
           <a:p>
-            <a:pPr indent="0" marL="0">
+            <a:pPr marL="0" indent="0">
               <a:buNone/>
             </a:pPr>
             <a:r>
@@ -8829,7 +8692,7 @@
           <a:bodyPr wrap="square" lIns="0" tIns="0" rIns="0" bIns="0" rtlCol="0" anchor="ctr"/>
           <a:lstStyle/>
           <a:p>
-            <a:pPr indent="0" marL="0">
+            <a:pPr marL="0" indent="0">
               <a:buNone/>
             </a:pPr>
             <a:r>
@@ -8911,7 +8774,7 @@
           <a:bodyPr wrap="square" lIns="0" tIns="0" rIns="0" bIns="0" rtlCol="0" anchor="ctr"/>
           <a:lstStyle/>
           <a:p>
-            <a:pPr algn="ctr" indent="0" marL="0">
+            <a:pPr marL="0" indent="0" algn="ctr">
               <a:buNone/>
             </a:pPr>
             <a:r>
@@ -8950,7 +8813,7 @@
           <a:bodyPr wrap="square" lIns="0" tIns="0" rIns="0" bIns="0" rtlCol="0" anchor="ctr"/>
           <a:lstStyle/>
           <a:p>
-            <a:pPr indent="0" marL="0">
+            <a:pPr marL="0" indent="0">
               <a:buNone/>
             </a:pPr>
             <a:r>
@@ -8989,7 +8852,7 @@
           <a:bodyPr wrap="square" lIns="0" tIns="0" rIns="0" bIns="0" rtlCol="0" anchor="ctr"/>
           <a:lstStyle/>
           <a:p>
-            <a:pPr indent="0" marL="0">
+            <a:pPr marL="0" indent="0">
               <a:buNone/>
             </a:pPr>
             <a:r>
@@ -9071,7 +8934,7 @@
           <a:bodyPr wrap="square" lIns="0" tIns="0" rIns="0" bIns="0" rtlCol="0" anchor="ctr"/>
           <a:lstStyle/>
           <a:p>
-            <a:pPr algn="ctr" indent="0" marL="0">
+            <a:pPr marL="0" indent="0" algn="ctr">
               <a:buNone/>
             </a:pPr>
             <a:r>
@@ -9110,7 +8973,7 @@
           <a:bodyPr wrap="square" lIns="0" tIns="0" rIns="0" bIns="0" rtlCol="0" anchor="ctr"/>
           <a:lstStyle/>
           <a:p>
-            <a:pPr indent="0" marL="0">
+            <a:pPr marL="0" indent="0">
               <a:buNone/>
             </a:pPr>
             <a:r>
@@ -9149,7 +9012,7 @@
           <a:bodyPr wrap="square" lIns="0" tIns="0" rIns="0" bIns="0" rtlCol="0" anchor="ctr"/>
           <a:lstStyle/>
           <a:p>
-            <a:pPr indent="0" marL="0">
+            <a:pPr marL="0" indent="0">
               <a:buNone/>
             </a:pPr>
             <a:r>
@@ -9186,7 +9049,7 @@
           </a:solidFill>
           <a:ln/>
           <a:effectLst>
-            <a:outerShdw sx="100000" sy="100000" kx="0" ky="0" algn="bl" rotWithShape="0" blurRad="50800" dist="19050" dir="8100000">
+            <a:outerShdw blurRad="50800" dist="19050" dir="8100000" algn="bl" rotWithShape="0">
               <a:srgbClr val="000000">
                 <a:alpha val="8000"/>
               </a:srgbClr>
@@ -9215,7 +9078,7 @@
           <a:bodyPr wrap="square" lIns="0" tIns="0" rIns="0" bIns="0" rtlCol="0" anchor="ctr"/>
           <a:lstStyle/>
           <a:p>
-            <a:pPr algn="ctr" indent="0" marL="0">
+            <a:pPr marL="0" indent="0" algn="ctr">
               <a:buNone/>
             </a:pPr>
             <a:r>
@@ -9274,7 +9137,7 @@
           <a:bodyPr wrap="square" lIns="0" tIns="0" rIns="0" bIns="0" rtlCol="0" anchor="t"/>
           <a:lstStyle/>
           <a:p>
-            <a:pPr indent="0" marL="0">
+            <a:pPr marL="0" indent="0">
               <a:buNone/>
             </a:pPr>
             <a:r>
@@ -9291,7 +9154,7 @@
             <a:endParaRPr lang="en-US" sz="1000" dirty="0"/>
           </a:p>
           <a:p>
-            <a:pPr indent="0" marL="0">
+            <a:pPr marL="0" indent="0">
               <a:buNone/>
             </a:pPr>
             <a:r>
@@ -9308,7 +9171,7 @@
             <a:endParaRPr lang="en-US" sz="1000" dirty="0"/>
           </a:p>
           <a:p>
-            <a:pPr indent="0" marL="0">
+            <a:pPr marL="0" indent="0">
               <a:buNone/>
             </a:pPr>
             <a:r>
@@ -9325,7 +9188,7 @@
             <a:endParaRPr lang="en-US" sz="1000" dirty="0"/>
           </a:p>
           <a:p>
-            <a:pPr indent="0" marL="0">
+            <a:pPr marL="0" indent="0">
               <a:buNone/>
             </a:pPr>
             <a:r>
@@ -9342,7 +9205,7 @@
             <a:endParaRPr lang="en-US" sz="1000" dirty="0"/>
           </a:p>
           <a:p>
-            <a:pPr indent="0" marL="0">
+            <a:pPr marL="0" indent="0">
               <a:buNone/>
             </a:pPr>
             <a:r>
@@ -9359,7 +9222,7 @@
             <a:endParaRPr lang="en-US" sz="1000" dirty="0"/>
           </a:p>
           <a:p>
-            <a:pPr indent="0" marL="0">
+            <a:pPr marL="0" indent="0">
               <a:buNone/>
             </a:pPr>
             <a:r>
@@ -9376,7 +9239,7 @@
             <a:endParaRPr lang="en-US" sz="1000" dirty="0"/>
           </a:p>
           <a:p>
-            <a:pPr indent="0" marL="0">
+            <a:pPr marL="0" indent="0">
               <a:buNone/>
             </a:pPr>
             <a:r>
@@ -9393,7 +9256,7 @@
             <a:endParaRPr lang="en-US" sz="1000" dirty="0"/>
           </a:p>
           <a:p>
-            <a:pPr indent="0" marL="0">
+            <a:pPr marL="0" indent="0">
               <a:buNone/>
             </a:pPr>
             <a:r>
@@ -9432,7 +9295,7 @@
           <a:bodyPr wrap="square" lIns="0" tIns="0" rIns="0" bIns="0" rtlCol="0" anchor="ctr"/>
           <a:lstStyle/>
           <a:p>
-            <a:pPr indent="0" marL="0">
+            <a:pPr marL="0" indent="0">
               <a:buNone/>
             </a:pPr>
             <a:r>
@@ -9471,7 +9334,7 @@
           <a:bodyPr wrap="square" rtlCol="0" anchor="ctr"/>
           <a:lstStyle/>
           <a:p>
-            <a:pPr algn="r" indent="0" marL="0">
+            <a:pPr marL="0" indent="0" algn="r">
               <a:buNone/>
             </a:pPr>
             <a:r>
@@ -9505,6 +9368,7 @@
         <a:solidFill>
           <a:srgbClr val="F7F9FC"/>
         </a:solidFill>
+        <a:effectLst/>
       </p:bgPr>
     </p:bg>
     <p:spTree>
@@ -9542,7 +9406,7 @@
           <a:bodyPr wrap="square" lIns="0" tIns="0" rIns="0" bIns="0" rtlCol="0" anchor="ctr"/>
           <a:lstStyle/>
           <a:p>
-            <a:pPr indent="0" marL="0">
+            <a:pPr marL="0" indent="0">
               <a:buNone/>
             </a:pPr>
             <a:r>
@@ -9579,7 +9443,7 @@
           </a:solidFill>
           <a:ln/>
           <a:effectLst>
-            <a:outerShdw sx="100000" sy="100000" kx="0" ky="0" algn="bl" rotWithShape="0" blurRad="50800" dist="19050" dir="8100000">
+            <a:outerShdw blurRad="50800" dist="19050" dir="8100000" algn="bl" rotWithShape="0">
               <a:srgbClr val="000000">
                 <a:alpha val="8000"/>
               </a:srgbClr>
@@ -9628,7 +9492,7 @@
           <a:bodyPr wrap="square" lIns="0" tIns="0" rIns="0" bIns="0" rtlCol="0" anchor="ctr"/>
           <a:lstStyle/>
           <a:p>
-            <a:pPr indent="0" marL="0">
+            <a:pPr marL="0" indent="0">
               <a:buNone/>
             </a:pPr>
             <a:r>
@@ -9667,7 +9531,7 @@
           <a:bodyPr wrap="square" lIns="0" tIns="0" rIns="0" bIns="0" rtlCol="0" anchor="t"/>
           <a:lstStyle/>
           <a:p>
-            <a:pPr indent="0" marL="0">
+            <a:pPr marL="0" indent="0">
               <a:buNone/>
             </a:pPr>
             <a:r>
@@ -9704,7 +9568,7 @@
           </a:solidFill>
           <a:ln/>
           <a:effectLst>
-            <a:outerShdw sx="100000" sy="100000" kx="0" ky="0" algn="bl" rotWithShape="0" blurRad="50800" dist="19050" dir="8100000">
+            <a:outerShdw blurRad="50800" dist="19050" dir="8100000" algn="bl" rotWithShape="0">
               <a:srgbClr val="000000">
                 <a:alpha val="8000"/>
               </a:srgbClr>
@@ -9753,7 +9617,7 @@
           <a:bodyPr wrap="square" lIns="0" tIns="0" rIns="0" bIns="0" rtlCol="0" anchor="ctr"/>
           <a:lstStyle/>
           <a:p>
-            <a:pPr indent="0" marL="0">
+            <a:pPr marL="0" indent="0">
               <a:buNone/>
             </a:pPr>
             <a:r>
@@ -9792,7 +9656,7 @@
           <a:bodyPr wrap="square" lIns="0" tIns="0" rIns="0" bIns="0" rtlCol="0" anchor="t"/>
           <a:lstStyle/>
           <a:p>
-            <a:pPr indent="0" marL="0">
+            <a:pPr marL="0" indent="0">
               <a:buNone/>
             </a:pPr>
             <a:r>
@@ -9829,7 +9693,7 @@
           </a:solidFill>
           <a:ln/>
           <a:effectLst>
-            <a:outerShdw sx="100000" sy="100000" kx="0" ky="0" algn="bl" rotWithShape="0" blurRad="50800" dist="19050" dir="8100000">
+            <a:outerShdw blurRad="50800" dist="19050" dir="8100000" algn="bl" rotWithShape="0">
               <a:srgbClr val="000000">
                 <a:alpha val="8000"/>
               </a:srgbClr>
@@ -9878,7 +9742,7 @@
           <a:bodyPr wrap="square" lIns="0" tIns="0" rIns="0" bIns="0" rtlCol="0" anchor="ctr"/>
           <a:lstStyle/>
           <a:p>
-            <a:pPr indent="0" marL="0">
+            <a:pPr marL="0" indent="0">
               <a:buNone/>
             </a:pPr>
             <a:r>
@@ -9917,7 +9781,7 @@
           <a:bodyPr wrap="square" lIns="0" tIns="0" rIns="0" bIns="0" rtlCol="0" anchor="t"/>
           <a:lstStyle/>
           <a:p>
-            <a:pPr indent="0" marL="0">
+            <a:pPr marL="0" indent="0">
               <a:buNone/>
             </a:pPr>
             <a:r>
@@ -9956,7 +9820,7 @@
           <a:bodyPr wrap="square" lIns="0" tIns="0" rIns="0" bIns="0" rtlCol="0" anchor="ctr"/>
           <a:lstStyle/>
           <a:p>
-            <a:pPr algn="ctr" indent="0" marL="0">
+            <a:pPr marL="0" indent="0" algn="ctr">
               <a:buNone/>
             </a:pPr>
             <a:r>
@@ -9993,7 +9857,7 @@
           </a:solidFill>
           <a:ln/>
           <a:effectLst>
-            <a:outerShdw sx="100000" sy="100000" kx="0" ky="0" algn="bl" rotWithShape="0" blurRad="50800" dist="19050" dir="8100000">
+            <a:outerShdw blurRad="50800" dist="19050" dir="8100000" algn="bl" rotWithShape="0">
               <a:srgbClr val="000000">
                 <a:alpha val="8000"/>
               </a:srgbClr>
@@ -10042,7 +9906,7 @@
           <a:bodyPr wrap="square" lIns="0" tIns="0" rIns="0" bIns="0" rtlCol="0" anchor="ctr"/>
           <a:lstStyle/>
           <a:p>
-            <a:pPr indent="0" marL="0">
+            <a:pPr marL="0" indent="0">
               <a:buNone/>
             </a:pPr>
             <a:r>
@@ -10081,7 +9945,7 @@
           <a:bodyPr wrap="square" lIns="0" tIns="0" rIns="0" bIns="0" rtlCol="0" anchor="ctr"/>
           <a:lstStyle/>
           <a:p>
-            <a:pPr indent="0" marL="0">
+            <a:pPr marL="0" indent="0">
               <a:buNone/>
             </a:pPr>
             <a:r>
@@ -10120,7 +9984,7 @@
           <a:bodyPr wrap="square" lIns="0" tIns="0" rIns="0" bIns="0" rtlCol="0" anchor="t"/>
           <a:lstStyle/>
           <a:p>
-            <a:pPr indent="0" marL="0">
+            <a:pPr marL="0" indent="0">
               <a:buNone/>
             </a:pPr>
             <a:r>
@@ -10137,7 +10001,7 @@
             <a:endParaRPr lang="en-US" sz="1000" dirty="0"/>
           </a:p>
           <a:p>
-            <a:pPr indent="0" marL="0">
+            <a:pPr marL="0" indent="0">
               <a:buNone/>
             </a:pPr>
             <a:r>
@@ -10196,7 +10060,7 @@
           <a:bodyPr wrap="square" lIns="0" tIns="0" rIns="0" bIns="0" rtlCol="0" anchor="ctr"/>
           <a:lstStyle/>
           <a:p>
-            <a:pPr indent="0" marL="0">
+            <a:pPr marL="0" indent="0">
               <a:buNone/>
             </a:pPr>
             <a:r>
@@ -10235,7 +10099,7 @@
           <a:bodyPr wrap="square" lIns="0" tIns="0" rIns="0" bIns="0" rtlCol="0" anchor="t"/>
           <a:lstStyle/>
           <a:p>
-            <a:pPr indent="0" marL="0">
+            <a:pPr marL="0" indent="0">
               <a:buNone/>
             </a:pPr>
             <a:r>
@@ -10252,7 +10116,7 @@
             <a:endParaRPr lang="en-US" sz="1000" dirty="0"/>
           </a:p>
           <a:p>
-            <a:pPr indent="0" marL="0">
+            <a:pPr marL="0" indent="0">
               <a:buNone/>
             </a:pPr>
             <a:r>
@@ -10311,7 +10175,7 @@
           <a:bodyPr wrap="square" lIns="0" tIns="0" rIns="0" bIns="0" rtlCol="0" anchor="ctr"/>
           <a:lstStyle/>
           <a:p>
-            <a:pPr indent="0" marL="0">
+            <a:pPr marL="0" indent="0">
               <a:buNone/>
             </a:pPr>
             <a:r>
@@ -10350,7 +10214,7 @@
           <a:bodyPr wrap="square" lIns="0" tIns="0" rIns="0" bIns="0" rtlCol="0" anchor="t"/>
           <a:lstStyle/>
           <a:p>
-            <a:pPr indent="0" marL="0">
+            <a:pPr marL="0" indent="0">
               <a:buNone/>
             </a:pPr>
             <a:r>
@@ -10367,7 +10231,7 @@
             <a:endParaRPr lang="en-US" sz="1000" dirty="0"/>
           </a:p>
           <a:p>
-            <a:pPr indent="0" marL="0">
+            <a:pPr marL="0" indent="0">
               <a:buNone/>
             </a:pPr>
             <a:r>
@@ -10406,7 +10270,7 @@
           <a:bodyPr wrap="square" rtlCol="0" anchor="ctr"/>
           <a:lstStyle/>
           <a:p>
-            <a:pPr algn="r" indent="0" marL="0">
+            <a:pPr marL="0" indent="0" algn="r">
               <a:buNone/>
             </a:pPr>
             <a:r>
@@ -10440,6 +10304,7 @@
         <a:solidFill>
           <a:srgbClr val="F7F9FC"/>
         </a:solidFill>
+        <a:effectLst/>
       </p:bgPr>
     </p:bg>
     <p:spTree>
@@ -10477,7 +10342,7 @@
           <a:bodyPr wrap="square" lIns="0" tIns="0" rIns="0" bIns="0" rtlCol="0" anchor="ctr"/>
           <a:lstStyle/>
           <a:p>
-            <a:pPr indent="0" marL="0">
+            <a:pPr marL="0" indent="0">
               <a:buNone/>
             </a:pPr>
             <a:r>
@@ -10518,8 +10383,20 @@
             <a:tbl>
               <a:tblPr/>
               <a:tblGrid>
-                <a:gridCol w="1463040"/>
-                <a:gridCol w="2926080"/>
+                <a:gridCol w="1463040">
+                  <a:extLst>
+                    <a:ext uri="{9D8B030D-6E8A-4147-A177-3AD203B41FA5}">
+                      <a16:colId xmlns:a16="http://schemas.microsoft.com/office/drawing/2014/main" val="20000"/>
+                    </a:ext>
+                  </a:extLst>
+                </a:gridCol>
+                <a:gridCol w="2926080">
+                  <a:extLst>
+                    <a:ext uri="{9D8B030D-6E8A-4147-A177-3AD203B41FA5}">
+                      <a16:colId xmlns:a16="http://schemas.microsoft.com/office/drawing/2014/main" val="20001"/>
+                    </a:ext>
+                  </a:extLst>
+                </a:gridCol>
               </a:tblGrid>
               <a:tr h="320040">
                 <a:tc>
@@ -10527,7 +10404,7 @@
                     <a:bodyPr/>
                     <a:lstStyle/>
                     <a:p>
-                      <a:pPr indent="0" marL="0">
+                      <a:pPr marL="0" indent="0">
                         <a:buNone/>
                       </a:pPr>
                       <a:r>
@@ -10548,7 +10425,7 @@
                       </a:endParaRPr>
                     </a:p>
                   </a:txBody>
-                  <a:tcPr marL="91440" marR="91440" marT="45720" marB="45720">
+                  <a:tcPr>
                     <a:lnL w="6350" cap="flat" cmpd="sng" algn="ctr">
                       <a:solidFill>
                         <a:srgbClr val="E8ECF1"/>
@@ -10595,7 +10472,7 @@
                     <a:bodyPr/>
                     <a:lstStyle/>
                     <a:p>
-                      <a:pPr indent="0" marL="0">
+                      <a:pPr marL="0" indent="0">
                         <a:buNone/>
                       </a:pPr>
                       <a:r>
@@ -10616,7 +10493,7 @@
                       </a:endParaRPr>
                     </a:p>
                   </a:txBody>
-                  <a:tcPr marL="91440" marR="91440" marT="45720" marB="45720">
+                  <a:tcPr>
                     <a:lnL w="6350" cap="flat" cmpd="sng" algn="ctr">
                       <a:solidFill>
                         <a:srgbClr val="E8ECF1"/>
@@ -10658,6 +10535,11 @@
                     </a:solidFill>
                   </a:tcPr>
                 </a:tc>
+                <a:extLst>
+                  <a:ext uri="{0D108BD9-81ED-4DB2-BD59-A6C34878D82A}">
+                    <a16:rowId xmlns:a16="http://schemas.microsoft.com/office/drawing/2014/main" val="10000"/>
+                  </a:ext>
+                </a:extLst>
               </a:tr>
               <a:tr h="274320">
                 <a:tc>
@@ -10665,7 +10547,7 @@
                     <a:bodyPr/>
                     <a:lstStyle/>
                     <a:p>
-                      <a:pPr indent="0" marL="0">
+                      <a:pPr marL="0" indent="0">
                         <a:buNone/>
                       </a:pPr>
                       <a:r>
@@ -10686,7 +10568,7 @@
                       </a:endParaRPr>
                     </a:p>
                   </a:txBody>
-                  <a:tcPr marL="91440" marR="91440" marT="45720" marB="45720">
+                  <a:tcPr>
                     <a:lnL w="6350" cap="flat" cmpd="sng" algn="ctr">
                       <a:solidFill>
                         <a:srgbClr val="E8ECF1"/>
@@ -10730,7 +10612,7 @@
                     <a:bodyPr/>
                     <a:lstStyle/>
                     <a:p>
-                      <a:pPr indent="0" marL="0">
+                      <a:pPr marL="0" indent="0">
                         <a:buNone/>
                       </a:pPr>
                       <a:r>
@@ -10751,7 +10633,7 @@
                       </a:endParaRPr>
                     </a:p>
                   </a:txBody>
-                  <a:tcPr marL="91440" marR="91440" marT="45720" marB="45720">
+                  <a:tcPr>
                     <a:lnL w="6350" cap="flat" cmpd="sng" algn="ctr">
                       <a:solidFill>
                         <a:srgbClr val="E8ECF1"/>
@@ -10790,6 +10672,11 @@
                     </a:lnB>
                   </a:tcPr>
                 </a:tc>
+                <a:extLst>
+                  <a:ext uri="{0D108BD9-81ED-4DB2-BD59-A6C34878D82A}">
+                    <a16:rowId xmlns:a16="http://schemas.microsoft.com/office/drawing/2014/main" val="10001"/>
+                  </a:ext>
+                </a:extLst>
               </a:tr>
               <a:tr h="274320">
                 <a:tc>
@@ -10797,7 +10684,7 @@
                     <a:bodyPr/>
                     <a:lstStyle/>
                     <a:p>
-                      <a:pPr indent="0" marL="0">
+                      <a:pPr marL="0" indent="0">
                         <a:buNone/>
                       </a:pPr>
                       <a:r>
@@ -10818,7 +10705,7 @@
                       </a:endParaRPr>
                     </a:p>
                   </a:txBody>
-                  <a:tcPr marL="91440" marR="91440" marT="45720" marB="45720">
+                  <a:tcPr>
                     <a:lnL w="6350" cap="flat" cmpd="sng" algn="ctr">
                       <a:solidFill>
                         <a:srgbClr val="E8ECF1"/>
@@ -10862,7 +10749,7 @@
                     <a:bodyPr/>
                     <a:lstStyle/>
                     <a:p>
-                      <a:pPr indent="0" marL="0">
+                      <a:pPr marL="0" indent="0">
                         <a:buNone/>
                       </a:pPr>
                       <a:r>
@@ -10883,7 +10770,7 @@
                       </a:endParaRPr>
                     </a:p>
                   </a:txBody>
-                  <a:tcPr marL="91440" marR="91440" marT="45720" marB="45720">
+                  <a:tcPr>
                     <a:lnL w="6350" cap="flat" cmpd="sng" algn="ctr">
                       <a:solidFill>
                         <a:srgbClr val="E8ECF1"/>
@@ -10922,6 +10809,11 @@
                     </a:lnB>
                   </a:tcPr>
                 </a:tc>
+                <a:extLst>
+                  <a:ext uri="{0D108BD9-81ED-4DB2-BD59-A6C34878D82A}">
+                    <a16:rowId xmlns:a16="http://schemas.microsoft.com/office/drawing/2014/main" val="10002"/>
+                  </a:ext>
+                </a:extLst>
               </a:tr>
               <a:tr h="274320">
                 <a:tc>
@@ -10929,7 +10821,7 @@
                     <a:bodyPr/>
                     <a:lstStyle/>
                     <a:p>
-                      <a:pPr indent="0" marL="0">
+                      <a:pPr marL="0" indent="0">
                         <a:buNone/>
                       </a:pPr>
                       <a:r>
@@ -10950,7 +10842,7 @@
                       </a:endParaRPr>
                     </a:p>
                   </a:txBody>
-                  <a:tcPr marL="91440" marR="91440" marT="45720" marB="45720">
+                  <a:tcPr>
                     <a:lnL w="6350" cap="flat" cmpd="sng" algn="ctr">
                       <a:solidFill>
                         <a:srgbClr val="E8ECF1"/>
@@ -10994,7 +10886,7 @@
                     <a:bodyPr/>
                     <a:lstStyle/>
                     <a:p>
-                      <a:pPr indent="0" marL="0">
+                      <a:pPr marL="0" indent="0">
                         <a:buNone/>
                       </a:pPr>
                       <a:r>
@@ -11015,7 +10907,7 @@
                       </a:endParaRPr>
                     </a:p>
                   </a:txBody>
-                  <a:tcPr marL="91440" marR="91440" marT="45720" marB="45720">
+                  <a:tcPr>
                     <a:lnL w="6350" cap="flat" cmpd="sng" algn="ctr">
                       <a:solidFill>
                         <a:srgbClr val="E8ECF1"/>
@@ -11054,6 +10946,11 @@
                     </a:lnB>
                   </a:tcPr>
                 </a:tc>
+                <a:extLst>
+                  <a:ext uri="{0D108BD9-81ED-4DB2-BD59-A6C34878D82A}">
+                    <a16:rowId xmlns:a16="http://schemas.microsoft.com/office/drawing/2014/main" val="10003"/>
+                  </a:ext>
+                </a:extLst>
               </a:tr>
               <a:tr h="274320">
                 <a:tc>
@@ -11061,7 +10958,7 @@
                     <a:bodyPr/>
                     <a:lstStyle/>
                     <a:p>
-                      <a:pPr indent="0" marL="0">
+                      <a:pPr marL="0" indent="0">
                         <a:buNone/>
                       </a:pPr>
                       <a:r>
@@ -11082,7 +10979,7 @@
                       </a:endParaRPr>
                     </a:p>
                   </a:txBody>
-                  <a:tcPr marL="91440" marR="91440" marT="45720" marB="45720">
+                  <a:tcPr>
                     <a:lnL w="6350" cap="flat" cmpd="sng" algn="ctr">
                       <a:solidFill>
                         <a:srgbClr val="E8ECF1"/>
@@ -11126,7 +11023,7 @@
                     <a:bodyPr/>
                     <a:lstStyle/>
                     <a:p>
-                      <a:pPr indent="0" marL="0">
+                      <a:pPr marL="0" indent="0">
                         <a:buNone/>
                       </a:pPr>
                       <a:r>
@@ -11147,7 +11044,7 @@
                       </a:endParaRPr>
                     </a:p>
                   </a:txBody>
-                  <a:tcPr marL="91440" marR="91440" marT="45720" marB="45720">
+                  <a:tcPr>
                     <a:lnL w="6350" cap="flat" cmpd="sng" algn="ctr">
                       <a:solidFill>
                         <a:srgbClr val="E8ECF1"/>
@@ -11186,6 +11083,11 @@
                     </a:lnB>
                   </a:tcPr>
                 </a:tc>
+                <a:extLst>
+                  <a:ext uri="{0D108BD9-81ED-4DB2-BD59-A6C34878D82A}">
+                    <a16:rowId xmlns:a16="http://schemas.microsoft.com/office/drawing/2014/main" val="10004"/>
+                  </a:ext>
+                </a:extLst>
               </a:tr>
             </a:tbl>
           </a:graphicData>
@@ -11210,7 +11112,7 @@
           </a:solidFill>
           <a:ln/>
           <a:effectLst>
-            <a:outerShdw sx="100000" sy="100000" kx="0" ky="0" algn="bl" rotWithShape="0" blurRad="50800" dist="19050" dir="8100000">
+            <a:outerShdw blurRad="50800" dist="19050" dir="8100000" algn="bl" rotWithShape="0">
               <a:srgbClr val="000000">
                 <a:alpha val="8000"/>
               </a:srgbClr>
@@ -11220,7 +11122,7 @@
       </p:sp>
       <p:sp>
         <p:nvSpPr>
-          <p:cNvPr id="5" name="Text 2"/>
+          <p:cNvPr id="3" name="Text 2"/>
           <p:cNvSpPr/>
           <p:nvPr/>
         </p:nvSpPr>
@@ -11239,7 +11141,7 @@
           <a:bodyPr wrap="square" lIns="0" tIns="0" rIns="0" bIns="0" rtlCol="0" anchor="ctr"/>
           <a:lstStyle/>
           <a:p>
-            <a:pPr indent="0" marL="0">
+            <a:pPr marL="0" indent="0">
               <a:buNone/>
             </a:pPr>
             <a:r>
@@ -11278,7 +11180,7 @@
           <a:bodyPr wrap="square" lIns="0" tIns="0" rIns="0" bIns="0" rtlCol="0" anchor="t"/>
           <a:lstStyle/>
           <a:p>
-            <a:pPr indent="0" marL="0">
+            <a:pPr marL="0" indent="0">
               <a:lnSpc>
                 <a:spcPct val="150000"/>
               </a:lnSpc>
@@ -11293,9 +11195,12 @@
                 <a:ea typeface="Calibri" pitchFamily="34" charset="-122"/>
                 <a:cs typeface="Calibri" pitchFamily="34" charset="-120"/>
               </a:rPr>
-              <a:t>贵州茅台  </a:t>
-            </a:r>
-            <a:pPr indent="0" marL="0">
+              <a:t>贵州茅台  五粮液  </a:t>
+            </a:r>
+            <a:endParaRPr lang="en-US" sz="900" dirty="0"/>
+          </a:p>
+          <a:p>
+            <a:pPr marL="0" indent="0">
               <a:lnSpc>
                 <a:spcPct val="150000"/>
               </a:lnSpc>
@@ -11310,12 +11215,23 @@
                 <a:ea typeface="Calibri" pitchFamily="34" charset="-122"/>
                 <a:cs typeface="Calibri" pitchFamily="34" charset="-120"/>
               </a:rPr>
-              <a:t>五粮液  </a:t>
+              <a:t>伊利股份  </a:t>
+            </a:r>
+            <a:r>
+              <a:rPr lang="en-US" sz="900" dirty="0">
+                <a:solidFill>
+                  <a:srgbClr val="2D6FB5"/>
+                </a:solidFill>
+                <a:latin typeface="Calibri" pitchFamily="34" charset="0"/>
+                <a:ea typeface="Calibri" pitchFamily="34" charset="-122"/>
+                <a:cs typeface="Calibri" pitchFamily="34" charset="-120"/>
+              </a:rPr>
+              <a:t>中国平安  </a:t>
             </a:r>
             <a:endParaRPr lang="en-US" sz="900" dirty="0"/>
           </a:p>
           <a:p>
-            <a:pPr indent="0" marL="0">
+            <a:pPr marL="0" indent="0">
               <a:lnSpc>
                 <a:spcPct val="150000"/>
               </a:lnSpc>
@@ -11324,15 +11240,29 @@
             <a:r>
               <a:rPr lang="en-US" sz="900" dirty="0">
                 <a:solidFill>
-                  <a:srgbClr val="EF4444"/>
-                </a:solidFill>
-                <a:latin typeface="Calibri" pitchFamily="34" charset="0"/>
-                <a:ea typeface="Calibri" pitchFamily="34" charset="-122"/>
-                <a:cs typeface="Calibri" pitchFamily="34" charset="-120"/>
-              </a:rPr>
-              <a:t>伊利股份  </a:t>
-            </a:r>
-            <a:pPr indent="0" marL="0">
+                  <a:srgbClr val="2D6FB5"/>
+                </a:solidFill>
+                <a:latin typeface="Calibri" pitchFamily="34" charset="0"/>
+                <a:ea typeface="Calibri" pitchFamily="34" charset="-122"/>
+                <a:cs typeface="Calibri" pitchFamily="34" charset="-120"/>
+              </a:rPr>
+              <a:t>招商银行  </a:t>
+            </a:r>
+            <a:r>
+              <a:rPr lang="en-US" sz="900" dirty="0">
+                <a:solidFill>
+                  <a:srgbClr val="7C3AED"/>
+                </a:solidFill>
+                <a:latin typeface="Calibri" pitchFamily="34" charset="0"/>
+                <a:ea typeface="Calibri" pitchFamily="34" charset="-122"/>
+                <a:cs typeface="Calibri" pitchFamily="34" charset="-120"/>
+              </a:rPr>
+              <a:t>宁德时代  </a:t>
+            </a:r>
+            <a:endParaRPr lang="en-US" sz="900" dirty="0"/>
+          </a:p>
+          <a:p>
+            <a:pPr marL="0" indent="0">
               <a:lnSpc>
                 <a:spcPct val="150000"/>
               </a:lnSpc>
@@ -11341,18 +11271,29 @@
             <a:r>
               <a:rPr lang="en-US" sz="900" dirty="0">
                 <a:solidFill>
-                  <a:srgbClr val="2D6FB5"/>
-                </a:solidFill>
-                <a:latin typeface="Calibri" pitchFamily="34" charset="0"/>
-                <a:ea typeface="Calibri" pitchFamily="34" charset="-122"/>
-                <a:cs typeface="Calibri" pitchFamily="34" charset="-120"/>
-              </a:rPr>
-              <a:t>中国平安  </a:t>
+                  <a:srgbClr val="7C3AED"/>
+                </a:solidFill>
+                <a:latin typeface="Calibri" pitchFamily="34" charset="0"/>
+                <a:ea typeface="Calibri" pitchFamily="34" charset="-122"/>
+                <a:cs typeface="Calibri" pitchFamily="34" charset="-120"/>
+              </a:rPr>
+              <a:t>海康威视  </a:t>
+            </a:r>
+            <a:r>
+              <a:rPr lang="en-US" sz="900" dirty="0">
+                <a:solidFill>
+                  <a:srgbClr val="0891B2"/>
+                </a:solidFill>
+                <a:latin typeface="Calibri" pitchFamily="34" charset="0"/>
+                <a:ea typeface="Calibri" pitchFamily="34" charset="-122"/>
+                <a:cs typeface="Calibri" pitchFamily="34" charset="-120"/>
+              </a:rPr>
+              <a:t>恒瑞医药  </a:t>
             </a:r>
             <a:endParaRPr lang="en-US" sz="900" dirty="0"/>
           </a:p>
           <a:p>
-            <a:pPr indent="0" marL="0">
+            <a:pPr marL="0" indent="0">
               <a:lnSpc>
                 <a:spcPct val="150000"/>
               </a:lnSpc>
@@ -11361,104 +11302,13 @@
             <a:r>
               <a:rPr lang="en-US" sz="900" dirty="0">
                 <a:solidFill>
-                  <a:srgbClr val="2D6FB5"/>
-                </a:solidFill>
-                <a:latin typeface="Calibri" pitchFamily="34" charset="0"/>
-                <a:ea typeface="Calibri" pitchFamily="34" charset="-122"/>
-                <a:cs typeface="Calibri" pitchFamily="34" charset="-120"/>
-              </a:rPr>
-              <a:t>招商银行  </a:t>
-            </a:r>
-            <a:pPr indent="0" marL="0">
-              <a:lnSpc>
-                <a:spcPct val="150000"/>
-              </a:lnSpc>
-              <a:buNone/>
-            </a:pPr>
-            <a:r>
-              <a:rPr lang="en-US" sz="900" dirty="0">
-                <a:solidFill>
-                  <a:srgbClr val="7C3AED"/>
-                </a:solidFill>
-                <a:latin typeface="Calibri" pitchFamily="34" charset="0"/>
-                <a:ea typeface="Calibri" pitchFamily="34" charset="-122"/>
-                <a:cs typeface="Calibri" pitchFamily="34" charset="-120"/>
-              </a:rPr>
-              <a:t>宁德时代  </a:t>
-            </a:r>
-            <a:endParaRPr lang="en-US" sz="900" dirty="0"/>
-          </a:p>
-          <a:p>
-            <a:pPr indent="0" marL="0">
-              <a:lnSpc>
-                <a:spcPct val="150000"/>
-              </a:lnSpc>
-              <a:buNone/>
-            </a:pPr>
-            <a:r>
-              <a:rPr lang="en-US" sz="900" dirty="0">
-                <a:solidFill>
-                  <a:srgbClr val="7C3AED"/>
-                </a:solidFill>
-                <a:latin typeface="Calibri" pitchFamily="34" charset="0"/>
-                <a:ea typeface="Calibri" pitchFamily="34" charset="-122"/>
-                <a:cs typeface="Calibri" pitchFamily="34" charset="-120"/>
-              </a:rPr>
-              <a:t>海康威视  </a:t>
-            </a:r>
-            <a:pPr indent="0" marL="0">
-              <a:lnSpc>
-                <a:spcPct val="150000"/>
-              </a:lnSpc>
-              <a:buNone/>
-            </a:pPr>
-            <a:r>
-              <a:rPr lang="en-US" sz="900" dirty="0">
-                <a:solidFill>
                   <a:srgbClr val="0891B2"/>
                 </a:solidFill>
                 <a:latin typeface="Calibri" pitchFamily="34" charset="0"/>
                 <a:ea typeface="Calibri" pitchFamily="34" charset="-122"/>
                 <a:cs typeface="Calibri" pitchFamily="34" charset="-120"/>
               </a:rPr>
-              <a:t>恒瑞医药  </a:t>
-            </a:r>
-            <a:endParaRPr lang="en-US" sz="900" dirty="0"/>
-          </a:p>
-          <a:p>
-            <a:pPr indent="0" marL="0">
-              <a:lnSpc>
-                <a:spcPct val="150000"/>
-              </a:lnSpc>
-              <a:buNone/>
-            </a:pPr>
-            <a:r>
-              <a:rPr lang="en-US" sz="900" dirty="0">
-                <a:solidFill>
-                  <a:srgbClr val="0891B2"/>
-                </a:solidFill>
-                <a:latin typeface="Calibri" pitchFamily="34" charset="0"/>
-                <a:ea typeface="Calibri" pitchFamily="34" charset="-122"/>
-                <a:cs typeface="Calibri" pitchFamily="34" charset="-120"/>
-              </a:rPr>
-              <a:t>隆基绿能  </a:t>
-            </a:r>
-            <a:pPr indent="0" marL="0">
-              <a:lnSpc>
-                <a:spcPct val="150000"/>
-              </a:lnSpc>
-              <a:buNone/>
-            </a:pPr>
-            <a:r>
-              <a:rPr lang="en-US" sz="900" dirty="0">
-                <a:solidFill>
-                  <a:srgbClr val="0891B2"/>
-                </a:solidFill>
-                <a:latin typeface="Calibri" pitchFamily="34" charset="0"/>
-                <a:ea typeface="Calibri" pitchFamily="34" charset="-122"/>
-                <a:cs typeface="Calibri" pitchFamily="34" charset="-120"/>
-              </a:rPr>
-              <a:t>美的集团  </a:t>
+              <a:t>隆基绿能  美的集团  </a:t>
             </a:r>
             <a:endParaRPr lang="en-US" sz="900" dirty="0"/>
           </a:p>
@@ -11485,7 +11335,7 @@
           <a:bodyPr wrap="square" lIns="0" tIns="0" rIns="0" bIns="0" rtlCol="0" anchor="ctr"/>
           <a:lstStyle/>
           <a:p>
-            <a:pPr indent="0" marL="0">
+            <a:pPr marL="0" indent="0">
               <a:buNone/>
             </a:pPr>
             <a:r>
@@ -11522,7 +11372,7 @@
           </a:solidFill>
           <a:ln/>
           <a:effectLst>
-            <a:outerShdw sx="100000" sy="100000" kx="0" ky="0" algn="bl" rotWithShape="0" blurRad="50800" dist="19050" dir="8100000">
+            <a:outerShdw blurRad="50800" dist="19050" dir="8100000" algn="bl" rotWithShape="0">
               <a:srgbClr val="000000">
                 <a:alpha val="8000"/>
               </a:srgbClr>
@@ -11551,7 +11401,7 @@
           <a:bodyPr wrap="square" lIns="0" tIns="0" rIns="0" bIns="0" rtlCol="0" anchor="ctr"/>
           <a:lstStyle/>
           <a:p>
-            <a:pPr algn="ctr" indent="0" marL="0">
+            <a:pPr marL="0" indent="0" algn="ctr">
               <a:buNone/>
             </a:pPr>
             <a:r>
@@ -11568,7 +11418,7 @@
             <a:endParaRPr lang="en-US" sz="950" dirty="0"/>
           </a:p>
           <a:p>
-            <a:pPr algn="ctr" indent="0" marL="0">
+            <a:pPr marL="0" indent="0" algn="ctr">
               <a:buNone/>
             </a:pPr>
             <a:r>
@@ -11607,7 +11457,7 @@
           <a:bodyPr wrap="square" lIns="0" tIns="0" rIns="0" bIns="0" rtlCol="0" anchor="ctr"/>
           <a:lstStyle/>
           <a:p>
-            <a:pPr algn="ctr" indent="0" marL="0">
+            <a:pPr marL="0" indent="0" algn="ctr">
               <a:buNone/>
             </a:pPr>
             <a:r>
@@ -11644,7 +11494,7 @@
           </a:solidFill>
           <a:ln/>
           <a:effectLst>
-            <a:outerShdw sx="100000" sy="100000" kx="0" ky="0" algn="bl" rotWithShape="0" blurRad="50800" dist="19050" dir="8100000">
+            <a:outerShdw blurRad="50800" dist="19050" dir="8100000" algn="bl" rotWithShape="0">
               <a:srgbClr val="000000">
                 <a:alpha val="8000"/>
               </a:srgbClr>
@@ -11673,7 +11523,7 @@
           <a:bodyPr wrap="square" lIns="0" tIns="0" rIns="0" bIns="0" rtlCol="0" anchor="ctr"/>
           <a:lstStyle/>
           <a:p>
-            <a:pPr algn="ctr" indent="0" marL="0">
+            <a:pPr marL="0" indent="0" algn="ctr">
               <a:buNone/>
             </a:pPr>
             <a:r>
@@ -11690,7 +11540,7 @@
             <a:endParaRPr lang="en-US" sz="950" dirty="0"/>
           </a:p>
           <a:p>
-            <a:pPr algn="ctr" indent="0" marL="0">
+            <a:pPr marL="0" indent="0" algn="ctr">
               <a:buNone/>
             </a:pPr>
             <a:r>
@@ -11729,7 +11579,7 @@
           <a:bodyPr wrap="square" lIns="0" tIns="0" rIns="0" bIns="0" rtlCol="0" anchor="ctr"/>
           <a:lstStyle/>
           <a:p>
-            <a:pPr algn="ctr" indent="0" marL="0">
+            <a:pPr marL="0" indent="0" algn="ctr">
               <a:buNone/>
             </a:pPr>
             <a:r>
@@ -11766,7 +11616,7 @@
           </a:solidFill>
           <a:ln/>
           <a:effectLst>
-            <a:outerShdw sx="100000" sy="100000" kx="0" ky="0" algn="bl" rotWithShape="0" blurRad="50800" dist="19050" dir="8100000">
+            <a:outerShdw blurRad="50800" dist="19050" dir="8100000" algn="bl" rotWithShape="0">
               <a:srgbClr val="000000">
                 <a:alpha val="8000"/>
               </a:srgbClr>
@@ -11795,7 +11645,7 @@
           <a:bodyPr wrap="square" lIns="0" tIns="0" rIns="0" bIns="0" rtlCol="0" anchor="ctr"/>
           <a:lstStyle/>
           <a:p>
-            <a:pPr algn="ctr" indent="0" marL="0">
+            <a:pPr marL="0" indent="0" algn="ctr">
               <a:buNone/>
             </a:pPr>
             <a:r>
@@ -11812,7 +11662,7 @@
             <a:endParaRPr lang="en-US" sz="950" dirty="0"/>
           </a:p>
           <a:p>
-            <a:pPr algn="ctr" indent="0" marL="0">
+            <a:pPr marL="0" indent="0" algn="ctr">
               <a:buNone/>
             </a:pPr>
             <a:r>
@@ -11851,7 +11701,7 @@
           <a:bodyPr wrap="square" lIns="0" tIns="0" rIns="0" bIns="0" rtlCol="0" anchor="ctr"/>
           <a:lstStyle/>
           <a:p>
-            <a:pPr algn="ctr" indent="0" marL="0">
+            <a:pPr marL="0" indent="0" algn="ctr">
               <a:buNone/>
             </a:pPr>
             <a:r>
@@ -11888,7 +11738,7 @@
           </a:solidFill>
           <a:ln/>
           <a:effectLst>
-            <a:outerShdw sx="100000" sy="100000" kx="0" ky="0" algn="bl" rotWithShape="0" blurRad="50800" dist="19050" dir="8100000">
+            <a:outerShdw blurRad="50800" dist="19050" dir="8100000" algn="bl" rotWithShape="0">
               <a:srgbClr val="000000">
                 <a:alpha val="8000"/>
               </a:srgbClr>
@@ -11917,7 +11767,7 @@
           <a:bodyPr wrap="square" lIns="0" tIns="0" rIns="0" bIns="0" rtlCol="0" anchor="ctr"/>
           <a:lstStyle/>
           <a:p>
-            <a:pPr algn="ctr" indent="0" marL="0">
+            <a:pPr marL="0" indent="0" algn="ctr">
               <a:buNone/>
             </a:pPr>
             <a:r>
@@ -11934,7 +11784,7 @@
             <a:endParaRPr lang="en-US" sz="950" dirty="0"/>
           </a:p>
           <a:p>
-            <a:pPr algn="ctr" indent="0" marL="0">
+            <a:pPr marL="0" indent="0" algn="ctr">
               <a:buNone/>
             </a:pPr>
             <a:r>
@@ -11973,7 +11823,7 @@
           <a:bodyPr wrap="square" lIns="0" tIns="0" rIns="0" bIns="0" rtlCol="0" anchor="ctr"/>
           <a:lstStyle/>
           <a:p>
-            <a:pPr algn="ctr" indent="0" marL="0">
+            <a:pPr marL="0" indent="0" algn="ctr">
               <a:buNone/>
             </a:pPr>
             <a:r>
@@ -12010,7 +11860,7 @@
           </a:solidFill>
           <a:ln/>
           <a:effectLst>
-            <a:outerShdw sx="100000" sy="100000" kx="0" ky="0" algn="bl" rotWithShape="0" blurRad="50800" dist="19050" dir="8100000">
+            <a:outerShdw blurRad="50800" dist="19050" dir="8100000" algn="bl" rotWithShape="0">
               <a:srgbClr val="000000">
                 <a:alpha val="8000"/>
               </a:srgbClr>
@@ -12039,7 +11889,7 @@
           <a:bodyPr wrap="square" lIns="0" tIns="0" rIns="0" bIns="0" rtlCol="0" anchor="ctr"/>
           <a:lstStyle/>
           <a:p>
-            <a:pPr algn="ctr" indent="0" marL="0">
+            <a:pPr marL="0" indent="0" algn="ctr">
               <a:buNone/>
             </a:pPr>
             <a:r>
@@ -12056,7 +11906,7 @@
             <a:endParaRPr lang="en-US" sz="950" dirty="0"/>
           </a:p>
           <a:p>
-            <a:pPr algn="ctr" indent="0" marL="0">
+            <a:pPr marL="0" indent="0" algn="ctr">
               <a:buNone/>
             </a:pPr>
             <a:r>
@@ -12095,7 +11945,7 @@
           <a:bodyPr wrap="square" lIns="0" tIns="0" rIns="0" bIns="0" rtlCol="0" anchor="ctr"/>
           <a:lstStyle/>
           <a:p>
-            <a:pPr algn="ctr" indent="0" marL="0">
+            <a:pPr marL="0" indent="0" algn="ctr">
               <a:buNone/>
             </a:pPr>
             <a:r>
@@ -12132,7 +11982,7 @@
           </a:solidFill>
           <a:ln/>
           <a:effectLst>
-            <a:outerShdw sx="100000" sy="100000" kx="0" ky="0" algn="bl" rotWithShape="0" blurRad="50800" dist="19050" dir="8100000">
+            <a:outerShdw blurRad="50800" dist="19050" dir="8100000" algn="bl" rotWithShape="0">
               <a:srgbClr val="000000">
                 <a:alpha val="8000"/>
               </a:srgbClr>
@@ -12161,7 +12011,7 @@
           <a:bodyPr wrap="square" lIns="0" tIns="0" rIns="0" bIns="0" rtlCol="0" anchor="ctr"/>
           <a:lstStyle/>
           <a:p>
-            <a:pPr algn="ctr" indent="0" marL="0">
+            <a:pPr marL="0" indent="0" algn="ctr">
               <a:buNone/>
             </a:pPr>
             <a:r>
@@ -12178,7 +12028,7 @@
             <a:endParaRPr lang="en-US" sz="950" dirty="0"/>
           </a:p>
           <a:p>
-            <a:pPr algn="ctr" indent="0" marL="0">
+            <a:pPr marL="0" indent="0" algn="ctr">
               <a:buNone/>
             </a:pPr>
             <a:r>
@@ -12237,7 +12087,7 @@
           <a:bodyPr wrap="square" lIns="0" tIns="0" rIns="0" bIns="0" rtlCol="0" anchor="ctr"/>
           <a:lstStyle/>
           <a:p>
-            <a:pPr indent="0" marL="0">
+            <a:pPr marL="0" indent="0">
               <a:buNone/>
             </a:pPr>
             <a:r>
@@ -12251,9 +12101,6 @@
               </a:rPr>
               <a:t>时间跨度：2022.01 - 2025.12 (4年, ~1000交易日)  |  </a:t>
             </a:r>
-            <a:pPr indent="0" marL="0">
-              <a:buNone/>
-            </a:pPr>
             <a:r>
               <a:rPr lang="en-US" sz="1000" b="1" dirty="0">
                 <a:solidFill>
@@ -12265,9 +12112,6 @@
               </a:rPr>
               <a:t>样本外测试：2026 Q1 (60交易日，完全独立)  |  </a:t>
             </a:r>
-            <a:pPr indent="0" marL="0">
-              <a:buNone/>
-            </a:pPr>
             <a:r>
               <a:rPr lang="en-US" sz="1000" dirty="0">
                 <a:solidFill>
@@ -12304,7 +12148,7 @@
           <a:bodyPr wrap="square" rtlCol="0" anchor="ctr"/>
           <a:lstStyle/>
           <a:p>
-            <a:pPr algn="r" indent="0" marL="0">
+            <a:pPr marL="0" indent="0" algn="r">
               <a:buNone/>
             </a:pPr>
             <a:r>
@@ -12338,6 +12182,7 @@
         <a:solidFill>
           <a:srgbClr val="F7F9FC"/>
         </a:solidFill>
+        <a:effectLst/>
       </p:bgPr>
     </p:bg>
     <p:spTree>
@@ -12375,7 +12220,7 @@
           <a:bodyPr wrap="square" lIns="0" tIns="0" rIns="0" bIns="0" rtlCol="0" anchor="ctr"/>
           <a:lstStyle/>
           <a:p>
-            <a:pPr indent="0" marL="0">
+            <a:pPr marL="0" indent="0">
               <a:buNone/>
             </a:pPr>
             <a:r>
@@ -12412,7 +12257,7 @@
           </a:solidFill>
           <a:ln/>
           <a:effectLst>
-            <a:outerShdw sx="100000" sy="100000" kx="0" ky="0" algn="bl" rotWithShape="0" blurRad="50800" dist="19050" dir="8100000">
+            <a:outerShdw blurRad="50800" dist="19050" dir="8100000" algn="bl" rotWithShape="0">
               <a:srgbClr val="000000">
                 <a:alpha val="8000"/>
               </a:srgbClr>
@@ -12461,7 +12306,7 @@
           <a:bodyPr wrap="square" lIns="0" tIns="0" rIns="0" bIns="0" rtlCol="0" anchor="ctr"/>
           <a:lstStyle/>
           <a:p>
-            <a:pPr indent="0" marL="0">
+            <a:pPr marL="0" indent="0">
               <a:buNone/>
             </a:pPr>
             <a:r>
@@ -12500,7 +12345,7 @@
           <a:bodyPr wrap="square" lIns="0" tIns="0" rIns="0" bIns="0" rtlCol="0" anchor="t"/>
           <a:lstStyle/>
           <a:p>
-            <a:pPr indent="0" marL="0">
+            <a:pPr marL="0" indent="0">
               <a:spcAft>
                 <a:spcPts val="200"/>
               </a:spcAft>
@@ -12520,7 +12365,7 @@
             <a:endParaRPr lang="en-US" sz="1000" dirty="0"/>
           </a:p>
           <a:p>
-            <a:pPr indent="0" marL="0">
+            <a:pPr marL="0" indent="0">
               <a:spcAft>
                 <a:spcPts val="200"/>
               </a:spcAft>
@@ -12540,7 +12385,7 @@
             <a:endParaRPr lang="en-US" sz="1000" dirty="0"/>
           </a:p>
           <a:p>
-            <a:pPr indent="0" marL="0">
+            <a:pPr marL="0" indent="0">
               <a:spcAft>
                 <a:spcPts val="200"/>
               </a:spcAft>
@@ -12560,7 +12405,7 @@
             <a:endParaRPr lang="en-US" sz="1000" dirty="0"/>
           </a:p>
           <a:p>
-            <a:pPr indent="0" marL="0">
+            <a:pPr marL="0" indent="0">
               <a:spcAft>
                 <a:spcPts val="200"/>
               </a:spcAft>
@@ -12569,7 +12414,7 @@
             <a:endParaRPr lang="en-US" sz="1000" dirty="0"/>
           </a:p>
           <a:p>
-            <a:pPr indent="0" marL="0">
+            <a:pPr marL="0" indent="0">
               <a:spcAft>
                 <a:spcPts val="200"/>
               </a:spcAft>
@@ -12589,7 +12434,7 @@
             <a:endParaRPr lang="en-US" sz="1000" dirty="0"/>
           </a:p>
           <a:p>
-            <a:pPr indent="0" marL="0">
+            <a:pPr marL="0" indent="0">
               <a:spcAft>
                 <a:spcPts val="200"/>
               </a:spcAft>
@@ -12609,7 +12454,7 @@
             <a:endParaRPr lang="en-US" sz="1000" dirty="0"/>
           </a:p>
           <a:p>
-            <a:pPr indent="0" marL="0">
+            <a:pPr marL="0" indent="0">
               <a:spcAft>
                 <a:spcPts val="200"/>
               </a:spcAft>
@@ -12629,7 +12474,7 @@
             <a:endParaRPr lang="en-US" sz="1000" dirty="0"/>
           </a:p>
           <a:p>
-            <a:pPr indent="0" marL="0">
+            <a:pPr marL="0" indent="0">
               <a:spcAft>
                 <a:spcPts val="200"/>
               </a:spcAft>
@@ -12638,7 +12483,7 @@
             <a:endParaRPr lang="en-US" sz="1000" dirty="0"/>
           </a:p>
           <a:p>
-            <a:pPr indent="0" marL="0">
+            <a:pPr marL="0" indent="0">
               <a:spcAft>
                 <a:spcPts val="200"/>
               </a:spcAft>
@@ -12658,7 +12503,7 @@
             <a:endParaRPr lang="en-US" sz="1000" dirty="0"/>
           </a:p>
           <a:p>
-            <a:pPr indent="0" marL="0">
+            <a:pPr marL="0" indent="0">
               <a:spcAft>
                 <a:spcPts val="200"/>
               </a:spcAft>
@@ -12678,7 +12523,7 @@
             <a:endParaRPr lang="en-US" sz="1000" dirty="0"/>
           </a:p>
           <a:p>
-            <a:pPr indent="0" marL="0">
+            <a:pPr marL="0" indent="0">
               <a:spcAft>
                 <a:spcPts val="200"/>
               </a:spcAft>
@@ -12698,7 +12543,7 @@
             <a:endParaRPr lang="en-US" sz="1000" dirty="0"/>
           </a:p>
           <a:p>
-            <a:pPr indent="0" marL="0">
+            <a:pPr marL="0" indent="0">
               <a:spcAft>
                 <a:spcPts val="200"/>
               </a:spcAft>
@@ -12707,7 +12552,7 @@
             <a:endParaRPr lang="en-US" sz="1000" dirty="0"/>
           </a:p>
           <a:p>
-            <a:pPr indent="0" marL="0">
+            <a:pPr marL="0" indent="0">
               <a:spcAft>
                 <a:spcPts val="200"/>
               </a:spcAft>
@@ -12727,7 +12572,7 @@
             <a:endParaRPr lang="en-US" sz="1000" dirty="0"/>
           </a:p>
           <a:p>
-            <a:pPr indent="0" marL="0">
+            <a:pPr marL="0" indent="0">
               <a:spcAft>
                 <a:spcPts val="200"/>
               </a:spcAft>
@@ -12747,7 +12592,7 @@
             <a:endParaRPr lang="en-US" sz="1000" dirty="0"/>
           </a:p>
           <a:p>
-            <a:pPr indent="0" marL="0">
+            <a:pPr marL="0" indent="0">
               <a:spcAft>
                 <a:spcPts val="200"/>
               </a:spcAft>
@@ -12787,7 +12632,7 @@
           </a:solidFill>
           <a:ln/>
           <a:effectLst>
-            <a:outerShdw sx="100000" sy="100000" kx="0" ky="0" algn="bl" rotWithShape="0" blurRad="50800" dist="19050" dir="8100000">
+            <a:outerShdw blurRad="50800" dist="19050" dir="8100000" algn="bl" rotWithShape="0">
               <a:srgbClr val="000000">
                 <a:alpha val="8000"/>
               </a:srgbClr>
@@ -12836,7 +12681,7 @@
           <a:bodyPr wrap="square" lIns="0" tIns="0" rIns="0" bIns="0" rtlCol="0" anchor="ctr"/>
           <a:lstStyle/>
           <a:p>
-            <a:pPr indent="0" marL="0">
+            <a:pPr marL="0" indent="0">
               <a:buNone/>
             </a:pPr>
             <a:r>
@@ -12875,7 +12720,7 @@
           <a:bodyPr wrap="square" lIns="0" tIns="0" rIns="0" bIns="0" rtlCol="0" anchor="t"/>
           <a:lstStyle/>
           <a:p>
-            <a:pPr indent="0" marL="0">
+            <a:pPr marL="0" indent="0">
               <a:spcAft>
                 <a:spcPts val="200"/>
               </a:spcAft>
@@ -12895,7 +12740,7 @@
             <a:endParaRPr lang="en-US" sz="1000" dirty="0"/>
           </a:p>
           <a:p>
-            <a:pPr indent="0" marL="0">
+            <a:pPr marL="0" indent="0">
               <a:spcAft>
                 <a:spcPts val="200"/>
               </a:spcAft>
@@ -12915,7 +12760,7 @@
             <a:endParaRPr lang="en-US" sz="1000" dirty="0"/>
           </a:p>
           <a:p>
-            <a:pPr indent="0" marL="0">
+            <a:pPr marL="0" indent="0">
               <a:spcAft>
                 <a:spcPts val="200"/>
               </a:spcAft>
@@ -12935,7 +12780,7 @@
             <a:endParaRPr lang="en-US" sz="1000" dirty="0"/>
           </a:p>
           <a:p>
-            <a:pPr indent="0" marL="0">
+            <a:pPr marL="0" indent="0">
               <a:spcAft>
                 <a:spcPts val="200"/>
               </a:spcAft>
@@ -12955,7 +12800,7 @@
             <a:endParaRPr lang="en-US" sz="1000" dirty="0"/>
           </a:p>
           <a:p>
-            <a:pPr indent="0" marL="0">
+            <a:pPr marL="0" indent="0">
               <a:spcAft>
                 <a:spcPts val="200"/>
               </a:spcAft>
@@ -12975,7 +12820,7 @@
             <a:endParaRPr lang="en-US" sz="1000" dirty="0"/>
           </a:p>
           <a:p>
-            <a:pPr indent="0" marL="0">
+            <a:pPr marL="0" indent="0">
               <a:spcAft>
                 <a:spcPts val="200"/>
               </a:spcAft>
@@ -12995,7 +12840,7 @@
             <a:endParaRPr lang="en-US" sz="1000" dirty="0"/>
           </a:p>
           <a:p>
-            <a:pPr indent="0" marL="0">
+            <a:pPr marL="0" indent="0">
               <a:spcAft>
                 <a:spcPts val="200"/>
               </a:spcAft>
@@ -13004,7 +12849,7 @@
             <a:endParaRPr lang="en-US" sz="1000" dirty="0"/>
           </a:p>
           <a:p>
-            <a:pPr indent="0" marL="0">
+            <a:pPr marL="0" indent="0">
               <a:spcAft>
                 <a:spcPts val="200"/>
               </a:spcAft>
@@ -13024,7 +12869,7 @@
             <a:endParaRPr lang="en-US" sz="1000" dirty="0"/>
           </a:p>
           <a:p>
-            <a:pPr indent="0" marL="0">
+            <a:pPr marL="0" indent="0">
               <a:spcAft>
                 <a:spcPts val="200"/>
               </a:spcAft>
@@ -13044,7 +12889,7 @@
             <a:endParaRPr lang="en-US" sz="1000" dirty="0"/>
           </a:p>
           <a:p>
-            <a:pPr indent="0" marL="0">
+            <a:pPr marL="0" indent="0">
               <a:spcAft>
                 <a:spcPts val="200"/>
               </a:spcAft>
@@ -13064,7 +12909,7 @@
             <a:endParaRPr lang="en-US" sz="1000" dirty="0"/>
           </a:p>
           <a:p>
-            <a:pPr indent="0" marL="0">
+            <a:pPr marL="0" indent="0">
               <a:spcAft>
                 <a:spcPts val="200"/>
               </a:spcAft>
@@ -13073,7 +12918,7 @@
             <a:endParaRPr lang="en-US" sz="1000" dirty="0"/>
           </a:p>
           <a:p>
-            <a:pPr indent="0" marL="0">
+            <a:pPr marL="0" indent="0">
               <a:spcAft>
                 <a:spcPts val="200"/>
               </a:spcAft>
@@ -13093,7 +12938,7 @@
             <a:endParaRPr lang="en-US" sz="1000" dirty="0"/>
           </a:p>
           <a:p>
-            <a:pPr indent="0" marL="0">
+            <a:pPr marL="0" indent="0">
               <a:spcAft>
                 <a:spcPts val="200"/>
               </a:spcAft>
@@ -13113,7 +12958,7 @@
             <a:endParaRPr lang="en-US" sz="1000" dirty="0"/>
           </a:p>
           <a:p>
-            <a:pPr indent="0" marL="0">
+            <a:pPr marL="0" indent="0">
               <a:spcAft>
                 <a:spcPts val="200"/>
               </a:spcAft>
@@ -13133,7 +12978,7 @@
             <a:endParaRPr lang="en-US" sz="1000" dirty="0"/>
           </a:p>
           <a:p>
-            <a:pPr indent="0" marL="0">
+            <a:pPr marL="0" indent="0">
               <a:spcAft>
                 <a:spcPts val="200"/>
               </a:spcAft>
@@ -13173,7 +13018,7 @@
           </a:solidFill>
           <a:ln/>
           <a:effectLst>
-            <a:outerShdw sx="100000" sy="100000" kx="0" ky="0" algn="bl" rotWithShape="0" blurRad="50800" dist="19050" dir="8100000">
+            <a:outerShdw blurRad="50800" dist="19050" dir="8100000" algn="bl" rotWithShape="0">
               <a:srgbClr val="000000">
                 <a:alpha val="8000"/>
               </a:srgbClr>
@@ -13222,7 +13067,7 @@
           <a:bodyPr wrap="square" lIns="0" tIns="0" rIns="0" bIns="0" rtlCol="0" anchor="ctr"/>
           <a:lstStyle/>
           <a:p>
-            <a:pPr indent="0" marL="0">
+            <a:pPr marL="0" indent="0">
               <a:buNone/>
             </a:pPr>
             <a:r>
@@ -13261,7 +13106,7 @@
           <a:bodyPr wrap="square" lIns="0" tIns="0" rIns="0" bIns="0" rtlCol="0" anchor="t"/>
           <a:lstStyle/>
           <a:p>
-            <a:pPr indent="0" marL="0">
+            <a:pPr marL="0" indent="0">
               <a:spcAft>
                 <a:spcPts val="200"/>
               </a:spcAft>
@@ -13281,7 +13126,7 @@
             <a:endParaRPr lang="en-US" sz="1000" dirty="0"/>
           </a:p>
           <a:p>
-            <a:pPr indent="0" marL="0">
+            <a:pPr marL="0" indent="0">
               <a:spcAft>
                 <a:spcPts val="200"/>
               </a:spcAft>
@@ -13301,7 +13146,7 @@
             <a:endParaRPr lang="en-US" sz="1000" dirty="0"/>
           </a:p>
           <a:p>
-            <a:pPr indent="0" marL="0">
+            <a:pPr marL="0" indent="0">
               <a:spcAft>
                 <a:spcPts val="200"/>
               </a:spcAft>
@@ -13321,7 +13166,7 @@
             <a:endParaRPr lang="en-US" sz="1000" dirty="0"/>
           </a:p>
           <a:p>
-            <a:pPr indent="0" marL="0">
+            <a:pPr marL="0" indent="0">
               <a:spcAft>
                 <a:spcPts val="200"/>
               </a:spcAft>
@@ -13341,7 +13186,7 @@
             <a:endParaRPr lang="en-US" sz="1000" dirty="0"/>
           </a:p>
           <a:p>
-            <a:pPr indent="0" marL="0">
+            <a:pPr marL="0" indent="0">
               <a:spcAft>
                 <a:spcPts val="200"/>
               </a:spcAft>
@@ -13361,7 +13206,7 @@
             <a:endParaRPr lang="en-US" sz="1000" dirty="0"/>
           </a:p>
           <a:p>
-            <a:pPr indent="0" marL="0">
+            <a:pPr marL="0" indent="0">
               <a:spcAft>
                 <a:spcPts val="200"/>
               </a:spcAft>
@@ -13370,7 +13215,7 @@
             <a:endParaRPr lang="en-US" sz="1000" dirty="0"/>
           </a:p>
           <a:p>
-            <a:pPr indent="0" marL="0">
+            <a:pPr marL="0" indent="0">
               <a:spcAft>
                 <a:spcPts val="200"/>
               </a:spcAft>
@@ -13390,7 +13235,7 @@
             <a:endParaRPr lang="en-US" sz="1000" dirty="0"/>
           </a:p>
           <a:p>
-            <a:pPr indent="0" marL="0">
+            <a:pPr marL="0" indent="0">
               <a:spcAft>
                 <a:spcPts val="200"/>
               </a:spcAft>
@@ -13410,7 +13255,7 @@
             <a:endParaRPr lang="en-US" sz="1000" dirty="0"/>
           </a:p>
           <a:p>
-            <a:pPr indent="0" marL="0">
+            <a:pPr marL="0" indent="0">
               <a:spcAft>
                 <a:spcPts val="200"/>
               </a:spcAft>
@@ -13430,7 +13275,7 @@
             <a:endParaRPr lang="en-US" sz="1000" dirty="0"/>
           </a:p>
           <a:p>
-            <a:pPr indent="0" marL="0">
+            <a:pPr marL="0" indent="0">
               <a:spcAft>
                 <a:spcPts val="200"/>
               </a:spcAft>
@@ -13439,7 +13284,7 @@
             <a:endParaRPr lang="en-US" sz="1000" dirty="0"/>
           </a:p>
           <a:p>
-            <a:pPr indent="0" marL="0">
+            <a:pPr marL="0" indent="0">
               <a:spcAft>
                 <a:spcPts val="200"/>
               </a:spcAft>
@@ -13459,7 +13304,7 @@
             <a:endParaRPr lang="en-US" sz="1000" dirty="0"/>
           </a:p>
           <a:p>
-            <a:pPr indent="0" marL="0">
+            <a:pPr marL="0" indent="0">
               <a:spcAft>
                 <a:spcPts val="200"/>
               </a:spcAft>
@@ -13479,7 +13324,7 @@
             <a:endParaRPr lang="en-US" sz="1000" dirty="0"/>
           </a:p>
           <a:p>
-            <a:pPr indent="0" marL="0">
+            <a:pPr marL="0" indent="0">
               <a:spcAft>
                 <a:spcPts val="200"/>
               </a:spcAft>
@@ -13499,7 +13344,7 @@
             <a:endParaRPr lang="en-US" sz="1000" dirty="0"/>
           </a:p>
           <a:p>
-            <a:pPr indent="0" marL="0">
+            <a:pPr marL="0" indent="0">
               <a:spcAft>
                 <a:spcPts val="200"/>
               </a:spcAft>
@@ -13519,7 +13364,7 @@
             <a:endParaRPr lang="en-US" sz="1000" dirty="0"/>
           </a:p>
           <a:p>
-            <a:pPr indent="0" marL="0">
+            <a:pPr marL="0" indent="0">
               <a:spcAft>
                 <a:spcPts val="200"/>
               </a:spcAft>
@@ -13561,7 +13406,7 @@
           <a:bodyPr wrap="square" lIns="0" tIns="0" rIns="0" bIns="0" rtlCol="0" anchor="ctr"/>
           <a:lstStyle/>
           <a:p>
-            <a:pPr indent="0" marL="0">
+            <a:pPr marL="0" indent="0">
               <a:buNone/>
             </a:pPr>
             <a:r>
@@ -13600,7 +13445,7 @@
           <a:bodyPr wrap="square" rtlCol="0" anchor="ctr"/>
           <a:lstStyle/>
           <a:p>
-            <a:pPr algn="r" indent="0" marL="0">
+            <a:pPr marL="0" indent="0" algn="r">
               <a:buNone/>
             </a:pPr>
             <a:r>
@@ -13634,6 +13479,7 @@
         <a:solidFill>
           <a:srgbClr val="F7F9FC"/>
         </a:solidFill>
+        <a:effectLst/>
       </p:bgPr>
     </p:bg>
     <p:spTree>
@@ -13671,7 +13517,7 @@
           <a:bodyPr wrap="square" lIns="0" tIns="0" rIns="0" bIns="0" rtlCol="0" anchor="ctr"/>
           <a:lstStyle/>
           <a:p>
-            <a:pPr indent="0" marL="0">
+            <a:pPr marL="0" indent="0">
               <a:buNone/>
             </a:pPr>
             <a:r>
@@ -13708,7 +13554,7 @@
           </a:solidFill>
           <a:ln/>
           <a:effectLst>
-            <a:outerShdw sx="100000" sy="100000" kx="0" ky="0" algn="bl" rotWithShape="0" blurRad="50800" dist="19050" dir="8100000">
+            <a:outerShdw blurRad="50800" dist="19050" dir="8100000" algn="bl" rotWithShape="0">
               <a:srgbClr val="000000">
                 <a:alpha val="8000"/>
               </a:srgbClr>
@@ -13757,7 +13603,7 @@
           <a:bodyPr wrap="square" lIns="0" tIns="0" rIns="0" bIns="0" rtlCol="0" anchor="ctr"/>
           <a:lstStyle/>
           <a:p>
-            <a:pPr indent="0" marL="0">
+            <a:pPr marL="0" indent="0">
               <a:buNone/>
             </a:pPr>
             <a:r>
@@ -13796,7 +13642,7 @@
           <a:bodyPr wrap="square" lIns="0" tIns="0" rIns="0" bIns="0" rtlCol="0" anchor="t"/>
           <a:lstStyle/>
           <a:p>
-            <a:pPr indent="0" marL="0">
+            <a:pPr marL="0" indent="0">
               <a:buNone/>
             </a:pPr>
             <a:r>
@@ -13813,7 +13659,7 @@
             <a:endParaRPr lang="en-US" sz="1000" dirty="0"/>
           </a:p>
           <a:p>
-            <a:pPr indent="0" marL="0">
+            <a:pPr marL="0" indent="0">
               <a:buNone/>
             </a:pPr>
             <a:r>
@@ -13830,13 +13676,13 @@
             <a:endParaRPr lang="en-US" sz="1000" dirty="0"/>
           </a:p>
           <a:p>
-            <a:pPr indent="0" marL="0">
+            <a:pPr marL="0" indent="0">
               <a:buNone/>
             </a:pPr>
             <a:endParaRPr lang="en-US" sz="1000" dirty="0"/>
           </a:p>
           <a:p>
-            <a:pPr indent="0" marL="0">
+            <a:pPr marL="0" indent="0">
               <a:buNone/>
             </a:pPr>
             <a:r>
@@ -13853,7 +13699,7 @@
             <a:endParaRPr lang="en-US" sz="1000" dirty="0"/>
           </a:p>
           <a:p>
-            <a:pPr indent="0" marL="0">
+            <a:pPr marL="0" indent="0">
               <a:buNone/>
             </a:pPr>
             <a:r>
@@ -13870,7 +13716,7 @@
             <a:endParaRPr lang="en-US" sz="1000" dirty="0"/>
           </a:p>
           <a:p>
-            <a:pPr indent="0" marL="0">
+            <a:pPr marL="0" indent="0">
               <a:buNone/>
             </a:pPr>
             <a:r>
@@ -13907,7 +13753,7 @@
           </a:solidFill>
           <a:ln/>
           <a:effectLst>
-            <a:outerShdw sx="100000" sy="100000" kx="0" ky="0" algn="bl" rotWithShape="0" blurRad="50800" dist="19050" dir="8100000">
+            <a:outerShdw blurRad="50800" dist="19050" dir="8100000" algn="bl" rotWithShape="0">
               <a:srgbClr val="000000">
                 <a:alpha val="8000"/>
               </a:srgbClr>
@@ -13956,7 +13802,7 @@
           <a:bodyPr wrap="square" lIns="0" tIns="0" rIns="0" bIns="0" rtlCol="0" anchor="ctr"/>
           <a:lstStyle/>
           <a:p>
-            <a:pPr indent="0" marL="0">
+            <a:pPr marL="0" indent="0">
               <a:buNone/>
             </a:pPr>
             <a:r>
@@ -13995,7 +13841,7 @@
           <a:bodyPr wrap="square" lIns="0" tIns="0" rIns="0" bIns="0" rtlCol="0" anchor="t"/>
           <a:lstStyle/>
           <a:p>
-            <a:pPr indent="0" marL="0">
+            <a:pPr marL="0" indent="0">
               <a:buNone/>
             </a:pPr>
             <a:r>
@@ -14012,7 +13858,7 @@
             <a:endParaRPr lang="en-US" sz="1000" dirty="0"/>
           </a:p>
           <a:p>
-            <a:pPr indent="0" marL="0">
+            <a:pPr marL="0" indent="0">
               <a:buNone/>
             </a:pPr>
             <a:r>
@@ -14029,13 +13875,13 @@
             <a:endParaRPr lang="en-US" sz="1000" dirty="0"/>
           </a:p>
           <a:p>
-            <a:pPr indent="0" marL="0">
+            <a:pPr marL="0" indent="0">
               <a:buNone/>
             </a:pPr>
             <a:endParaRPr lang="en-US" sz="1000" dirty="0"/>
           </a:p>
           <a:p>
-            <a:pPr indent="0" marL="0">
+            <a:pPr marL="0" indent="0">
               <a:buNone/>
             </a:pPr>
             <a:r>
@@ -14052,7 +13898,7 @@
             <a:endParaRPr lang="en-US" sz="1000" dirty="0"/>
           </a:p>
           <a:p>
-            <a:pPr indent="0" marL="0">
+            <a:pPr marL="0" indent="0">
               <a:buNone/>
             </a:pPr>
             <a:r>
@@ -14069,7 +13915,7 @@
             <a:endParaRPr lang="en-US" sz="1000" dirty="0"/>
           </a:p>
           <a:p>
-            <a:pPr indent="0" marL="0">
+            <a:pPr marL="0" indent="0">
               <a:buNone/>
             </a:pPr>
             <a:r>
@@ -14148,7 +13994,7 @@
           <a:bodyPr wrap="square" lIns="0" tIns="0" rIns="0" bIns="0" rtlCol="0" anchor="ctr"/>
           <a:lstStyle/>
           <a:p>
-            <a:pPr indent="0" marL="0">
+            <a:pPr marL="0" indent="0">
               <a:buNone/>
             </a:pPr>
             <a:r>
@@ -14187,7 +14033,7 @@
           <a:bodyPr wrap="square" lIns="0" tIns="0" rIns="0" bIns="0" rtlCol="0" anchor="ctr"/>
           <a:lstStyle/>
           <a:p>
-            <a:pPr indent="0" marL="0">
+            <a:pPr marL="0" indent="0">
               <a:buNone/>
             </a:pPr>
             <a:r>
@@ -14201,9 +14047,6 @@
               </a:rPr>
               <a:t>signal_raw =   </a:t>
             </a:r>
-            <a:pPr indent="0" marL="0">
-              <a:buNone/>
-            </a:pPr>
             <a:r>
               <a:rPr lang="en-US" sz="1100" b="1" dirty="0">
                 <a:solidFill>
@@ -14215,9 +14058,6 @@
               </a:rPr>
               <a:t>𝟙[MA(5)&gt;MA(20)]</a:t>
             </a:r>
-            <a:pPr indent="0" marL="0">
-              <a:buNone/>
-            </a:pPr>
             <a:r>
               <a:rPr lang="en-US" sz="1100" dirty="0">
                 <a:solidFill>
@@ -14229,9 +14069,6 @@
               </a:rPr>
               <a:t>  ∧  </a:t>
             </a:r>
-            <a:pPr indent="0" marL="0">
-              <a:buNone/>
-            </a:pPr>
             <a:r>
               <a:rPr lang="en-US" sz="1100" b="1" dirty="0">
                 <a:solidFill>
@@ -14243,9 +14080,6 @@
               </a:rPr>
               <a:t>𝟙[MACD柱&gt;0]</a:t>
             </a:r>
-            <a:pPr indent="0" marL="0">
-              <a:buNone/>
-            </a:pPr>
             <a:r>
               <a:rPr lang="en-US" sz="1100" dirty="0">
                 <a:solidFill>
@@ -14257,9 +14091,6 @@
               </a:rPr>
               <a:t>  ∧  </a:t>
             </a:r>
-            <a:pPr indent="0" marL="0">
-              <a:buNone/>
-            </a:pPr>
             <a:r>
               <a:rPr lang="en-US" sz="1100" b="1" dirty="0">
                 <a:solidFill>
@@ -14271,9 +14102,6 @@
               </a:rPr>
               <a:t>𝟙[RSI&lt;70]</a:t>
             </a:r>
-            <a:pPr indent="0" marL="0">
-              <a:buNone/>
-            </a:pPr>
             <a:r>
               <a:rPr lang="en-US" sz="1100" dirty="0">
                 <a:solidFill>
@@ -14285,9 +14113,6 @@
               </a:rPr>
               <a:t>  ∧  </a:t>
             </a:r>
-            <a:pPr indent="0" marL="0">
-              <a:buNone/>
-            </a:pPr>
             <a:r>
               <a:rPr lang="en-US" sz="1100" b="1" dirty="0">
                 <a:solidFill>
@@ -14299,9 +14124,6 @@
               </a:rPr>
               <a:t>𝟙[close&gt;BBˡᵒʷᵉʳ]</a:t>
             </a:r>
-            <a:pPr indent="0" marL="0">
-              <a:buNone/>
-            </a:pPr>
             <a:r>
               <a:rPr lang="en-US" sz="1100" dirty="0">
                 <a:solidFill>
@@ -14313,9 +14135,6 @@
               </a:rPr>
               <a:t>  ∧  </a:t>
             </a:r>
-            <a:pPr indent="0" marL="0">
-              <a:buNone/>
-            </a:pPr>
             <a:r>
               <a:rPr lang="en-US" sz="1100" b="1" dirty="0">
                 <a:solidFill>
@@ -14352,7 +14171,7 @@
           <a:bodyPr wrap="square" lIns="0" tIns="0" rIns="0" bIns="0" rtlCol="0" anchor="t"/>
           <a:lstStyle/>
           <a:p>
-            <a:pPr indent="0" marL="0">
+            <a:pPr marL="0" indent="0">
               <a:buNone/>
             </a:pPr>
             <a:r>
@@ -14369,7 +14188,7 @@
             <a:endParaRPr lang="en-US" sz="1150" dirty="0"/>
           </a:p>
           <a:p>
-            <a:pPr indent="0" marL="0">
+            <a:pPr marL="0" indent="0">
               <a:buNone/>
             </a:pPr>
             <a:r>
@@ -14386,7 +14205,7 @@
             <a:endParaRPr lang="en-US" sz="1150" dirty="0"/>
           </a:p>
           <a:p>
-            <a:pPr indent="0" marL="0">
+            <a:pPr marL="0" indent="0">
               <a:buNone/>
             </a:pPr>
             <a:r>
@@ -14403,7 +14222,7 @@
             <a:endParaRPr lang="en-US" sz="1150" dirty="0"/>
           </a:p>
           <a:p>
-            <a:pPr indent="0" marL="0">
+            <a:pPr marL="0" indent="0">
               <a:buNone/>
             </a:pPr>
             <a:r>
@@ -14462,7 +14281,7 @@
           <a:bodyPr wrap="square" lIns="0" tIns="0" rIns="0" bIns="0" rtlCol="0" anchor="ctr"/>
           <a:lstStyle/>
           <a:p>
-            <a:pPr indent="0" marL="0">
+            <a:pPr marL="0" indent="0">
               <a:buNone/>
             </a:pPr>
             <a:r>
@@ -14501,7 +14320,7 @@
           <a:bodyPr wrap="square" lIns="0" tIns="0" rIns="0" bIns="0" rtlCol="0" anchor="t"/>
           <a:lstStyle/>
           <a:p>
-            <a:pPr indent="0" marL="0">
+            <a:pPr marL="0" indent="0">
               <a:spcAft>
                 <a:spcPts val="200"/>
               </a:spcAft>
@@ -14521,7 +14340,7 @@
             <a:endParaRPr lang="en-US" sz="1000" dirty="0"/>
           </a:p>
           <a:p>
-            <a:pPr indent="0" marL="0">
+            <a:pPr marL="0" indent="0">
               <a:spcAft>
                 <a:spcPts val="200"/>
               </a:spcAft>
@@ -14541,7 +14360,7 @@
             <a:endParaRPr lang="en-US" sz="1000" dirty="0"/>
           </a:p>
           <a:p>
-            <a:pPr indent="0" marL="0">
+            <a:pPr marL="0" indent="0">
               <a:spcAft>
                 <a:spcPts val="200"/>
               </a:spcAft>
@@ -14561,7 +14380,7 @@
             <a:endParaRPr lang="en-US" sz="1000" dirty="0"/>
           </a:p>
           <a:p>
-            <a:pPr indent="0" marL="0">
+            <a:pPr marL="0" indent="0">
               <a:spcAft>
                 <a:spcPts val="200"/>
               </a:spcAft>
@@ -14581,7 +14400,7 @@
             <a:endParaRPr lang="en-US" sz="1000" dirty="0"/>
           </a:p>
           <a:p>
-            <a:pPr indent="0" marL="0">
+            <a:pPr marL="0" indent="0">
               <a:spcAft>
                 <a:spcPts val="200"/>
               </a:spcAft>
@@ -14623,7 +14442,7 @@
           <a:bodyPr wrap="square" rtlCol="0" anchor="ctr"/>
           <a:lstStyle/>
           <a:p>
-            <a:pPr algn="r" indent="0" marL="0">
+            <a:pPr marL="0" indent="0" algn="r">
               <a:buNone/>
             </a:pPr>
             <a:r>
@@ -14657,6 +14476,7 @@
         <a:solidFill>
           <a:srgbClr val="F7F9FC"/>
         </a:solidFill>
+        <a:effectLst/>
       </p:bgPr>
     </p:bg>
     <p:spTree>
@@ -14694,7 +14514,7 @@
           <a:bodyPr wrap="square" lIns="0" tIns="0" rIns="0" bIns="0" rtlCol="0" anchor="ctr"/>
           <a:lstStyle/>
           <a:p>
-            <a:pPr indent="0" marL="0">
+            <a:pPr marL="0" indent="0">
               <a:buNone/>
             </a:pPr>
             <a:r>
@@ -14731,7 +14551,7 @@
           </a:solidFill>
           <a:ln/>
           <a:effectLst>
-            <a:outerShdw sx="100000" sy="100000" kx="0" ky="0" algn="bl" rotWithShape="0" blurRad="50800" dist="19050" dir="8100000">
+            <a:outerShdw blurRad="50800" dist="19050" dir="8100000" algn="bl" rotWithShape="0">
               <a:srgbClr val="000000">
                 <a:alpha val="8000"/>
               </a:srgbClr>
@@ -14780,7 +14600,7 @@
           <a:bodyPr wrap="square" lIns="0" tIns="0" rIns="0" bIns="0" rtlCol="0" anchor="ctr"/>
           <a:lstStyle/>
           <a:p>
-            <a:pPr indent="0" marL="0">
+            <a:pPr marL="0" indent="0">
               <a:buNone/>
             </a:pPr>
             <a:r>
@@ -14819,7 +14639,7 @@
           <a:bodyPr wrap="square" lIns="0" tIns="0" rIns="0" bIns="0" rtlCol="0" anchor="t"/>
           <a:lstStyle/>
           <a:p>
-            <a:pPr indent="0" marL="0">
+            <a:pPr marL="0" indent="0">
               <a:spcAft>
                 <a:spcPts val="200"/>
               </a:spcAft>
@@ -14839,7 +14659,7 @@
             <a:endParaRPr lang="en-US" sz="850" dirty="0"/>
           </a:p>
           <a:p>
-            <a:pPr indent="0" marL="0">
+            <a:pPr marL="0" indent="0">
               <a:spcAft>
                 <a:spcPts val="200"/>
               </a:spcAft>
@@ -14859,7 +14679,7 @@
             <a:endParaRPr lang="en-US" sz="850" dirty="0"/>
           </a:p>
           <a:p>
-            <a:pPr indent="0" marL="0">
+            <a:pPr marL="0" indent="0">
               <a:spcAft>
                 <a:spcPts val="200"/>
               </a:spcAft>
@@ -14879,7 +14699,7 @@
             <a:endParaRPr lang="en-US" sz="850" dirty="0"/>
           </a:p>
           <a:p>
-            <a:pPr indent="0" marL="0">
+            <a:pPr marL="0" indent="0">
               <a:spcAft>
                 <a:spcPts val="200"/>
               </a:spcAft>
@@ -14899,7 +14719,7 @@
             <a:endParaRPr lang="en-US" sz="850" dirty="0"/>
           </a:p>
           <a:p>
-            <a:pPr indent="0" marL="0">
+            <a:pPr marL="0" indent="0">
               <a:spcAft>
                 <a:spcPts val="200"/>
               </a:spcAft>
@@ -14919,7 +14739,7 @@
             <a:endParaRPr lang="en-US" sz="850" dirty="0"/>
           </a:p>
           <a:p>
-            <a:pPr indent="0" marL="0">
+            <a:pPr marL="0" indent="0">
               <a:spcAft>
                 <a:spcPts val="200"/>
               </a:spcAft>
@@ -14939,7 +14759,7 @@
             <a:endParaRPr lang="en-US" sz="850" dirty="0"/>
           </a:p>
           <a:p>
-            <a:pPr indent="0" marL="0">
+            <a:pPr marL="0" indent="0">
               <a:spcAft>
                 <a:spcPts val="200"/>
               </a:spcAft>
@@ -14959,7 +14779,7 @@
             <a:endParaRPr lang="en-US" sz="850" dirty="0"/>
           </a:p>
           <a:p>
-            <a:pPr indent="0" marL="0">
+            <a:pPr marL="0" indent="0">
               <a:spcAft>
                 <a:spcPts val="200"/>
               </a:spcAft>
@@ -14979,7 +14799,7 @@
             <a:endParaRPr lang="en-US" sz="850" dirty="0"/>
           </a:p>
           <a:p>
-            <a:pPr indent="0" marL="0">
+            <a:pPr marL="0" indent="0">
               <a:spcAft>
                 <a:spcPts val="200"/>
               </a:spcAft>
@@ -14988,7 +14808,7 @@
             <a:endParaRPr lang="en-US" sz="850" dirty="0"/>
           </a:p>
           <a:p>
-            <a:pPr indent="0" marL="0">
+            <a:pPr marL="0" indent="0">
               <a:spcAft>
                 <a:spcPts val="200"/>
               </a:spcAft>
@@ -15008,7 +14828,7 @@
             <a:endParaRPr lang="en-US" sz="850" dirty="0"/>
           </a:p>
           <a:p>
-            <a:pPr indent="0" marL="0">
+            <a:pPr marL="0" indent="0">
               <a:spcAft>
                 <a:spcPts val="200"/>
               </a:spcAft>
@@ -15028,7 +14848,7 @@
             <a:endParaRPr lang="en-US" sz="850" dirty="0"/>
           </a:p>
           <a:p>
-            <a:pPr indent="0" marL="0">
+            <a:pPr marL="0" indent="0">
               <a:spcAft>
                 <a:spcPts val="200"/>
               </a:spcAft>
@@ -15068,7 +14888,7 @@
           </a:solidFill>
           <a:ln/>
           <a:effectLst>
-            <a:outerShdw sx="100000" sy="100000" kx="0" ky="0" algn="bl" rotWithShape="0" blurRad="50800" dist="19050" dir="8100000">
+            <a:outerShdw blurRad="50800" dist="19050" dir="8100000" algn="bl" rotWithShape="0">
               <a:srgbClr val="000000">
                 <a:alpha val="8000"/>
               </a:srgbClr>
@@ -15117,7 +14937,7 @@
           <a:bodyPr wrap="square" lIns="0" tIns="0" rIns="0" bIns="0" rtlCol="0" anchor="ctr"/>
           <a:lstStyle/>
           <a:p>
-            <a:pPr indent="0" marL="0">
+            <a:pPr marL="0" indent="0">
               <a:buNone/>
             </a:pPr>
             <a:r>
@@ -15156,7 +14976,7 @@
           <a:bodyPr wrap="square" lIns="0" tIns="0" rIns="0" bIns="0" rtlCol="0" anchor="t"/>
           <a:lstStyle/>
           <a:p>
-            <a:pPr indent="0" marL="0">
+            <a:pPr marL="0" indent="0">
               <a:spcAft>
                 <a:spcPts val="200"/>
               </a:spcAft>
@@ -15176,7 +14996,7 @@
             <a:endParaRPr lang="en-US" sz="800" dirty="0"/>
           </a:p>
           <a:p>
-            <a:pPr indent="0" marL="0">
+            <a:pPr marL="0" indent="0">
               <a:spcAft>
                 <a:spcPts val="200"/>
               </a:spcAft>
@@ -15196,7 +15016,7 @@
             <a:endParaRPr lang="en-US" sz="800" dirty="0"/>
           </a:p>
           <a:p>
-            <a:pPr indent="0" marL="0">
+            <a:pPr marL="0" indent="0">
               <a:spcAft>
                 <a:spcPts val="200"/>
               </a:spcAft>
@@ -15216,7 +15036,7 @@
             <a:endParaRPr lang="en-US" sz="800" dirty="0"/>
           </a:p>
           <a:p>
-            <a:pPr indent="0" marL="0">
+            <a:pPr marL="0" indent="0">
               <a:spcAft>
                 <a:spcPts val="200"/>
               </a:spcAft>
@@ -15236,7 +15056,7 @@
             <a:endParaRPr lang="en-US" sz="800" dirty="0"/>
           </a:p>
           <a:p>
-            <a:pPr indent="0" marL="0">
+            <a:pPr marL="0" indent="0">
               <a:spcAft>
                 <a:spcPts val="200"/>
               </a:spcAft>
@@ -15256,7 +15076,7 @@
             <a:endParaRPr lang="en-US" sz="800" dirty="0"/>
           </a:p>
           <a:p>
-            <a:pPr indent="0" marL="0">
+            <a:pPr marL="0" indent="0">
               <a:spcAft>
                 <a:spcPts val="200"/>
               </a:spcAft>
@@ -15265,7 +15085,7 @@
             <a:endParaRPr lang="en-US" sz="800" dirty="0"/>
           </a:p>
           <a:p>
-            <a:pPr indent="0" marL="0">
+            <a:pPr marL="0" indent="0">
               <a:spcAft>
                 <a:spcPts val="200"/>
               </a:spcAft>
@@ -15285,7 +15105,7 @@
             <a:endParaRPr lang="en-US" sz="800" dirty="0"/>
           </a:p>
           <a:p>
-            <a:pPr indent="0" marL="0">
+            <a:pPr marL="0" indent="0">
               <a:spcAft>
                 <a:spcPts val="200"/>
               </a:spcAft>
@@ -15305,7 +15125,7 @@
             <a:endParaRPr lang="en-US" sz="800" dirty="0"/>
           </a:p>
           <a:p>
-            <a:pPr indent="0" marL="0">
+            <a:pPr marL="0" indent="0">
               <a:spcAft>
                 <a:spcPts val="200"/>
               </a:spcAft>
@@ -15314,7 +15134,7 @@
             <a:endParaRPr lang="en-US" sz="800" dirty="0"/>
           </a:p>
           <a:p>
-            <a:pPr indent="0" marL="0">
+            <a:pPr marL="0" indent="0">
               <a:spcAft>
                 <a:spcPts val="200"/>
               </a:spcAft>
@@ -15334,7 +15154,7 @@
             <a:endParaRPr lang="en-US" sz="800" dirty="0"/>
           </a:p>
           <a:p>
-            <a:pPr indent="0" marL="0">
+            <a:pPr marL="0" indent="0">
               <a:spcAft>
                 <a:spcPts val="200"/>
               </a:spcAft>
@@ -15354,7 +15174,7 @@
             <a:endParaRPr lang="en-US" sz="800" dirty="0"/>
           </a:p>
           <a:p>
-            <a:pPr indent="0" marL="0">
+            <a:pPr marL="0" indent="0">
               <a:spcAft>
                 <a:spcPts val="200"/>
               </a:spcAft>
@@ -15436,7 +15256,7 @@
           <a:bodyPr wrap="square" lIns="0" tIns="0" rIns="0" bIns="0" rtlCol="0" anchor="ctr"/>
           <a:lstStyle/>
           <a:p>
-            <a:pPr indent="0" marL="0">
+            <a:pPr marL="0" indent="0">
               <a:buNone/>
             </a:pPr>
             <a:r>
@@ -15475,7 +15295,7 @@
           <a:bodyPr wrap="square" lIns="0" tIns="0" rIns="0" bIns="0" rtlCol="0" anchor="t"/>
           <a:lstStyle/>
           <a:p>
-            <a:pPr indent="0" marL="0">
+            <a:pPr marL="0" indent="0">
               <a:spcAft>
                 <a:spcPts val="200"/>
               </a:spcAft>
@@ -15495,7 +15315,7 @@
             <a:endParaRPr lang="en-US" sz="900" dirty="0"/>
           </a:p>
           <a:p>
-            <a:pPr indent="0" marL="0">
+            <a:pPr marL="0" indent="0">
               <a:spcAft>
                 <a:spcPts val="200"/>
               </a:spcAft>
@@ -15515,7 +15335,7 @@
             <a:endParaRPr lang="en-US" sz="900" dirty="0"/>
           </a:p>
           <a:p>
-            <a:pPr indent="0" marL="0">
+            <a:pPr marL="0" indent="0">
               <a:spcAft>
                 <a:spcPts val="200"/>
               </a:spcAft>
@@ -15535,7 +15355,7 @@
             <a:endParaRPr lang="en-US" sz="900" dirty="0"/>
           </a:p>
           <a:p>
-            <a:pPr indent="0" marL="0">
+            <a:pPr marL="0" indent="0">
               <a:spcAft>
                 <a:spcPts val="200"/>
               </a:spcAft>
@@ -15555,7 +15375,7 @@
             <a:endParaRPr lang="en-US" sz="900" dirty="0"/>
           </a:p>
           <a:p>
-            <a:pPr indent="0" marL="0">
+            <a:pPr marL="0" indent="0">
               <a:spcAft>
                 <a:spcPts val="200"/>
               </a:spcAft>
@@ -15597,7 +15417,7 @@
           <a:bodyPr wrap="square" lIns="0" tIns="0" rIns="0" bIns="0" rtlCol="0" anchor="ctr"/>
           <a:lstStyle/>
           <a:p>
-            <a:pPr indent="0" marL="0">
+            <a:pPr marL="0" indent="0">
               <a:buNone/>
             </a:pPr>
             <a:r>
@@ -15636,7 +15456,7 @@
           <a:bodyPr wrap="square" lIns="0" tIns="0" rIns="0" bIns="0" rtlCol="0" anchor="t"/>
           <a:lstStyle/>
           <a:p>
-            <a:pPr indent="0" marL="0">
+            <a:pPr marL="0" indent="0">
               <a:buNone/>
             </a:pPr>
             <a:r>
@@ -15653,7 +15473,7 @@
             <a:endParaRPr lang="en-US" sz="900" dirty="0"/>
           </a:p>
           <a:p>
-            <a:pPr indent="0" marL="0">
+            <a:pPr marL="0" indent="0">
               <a:buNone/>
             </a:pPr>
             <a:r>
@@ -15670,7 +15490,7 @@
             <a:endParaRPr lang="en-US" sz="900" dirty="0"/>
           </a:p>
           <a:p>
-            <a:pPr indent="0" marL="0">
+            <a:pPr marL="0" indent="0">
               <a:buNone/>
             </a:pPr>
             <a:r>
@@ -15687,13 +15507,13 @@
             <a:endParaRPr lang="en-US" sz="900" dirty="0"/>
           </a:p>
           <a:p>
-            <a:pPr indent="0" marL="0">
+            <a:pPr marL="0" indent="0">
               <a:buNone/>
             </a:pPr>
             <a:endParaRPr lang="en-US" sz="900" dirty="0"/>
           </a:p>
           <a:p>
-            <a:pPr indent="0" marL="0">
+            <a:pPr marL="0" indent="0">
               <a:buNone/>
             </a:pPr>
             <a:r>
@@ -15710,7 +15530,7 @@
             <a:endParaRPr lang="en-US" sz="900" dirty="0"/>
           </a:p>
           <a:p>
-            <a:pPr indent="0" marL="0">
+            <a:pPr marL="0" indent="0">
               <a:buNone/>
             </a:pPr>
             <a:r>
@@ -15727,7 +15547,7 @@
             <a:endParaRPr lang="en-US" sz="900" dirty="0"/>
           </a:p>
           <a:p>
-            <a:pPr indent="0" marL="0">
+            <a:pPr marL="0" indent="0">
               <a:buNone/>
             </a:pPr>
             <a:r>
@@ -15744,7 +15564,7 @@
             <a:endParaRPr lang="en-US" sz="900" dirty="0"/>
           </a:p>
           <a:p>
-            <a:pPr indent="0" marL="0">
+            <a:pPr marL="0" indent="0">
               <a:buNone/>
             </a:pPr>
             <a:r>
@@ -15761,13 +15581,13 @@
             <a:endParaRPr lang="en-US" sz="900" dirty="0"/>
           </a:p>
           <a:p>
-            <a:pPr indent="0" marL="0">
+            <a:pPr marL="0" indent="0">
               <a:buNone/>
             </a:pPr>
             <a:endParaRPr lang="en-US" sz="900" dirty="0"/>
           </a:p>
           <a:p>
-            <a:pPr indent="0" marL="0">
+            <a:pPr marL="0" indent="0">
               <a:buNone/>
             </a:pPr>
             <a:r>
@@ -15806,7 +15626,7 @@
           <a:bodyPr wrap="square" rtlCol="0" anchor="ctr"/>
           <a:lstStyle/>
           <a:p>
-            <a:pPr algn="r" indent="0" marL="0">
+            <a:pPr marL="0" indent="0" algn="r">
               <a:buNone/>
             </a:pPr>
             <a:r>
@@ -15840,6 +15660,7 @@
         <a:solidFill>
           <a:srgbClr val="F7F9FC"/>
         </a:solidFill>
+        <a:effectLst/>
       </p:bgPr>
     </p:bg>
     <p:spTree>
@@ -15877,7 +15698,7 @@
           <a:bodyPr wrap="square" lIns="0" tIns="0" rIns="0" bIns="0" rtlCol="0" anchor="ctr"/>
           <a:lstStyle/>
           <a:p>
-            <a:pPr indent="0" marL="0">
+            <a:pPr marL="0" indent="0">
               <a:buNone/>
             </a:pPr>
             <a:r>
@@ -15914,7 +15735,7 @@
           </a:solidFill>
           <a:ln/>
           <a:effectLst>
-            <a:outerShdw sx="100000" sy="100000" kx="0" ky="0" algn="bl" rotWithShape="0" blurRad="50800" dist="19050" dir="8100000">
+            <a:outerShdw blurRad="50800" dist="19050" dir="8100000" algn="bl" rotWithShape="0">
               <a:srgbClr val="000000">
                 <a:alpha val="8000"/>
               </a:srgbClr>
@@ -15963,7 +15784,7 @@
           <a:bodyPr wrap="square" lIns="0" tIns="0" rIns="0" bIns="0" rtlCol="0" anchor="ctr"/>
           <a:lstStyle/>
           <a:p>
-            <a:pPr indent="0" marL="0">
+            <a:pPr marL="0" indent="0">
               <a:buNone/>
             </a:pPr>
             <a:r>
@@ -16002,7 +15823,7 @@
           <a:bodyPr wrap="square" lIns="0" tIns="0" rIns="0" bIns="0" rtlCol="0" anchor="t"/>
           <a:lstStyle/>
           <a:p>
-            <a:pPr indent="0" marL="0">
+            <a:pPr marL="0" indent="0">
               <a:buNone/>
             </a:pPr>
             <a:r>
@@ -16019,7 +15840,7 @@
             <a:endParaRPr lang="en-US" sz="1000" dirty="0"/>
           </a:p>
           <a:p>
-            <a:pPr indent="0" marL="0">
+            <a:pPr marL="0" indent="0">
               <a:buNone/>
             </a:pPr>
             <a:r>
@@ -16036,7 +15857,7 @@
             <a:endParaRPr lang="en-US" sz="1000" dirty="0"/>
           </a:p>
           <a:p>
-            <a:pPr indent="0" marL="0">
+            <a:pPr marL="0" indent="0">
               <a:buNone/>
             </a:pPr>
             <a:r>
@@ -16053,7 +15874,7 @@
             <a:endParaRPr lang="en-US" sz="1000" dirty="0"/>
           </a:p>
           <a:p>
-            <a:pPr indent="0" marL="0">
+            <a:pPr marL="0" indent="0">
               <a:buNone/>
             </a:pPr>
             <a:r>
@@ -16070,7 +15891,7 @@
             <a:endParaRPr lang="en-US" sz="1000" dirty="0"/>
           </a:p>
           <a:p>
-            <a:pPr indent="0" marL="0">
+            <a:pPr marL="0" indent="0">
               <a:buNone/>
             </a:pPr>
             <a:r>
@@ -16087,13 +15908,13 @@
             <a:endParaRPr lang="en-US" sz="1000" dirty="0"/>
           </a:p>
           <a:p>
-            <a:pPr indent="0" marL="0">
+            <a:pPr marL="0" indent="0">
               <a:buNone/>
             </a:pPr>
             <a:endParaRPr lang="en-US" sz="1000" dirty="0"/>
           </a:p>
           <a:p>
-            <a:pPr indent="0" marL="0">
+            <a:pPr marL="0" indent="0">
               <a:buNone/>
             </a:pPr>
             <a:r>
@@ -16110,7 +15931,7 @@
             <a:endParaRPr lang="en-US" sz="1000" dirty="0"/>
           </a:p>
           <a:p>
-            <a:pPr indent="0" marL="0">
+            <a:pPr marL="0" indent="0">
               <a:buNone/>
             </a:pPr>
             <a:r>
@@ -16147,7 +15968,7 @@
           </a:solidFill>
           <a:ln/>
           <a:effectLst>
-            <a:outerShdw sx="100000" sy="100000" kx="0" ky="0" algn="bl" rotWithShape="0" blurRad="50800" dist="19050" dir="8100000">
+            <a:outerShdw blurRad="50800" dist="19050" dir="8100000" algn="bl" rotWithShape="0">
               <a:srgbClr val="000000">
                 <a:alpha val="8000"/>
               </a:srgbClr>
@@ -16196,7 +16017,7 @@
           <a:bodyPr wrap="square" lIns="0" tIns="0" rIns="0" bIns="0" rtlCol="0" anchor="ctr"/>
           <a:lstStyle/>
           <a:p>
-            <a:pPr indent="0" marL="0">
+            <a:pPr marL="0" indent="0">
               <a:buNone/>
             </a:pPr>
             <a:r>
@@ -16235,7 +16056,7 @@
           <a:bodyPr wrap="square" lIns="0" tIns="0" rIns="0" bIns="0" rtlCol="0" anchor="t"/>
           <a:lstStyle/>
           <a:p>
-            <a:pPr indent="0" marL="0">
+            <a:pPr marL="0" indent="0">
               <a:buNone/>
             </a:pPr>
             <a:r>
@@ -16252,7 +16073,7 @@
             <a:endParaRPr lang="en-US" sz="1000" dirty="0"/>
           </a:p>
           <a:p>
-            <a:pPr indent="0" marL="0">
+            <a:pPr marL="0" indent="0">
               <a:buNone/>
             </a:pPr>
             <a:r>
@@ -16269,7 +16090,7 @@
             <a:endParaRPr lang="en-US" sz="1000" dirty="0"/>
           </a:p>
           <a:p>
-            <a:pPr indent="0" marL="0">
+            <a:pPr marL="0" indent="0">
               <a:buNone/>
             </a:pPr>
             <a:r>
@@ -16286,7 +16107,7 @@
             <a:endParaRPr lang="en-US" sz="1000" dirty="0"/>
           </a:p>
           <a:p>
-            <a:pPr indent="0" marL="0">
+            <a:pPr marL="0" indent="0">
               <a:buNone/>
             </a:pPr>
             <a:r>
@@ -16303,13 +16124,13 @@
             <a:endParaRPr lang="en-US" sz="1000" dirty="0"/>
           </a:p>
           <a:p>
-            <a:pPr indent="0" marL="0">
+            <a:pPr marL="0" indent="0">
               <a:buNone/>
             </a:pPr>
             <a:endParaRPr lang="en-US" sz="1000" dirty="0"/>
           </a:p>
           <a:p>
-            <a:pPr indent="0" marL="0">
+            <a:pPr marL="0" indent="0">
               <a:buNone/>
             </a:pPr>
             <a:r>
@@ -16326,7 +16147,7 @@
             <a:endParaRPr lang="en-US" sz="1000" dirty="0"/>
           </a:p>
           <a:p>
-            <a:pPr indent="0" marL="0">
+            <a:pPr marL="0" indent="0">
               <a:buNone/>
             </a:pPr>
             <a:r>
@@ -16363,7 +16184,7 @@
           </a:solidFill>
           <a:ln/>
           <a:effectLst>
-            <a:outerShdw sx="100000" sy="100000" kx="0" ky="0" algn="bl" rotWithShape="0" blurRad="50800" dist="19050" dir="8100000">
+            <a:outerShdw blurRad="50800" dist="19050" dir="8100000" algn="bl" rotWithShape="0">
               <a:srgbClr val="000000">
                 <a:alpha val="8000"/>
               </a:srgbClr>
@@ -16412,7 +16233,7 @@
           <a:bodyPr wrap="square" lIns="0" tIns="0" rIns="0" bIns="0" rtlCol="0" anchor="ctr"/>
           <a:lstStyle/>
           <a:p>
-            <a:pPr indent="0" marL="0">
+            <a:pPr marL="0" indent="0">
               <a:buNone/>
             </a:pPr>
             <a:r>
@@ -16451,7 +16272,7 @@
           <a:bodyPr wrap="square" lIns="0" tIns="0" rIns="0" bIns="0" rtlCol="0" anchor="t"/>
           <a:lstStyle/>
           <a:p>
-            <a:pPr indent="0" marL="0">
+            <a:pPr marL="0" indent="0">
               <a:buNone/>
             </a:pPr>
             <a:r>
@@ -16468,13 +16289,13 @@
             <a:endParaRPr lang="en-US" sz="1000" dirty="0"/>
           </a:p>
           <a:p>
-            <a:pPr indent="0" marL="0">
+            <a:pPr marL="0" indent="0">
               <a:buNone/>
             </a:pPr>
             <a:endParaRPr lang="en-US" sz="1000" dirty="0"/>
           </a:p>
           <a:p>
-            <a:pPr indent="0" marL="0">
+            <a:pPr marL="0" indent="0">
               <a:buNone/>
             </a:pPr>
             <a:r>
@@ -16491,7 +16312,7 @@
             <a:endParaRPr lang="en-US" sz="1000" dirty="0"/>
           </a:p>
           <a:p>
-            <a:pPr indent="0" marL="0">
+            <a:pPr marL="0" indent="0">
               <a:buNone/>
             </a:pPr>
             <a:r>
@@ -16508,7 +16329,7 @@
             <a:endParaRPr lang="en-US" sz="1000" dirty="0"/>
           </a:p>
           <a:p>
-            <a:pPr indent="0" marL="0">
+            <a:pPr marL="0" indent="0">
               <a:buNone/>
             </a:pPr>
             <a:r>
@@ -16525,13 +16346,13 @@
             <a:endParaRPr lang="en-US" sz="1000" dirty="0"/>
           </a:p>
           <a:p>
-            <a:pPr indent="0" marL="0">
+            <a:pPr marL="0" indent="0">
               <a:buNone/>
             </a:pPr>
             <a:endParaRPr lang="en-US" sz="1000" dirty="0"/>
           </a:p>
           <a:p>
-            <a:pPr indent="0" marL="0">
+            <a:pPr marL="0" indent="0">
               <a:buNone/>
             </a:pPr>
             <a:r>
@@ -16570,7 +16391,7 @@
           <a:bodyPr wrap="square" rtlCol="0" anchor="ctr"/>
           <a:lstStyle/>
           <a:p>
-            <a:pPr algn="r" indent="0" marL="0">
+            <a:pPr marL="0" indent="0" algn="r">
               <a:buNone/>
             </a:pPr>
             <a:r>
@@ -16604,6 +16425,7 @@
         <a:solidFill>
           <a:srgbClr val="F7F9FC"/>
         </a:solidFill>
+        <a:effectLst/>
       </p:bgPr>
     </p:bg>
     <p:spTree>
@@ -16641,7 +16463,7 @@
           <a:bodyPr wrap="square" lIns="0" tIns="0" rIns="0" bIns="0" rtlCol="0" anchor="ctr"/>
           <a:lstStyle/>
           <a:p>
-            <a:pPr indent="0" marL="0">
+            <a:pPr marL="0" indent="0">
               <a:buNone/>
             </a:pPr>
             <a:r>
@@ -16680,7 +16502,7 @@
           <a:bodyPr wrap="square" lIns="0" tIns="0" rIns="0" bIns="0" rtlCol="0" anchor="ctr"/>
           <a:lstStyle/>
           <a:p>
-            <a:pPr algn="ctr" indent="0" marL="0">
+            <a:pPr marL="0" indent="0" algn="ctr">
               <a:buNone/>
             </a:pPr>
             <a:r>
@@ -16719,7 +16541,7 @@
           <a:bodyPr wrap="square" lIns="0" tIns="0" rIns="0" bIns="0" rtlCol="0" anchor="ctr"/>
           <a:lstStyle/>
           <a:p>
-            <a:pPr algn="ctr" indent="0" marL="0">
+            <a:pPr marL="0" indent="0" algn="ctr">
               <a:buNone/>
             </a:pPr>
             <a:r>
@@ -16758,7 +16580,7 @@
           <a:bodyPr wrap="square" lIns="0" tIns="0" rIns="0" bIns="0" rtlCol="0" anchor="ctr"/>
           <a:lstStyle/>
           <a:p>
-            <a:pPr algn="ctr" indent="0" marL="0">
+            <a:pPr marL="0" indent="0" algn="ctr">
               <a:buNone/>
             </a:pPr>
             <a:r>
@@ -16797,7 +16619,7 @@
           <a:bodyPr wrap="square" lIns="0" tIns="0" rIns="0" bIns="0" rtlCol="0" anchor="ctr"/>
           <a:lstStyle/>
           <a:p>
-            <a:pPr algn="ctr" indent="0" marL="0">
+            <a:pPr marL="0" indent="0" algn="ctr">
               <a:buNone/>
             </a:pPr>
             <a:r>
@@ -16836,7 +16658,7 @@
           <a:bodyPr wrap="square" lIns="0" tIns="0" rIns="0" bIns="0" rtlCol="0" anchor="ctr"/>
           <a:lstStyle/>
           <a:p>
-            <a:pPr algn="ctr" indent="0" marL="0">
+            <a:pPr marL="0" indent="0" algn="ctr">
               <a:buNone/>
             </a:pPr>
             <a:r>
@@ -16875,7 +16697,7 @@
           <a:bodyPr wrap="square" lIns="0" tIns="0" rIns="0" bIns="0" rtlCol="0" anchor="ctr"/>
           <a:lstStyle/>
           <a:p>
-            <a:pPr algn="ctr" indent="0" marL="0">
+            <a:pPr marL="0" indent="0" algn="ctr">
               <a:buNone/>
             </a:pPr>
             <a:r>
@@ -16914,7 +16736,7 @@
           <a:bodyPr wrap="square" lIns="0" tIns="0" rIns="0" bIns="0" rtlCol="0" anchor="ctr"/>
           <a:lstStyle/>
           <a:p>
-            <a:pPr algn="ctr" indent="0" marL="0">
+            <a:pPr marL="0" indent="0" algn="ctr">
               <a:buNone/>
             </a:pPr>
             <a:r>
@@ -16953,7 +16775,7 @@
           <a:bodyPr wrap="square" lIns="0" tIns="0" rIns="0" bIns="0" rtlCol="0" anchor="ctr"/>
           <a:lstStyle/>
           <a:p>
-            <a:pPr algn="ctr" indent="0" marL="0">
+            <a:pPr marL="0" indent="0" algn="ctr">
               <a:buNone/>
             </a:pPr>
             <a:r>
@@ -16992,7 +16814,7 @@
           <a:bodyPr wrap="square" lIns="0" tIns="0" rIns="0" bIns="0" rtlCol="0" anchor="ctr"/>
           <a:lstStyle/>
           <a:p>
-            <a:pPr algn="ctr" indent="0" marL="0">
+            <a:pPr marL="0" indent="0" algn="ctr">
               <a:buNone/>
             </a:pPr>
             <a:r>
@@ -17031,7 +16853,7 @@
           <a:bodyPr wrap="square" lIns="0" tIns="0" rIns="0" bIns="0" rtlCol="0" anchor="ctr"/>
           <a:lstStyle/>
           <a:p>
-            <a:pPr algn="ctr" indent="0" marL="0">
+            <a:pPr marL="0" indent="0" algn="ctr">
               <a:buNone/>
             </a:pPr>
             <a:r>
@@ -17070,7 +16892,7 @@
           <a:bodyPr wrap="square" lIns="0" tIns="0" rIns="0" bIns="0" rtlCol="0" anchor="ctr"/>
           <a:lstStyle/>
           <a:p>
-            <a:pPr algn="ctr" indent="0" marL="0">
+            <a:pPr marL="0" indent="0" algn="ctr">
               <a:buNone/>
             </a:pPr>
             <a:r>
@@ -17109,7 +16931,7 @@
           <a:bodyPr wrap="square" lIns="0" tIns="0" rIns="0" bIns="0" rtlCol="0" anchor="ctr"/>
           <a:lstStyle/>
           <a:p>
-            <a:pPr algn="ctr" indent="0" marL="0">
+            <a:pPr marL="0" indent="0" algn="ctr">
               <a:buNone/>
             </a:pPr>
             <a:r>
@@ -17148,7 +16970,7 @@
           <a:bodyPr wrap="square" lIns="0" tIns="0" rIns="0" bIns="0" rtlCol="0" anchor="ctr"/>
           <a:lstStyle/>
           <a:p>
-            <a:pPr algn="ctr" indent="0" marL="0">
+            <a:pPr marL="0" indent="0" algn="ctr">
               <a:buNone/>
             </a:pPr>
             <a:r>
@@ -17187,7 +17009,7 @@
           <a:bodyPr wrap="square" lIns="0" tIns="0" rIns="0" bIns="0" rtlCol="0" anchor="ctr"/>
           <a:lstStyle/>
           <a:p>
-            <a:pPr algn="ctr" indent="0" marL="0">
+            <a:pPr marL="0" indent="0" algn="ctr">
               <a:buNone/>
             </a:pPr>
             <a:r>
@@ -17226,7 +17048,7 @@
           <a:bodyPr wrap="square" lIns="0" tIns="0" rIns="0" bIns="0" rtlCol="0" anchor="ctr"/>
           <a:lstStyle/>
           <a:p>
-            <a:pPr algn="ctr" indent="0" marL="0">
+            <a:pPr marL="0" indent="0" algn="ctr">
               <a:buNone/>
             </a:pPr>
             <a:r>
@@ -17246,7 +17068,7 @@
       </p:sp>
       <p:graphicFrame>
         <p:nvGraphicFramePr>
-          <p:cNvPr id="10" name="Table 0"/>
+          <p:cNvPr id="18" name="Table 0"/>
           <p:cNvGraphicFramePr>
             <a:graphicFrameLocks noGrp="1"/>
           </p:cNvGraphicFramePr>
@@ -17267,12 +17089,48 @@
             <a:tbl>
               <a:tblPr/>
               <a:tblGrid>
-                <a:gridCol w="1554480"/>
-                <a:gridCol w="1097280"/>
-                <a:gridCol w="1097280"/>
-                <a:gridCol w="1097280"/>
-                <a:gridCol w="822960"/>
-                <a:gridCol w="1097280"/>
+                <a:gridCol w="1554480">
+                  <a:extLst>
+                    <a:ext uri="{9D8B030D-6E8A-4147-A177-3AD203B41FA5}">
+                      <a16:colId xmlns:a16="http://schemas.microsoft.com/office/drawing/2014/main" val="20000"/>
+                    </a:ext>
+                  </a:extLst>
+                </a:gridCol>
+                <a:gridCol w="1097280">
+                  <a:extLst>
+                    <a:ext uri="{9D8B030D-6E8A-4147-A177-3AD203B41FA5}">
+                      <a16:colId xmlns:a16="http://schemas.microsoft.com/office/drawing/2014/main" val="20001"/>
+                    </a:ext>
+                  </a:extLst>
+                </a:gridCol>
+                <a:gridCol w="1097280">
+                  <a:extLst>
+                    <a:ext uri="{9D8B030D-6E8A-4147-A177-3AD203B41FA5}">
+                      <a16:colId xmlns:a16="http://schemas.microsoft.com/office/drawing/2014/main" val="20002"/>
+                    </a:ext>
+                  </a:extLst>
+                </a:gridCol>
+                <a:gridCol w="1097280">
+                  <a:extLst>
+                    <a:ext uri="{9D8B030D-6E8A-4147-A177-3AD203B41FA5}">
+                      <a16:colId xmlns:a16="http://schemas.microsoft.com/office/drawing/2014/main" val="20003"/>
+                    </a:ext>
+                  </a:extLst>
+                </a:gridCol>
+                <a:gridCol w="822960">
+                  <a:extLst>
+                    <a:ext uri="{9D8B030D-6E8A-4147-A177-3AD203B41FA5}">
+                      <a16:colId xmlns:a16="http://schemas.microsoft.com/office/drawing/2014/main" val="20004"/>
+                    </a:ext>
+                  </a:extLst>
+                </a:gridCol>
+                <a:gridCol w="1097280">
+                  <a:extLst>
+                    <a:ext uri="{9D8B030D-6E8A-4147-A177-3AD203B41FA5}">
+                      <a16:colId xmlns:a16="http://schemas.microsoft.com/office/drawing/2014/main" val="20005"/>
+                    </a:ext>
+                  </a:extLst>
+                </a:gridCol>
               </a:tblGrid>
               <a:tr h="292608">
                 <a:tc>
@@ -17280,7 +17138,7 @@
                     <a:bodyPr/>
                     <a:lstStyle/>
                     <a:p>
-                      <a:pPr indent="0" marL="0">
+                      <a:pPr marL="0" indent="0">
                         <a:buNone/>
                       </a:pPr>
                       <a:r>
@@ -17301,7 +17159,7 @@
                       </a:endParaRPr>
                     </a:p>
                   </a:txBody>
-                  <a:tcPr marL="91440" marR="91440" marT="45720" marB="45720">
+                  <a:tcPr>
                     <a:lnL w="6350" cap="flat" cmpd="sng" algn="ctr">
                       <a:solidFill>
                         <a:srgbClr val="E8ECF1"/>
@@ -17348,7 +17206,7 @@
                     <a:bodyPr/>
                     <a:lstStyle/>
                     <a:p>
-                      <a:pPr indent="0" marL="0">
+                      <a:pPr marL="0" indent="0">
                         <a:buNone/>
                       </a:pPr>
                       <a:r>
@@ -17369,7 +17227,7 @@
                       </a:endParaRPr>
                     </a:p>
                   </a:txBody>
-                  <a:tcPr marL="91440" marR="91440" marT="45720" marB="45720">
+                  <a:tcPr>
                     <a:lnL w="6350" cap="flat" cmpd="sng" algn="ctr">
                       <a:solidFill>
                         <a:srgbClr val="E8ECF1"/>
@@ -17416,7 +17274,7 @@
                     <a:bodyPr/>
                     <a:lstStyle/>
                     <a:p>
-                      <a:pPr indent="0" marL="0">
+                      <a:pPr marL="0" indent="0">
                         <a:buNone/>
                       </a:pPr>
                       <a:r>
@@ -17437,7 +17295,7 @@
                       </a:endParaRPr>
                     </a:p>
                   </a:txBody>
-                  <a:tcPr marL="91440" marR="91440" marT="45720" marB="45720">
+                  <a:tcPr>
                     <a:lnL w="6350" cap="flat" cmpd="sng" algn="ctr">
                       <a:solidFill>
                         <a:srgbClr val="E8ECF1"/>
@@ -17484,7 +17342,7 @@
                     <a:bodyPr/>
                     <a:lstStyle/>
                     <a:p>
-                      <a:pPr indent="0" marL="0">
+                      <a:pPr marL="0" indent="0">
                         <a:buNone/>
                       </a:pPr>
                       <a:r>
@@ -17505,7 +17363,7 @@
                       </a:endParaRPr>
                     </a:p>
                   </a:txBody>
-                  <a:tcPr marL="91440" marR="91440" marT="45720" marB="45720">
+                  <a:tcPr>
                     <a:lnL w="6350" cap="flat" cmpd="sng" algn="ctr">
                       <a:solidFill>
                         <a:srgbClr val="E8ECF1"/>
@@ -17552,7 +17410,7 @@
                     <a:bodyPr/>
                     <a:lstStyle/>
                     <a:p>
-                      <a:pPr indent="0" marL="0">
+                      <a:pPr marL="0" indent="0">
                         <a:buNone/>
                       </a:pPr>
                       <a:r>
@@ -17573,7 +17431,7 @@
                       </a:endParaRPr>
                     </a:p>
                   </a:txBody>
-                  <a:tcPr marL="91440" marR="91440" marT="45720" marB="45720">
+                  <a:tcPr>
                     <a:lnL w="6350" cap="flat" cmpd="sng" algn="ctr">
                       <a:solidFill>
                         <a:srgbClr val="E8ECF1"/>
@@ -17620,7 +17478,7 @@
                     <a:bodyPr/>
                     <a:lstStyle/>
                     <a:p>
-                      <a:pPr indent="0" marL="0">
+                      <a:pPr marL="0" indent="0">
                         <a:buNone/>
                       </a:pPr>
                       <a:r>
@@ -17641,7 +17499,7 @@
                       </a:endParaRPr>
                     </a:p>
                   </a:txBody>
-                  <a:tcPr marL="91440" marR="91440" marT="45720" marB="45720">
+                  <a:tcPr>
                     <a:lnL w="6350" cap="flat" cmpd="sng" algn="ctr">
                       <a:solidFill>
                         <a:srgbClr val="E8ECF1"/>
@@ -17683,6 +17541,11 @@
                     </a:solidFill>
                   </a:tcPr>
                 </a:tc>
+                <a:extLst>
+                  <a:ext uri="{0D108BD9-81ED-4DB2-BD59-A6C34878D82A}">
+                    <a16:rowId xmlns:a16="http://schemas.microsoft.com/office/drawing/2014/main" val="10000"/>
+                  </a:ext>
+                </a:extLst>
               </a:tr>
               <a:tr h="237744">
                 <a:tc>
@@ -17690,7 +17553,7 @@
                     <a:bodyPr/>
                     <a:lstStyle/>
                     <a:p>
-                      <a:pPr indent="0" marL="0">
+                      <a:pPr marL="0" indent="0">
                         <a:buNone/>
                       </a:pPr>
                       <a:r>
@@ -17711,7 +17574,7 @@
                       </a:endParaRPr>
                     </a:p>
                   </a:txBody>
-                  <a:tcPr marL="91440" marR="91440" marT="45720" marB="45720">
+                  <a:tcPr>
                     <a:lnL w="6350" cap="flat" cmpd="sng" algn="ctr">
                       <a:solidFill>
                         <a:srgbClr val="E8ECF1"/>
@@ -17755,7 +17618,7 @@
                     <a:bodyPr/>
                     <a:lstStyle/>
                     <a:p>
-                      <a:pPr indent="0" marL="0">
+                      <a:pPr marL="0" indent="0">
                         <a:buNone/>
                       </a:pPr>
                       <a:r>
@@ -17776,7 +17639,7 @@
                       </a:endParaRPr>
                     </a:p>
                   </a:txBody>
-                  <a:tcPr marL="91440" marR="91440" marT="45720" marB="45720">
+                  <a:tcPr>
                     <a:lnL w="6350" cap="flat" cmpd="sng" algn="ctr">
                       <a:solidFill>
                         <a:srgbClr val="E8ECF1"/>
@@ -17820,7 +17683,7 @@
                     <a:bodyPr/>
                     <a:lstStyle/>
                     <a:p>
-                      <a:pPr indent="0" marL="0">
+                      <a:pPr marL="0" indent="0">
                         <a:buNone/>
                       </a:pPr>
                       <a:r>
@@ -17841,7 +17704,7 @@
                       </a:endParaRPr>
                     </a:p>
                   </a:txBody>
-                  <a:tcPr marL="91440" marR="91440" marT="45720" marB="45720">
+                  <a:tcPr>
                     <a:lnL w="6350" cap="flat" cmpd="sng" algn="ctr">
                       <a:solidFill>
                         <a:srgbClr val="E8ECF1"/>
@@ -17885,7 +17748,7 @@
                     <a:bodyPr/>
                     <a:lstStyle/>
                     <a:p>
-                      <a:pPr indent="0" marL="0">
+                      <a:pPr marL="0" indent="0">
                         <a:buNone/>
                       </a:pPr>
                       <a:r>
@@ -17906,7 +17769,7 @@
                       </a:endParaRPr>
                     </a:p>
                   </a:txBody>
-                  <a:tcPr marL="91440" marR="91440" marT="45720" marB="45720">
+                  <a:tcPr>
                     <a:lnL w="6350" cap="flat" cmpd="sng" algn="ctr">
                       <a:solidFill>
                         <a:srgbClr val="E8ECF1"/>
@@ -17950,7 +17813,7 @@
                     <a:bodyPr/>
                     <a:lstStyle/>
                     <a:p>
-                      <a:pPr indent="0" marL="0">
+                      <a:pPr marL="0" indent="0">
                         <a:buNone/>
                       </a:pPr>
                       <a:r>
@@ -17971,7 +17834,7 @@
                       </a:endParaRPr>
                     </a:p>
                   </a:txBody>
-                  <a:tcPr marL="91440" marR="91440" marT="45720" marB="45720">
+                  <a:tcPr>
                     <a:lnL w="6350" cap="flat" cmpd="sng" algn="ctr">
                       <a:solidFill>
                         <a:srgbClr val="E8ECF1"/>
@@ -18015,7 +17878,7 @@
                     <a:bodyPr/>
                     <a:lstStyle/>
                     <a:p>
-                      <a:pPr indent="0" marL="0">
+                      <a:pPr marL="0" indent="0">
                         <a:buNone/>
                       </a:pPr>
                       <a:r>
@@ -18036,7 +17899,7 @@
                       </a:endParaRPr>
                     </a:p>
                   </a:txBody>
-                  <a:tcPr marL="91440" marR="91440" marT="45720" marB="45720">
+                  <a:tcPr>
                     <a:lnL w="6350" cap="flat" cmpd="sng" algn="ctr">
                       <a:solidFill>
                         <a:srgbClr val="E8ECF1"/>
@@ -18075,6 +17938,11 @@
                     </a:lnB>
                   </a:tcPr>
                 </a:tc>
+                <a:extLst>
+                  <a:ext uri="{0D108BD9-81ED-4DB2-BD59-A6C34878D82A}">
+                    <a16:rowId xmlns:a16="http://schemas.microsoft.com/office/drawing/2014/main" val="10001"/>
+                  </a:ext>
+                </a:extLst>
               </a:tr>
               <a:tr h="237744">
                 <a:tc>
@@ -18082,7 +17950,7 @@
                     <a:bodyPr/>
                     <a:lstStyle/>
                     <a:p>
-                      <a:pPr indent="0" marL="0">
+                      <a:pPr marL="0" indent="0">
                         <a:buNone/>
                       </a:pPr>
                       <a:r>
@@ -18103,7 +17971,7 @@
                       </a:endParaRPr>
                     </a:p>
                   </a:txBody>
-                  <a:tcPr marL="91440" marR="91440" marT="45720" marB="45720">
+                  <a:tcPr>
                     <a:lnL w="6350" cap="flat" cmpd="sng" algn="ctr">
                       <a:solidFill>
                         <a:srgbClr val="E8ECF1"/>
@@ -18147,7 +18015,7 @@
                     <a:bodyPr/>
                     <a:lstStyle/>
                     <a:p>
-                      <a:pPr indent="0" marL="0">
+                      <a:pPr marL="0" indent="0">
                         <a:buNone/>
                       </a:pPr>
                       <a:r>
@@ -18168,7 +18036,7 @@
                       </a:endParaRPr>
                     </a:p>
                   </a:txBody>
-                  <a:tcPr marL="91440" marR="91440" marT="45720" marB="45720">
+                  <a:tcPr>
                     <a:lnL w="6350" cap="flat" cmpd="sng" algn="ctr">
                       <a:solidFill>
                         <a:srgbClr val="E8ECF1"/>
@@ -18212,7 +18080,7 @@
                     <a:bodyPr/>
                     <a:lstStyle/>
                     <a:p>
-                      <a:pPr indent="0" marL="0">
+                      <a:pPr marL="0" indent="0">
                         <a:buNone/>
                       </a:pPr>
                       <a:r>
@@ -18233,7 +18101,7 @@
                       </a:endParaRPr>
                     </a:p>
                   </a:txBody>
-                  <a:tcPr marL="91440" marR="91440" marT="45720" marB="45720">
+                  <a:tcPr>
                     <a:lnL w="6350" cap="flat" cmpd="sng" algn="ctr">
                       <a:solidFill>
                         <a:srgbClr val="E8ECF1"/>
@@ -18277,7 +18145,7 @@
                     <a:bodyPr/>
                     <a:lstStyle/>
                     <a:p>
-                      <a:pPr indent="0" marL="0">
+                      <a:pPr marL="0" indent="0">
                         <a:buNone/>
                       </a:pPr>
                       <a:r>
@@ -18298,7 +18166,7 @@
                       </a:endParaRPr>
                     </a:p>
                   </a:txBody>
-                  <a:tcPr marL="91440" marR="91440" marT="45720" marB="45720">
+                  <a:tcPr>
                     <a:lnL w="6350" cap="flat" cmpd="sng" algn="ctr">
                       <a:solidFill>
                         <a:srgbClr val="E8ECF1"/>
@@ -18342,7 +18210,7 @@
                     <a:bodyPr/>
                     <a:lstStyle/>
                     <a:p>
-                      <a:pPr indent="0" marL="0">
+                      <a:pPr marL="0" indent="0">
                         <a:buNone/>
                       </a:pPr>
                       <a:r>
@@ -18363,7 +18231,7 @@
                       </a:endParaRPr>
                     </a:p>
                   </a:txBody>
-                  <a:tcPr marL="91440" marR="91440" marT="45720" marB="45720">
+                  <a:tcPr>
                     <a:lnL w="6350" cap="flat" cmpd="sng" algn="ctr">
                       <a:solidFill>
                         <a:srgbClr val="E8ECF1"/>
@@ -18407,7 +18275,7 @@
                     <a:bodyPr/>
                     <a:lstStyle/>
                     <a:p>
-                      <a:pPr indent="0" marL="0">
+                      <a:pPr marL="0" indent="0">
                         <a:buNone/>
                       </a:pPr>
                       <a:r>
@@ -18428,7 +18296,7 @@
                       </a:endParaRPr>
                     </a:p>
                   </a:txBody>
-                  <a:tcPr marL="91440" marR="91440" marT="45720" marB="45720">
+                  <a:tcPr>
                     <a:lnL w="6350" cap="flat" cmpd="sng" algn="ctr">
                       <a:solidFill>
                         <a:srgbClr val="E8ECF1"/>
@@ -18467,6 +18335,11 @@
                     </a:lnB>
                   </a:tcPr>
                 </a:tc>
+                <a:extLst>
+                  <a:ext uri="{0D108BD9-81ED-4DB2-BD59-A6C34878D82A}">
+                    <a16:rowId xmlns:a16="http://schemas.microsoft.com/office/drawing/2014/main" val="10002"/>
+                  </a:ext>
+                </a:extLst>
               </a:tr>
               <a:tr h="237744">
                 <a:tc>
@@ -18474,7 +18347,7 @@
                     <a:bodyPr/>
                     <a:lstStyle/>
                     <a:p>
-                      <a:pPr indent="0" marL="0">
+                      <a:pPr marL="0" indent="0">
                         <a:buNone/>
                       </a:pPr>
                       <a:r>
@@ -18495,7 +18368,7 @@
                       </a:endParaRPr>
                     </a:p>
                   </a:txBody>
-                  <a:tcPr marL="91440" marR="91440" marT="45720" marB="45720">
+                  <a:tcPr>
                     <a:lnL w="6350" cap="flat" cmpd="sng" algn="ctr">
                       <a:solidFill>
                         <a:srgbClr val="E8ECF1"/>
@@ -18539,7 +18412,7 @@
                     <a:bodyPr/>
                     <a:lstStyle/>
                     <a:p>
-                      <a:pPr indent="0" marL="0">
+                      <a:pPr marL="0" indent="0">
                         <a:buNone/>
                       </a:pPr>
                       <a:r>
@@ -18560,7 +18433,7 @@
                       </a:endParaRPr>
                     </a:p>
                   </a:txBody>
-                  <a:tcPr marL="91440" marR="91440" marT="45720" marB="45720">
+                  <a:tcPr>
                     <a:lnL w="6350" cap="flat" cmpd="sng" algn="ctr">
                       <a:solidFill>
                         <a:srgbClr val="E8ECF1"/>
@@ -18604,7 +18477,7 @@
                     <a:bodyPr/>
                     <a:lstStyle/>
                     <a:p>
-                      <a:pPr indent="0" marL="0">
+                      <a:pPr marL="0" indent="0">
                         <a:buNone/>
                       </a:pPr>
                       <a:r>
@@ -18625,7 +18498,7 @@
                       </a:endParaRPr>
                     </a:p>
                   </a:txBody>
-                  <a:tcPr marL="91440" marR="91440" marT="45720" marB="45720">
+                  <a:tcPr>
                     <a:lnL w="6350" cap="flat" cmpd="sng" algn="ctr">
                       <a:solidFill>
                         <a:srgbClr val="E8ECF1"/>
@@ -18669,7 +18542,7 @@
                     <a:bodyPr/>
                     <a:lstStyle/>
                     <a:p>
-                      <a:pPr indent="0" marL="0">
+                      <a:pPr marL="0" indent="0">
                         <a:buNone/>
                       </a:pPr>
                       <a:r>
@@ -18690,7 +18563,7 @@
                       </a:endParaRPr>
                     </a:p>
                   </a:txBody>
-                  <a:tcPr marL="91440" marR="91440" marT="45720" marB="45720">
+                  <a:tcPr>
                     <a:lnL w="6350" cap="flat" cmpd="sng" algn="ctr">
                       <a:solidFill>
                         <a:srgbClr val="E8ECF1"/>
@@ -18734,7 +18607,7 @@
                     <a:bodyPr/>
                     <a:lstStyle/>
                     <a:p>
-                      <a:pPr indent="0" marL="0">
+                      <a:pPr marL="0" indent="0">
                         <a:buNone/>
                       </a:pPr>
                       <a:r>
@@ -18755,7 +18628,7 @@
                       </a:endParaRPr>
                     </a:p>
                   </a:txBody>
-                  <a:tcPr marL="91440" marR="91440" marT="45720" marB="45720">
+                  <a:tcPr>
                     <a:lnL w="6350" cap="flat" cmpd="sng" algn="ctr">
                       <a:solidFill>
                         <a:srgbClr val="E8ECF1"/>
@@ -18799,7 +18672,7 @@
                     <a:bodyPr/>
                     <a:lstStyle/>
                     <a:p>
-                      <a:pPr indent="0" marL="0">
+                      <a:pPr marL="0" indent="0">
                         <a:buNone/>
                       </a:pPr>
                       <a:r>
@@ -18820,7 +18693,7 @@
                       </a:endParaRPr>
                     </a:p>
                   </a:txBody>
-                  <a:tcPr marL="91440" marR="91440" marT="45720" marB="45720">
+                  <a:tcPr>
                     <a:lnL w="6350" cap="flat" cmpd="sng" algn="ctr">
                       <a:solidFill>
                         <a:srgbClr val="E8ECF1"/>
@@ -18859,6 +18732,11 @@
                     </a:lnB>
                   </a:tcPr>
                 </a:tc>
+                <a:extLst>
+                  <a:ext uri="{0D108BD9-81ED-4DB2-BD59-A6C34878D82A}">
+                    <a16:rowId xmlns:a16="http://schemas.microsoft.com/office/drawing/2014/main" val="10003"/>
+                  </a:ext>
+                </a:extLst>
               </a:tr>
               <a:tr h="237744">
                 <a:tc>
@@ -18866,7 +18744,7 @@
                     <a:bodyPr/>
                     <a:lstStyle/>
                     <a:p>
-                      <a:pPr indent="0" marL="0">
+                      <a:pPr marL="0" indent="0">
                         <a:buNone/>
                       </a:pPr>
                       <a:r>
@@ -18887,7 +18765,7 @@
                       </a:endParaRPr>
                     </a:p>
                   </a:txBody>
-                  <a:tcPr marL="91440" marR="91440" marT="45720" marB="45720">
+                  <a:tcPr>
                     <a:lnL w="6350" cap="flat" cmpd="sng" algn="ctr">
                       <a:solidFill>
                         <a:srgbClr val="E8ECF1"/>
@@ -18931,7 +18809,7 @@
                     <a:bodyPr/>
                     <a:lstStyle/>
                     <a:p>
-                      <a:pPr indent="0" marL="0">
+                      <a:pPr marL="0" indent="0">
                         <a:buNone/>
                       </a:pPr>
                       <a:r>
@@ -18952,7 +18830,7 @@
                       </a:endParaRPr>
                     </a:p>
                   </a:txBody>
-                  <a:tcPr marL="91440" marR="91440" marT="45720" marB="45720">
+                  <a:tcPr>
                     <a:lnL w="6350" cap="flat" cmpd="sng" algn="ctr">
                       <a:solidFill>
                         <a:srgbClr val="E8ECF1"/>
@@ -18996,7 +18874,7 @@
                     <a:bodyPr/>
                     <a:lstStyle/>
                     <a:p>
-                      <a:pPr indent="0" marL="0">
+                      <a:pPr marL="0" indent="0">
                         <a:buNone/>
                       </a:pPr>
                       <a:r>
@@ -19017,7 +18895,7 @@
                       </a:endParaRPr>
                     </a:p>
                   </a:txBody>
-                  <a:tcPr marL="91440" marR="91440" marT="45720" marB="45720">
+                  <a:tcPr>
                     <a:lnL w="6350" cap="flat" cmpd="sng" algn="ctr">
                       <a:solidFill>
                         <a:srgbClr val="E8ECF1"/>
@@ -19061,7 +18939,7 @@
                     <a:bodyPr/>
                     <a:lstStyle/>
                     <a:p>
-                      <a:pPr indent="0" marL="0">
+                      <a:pPr marL="0" indent="0">
                         <a:buNone/>
                       </a:pPr>
                       <a:r>
@@ -19082,7 +18960,7 @@
                       </a:endParaRPr>
                     </a:p>
                   </a:txBody>
-                  <a:tcPr marL="91440" marR="91440" marT="45720" marB="45720">
+                  <a:tcPr>
                     <a:lnL w="6350" cap="flat" cmpd="sng" algn="ctr">
                       <a:solidFill>
                         <a:srgbClr val="E8ECF1"/>
@@ -19126,7 +19004,7 @@
                     <a:bodyPr/>
                     <a:lstStyle/>
                     <a:p>
-                      <a:pPr indent="0" marL="0">
+                      <a:pPr marL="0" indent="0">
                         <a:buNone/>
                       </a:pPr>
                       <a:r>
@@ -19147,7 +19025,7 @@
                       </a:endParaRPr>
                     </a:p>
                   </a:txBody>
-                  <a:tcPr marL="91440" marR="91440" marT="45720" marB="45720">
+                  <a:tcPr>
                     <a:lnL w="6350" cap="flat" cmpd="sng" algn="ctr">
                       <a:solidFill>
                         <a:srgbClr val="E8ECF1"/>
@@ -19191,7 +19069,7 @@
                     <a:bodyPr/>
                     <a:lstStyle/>
                     <a:p>
-                      <a:pPr indent="0" marL="0">
+                      <a:pPr marL="0" indent="0">
                         <a:buNone/>
                       </a:pPr>
                       <a:r>
@@ -19212,7 +19090,7 @@
                       </a:endParaRPr>
                     </a:p>
                   </a:txBody>
-                  <a:tcPr marL="91440" marR="91440" marT="45720" marB="45720">
+                  <a:tcPr>
                     <a:lnL w="6350" cap="flat" cmpd="sng" algn="ctr">
                       <a:solidFill>
                         <a:srgbClr val="E8ECF1"/>
@@ -19251,6 +19129,11 @@
                     </a:lnB>
                   </a:tcPr>
                 </a:tc>
+                <a:extLst>
+                  <a:ext uri="{0D108BD9-81ED-4DB2-BD59-A6C34878D82A}">
+                    <a16:rowId xmlns:a16="http://schemas.microsoft.com/office/drawing/2014/main" val="10004"/>
+                  </a:ext>
+                </a:extLst>
               </a:tr>
               <a:tr h="237744">
                 <a:tc>
@@ -19258,7 +19141,7 @@
                     <a:bodyPr/>
                     <a:lstStyle/>
                     <a:p>
-                      <a:pPr indent="0" marL="0">
+                      <a:pPr marL="0" indent="0">
                         <a:buNone/>
                       </a:pPr>
                       <a:r>
@@ -19279,7 +19162,7 @@
                       </a:endParaRPr>
                     </a:p>
                   </a:txBody>
-                  <a:tcPr marL="91440" marR="91440" marT="45720" marB="45720">
+                  <a:tcPr>
                     <a:lnL w="6350" cap="flat" cmpd="sng" algn="ctr">
                       <a:solidFill>
                         <a:srgbClr val="E8ECF1"/>
@@ -19323,7 +19206,7 @@
                     <a:bodyPr/>
                     <a:lstStyle/>
                     <a:p>
-                      <a:pPr indent="0" marL="0">
+                      <a:pPr marL="0" indent="0">
                         <a:buNone/>
                       </a:pPr>
                       <a:r>
@@ -19344,7 +19227,7 @@
                       </a:endParaRPr>
                     </a:p>
                   </a:txBody>
-                  <a:tcPr marL="91440" marR="91440" marT="45720" marB="45720">
+                  <a:tcPr>
                     <a:lnL w="6350" cap="flat" cmpd="sng" algn="ctr">
                       <a:solidFill>
                         <a:srgbClr val="E8ECF1"/>
@@ -19388,7 +19271,7 @@
                     <a:bodyPr/>
                     <a:lstStyle/>
                     <a:p>
-                      <a:pPr indent="0" marL="0">
+                      <a:pPr marL="0" indent="0">
                         <a:buNone/>
                       </a:pPr>
                       <a:r>
@@ -19409,7 +19292,7 @@
                       </a:endParaRPr>
                     </a:p>
                   </a:txBody>
-                  <a:tcPr marL="91440" marR="91440" marT="45720" marB="45720">
+                  <a:tcPr>
                     <a:lnL w="6350" cap="flat" cmpd="sng" algn="ctr">
                       <a:solidFill>
                         <a:srgbClr val="E8ECF1"/>
@@ -19453,7 +19336,7 @@
                     <a:bodyPr/>
                     <a:lstStyle/>
                     <a:p>
-                      <a:pPr indent="0" marL="0">
+                      <a:pPr marL="0" indent="0">
                         <a:buNone/>
                       </a:pPr>
                       <a:r>
@@ -19474,7 +19357,7 @@
                       </a:endParaRPr>
                     </a:p>
                   </a:txBody>
-                  <a:tcPr marL="91440" marR="91440" marT="45720" marB="45720">
+                  <a:tcPr>
                     <a:lnL w="6350" cap="flat" cmpd="sng" algn="ctr">
                       <a:solidFill>
                         <a:srgbClr val="E8ECF1"/>
@@ -19518,7 +19401,7 @@
                     <a:bodyPr/>
                     <a:lstStyle/>
                     <a:p>
-                      <a:pPr indent="0" marL="0">
+                      <a:pPr marL="0" indent="0">
                         <a:buNone/>
                       </a:pPr>
                       <a:r>
@@ -19539,7 +19422,7 @@
                       </a:endParaRPr>
                     </a:p>
                   </a:txBody>
-                  <a:tcPr marL="91440" marR="91440" marT="45720" marB="45720">
+                  <a:tcPr>
                     <a:lnL w="6350" cap="flat" cmpd="sng" algn="ctr">
                       <a:solidFill>
                         <a:srgbClr val="E8ECF1"/>
@@ -19583,7 +19466,7 @@
                     <a:bodyPr/>
                     <a:lstStyle/>
                     <a:p>
-                      <a:pPr indent="0" marL="0">
+                      <a:pPr marL="0" indent="0">
                         <a:buNone/>
                       </a:pPr>
                       <a:r>
@@ -19604,7 +19487,7 @@
                       </a:endParaRPr>
                     </a:p>
                   </a:txBody>
-                  <a:tcPr marL="91440" marR="91440" marT="45720" marB="45720">
+                  <a:tcPr>
                     <a:lnL w="6350" cap="flat" cmpd="sng" algn="ctr">
                       <a:solidFill>
                         <a:srgbClr val="E8ECF1"/>
@@ -19643,6 +19526,11 @@
                     </a:lnB>
                   </a:tcPr>
                 </a:tc>
+                <a:extLst>
+                  <a:ext uri="{0D108BD9-81ED-4DB2-BD59-A6C34878D82A}">
+                    <a16:rowId xmlns:a16="http://schemas.microsoft.com/office/drawing/2014/main" val="10005"/>
+                  </a:ext>
+                </a:extLst>
               </a:tr>
             </a:tbl>
           </a:graphicData>
@@ -19667,7 +19555,7 @@
           </a:solidFill>
           <a:ln/>
           <a:effectLst>
-            <a:outerShdw sx="100000" sy="100000" kx="0" ky="0" algn="bl" rotWithShape="0" blurRad="50800" dist="19050" dir="8100000">
+            <a:outerShdw blurRad="50800" dist="19050" dir="8100000" algn="bl" rotWithShape="0">
               <a:srgbClr val="000000">
                 <a:alpha val="8000"/>
               </a:srgbClr>
@@ -19696,7 +19584,7 @@
           <a:bodyPr wrap="square" lIns="0" tIns="0" rIns="0" bIns="0" rtlCol="0" anchor="ctr"/>
           <a:lstStyle/>
           <a:p>
-            <a:pPr indent="0" marL="0">
+            <a:pPr marL="0" indent="0">
               <a:buNone/>
             </a:pPr>
             <a:r>
@@ -19735,7 +19623,7 @@
           <a:bodyPr wrap="square" lIns="0" tIns="0" rIns="0" bIns="0" rtlCol="0" anchor="ctr"/>
           <a:lstStyle/>
           <a:p>
-            <a:pPr indent="0" marL="0">
+            <a:pPr marL="0" indent="0">
               <a:buNone/>
             </a:pPr>
             <a:r>
@@ -19749,9 +19637,6 @@
               </a:rPr>
               <a:t>行业普适性：</a:t>
             </a:r>
-            <a:pPr indent="0" marL="0">
-              <a:buNone/>
-            </a:pPr>
             <a:r>
               <a:rPr lang="en-US" sz="1000" dirty="0">
                 <a:solidFill>
@@ -19788,7 +19673,7 @@
           <a:bodyPr wrap="square" lIns="0" tIns="0" rIns="0" bIns="0" rtlCol="0" anchor="ctr"/>
           <a:lstStyle/>
           <a:p>
-            <a:pPr indent="0" marL="0">
+            <a:pPr marL="0" indent="0">
               <a:buNone/>
             </a:pPr>
             <a:r>
@@ -19802,9 +19687,6 @@
               </a:rPr>
               <a:t>回撤一致性：</a:t>
             </a:r>
-            <a:pPr indent="0" marL="0">
-              <a:buNone/>
-            </a:pPr>
             <a:r>
               <a:rPr lang="en-US" sz="1000" dirty="0">
                 <a:solidFill>
@@ -19841,7 +19723,7 @@
           <a:bodyPr wrap="square" lIns="0" tIns="0" rIns="0" bIns="0" rtlCol="0" anchor="ctr"/>
           <a:lstStyle/>
           <a:p>
-            <a:pPr indent="0" marL="0">
+            <a:pPr marL="0" indent="0">
               <a:buNone/>
             </a:pPr>
             <a:r>
@@ -19855,9 +19737,6 @@
               </a:rPr>
               <a:t>超额稳健性：</a:t>
             </a:r>
-            <a:pPr indent="0" marL="0">
-              <a:buNone/>
-            </a:pPr>
             <a:r>
               <a:rPr lang="en-US" sz="1000" dirty="0">
                 <a:solidFill>
@@ -19894,7 +19773,7 @@
           <a:bodyPr wrap="square" lIns="0" tIns="0" rIns="0" bIns="0" rtlCol="0" anchor="ctr"/>
           <a:lstStyle/>
           <a:p>
-            <a:pPr indent="0" marL="0">
+            <a:pPr marL="0" indent="0">
               <a:buNone/>
             </a:pPr>
             <a:r>
@@ -19908,9 +19787,6 @@
               </a:rPr>
               <a:t>对比单一指标：</a:t>
             </a:r>
-            <a:pPr indent="0" marL="0">
-              <a:buNone/>
-            </a:pPr>
             <a:r>
               <a:rPr lang="en-US" sz="1000" dirty="0">
                 <a:solidFill>
@@ -19947,7 +19823,7 @@
           <a:bodyPr wrap="square" rtlCol="0" anchor="ctr"/>
           <a:lstStyle/>
           <a:p>
-            <a:pPr algn="r" indent="0" marL="0">
+            <a:pPr marL="0" indent="0" algn="r">
               <a:buNone/>
             </a:pPr>
             <a:r>
@@ -20266,4 +20142,299 @@
     </a:ext>
   </a:extLst>
 </a:theme>
+</file>
+
+<file path=ppt/theme/theme2.xml><?xml version="1.0" encoding="utf-8"?>
+<a:theme xmlns:a="http://schemas.openxmlformats.org/drawingml/2006/main" name="Office 主题​​">
+  <a:themeElements>
+    <a:clrScheme name="Office">
+      <a:dk1>
+        <a:sysClr val="windowText" lastClr="000000"/>
+      </a:dk1>
+      <a:lt1>
+        <a:sysClr val="window" lastClr="FFFFFF"/>
+      </a:lt1>
+      <a:dk2>
+        <a:srgbClr val="44546A"/>
+      </a:dk2>
+      <a:lt2>
+        <a:srgbClr val="E7E6E6"/>
+      </a:lt2>
+      <a:accent1>
+        <a:srgbClr val="4472C4"/>
+      </a:accent1>
+      <a:accent2>
+        <a:srgbClr val="ED7D31"/>
+      </a:accent2>
+      <a:accent3>
+        <a:srgbClr val="A5A5A5"/>
+      </a:accent3>
+      <a:accent4>
+        <a:srgbClr val="FFC000"/>
+      </a:accent4>
+      <a:accent5>
+        <a:srgbClr val="5B9BD5"/>
+      </a:accent5>
+      <a:accent6>
+        <a:srgbClr val="70AD47"/>
+      </a:accent6>
+      <a:hlink>
+        <a:srgbClr val="0563C1"/>
+      </a:hlink>
+      <a:folHlink>
+        <a:srgbClr val="954F72"/>
+      </a:folHlink>
+    </a:clrScheme>
+    <a:fontScheme name="Office">
+      <a:majorFont>
+        <a:latin typeface="等线 Light" panose="020F0302020204030204"/>
+        <a:ea typeface=""/>
+        <a:cs typeface=""/>
+        <a:font script="Jpan" typeface="游ゴシック Light"/>
+        <a:font script="Hang" typeface="맑은 고딕"/>
+        <a:font script="Hans" typeface="等线 Light"/>
+        <a:font script="Hant" typeface="新細明體"/>
+        <a:font script="Arab" typeface="Times New Roman"/>
+        <a:font script="Hebr" typeface="Times New Roman"/>
+        <a:font script="Thai" typeface="Angsana New"/>
+        <a:font script="Ethi" typeface="Nyala"/>
+        <a:font script="Beng" typeface="Vrinda"/>
+        <a:font script="Gujr" typeface="Shruti"/>
+        <a:font script="Khmr" typeface="MoolBoran"/>
+        <a:font script="Knda" typeface="Tunga"/>
+        <a:font script="Guru" typeface="Raavi"/>
+        <a:font script="Cans" typeface="Euphemia"/>
+        <a:font script="Cher" typeface="Plantagenet Cherokee"/>
+        <a:font script="Yiii" typeface="Microsoft Yi Baiti"/>
+        <a:font script="Tibt" typeface="Microsoft Himalaya"/>
+        <a:font script="Thaa" typeface="MV Boli"/>
+        <a:font script="Deva" typeface="Mangal"/>
+        <a:font script="Telu" typeface="Gautami"/>
+        <a:font script="Taml" typeface="Latha"/>
+        <a:font script="Syrc" typeface="Estrangelo Edessa"/>
+        <a:font script="Orya" typeface="Kalinga"/>
+        <a:font script="Mlym" typeface="Kartika"/>
+        <a:font script="Laoo" typeface="DokChampa"/>
+        <a:font script="Sinh" typeface="Iskoola Pota"/>
+        <a:font script="Mong" typeface="Mongolian Baiti"/>
+        <a:font script="Viet" typeface="Times New Roman"/>
+        <a:font script="Uigh" typeface="Microsoft Uighur"/>
+        <a:font script="Geor" typeface="Sylfaen"/>
+        <a:font script="Armn" typeface="Arial"/>
+        <a:font script="Bugi" typeface="Leelawadee UI"/>
+        <a:font script="Bopo" typeface="Microsoft JhengHei"/>
+        <a:font script="Java" typeface="Javanese Text"/>
+        <a:font script="Lisu" typeface="Segoe UI"/>
+        <a:font script="Mymr" typeface="Myanmar Text"/>
+        <a:font script="Nkoo" typeface="Ebrima"/>
+        <a:font script="Olck" typeface="Nirmala UI"/>
+        <a:font script="Osma" typeface="Ebrima"/>
+        <a:font script="Phag" typeface="Phagspa"/>
+        <a:font script="Syrn" typeface="Estrangelo Edessa"/>
+        <a:font script="Syrj" typeface="Estrangelo Edessa"/>
+        <a:font script="Syre" typeface="Estrangelo Edessa"/>
+        <a:font script="Sora" typeface="Nirmala UI"/>
+        <a:font script="Tale" typeface="Microsoft Tai Le"/>
+        <a:font script="Talu" typeface="Microsoft New Tai Lue"/>
+        <a:font script="Tfng" typeface="Ebrima"/>
+      </a:majorFont>
+      <a:minorFont>
+        <a:latin typeface="等线" panose="020F0502020204030204"/>
+        <a:ea typeface=""/>
+        <a:cs typeface=""/>
+        <a:font script="Jpan" typeface="游ゴシック"/>
+        <a:font script="Hang" typeface="맑은 고딕"/>
+        <a:font script="Hans" typeface="等线"/>
+        <a:font script="Hant" typeface="新細明體"/>
+        <a:font script="Arab" typeface="Arial"/>
+        <a:font script="Hebr" typeface="Arial"/>
+        <a:font script="Thai" typeface="Cordia New"/>
+        <a:font script="Ethi" typeface="Nyala"/>
+        <a:font script="Beng" typeface="Vrinda"/>
+        <a:font script="Gujr" typeface="Shruti"/>
+        <a:font script="Khmr" typeface="DaunPenh"/>
+        <a:font script="Knda" typeface="Tunga"/>
+        <a:font script="Guru" typeface="Raavi"/>
+        <a:font script="Cans" typeface="Euphemia"/>
+        <a:font script="Cher" typeface="Plantagenet Cherokee"/>
+        <a:font script="Yiii" typeface="Microsoft Yi Baiti"/>
+        <a:font script="Tibt" typeface="Microsoft Himalaya"/>
+        <a:font script="Thaa" typeface="MV Boli"/>
+        <a:font script="Deva" typeface="Mangal"/>
+        <a:font script="Telu" typeface="Gautami"/>
+        <a:font script="Taml" typeface="Latha"/>
+        <a:font script="Syrc" typeface="Estrangelo Edessa"/>
+        <a:font script="Orya" typeface="Kalinga"/>
+        <a:font script="Mlym" typeface="Kartika"/>
+        <a:font script="Laoo" typeface="DokChampa"/>
+        <a:font script="Sinh" typeface="Iskoola Pota"/>
+        <a:font script="Mong" typeface="Mongolian Baiti"/>
+        <a:font script="Viet" typeface="Arial"/>
+        <a:font script="Uigh" typeface="Microsoft Uighur"/>
+        <a:font script="Geor" typeface="Sylfaen"/>
+        <a:font script="Armn" typeface="Arial"/>
+        <a:font script="Bugi" typeface="Leelawadee UI"/>
+        <a:font script="Bopo" typeface="Microsoft JhengHei"/>
+        <a:font script="Java" typeface="Javanese Text"/>
+        <a:font script="Lisu" typeface="Segoe UI"/>
+        <a:font script="Mymr" typeface="Myanmar Text"/>
+        <a:font script="Nkoo" typeface="Ebrima"/>
+        <a:font script="Olck" typeface="Nirmala UI"/>
+        <a:font script="Osma" typeface="Ebrima"/>
+        <a:font script="Phag" typeface="Phagspa"/>
+        <a:font script="Syrn" typeface="Estrangelo Edessa"/>
+        <a:font script="Syrj" typeface="Estrangelo Edessa"/>
+        <a:font script="Syre" typeface="Estrangelo Edessa"/>
+        <a:font script="Sora" typeface="Nirmala UI"/>
+        <a:font script="Tale" typeface="Microsoft Tai Le"/>
+        <a:font script="Talu" typeface="Microsoft New Tai Lue"/>
+        <a:font script="Tfng" typeface="Ebrima"/>
+      </a:minorFont>
+    </a:fontScheme>
+    <a:fmtScheme name="Office">
+      <a:fillStyleLst>
+        <a:solidFill>
+          <a:schemeClr val="phClr"/>
+        </a:solidFill>
+        <a:gradFill rotWithShape="1">
+          <a:gsLst>
+            <a:gs pos="0">
+              <a:schemeClr val="phClr">
+                <a:lumMod val="110000"/>
+                <a:satMod val="105000"/>
+                <a:tint val="67000"/>
+              </a:schemeClr>
+            </a:gs>
+            <a:gs pos="50000">
+              <a:schemeClr val="phClr">
+                <a:lumMod val="105000"/>
+                <a:satMod val="103000"/>
+                <a:tint val="73000"/>
+              </a:schemeClr>
+            </a:gs>
+            <a:gs pos="100000">
+              <a:schemeClr val="phClr">
+                <a:lumMod val="105000"/>
+                <a:satMod val="109000"/>
+                <a:tint val="81000"/>
+              </a:schemeClr>
+            </a:gs>
+          </a:gsLst>
+          <a:lin ang="5400000" scaled="0"/>
+        </a:gradFill>
+        <a:gradFill rotWithShape="1">
+          <a:gsLst>
+            <a:gs pos="0">
+              <a:schemeClr val="phClr">
+                <a:satMod val="103000"/>
+                <a:lumMod val="102000"/>
+                <a:tint val="94000"/>
+              </a:schemeClr>
+            </a:gs>
+            <a:gs pos="50000">
+              <a:schemeClr val="phClr">
+                <a:satMod val="110000"/>
+                <a:lumMod val="100000"/>
+                <a:shade val="100000"/>
+              </a:schemeClr>
+            </a:gs>
+            <a:gs pos="100000">
+              <a:schemeClr val="phClr">
+                <a:lumMod val="99000"/>
+                <a:satMod val="120000"/>
+                <a:shade val="78000"/>
+              </a:schemeClr>
+            </a:gs>
+          </a:gsLst>
+          <a:lin ang="5400000" scaled="0"/>
+        </a:gradFill>
+      </a:fillStyleLst>
+      <a:lnStyleLst>
+        <a:ln w="6350" cap="flat" cmpd="sng" algn="ctr">
+          <a:solidFill>
+            <a:schemeClr val="phClr"/>
+          </a:solidFill>
+          <a:prstDash val="solid"/>
+          <a:miter lim="800000"/>
+        </a:ln>
+        <a:ln w="12700" cap="flat" cmpd="sng" algn="ctr">
+          <a:solidFill>
+            <a:schemeClr val="phClr"/>
+          </a:solidFill>
+          <a:prstDash val="solid"/>
+          <a:miter lim="800000"/>
+        </a:ln>
+        <a:ln w="19050" cap="flat" cmpd="sng" algn="ctr">
+          <a:solidFill>
+            <a:schemeClr val="phClr"/>
+          </a:solidFill>
+          <a:prstDash val="solid"/>
+          <a:miter lim="800000"/>
+        </a:ln>
+      </a:lnStyleLst>
+      <a:effectStyleLst>
+        <a:effectStyle>
+          <a:effectLst/>
+        </a:effectStyle>
+        <a:effectStyle>
+          <a:effectLst/>
+        </a:effectStyle>
+        <a:effectStyle>
+          <a:effectLst>
+            <a:outerShdw blurRad="57150" dist="19050" dir="5400000" algn="ctr" rotWithShape="0">
+              <a:srgbClr val="000000">
+                <a:alpha val="63000"/>
+              </a:srgbClr>
+            </a:outerShdw>
+          </a:effectLst>
+        </a:effectStyle>
+      </a:effectStyleLst>
+      <a:bgFillStyleLst>
+        <a:solidFill>
+          <a:schemeClr val="phClr"/>
+        </a:solidFill>
+        <a:solidFill>
+          <a:schemeClr val="phClr">
+            <a:tint val="95000"/>
+            <a:satMod val="170000"/>
+          </a:schemeClr>
+        </a:solidFill>
+        <a:gradFill rotWithShape="1">
+          <a:gsLst>
+            <a:gs pos="0">
+              <a:schemeClr val="phClr">
+                <a:tint val="93000"/>
+                <a:satMod val="150000"/>
+                <a:shade val="98000"/>
+                <a:lumMod val="102000"/>
+              </a:schemeClr>
+            </a:gs>
+            <a:gs pos="50000">
+              <a:schemeClr val="phClr">
+                <a:tint val="98000"/>
+                <a:satMod val="130000"/>
+                <a:shade val="90000"/>
+                <a:lumMod val="103000"/>
+              </a:schemeClr>
+            </a:gs>
+            <a:gs pos="100000">
+              <a:schemeClr val="phClr">
+                <a:shade val="63000"/>
+                <a:satMod val="120000"/>
+              </a:schemeClr>
+            </a:gs>
+          </a:gsLst>
+          <a:lin ang="5400000" scaled="0"/>
+        </a:gradFill>
+      </a:bgFillStyleLst>
+    </a:fmtScheme>
+  </a:themeElements>
+  <a:objectDefaults/>
+  <a:extraClrSchemeLst/>
+  <a:extLst>
+    <a:ext uri="{05A4C25C-085E-4340-85A3-A5531E510DB2}">
+      <thm15:themeFamily xmlns:thm15="http://schemas.microsoft.com/office/thememl/2012/main" name="Office Theme" id="{62F939B6-93AF-4DB8-9C6B-D6C7DFDC589F}" vid="{4A3C46E8-61CC-4603-A589-7422A47A8E4A}"/>
+    </a:ext>
+  </a:extLst>
+</a:theme>
 </file>
--- a/ppt/答辩PPT_v3.pptx
+++ b/ppt/答辩PPT_v3.pptx
@@ -4,9 +4,6 @@
   <p:sldMasterIdLst>
     <p:sldMasterId id="2147483648" r:id="rId1"/>
   </p:sldMasterIdLst>
-  <p:notesMasterIdLst>
-    <p:notesMasterId r:id="rId15"/>
-  </p:notesMasterIdLst>
   <p:sldIdLst>
     <p:sldId id="256" r:id="rId2"/>
     <p:sldId id="257" r:id="rId3"/>
@@ -22,7 +19,10 @@
     <p:sldId id="267" r:id="rId13"/>
     <p:sldId id="268" r:id="rId14"/>
   </p:sldIdLst>
-  <p:sldSz cx="9144000" cy="5143500" type="screen16x9"/>
+  <p:notesMasterIdLst>
+    <p:notesMasterId r:id="rId15"/>
+  </p:notesMasterIdLst>
+  <p:sldSz cx="9144000" cy="5143500"/>
   <p:notesSz cx="5143500" cy="9144000"/>
   <p:defaultTextStyle>
     <a:lvl1pPr marL="0" algn="l" defTabSz="914400" rtl="0" eaLnBrk="1" latinLnBrk="0" hangingPunct="1">
@@ -116,11 +116,6 @@
       </a:defRPr>
     </a:lvl9pPr>
   </p:defaultTextStyle>
-  <p:extLst>
-    <p:ext uri="{EFAFB233-063F-42B5-8137-9DF3F51BA10A}">
-      <p15:sldGuideLst xmlns:p15="http://schemas.microsoft.com/office/powerpoint/2012/main"/>
-    </p:ext>
-  </p:extLst>
 </p:presentation>
 </file>
 
@@ -146,10 +141,234 @@
           <a:chExt cx="0" cy="0"/>
         </a:xfrm>
       </p:grpSpPr>
+      <p:sp>
+        <p:nvSpPr>
+          <p:cNvPr id="2" name="Header Placeholder 1"/>
+          <p:cNvSpPr>
+            <a:spLocks noGrp="1"/>
+          </p:cNvSpPr>
+          <p:nvPr>
+            <p:ph type="hdr" sz="quarter"/>
+          </p:nvPr>
+        </p:nvSpPr>
+        <p:spPr>
+          <a:xfrm>
+            <a:off x="0" y="0"/>
+            <a:ext cx="2971800" cy="458788"/>
+          </a:xfrm>
+          <a:prstGeom prst="rect">
+            <a:avLst/>
+          </a:prstGeom>
+        </p:spPr>
+        <p:txBody>
+          <a:bodyPr vert="horz" lIns="91440" tIns="45720" rIns="91440" bIns="45720" rtlCol="0"/>
+          <a:lstStyle>
+            <a:lvl1pPr algn="l">
+              <a:defRPr sz="1200"/>
+            </a:lvl1pPr>
+          </a:lstStyle>
+          <a:p>
+            <a:endParaRPr lang="en-US"/>
+          </a:p>
+        </p:txBody>
+      </p:sp>
+      <p:sp>
+        <p:nvSpPr>
+          <p:cNvPr id="3" name="Date Placeholder 2"/>
+          <p:cNvSpPr>
+            <a:spLocks noGrp="1"/>
+          </p:cNvSpPr>
+          <p:nvPr>
+            <p:ph type="dt" idx="1"/>
+          </p:nvPr>
+        </p:nvSpPr>
+        <p:spPr>
+          <a:xfrm>
+            <a:off x="3884613" y="0"/>
+            <a:ext cx="2971800" cy="458788"/>
+          </a:xfrm>
+          <a:prstGeom prst="rect">
+            <a:avLst/>
+          </a:prstGeom>
+        </p:spPr>
+        <p:txBody>
+          <a:bodyPr vert="horz" lIns="91440" tIns="45720" rIns="91440" bIns="45720" rtlCol="0"/>
+          <a:lstStyle>
+            <a:lvl1pPr algn="r">
+              <a:defRPr sz="1200"/>
+            </a:lvl1pPr>
+          </a:lstStyle>
+          <a:p>
+            <a:fld id="{5282F153-3F37-0F45-9E97-73ACFA13230C}" type="datetimeFigureOut">
+              <a:rPr lang="en-US"/>
+              <a:t>7/23/19</a:t>
+            </a:fld>
+            <a:endParaRPr lang="en-US"/>
+          </a:p>
+        </p:txBody>
+      </p:sp>
+      <p:sp>
+        <p:nvSpPr>
+          <p:cNvPr id="4" name="Slide Image Placeholder 3"/>
+          <p:cNvSpPr>
+            <a:spLocks noGrp="1" noRot="1" noChangeAspect="1"/>
+          </p:cNvSpPr>
+          <p:nvPr>
+            <p:ph type="sldImg" idx="2"/>
+          </p:nvPr>
+        </p:nvSpPr>
+        <p:spPr>
+          <a:xfrm>
+            <a:off x="685800" y="1143000"/>
+            <a:ext cx="5486400" cy="3086100"/>
+          </a:xfrm>
+          <a:prstGeom prst="rect">
+            <a:avLst/>
+          </a:prstGeom>
+          <a:noFill/>
+          <a:ln w="12700">
+            <a:solidFill>
+              <a:prstClr val="black"/>
+            </a:solidFill>
+          </a:ln>
+        </p:spPr>
+        <p:txBody>
+          <a:bodyPr vert="horz" lIns="91440" tIns="45720" rIns="91440" bIns="45720" rtlCol="0" anchor="ctr"/>
+          <a:lstStyle/>
+          <a:p>
+            <a:endParaRPr lang="en-US"/>
+          </a:p>
+        </p:txBody>
+      </p:sp>
+      <p:sp>
+        <p:nvSpPr>
+          <p:cNvPr id="5" name="Notes Placeholder 4"/>
+          <p:cNvSpPr>
+            <a:spLocks noGrp="1"/>
+          </p:cNvSpPr>
+          <p:nvPr>
+            <p:ph type="body" sz="quarter" idx="3"/>
+          </p:nvPr>
+        </p:nvSpPr>
+        <p:spPr>
+          <a:xfrm>
+            <a:off x="685800" y="4400550"/>
+            <a:ext cx="5486400" cy="3600450"/>
+          </a:xfrm>
+          <a:prstGeom prst="rect">
+            <a:avLst/>
+          </a:prstGeom>
+        </p:spPr>
+        <p:txBody>
+          <a:bodyPr vert="horz" lIns="91440" tIns="45720" rIns="91440" bIns="45720" rtlCol="0"/>
+          <a:lstStyle/>
+          <a:p>
+            <a:pPr lvl="0"/>
+            <a:r>
+              <a:rPr lang="en-US"/>
+              <a:t>Click to edit Master text styles</a:t>
+            </a:r>
+          </a:p>
+          <a:p>
+            <a:pPr lvl="1"/>
+            <a:r>
+              <a:rPr lang="en-US"/>
+              <a:t>Second level</a:t>
+            </a:r>
+          </a:p>
+          <a:p>
+            <a:pPr lvl="2"/>
+            <a:r>
+              <a:rPr lang="en-US"/>
+              <a:t>Third level</a:t>
+            </a:r>
+          </a:p>
+          <a:p>
+            <a:pPr lvl="3"/>
+            <a:r>
+              <a:rPr lang="en-US"/>
+              <a:t>Fourth level</a:t>
+            </a:r>
+          </a:p>
+          <a:p>
+            <a:pPr lvl="4"/>
+            <a:r>
+              <a:rPr lang="en-US"/>
+              <a:t>Fifth level</a:t>
+            </a:r>
+          </a:p>
+        </p:txBody>
+      </p:sp>
+      <p:sp>
+        <p:nvSpPr>
+          <p:cNvPr id="6" name="Footer Placeholder 5"/>
+          <p:cNvSpPr>
+            <a:spLocks noGrp="1"/>
+          </p:cNvSpPr>
+          <p:nvPr>
+            <p:ph type="ftr" sz="quarter" idx="4"/>
+          </p:nvPr>
+        </p:nvSpPr>
+        <p:spPr>
+          <a:xfrm>
+            <a:off x="0" y="8685213"/>
+            <a:ext cx="2971800" cy="458787"/>
+          </a:xfrm>
+          <a:prstGeom prst="rect">
+            <a:avLst/>
+          </a:prstGeom>
+        </p:spPr>
+        <p:txBody>
+          <a:bodyPr vert="horz" lIns="91440" tIns="45720" rIns="91440" bIns="45720" rtlCol="0" anchor="b"/>
+          <a:lstStyle>
+            <a:lvl1pPr algn="l">
+              <a:defRPr sz="1200"/>
+            </a:lvl1pPr>
+          </a:lstStyle>
+          <a:p>
+            <a:endParaRPr lang="en-US"/>
+          </a:p>
+        </p:txBody>
+      </p:sp>
+      <p:sp>
+        <p:nvSpPr>
+          <p:cNvPr id="7" name="Slide Number Placeholder 6"/>
+          <p:cNvSpPr>
+            <a:spLocks noGrp="1"/>
+          </p:cNvSpPr>
+          <p:nvPr>
+            <p:ph type="sldNum" sz="quarter" idx="5"/>
+          </p:nvPr>
+        </p:nvSpPr>
+        <p:spPr>
+          <a:xfrm>
+            <a:off x="3884613" y="8685213"/>
+            <a:ext cx="2971800" cy="458787"/>
+          </a:xfrm>
+          <a:prstGeom prst="rect">
+            <a:avLst/>
+          </a:prstGeom>
+        </p:spPr>
+        <p:txBody>
+          <a:bodyPr vert="horz" lIns="91440" tIns="45720" rIns="91440" bIns="45720" rtlCol="0" anchor="b"/>
+          <a:lstStyle>
+            <a:lvl1pPr algn="r">
+              <a:defRPr sz="1200"/>
+            </a:lvl1pPr>
+          </a:lstStyle>
+          <a:p>
+            <a:fld id="{CE5E9CC1-C706-0F49-92D6-E571CC5EEA8F}" type="slidenum">
+              <a:rPr lang="en-US"/>
+              <a:t>‹#›</a:t>
+            </a:fld>
+            <a:endParaRPr lang="en-US"/>
+          </a:p>
+        </p:txBody>
+      </p:sp>
     </p:spTree>
     <p:extLst>
       <p:ext uri="{BB962C8B-B14F-4D97-AF65-F5344CB8AC3E}">
-        <p14:creationId xmlns:p14="http://schemas.microsoft.com/office/powerpoint/2010/main" val="2145348221"/>
+        <p14:creationId xmlns:p14="http://schemas.microsoft.com/office/powerpoint/2010/main" val="1024086991"/>
       </p:ext>
     </p:extLst>
   </p:cSld>
@@ -293,6 +512,10 @@
           <a:bodyPr/>
           <a:lstStyle/>
           <a:p>
+            <a:r>
+              <a:rPr lang="en-US" dirty="0"/>
+              <a:t/>
+            </a:r>
             <a:endParaRPr lang="en-US" dirty="0"/>
           </a:p>
         </p:txBody>
@@ -377,6 +600,10 @@
           <a:bodyPr/>
           <a:lstStyle/>
           <a:p>
+            <a:r>
+              <a:rPr lang="en-US" dirty="0"/>
+              <a:t/>
+            </a:r>
             <a:endParaRPr lang="en-US" dirty="0"/>
           </a:p>
         </p:txBody>
@@ -461,6 +688,10 @@
           <a:bodyPr/>
           <a:lstStyle/>
           <a:p>
+            <a:r>
+              <a:rPr lang="en-US" dirty="0"/>
+              <a:t/>
+            </a:r>
             <a:endParaRPr lang="en-US" dirty="0"/>
           </a:p>
         </p:txBody>
@@ -545,6 +776,10 @@
           <a:bodyPr/>
           <a:lstStyle/>
           <a:p>
+            <a:r>
+              <a:rPr lang="en-US" dirty="0"/>
+              <a:t/>
+            </a:r>
             <a:endParaRPr lang="en-US" dirty="0"/>
           </a:p>
         </p:txBody>
@@ -629,6 +864,10 @@
           <a:bodyPr/>
           <a:lstStyle/>
           <a:p>
+            <a:r>
+              <a:rPr lang="en-US" dirty="0"/>
+              <a:t/>
+            </a:r>
             <a:endParaRPr lang="en-US" dirty="0"/>
           </a:p>
         </p:txBody>
@@ -713,6 +952,10 @@
           <a:bodyPr/>
           <a:lstStyle/>
           <a:p>
+            <a:r>
+              <a:rPr lang="en-US" dirty="0"/>
+              <a:t/>
+            </a:r>
             <a:endParaRPr lang="en-US" dirty="0"/>
           </a:p>
         </p:txBody>
@@ -797,6 +1040,10 @@
           <a:bodyPr/>
           <a:lstStyle/>
           <a:p>
+            <a:r>
+              <a:rPr lang="en-US" dirty="0"/>
+              <a:t/>
+            </a:r>
             <a:endParaRPr lang="en-US" dirty="0"/>
           </a:p>
         </p:txBody>
@@ -881,6 +1128,10 @@
           <a:bodyPr/>
           <a:lstStyle/>
           <a:p>
+            <a:r>
+              <a:rPr lang="en-US" dirty="0"/>
+              <a:t/>
+            </a:r>
             <a:endParaRPr lang="en-US" dirty="0"/>
           </a:p>
         </p:txBody>
@@ -965,6 +1216,10 @@
           <a:bodyPr/>
           <a:lstStyle/>
           <a:p>
+            <a:r>
+              <a:rPr lang="en-US" dirty="0"/>
+              <a:t/>
+            </a:r>
             <a:endParaRPr lang="en-US" dirty="0"/>
           </a:p>
         </p:txBody>
@@ -1049,6 +1304,10 @@
           <a:bodyPr/>
           <a:lstStyle/>
           <a:p>
+            <a:r>
+              <a:rPr lang="en-US" dirty="0"/>
+              <a:t/>
+            </a:r>
             <a:endParaRPr lang="en-US" dirty="0"/>
           </a:p>
         </p:txBody>
@@ -1133,6 +1392,10 @@
           <a:bodyPr/>
           <a:lstStyle/>
           <a:p>
+            <a:r>
+              <a:rPr lang="en-US" dirty="0"/>
+              <a:t/>
+            </a:r>
             <a:endParaRPr lang="en-US" dirty="0"/>
           </a:p>
         </p:txBody>
@@ -1217,6 +1480,10 @@
           <a:bodyPr/>
           <a:lstStyle/>
           <a:p>
+            <a:r>
+              <a:rPr lang="en-US" dirty="0"/>
+              <a:t/>
+            </a:r>
             <a:endParaRPr lang="en-US" dirty="0"/>
           </a:p>
         </p:txBody>
@@ -1301,6 +1568,10 @@
           <a:bodyPr/>
           <a:lstStyle/>
           <a:p>
+            <a:r>
+              <a:rPr lang="en-US" dirty="0"/>
+              <a:t/>
+            </a:r>
             <a:endParaRPr lang="en-US" dirty="0"/>
           </a:p>
         </p:txBody>
@@ -1374,11 +1645,6 @@
 <file path=ppt/slideMasters/slideMaster1.xml><?xml version="1.0" encoding="utf-8"?>
 <p:sldMaster xmlns:a="http://schemas.openxmlformats.org/drawingml/2006/main" xmlns:r="http://schemas.openxmlformats.org/officeDocument/2006/relationships" xmlns:p="http://schemas.openxmlformats.org/presentationml/2006/main">
   <p:cSld>
-    <p:bg>
-      <p:bgRef idx="1001">
-        <a:schemeClr val="bg1"/>
-      </p:bgRef>
-    </p:bg>
     <p:spTree>
       <p:nvGrpSpPr>
         <p:cNvPr id="1" name=""/>
@@ -1661,7 +1927,6 @@
         <a:solidFill>
           <a:srgbClr val="0B1D3A"/>
         </a:solidFill>
-        <a:effectLst/>
       </p:bgPr>
     </p:bg>
     <p:spTree>
@@ -1741,7 +2006,7 @@
           <a:bodyPr wrap="square" lIns="0" tIns="0" rIns="0" bIns="0" rtlCol="0" anchor="ctr"/>
           <a:lstStyle/>
           <a:p>
-            <a:pPr marL="0" indent="0">
+            <a:pPr indent="0" marL="0">
               <a:buNone/>
             </a:pPr>
             <a:r>
@@ -1780,7 +2045,7 @@
           <a:bodyPr wrap="square" lIns="0" tIns="0" rIns="0" bIns="0" rtlCol="0" anchor="ctr"/>
           <a:lstStyle/>
           <a:p>
-            <a:pPr marL="0" indent="0">
+            <a:pPr indent="0" marL="0">
               <a:buNone/>
             </a:pPr>
             <a:r>
@@ -1839,7 +2104,7 @@
           <a:bodyPr wrap="square" lIns="0" tIns="0" rIns="0" bIns="0" rtlCol="0" anchor="ctr"/>
           <a:lstStyle/>
           <a:p>
-            <a:pPr marL="0" indent="0">
+            <a:pPr indent="0" marL="0">
               <a:buNone/>
             </a:pPr>
             <a:r>
@@ -1856,17 +2121,17 @@
             <a:endParaRPr lang="en-US" sz="1300" dirty="0"/>
           </a:p>
           <a:p>
-            <a:pPr marL="0" indent="0">
+            <a:pPr indent="0" marL="0">
               <a:buNone/>
             </a:pPr>
             <a:endParaRPr lang="en-US" sz="1300" dirty="0"/>
           </a:p>
           <a:p>
-            <a:pPr marL="0" indent="0">
-              <a:buNone/>
-            </a:pPr>
-            <a:r>
-              <a:rPr lang="zh-CN" altLang="en-US" sz="1400" dirty="0">
+            <a:pPr indent="0" marL="0">
+              <a:buNone/>
+            </a:pPr>
+            <a:r>
+              <a:rPr lang="en-US" sz="1400" dirty="0">
                 <a:solidFill>
                   <a:srgbClr val="FFFFFF"/>
                 </a:solidFill>
@@ -1874,34 +2139,12 @@
                 <a:ea typeface="Calibri" pitchFamily="34" charset="-122"/>
                 <a:cs typeface="Calibri" pitchFamily="34" charset="-120"/>
               </a:rPr>
-              <a:t>四</a:t>
-            </a:r>
-            <a:r>
-              <a:rPr lang="en-US" sz="1400" dirty="0">
-                <a:solidFill>
-                  <a:srgbClr val="FFFFFF"/>
-                </a:solidFill>
-                <a:latin typeface="Calibri" pitchFamily="34" charset="0"/>
-                <a:ea typeface="Calibri" pitchFamily="34" charset="-122"/>
-                <a:cs typeface="Calibri" pitchFamily="34" charset="-120"/>
-              </a:rPr>
-              <a:t>组：</a:t>
-            </a:r>
-            <a:r>
-              <a:rPr lang="zh-CN" altLang="en-US" sz="1400" dirty="0">
-                <a:solidFill>
-                  <a:srgbClr val="FFFFFF"/>
-                </a:solidFill>
-                <a:latin typeface="Calibri" pitchFamily="34" charset="0"/>
-                <a:ea typeface="Calibri" pitchFamily="34" charset="-122"/>
-                <a:cs typeface="Calibri" pitchFamily="34" charset="-120"/>
-              </a:rPr>
-              <a:t>李世祺</a:t>
+              <a:t>组员：张三 · 李四 · 王五 </a:t>
             </a:r>
             <a:endParaRPr lang="en-US" sz="1300" dirty="0"/>
           </a:p>
           <a:p>
-            <a:pPr marL="0" indent="0">
+            <a:pPr indent="0" marL="0">
               <a:buNone/>
             </a:pPr>
             <a:r>
@@ -1940,7 +2183,7 @@
           <a:bodyPr wrap="square" rtlCol="0" anchor="ctr"/>
           <a:lstStyle/>
           <a:p>
-            <a:pPr marL="0" indent="0" algn="r">
+            <a:pPr algn="r" indent="0" marL="0">
               <a:buNone/>
             </a:pPr>
             <a:r>
@@ -1974,7 +2217,6 @@
         <a:solidFill>
           <a:srgbClr val="F7F9FC"/>
         </a:solidFill>
-        <a:effectLst/>
       </p:bgPr>
     </p:bg>
     <p:spTree>
@@ -2012,7 +2254,7 @@
           <a:bodyPr wrap="square" lIns="0" tIns="0" rIns="0" bIns="0" rtlCol="0" anchor="ctr"/>
           <a:lstStyle/>
           <a:p>
-            <a:pPr marL="0" indent="0">
+            <a:pPr indent="0" marL="0">
               <a:buNone/>
             </a:pPr>
             <a:r>
@@ -2051,7 +2293,7 @@
           <a:bodyPr wrap="square" lIns="0" tIns="0" rIns="0" bIns="0" rtlCol="0" anchor="ctr"/>
           <a:lstStyle/>
           <a:p>
-            <a:pPr marL="0" indent="0">
+            <a:pPr indent="0" marL="0">
               <a:buNone/>
             </a:pPr>
             <a:r>
@@ -2085,41 +2327,17 @@
         </p:nvGraphicFramePr>
         <p:xfrm>
           <a:off x="457200" y="1115568"/>
-          <a:ext cx="3749040" cy="1200912"/>
+          <a:ext cx="3931920" cy="1234440"/>
         </p:xfrm>
         <a:graphic>
           <a:graphicData uri="http://schemas.openxmlformats.org/drawingml/2006/table">
             <a:tbl>
               <a:tblPr/>
               <a:tblGrid>
-                <a:gridCol w="1005840">
-                  <a:extLst>
-                    <a:ext uri="{9D8B030D-6E8A-4147-A177-3AD203B41FA5}">
-                      <a16:colId xmlns:a16="http://schemas.microsoft.com/office/drawing/2014/main" val="20000"/>
-                    </a:ext>
-                  </a:extLst>
-                </a:gridCol>
-                <a:gridCol w="914400">
-                  <a:extLst>
-                    <a:ext uri="{9D8B030D-6E8A-4147-A177-3AD203B41FA5}">
-                      <a16:colId xmlns:a16="http://schemas.microsoft.com/office/drawing/2014/main" val="20001"/>
-                    </a:ext>
-                  </a:extLst>
-                </a:gridCol>
-                <a:gridCol w="914400">
-                  <a:extLst>
-                    <a:ext uri="{9D8B030D-6E8A-4147-A177-3AD203B41FA5}">
-                      <a16:colId xmlns:a16="http://schemas.microsoft.com/office/drawing/2014/main" val="20002"/>
-                    </a:ext>
-                  </a:extLst>
-                </a:gridCol>
-                <a:gridCol w="914400">
-                  <a:extLst>
-                    <a:ext uri="{9D8B030D-6E8A-4147-A177-3AD203B41FA5}">
-                      <a16:colId xmlns:a16="http://schemas.microsoft.com/office/drawing/2014/main" val="20003"/>
-                    </a:ext>
-                  </a:extLst>
-                </a:gridCol>
+                <a:gridCol w="1005840"/>
+                <a:gridCol w="914400"/>
+                <a:gridCol w="914400"/>
+                <a:gridCol w="914400"/>
               </a:tblGrid>
               <a:tr h="256032">
                 <a:tc>
@@ -2127,7 +2345,7 @@
                     <a:bodyPr/>
                     <a:lstStyle/>
                     <a:p>
-                      <a:pPr marL="0" indent="0">
+                      <a:pPr indent="0" marL="0">
                         <a:buNone/>
                       </a:pPr>
                       <a:r>
@@ -2148,7 +2366,7 @@
                       </a:endParaRPr>
                     </a:p>
                   </a:txBody>
-                  <a:tcPr>
+                  <a:tcPr marL="91440" marR="91440" marT="45720" marB="45720">
                     <a:lnL w="6350" cap="flat" cmpd="sng" algn="ctr">
                       <a:solidFill>
                         <a:srgbClr val="E8ECF1"/>
@@ -2195,7 +2413,7 @@
                     <a:bodyPr/>
                     <a:lstStyle/>
                     <a:p>
-                      <a:pPr marL="0" indent="0">
+                      <a:pPr indent="0" marL="0">
                         <a:buNone/>
                       </a:pPr>
                       <a:r>
@@ -2216,7 +2434,7 @@
                       </a:endParaRPr>
                     </a:p>
                   </a:txBody>
-                  <a:tcPr>
+                  <a:tcPr marL="91440" marR="91440" marT="45720" marB="45720">
                     <a:lnL w="6350" cap="flat" cmpd="sng" algn="ctr">
                       <a:solidFill>
                         <a:srgbClr val="E8ECF1"/>
@@ -2263,7 +2481,7 @@
                     <a:bodyPr/>
                     <a:lstStyle/>
                     <a:p>
-                      <a:pPr marL="0" indent="0">
+                      <a:pPr indent="0" marL="0">
                         <a:buNone/>
                       </a:pPr>
                       <a:r>
@@ -2284,7 +2502,7 @@
                       </a:endParaRPr>
                     </a:p>
                   </a:txBody>
-                  <a:tcPr>
+                  <a:tcPr marL="91440" marR="91440" marT="45720" marB="45720">
                     <a:lnL w="6350" cap="flat" cmpd="sng" algn="ctr">
                       <a:solidFill>
                         <a:srgbClr val="E8ECF1"/>
@@ -2331,7 +2549,7 @@
                     <a:bodyPr/>
                     <a:lstStyle/>
                     <a:p>
-                      <a:pPr marL="0" indent="0">
+                      <a:pPr indent="0" marL="0">
                         <a:buNone/>
                       </a:pPr>
                       <a:r>
@@ -2352,7 +2570,7 @@
                       </a:endParaRPr>
                     </a:p>
                   </a:txBody>
-                  <a:tcPr>
+                  <a:tcPr marL="91440" marR="91440" marT="45720" marB="45720">
                     <a:lnL w="6350" cap="flat" cmpd="sng" algn="ctr">
                       <a:solidFill>
                         <a:srgbClr val="E8ECF1"/>
@@ -2394,11 +2612,6 @@
                     </a:solidFill>
                   </a:tcPr>
                 </a:tc>
-                <a:extLst>
-                  <a:ext uri="{0D108BD9-81ED-4DB2-BD59-A6C34878D82A}">
-                    <a16:rowId xmlns:a16="http://schemas.microsoft.com/office/drawing/2014/main" val="10000"/>
-                  </a:ext>
-                </a:extLst>
               </a:tr>
               <a:tr h="228600">
                 <a:tc>
@@ -2406,7 +2619,7 @@
                     <a:bodyPr/>
                     <a:lstStyle/>
                     <a:p>
-                      <a:pPr marL="0" indent="0">
+                      <a:pPr indent="0" marL="0">
                         <a:buNone/>
                       </a:pPr>
                       <a:r>
@@ -2427,7 +2640,7 @@
                       </a:endParaRPr>
                     </a:p>
                   </a:txBody>
-                  <a:tcPr>
+                  <a:tcPr marL="91440" marR="91440" marT="45720" marB="45720">
                     <a:lnL w="6350" cap="flat" cmpd="sng" algn="ctr">
                       <a:solidFill>
                         <a:srgbClr val="E8ECF1"/>
@@ -2471,7 +2684,7 @@
                     <a:bodyPr/>
                     <a:lstStyle/>
                     <a:p>
-                      <a:pPr marL="0" indent="0">
+                      <a:pPr indent="0" marL="0">
                         <a:buNone/>
                       </a:pPr>
                       <a:r>
@@ -2492,7 +2705,7 @@
                       </a:endParaRPr>
                     </a:p>
                   </a:txBody>
-                  <a:tcPr>
+                  <a:tcPr marL="91440" marR="91440" marT="45720" marB="45720">
                     <a:lnL w="6350" cap="flat" cmpd="sng" algn="ctr">
                       <a:solidFill>
                         <a:srgbClr val="E8ECF1"/>
@@ -2536,7 +2749,7 @@
                     <a:bodyPr/>
                     <a:lstStyle/>
                     <a:p>
-                      <a:pPr marL="0" indent="0">
+                      <a:pPr indent="0" marL="0">
                         <a:buNone/>
                       </a:pPr>
                       <a:r>
@@ -2557,7 +2770,7 @@
                       </a:endParaRPr>
                     </a:p>
                   </a:txBody>
-                  <a:tcPr>
+                  <a:tcPr marL="91440" marR="91440" marT="45720" marB="45720">
                     <a:lnL w="6350" cap="flat" cmpd="sng" algn="ctr">
                       <a:solidFill>
                         <a:srgbClr val="E8ECF1"/>
@@ -2601,7 +2814,7 @@
                     <a:bodyPr/>
                     <a:lstStyle/>
                     <a:p>
-                      <a:pPr marL="0" indent="0">
+                      <a:pPr indent="0" marL="0">
                         <a:buNone/>
                       </a:pPr>
                       <a:r>
@@ -2622,7 +2835,7 @@
                       </a:endParaRPr>
                     </a:p>
                   </a:txBody>
-                  <a:tcPr>
+                  <a:tcPr marL="91440" marR="91440" marT="45720" marB="45720">
                     <a:lnL w="6350" cap="flat" cmpd="sng" algn="ctr">
                       <a:solidFill>
                         <a:srgbClr val="E8ECF1"/>
@@ -2661,11 +2874,6 @@
                     </a:lnB>
                   </a:tcPr>
                 </a:tc>
-                <a:extLst>
-                  <a:ext uri="{0D108BD9-81ED-4DB2-BD59-A6C34878D82A}">
-                    <a16:rowId xmlns:a16="http://schemas.microsoft.com/office/drawing/2014/main" val="10001"/>
-                  </a:ext>
-                </a:extLst>
               </a:tr>
               <a:tr h="228600">
                 <a:tc>
@@ -2673,7 +2881,7 @@
                     <a:bodyPr/>
                     <a:lstStyle/>
                     <a:p>
-                      <a:pPr marL="0" indent="0">
+                      <a:pPr indent="0" marL="0">
                         <a:buNone/>
                       </a:pPr>
                       <a:r>
@@ -2694,7 +2902,7 @@
                       </a:endParaRPr>
                     </a:p>
                   </a:txBody>
-                  <a:tcPr>
+                  <a:tcPr marL="91440" marR="91440" marT="45720" marB="45720">
                     <a:lnL w="6350" cap="flat" cmpd="sng" algn="ctr">
                       <a:solidFill>
                         <a:srgbClr val="E8ECF1"/>
@@ -2738,7 +2946,7 @@
                     <a:bodyPr/>
                     <a:lstStyle/>
                     <a:p>
-                      <a:pPr marL="0" indent="0">
+                      <a:pPr indent="0" marL="0">
                         <a:buNone/>
                       </a:pPr>
                       <a:r>
@@ -2759,7 +2967,7 @@
                       </a:endParaRPr>
                     </a:p>
                   </a:txBody>
-                  <a:tcPr>
+                  <a:tcPr marL="91440" marR="91440" marT="45720" marB="45720">
                     <a:lnL w="6350" cap="flat" cmpd="sng" algn="ctr">
                       <a:solidFill>
                         <a:srgbClr val="E8ECF1"/>
@@ -2803,7 +3011,7 @@
                     <a:bodyPr/>
                     <a:lstStyle/>
                     <a:p>
-                      <a:pPr marL="0" indent="0">
+                      <a:pPr indent="0" marL="0">
                         <a:buNone/>
                       </a:pPr>
                       <a:r>
@@ -2824,7 +3032,7 @@
                       </a:endParaRPr>
                     </a:p>
                   </a:txBody>
-                  <a:tcPr>
+                  <a:tcPr marL="91440" marR="91440" marT="45720" marB="45720">
                     <a:lnL w="6350" cap="flat" cmpd="sng" algn="ctr">
                       <a:solidFill>
                         <a:srgbClr val="E8ECF1"/>
@@ -2868,7 +3076,7 @@
                     <a:bodyPr/>
                     <a:lstStyle/>
                     <a:p>
-                      <a:pPr marL="0" indent="0">
+                      <a:pPr indent="0" marL="0">
                         <a:buNone/>
                       </a:pPr>
                       <a:r>
@@ -2889,7 +3097,7 @@
                       </a:endParaRPr>
                     </a:p>
                   </a:txBody>
-                  <a:tcPr>
+                  <a:tcPr marL="91440" marR="91440" marT="45720" marB="45720">
                     <a:lnL w="6350" cap="flat" cmpd="sng" algn="ctr">
                       <a:solidFill>
                         <a:srgbClr val="E8ECF1"/>
@@ -2928,11 +3136,6 @@
                     </a:lnB>
                   </a:tcPr>
                 </a:tc>
-                <a:extLst>
-                  <a:ext uri="{0D108BD9-81ED-4DB2-BD59-A6C34878D82A}">
-                    <a16:rowId xmlns:a16="http://schemas.microsoft.com/office/drawing/2014/main" val="10002"/>
-                  </a:ext>
-                </a:extLst>
               </a:tr>
               <a:tr h="228600">
                 <a:tc>
@@ -2940,7 +3143,7 @@
                     <a:bodyPr/>
                     <a:lstStyle/>
                     <a:p>
-                      <a:pPr marL="0" indent="0">
+                      <a:pPr indent="0" marL="0">
                         <a:buNone/>
                       </a:pPr>
                       <a:r>
@@ -2961,7 +3164,7 @@
                       </a:endParaRPr>
                     </a:p>
                   </a:txBody>
-                  <a:tcPr>
+                  <a:tcPr marL="91440" marR="91440" marT="45720" marB="45720">
                     <a:lnL w="6350" cap="flat" cmpd="sng" algn="ctr">
                       <a:solidFill>
                         <a:srgbClr val="E8ECF1"/>
@@ -3005,7 +3208,7 @@
                     <a:bodyPr/>
                     <a:lstStyle/>
                     <a:p>
-                      <a:pPr marL="0" indent="0">
+                      <a:pPr indent="0" marL="0">
                         <a:buNone/>
                       </a:pPr>
                       <a:r>
@@ -3026,7 +3229,7 @@
                       </a:endParaRPr>
                     </a:p>
                   </a:txBody>
-                  <a:tcPr>
+                  <a:tcPr marL="91440" marR="91440" marT="45720" marB="45720">
                     <a:lnL w="6350" cap="flat" cmpd="sng" algn="ctr">
                       <a:solidFill>
                         <a:srgbClr val="E8ECF1"/>
@@ -3070,7 +3273,7 @@
                     <a:bodyPr/>
                     <a:lstStyle/>
                     <a:p>
-                      <a:pPr marL="0" indent="0">
+                      <a:pPr indent="0" marL="0">
                         <a:buNone/>
                       </a:pPr>
                       <a:r>
@@ -3091,7 +3294,7 @@
                       </a:endParaRPr>
                     </a:p>
                   </a:txBody>
-                  <a:tcPr>
+                  <a:tcPr marL="91440" marR="91440" marT="45720" marB="45720">
                     <a:lnL w="6350" cap="flat" cmpd="sng" algn="ctr">
                       <a:solidFill>
                         <a:srgbClr val="E8ECF1"/>
@@ -3135,7 +3338,7 @@
                     <a:bodyPr/>
                     <a:lstStyle/>
                     <a:p>
-                      <a:pPr marL="0" indent="0">
+                      <a:pPr indent="0" marL="0">
                         <a:buNone/>
                       </a:pPr>
                       <a:r>
@@ -3156,7 +3359,7 @@
                       </a:endParaRPr>
                     </a:p>
                   </a:txBody>
-                  <a:tcPr>
+                  <a:tcPr marL="91440" marR="91440" marT="45720" marB="45720">
                     <a:lnL w="6350" cap="flat" cmpd="sng" algn="ctr">
                       <a:solidFill>
                         <a:srgbClr val="E8ECF1"/>
@@ -3195,11 +3398,6 @@
                     </a:lnB>
                   </a:tcPr>
                 </a:tc>
-                <a:extLst>
-                  <a:ext uri="{0D108BD9-81ED-4DB2-BD59-A6C34878D82A}">
-                    <a16:rowId xmlns:a16="http://schemas.microsoft.com/office/drawing/2014/main" val="10003"/>
-                  </a:ext>
-                </a:extLst>
               </a:tr>
               <a:tr h="228600">
                 <a:tc>
@@ -3207,7 +3405,7 @@
                     <a:bodyPr/>
                     <a:lstStyle/>
                     <a:p>
-                      <a:pPr marL="0" indent="0">
+                      <a:pPr indent="0" marL="0">
                         <a:buNone/>
                       </a:pPr>
                       <a:r>
@@ -3228,7 +3426,7 @@
                       </a:endParaRPr>
                     </a:p>
                   </a:txBody>
-                  <a:tcPr>
+                  <a:tcPr marL="91440" marR="91440" marT="45720" marB="45720">
                     <a:lnL w="6350" cap="flat" cmpd="sng" algn="ctr">
                       <a:solidFill>
                         <a:srgbClr val="E8ECF1"/>
@@ -3272,7 +3470,7 @@
                     <a:bodyPr/>
                     <a:lstStyle/>
                     <a:p>
-                      <a:pPr marL="0" indent="0">
+                      <a:pPr indent="0" marL="0">
                         <a:buNone/>
                       </a:pPr>
                       <a:r>
@@ -3293,7 +3491,7 @@
                       </a:endParaRPr>
                     </a:p>
                   </a:txBody>
-                  <a:tcPr>
+                  <a:tcPr marL="91440" marR="91440" marT="45720" marB="45720">
                     <a:lnL w="6350" cap="flat" cmpd="sng" algn="ctr">
                       <a:solidFill>
                         <a:srgbClr val="E8ECF1"/>
@@ -3337,7 +3535,7 @@
                     <a:bodyPr/>
                     <a:lstStyle/>
                     <a:p>
-                      <a:pPr marL="0" indent="0">
+                      <a:pPr indent="0" marL="0">
                         <a:buNone/>
                       </a:pPr>
                       <a:r>
@@ -3358,7 +3556,7 @@
                       </a:endParaRPr>
                     </a:p>
                   </a:txBody>
-                  <a:tcPr>
+                  <a:tcPr marL="91440" marR="91440" marT="45720" marB="45720">
                     <a:lnL w="6350" cap="flat" cmpd="sng" algn="ctr">
                       <a:solidFill>
                         <a:srgbClr val="E8ECF1"/>
@@ -3402,7 +3600,7 @@
                     <a:bodyPr/>
                     <a:lstStyle/>
                     <a:p>
-                      <a:pPr marL="0" indent="0">
+                      <a:pPr indent="0" marL="0">
                         <a:buNone/>
                       </a:pPr>
                       <a:r>
@@ -3423,7 +3621,7 @@
                       </a:endParaRPr>
                     </a:p>
                   </a:txBody>
-                  <a:tcPr>
+                  <a:tcPr marL="91440" marR="91440" marT="45720" marB="45720">
                     <a:lnL w="6350" cap="flat" cmpd="sng" algn="ctr">
                       <a:solidFill>
                         <a:srgbClr val="E8ECF1"/>
@@ -3462,11 +3660,6 @@
                     </a:lnB>
                   </a:tcPr>
                 </a:tc>
-                <a:extLst>
-                  <a:ext uri="{0D108BD9-81ED-4DB2-BD59-A6C34878D82A}">
-                    <a16:rowId xmlns:a16="http://schemas.microsoft.com/office/drawing/2014/main" val="10004"/>
-                  </a:ext>
-                </a:extLst>
               </a:tr>
             </a:tbl>
           </a:graphicData>
@@ -3493,7 +3686,7 @@
           <a:bodyPr wrap="square" lIns="0" tIns="0" rIns="0" bIns="0" rtlCol="0" anchor="ctr"/>
           <a:lstStyle/>
           <a:p>
-            <a:pPr marL="0" indent="0">
+            <a:pPr indent="0" marL="0">
               <a:buNone/>
             </a:pPr>
             <a:r>
@@ -3527,34 +3720,16 @@
         </p:nvGraphicFramePr>
         <p:xfrm>
           <a:off x="4754880" y="1115568"/>
-          <a:ext cx="3566160" cy="964692"/>
+          <a:ext cx="3931920" cy="777240"/>
         </p:xfrm>
         <a:graphic>
           <a:graphicData uri="http://schemas.openxmlformats.org/drawingml/2006/table">
             <a:tbl>
               <a:tblPr/>
               <a:tblGrid>
-                <a:gridCol w="1188720">
-                  <a:extLst>
-                    <a:ext uri="{9D8B030D-6E8A-4147-A177-3AD203B41FA5}">
-                      <a16:colId xmlns:a16="http://schemas.microsoft.com/office/drawing/2014/main" val="20000"/>
-                    </a:ext>
-                  </a:extLst>
-                </a:gridCol>
-                <a:gridCol w="1188720">
-                  <a:extLst>
-                    <a:ext uri="{9D8B030D-6E8A-4147-A177-3AD203B41FA5}">
-                      <a16:colId xmlns:a16="http://schemas.microsoft.com/office/drawing/2014/main" val="20001"/>
-                    </a:ext>
-                  </a:extLst>
-                </a:gridCol>
-                <a:gridCol w="1188720">
-                  <a:extLst>
-                    <a:ext uri="{9D8B030D-6E8A-4147-A177-3AD203B41FA5}">
-                      <a16:colId xmlns:a16="http://schemas.microsoft.com/office/drawing/2014/main" val="20002"/>
-                    </a:ext>
-                  </a:extLst>
-                </a:gridCol>
+                <a:gridCol w="1188720"/>
+                <a:gridCol w="1188720"/>
+                <a:gridCol w="1188720"/>
               </a:tblGrid>
               <a:tr h="256032">
                 <a:tc>
@@ -3562,7 +3737,7 @@
                     <a:bodyPr/>
                     <a:lstStyle/>
                     <a:p>
-                      <a:pPr marL="0" indent="0">
+                      <a:pPr indent="0" marL="0">
                         <a:buNone/>
                       </a:pPr>
                       <a:r>
@@ -3583,7 +3758,7 @@
                       </a:endParaRPr>
                     </a:p>
                   </a:txBody>
-                  <a:tcPr>
+                  <a:tcPr marL="91440" marR="91440" marT="45720" marB="45720">
                     <a:lnL w="6350" cap="flat" cmpd="sng" algn="ctr">
                       <a:solidFill>
                         <a:srgbClr val="E8ECF1"/>
@@ -3630,7 +3805,7 @@
                     <a:bodyPr/>
                     <a:lstStyle/>
                     <a:p>
-                      <a:pPr marL="0" indent="0">
+                      <a:pPr indent="0" marL="0">
                         <a:buNone/>
                       </a:pPr>
                       <a:r>
@@ -3651,7 +3826,7 @@
                       </a:endParaRPr>
                     </a:p>
                   </a:txBody>
-                  <a:tcPr>
+                  <a:tcPr marL="91440" marR="91440" marT="45720" marB="45720">
                     <a:lnL w="6350" cap="flat" cmpd="sng" algn="ctr">
                       <a:solidFill>
                         <a:srgbClr val="E8ECF1"/>
@@ -3698,7 +3873,7 @@
                     <a:bodyPr/>
                     <a:lstStyle/>
                     <a:p>
-                      <a:pPr marL="0" indent="0">
+                      <a:pPr indent="0" marL="0">
                         <a:buNone/>
                       </a:pPr>
                       <a:r>
@@ -3719,7 +3894,7 @@
                       </a:endParaRPr>
                     </a:p>
                   </a:txBody>
-                  <a:tcPr>
+                  <a:tcPr marL="91440" marR="91440" marT="45720" marB="45720">
                     <a:lnL w="6350" cap="flat" cmpd="sng" algn="ctr">
                       <a:solidFill>
                         <a:srgbClr val="E8ECF1"/>
@@ -3761,11 +3936,6 @@
                     </a:solidFill>
                   </a:tcPr>
                 </a:tc>
-                <a:extLst>
-                  <a:ext uri="{0D108BD9-81ED-4DB2-BD59-A6C34878D82A}">
-                    <a16:rowId xmlns:a16="http://schemas.microsoft.com/office/drawing/2014/main" val="10000"/>
-                  </a:ext>
-                </a:extLst>
               </a:tr>
               <a:tr h="228600">
                 <a:tc>
@@ -3773,7 +3943,7 @@
                     <a:bodyPr/>
                     <a:lstStyle/>
                     <a:p>
-                      <a:pPr marL="0" indent="0">
+                      <a:pPr indent="0" marL="0">
                         <a:buNone/>
                       </a:pPr>
                       <a:r>
@@ -3794,7 +3964,7 @@
                       </a:endParaRPr>
                     </a:p>
                   </a:txBody>
-                  <a:tcPr>
+                  <a:tcPr marL="91440" marR="91440" marT="45720" marB="45720">
                     <a:lnL w="6350" cap="flat" cmpd="sng" algn="ctr">
                       <a:solidFill>
                         <a:srgbClr val="E8ECF1"/>
@@ -3838,7 +4008,7 @@
                     <a:bodyPr/>
                     <a:lstStyle/>
                     <a:p>
-                      <a:pPr marL="0" indent="0">
+                      <a:pPr indent="0" marL="0">
                         <a:buNone/>
                       </a:pPr>
                       <a:r>
@@ -3859,7 +4029,7 @@
                       </a:endParaRPr>
                     </a:p>
                   </a:txBody>
-                  <a:tcPr>
+                  <a:tcPr marL="91440" marR="91440" marT="45720" marB="45720">
                     <a:lnL w="6350" cap="flat" cmpd="sng" algn="ctr">
                       <a:solidFill>
                         <a:srgbClr val="E8ECF1"/>
@@ -3903,7 +4073,7 @@
                     <a:bodyPr/>
                     <a:lstStyle/>
                     <a:p>
-                      <a:pPr marL="0" indent="0">
+                      <a:pPr indent="0" marL="0">
                         <a:buNone/>
                       </a:pPr>
                       <a:r>
@@ -3924,7 +4094,7 @@
                       </a:endParaRPr>
                     </a:p>
                   </a:txBody>
-                  <a:tcPr>
+                  <a:tcPr marL="91440" marR="91440" marT="45720" marB="45720">
                     <a:lnL w="6350" cap="flat" cmpd="sng" algn="ctr">
                       <a:solidFill>
                         <a:srgbClr val="E8ECF1"/>
@@ -3963,11 +4133,6 @@
                     </a:lnB>
                   </a:tcPr>
                 </a:tc>
-                <a:extLst>
-                  <a:ext uri="{0D108BD9-81ED-4DB2-BD59-A6C34878D82A}">
-                    <a16:rowId xmlns:a16="http://schemas.microsoft.com/office/drawing/2014/main" val="10001"/>
-                  </a:ext>
-                </a:extLst>
               </a:tr>
               <a:tr h="228600">
                 <a:tc>
@@ -3975,7 +4140,7 @@
                     <a:bodyPr/>
                     <a:lstStyle/>
                     <a:p>
-                      <a:pPr marL="0" indent="0">
+                      <a:pPr indent="0" marL="0">
                         <a:buNone/>
                       </a:pPr>
                       <a:r>
@@ -3996,7 +4161,7 @@
                       </a:endParaRPr>
                     </a:p>
                   </a:txBody>
-                  <a:tcPr>
+                  <a:tcPr marL="91440" marR="91440" marT="45720" marB="45720">
                     <a:lnL w="6350" cap="flat" cmpd="sng" algn="ctr">
                       <a:solidFill>
                         <a:srgbClr val="E8ECF1"/>
@@ -4040,7 +4205,7 @@
                     <a:bodyPr/>
                     <a:lstStyle/>
                     <a:p>
-                      <a:pPr marL="0" indent="0">
+                      <a:pPr indent="0" marL="0">
                         <a:buNone/>
                       </a:pPr>
                       <a:r>
@@ -4061,7 +4226,7 @@
                       </a:endParaRPr>
                     </a:p>
                   </a:txBody>
-                  <a:tcPr>
+                  <a:tcPr marL="91440" marR="91440" marT="45720" marB="45720">
                     <a:lnL w="6350" cap="flat" cmpd="sng" algn="ctr">
                       <a:solidFill>
                         <a:srgbClr val="E8ECF1"/>
@@ -4105,7 +4270,7 @@
                     <a:bodyPr/>
                     <a:lstStyle/>
                     <a:p>
-                      <a:pPr marL="0" indent="0">
+                      <a:pPr indent="0" marL="0">
                         <a:buNone/>
                       </a:pPr>
                       <a:r>
@@ -4126,7 +4291,7 @@
                       </a:endParaRPr>
                     </a:p>
                   </a:txBody>
-                  <a:tcPr>
+                  <a:tcPr marL="91440" marR="91440" marT="45720" marB="45720">
                     <a:lnL w="6350" cap="flat" cmpd="sng" algn="ctr">
                       <a:solidFill>
                         <a:srgbClr val="E8ECF1"/>
@@ -4165,11 +4330,6 @@
                     </a:lnB>
                   </a:tcPr>
                 </a:tc>
-                <a:extLst>
-                  <a:ext uri="{0D108BD9-81ED-4DB2-BD59-A6C34878D82A}">
-                    <a16:rowId xmlns:a16="http://schemas.microsoft.com/office/drawing/2014/main" val="10002"/>
-                  </a:ext>
-                </a:extLst>
               </a:tr>
               <a:tr h="228600">
                 <a:tc>
@@ -4177,7 +4337,7 @@
                     <a:bodyPr/>
                     <a:lstStyle/>
                     <a:p>
-                      <a:pPr marL="0" indent="0">
+                      <a:pPr indent="0" marL="0">
                         <a:buNone/>
                       </a:pPr>
                       <a:r>
@@ -4198,7 +4358,7 @@
                       </a:endParaRPr>
                     </a:p>
                   </a:txBody>
-                  <a:tcPr>
+                  <a:tcPr marL="91440" marR="91440" marT="45720" marB="45720">
                     <a:lnL w="6350" cap="flat" cmpd="sng" algn="ctr">
                       <a:solidFill>
                         <a:srgbClr val="E8ECF1"/>
@@ -4242,7 +4402,7 @@
                     <a:bodyPr/>
                     <a:lstStyle/>
                     <a:p>
-                      <a:pPr marL="0" indent="0">
+                      <a:pPr indent="0" marL="0">
                         <a:buNone/>
                       </a:pPr>
                       <a:r>
@@ -4263,7 +4423,7 @@
                       </a:endParaRPr>
                     </a:p>
                   </a:txBody>
-                  <a:tcPr>
+                  <a:tcPr marL="91440" marR="91440" marT="45720" marB="45720">
                     <a:lnL w="6350" cap="flat" cmpd="sng" algn="ctr">
                       <a:solidFill>
                         <a:srgbClr val="E8ECF1"/>
@@ -4307,7 +4467,7 @@
                     <a:bodyPr/>
                     <a:lstStyle/>
                     <a:p>
-                      <a:pPr marL="0" indent="0">
+                      <a:pPr indent="0" marL="0">
                         <a:buNone/>
                       </a:pPr>
                       <a:r>
@@ -4328,7 +4488,7 @@
                       </a:endParaRPr>
                     </a:p>
                   </a:txBody>
-                  <a:tcPr>
+                  <a:tcPr marL="91440" marR="91440" marT="45720" marB="45720">
                     <a:lnL w="6350" cap="flat" cmpd="sng" algn="ctr">
                       <a:solidFill>
                         <a:srgbClr val="E8ECF1"/>
@@ -4367,11 +4527,6 @@
                     </a:lnB>
                   </a:tcPr>
                 </a:tc>
-                <a:extLst>
-                  <a:ext uri="{0D108BD9-81ED-4DB2-BD59-A6C34878D82A}">
-                    <a16:rowId xmlns:a16="http://schemas.microsoft.com/office/drawing/2014/main" val="10003"/>
-                  </a:ext>
-                </a:extLst>
               </a:tr>
             </a:tbl>
           </a:graphicData>
@@ -4398,7 +4553,7 @@
           <a:bodyPr wrap="square" lIns="0" tIns="0" rIns="0" bIns="0" rtlCol="0" anchor="ctr"/>
           <a:lstStyle/>
           <a:p>
-            <a:pPr marL="0" indent="0">
+            <a:pPr indent="0" marL="0">
               <a:buNone/>
             </a:pPr>
             <a:r>
@@ -4432,48 +4587,18 @@
         </p:nvGraphicFramePr>
         <p:xfrm>
           <a:off x="457200" y="2788920"/>
-          <a:ext cx="7178040" cy="987552"/>
+          <a:ext cx="8229600" cy="868680"/>
         </p:xfrm>
         <a:graphic>
           <a:graphicData uri="http://schemas.openxmlformats.org/drawingml/2006/table">
             <a:tbl>
               <a:tblPr/>
               <a:tblGrid>
-                <a:gridCol w="1371600">
-                  <a:extLst>
-                    <a:ext uri="{9D8B030D-6E8A-4147-A177-3AD203B41FA5}">
-                      <a16:colId xmlns:a16="http://schemas.microsoft.com/office/drawing/2014/main" val="20000"/>
-                    </a:ext>
-                  </a:extLst>
-                </a:gridCol>
-                <a:gridCol w="1371600">
-                  <a:extLst>
-                    <a:ext uri="{9D8B030D-6E8A-4147-A177-3AD203B41FA5}">
-                      <a16:colId xmlns:a16="http://schemas.microsoft.com/office/drawing/2014/main" val="20001"/>
-                    </a:ext>
-                  </a:extLst>
-                </a:gridCol>
-                <a:gridCol w="1371600">
-                  <a:extLst>
-                    <a:ext uri="{9D8B030D-6E8A-4147-A177-3AD203B41FA5}">
-                      <a16:colId xmlns:a16="http://schemas.microsoft.com/office/drawing/2014/main" val="20002"/>
-                    </a:ext>
-                  </a:extLst>
-                </a:gridCol>
-                <a:gridCol w="1371600">
-                  <a:extLst>
-                    <a:ext uri="{9D8B030D-6E8A-4147-A177-3AD203B41FA5}">
-                      <a16:colId xmlns:a16="http://schemas.microsoft.com/office/drawing/2014/main" val="20003"/>
-                    </a:ext>
-                  </a:extLst>
-                </a:gridCol>
-                <a:gridCol w="1691640">
-                  <a:extLst>
-                    <a:ext uri="{9D8B030D-6E8A-4147-A177-3AD203B41FA5}">
-                      <a16:colId xmlns:a16="http://schemas.microsoft.com/office/drawing/2014/main" val="20004"/>
-                    </a:ext>
-                  </a:extLst>
-                </a:gridCol>
+                <a:gridCol w="1371600"/>
+                <a:gridCol w="1371600"/>
+                <a:gridCol w="1371600"/>
+                <a:gridCol w="1371600"/>
+                <a:gridCol w="1691640"/>
               </a:tblGrid>
               <a:tr h="256032">
                 <a:tc>
@@ -4481,7 +4606,7 @@
                     <a:bodyPr/>
                     <a:lstStyle/>
                     <a:p>
-                      <a:pPr marL="0" indent="0">
+                      <a:pPr indent="0" marL="0">
                         <a:buNone/>
                       </a:pPr>
                       <a:r>
@@ -4502,7 +4627,7 @@
                       </a:endParaRPr>
                     </a:p>
                   </a:txBody>
-                  <a:tcPr>
+                  <a:tcPr marL="91440" marR="91440" marT="45720" marB="45720">
                     <a:lnL w="6350" cap="flat" cmpd="sng" algn="ctr">
                       <a:solidFill>
                         <a:srgbClr val="E8ECF1"/>
@@ -4549,7 +4674,7 @@
                     <a:bodyPr/>
                     <a:lstStyle/>
                     <a:p>
-                      <a:pPr marL="0" indent="0">
+                      <a:pPr indent="0" marL="0">
                         <a:buNone/>
                       </a:pPr>
                       <a:r>
@@ -4570,7 +4695,7 @@
                       </a:endParaRPr>
                     </a:p>
                   </a:txBody>
-                  <a:tcPr>
+                  <a:tcPr marL="91440" marR="91440" marT="45720" marB="45720">
                     <a:lnL w="6350" cap="flat" cmpd="sng" algn="ctr">
                       <a:solidFill>
                         <a:srgbClr val="E8ECF1"/>
@@ -4617,7 +4742,7 @@
                     <a:bodyPr/>
                     <a:lstStyle/>
                     <a:p>
-                      <a:pPr marL="0" indent="0">
+                      <a:pPr indent="0" marL="0">
                         <a:buNone/>
                       </a:pPr>
                       <a:r>
@@ -4638,7 +4763,7 @@
                       </a:endParaRPr>
                     </a:p>
                   </a:txBody>
-                  <a:tcPr>
+                  <a:tcPr marL="91440" marR="91440" marT="45720" marB="45720">
                     <a:lnL w="6350" cap="flat" cmpd="sng" algn="ctr">
                       <a:solidFill>
                         <a:srgbClr val="E8ECF1"/>
@@ -4685,7 +4810,7 @@
                     <a:bodyPr/>
                     <a:lstStyle/>
                     <a:p>
-                      <a:pPr marL="0" indent="0">
+                      <a:pPr indent="0" marL="0">
                         <a:buNone/>
                       </a:pPr>
                       <a:r>
@@ -4706,7 +4831,7 @@
                       </a:endParaRPr>
                     </a:p>
                   </a:txBody>
-                  <a:tcPr>
+                  <a:tcPr marL="91440" marR="91440" marT="45720" marB="45720">
                     <a:lnL w="6350" cap="flat" cmpd="sng" algn="ctr">
                       <a:solidFill>
                         <a:srgbClr val="E8ECF1"/>
@@ -4753,7 +4878,7 @@
                     <a:bodyPr/>
                     <a:lstStyle/>
                     <a:p>
-                      <a:pPr marL="0" indent="0">
+                      <a:pPr indent="0" marL="0">
                         <a:buNone/>
                       </a:pPr>
                       <a:r>
@@ -4774,7 +4899,7 @@
                       </a:endParaRPr>
                     </a:p>
                   </a:txBody>
-                  <a:tcPr>
+                  <a:tcPr marL="91440" marR="91440" marT="45720" marB="45720">
                     <a:lnL w="6350" cap="flat" cmpd="sng" algn="ctr">
                       <a:solidFill>
                         <a:srgbClr val="E8ECF1"/>
@@ -4816,11 +4941,6 @@
                     </a:solidFill>
                   </a:tcPr>
                 </a:tc>
-                <a:extLst>
-                  <a:ext uri="{0D108BD9-81ED-4DB2-BD59-A6C34878D82A}">
-                    <a16:rowId xmlns:a16="http://schemas.microsoft.com/office/drawing/2014/main" val="10000"/>
-                  </a:ext>
-                </a:extLst>
               </a:tr>
               <a:tr h="228600">
                 <a:tc>
@@ -4828,7 +4948,7 @@
                     <a:bodyPr/>
                     <a:lstStyle/>
                     <a:p>
-                      <a:pPr marL="0" indent="0">
+                      <a:pPr indent="0" marL="0">
                         <a:buNone/>
                       </a:pPr>
                       <a:r>
@@ -4849,7 +4969,7 @@
                       </a:endParaRPr>
                     </a:p>
                   </a:txBody>
-                  <a:tcPr>
+                  <a:tcPr marL="91440" marR="91440" marT="45720" marB="45720">
                     <a:lnL w="6350" cap="flat" cmpd="sng" algn="ctr">
                       <a:solidFill>
                         <a:srgbClr val="E8ECF1"/>
@@ -4893,7 +5013,7 @@
                     <a:bodyPr/>
                     <a:lstStyle/>
                     <a:p>
-                      <a:pPr marL="0" indent="0">
+                      <a:pPr indent="0" marL="0">
                         <a:buNone/>
                       </a:pPr>
                       <a:r>
@@ -4914,7 +5034,7 @@
                       </a:endParaRPr>
                     </a:p>
                   </a:txBody>
-                  <a:tcPr>
+                  <a:tcPr marL="91440" marR="91440" marT="45720" marB="45720">
                     <a:lnL w="6350" cap="flat" cmpd="sng" algn="ctr">
                       <a:solidFill>
                         <a:srgbClr val="E8ECF1"/>
@@ -4958,7 +5078,7 @@
                     <a:bodyPr/>
                     <a:lstStyle/>
                     <a:p>
-                      <a:pPr marL="0" indent="0">
+                      <a:pPr indent="0" marL="0">
                         <a:buNone/>
                       </a:pPr>
                       <a:r>
@@ -4979,7 +5099,7 @@
                       </a:endParaRPr>
                     </a:p>
                   </a:txBody>
-                  <a:tcPr>
+                  <a:tcPr marL="91440" marR="91440" marT="45720" marB="45720">
                     <a:lnL w="6350" cap="flat" cmpd="sng" algn="ctr">
                       <a:solidFill>
                         <a:srgbClr val="E8ECF1"/>
@@ -5023,7 +5143,7 @@
                     <a:bodyPr/>
                     <a:lstStyle/>
                     <a:p>
-                      <a:pPr marL="0" indent="0">
+                      <a:pPr indent="0" marL="0">
                         <a:buNone/>
                       </a:pPr>
                       <a:r>
@@ -5044,7 +5164,7 @@
                       </a:endParaRPr>
                     </a:p>
                   </a:txBody>
-                  <a:tcPr>
+                  <a:tcPr marL="91440" marR="91440" marT="45720" marB="45720">
                     <a:lnL w="6350" cap="flat" cmpd="sng" algn="ctr">
                       <a:solidFill>
                         <a:srgbClr val="E8ECF1"/>
@@ -5088,7 +5208,7 @@
                     <a:bodyPr/>
                     <a:lstStyle/>
                     <a:p>
-                      <a:pPr marL="0" indent="0">
+                      <a:pPr indent="0" marL="0">
                         <a:buNone/>
                       </a:pPr>
                       <a:r>
@@ -5109,7 +5229,7 @@
                       </a:endParaRPr>
                     </a:p>
                   </a:txBody>
-                  <a:tcPr>
+                  <a:tcPr marL="91440" marR="91440" marT="45720" marB="45720">
                     <a:lnL w="6350" cap="flat" cmpd="sng" algn="ctr">
                       <a:solidFill>
                         <a:srgbClr val="E8ECF1"/>
@@ -5148,11 +5268,6 @@
                     </a:lnB>
                   </a:tcPr>
                 </a:tc>
-                <a:extLst>
-                  <a:ext uri="{0D108BD9-81ED-4DB2-BD59-A6C34878D82A}">
-                    <a16:rowId xmlns:a16="http://schemas.microsoft.com/office/drawing/2014/main" val="10001"/>
-                  </a:ext>
-                </a:extLst>
               </a:tr>
               <a:tr h="228600">
                 <a:tc>
@@ -5160,7 +5275,7 @@
                     <a:bodyPr/>
                     <a:lstStyle/>
                     <a:p>
-                      <a:pPr marL="0" indent="0">
+                      <a:pPr indent="0" marL="0">
                         <a:buNone/>
                       </a:pPr>
                       <a:r>
@@ -5181,7 +5296,7 @@
                       </a:endParaRPr>
                     </a:p>
                   </a:txBody>
-                  <a:tcPr>
+                  <a:tcPr marL="91440" marR="91440" marT="45720" marB="45720">
                     <a:lnL w="6350" cap="flat" cmpd="sng" algn="ctr">
                       <a:solidFill>
                         <a:srgbClr val="E8ECF1"/>
@@ -5225,7 +5340,7 @@
                     <a:bodyPr/>
                     <a:lstStyle/>
                     <a:p>
-                      <a:pPr marL="0" indent="0">
+                      <a:pPr indent="0" marL="0">
                         <a:buNone/>
                       </a:pPr>
                       <a:r>
@@ -5246,7 +5361,7 @@
                       </a:endParaRPr>
                     </a:p>
                   </a:txBody>
-                  <a:tcPr>
+                  <a:tcPr marL="91440" marR="91440" marT="45720" marB="45720">
                     <a:lnL w="6350" cap="flat" cmpd="sng" algn="ctr">
                       <a:solidFill>
                         <a:srgbClr val="E8ECF1"/>
@@ -5290,7 +5405,7 @@
                     <a:bodyPr/>
                     <a:lstStyle/>
                     <a:p>
-                      <a:pPr marL="0" indent="0">
+                      <a:pPr indent="0" marL="0">
                         <a:buNone/>
                       </a:pPr>
                       <a:r>
@@ -5311,7 +5426,7 @@
                       </a:endParaRPr>
                     </a:p>
                   </a:txBody>
-                  <a:tcPr>
+                  <a:tcPr marL="91440" marR="91440" marT="45720" marB="45720">
                     <a:lnL w="6350" cap="flat" cmpd="sng" algn="ctr">
                       <a:solidFill>
                         <a:srgbClr val="E8ECF1"/>
@@ -5355,7 +5470,7 @@
                     <a:bodyPr/>
                     <a:lstStyle/>
                     <a:p>
-                      <a:pPr marL="0" indent="0">
+                      <a:pPr indent="0" marL="0">
                         <a:buNone/>
                       </a:pPr>
                       <a:r>
@@ -5376,7 +5491,7 @@
                       </a:endParaRPr>
                     </a:p>
                   </a:txBody>
-                  <a:tcPr>
+                  <a:tcPr marL="91440" marR="91440" marT="45720" marB="45720">
                     <a:lnL w="6350" cap="flat" cmpd="sng" algn="ctr">
                       <a:solidFill>
                         <a:srgbClr val="E8ECF1"/>
@@ -5420,7 +5535,7 @@
                     <a:bodyPr/>
                     <a:lstStyle/>
                     <a:p>
-                      <a:pPr marL="0" indent="0">
+                      <a:pPr indent="0" marL="0">
                         <a:buNone/>
                       </a:pPr>
                       <a:r>
@@ -5441,7 +5556,7 @@
                       </a:endParaRPr>
                     </a:p>
                   </a:txBody>
-                  <a:tcPr>
+                  <a:tcPr marL="91440" marR="91440" marT="45720" marB="45720">
                     <a:lnL w="6350" cap="flat" cmpd="sng" algn="ctr">
                       <a:solidFill>
                         <a:srgbClr val="E8ECF1"/>
@@ -5480,11 +5595,6 @@
                     </a:lnB>
                   </a:tcPr>
                 </a:tc>
-                <a:extLst>
-                  <a:ext uri="{0D108BD9-81ED-4DB2-BD59-A6C34878D82A}">
-                    <a16:rowId xmlns:a16="http://schemas.microsoft.com/office/drawing/2014/main" val="10002"/>
-                  </a:ext>
-                </a:extLst>
               </a:tr>
               <a:tr h="228600">
                 <a:tc>
@@ -5492,7 +5602,7 @@
                     <a:bodyPr/>
                     <a:lstStyle/>
                     <a:p>
-                      <a:pPr marL="0" indent="0">
+                      <a:pPr indent="0" marL="0">
                         <a:buNone/>
                       </a:pPr>
                       <a:r>
@@ -5513,7 +5623,7 @@
                       </a:endParaRPr>
                     </a:p>
                   </a:txBody>
-                  <a:tcPr>
+                  <a:tcPr marL="91440" marR="91440" marT="45720" marB="45720">
                     <a:lnL w="6350" cap="flat" cmpd="sng" algn="ctr">
                       <a:solidFill>
                         <a:srgbClr val="E8ECF1"/>
@@ -5557,7 +5667,7 @@
                     <a:bodyPr/>
                     <a:lstStyle/>
                     <a:p>
-                      <a:pPr marL="0" indent="0">
+                      <a:pPr indent="0" marL="0">
                         <a:buNone/>
                       </a:pPr>
                       <a:r>
@@ -5578,7 +5688,7 @@
                       </a:endParaRPr>
                     </a:p>
                   </a:txBody>
-                  <a:tcPr>
+                  <a:tcPr marL="91440" marR="91440" marT="45720" marB="45720">
                     <a:lnL w="6350" cap="flat" cmpd="sng" algn="ctr">
                       <a:solidFill>
                         <a:srgbClr val="E8ECF1"/>
@@ -5622,7 +5732,7 @@
                     <a:bodyPr/>
                     <a:lstStyle/>
                     <a:p>
-                      <a:pPr marL="0" indent="0">
+                      <a:pPr indent="0" marL="0">
                         <a:buNone/>
                       </a:pPr>
                       <a:r>
@@ -5643,7 +5753,7 @@
                       </a:endParaRPr>
                     </a:p>
                   </a:txBody>
-                  <a:tcPr>
+                  <a:tcPr marL="91440" marR="91440" marT="45720" marB="45720">
                     <a:lnL w="6350" cap="flat" cmpd="sng" algn="ctr">
                       <a:solidFill>
                         <a:srgbClr val="E8ECF1"/>
@@ -5687,7 +5797,7 @@
                     <a:bodyPr/>
                     <a:lstStyle/>
                     <a:p>
-                      <a:pPr marL="0" indent="0">
+                      <a:pPr indent="0" marL="0">
                         <a:buNone/>
                       </a:pPr>
                       <a:r>
@@ -5708,7 +5818,7 @@
                       </a:endParaRPr>
                     </a:p>
                   </a:txBody>
-                  <a:tcPr>
+                  <a:tcPr marL="91440" marR="91440" marT="45720" marB="45720">
                     <a:lnL w="6350" cap="flat" cmpd="sng" algn="ctr">
                       <a:solidFill>
                         <a:srgbClr val="E8ECF1"/>
@@ -5752,7 +5862,7 @@
                     <a:bodyPr/>
                     <a:lstStyle/>
                     <a:p>
-                      <a:pPr marL="0" indent="0">
+                      <a:pPr indent="0" marL="0">
                         <a:buNone/>
                       </a:pPr>
                       <a:r>
@@ -5773,7 +5883,7 @@
                       </a:endParaRPr>
                     </a:p>
                   </a:txBody>
-                  <a:tcPr>
+                  <a:tcPr marL="91440" marR="91440" marT="45720" marB="45720">
                     <a:lnL w="6350" cap="flat" cmpd="sng" algn="ctr">
                       <a:solidFill>
                         <a:srgbClr val="E8ECF1"/>
@@ -5812,11 +5922,6 @@
                     </a:lnB>
                   </a:tcPr>
                 </a:tc>
-                <a:extLst>
-                  <a:ext uri="{0D108BD9-81ED-4DB2-BD59-A6C34878D82A}">
-                    <a16:rowId xmlns:a16="http://schemas.microsoft.com/office/drawing/2014/main" val="10003"/>
-                  </a:ext>
-                </a:extLst>
               </a:tr>
             </a:tbl>
           </a:graphicData>
@@ -5863,7 +5968,7 @@
           <a:bodyPr wrap="square" lIns="0" tIns="0" rIns="0" bIns="0" rtlCol="0" anchor="ctr"/>
           <a:lstStyle/>
           <a:p>
-            <a:pPr marL="0" indent="0">
+            <a:pPr indent="0" marL="0">
               <a:buNone/>
             </a:pPr>
             <a:r>
@@ -5877,6 +5982,9 @@
               </a:rPr>
               <a:t>样本外结论：</a:t>
             </a:r>
+            <a:pPr indent="0" marL="0">
+              <a:buNone/>
+            </a:pPr>
             <a:r>
               <a:rPr lang="en-US" sz="1050" dirty="0">
                 <a:solidFill>
@@ -5888,6 +5996,9 @@
               </a:rPr>
               <a:t>5只标的超额全部为正。Sharpe从1.6-1.8衰减至1.2-1.5，但仍显著高于基准(0.5-0.7)。</a:t>
             </a:r>
+            <a:pPr indent="0" marL="0">
+              <a:buNone/>
+            </a:pPr>
             <a:r>
               <a:rPr lang="en-US" sz="1050" b="1" dirty="0">
                 <a:solidFill>
@@ -5905,7 +6016,7 @@
       </p:sp>
       <p:sp>
         <p:nvSpPr>
-          <p:cNvPr id="4" name="Text 6"/>
+          <p:cNvPr id="11" name="Text 6"/>
           <p:cNvSpPr/>
           <p:nvPr/>
         </p:nvSpPr>
@@ -5924,7 +6035,7 @@
           <a:bodyPr wrap="square" lIns="0" tIns="0" rIns="0" bIns="0" rtlCol="0" anchor="ctr"/>
           <a:lstStyle/>
           <a:p>
-            <a:pPr marL="0" indent="0">
+            <a:pPr indent="0" marL="0">
               <a:buNone/>
             </a:pPr>
             <a:r>
@@ -5963,7 +6074,7 @@
           <a:bodyPr wrap="square" lIns="0" tIns="0" rIns="0" bIns="0" rtlCol="0" anchor="ctr"/>
           <a:lstStyle/>
           <a:p>
-            <a:pPr marL="0" indent="0">
+            <a:pPr indent="0" marL="0">
               <a:buNone/>
             </a:pPr>
             <a:r>
@@ -6002,7 +6113,7 @@
           <a:bodyPr wrap="square" rtlCol="0" anchor="ctr"/>
           <a:lstStyle/>
           <a:p>
-            <a:pPr marL="0" indent="0" algn="r">
+            <a:pPr algn="r" indent="0" marL="0">
               <a:buNone/>
             </a:pPr>
             <a:r>
@@ -6036,7 +6147,6 @@
         <a:solidFill>
           <a:srgbClr val="F7F9FC"/>
         </a:solidFill>
-        <a:effectLst/>
       </p:bgPr>
     </p:bg>
     <p:spTree>
@@ -6074,7 +6184,7 @@
           <a:bodyPr wrap="square" lIns="0" tIns="0" rIns="0" bIns="0" rtlCol="0" anchor="ctr"/>
           <a:lstStyle/>
           <a:p>
-            <a:pPr marL="0" indent="0">
+            <a:pPr indent="0" marL="0">
               <a:buNone/>
             </a:pPr>
             <a:r>
@@ -6111,7 +6221,7 @@
           </a:solidFill>
           <a:ln/>
           <a:effectLst>
-            <a:outerShdw blurRad="50800" dist="19050" dir="8100000" algn="bl" rotWithShape="0">
+            <a:outerShdw sx="100000" sy="100000" kx="0" ky="0" algn="bl" rotWithShape="0" blurRad="50800" dist="19050" dir="8100000">
               <a:srgbClr val="000000">
                 <a:alpha val="8000"/>
               </a:srgbClr>
@@ -6160,7 +6270,7 @@
           <a:bodyPr wrap="square" lIns="0" tIns="0" rIns="0" bIns="0" rtlCol="0" anchor="ctr"/>
           <a:lstStyle/>
           <a:p>
-            <a:pPr marL="0" indent="0">
+            <a:pPr indent="0" marL="0">
               <a:buNone/>
             </a:pPr>
             <a:r>
@@ -6199,7 +6309,7 @@
           <a:bodyPr wrap="square" lIns="0" tIns="0" rIns="0" bIns="0" rtlCol="0" anchor="t"/>
           <a:lstStyle/>
           <a:p>
-            <a:pPr marL="0" indent="0">
+            <a:pPr indent="0" marL="0">
               <a:buNone/>
             </a:pPr>
             <a:r>
@@ -6216,7 +6326,7 @@
             <a:endParaRPr lang="en-US" sz="1000" dirty="0"/>
           </a:p>
           <a:p>
-            <a:pPr marL="0" indent="0">
+            <a:pPr indent="0" marL="0">
               <a:buNone/>
             </a:pPr>
             <a:r>
@@ -6233,7 +6343,7 @@
             <a:endParaRPr lang="en-US" sz="1000" dirty="0"/>
           </a:p>
           <a:p>
-            <a:pPr marL="0" indent="0">
+            <a:pPr indent="0" marL="0">
               <a:buNone/>
             </a:pPr>
             <a:r>
@@ -6250,7 +6360,7 @@
             <a:endParaRPr lang="en-US" sz="1000" dirty="0"/>
           </a:p>
           <a:p>
-            <a:pPr marL="0" indent="0">
+            <a:pPr indent="0" marL="0">
               <a:buNone/>
             </a:pPr>
             <a:r>
@@ -6267,7 +6377,7 @@
             <a:endParaRPr lang="en-US" sz="1000" dirty="0"/>
           </a:p>
           <a:p>
-            <a:pPr marL="0" indent="0">
+            <a:pPr indent="0" marL="0">
               <a:buNone/>
             </a:pPr>
             <a:r>
@@ -6304,7 +6414,7 @@
           </a:solidFill>
           <a:ln/>
           <a:effectLst>
-            <a:outerShdw blurRad="50800" dist="19050" dir="8100000" algn="bl" rotWithShape="0">
+            <a:outerShdw sx="100000" sy="100000" kx="0" ky="0" algn="bl" rotWithShape="0" blurRad="50800" dist="19050" dir="8100000">
               <a:srgbClr val="000000">
                 <a:alpha val="8000"/>
               </a:srgbClr>
@@ -6353,7 +6463,7 @@
           <a:bodyPr wrap="square" lIns="0" tIns="0" rIns="0" bIns="0" rtlCol="0" anchor="ctr"/>
           <a:lstStyle/>
           <a:p>
-            <a:pPr marL="0" indent="0">
+            <a:pPr indent="0" marL="0">
               <a:buNone/>
             </a:pPr>
             <a:r>
@@ -6392,7 +6502,7 @@
           <a:bodyPr wrap="square" lIns="0" tIns="0" rIns="0" bIns="0" rtlCol="0" anchor="t"/>
           <a:lstStyle/>
           <a:p>
-            <a:pPr marL="0" indent="0">
+            <a:pPr indent="0" marL="0">
               <a:buNone/>
             </a:pPr>
             <a:r>
@@ -6409,7 +6519,7 @@
             <a:endParaRPr lang="en-US" sz="1000" dirty="0"/>
           </a:p>
           <a:p>
-            <a:pPr marL="0" indent="0">
+            <a:pPr indent="0" marL="0">
               <a:buNone/>
             </a:pPr>
             <a:r>
@@ -6426,7 +6536,7 @@
             <a:endParaRPr lang="en-US" sz="1000" dirty="0"/>
           </a:p>
           <a:p>
-            <a:pPr marL="0" indent="0">
+            <a:pPr indent="0" marL="0">
               <a:buNone/>
             </a:pPr>
             <a:r>
@@ -6443,7 +6553,7 @@
             <a:endParaRPr lang="en-US" sz="1000" dirty="0"/>
           </a:p>
           <a:p>
-            <a:pPr marL="0" indent="0">
+            <a:pPr indent="0" marL="0">
               <a:buNone/>
             </a:pPr>
             <a:r>
@@ -6460,7 +6570,7 @@
             <a:endParaRPr lang="en-US" sz="1000" dirty="0"/>
           </a:p>
           <a:p>
-            <a:pPr marL="0" indent="0">
+            <a:pPr indent="0" marL="0">
               <a:buNone/>
             </a:pPr>
             <a:r>
@@ -6497,7 +6607,7 @@
           </a:solidFill>
           <a:ln/>
           <a:effectLst>
-            <a:outerShdw blurRad="50800" dist="19050" dir="8100000" algn="bl" rotWithShape="0">
+            <a:outerShdw sx="100000" sy="100000" kx="0" ky="0" algn="bl" rotWithShape="0" blurRad="50800" dist="19050" dir="8100000">
               <a:srgbClr val="000000">
                 <a:alpha val="8000"/>
               </a:srgbClr>
@@ -6546,7 +6656,7 @@
           <a:bodyPr wrap="square" lIns="0" tIns="0" rIns="0" bIns="0" rtlCol="0" anchor="ctr"/>
           <a:lstStyle/>
           <a:p>
-            <a:pPr marL="0" indent="0">
+            <a:pPr indent="0" marL="0">
               <a:buNone/>
             </a:pPr>
             <a:r>
@@ -6585,7 +6695,7 @@
           <a:bodyPr wrap="square" lIns="0" tIns="0" rIns="0" bIns="0" rtlCol="0" anchor="t"/>
           <a:lstStyle/>
           <a:p>
-            <a:pPr marL="0" indent="0">
+            <a:pPr indent="0" marL="0">
               <a:buNone/>
             </a:pPr>
             <a:r>
@@ -6602,7 +6712,7 @@
             <a:endParaRPr lang="en-US" sz="1000" dirty="0"/>
           </a:p>
           <a:p>
-            <a:pPr marL="0" indent="0">
+            <a:pPr indent="0" marL="0">
               <a:buNone/>
             </a:pPr>
             <a:r>
@@ -6619,7 +6729,7 @@
             <a:endParaRPr lang="en-US" sz="1000" dirty="0"/>
           </a:p>
           <a:p>
-            <a:pPr marL="0" indent="0">
+            <a:pPr indent="0" marL="0">
               <a:buNone/>
             </a:pPr>
             <a:r>
@@ -6636,7 +6746,7 @@
             <a:endParaRPr lang="en-US" sz="1000" dirty="0"/>
           </a:p>
           <a:p>
-            <a:pPr marL="0" indent="0">
+            <a:pPr indent="0" marL="0">
               <a:buNone/>
             </a:pPr>
             <a:r>
@@ -6653,7 +6763,7 @@
             <a:endParaRPr lang="en-US" sz="1000" dirty="0"/>
           </a:p>
           <a:p>
-            <a:pPr marL="0" indent="0">
+            <a:pPr indent="0" marL="0">
               <a:buNone/>
             </a:pPr>
             <a:r>
@@ -6690,7 +6800,7 @@
           </a:solidFill>
           <a:ln/>
           <a:effectLst>
-            <a:outerShdw blurRad="50800" dist="19050" dir="8100000" algn="bl" rotWithShape="0">
+            <a:outerShdw sx="100000" sy="100000" kx="0" ky="0" algn="bl" rotWithShape="0" blurRad="50800" dist="19050" dir="8100000">
               <a:srgbClr val="000000">
                 <a:alpha val="8000"/>
               </a:srgbClr>
@@ -6739,7 +6849,7 @@
           <a:bodyPr wrap="square" lIns="0" tIns="0" rIns="0" bIns="0" rtlCol="0" anchor="ctr"/>
           <a:lstStyle/>
           <a:p>
-            <a:pPr marL="0" indent="0">
+            <a:pPr indent="0" marL="0">
               <a:buNone/>
             </a:pPr>
             <a:r>
@@ -6778,7 +6888,7 @@
           <a:bodyPr wrap="square" lIns="0" tIns="0" rIns="0" bIns="0" rtlCol="0" anchor="t"/>
           <a:lstStyle/>
           <a:p>
-            <a:pPr marL="0" indent="0">
+            <a:pPr indent="0" marL="0">
               <a:buNone/>
             </a:pPr>
             <a:r>
@@ -6795,7 +6905,7 @@
             <a:endParaRPr lang="en-US" sz="1300" dirty="0"/>
           </a:p>
           <a:p>
-            <a:pPr marL="0" indent="0">
+            <a:pPr indent="0" marL="0">
               <a:buNone/>
             </a:pPr>
             <a:r>
@@ -6812,7 +6922,7 @@
             <a:endParaRPr lang="en-US" sz="1300" dirty="0"/>
           </a:p>
           <a:p>
-            <a:pPr marL="0" indent="0">
+            <a:pPr indent="0" marL="0">
               <a:buNone/>
             </a:pPr>
             <a:r>
@@ -6829,13 +6939,13 @@
             <a:endParaRPr lang="en-US" sz="1300" dirty="0"/>
           </a:p>
           <a:p>
-            <a:pPr marL="0" indent="0">
+            <a:pPr indent="0" marL="0">
               <a:buNone/>
             </a:pPr>
             <a:endParaRPr lang="en-US" sz="1300" dirty="0"/>
           </a:p>
           <a:p>
-            <a:pPr marL="0" indent="0">
+            <a:pPr indent="0" marL="0">
               <a:buNone/>
             </a:pPr>
             <a:r>
@@ -6852,7 +6962,7 @@
             <a:endParaRPr lang="en-US" sz="1300" dirty="0"/>
           </a:p>
           <a:p>
-            <a:pPr marL="0" indent="0">
+            <a:pPr indent="0" marL="0">
               <a:buNone/>
             </a:pPr>
             <a:r>
@@ -6869,7 +6979,7 @@
             <a:endParaRPr lang="en-US" sz="1300" dirty="0"/>
           </a:p>
           <a:p>
-            <a:pPr marL="0" indent="0">
+            <a:pPr indent="0" marL="0">
               <a:buNone/>
             </a:pPr>
             <a:r>
@@ -6908,7 +7018,7 @@
           <a:bodyPr wrap="square" lIns="0" tIns="0" rIns="0" bIns="0" rtlCol="0" anchor="ctr"/>
           <a:lstStyle/>
           <a:p>
-            <a:pPr marL="0" indent="0">
+            <a:pPr indent="0" marL="0">
               <a:buNone/>
             </a:pPr>
             <a:r>
@@ -6947,7 +7057,7 @@
           <a:bodyPr wrap="square" lIns="0" tIns="0" rIns="0" bIns="0" rtlCol="0" anchor="t"/>
           <a:lstStyle/>
           <a:p>
-            <a:pPr marL="0" indent="0">
+            <a:pPr indent="0" marL="0">
               <a:buNone/>
             </a:pPr>
             <a:r>
@@ -6964,7 +7074,7 @@
             <a:endParaRPr lang="en-US" sz="950" dirty="0"/>
           </a:p>
           <a:p>
-            <a:pPr marL="0" indent="0">
+            <a:pPr indent="0" marL="0">
               <a:buNone/>
             </a:pPr>
             <a:r>
@@ -6981,7 +7091,7 @@
             <a:endParaRPr lang="en-US" sz="950" dirty="0"/>
           </a:p>
           <a:p>
-            <a:pPr marL="0" indent="0">
+            <a:pPr indent="0" marL="0">
               <a:buNone/>
             </a:pPr>
             <a:r>
@@ -6998,7 +7108,7 @@
             <a:endParaRPr lang="en-US" sz="950" dirty="0"/>
           </a:p>
           <a:p>
-            <a:pPr marL="0" indent="0">
+            <a:pPr indent="0" marL="0">
               <a:buNone/>
             </a:pPr>
             <a:r>
@@ -7015,7 +7125,7 @@
             <a:endParaRPr lang="en-US" sz="950" dirty="0"/>
           </a:p>
           <a:p>
-            <a:pPr marL="0" indent="0">
+            <a:pPr indent="0" marL="0">
               <a:buNone/>
             </a:pPr>
             <a:r>
@@ -7032,7 +7142,7 @@
             <a:endParaRPr lang="en-US" sz="950" dirty="0"/>
           </a:p>
           <a:p>
-            <a:pPr marL="0" indent="0">
+            <a:pPr indent="0" marL="0">
               <a:buNone/>
             </a:pPr>
             <a:r>
@@ -7071,7 +7181,7 @@
           <a:bodyPr wrap="square" lIns="0" tIns="0" rIns="0" bIns="0" rtlCol="0" anchor="ctr"/>
           <a:lstStyle/>
           <a:p>
-            <a:pPr marL="0" indent="0">
+            <a:pPr indent="0" marL="0">
               <a:buNone/>
             </a:pPr>
             <a:r>
@@ -7110,7 +7220,7 @@
           <a:bodyPr wrap="square" rtlCol="0" anchor="ctr"/>
           <a:lstStyle/>
           <a:p>
-            <a:pPr marL="0" indent="0" algn="r">
+            <a:pPr algn="r" indent="0" marL="0">
               <a:buNone/>
             </a:pPr>
             <a:r>
@@ -7144,7 +7254,6 @@
         <a:solidFill>
           <a:srgbClr val="F7F9FC"/>
         </a:solidFill>
-        <a:effectLst/>
       </p:bgPr>
     </p:bg>
     <p:spTree>
@@ -7182,7 +7291,7 @@
           <a:bodyPr wrap="square" lIns="0" tIns="0" rIns="0" bIns="0" rtlCol="0" anchor="ctr"/>
           <a:lstStyle/>
           <a:p>
-            <a:pPr marL="0" indent="0">
+            <a:pPr indent="0" marL="0">
               <a:buNone/>
             </a:pPr>
             <a:r>
@@ -7221,7 +7330,7 @@
           <a:bodyPr wrap="square" lIns="0" tIns="0" rIns="0" bIns="0" rtlCol="0" anchor="ctr"/>
           <a:lstStyle/>
           <a:p>
-            <a:pPr marL="0" indent="0">
+            <a:pPr indent="0" marL="0">
               <a:buNone/>
             </a:pPr>
             <a:r>
@@ -7280,7 +7389,7 @@
           <a:bodyPr wrap="square" lIns="0" tIns="0" rIns="0" bIns="0" rtlCol="0" anchor="ctr"/>
           <a:lstStyle/>
           <a:p>
-            <a:pPr marL="0" indent="0" algn="ctr">
+            <a:pPr algn="ctr" indent="0" marL="0">
               <a:buNone/>
             </a:pPr>
             <a:r>
@@ -7319,7 +7428,7 @@
           <a:bodyPr wrap="square" lIns="0" tIns="0" rIns="0" bIns="0" rtlCol="0" anchor="ctr"/>
           <a:lstStyle/>
           <a:p>
-            <a:pPr marL="0" indent="0">
+            <a:pPr indent="0" marL="0">
               <a:buNone/>
             </a:pPr>
             <a:r>
@@ -7333,6 +7442,9 @@
               </a:rPr>
               <a:t>复合信号全面优于单一指标</a:t>
             </a:r>
+            <a:pPr indent="0" marL="0">
+              <a:buNone/>
+            </a:pPr>
             <a:r>
               <a:rPr lang="en-US" sz="1000" dirty="0">
                 <a:solidFill>
@@ -7389,7 +7501,7 @@
           <a:bodyPr wrap="square" lIns="0" tIns="0" rIns="0" bIns="0" rtlCol="0" anchor="ctr"/>
           <a:lstStyle/>
           <a:p>
-            <a:pPr marL="0" indent="0" algn="ctr">
+            <a:pPr algn="ctr" indent="0" marL="0">
               <a:buNone/>
             </a:pPr>
             <a:r>
@@ -7428,7 +7540,7 @@
           <a:bodyPr wrap="square" lIns="0" tIns="0" rIns="0" bIns="0" rtlCol="0" anchor="ctr"/>
           <a:lstStyle/>
           <a:p>
-            <a:pPr marL="0" indent="0">
+            <a:pPr indent="0" marL="0">
               <a:buNone/>
             </a:pPr>
             <a:r>
@@ -7442,6 +7554,9 @@
               </a:rPr>
               <a:t>动态仓位有效控制回撤</a:t>
             </a:r>
+            <a:pPr indent="0" marL="0">
+              <a:buNone/>
+            </a:pPr>
             <a:r>
               <a:rPr lang="en-US" sz="1000" dirty="0">
                 <a:solidFill>
@@ -7498,7 +7613,7 @@
           <a:bodyPr wrap="square" lIns="0" tIns="0" rIns="0" bIns="0" rtlCol="0" anchor="ctr"/>
           <a:lstStyle/>
           <a:p>
-            <a:pPr marL="0" indent="0" algn="ctr">
+            <a:pPr algn="ctr" indent="0" marL="0">
               <a:buNone/>
             </a:pPr>
             <a:r>
@@ -7537,7 +7652,7 @@
           <a:bodyPr wrap="square" lIns="0" tIns="0" rIns="0" bIns="0" rtlCol="0" anchor="ctr"/>
           <a:lstStyle/>
           <a:p>
-            <a:pPr marL="0" indent="0">
+            <a:pPr indent="0" marL="0">
               <a:buNone/>
             </a:pPr>
             <a:r>
@@ -7551,6 +7666,9 @@
               </a:rPr>
               <a:t>低换手是核心优势</a:t>
             </a:r>
+            <a:pPr indent="0" marL="0">
+              <a:buNone/>
+            </a:pPr>
             <a:r>
               <a:rPr lang="en-US" sz="1000" dirty="0">
                 <a:solidFill>
@@ -7607,7 +7725,7 @@
           <a:bodyPr wrap="square" lIns="0" tIns="0" rIns="0" bIns="0" rtlCol="0" anchor="ctr"/>
           <a:lstStyle/>
           <a:p>
-            <a:pPr marL="0" indent="0" algn="ctr">
+            <a:pPr algn="ctr" indent="0" marL="0">
               <a:buNone/>
             </a:pPr>
             <a:r>
@@ -7646,7 +7764,7 @@
           <a:bodyPr wrap="square" lIns="0" tIns="0" rIns="0" bIns="0" rtlCol="0" anchor="ctr"/>
           <a:lstStyle/>
           <a:p>
-            <a:pPr marL="0" indent="0">
+            <a:pPr indent="0" marL="0">
               <a:buNone/>
             </a:pPr>
             <a:r>
@@ -7660,6 +7778,9 @@
               </a:rPr>
               <a:t>策略具有初步稳健性</a:t>
             </a:r>
+            <a:pPr indent="0" marL="0">
+              <a:buNone/>
+            </a:pPr>
             <a:r>
               <a:rPr lang="en-US" sz="1000" dirty="0">
                 <a:solidFill>
@@ -7716,7 +7837,7 @@
           <a:bodyPr wrap="square" lIns="0" tIns="0" rIns="0" bIns="0" rtlCol="0" anchor="ctr"/>
           <a:lstStyle/>
           <a:p>
-            <a:pPr marL="0" indent="0" algn="ctr">
+            <a:pPr algn="ctr" indent="0" marL="0">
               <a:buNone/>
             </a:pPr>
             <a:r>
@@ -7755,7 +7876,7 @@
           <a:bodyPr wrap="square" lIns="0" tIns="0" rIns="0" bIns="0" rtlCol="0" anchor="ctr"/>
           <a:lstStyle/>
           <a:p>
-            <a:pPr marL="0" indent="0">
+            <a:pPr indent="0" marL="0">
               <a:buNone/>
             </a:pPr>
             <a:r>
@@ -7769,6 +7890,9 @@
               </a:rPr>
               <a:t>端到端闭环</a:t>
             </a:r>
+            <a:pPr indent="0" marL="0">
+              <a:buNone/>
+            </a:pPr>
             <a:r>
               <a:rPr lang="en-US" sz="1000" dirty="0">
                 <a:solidFill>
@@ -7825,7 +7949,7 @@
           <a:bodyPr wrap="square" lIns="0" tIns="0" rIns="0" bIns="0" rtlCol="0" anchor="ctr"/>
           <a:lstStyle/>
           <a:p>
-            <a:pPr marL="0" indent="0">
+            <a:pPr indent="0" marL="0">
               <a:buNone/>
             </a:pPr>
             <a:r>
@@ -7864,7 +7988,7 @@
           <a:bodyPr wrap="square" lIns="0" tIns="0" rIns="0" bIns="0" rtlCol="0" anchor="t"/>
           <a:lstStyle/>
           <a:p>
-            <a:pPr marL="0" indent="0">
+            <a:pPr indent="0" marL="0">
               <a:buNone/>
             </a:pPr>
             <a:r>
@@ -7881,7 +8005,7 @@
             <a:endParaRPr lang="en-US" sz="950" dirty="0"/>
           </a:p>
           <a:p>
-            <a:pPr marL="0" indent="0">
+            <a:pPr indent="0" marL="0">
               <a:buNone/>
             </a:pPr>
             <a:r>
@@ -7898,7 +8022,7 @@
             <a:endParaRPr lang="en-US" sz="950" dirty="0"/>
           </a:p>
           <a:p>
-            <a:pPr marL="0" indent="0">
+            <a:pPr indent="0" marL="0">
               <a:buNone/>
             </a:pPr>
             <a:r>
@@ -7915,7 +8039,7 @@
             <a:endParaRPr lang="en-US" sz="950" dirty="0"/>
           </a:p>
           <a:p>
-            <a:pPr marL="0" indent="0">
+            <a:pPr indent="0" marL="0">
               <a:buNone/>
             </a:pPr>
             <a:r>
@@ -7932,7 +8056,7 @@
             <a:endParaRPr lang="en-US" sz="950" dirty="0"/>
           </a:p>
           <a:p>
-            <a:pPr marL="0" indent="0">
+            <a:pPr indent="0" marL="0">
               <a:buNone/>
             </a:pPr>
             <a:r>
@@ -7949,7 +8073,7 @@
             <a:endParaRPr lang="en-US" sz="950" dirty="0"/>
           </a:p>
           <a:p>
-            <a:pPr marL="0" indent="0">
+            <a:pPr indent="0" marL="0">
               <a:buNone/>
             </a:pPr>
             <a:r>
@@ -7988,7 +8112,7 @@
           <a:bodyPr wrap="square" lIns="0" tIns="0" rIns="0" bIns="0" rtlCol="0" anchor="ctr"/>
           <a:lstStyle/>
           <a:p>
-            <a:pPr marL="0" indent="0">
+            <a:pPr indent="0" marL="0">
               <a:buNone/>
             </a:pPr>
             <a:r>
@@ -8027,7 +8151,7 @@
           <a:bodyPr wrap="square" rtlCol="0" anchor="ctr"/>
           <a:lstStyle/>
           <a:p>
-            <a:pPr marL="0" indent="0" algn="r">
+            <a:pPr algn="r" indent="0" marL="0">
               <a:buNone/>
             </a:pPr>
             <a:r>
@@ -8061,7 +8185,6 @@
         <a:solidFill>
           <a:srgbClr val="0B1D3A"/>
         </a:solidFill>
-        <a:effectLst/>
       </p:bgPr>
     </p:bg>
     <p:spTree>
@@ -8119,7 +8242,7 @@
           <a:bodyPr wrap="square" lIns="0" tIns="0" rIns="0" bIns="0" rtlCol="0" anchor="ctr"/>
           <a:lstStyle/>
           <a:p>
-            <a:pPr marL="0" indent="0">
+            <a:pPr indent="0" marL="0">
               <a:buNone/>
             </a:pPr>
             <a:r>
@@ -8158,7 +8281,7 @@
           <a:bodyPr wrap="square" lIns="0" tIns="0" rIns="0" bIns="0" rtlCol="0" anchor="ctr"/>
           <a:lstStyle/>
           <a:p>
-            <a:pPr marL="0" indent="0">
+            <a:pPr indent="0" marL="0">
               <a:buNone/>
             </a:pPr>
             <a:r>
@@ -8217,7 +8340,7 @@
           <a:bodyPr wrap="square" lIns="0" tIns="0" rIns="0" bIns="0" rtlCol="0" anchor="t"/>
           <a:lstStyle/>
           <a:p>
-            <a:pPr marL="0" indent="0">
+            <a:pPr indent="0" marL="0">
               <a:buNone/>
             </a:pPr>
             <a:r>
@@ -8231,6 +8354,9 @@
               </a:rPr>
               <a:t>GitHub：</a:t>
             </a:r>
+            <a:pPr indent="0" marL="0">
+              <a:buNone/>
+            </a:pPr>
             <a:r>
               <a:rPr lang="en-US" sz="1300" dirty="0">
                 <a:solidFill>
@@ -8242,6 +8368,9 @@
               </a:rPr>
               <a:t>github.com/7changecahng/quant-strategy</a:t>
             </a:r>
+            <a:pPr indent="0" marL="0">
+              <a:buNone/>
+            </a:pPr>
             <a:r>
               <a:rPr lang="en-US" sz="1100" dirty="0">
                 <a:solidFill>
@@ -8253,10 +8382,13 @@
               </a:rPr>
               <a:t>  (代码 + README + 39个测试)</a:t>
             </a:r>
+            <a:pPr indent="0" marL="0">
+              <a:buNone/>
+            </a:pPr>
             <a:endParaRPr lang="en-US" sz="1300" dirty="0"/>
           </a:p>
           <a:p>
-            <a:pPr marL="0" indent="0">
+            <a:pPr indent="0" marL="0">
               <a:buNone/>
             </a:pPr>
             <a:r>
@@ -8270,6 +8402,9 @@
               </a:rPr>
               <a:t>Dashboard：</a:t>
             </a:r>
+            <a:pPr indent="0" marL="0">
+              <a:buNone/>
+            </a:pPr>
             <a:r>
               <a:rPr lang="en-US" sz="1300" dirty="0">
                 <a:solidFill>
@@ -8279,12 +8414,15 @@
                 <a:ea typeface="Calibri" pitchFamily="34" charset="-122"/>
                 <a:cs typeface="Calibri" pitchFamily="34" charset="-120"/>
               </a:rPr>
-              <a:t>http://localhost:8501  (现场运行中)</a:t>
-            </a:r>
+              <a:t>quant-strategy.streamlit.app (在线演示)</a:t>
+            </a:r>
+            <a:pPr indent="0" marL="0">
+              <a:buNone/>
+            </a:pPr>
             <a:endParaRPr lang="en-US" sz="1300" dirty="0"/>
           </a:p>
           <a:p>
-            <a:pPr marL="0" indent="0">
+            <a:pPr indent="0" marL="0">
               <a:buNone/>
             </a:pPr>
             <a:r>
@@ -8323,7 +8461,7 @@
           <a:bodyPr wrap="square" rtlCol="0" anchor="ctr"/>
           <a:lstStyle/>
           <a:p>
-            <a:pPr marL="0" indent="0" algn="r">
+            <a:pPr algn="r" indent="0" marL="0">
               <a:buNone/>
             </a:pPr>
             <a:r>
@@ -8357,7 +8495,6 @@
         <a:solidFill>
           <a:srgbClr val="F7F9FC"/>
         </a:solidFill>
-        <a:effectLst/>
       </p:bgPr>
     </p:bg>
     <p:spTree>
@@ -8395,7 +8532,7 @@
           <a:bodyPr wrap="square" lIns="0" tIns="0" rIns="0" bIns="0" rtlCol="0" anchor="ctr"/>
           <a:lstStyle/>
           <a:p>
-            <a:pPr marL="0" indent="0">
+            <a:pPr indent="0" marL="0">
               <a:buNone/>
             </a:pPr>
             <a:r>
@@ -8454,7 +8591,7 @@
           <a:bodyPr wrap="square" lIns="0" tIns="0" rIns="0" bIns="0" rtlCol="0" anchor="ctr"/>
           <a:lstStyle/>
           <a:p>
-            <a:pPr marL="0" indent="0" algn="ctr">
+            <a:pPr algn="ctr" indent="0" marL="0">
               <a:buNone/>
             </a:pPr>
             <a:r>
@@ -8493,7 +8630,7 @@
           <a:bodyPr wrap="square" lIns="0" tIns="0" rIns="0" bIns="0" rtlCol="0" anchor="ctr"/>
           <a:lstStyle/>
           <a:p>
-            <a:pPr marL="0" indent="0">
+            <a:pPr indent="0" marL="0">
               <a:buNone/>
             </a:pPr>
             <a:r>
@@ -8532,7 +8669,7 @@
           <a:bodyPr wrap="square" lIns="0" tIns="0" rIns="0" bIns="0" rtlCol="0" anchor="ctr"/>
           <a:lstStyle/>
           <a:p>
-            <a:pPr marL="0" indent="0">
+            <a:pPr indent="0" marL="0">
               <a:buNone/>
             </a:pPr>
             <a:r>
@@ -8614,7 +8751,7 @@
           <a:bodyPr wrap="square" lIns="0" tIns="0" rIns="0" bIns="0" rtlCol="0" anchor="ctr"/>
           <a:lstStyle/>
           <a:p>
-            <a:pPr marL="0" indent="0" algn="ctr">
+            <a:pPr algn="ctr" indent="0" marL="0">
               <a:buNone/>
             </a:pPr>
             <a:r>
@@ -8653,7 +8790,7 @@
           <a:bodyPr wrap="square" lIns="0" tIns="0" rIns="0" bIns="0" rtlCol="0" anchor="ctr"/>
           <a:lstStyle/>
           <a:p>
-            <a:pPr marL="0" indent="0">
+            <a:pPr indent="0" marL="0">
               <a:buNone/>
             </a:pPr>
             <a:r>
@@ -8692,7 +8829,7 @@
           <a:bodyPr wrap="square" lIns="0" tIns="0" rIns="0" bIns="0" rtlCol="0" anchor="ctr"/>
           <a:lstStyle/>
           <a:p>
-            <a:pPr marL="0" indent="0">
+            <a:pPr indent="0" marL="0">
               <a:buNone/>
             </a:pPr>
             <a:r>
@@ -8774,7 +8911,7 @@
           <a:bodyPr wrap="square" lIns="0" tIns="0" rIns="0" bIns="0" rtlCol="0" anchor="ctr"/>
           <a:lstStyle/>
           <a:p>
-            <a:pPr marL="0" indent="0" algn="ctr">
+            <a:pPr algn="ctr" indent="0" marL="0">
               <a:buNone/>
             </a:pPr>
             <a:r>
@@ -8813,7 +8950,7 @@
           <a:bodyPr wrap="square" lIns="0" tIns="0" rIns="0" bIns="0" rtlCol="0" anchor="ctr"/>
           <a:lstStyle/>
           <a:p>
-            <a:pPr marL="0" indent="0">
+            <a:pPr indent="0" marL="0">
               <a:buNone/>
             </a:pPr>
             <a:r>
@@ -8852,7 +8989,7 @@
           <a:bodyPr wrap="square" lIns="0" tIns="0" rIns="0" bIns="0" rtlCol="0" anchor="ctr"/>
           <a:lstStyle/>
           <a:p>
-            <a:pPr marL="0" indent="0">
+            <a:pPr indent="0" marL="0">
               <a:buNone/>
             </a:pPr>
             <a:r>
@@ -8934,7 +9071,7 @@
           <a:bodyPr wrap="square" lIns="0" tIns="0" rIns="0" bIns="0" rtlCol="0" anchor="ctr"/>
           <a:lstStyle/>
           <a:p>
-            <a:pPr marL="0" indent="0" algn="ctr">
+            <a:pPr algn="ctr" indent="0" marL="0">
               <a:buNone/>
             </a:pPr>
             <a:r>
@@ -8973,7 +9110,7 @@
           <a:bodyPr wrap="square" lIns="0" tIns="0" rIns="0" bIns="0" rtlCol="0" anchor="ctr"/>
           <a:lstStyle/>
           <a:p>
-            <a:pPr marL="0" indent="0">
+            <a:pPr indent="0" marL="0">
               <a:buNone/>
             </a:pPr>
             <a:r>
@@ -9012,7 +9149,7 @@
           <a:bodyPr wrap="square" lIns="0" tIns="0" rIns="0" bIns="0" rtlCol="0" anchor="ctr"/>
           <a:lstStyle/>
           <a:p>
-            <a:pPr marL="0" indent="0">
+            <a:pPr indent="0" marL="0">
               <a:buNone/>
             </a:pPr>
             <a:r>
@@ -9049,7 +9186,7 @@
           </a:solidFill>
           <a:ln/>
           <a:effectLst>
-            <a:outerShdw blurRad="50800" dist="19050" dir="8100000" algn="bl" rotWithShape="0">
+            <a:outerShdw sx="100000" sy="100000" kx="0" ky="0" algn="bl" rotWithShape="0" blurRad="50800" dist="19050" dir="8100000">
               <a:srgbClr val="000000">
                 <a:alpha val="8000"/>
               </a:srgbClr>
@@ -9078,7 +9215,7 @@
           <a:bodyPr wrap="square" lIns="0" tIns="0" rIns="0" bIns="0" rtlCol="0" anchor="ctr"/>
           <a:lstStyle/>
           <a:p>
-            <a:pPr marL="0" indent="0" algn="ctr">
+            <a:pPr algn="ctr" indent="0" marL="0">
               <a:buNone/>
             </a:pPr>
             <a:r>
@@ -9137,7 +9274,7 @@
           <a:bodyPr wrap="square" lIns="0" tIns="0" rIns="0" bIns="0" rtlCol="0" anchor="t"/>
           <a:lstStyle/>
           <a:p>
-            <a:pPr marL="0" indent="0">
+            <a:pPr indent="0" marL="0">
               <a:buNone/>
             </a:pPr>
             <a:r>
@@ -9154,7 +9291,7 @@
             <a:endParaRPr lang="en-US" sz="1000" dirty="0"/>
           </a:p>
           <a:p>
-            <a:pPr marL="0" indent="0">
+            <a:pPr indent="0" marL="0">
               <a:buNone/>
             </a:pPr>
             <a:r>
@@ -9171,7 +9308,7 @@
             <a:endParaRPr lang="en-US" sz="1000" dirty="0"/>
           </a:p>
           <a:p>
-            <a:pPr marL="0" indent="0">
+            <a:pPr indent="0" marL="0">
               <a:buNone/>
             </a:pPr>
             <a:r>
@@ -9188,7 +9325,7 @@
             <a:endParaRPr lang="en-US" sz="1000" dirty="0"/>
           </a:p>
           <a:p>
-            <a:pPr marL="0" indent="0">
+            <a:pPr indent="0" marL="0">
               <a:buNone/>
             </a:pPr>
             <a:r>
@@ -9205,7 +9342,7 @@
             <a:endParaRPr lang="en-US" sz="1000" dirty="0"/>
           </a:p>
           <a:p>
-            <a:pPr marL="0" indent="0">
+            <a:pPr indent="0" marL="0">
               <a:buNone/>
             </a:pPr>
             <a:r>
@@ -9222,7 +9359,7 @@
             <a:endParaRPr lang="en-US" sz="1000" dirty="0"/>
           </a:p>
           <a:p>
-            <a:pPr marL="0" indent="0">
+            <a:pPr indent="0" marL="0">
               <a:buNone/>
             </a:pPr>
             <a:r>
@@ -9239,7 +9376,7 @@
             <a:endParaRPr lang="en-US" sz="1000" dirty="0"/>
           </a:p>
           <a:p>
-            <a:pPr marL="0" indent="0">
+            <a:pPr indent="0" marL="0">
               <a:buNone/>
             </a:pPr>
             <a:r>
@@ -9256,7 +9393,7 @@
             <a:endParaRPr lang="en-US" sz="1000" dirty="0"/>
           </a:p>
           <a:p>
-            <a:pPr marL="0" indent="0">
+            <a:pPr indent="0" marL="0">
               <a:buNone/>
             </a:pPr>
             <a:r>
@@ -9295,7 +9432,7 @@
           <a:bodyPr wrap="square" lIns="0" tIns="0" rIns="0" bIns="0" rtlCol="0" anchor="ctr"/>
           <a:lstStyle/>
           <a:p>
-            <a:pPr marL="0" indent="0">
+            <a:pPr indent="0" marL="0">
               <a:buNone/>
             </a:pPr>
             <a:r>
@@ -9334,7 +9471,7 @@
           <a:bodyPr wrap="square" rtlCol="0" anchor="ctr"/>
           <a:lstStyle/>
           <a:p>
-            <a:pPr marL="0" indent="0" algn="r">
+            <a:pPr algn="r" indent="0" marL="0">
               <a:buNone/>
             </a:pPr>
             <a:r>
@@ -9368,7 +9505,6 @@
         <a:solidFill>
           <a:srgbClr val="F7F9FC"/>
         </a:solidFill>
-        <a:effectLst/>
       </p:bgPr>
     </p:bg>
     <p:spTree>
@@ -9406,7 +9542,7 @@
           <a:bodyPr wrap="square" lIns="0" tIns="0" rIns="0" bIns="0" rtlCol="0" anchor="ctr"/>
           <a:lstStyle/>
           <a:p>
-            <a:pPr marL="0" indent="0">
+            <a:pPr indent="0" marL="0">
               <a:buNone/>
             </a:pPr>
             <a:r>
@@ -9443,7 +9579,7 @@
           </a:solidFill>
           <a:ln/>
           <a:effectLst>
-            <a:outerShdw blurRad="50800" dist="19050" dir="8100000" algn="bl" rotWithShape="0">
+            <a:outerShdw sx="100000" sy="100000" kx="0" ky="0" algn="bl" rotWithShape="0" blurRad="50800" dist="19050" dir="8100000">
               <a:srgbClr val="000000">
                 <a:alpha val="8000"/>
               </a:srgbClr>
@@ -9492,7 +9628,7 @@
           <a:bodyPr wrap="square" lIns="0" tIns="0" rIns="0" bIns="0" rtlCol="0" anchor="ctr"/>
           <a:lstStyle/>
           <a:p>
-            <a:pPr marL="0" indent="0">
+            <a:pPr indent="0" marL="0">
               <a:buNone/>
             </a:pPr>
             <a:r>
@@ -9531,7 +9667,7 @@
           <a:bodyPr wrap="square" lIns="0" tIns="0" rIns="0" bIns="0" rtlCol="0" anchor="t"/>
           <a:lstStyle/>
           <a:p>
-            <a:pPr marL="0" indent="0">
+            <a:pPr indent="0" marL="0">
               <a:buNone/>
             </a:pPr>
             <a:r>
@@ -9568,7 +9704,7 @@
           </a:solidFill>
           <a:ln/>
           <a:effectLst>
-            <a:outerShdw blurRad="50800" dist="19050" dir="8100000" algn="bl" rotWithShape="0">
+            <a:outerShdw sx="100000" sy="100000" kx="0" ky="0" algn="bl" rotWithShape="0" blurRad="50800" dist="19050" dir="8100000">
               <a:srgbClr val="000000">
                 <a:alpha val="8000"/>
               </a:srgbClr>
@@ -9617,7 +9753,7 @@
           <a:bodyPr wrap="square" lIns="0" tIns="0" rIns="0" bIns="0" rtlCol="0" anchor="ctr"/>
           <a:lstStyle/>
           <a:p>
-            <a:pPr marL="0" indent="0">
+            <a:pPr indent="0" marL="0">
               <a:buNone/>
             </a:pPr>
             <a:r>
@@ -9656,7 +9792,7 @@
           <a:bodyPr wrap="square" lIns="0" tIns="0" rIns="0" bIns="0" rtlCol="0" anchor="t"/>
           <a:lstStyle/>
           <a:p>
-            <a:pPr marL="0" indent="0">
+            <a:pPr indent="0" marL="0">
               <a:buNone/>
             </a:pPr>
             <a:r>
@@ -9693,7 +9829,7 @@
           </a:solidFill>
           <a:ln/>
           <a:effectLst>
-            <a:outerShdw blurRad="50800" dist="19050" dir="8100000" algn="bl" rotWithShape="0">
+            <a:outerShdw sx="100000" sy="100000" kx="0" ky="0" algn="bl" rotWithShape="0" blurRad="50800" dist="19050" dir="8100000">
               <a:srgbClr val="000000">
                 <a:alpha val="8000"/>
               </a:srgbClr>
@@ -9742,7 +9878,7 @@
           <a:bodyPr wrap="square" lIns="0" tIns="0" rIns="0" bIns="0" rtlCol="0" anchor="ctr"/>
           <a:lstStyle/>
           <a:p>
-            <a:pPr marL="0" indent="0">
+            <a:pPr indent="0" marL="0">
               <a:buNone/>
             </a:pPr>
             <a:r>
@@ -9781,7 +9917,7 @@
           <a:bodyPr wrap="square" lIns="0" tIns="0" rIns="0" bIns="0" rtlCol="0" anchor="t"/>
           <a:lstStyle/>
           <a:p>
-            <a:pPr marL="0" indent="0">
+            <a:pPr indent="0" marL="0">
               <a:buNone/>
             </a:pPr>
             <a:r>
@@ -9820,7 +9956,7 @@
           <a:bodyPr wrap="square" lIns="0" tIns="0" rIns="0" bIns="0" rtlCol="0" anchor="ctr"/>
           <a:lstStyle/>
           <a:p>
-            <a:pPr marL="0" indent="0" algn="ctr">
+            <a:pPr algn="ctr" indent="0" marL="0">
               <a:buNone/>
             </a:pPr>
             <a:r>
@@ -9857,7 +9993,7 @@
           </a:solidFill>
           <a:ln/>
           <a:effectLst>
-            <a:outerShdw blurRad="50800" dist="19050" dir="8100000" algn="bl" rotWithShape="0">
+            <a:outerShdw sx="100000" sy="100000" kx="0" ky="0" algn="bl" rotWithShape="0" blurRad="50800" dist="19050" dir="8100000">
               <a:srgbClr val="000000">
                 <a:alpha val="8000"/>
               </a:srgbClr>
@@ -9906,7 +10042,7 @@
           <a:bodyPr wrap="square" lIns="0" tIns="0" rIns="0" bIns="0" rtlCol="0" anchor="ctr"/>
           <a:lstStyle/>
           <a:p>
-            <a:pPr marL="0" indent="0">
+            <a:pPr indent="0" marL="0">
               <a:buNone/>
             </a:pPr>
             <a:r>
@@ -9945,7 +10081,7 @@
           <a:bodyPr wrap="square" lIns="0" tIns="0" rIns="0" bIns="0" rtlCol="0" anchor="ctr"/>
           <a:lstStyle/>
           <a:p>
-            <a:pPr marL="0" indent="0">
+            <a:pPr indent="0" marL="0">
               <a:buNone/>
             </a:pPr>
             <a:r>
@@ -9984,7 +10120,7 @@
           <a:bodyPr wrap="square" lIns="0" tIns="0" rIns="0" bIns="0" rtlCol="0" anchor="t"/>
           <a:lstStyle/>
           <a:p>
-            <a:pPr marL="0" indent="0">
+            <a:pPr indent="0" marL="0">
               <a:buNone/>
             </a:pPr>
             <a:r>
@@ -10001,7 +10137,7 @@
             <a:endParaRPr lang="en-US" sz="1000" dirty="0"/>
           </a:p>
           <a:p>
-            <a:pPr marL="0" indent="0">
+            <a:pPr indent="0" marL="0">
               <a:buNone/>
             </a:pPr>
             <a:r>
@@ -10060,7 +10196,7 @@
           <a:bodyPr wrap="square" lIns="0" tIns="0" rIns="0" bIns="0" rtlCol="0" anchor="ctr"/>
           <a:lstStyle/>
           <a:p>
-            <a:pPr marL="0" indent="0">
+            <a:pPr indent="0" marL="0">
               <a:buNone/>
             </a:pPr>
             <a:r>
@@ -10099,7 +10235,7 @@
           <a:bodyPr wrap="square" lIns="0" tIns="0" rIns="0" bIns="0" rtlCol="0" anchor="t"/>
           <a:lstStyle/>
           <a:p>
-            <a:pPr marL="0" indent="0">
+            <a:pPr indent="0" marL="0">
               <a:buNone/>
             </a:pPr>
             <a:r>
@@ -10116,7 +10252,7 @@
             <a:endParaRPr lang="en-US" sz="1000" dirty="0"/>
           </a:p>
           <a:p>
-            <a:pPr marL="0" indent="0">
+            <a:pPr indent="0" marL="0">
               <a:buNone/>
             </a:pPr>
             <a:r>
@@ -10175,7 +10311,7 @@
           <a:bodyPr wrap="square" lIns="0" tIns="0" rIns="0" bIns="0" rtlCol="0" anchor="ctr"/>
           <a:lstStyle/>
           <a:p>
-            <a:pPr marL="0" indent="0">
+            <a:pPr indent="0" marL="0">
               <a:buNone/>
             </a:pPr>
             <a:r>
@@ -10214,7 +10350,7 @@
           <a:bodyPr wrap="square" lIns="0" tIns="0" rIns="0" bIns="0" rtlCol="0" anchor="t"/>
           <a:lstStyle/>
           <a:p>
-            <a:pPr marL="0" indent="0">
+            <a:pPr indent="0" marL="0">
               <a:buNone/>
             </a:pPr>
             <a:r>
@@ -10231,7 +10367,7 @@
             <a:endParaRPr lang="en-US" sz="1000" dirty="0"/>
           </a:p>
           <a:p>
-            <a:pPr marL="0" indent="0">
+            <a:pPr indent="0" marL="0">
               <a:buNone/>
             </a:pPr>
             <a:r>
@@ -10270,7 +10406,7 @@
           <a:bodyPr wrap="square" rtlCol="0" anchor="ctr"/>
           <a:lstStyle/>
           <a:p>
-            <a:pPr marL="0" indent="0" algn="r">
+            <a:pPr algn="r" indent="0" marL="0">
               <a:buNone/>
             </a:pPr>
             <a:r>
@@ -10304,7 +10440,6 @@
         <a:solidFill>
           <a:srgbClr val="F7F9FC"/>
         </a:solidFill>
-        <a:effectLst/>
       </p:bgPr>
     </p:bg>
     <p:spTree>
@@ -10342,7 +10477,7 @@
           <a:bodyPr wrap="square" lIns="0" tIns="0" rIns="0" bIns="0" rtlCol="0" anchor="ctr"/>
           <a:lstStyle/>
           <a:p>
-            <a:pPr marL="0" indent="0">
+            <a:pPr indent="0" marL="0">
               <a:buNone/>
             </a:pPr>
             <a:r>
@@ -10383,20 +10518,8 @@
             <a:tbl>
               <a:tblPr/>
               <a:tblGrid>
-                <a:gridCol w="1463040">
-                  <a:extLst>
-                    <a:ext uri="{9D8B030D-6E8A-4147-A177-3AD203B41FA5}">
-                      <a16:colId xmlns:a16="http://schemas.microsoft.com/office/drawing/2014/main" val="20000"/>
-                    </a:ext>
-                  </a:extLst>
-                </a:gridCol>
-                <a:gridCol w="2926080">
-                  <a:extLst>
-                    <a:ext uri="{9D8B030D-6E8A-4147-A177-3AD203B41FA5}">
-                      <a16:colId xmlns:a16="http://schemas.microsoft.com/office/drawing/2014/main" val="20001"/>
-                    </a:ext>
-                  </a:extLst>
-                </a:gridCol>
+                <a:gridCol w="1463040"/>
+                <a:gridCol w="2926080"/>
               </a:tblGrid>
               <a:tr h="320040">
                 <a:tc>
@@ -10404,7 +10527,7 @@
                     <a:bodyPr/>
                     <a:lstStyle/>
                     <a:p>
-                      <a:pPr marL="0" indent="0">
+                      <a:pPr indent="0" marL="0">
                         <a:buNone/>
                       </a:pPr>
                       <a:r>
@@ -10425,7 +10548,7 @@
                       </a:endParaRPr>
                     </a:p>
                   </a:txBody>
-                  <a:tcPr>
+                  <a:tcPr marL="91440" marR="91440" marT="45720" marB="45720">
                     <a:lnL w="6350" cap="flat" cmpd="sng" algn="ctr">
                       <a:solidFill>
                         <a:srgbClr val="E8ECF1"/>
@@ -10472,7 +10595,7 @@
                     <a:bodyPr/>
                     <a:lstStyle/>
                     <a:p>
-                      <a:pPr marL="0" indent="0">
+                      <a:pPr indent="0" marL="0">
                         <a:buNone/>
                       </a:pPr>
                       <a:r>
@@ -10493,7 +10616,7 @@
                       </a:endParaRPr>
                     </a:p>
                   </a:txBody>
-                  <a:tcPr>
+                  <a:tcPr marL="91440" marR="91440" marT="45720" marB="45720">
                     <a:lnL w="6350" cap="flat" cmpd="sng" algn="ctr">
                       <a:solidFill>
                         <a:srgbClr val="E8ECF1"/>
@@ -10535,11 +10658,6 @@
                     </a:solidFill>
                   </a:tcPr>
                 </a:tc>
-                <a:extLst>
-                  <a:ext uri="{0D108BD9-81ED-4DB2-BD59-A6C34878D82A}">
-                    <a16:rowId xmlns:a16="http://schemas.microsoft.com/office/drawing/2014/main" val="10000"/>
-                  </a:ext>
-                </a:extLst>
               </a:tr>
               <a:tr h="274320">
                 <a:tc>
@@ -10547,7 +10665,7 @@
                     <a:bodyPr/>
                     <a:lstStyle/>
                     <a:p>
-                      <a:pPr marL="0" indent="0">
+                      <a:pPr indent="0" marL="0">
                         <a:buNone/>
                       </a:pPr>
                       <a:r>
@@ -10568,7 +10686,7 @@
                       </a:endParaRPr>
                     </a:p>
                   </a:txBody>
-                  <a:tcPr>
+                  <a:tcPr marL="91440" marR="91440" marT="45720" marB="45720">
                     <a:lnL w="6350" cap="flat" cmpd="sng" algn="ctr">
                       <a:solidFill>
                         <a:srgbClr val="E8ECF1"/>
@@ -10612,7 +10730,7 @@
                     <a:bodyPr/>
                     <a:lstStyle/>
                     <a:p>
-                      <a:pPr marL="0" indent="0">
+                      <a:pPr indent="0" marL="0">
                         <a:buNone/>
                       </a:pPr>
                       <a:r>
@@ -10633,7 +10751,7 @@
                       </a:endParaRPr>
                     </a:p>
                   </a:txBody>
-                  <a:tcPr>
+                  <a:tcPr marL="91440" marR="91440" marT="45720" marB="45720">
                     <a:lnL w="6350" cap="flat" cmpd="sng" algn="ctr">
                       <a:solidFill>
                         <a:srgbClr val="E8ECF1"/>
@@ -10672,11 +10790,6 @@
                     </a:lnB>
                   </a:tcPr>
                 </a:tc>
-                <a:extLst>
-                  <a:ext uri="{0D108BD9-81ED-4DB2-BD59-A6C34878D82A}">
-                    <a16:rowId xmlns:a16="http://schemas.microsoft.com/office/drawing/2014/main" val="10001"/>
-                  </a:ext>
-                </a:extLst>
               </a:tr>
               <a:tr h="274320">
                 <a:tc>
@@ -10684,7 +10797,7 @@
                     <a:bodyPr/>
                     <a:lstStyle/>
                     <a:p>
-                      <a:pPr marL="0" indent="0">
+                      <a:pPr indent="0" marL="0">
                         <a:buNone/>
                       </a:pPr>
                       <a:r>
@@ -10705,7 +10818,7 @@
                       </a:endParaRPr>
                     </a:p>
                   </a:txBody>
-                  <a:tcPr>
+                  <a:tcPr marL="91440" marR="91440" marT="45720" marB="45720">
                     <a:lnL w="6350" cap="flat" cmpd="sng" algn="ctr">
                       <a:solidFill>
                         <a:srgbClr val="E8ECF1"/>
@@ -10749,7 +10862,7 @@
                     <a:bodyPr/>
                     <a:lstStyle/>
                     <a:p>
-                      <a:pPr marL="0" indent="0">
+                      <a:pPr indent="0" marL="0">
                         <a:buNone/>
                       </a:pPr>
                       <a:r>
@@ -10770,7 +10883,7 @@
                       </a:endParaRPr>
                     </a:p>
                   </a:txBody>
-                  <a:tcPr>
+                  <a:tcPr marL="91440" marR="91440" marT="45720" marB="45720">
                     <a:lnL w="6350" cap="flat" cmpd="sng" algn="ctr">
                       <a:solidFill>
                         <a:srgbClr val="E8ECF1"/>
@@ -10809,11 +10922,6 @@
                     </a:lnB>
                   </a:tcPr>
                 </a:tc>
-                <a:extLst>
-                  <a:ext uri="{0D108BD9-81ED-4DB2-BD59-A6C34878D82A}">
-                    <a16:rowId xmlns:a16="http://schemas.microsoft.com/office/drawing/2014/main" val="10002"/>
-                  </a:ext>
-                </a:extLst>
               </a:tr>
               <a:tr h="274320">
                 <a:tc>
@@ -10821,7 +10929,7 @@
                     <a:bodyPr/>
                     <a:lstStyle/>
                     <a:p>
-                      <a:pPr marL="0" indent="0">
+                      <a:pPr indent="0" marL="0">
                         <a:buNone/>
                       </a:pPr>
                       <a:r>
@@ -10842,7 +10950,7 @@
                       </a:endParaRPr>
                     </a:p>
                   </a:txBody>
-                  <a:tcPr>
+                  <a:tcPr marL="91440" marR="91440" marT="45720" marB="45720">
                     <a:lnL w="6350" cap="flat" cmpd="sng" algn="ctr">
                       <a:solidFill>
                         <a:srgbClr val="E8ECF1"/>
@@ -10886,7 +10994,7 @@
                     <a:bodyPr/>
                     <a:lstStyle/>
                     <a:p>
-                      <a:pPr marL="0" indent="0">
+                      <a:pPr indent="0" marL="0">
                         <a:buNone/>
                       </a:pPr>
                       <a:r>
@@ -10907,7 +11015,7 @@
                       </a:endParaRPr>
                     </a:p>
                   </a:txBody>
-                  <a:tcPr>
+                  <a:tcPr marL="91440" marR="91440" marT="45720" marB="45720">
                     <a:lnL w="6350" cap="flat" cmpd="sng" algn="ctr">
                       <a:solidFill>
                         <a:srgbClr val="E8ECF1"/>
@@ -10946,11 +11054,6 @@
                     </a:lnB>
                   </a:tcPr>
                 </a:tc>
-                <a:extLst>
-                  <a:ext uri="{0D108BD9-81ED-4DB2-BD59-A6C34878D82A}">
-                    <a16:rowId xmlns:a16="http://schemas.microsoft.com/office/drawing/2014/main" val="10003"/>
-                  </a:ext>
-                </a:extLst>
               </a:tr>
               <a:tr h="274320">
                 <a:tc>
@@ -10958,7 +11061,7 @@
                     <a:bodyPr/>
                     <a:lstStyle/>
                     <a:p>
-                      <a:pPr marL="0" indent="0">
+                      <a:pPr indent="0" marL="0">
                         <a:buNone/>
                       </a:pPr>
                       <a:r>
@@ -10979,7 +11082,7 @@
                       </a:endParaRPr>
                     </a:p>
                   </a:txBody>
-                  <a:tcPr>
+                  <a:tcPr marL="91440" marR="91440" marT="45720" marB="45720">
                     <a:lnL w="6350" cap="flat" cmpd="sng" algn="ctr">
                       <a:solidFill>
                         <a:srgbClr val="E8ECF1"/>
@@ -11023,7 +11126,7 @@
                     <a:bodyPr/>
                     <a:lstStyle/>
                     <a:p>
-                      <a:pPr marL="0" indent="0">
+                      <a:pPr indent="0" marL="0">
                         <a:buNone/>
                       </a:pPr>
                       <a:r>
@@ -11044,7 +11147,7 @@
                       </a:endParaRPr>
                     </a:p>
                   </a:txBody>
-                  <a:tcPr>
+                  <a:tcPr marL="91440" marR="91440" marT="45720" marB="45720">
                     <a:lnL w="6350" cap="flat" cmpd="sng" algn="ctr">
                       <a:solidFill>
                         <a:srgbClr val="E8ECF1"/>
@@ -11083,11 +11186,6 @@
                     </a:lnB>
                   </a:tcPr>
                 </a:tc>
-                <a:extLst>
-                  <a:ext uri="{0D108BD9-81ED-4DB2-BD59-A6C34878D82A}">
-                    <a16:rowId xmlns:a16="http://schemas.microsoft.com/office/drawing/2014/main" val="10004"/>
-                  </a:ext>
-                </a:extLst>
               </a:tr>
             </a:tbl>
           </a:graphicData>
@@ -11112,7 +11210,7 @@
           </a:solidFill>
           <a:ln/>
           <a:effectLst>
-            <a:outerShdw blurRad="50800" dist="19050" dir="8100000" algn="bl" rotWithShape="0">
+            <a:outerShdw sx="100000" sy="100000" kx="0" ky="0" algn="bl" rotWithShape="0" blurRad="50800" dist="19050" dir="8100000">
               <a:srgbClr val="000000">
                 <a:alpha val="8000"/>
               </a:srgbClr>
@@ -11122,7 +11220,7 @@
       </p:sp>
       <p:sp>
         <p:nvSpPr>
-          <p:cNvPr id="3" name="Text 2"/>
+          <p:cNvPr id="5" name="Text 2"/>
           <p:cNvSpPr/>
           <p:nvPr/>
         </p:nvSpPr>
@@ -11141,7 +11239,7 @@
           <a:bodyPr wrap="square" lIns="0" tIns="0" rIns="0" bIns="0" rtlCol="0" anchor="ctr"/>
           <a:lstStyle/>
           <a:p>
-            <a:pPr marL="0" indent="0">
+            <a:pPr indent="0" marL="0">
               <a:buNone/>
             </a:pPr>
             <a:r>
@@ -11180,7 +11278,7 @@
           <a:bodyPr wrap="square" lIns="0" tIns="0" rIns="0" bIns="0" rtlCol="0" anchor="t"/>
           <a:lstStyle/>
           <a:p>
-            <a:pPr marL="0" indent="0">
+            <a:pPr indent="0" marL="0">
               <a:lnSpc>
                 <a:spcPct val="150000"/>
               </a:lnSpc>
@@ -11195,12 +11293,9 @@
                 <a:ea typeface="Calibri" pitchFamily="34" charset="-122"/>
                 <a:cs typeface="Calibri" pitchFamily="34" charset="-120"/>
               </a:rPr>
-              <a:t>贵州茅台  五粮液  </a:t>
-            </a:r>
-            <a:endParaRPr lang="en-US" sz="900" dirty="0"/>
-          </a:p>
-          <a:p>
-            <a:pPr marL="0" indent="0">
+              <a:t>贵州茅台  </a:t>
+            </a:r>
+            <a:pPr indent="0" marL="0">
               <a:lnSpc>
                 <a:spcPct val="150000"/>
               </a:lnSpc>
@@ -11215,23 +11310,12 @@
                 <a:ea typeface="Calibri" pitchFamily="34" charset="-122"/>
                 <a:cs typeface="Calibri" pitchFamily="34" charset="-120"/>
               </a:rPr>
-              <a:t>伊利股份  </a:t>
-            </a:r>
-            <a:r>
-              <a:rPr lang="en-US" sz="900" dirty="0">
-                <a:solidFill>
-                  <a:srgbClr val="2D6FB5"/>
-                </a:solidFill>
-                <a:latin typeface="Calibri" pitchFamily="34" charset="0"/>
-                <a:ea typeface="Calibri" pitchFamily="34" charset="-122"/>
-                <a:cs typeface="Calibri" pitchFamily="34" charset="-120"/>
-              </a:rPr>
-              <a:t>中国平安  </a:t>
+              <a:t>五粮液  </a:t>
             </a:r>
             <a:endParaRPr lang="en-US" sz="900" dirty="0"/>
           </a:p>
           <a:p>
-            <a:pPr marL="0" indent="0">
+            <a:pPr indent="0" marL="0">
               <a:lnSpc>
                 <a:spcPct val="150000"/>
               </a:lnSpc>
@@ -11240,29 +11324,15 @@
             <a:r>
               <a:rPr lang="en-US" sz="900" dirty="0">
                 <a:solidFill>
-                  <a:srgbClr val="2D6FB5"/>
-                </a:solidFill>
-                <a:latin typeface="Calibri" pitchFamily="34" charset="0"/>
-                <a:ea typeface="Calibri" pitchFamily="34" charset="-122"/>
-                <a:cs typeface="Calibri" pitchFamily="34" charset="-120"/>
-              </a:rPr>
-              <a:t>招商银行  </a:t>
-            </a:r>
-            <a:r>
-              <a:rPr lang="en-US" sz="900" dirty="0">
-                <a:solidFill>
-                  <a:srgbClr val="7C3AED"/>
-                </a:solidFill>
-                <a:latin typeface="Calibri" pitchFamily="34" charset="0"/>
-                <a:ea typeface="Calibri" pitchFamily="34" charset="-122"/>
-                <a:cs typeface="Calibri" pitchFamily="34" charset="-120"/>
-              </a:rPr>
-              <a:t>宁德时代  </a:t>
-            </a:r>
-            <a:endParaRPr lang="en-US" sz="900" dirty="0"/>
-          </a:p>
-          <a:p>
-            <a:pPr marL="0" indent="0">
+                  <a:srgbClr val="EF4444"/>
+                </a:solidFill>
+                <a:latin typeface="Calibri" pitchFamily="34" charset="0"/>
+                <a:ea typeface="Calibri" pitchFamily="34" charset="-122"/>
+                <a:cs typeface="Calibri" pitchFamily="34" charset="-120"/>
+              </a:rPr>
+              <a:t>伊利股份  </a:t>
+            </a:r>
+            <a:pPr indent="0" marL="0">
               <a:lnSpc>
                 <a:spcPct val="150000"/>
               </a:lnSpc>
@@ -11271,29 +11341,18 @@
             <a:r>
               <a:rPr lang="en-US" sz="900" dirty="0">
                 <a:solidFill>
-                  <a:srgbClr val="7C3AED"/>
-                </a:solidFill>
-                <a:latin typeface="Calibri" pitchFamily="34" charset="0"/>
-                <a:ea typeface="Calibri" pitchFamily="34" charset="-122"/>
-                <a:cs typeface="Calibri" pitchFamily="34" charset="-120"/>
-              </a:rPr>
-              <a:t>海康威视  </a:t>
-            </a:r>
-            <a:r>
-              <a:rPr lang="en-US" sz="900" dirty="0">
-                <a:solidFill>
-                  <a:srgbClr val="0891B2"/>
-                </a:solidFill>
-                <a:latin typeface="Calibri" pitchFamily="34" charset="0"/>
-                <a:ea typeface="Calibri" pitchFamily="34" charset="-122"/>
-                <a:cs typeface="Calibri" pitchFamily="34" charset="-120"/>
-              </a:rPr>
-              <a:t>恒瑞医药  </a:t>
+                  <a:srgbClr val="2D6FB5"/>
+                </a:solidFill>
+                <a:latin typeface="Calibri" pitchFamily="34" charset="0"/>
+                <a:ea typeface="Calibri" pitchFamily="34" charset="-122"/>
+                <a:cs typeface="Calibri" pitchFamily="34" charset="-120"/>
+              </a:rPr>
+              <a:t>中国平安  </a:t>
             </a:r>
             <a:endParaRPr lang="en-US" sz="900" dirty="0"/>
           </a:p>
           <a:p>
-            <a:pPr marL="0" indent="0">
+            <a:pPr indent="0" marL="0">
               <a:lnSpc>
                 <a:spcPct val="150000"/>
               </a:lnSpc>
@@ -11302,13 +11361,104 @@
             <a:r>
               <a:rPr lang="en-US" sz="900" dirty="0">
                 <a:solidFill>
+                  <a:srgbClr val="2D6FB5"/>
+                </a:solidFill>
+                <a:latin typeface="Calibri" pitchFamily="34" charset="0"/>
+                <a:ea typeface="Calibri" pitchFamily="34" charset="-122"/>
+                <a:cs typeface="Calibri" pitchFamily="34" charset="-120"/>
+              </a:rPr>
+              <a:t>招商银行  </a:t>
+            </a:r>
+            <a:pPr indent="0" marL="0">
+              <a:lnSpc>
+                <a:spcPct val="150000"/>
+              </a:lnSpc>
+              <a:buNone/>
+            </a:pPr>
+            <a:r>
+              <a:rPr lang="en-US" sz="900" dirty="0">
+                <a:solidFill>
+                  <a:srgbClr val="7C3AED"/>
+                </a:solidFill>
+                <a:latin typeface="Calibri" pitchFamily="34" charset="0"/>
+                <a:ea typeface="Calibri" pitchFamily="34" charset="-122"/>
+                <a:cs typeface="Calibri" pitchFamily="34" charset="-120"/>
+              </a:rPr>
+              <a:t>宁德时代  </a:t>
+            </a:r>
+            <a:endParaRPr lang="en-US" sz="900" dirty="0"/>
+          </a:p>
+          <a:p>
+            <a:pPr indent="0" marL="0">
+              <a:lnSpc>
+                <a:spcPct val="150000"/>
+              </a:lnSpc>
+              <a:buNone/>
+            </a:pPr>
+            <a:r>
+              <a:rPr lang="en-US" sz="900" dirty="0">
+                <a:solidFill>
+                  <a:srgbClr val="7C3AED"/>
+                </a:solidFill>
+                <a:latin typeface="Calibri" pitchFamily="34" charset="0"/>
+                <a:ea typeface="Calibri" pitchFamily="34" charset="-122"/>
+                <a:cs typeface="Calibri" pitchFamily="34" charset="-120"/>
+              </a:rPr>
+              <a:t>海康威视  </a:t>
+            </a:r>
+            <a:pPr indent="0" marL="0">
+              <a:lnSpc>
+                <a:spcPct val="150000"/>
+              </a:lnSpc>
+              <a:buNone/>
+            </a:pPr>
+            <a:r>
+              <a:rPr lang="en-US" sz="900" dirty="0">
+                <a:solidFill>
                   <a:srgbClr val="0891B2"/>
                 </a:solidFill>
                 <a:latin typeface="Calibri" pitchFamily="34" charset="0"/>
                 <a:ea typeface="Calibri" pitchFamily="34" charset="-122"/>
                 <a:cs typeface="Calibri" pitchFamily="34" charset="-120"/>
               </a:rPr>
-              <a:t>隆基绿能  美的集团  </a:t>
+              <a:t>恒瑞医药  </a:t>
+            </a:r>
+            <a:endParaRPr lang="en-US" sz="900" dirty="0"/>
+          </a:p>
+          <a:p>
+            <a:pPr indent="0" marL="0">
+              <a:lnSpc>
+                <a:spcPct val="150000"/>
+              </a:lnSpc>
+              <a:buNone/>
+            </a:pPr>
+            <a:r>
+              <a:rPr lang="en-US" sz="900" dirty="0">
+                <a:solidFill>
+                  <a:srgbClr val="0891B2"/>
+                </a:solidFill>
+                <a:latin typeface="Calibri" pitchFamily="34" charset="0"/>
+                <a:ea typeface="Calibri" pitchFamily="34" charset="-122"/>
+                <a:cs typeface="Calibri" pitchFamily="34" charset="-120"/>
+              </a:rPr>
+              <a:t>隆基绿能  </a:t>
+            </a:r>
+            <a:pPr indent="0" marL="0">
+              <a:lnSpc>
+                <a:spcPct val="150000"/>
+              </a:lnSpc>
+              <a:buNone/>
+            </a:pPr>
+            <a:r>
+              <a:rPr lang="en-US" sz="900" dirty="0">
+                <a:solidFill>
+                  <a:srgbClr val="0891B2"/>
+                </a:solidFill>
+                <a:latin typeface="Calibri" pitchFamily="34" charset="0"/>
+                <a:ea typeface="Calibri" pitchFamily="34" charset="-122"/>
+                <a:cs typeface="Calibri" pitchFamily="34" charset="-120"/>
+              </a:rPr>
+              <a:t>美的集团  </a:t>
             </a:r>
             <a:endParaRPr lang="en-US" sz="900" dirty="0"/>
           </a:p>
@@ -11335,7 +11485,7 @@
           <a:bodyPr wrap="square" lIns="0" tIns="0" rIns="0" bIns="0" rtlCol="0" anchor="ctr"/>
           <a:lstStyle/>
           <a:p>
-            <a:pPr marL="0" indent="0">
+            <a:pPr indent="0" marL="0">
               <a:buNone/>
             </a:pPr>
             <a:r>
@@ -11372,7 +11522,7 @@
           </a:solidFill>
           <a:ln/>
           <a:effectLst>
-            <a:outerShdw blurRad="50800" dist="19050" dir="8100000" algn="bl" rotWithShape="0">
+            <a:outerShdw sx="100000" sy="100000" kx="0" ky="0" algn="bl" rotWithShape="0" blurRad="50800" dist="19050" dir="8100000">
               <a:srgbClr val="000000">
                 <a:alpha val="8000"/>
               </a:srgbClr>
@@ -11401,7 +11551,7 @@
           <a:bodyPr wrap="square" lIns="0" tIns="0" rIns="0" bIns="0" rtlCol="0" anchor="ctr"/>
           <a:lstStyle/>
           <a:p>
-            <a:pPr marL="0" indent="0" algn="ctr">
+            <a:pPr algn="ctr" indent="0" marL="0">
               <a:buNone/>
             </a:pPr>
             <a:r>
@@ -11418,7 +11568,7 @@
             <a:endParaRPr lang="en-US" sz="950" dirty="0"/>
           </a:p>
           <a:p>
-            <a:pPr marL="0" indent="0" algn="ctr">
+            <a:pPr algn="ctr" indent="0" marL="0">
               <a:buNone/>
             </a:pPr>
             <a:r>
@@ -11457,7 +11607,7 @@
           <a:bodyPr wrap="square" lIns="0" tIns="0" rIns="0" bIns="0" rtlCol="0" anchor="ctr"/>
           <a:lstStyle/>
           <a:p>
-            <a:pPr marL="0" indent="0" algn="ctr">
+            <a:pPr algn="ctr" indent="0" marL="0">
               <a:buNone/>
             </a:pPr>
             <a:r>
@@ -11494,7 +11644,7 @@
           </a:solidFill>
           <a:ln/>
           <a:effectLst>
-            <a:outerShdw blurRad="50800" dist="19050" dir="8100000" algn="bl" rotWithShape="0">
+            <a:outerShdw sx="100000" sy="100000" kx="0" ky="0" algn="bl" rotWithShape="0" blurRad="50800" dist="19050" dir="8100000">
               <a:srgbClr val="000000">
                 <a:alpha val="8000"/>
               </a:srgbClr>
@@ -11523,7 +11673,7 @@
           <a:bodyPr wrap="square" lIns="0" tIns="0" rIns="0" bIns="0" rtlCol="0" anchor="ctr"/>
           <a:lstStyle/>
           <a:p>
-            <a:pPr marL="0" indent="0" algn="ctr">
+            <a:pPr algn="ctr" indent="0" marL="0">
               <a:buNone/>
             </a:pPr>
             <a:r>
@@ -11540,7 +11690,7 @@
             <a:endParaRPr lang="en-US" sz="950" dirty="0"/>
           </a:p>
           <a:p>
-            <a:pPr marL="0" indent="0" algn="ctr">
+            <a:pPr algn="ctr" indent="0" marL="0">
               <a:buNone/>
             </a:pPr>
             <a:r>
@@ -11579,7 +11729,7 @@
           <a:bodyPr wrap="square" lIns="0" tIns="0" rIns="0" bIns="0" rtlCol="0" anchor="ctr"/>
           <a:lstStyle/>
           <a:p>
-            <a:pPr marL="0" indent="0" algn="ctr">
+            <a:pPr algn="ctr" indent="0" marL="0">
               <a:buNone/>
             </a:pPr>
             <a:r>
@@ -11616,7 +11766,7 @@
           </a:solidFill>
           <a:ln/>
           <a:effectLst>
-            <a:outerShdw blurRad="50800" dist="19050" dir="8100000" algn="bl" rotWithShape="0">
+            <a:outerShdw sx="100000" sy="100000" kx="0" ky="0" algn="bl" rotWithShape="0" blurRad="50800" dist="19050" dir="8100000">
               <a:srgbClr val="000000">
                 <a:alpha val="8000"/>
               </a:srgbClr>
@@ -11645,7 +11795,7 @@
           <a:bodyPr wrap="square" lIns="0" tIns="0" rIns="0" bIns="0" rtlCol="0" anchor="ctr"/>
           <a:lstStyle/>
           <a:p>
-            <a:pPr marL="0" indent="0" algn="ctr">
+            <a:pPr algn="ctr" indent="0" marL="0">
               <a:buNone/>
             </a:pPr>
             <a:r>
@@ -11662,7 +11812,7 @@
             <a:endParaRPr lang="en-US" sz="950" dirty="0"/>
           </a:p>
           <a:p>
-            <a:pPr marL="0" indent="0" algn="ctr">
+            <a:pPr algn="ctr" indent="0" marL="0">
               <a:buNone/>
             </a:pPr>
             <a:r>
@@ -11701,7 +11851,7 @@
           <a:bodyPr wrap="square" lIns="0" tIns="0" rIns="0" bIns="0" rtlCol="0" anchor="ctr"/>
           <a:lstStyle/>
           <a:p>
-            <a:pPr marL="0" indent="0" algn="ctr">
+            <a:pPr algn="ctr" indent="0" marL="0">
               <a:buNone/>
             </a:pPr>
             <a:r>
@@ -11738,7 +11888,7 @@
           </a:solidFill>
           <a:ln/>
           <a:effectLst>
-            <a:outerShdw blurRad="50800" dist="19050" dir="8100000" algn="bl" rotWithShape="0">
+            <a:outerShdw sx="100000" sy="100000" kx="0" ky="0" algn="bl" rotWithShape="0" blurRad="50800" dist="19050" dir="8100000">
               <a:srgbClr val="000000">
                 <a:alpha val="8000"/>
               </a:srgbClr>
@@ -11767,7 +11917,7 @@
           <a:bodyPr wrap="square" lIns="0" tIns="0" rIns="0" bIns="0" rtlCol="0" anchor="ctr"/>
           <a:lstStyle/>
           <a:p>
-            <a:pPr marL="0" indent="0" algn="ctr">
+            <a:pPr algn="ctr" indent="0" marL="0">
               <a:buNone/>
             </a:pPr>
             <a:r>
@@ -11784,7 +11934,7 @@
             <a:endParaRPr lang="en-US" sz="950" dirty="0"/>
           </a:p>
           <a:p>
-            <a:pPr marL="0" indent="0" algn="ctr">
+            <a:pPr algn="ctr" indent="0" marL="0">
               <a:buNone/>
             </a:pPr>
             <a:r>
@@ -11823,7 +11973,7 @@
           <a:bodyPr wrap="square" lIns="0" tIns="0" rIns="0" bIns="0" rtlCol="0" anchor="ctr"/>
           <a:lstStyle/>
           <a:p>
-            <a:pPr marL="0" indent="0" algn="ctr">
+            <a:pPr algn="ctr" indent="0" marL="0">
               <a:buNone/>
             </a:pPr>
             <a:r>
@@ -11860,7 +12010,7 @@
           </a:solidFill>
           <a:ln/>
           <a:effectLst>
-            <a:outerShdw blurRad="50800" dist="19050" dir="8100000" algn="bl" rotWithShape="0">
+            <a:outerShdw sx="100000" sy="100000" kx="0" ky="0" algn="bl" rotWithShape="0" blurRad="50800" dist="19050" dir="8100000">
               <a:srgbClr val="000000">
                 <a:alpha val="8000"/>
               </a:srgbClr>
@@ -11889,7 +12039,7 @@
           <a:bodyPr wrap="square" lIns="0" tIns="0" rIns="0" bIns="0" rtlCol="0" anchor="ctr"/>
           <a:lstStyle/>
           <a:p>
-            <a:pPr marL="0" indent="0" algn="ctr">
+            <a:pPr algn="ctr" indent="0" marL="0">
               <a:buNone/>
             </a:pPr>
             <a:r>
@@ -11906,7 +12056,7 @@
             <a:endParaRPr lang="en-US" sz="950" dirty="0"/>
           </a:p>
           <a:p>
-            <a:pPr marL="0" indent="0" algn="ctr">
+            <a:pPr algn="ctr" indent="0" marL="0">
               <a:buNone/>
             </a:pPr>
             <a:r>
@@ -11945,7 +12095,7 @@
           <a:bodyPr wrap="square" lIns="0" tIns="0" rIns="0" bIns="0" rtlCol="0" anchor="ctr"/>
           <a:lstStyle/>
           <a:p>
-            <a:pPr marL="0" indent="0" algn="ctr">
+            <a:pPr algn="ctr" indent="0" marL="0">
               <a:buNone/>
             </a:pPr>
             <a:r>
@@ -11982,7 +12132,7 @@
           </a:solidFill>
           <a:ln/>
           <a:effectLst>
-            <a:outerShdw blurRad="50800" dist="19050" dir="8100000" algn="bl" rotWithShape="0">
+            <a:outerShdw sx="100000" sy="100000" kx="0" ky="0" algn="bl" rotWithShape="0" blurRad="50800" dist="19050" dir="8100000">
               <a:srgbClr val="000000">
                 <a:alpha val="8000"/>
               </a:srgbClr>
@@ -12011,7 +12161,7 @@
           <a:bodyPr wrap="square" lIns="0" tIns="0" rIns="0" bIns="0" rtlCol="0" anchor="ctr"/>
           <a:lstStyle/>
           <a:p>
-            <a:pPr marL="0" indent="0" algn="ctr">
+            <a:pPr algn="ctr" indent="0" marL="0">
               <a:buNone/>
             </a:pPr>
             <a:r>
@@ -12028,7 +12178,7 @@
             <a:endParaRPr lang="en-US" sz="950" dirty="0"/>
           </a:p>
           <a:p>
-            <a:pPr marL="0" indent="0" algn="ctr">
+            <a:pPr algn="ctr" indent="0" marL="0">
               <a:buNone/>
             </a:pPr>
             <a:r>
@@ -12087,7 +12237,7 @@
           <a:bodyPr wrap="square" lIns="0" tIns="0" rIns="0" bIns="0" rtlCol="0" anchor="ctr"/>
           <a:lstStyle/>
           <a:p>
-            <a:pPr marL="0" indent="0">
+            <a:pPr indent="0" marL="0">
               <a:buNone/>
             </a:pPr>
             <a:r>
@@ -12101,6 +12251,9 @@
               </a:rPr>
               <a:t>时间跨度：2022.01 - 2025.12 (4年, ~1000交易日)  |  </a:t>
             </a:r>
+            <a:pPr indent="0" marL="0">
+              <a:buNone/>
+            </a:pPr>
             <a:r>
               <a:rPr lang="en-US" sz="1000" b="1" dirty="0">
                 <a:solidFill>
@@ -12112,6 +12265,9 @@
               </a:rPr>
               <a:t>样本外测试：2026 Q1 (60交易日，完全独立)  |  </a:t>
             </a:r>
+            <a:pPr indent="0" marL="0">
+              <a:buNone/>
+            </a:pPr>
             <a:r>
               <a:rPr lang="en-US" sz="1000" dirty="0">
                 <a:solidFill>
@@ -12148,7 +12304,7 @@
           <a:bodyPr wrap="square" rtlCol="0" anchor="ctr"/>
           <a:lstStyle/>
           <a:p>
-            <a:pPr marL="0" indent="0" algn="r">
+            <a:pPr algn="r" indent="0" marL="0">
               <a:buNone/>
             </a:pPr>
             <a:r>
@@ -12182,7 +12338,6 @@
         <a:solidFill>
           <a:srgbClr val="F7F9FC"/>
         </a:solidFill>
-        <a:effectLst/>
       </p:bgPr>
     </p:bg>
     <p:spTree>
@@ -12220,7 +12375,7 @@
           <a:bodyPr wrap="square" lIns="0" tIns="0" rIns="0" bIns="0" rtlCol="0" anchor="ctr"/>
           <a:lstStyle/>
           <a:p>
-            <a:pPr marL="0" indent="0">
+            <a:pPr indent="0" marL="0">
               <a:buNone/>
             </a:pPr>
             <a:r>
@@ -12257,7 +12412,7 @@
           </a:solidFill>
           <a:ln/>
           <a:effectLst>
-            <a:outerShdw blurRad="50800" dist="19050" dir="8100000" algn="bl" rotWithShape="0">
+            <a:outerShdw sx="100000" sy="100000" kx="0" ky="0" algn="bl" rotWithShape="0" blurRad="50800" dist="19050" dir="8100000">
               <a:srgbClr val="000000">
                 <a:alpha val="8000"/>
               </a:srgbClr>
@@ -12306,7 +12461,7 @@
           <a:bodyPr wrap="square" lIns="0" tIns="0" rIns="0" bIns="0" rtlCol="0" anchor="ctr"/>
           <a:lstStyle/>
           <a:p>
-            <a:pPr marL="0" indent="0">
+            <a:pPr indent="0" marL="0">
               <a:buNone/>
             </a:pPr>
             <a:r>
@@ -12345,7 +12500,7 @@
           <a:bodyPr wrap="square" lIns="0" tIns="0" rIns="0" bIns="0" rtlCol="0" anchor="t"/>
           <a:lstStyle/>
           <a:p>
-            <a:pPr marL="0" indent="0">
+            <a:pPr indent="0" marL="0">
               <a:spcAft>
                 <a:spcPts val="200"/>
               </a:spcAft>
@@ -12365,7 +12520,7 @@
             <a:endParaRPr lang="en-US" sz="1000" dirty="0"/>
           </a:p>
           <a:p>
-            <a:pPr marL="0" indent="0">
+            <a:pPr indent="0" marL="0">
               <a:spcAft>
                 <a:spcPts val="200"/>
               </a:spcAft>
@@ -12385,7 +12540,7 @@
             <a:endParaRPr lang="en-US" sz="1000" dirty="0"/>
           </a:p>
           <a:p>
-            <a:pPr marL="0" indent="0">
+            <a:pPr indent="0" marL="0">
               <a:spcAft>
                 <a:spcPts val="200"/>
               </a:spcAft>
@@ -12405,7 +12560,7 @@
             <a:endParaRPr lang="en-US" sz="1000" dirty="0"/>
           </a:p>
           <a:p>
-            <a:pPr marL="0" indent="0">
+            <a:pPr indent="0" marL="0">
               <a:spcAft>
                 <a:spcPts val="200"/>
               </a:spcAft>
@@ -12414,7 +12569,7 @@
             <a:endParaRPr lang="en-US" sz="1000" dirty="0"/>
           </a:p>
           <a:p>
-            <a:pPr marL="0" indent="0">
+            <a:pPr indent="0" marL="0">
               <a:spcAft>
                 <a:spcPts val="200"/>
               </a:spcAft>
@@ -12434,7 +12589,7 @@
             <a:endParaRPr lang="en-US" sz="1000" dirty="0"/>
           </a:p>
           <a:p>
-            <a:pPr marL="0" indent="0">
+            <a:pPr indent="0" marL="0">
               <a:spcAft>
                 <a:spcPts val="200"/>
               </a:spcAft>
@@ -12454,7 +12609,7 @@
             <a:endParaRPr lang="en-US" sz="1000" dirty="0"/>
           </a:p>
           <a:p>
-            <a:pPr marL="0" indent="0">
+            <a:pPr indent="0" marL="0">
               <a:spcAft>
                 <a:spcPts val="200"/>
               </a:spcAft>
@@ -12474,7 +12629,7 @@
             <a:endParaRPr lang="en-US" sz="1000" dirty="0"/>
           </a:p>
           <a:p>
-            <a:pPr marL="0" indent="0">
+            <a:pPr indent="0" marL="0">
               <a:spcAft>
                 <a:spcPts val="200"/>
               </a:spcAft>
@@ -12483,7 +12638,7 @@
             <a:endParaRPr lang="en-US" sz="1000" dirty="0"/>
           </a:p>
           <a:p>
-            <a:pPr marL="0" indent="0">
+            <a:pPr indent="0" marL="0">
               <a:spcAft>
                 <a:spcPts val="200"/>
               </a:spcAft>
@@ -12503,7 +12658,7 @@
             <a:endParaRPr lang="en-US" sz="1000" dirty="0"/>
           </a:p>
           <a:p>
-            <a:pPr marL="0" indent="0">
+            <a:pPr indent="0" marL="0">
               <a:spcAft>
                 <a:spcPts val="200"/>
               </a:spcAft>
@@ -12523,7 +12678,7 @@
             <a:endParaRPr lang="en-US" sz="1000" dirty="0"/>
           </a:p>
           <a:p>
-            <a:pPr marL="0" indent="0">
+            <a:pPr indent="0" marL="0">
               <a:spcAft>
                 <a:spcPts val="200"/>
               </a:spcAft>
@@ -12543,7 +12698,7 @@
             <a:endParaRPr lang="en-US" sz="1000" dirty="0"/>
           </a:p>
           <a:p>
-            <a:pPr marL="0" indent="0">
+            <a:pPr indent="0" marL="0">
               <a:spcAft>
                 <a:spcPts val="200"/>
               </a:spcAft>
@@ -12552,7 +12707,7 @@
             <a:endParaRPr lang="en-US" sz="1000" dirty="0"/>
           </a:p>
           <a:p>
-            <a:pPr marL="0" indent="0">
+            <a:pPr indent="0" marL="0">
               <a:spcAft>
                 <a:spcPts val="200"/>
               </a:spcAft>
@@ -12572,7 +12727,7 @@
             <a:endParaRPr lang="en-US" sz="1000" dirty="0"/>
           </a:p>
           <a:p>
-            <a:pPr marL="0" indent="0">
+            <a:pPr indent="0" marL="0">
               <a:spcAft>
                 <a:spcPts val="200"/>
               </a:spcAft>
@@ -12592,7 +12747,7 @@
             <a:endParaRPr lang="en-US" sz="1000" dirty="0"/>
           </a:p>
           <a:p>
-            <a:pPr marL="0" indent="0">
+            <a:pPr indent="0" marL="0">
               <a:spcAft>
                 <a:spcPts val="200"/>
               </a:spcAft>
@@ -12632,7 +12787,7 @@
           </a:solidFill>
           <a:ln/>
           <a:effectLst>
-            <a:outerShdw blurRad="50800" dist="19050" dir="8100000" algn="bl" rotWithShape="0">
+            <a:outerShdw sx="100000" sy="100000" kx="0" ky="0" algn="bl" rotWithShape="0" blurRad="50800" dist="19050" dir="8100000">
               <a:srgbClr val="000000">
                 <a:alpha val="8000"/>
               </a:srgbClr>
@@ -12681,7 +12836,7 @@
           <a:bodyPr wrap="square" lIns="0" tIns="0" rIns="0" bIns="0" rtlCol="0" anchor="ctr"/>
           <a:lstStyle/>
           <a:p>
-            <a:pPr marL="0" indent="0">
+            <a:pPr indent="0" marL="0">
               <a:buNone/>
             </a:pPr>
             <a:r>
@@ -12720,7 +12875,7 @@
           <a:bodyPr wrap="square" lIns="0" tIns="0" rIns="0" bIns="0" rtlCol="0" anchor="t"/>
           <a:lstStyle/>
           <a:p>
-            <a:pPr marL="0" indent="0">
+            <a:pPr indent="0" marL="0">
               <a:spcAft>
                 <a:spcPts val="200"/>
               </a:spcAft>
@@ -12740,7 +12895,7 @@
             <a:endParaRPr lang="en-US" sz="1000" dirty="0"/>
           </a:p>
           <a:p>
-            <a:pPr marL="0" indent="0">
+            <a:pPr indent="0" marL="0">
               <a:spcAft>
                 <a:spcPts val="200"/>
               </a:spcAft>
@@ -12760,7 +12915,7 @@
             <a:endParaRPr lang="en-US" sz="1000" dirty="0"/>
           </a:p>
           <a:p>
-            <a:pPr marL="0" indent="0">
+            <a:pPr indent="0" marL="0">
               <a:spcAft>
                 <a:spcPts val="200"/>
               </a:spcAft>
@@ -12780,7 +12935,7 @@
             <a:endParaRPr lang="en-US" sz="1000" dirty="0"/>
           </a:p>
           <a:p>
-            <a:pPr marL="0" indent="0">
+            <a:pPr indent="0" marL="0">
               <a:spcAft>
                 <a:spcPts val="200"/>
               </a:spcAft>
@@ -12800,7 +12955,7 @@
             <a:endParaRPr lang="en-US" sz="1000" dirty="0"/>
           </a:p>
           <a:p>
-            <a:pPr marL="0" indent="0">
+            <a:pPr indent="0" marL="0">
               <a:spcAft>
                 <a:spcPts val="200"/>
               </a:spcAft>
@@ -12820,7 +12975,7 @@
             <a:endParaRPr lang="en-US" sz="1000" dirty="0"/>
           </a:p>
           <a:p>
-            <a:pPr marL="0" indent="0">
+            <a:pPr indent="0" marL="0">
               <a:spcAft>
                 <a:spcPts val="200"/>
               </a:spcAft>
@@ -12840,7 +12995,7 @@
             <a:endParaRPr lang="en-US" sz="1000" dirty="0"/>
           </a:p>
           <a:p>
-            <a:pPr marL="0" indent="0">
+            <a:pPr indent="0" marL="0">
               <a:spcAft>
                 <a:spcPts val="200"/>
               </a:spcAft>
@@ -12849,7 +13004,7 @@
             <a:endParaRPr lang="en-US" sz="1000" dirty="0"/>
           </a:p>
           <a:p>
-            <a:pPr marL="0" indent="0">
+            <a:pPr indent="0" marL="0">
               <a:spcAft>
                 <a:spcPts val="200"/>
               </a:spcAft>
@@ -12869,7 +13024,7 @@
             <a:endParaRPr lang="en-US" sz="1000" dirty="0"/>
           </a:p>
           <a:p>
-            <a:pPr marL="0" indent="0">
+            <a:pPr indent="0" marL="0">
               <a:spcAft>
                 <a:spcPts val="200"/>
               </a:spcAft>
@@ -12889,7 +13044,7 @@
             <a:endParaRPr lang="en-US" sz="1000" dirty="0"/>
           </a:p>
           <a:p>
-            <a:pPr marL="0" indent="0">
+            <a:pPr indent="0" marL="0">
               <a:spcAft>
                 <a:spcPts val="200"/>
               </a:spcAft>
@@ -12909,7 +13064,7 @@
             <a:endParaRPr lang="en-US" sz="1000" dirty="0"/>
           </a:p>
           <a:p>
-            <a:pPr marL="0" indent="0">
+            <a:pPr indent="0" marL="0">
               <a:spcAft>
                 <a:spcPts val="200"/>
               </a:spcAft>
@@ -12918,7 +13073,7 @@
             <a:endParaRPr lang="en-US" sz="1000" dirty="0"/>
           </a:p>
           <a:p>
-            <a:pPr marL="0" indent="0">
+            <a:pPr indent="0" marL="0">
               <a:spcAft>
                 <a:spcPts val="200"/>
               </a:spcAft>
@@ -12938,7 +13093,7 @@
             <a:endParaRPr lang="en-US" sz="1000" dirty="0"/>
           </a:p>
           <a:p>
-            <a:pPr marL="0" indent="0">
+            <a:pPr indent="0" marL="0">
               <a:spcAft>
                 <a:spcPts val="200"/>
               </a:spcAft>
@@ -12958,7 +13113,7 @@
             <a:endParaRPr lang="en-US" sz="1000" dirty="0"/>
           </a:p>
           <a:p>
-            <a:pPr marL="0" indent="0">
+            <a:pPr indent="0" marL="0">
               <a:spcAft>
                 <a:spcPts val="200"/>
               </a:spcAft>
@@ -12978,7 +13133,7 @@
             <a:endParaRPr lang="en-US" sz="1000" dirty="0"/>
           </a:p>
           <a:p>
-            <a:pPr marL="0" indent="0">
+            <a:pPr indent="0" marL="0">
               <a:spcAft>
                 <a:spcPts val="200"/>
               </a:spcAft>
@@ -13018,7 +13173,7 @@
           </a:solidFill>
           <a:ln/>
           <a:effectLst>
-            <a:outerShdw blurRad="50800" dist="19050" dir="8100000" algn="bl" rotWithShape="0">
+            <a:outerShdw sx="100000" sy="100000" kx="0" ky="0" algn="bl" rotWithShape="0" blurRad="50800" dist="19050" dir="8100000">
               <a:srgbClr val="000000">
                 <a:alpha val="8000"/>
               </a:srgbClr>
@@ -13067,7 +13222,7 @@
           <a:bodyPr wrap="square" lIns="0" tIns="0" rIns="0" bIns="0" rtlCol="0" anchor="ctr"/>
           <a:lstStyle/>
           <a:p>
-            <a:pPr marL="0" indent="0">
+            <a:pPr indent="0" marL="0">
               <a:buNone/>
             </a:pPr>
             <a:r>
@@ -13106,7 +13261,7 @@
           <a:bodyPr wrap="square" lIns="0" tIns="0" rIns="0" bIns="0" rtlCol="0" anchor="t"/>
           <a:lstStyle/>
           <a:p>
-            <a:pPr marL="0" indent="0">
+            <a:pPr indent="0" marL="0">
               <a:spcAft>
                 <a:spcPts val="200"/>
               </a:spcAft>
@@ -13126,7 +13281,7 @@
             <a:endParaRPr lang="en-US" sz="1000" dirty="0"/>
           </a:p>
           <a:p>
-            <a:pPr marL="0" indent="0">
+            <a:pPr indent="0" marL="0">
               <a:spcAft>
                 <a:spcPts val="200"/>
               </a:spcAft>
@@ -13146,7 +13301,7 @@
             <a:endParaRPr lang="en-US" sz="1000" dirty="0"/>
           </a:p>
           <a:p>
-            <a:pPr marL="0" indent="0">
+            <a:pPr indent="0" marL="0">
               <a:spcAft>
                 <a:spcPts val="200"/>
               </a:spcAft>
@@ -13166,7 +13321,7 @@
             <a:endParaRPr lang="en-US" sz="1000" dirty="0"/>
           </a:p>
           <a:p>
-            <a:pPr marL="0" indent="0">
+            <a:pPr indent="0" marL="0">
               <a:spcAft>
                 <a:spcPts val="200"/>
               </a:spcAft>
@@ -13186,7 +13341,7 @@
             <a:endParaRPr lang="en-US" sz="1000" dirty="0"/>
           </a:p>
           <a:p>
-            <a:pPr marL="0" indent="0">
+            <a:pPr indent="0" marL="0">
               <a:spcAft>
                 <a:spcPts val="200"/>
               </a:spcAft>
@@ -13206,7 +13361,7 @@
             <a:endParaRPr lang="en-US" sz="1000" dirty="0"/>
           </a:p>
           <a:p>
-            <a:pPr marL="0" indent="0">
+            <a:pPr indent="0" marL="0">
               <a:spcAft>
                 <a:spcPts val="200"/>
               </a:spcAft>
@@ -13215,7 +13370,7 @@
             <a:endParaRPr lang="en-US" sz="1000" dirty="0"/>
           </a:p>
           <a:p>
-            <a:pPr marL="0" indent="0">
+            <a:pPr indent="0" marL="0">
               <a:spcAft>
                 <a:spcPts val="200"/>
               </a:spcAft>
@@ -13235,7 +13390,7 @@
             <a:endParaRPr lang="en-US" sz="1000" dirty="0"/>
           </a:p>
           <a:p>
-            <a:pPr marL="0" indent="0">
+            <a:pPr indent="0" marL="0">
               <a:spcAft>
                 <a:spcPts val="200"/>
               </a:spcAft>
@@ -13255,7 +13410,7 @@
             <a:endParaRPr lang="en-US" sz="1000" dirty="0"/>
           </a:p>
           <a:p>
-            <a:pPr marL="0" indent="0">
+            <a:pPr indent="0" marL="0">
               <a:spcAft>
                 <a:spcPts val="200"/>
               </a:spcAft>
@@ -13275,7 +13430,7 @@
             <a:endParaRPr lang="en-US" sz="1000" dirty="0"/>
           </a:p>
           <a:p>
-            <a:pPr marL="0" indent="0">
+            <a:pPr indent="0" marL="0">
               <a:spcAft>
                 <a:spcPts val="200"/>
               </a:spcAft>
@@ -13284,7 +13439,7 @@
             <a:endParaRPr lang="en-US" sz="1000" dirty="0"/>
           </a:p>
           <a:p>
-            <a:pPr marL="0" indent="0">
+            <a:pPr indent="0" marL="0">
               <a:spcAft>
                 <a:spcPts val="200"/>
               </a:spcAft>
@@ -13304,7 +13459,7 @@
             <a:endParaRPr lang="en-US" sz="1000" dirty="0"/>
           </a:p>
           <a:p>
-            <a:pPr marL="0" indent="0">
+            <a:pPr indent="0" marL="0">
               <a:spcAft>
                 <a:spcPts val="200"/>
               </a:spcAft>
@@ -13324,7 +13479,7 @@
             <a:endParaRPr lang="en-US" sz="1000" dirty="0"/>
           </a:p>
           <a:p>
-            <a:pPr marL="0" indent="0">
+            <a:pPr indent="0" marL="0">
               <a:spcAft>
                 <a:spcPts val="200"/>
               </a:spcAft>
@@ -13344,7 +13499,7 @@
             <a:endParaRPr lang="en-US" sz="1000" dirty="0"/>
           </a:p>
           <a:p>
-            <a:pPr marL="0" indent="0">
+            <a:pPr indent="0" marL="0">
               <a:spcAft>
                 <a:spcPts val="200"/>
               </a:spcAft>
@@ -13364,7 +13519,7 @@
             <a:endParaRPr lang="en-US" sz="1000" dirty="0"/>
           </a:p>
           <a:p>
-            <a:pPr marL="0" indent="0">
+            <a:pPr indent="0" marL="0">
               <a:spcAft>
                 <a:spcPts val="200"/>
               </a:spcAft>
@@ -13406,7 +13561,7 @@
           <a:bodyPr wrap="square" lIns="0" tIns="0" rIns="0" bIns="0" rtlCol="0" anchor="ctr"/>
           <a:lstStyle/>
           <a:p>
-            <a:pPr marL="0" indent="0">
+            <a:pPr indent="0" marL="0">
               <a:buNone/>
             </a:pPr>
             <a:r>
@@ -13445,7 +13600,7 @@
           <a:bodyPr wrap="square" rtlCol="0" anchor="ctr"/>
           <a:lstStyle/>
           <a:p>
-            <a:pPr marL="0" indent="0" algn="r">
+            <a:pPr algn="r" indent="0" marL="0">
               <a:buNone/>
             </a:pPr>
             <a:r>
@@ -13479,7 +13634,6 @@
         <a:solidFill>
           <a:srgbClr val="F7F9FC"/>
         </a:solidFill>
-        <a:effectLst/>
       </p:bgPr>
     </p:bg>
     <p:spTree>
@@ -13517,7 +13671,7 @@
           <a:bodyPr wrap="square" lIns="0" tIns="0" rIns="0" bIns="0" rtlCol="0" anchor="ctr"/>
           <a:lstStyle/>
           <a:p>
-            <a:pPr marL="0" indent="0">
+            <a:pPr indent="0" marL="0">
               <a:buNone/>
             </a:pPr>
             <a:r>
@@ -13554,7 +13708,7 @@
           </a:solidFill>
           <a:ln/>
           <a:effectLst>
-            <a:outerShdw blurRad="50800" dist="19050" dir="8100000" algn="bl" rotWithShape="0">
+            <a:outerShdw sx="100000" sy="100000" kx="0" ky="0" algn="bl" rotWithShape="0" blurRad="50800" dist="19050" dir="8100000">
               <a:srgbClr val="000000">
                 <a:alpha val="8000"/>
               </a:srgbClr>
@@ -13603,7 +13757,7 @@
           <a:bodyPr wrap="square" lIns="0" tIns="0" rIns="0" bIns="0" rtlCol="0" anchor="ctr"/>
           <a:lstStyle/>
           <a:p>
-            <a:pPr marL="0" indent="0">
+            <a:pPr indent="0" marL="0">
               <a:buNone/>
             </a:pPr>
             <a:r>
@@ -13642,7 +13796,7 @@
           <a:bodyPr wrap="square" lIns="0" tIns="0" rIns="0" bIns="0" rtlCol="0" anchor="t"/>
           <a:lstStyle/>
           <a:p>
-            <a:pPr marL="0" indent="0">
+            <a:pPr indent="0" marL="0">
               <a:buNone/>
             </a:pPr>
             <a:r>
@@ -13659,7 +13813,7 @@
             <a:endParaRPr lang="en-US" sz="1000" dirty="0"/>
           </a:p>
           <a:p>
-            <a:pPr marL="0" indent="0">
+            <a:pPr indent="0" marL="0">
               <a:buNone/>
             </a:pPr>
             <a:r>
@@ -13676,13 +13830,13 @@
             <a:endParaRPr lang="en-US" sz="1000" dirty="0"/>
           </a:p>
           <a:p>
-            <a:pPr marL="0" indent="0">
+            <a:pPr indent="0" marL="0">
               <a:buNone/>
             </a:pPr>
             <a:endParaRPr lang="en-US" sz="1000" dirty="0"/>
           </a:p>
           <a:p>
-            <a:pPr marL="0" indent="0">
+            <a:pPr indent="0" marL="0">
               <a:buNone/>
             </a:pPr>
             <a:r>
@@ -13699,7 +13853,7 @@
             <a:endParaRPr lang="en-US" sz="1000" dirty="0"/>
           </a:p>
           <a:p>
-            <a:pPr marL="0" indent="0">
+            <a:pPr indent="0" marL="0">
               <a:buNone/>
             </a:pPr>
             <a:r>
@@ -13716,7 +13870,7 @@
             <a:endParaRPr lang="en-US" sz="1000" dirty="0"/>
           </a:p>
           <a:p>
-            <a:pPr marL="0" indent="0">
+            <a:pPr indent="0" marL="0">
               <a:buNone/>
             </a:pPr>
             <a:r>
@@ -13753,7 +13907,7 @@
           </a:solidFill>
           <a:ln/>
           <a:effectLst>
-            <a:outerShdw blurRad="50800" dist="19050" dir="8100000" algn="bl" rotWithShape="0">
+            <a:outerShdw sx="100000" sy="100000" kx="0" ky="0" algn="bl" rotWithShape="0" blurRad="50800" dist="19050" dir="8100000">
               <a:srgbClr val="000000">
                 <a:alpha val="8000"/>
               </a:srgbClr>
@@ -13802,7 +13956,7 @@
           <a:bodyPr wrap="square" lIns="0" tIns="0" rIns="0" bIns="0" rtlCol="0" anchor="ctr"/>
           <a:lstStyle/>
           <a:p>
-            <a:pPr marL="0" indent="0">
+            <a:pPr indent="0" marL="0">
               <a:buNone/>
             </a:pPr>
             <a:r>
@@ -13841,7 +13995,7 @@
           <a:bodyPr wrap="square" lIns="0" tIns="0" rIns="0" bIns="0" rtlCol="0" anchor="t"/>
           <a:lstStyle/>
           <a:p>
-            <a:pPr marL="0" indent="0">
+            <a:pPr indent="0" marL="0">
               <a:buNone/>
             </a:pPr>
             <a:r>
@@ -13858,7 +14012,7 @@
             <a:endParaRPr lang="en-US" sz="1000" dirty="0"/>
           </a:p>
           <a:p>
-            <a:pPr marL="0" indent="0">
+            <a:pPr indent="0" marL="0">
               <a:buNone/>
             </a:pPr>
             <a:r>
@@ -13875,13 +14029,13 @@
             <a:endParaRPr lang="en-US" sz="1000" dirty="0"/>
           </a:p>
           <a:p>
-            <a:pPr marL="0" indent="0">
+            <a:pPr indent="0" marL="0">
               <a:buNone/>
             </a:pPr>
             <a:endParaRPr lang="en-US" sz="1000" dirty="0"/>
           </a:p>
           <a:p>
-            <a:pPr marL="0" indent="0">
+            <a:pPr indent="0" marL="0">
               <a:buNone/>
             </a:pPr>
             <a:r>
@@ -13898,7 +14052,7 @@
             <a:endParaRPr lang="en-US" sz="1000" dirty="0"/>
           </a:p>
           <a:p>
-            <a:pPr marL="0" indent="0">
+            <a:pPr indent="0" marL="0">
               <a:buNone/>
             </a:pPr>
             <a:r>
@@ -13915,7 +14069,7 @@
             <a:endParaRPr lang="en-US" sz="1000" dirty="0"/>
           </a:p>
           <a:p>
-            <a:pPr marL="0" indent="0">
+            <a:pPr indent="0" marL="0">
               <a:buNone/>
             </a:pPr>
             <a:r>
@@ -13994,7 +14148,7 @@
           <a:bodyPr wrap="square" lIns="0" tIns="0" rIns="0" bIns="0" rtlCol="0" anchor="ctr"/>
           <a:lstStyle/>
           <a:p>
-            <a:pPr marL="0" indent="0">
+            <a:pPr indent="0" marL="0">
               <a:buNone/>
             </a:pPr>
             <a:r>
@@ -14033,7 +14187,7 @@
           <a:bodyPr wrap="square" lIns="0" tIns="0" rIns="0" bIns="0" rtlCol="0" anchor="ctr"/>
           <a:lstStyle/>
           <a:p>
-            <a:pPr marL="0" indent="0">
+            <a:pPr indent="0" marL="0">
               <a:buNone/>
             </a:pPr>
             <a:r>
@@ -14047,6 +14201,9 @@
               </a:rPr>
               <a:t>signal_raw =   </a:t>
             </a:r>
+            <a:pPr indent="0" marL="0">
+              <a:buNone/>
+            </a:pPr>
             <a:r>
               <a:rPr lang="en-US" sz="1100" b="1" dirty="0">
                 <a:solidFill>
@@ -14058,6 +14215,9 @@
               </a:rPr>
               <a:t>𝟙[MA(5)&gt;MA(20)]</a:t>
             </a:r>
+            <a:pPr indent="0" marL="0">
+              <a:buNone/>
+            </a:pPr>
             <a:r>
               <a:rPr lang="en-US" sz="1100" dirty="0">
                 <a:solidFill>
@@ -14069,6 +14229,9 @@
               </a:rPr>
               <a:t>  ∧  </a:t>
             </a:r>
+            <a:pPr indent="0" marL="0">
+              <a:buNone/>
+            </a:pPr>
             <a:r>
               <a:rPr lang="en-US" sz="1100" b="1" dirty="0">
                 <a:solidFill>
@@ -14080,6 +14243,9 @@
               </a:rPr>
               <a:t>𝟙[MACD柱&gt;0]</a:t>
             </a:r>
+            <a:pPr indent="0" marL="0">
+              <a:buNone/>
+            </a:pPr>
             <a:r>
               <a:rPr lang="en-US" sz="1100" dirty="0">
                 <a:solidFill>
@@ -14091,6 +14257,9 @@
               </a:rPr>
               <a:t>  ∧  </a:t>
             </a:r>
+            <a:pPr indent="0" marL="0">
+              <a:buNone/>
+            </a:pPr>
             <a:r>
               <a:rPr lang="en-US" sz="1100" b="1" dirty="0">
                 <a:solidFill>
@@ -14102,6 +14271,9 @@
               </a:rPr>
               <a:t>𝟙[RSI&lt;70]</a:t>
             </a:r>
+            <a:pPr indent="0" marL="0">
+              <a:buNone/>
+            </a:pPr>
             <a:r>
               <a:rPr lang="en-US" sz="1100" dirty="0">
                 <a:solidFill>
@@ -14113,6 +14285,9 @@
               </a:rPr>
               <a:t>  ∧  </a:t>
             </a:r>
+            <a:pPr indent="0" marL="0">
+              <a:buNone/>
+            </a:pPr>
             <a:r>
               <a:rPr lang="en-US" sz="1100" b="1" dirty="0">
                 <a:solidFill>
@@ -14124,6 +14299,9 @@
               </a:rPr>
               <a:t>𝟙[close&gt;BBˡᵒʷᵉʳ]</a:t>
             </a:r>
+            <a:pPr indent="0" marL="0">
+              <a:buNone/>
+            </a:pPr>
             <a:r>
               <a:rPr lang="en-US" sz="1100" dirty="0">
                 <a:solidFill>
@@ -14135,6 +14313,9 @@
               </a:rPr>
               <a:t>  ∧  </a:t>
             </a:r>
+            <a:pPr indent="0" marL="0">
+              <a:buNone/>
+            </a:pPr>
             <a:r>
               <a:rPr lang="en-US" sz="1100" b="1" dirty="0">
                 <a:solidFill>
@@ -14171,7 +14352,7 @@
           <a:bodyPr wrap="square" lIns="0" tIns="0" rIns="0" bIns="0" rtlCol="0" anchor="t"/>
           <a:lstStyle/>
           <a:p>
-            <a:pPr marL="0" indent="0">
+            <a:pPr indent="0" marL="0">
               <a:buNone/>
             </a:pPr>
             <a:r>
@@ -14188,7 +14369,7 @@
             <a:endParaRPr lang="en-US" sz="1150" dirty="0"/>
           </a:p>
           <a:p>
-            <a:pPr marL="0" indent="0">
+            <a:pPr indent="0" marL="0">
               <a:buNone/>
             </a:pPr>
             <a:r>
@@ -14205,7 +14386,7 @@
             <a:endParaRPr lang="en-US" sz="1150" dirty="0"/>
           </a:p>
           <a:p>
-            <a:pPr marL="0" indent="0">
+            <a:pPr indent="0" marL="0">
               <a:buNone/>
             </a:pPr>
             <a:r>
@@ -14222,7 +14403,7 @@
             <a:endParaRPr lang="en-US" sz="1150" dirty="0"/>
           </a:p>
           <a:p>
-            <a:pPr marL="0" indent="0">
+            <a:pPr indent="0" marL="0">
               <a:buNone/>
             </a:pPr>
             <a:r>
@@ -14281,7 +14462,7 @@
           <a:bodyPr wrap="square" lIns="0" tIns="0" rIns="0" bIns="0" rtlCol="0" anchor="ctr"/>
           <a:lstStyle/>
           <a:p>
-            <a:pPr marL="0" indent="0">
+            <a:pPr indent="0" marL="0">
               <a:buNone/>
             </a:pPr>
             <a:r>
@@ -14320,7 +14501,7 @@
           <a:bodyPr wrap="square" lIns="0" tIns="0" rIns="0" bIns="0" rtlCol="0" anchor="t"/>
           <a:lstStyle/>
           <a:p>
-            <a:pPr marL="0" indent="0">
+            <a:pPr indent="0" marL="0">
               <a:spcAft>
                 <a:spcPts val="200"/>
               </a:spcAft>
@@ -14340,7 +14521,7 @@
             <a:endParaRPr lang="en-US" sz="1000" dirty="0"/>
           </a:p>
           <a:p>
-            <a:pPr marL="0" indent="0">
+            <a:pPr indent="0" marL="0">
               <a:spcAft>
                 <a:spcPts val="200"/>
               </a:spcAft>
@@ -14360,7 +14541,7 @@
             <a:endParaRPr lang="en-US" sz="1000" dirty="0"/>
           </a:p>
           <a:p>
-            <a:pPr marL="0" indent="0">
+            <a:pPr indent="0" marL="0">
               <a:spcAft>
                 <a:spcPts val="200"/>
               </a:spcAft>
@@ -14380,7 +14561,7 @@
             <a:endParaRPr lang="en-US" sz="1000" dirty="0"/>
           </a:p>
           <a:p>
-            <a:pPr marL="0" indent="0">
+            <a:pPr indent="0" marL="0">
               <a:spcAft>
                 <a:spcPts val="200"/>
               </a:spcAft>
@@ -14400,7 +14581,7 @@
             <a:endParaRPr lang="en-US" sz="1000" dirty="0"/>
           </a:p>
           <a:p>
-            <a:pPr marL="0" indent="0">
+            <a:pPr indent="0" marL="0">
               <a:spcAft>
                 <a:spcPts val="200"/>
               </a:spcAft>
@@ -14442,7 +14623,7 @@
           <a:bodyPr wrap="square" rtlCol="0" anchor="ctr"/>
           <a:lstStyle/>
           <a:p>
-            <a:pPr marL="0" indent="0" algn="r">
+            <a:pPr algn="r" indent="0" marL="0">
               <a:buNone/>
             </a:pPr>
             <a:r>
@@ -14476,7 +14657,6 @@
         <a:solidFill>
           <a:srgbClr val="F7F9FC"/>
         </a:solidFill>
-        <a:effectLst/>
       </p:bgPr>
     </p:bg>
     <p:spTree>
@@ -14514,7 +14694,7 @@
           <a:bodyPr wrap="square" lIns="0" tIns="0" rIns="0" bIns="0" rtlCol="0" anchor="ctr"/>
           <a:lstStyle/>
           <a:p>
-            <a:pPr marL="0" indent="0">
+            <a:pPr indent="0" marL="0">
               <a:buNone/>
             </a:pPr>
             <a:r>
@@ -14551,7 +14731,7 @@
           </a:solidFill>
           <a:ln/>
           <a:effectLst>
-            <a:outerShdw blurRad="50800" dist="19050" dir="8100000" algn="bl" rotWithShape="0">
+            <a:outerShdw sx="100000" sy="100000" kx="0" ky="0" algn="bl" rotWithShape="0" blurRad="50800" dist="19050" dir="8100000">
               <a:srgbClr val="000000">
                 <a:alpha val="8000"/>
               </a:srgbClr>
@@ -14600,7 +14780,7 @@
           <a:bodyPr wrap="square" lIns="0" tIns="0" rIns="0" bIns="0" rtlCol="0" anchor="ctr"/>
           <a:lstStyle/>
           <a:p>
-            <a:pPr marL="0" indent="0">
+            <a:pPr indent="0" marL="0">
               <a:buNone/>
             </a:pPr>
             <a:r>
@@ -14639,7 +14819,7 @@
           <a:bodyPr wrap="square" lIns="0" tIns="0" rIns="0" bIns="0" rtlCol="0" anchor="t"/>
           <a:lstStyle/>
           <a:p>
-            <a:pPr marL="0" indent="0">
+            <a:pPr indent="0" marL="0">
               <a:spcAft>
                 <a:spcPts val="200"/>
               </a:spcAft>
@@ -14659,7 +14839,7 @@
             <a:endParaRPr lang="en-US" sz="850" dirty="0"/>
           </a:p>
           <a:p>
-            <a:pPr marL="0" indent="0">
+            <a:pPr indent="0" marL="0">
               <a:spcAft>
                 <a:spcPts val="200"/>
               </a:spcAft>
@@ -14679,7 +14859,7 @@
             <a:endParaRPr lang="en-US" sz="850" dirty="0"/>
           </a:p>
           <a:p>
-            <a:pPr marL="0" indent="0">
+            <a:pPr indent="0" marL="0">
               <a:spcAft>
                 <a:spcPts val="200"/>
               </a:spcAft>
@@ -14699,7 +14879,7 @@
             <a:endParaRPr lang="en-US" sz="850" dirty="0"/>
           </a:p>
           <a:p>
-            <a:pPr marL="0" indent="0">
+            <a:pPr indent="0" marL="0">
               <a:spcAft>
                 <a:spcPts val="200"/>
               </a:spcAft>
@@ -14719,7 +14899,7 @@
             <a:endParaRPr lang="en-US" sz="850" dirty="0"/>
           </a:p>
           <a:p>
-            <a:pPr marL="0" indent="0">
+            <a:pPr indent="0" marL="0">
               <a:spcAft>
                 <a:spcPts val="200"/>
               </a:spcAft>
@@ -14739,7 +14919,7 @@
             <a:endParaRPr lang="en-US" sz="850" dirty="0"/>
           </a:p>
           <a:p>
-            <a:pPr marL="0" indent="0">
+            <a:pPr indent="0" marL="0">
               <a:spcAft>
                 <a:spcPts val="200"/>
               </a:spcAft>
@@ -14759,7 +14939,7 @@
             <a:endParaRPr lang="en-US" sz="850" dirty="0"/>
           </a:p>
           <a:p>
-            <a:pPr marL="0" indent="0">
+            <a:pPr indent="0" marL="0">
               <a:spcAft>
                 <a:spcPts val="200"/>
               </a:spcAft>
@@ -14779,7 +14959,7 @@
             <a:endParaRPr lang="en-US" sz="850" dirty="0"/>
           </a:p>
           <a:p>
-            <a:pPr marL="0" indent="0">
+            <a:pPr indent="0" marL="0">
               <a:spcAft>
                 <a:spcPts val="200"/>
               </a:spcAft>
@@ -14799,7 +14979,7 @@
             <a:endParaRPr lang="en-US" sz="850" dirty="0"/>
           </a:p>
           <a:p>
-            <a:pPr marL="0" indent="0">
+            <a:pPr indent="0" marL="0">
               <a:spcAft>
                 <a:spcPts val="200"/>
               </a:spcAft>
@@ -14808,7 +14988,7 @@
             <a:endParaRPr lang="en-US" sz="850" dirty="0"/>
           </a:p>
           <a:p>
-            <a:pPr marL="0" indent="0">
+            <a:pPr indent="0" marL="0">
               <a:spcAft>
                 <a:spcPts val="200"/>
               </a:spcAft>
@@ -14828,7 +15008,7 @@
             <a:endParaRPr lang="en-US" sz="850" dirty="0"/>
           </a:p>
           <a:p>
-            <a:pPr marL="0" indent="0">
+            <a:pPr indent="0" marL="0">
               <a:spcAft>
                 <a:spcPts val="200"/>
               </a:spcAft>
@@ -14848,7 +15028,7 @@
             <a:endParaRPr lang="en-US" sz="850" dirty="0"/>
           </a:p>
           <a:p>
-            <a:pPr marL="0" indent="0">
+            <a:pPr indent="0" marL="0">
               <a:spcAft>
                 <a:spcPts val="200"/>
               </a:spcAft>
@@ -14888,7 +15068,7 @@
           </a:solidFill>
           <a:ln/>
           <a:effectLst>
-            <a:outerShdw blurRad="50800" dist="19050" dir="8100000" algn="bl" rotWithShape="0">
+            <a:outerShdw sx="100000" sy="100000" kx="0" ky="0" algn="bl" rotWithShape="0" blurRad="50800" dist="19050" dir="8100000">
               <a:srgbClr val="000000">
                 <a:alpha val="8000"/>
               </a:srgbClr>
@@ -14937,7 +15117,7 @@
           <a:bodyPr wrap="square" lIns="0" tIns="0" rIns="0" bIns="0" rtlCol="0" anchor="ctr"/>
           <a:lstStyle/>
           <a:p>
-            <a:pPr marL="0" indent="0">
+            <a:pPr indent="0" marL="0">
               <a:buNone/>
             </a:pPr>
             <a:r>
@@ -14976,7 +15156,7 @@
           <a:bodyPr wrap="square" lIns="0" tIns="0" rIns="0" bIns="0" rtlCol="0" anchor="t"/>
           <a:lstStyle/>
           <a:p>
-            <a:pPr marL="0" indent="0">
+            <a:pPr indent="0" marL="0">
               <a:spcAft>
                 <a:spcPts val="200"/>
               </a:spcAft>
@@ -14996,7 +15176,7 @@
             <a:endParaRPr lang="en-US" sz="800" dirty="0"/>
           </a:p>
           <a:p>
-            <a:pPr marL="0" indent="0">
+            <a:pPr indent="0" marL="0">
               <a:spcAft>
                 <a:spcPts val="200"/>
               </a:spcAft>
@@ -15016,7 +15196,7 @@
             <a:endParaRPr lang="en-US" sz="800" dirty="0"/>
           </a:p>
           <a:p>
-            <a:pPr marL="0" indent="0">
+            <a:pPr indent="0" marL="0">
               <a:spcAft>
                 <a:spcPts val="200"/>
               </a:spcAft>
@@ -15036,7 +15216,7 @@
             <a:endParaRPr lang="en-US" sz="800" dirty="0"/>
           </a:p>
           <a:p>
-            <a:pPr marL="0" indent="0">
+            <a:pPr indent="0" marL="0">
               <a:spcAft>
                 <a:spcPts val="200"/>
               </a:spcAft>
@@ -15056,7 +15236,7 @@
             <a:endParaRPr lang="en-US" sz="800" dirty="0"/>
           </a:p>
           <a:p>
-            <a:pPr marL="0" indent="0">
+            <a:pPr indent="0" marL="0">
               <a:spcAft>
                 <a:spcPts val="200"/>
               </a:spcAft>
@@ -15076,7 +15256,7 @@
             <a:endParaRPr lang="en-US" sz="800" dirty="0"/>
           </a:p>
           <a:p>
-            <a:pPr marL="0" indent="0">
+            <a:pPr indent="0" marL="0">
               <a:spcAft>
                 <a:spcPts val="200"/>
               </a:spcAft>
@@ -15085,7 +15265,7 @@
             <a:endParaRPr lang="en-US" sz="800" dirty="0"/>
           </a:p>
           <a:p>
-            <a:pPr marL="0" indent="0">
+            <a:pPr indent="0" marL="0">
               <a:spcAft>
                 <a:spcPts val="200"/>
               </a:spcAft>
@@ -15105,7 +15285,7 @@
             <a:endParaRPr lang="en-US" sz="800" dirty="0"/>
           </a:p>
           <a:p>
-            <a:pPr marL="0" indent="0">
+            <a:pPr indent="0" marL="0">
               <a:spcAft>
                 <a:spcPts val="200"/>
               </a:spcAft>
@@ -15125,7 +15305,7 @@
             <a:endParaRPr lang="en-US" sz="800" dirty="0"/>
           </a:p>
           <a:p>
-            <a:pPr marL="0" indent="0">
+            <a:pPr indent="0" marL="0">
               <a:spcAft>
                 <a:spcPts val="200"/>
               </a:spcAft>
@@ -15134,7 +15314,7 @@
             <a:endParaRPr lang="en-US" sz="800" dirty="0"/>
           </a:p>
           <a:p>
-            <a:pPr marL="0" indent="0">
+            <a:pPr indent="0" marL="0">
               <a:spcAft>
                 <a:spcPts val="200"/>
               </a:spcAft>
@@ -15154,7 +15334,7 @@
             <a:endParaRPr lang="en-US" sz="800" dirty="0"/>
           </a:p>
           <a:p>
-            <a:pPr marL="0" indent="0">
+            <a:pPr indent="0" marL="0">
               <a:spcAft>
                 <a:spcPts val="200"/>
               </a:spcAft>
@@ -15174,7 +15354,7 @@
             <a:endParaRPr lang="en-US" sz="800" dirty="0"/>
           </a:p>
           <a:p>
-            <a:pPr marL="0" indent="0">
+            <a:pPr indent="0" marL="0">
               <a:spcAft>
                 <a:spcPts val="200"/>
               </a:spcAft>
@@ -15256,7 +15436,7 @@
           <a:bodyPr wrap="square" lIns="0" tIns="0" rIns="0" bIns="0" rtlCol="0" anchor="ctr"/>
           <a:lstStyle/>
           <a:p>
-            <a:pPr marL="0" indent="0">
+            <a:pPr indent="0" marL="0">
               <a:buNone/>
             </a:pPr>
             <a:r>
@@ -15295,7 +15475,7 @@
           <a:bodyPr wrap="square" lIns="0" tIns="0" rIns="0" bIns="0" rtlCol="0" anchor="t"/>
           <a:lstStyle/>
           <a:p>
-            <a:pPr marL="0" indent="0">
+            <a:pPr indent="0" marL="0">
               <a:spcAft>
                 <a:spcPts val="200"/>
               </a:spcAft>
@@ -15315,7 +15495,7 @@
             <a:endParaRPr lang="en-US" sz="900" dirty="0"/>
           </a:p>
           <a:p>
-            <a:pPr marL="0" indent="0">
+            <a:pPr indent="0" marL="0">
               <a:spcAft>
                 <a:spcPts val="200"/>
               </a:spcAft>
@@ -15335,7 +15515,7 @@
             <a:endParaRPr lang="en-US" sz="900" dirty="0"/>
           </a:p>
           <a:p>
-            <a:pPr marL="0" indent="0">
+            <a:pPr indent="0" marL="0">
               <a:spcAft>
                 <a:spcPts val="200"/>
               </a:spcAft>
@@ -15355,7 +15535,7 @@
             <a:endParaRPr lang="en-US" sz="900" dirty="0"/>
           </a:p>
           <a:p>
-            <a:pPr marL="0" indent="0">
+            <a:pPr indent="0" marL="0">
               <a:spcAft>
                 <a:spcPts val="200"/>
               </a:spcAft>
@@ -15375,7 +15555,7 @@
             <a:endParaRPr lang="en-US" sz="900" dirty="0"/>
           </a:p>
           <a:p>
-            <a:pPr marL="0" indent="0">
+            <a:pPr indent="0" marL="0">
               <a:spcAft>
                 <a:spcPts val="200"/>
               </a:spcAft>
@@ -15417,7 +15597,7 @@
           <a:bodyPr wrap="square" lIns="0" tIns="0" rIns="0" bIns="0" rtlCol="0" anchor="ctr"/>
           <a:lstStyle/>
           <a:p>
-            <a:pPr marL="0" indent="0">
+            <a:pPr indent="0" marL="0">
               <a:buNone/>
             </a:pPr>
             <a:r>
@@ -15456,7 +15636,7 @@
           <a:bodyPr wrap="square" lIns="0" tIns="0" rIns="0" bIns="0" rtlCol="0" anchor="t"/>
           <a:lstStyle/>
           <a:p>
-            <a:pPr marL="0" indent="0">
+            <a:pPr indent="0" marL="0">
               <a:buNone/>
             </a:pPr>
             <a:r>
@@ -15473,7 +15653,7 @@
             <a:endParaRPr lang="en-US" sz="900" dirty="0"/>
           </a:p>
           <a:p>
-            <a:pPr marL="0" indent="0">
+            <a:pPr indent="0" marL="0">
               <a:buNone/>
             </a:pPr>
             <a:r>
@@ -15490,7 +15670,7 @@
             <a:endParaRPr lang="en-US" sz="900" dirty="0"/>
           </a:p>
           <a:p>
-            <a:pPr marL="0" indent="0">
+            <a:pPr indent="0" marL="0">
               <a:buNone/>
             </a:pPr>
             <a:r>
@@ -15507,13 +15687,13 @@
             <a:endParaRPr lang="en-US" sz="900" dirty="0"/>
           </a:p>
           <a:p>
-            <a:pPr marL="0" indent="0">
+            <a:pPr indent="0" marL="0">
               <a:buNone/>
             </a:pPr>
             <a:endParaRPr lang="en-US" sz="900" dirty="0"/>
           </a:p>
           <a:p>
-            <a:pPr marL="0" indent="0">
+            <a:pPr indent="0" marL="0">
               <a:buNone/>
             </a:pPr>
             <a:r>
@@ -15530,7 +15710,7 @@
             <a:endParaRPr lang="en-US" sz="900" dirty="0"/>
           </a:p>
           <a:p>
-            <a:pPr marL="0" indent="0">
+            <a:pPr indent="0" marL="0">
               <a:buNone/>
             </a:pPr>
             <a:r>
@@ -15547,7 +15727,7 @@
             <a:endParaRPr lang="en-US" sz="900" dirty="0"/>
           </a:p>
           <a:p>
-            <a:pPr marL="0" indent="0">
+            <a:pPr indent="0" marL="0">
               <a:buNone/>
             </a:pPr>
             <a:r>
@@ -15564,7 +15744,7 @@
             <a:endParaRPr lang="en-US" sz="900" dirty="0"/>
           </a:p>
           <a:p>
-            <a:pPr marL="0" indent="0">
+            <a:pPr indent="0" marL="0">
               <a:buNone/>
             </a:pPr>
             <a:r>
@@ -15581,13 +15761,13 @@
             <a:endParaRPr lang="en-US" sz="900" dirty="0"/>
           </a:p>
           <a:p>
-            <a:pPr marL="0" indent="0">
+            <a:pPr indent="0" marL="0">
               <a:buNone/>
             </a:pPr>
             <a:endParaRPr lang="en-US" sz="900" dirty="0"/>
           </a:p>
           <a:p>
-            <a:pPr marL="0" indent="0">
+            <a:pPr indent="0" marL="0">
               <a:buNone/>
             </a:pPr>
             <a:r>
@@ -15626,7 +15806,7 @@
           <a:bodyPr wrap="square" rtlCol="0" anchor="ctr"/>
           <a:lstStyle/>
           <a:p>
-            <a:pPr marL="0" indent="0" algn="r">
+            <a:pPr algn="r" indent="0" marL="0">
               <a:buNone/>
             </a:pPr>
             <a:r>
@@ -15660,7 +15840,6 @@
         <a:solidFill>
           <a:srgbClr val="F7F9FC"/>
         </a:solidFill>
-        <a:effectLst/>
       </p:bgPr>
     </p:bg>
     <p:spTree>
@@ -15698,7 +15877,7 @@
           <a:bodyPr wrap="square" lIns="0" tIns="0" rIns="0" bIns="0" rtlCol="0" anchor="ctr"/>
           <a:lstStyle/>
           <a:p>
-            <a:pPr marL="0" indent="0">
+            <a:pPr indent="0" marL="0">
               <a:buNone/>
             </a:pPr>
             <a:r>
@@ -15735,7 +15914,7 @@
           </a:solidFill>
           <a:ln/>
           <a:effectLst>
-            <a:outerShdw blurRad="50800" dist="19050" dir="8100000" algn="bl" rotWithShape="0">
+            <a:outerShdw sx="100000" sy="100000" kx="0" ky="0" algn="bl" rotWithShape="0" blurRad="50800" dist="19050" dir="8100000">
               <a:srgbClr val="000000">
                 <a:alpha val="8000"/>
               </a:srgbClr>
@@ -15784,7 +15963,7 @@
           <a:bodyPr wrap="square" lIns="0" tIns="0" rIns="0" bIns="0" rtlCol="0" anchor="ctr"/>
           <a:lstStyle/>
           <a:p>
-            <a:pPr marL="0" indent="0">
+            <a:pPr indent="0" marL="0">
               <a:buNone/>
             </a:pPr>
             <a:r>
@@ -15823,7 +16002,7 @@
           <a:bodyPr wrap="square" lIns="0" tIns="0" rIns="0" bIns="0" rtlCol="0" anchor="t"/>
           <a:lstStyle/>
           <a:p>
-            <a:pPr marL="0" indent="0">
+            <a:pPr indent="0" marL="0">
               <a:buNone/>
             </a:pPr>
             <a:r>
@@ -15840,7 +16019,7 @@
             <a:endParaRPr lang="en-US" sz="1000" dirty="0"/>
           </a:p>
           <a:p>
-            <a:pPr marL="0" indent="0">
+            <a:pPr indent="0" marL="0">
               <a:buNone/>
             </a:pPr>
             <a:r>
@@ -15857,7 +16036,7 @@
             <a:endParaRPr lang="en-US" sz="1000" dirty="0"/>
           </a:p>
           <a:p>
-            <a:pPr marL="0" indent="0">
+            <a:pPr indent="0" marL="0">
               <a:buNone/>
             </a:pPr>
             <a:r>
@@ -15874,7 +16053,7 @@
             <a:endParaRPr lang="en-US" sz="1000" dirty="0"/>
           </a:p>
           <a:p>
-            <a:pPr marL="0" indent="0">
+            <a:pPr indent="0" marL="0">
               <a:buNone/>
             </a:pPr>
             <a:r>
@@ -15891,7 +16070,7 @@
             <a:endParaRPr lang="en-US" sz="1000" dirty="0"/>
           </a:p>
           <a:p>
-            <a:pPr marL="0" indent="0">
+            <a:pPr indent="0" marL="0">
               <a:buNone/>
             </a:pPr>
             <a:r>
@@ -15908,13 +16087,13 @@
             <a:endParaRPr lang="en-US" sz="1000" dirty="0"/>
           </a:p>
           <a:p>
-            <a:pPr marL="0" indent="0">
+            <a:pPr indent="0" marL="0">
               <a:buNone/>
             </a:pPr>
             <a:endParaRPr lang="en-US" sz="1000" dirty="0"/>
           </a:p>
           <a:p>
-            <a:pPr marL="0" indent="0">
+            <a:pPr indent="0" marL="0">
               <a:buNone/>
             </a:pPr>
             <a:r>
@@ -15931,7 +16110,7 @@
             <a:endParaRPr lang="en-US" sz="1000" dirty="0"/>
           </a:p>
           <a:p>
-            <a:pPr marL="0" indent="0">
+            <a:pPr indent="0" marL="0">
               <a:buNone/>
             </a:pPr>
             <a:r>
@@ -15968,7 +16147,7 @@
           </a:solidFill>
           <a:ln/>
           <a:effectLst>
-            <a:outerShdw blurRad="50800" dist="19050" dir="8100000" algn="bl" rotWithShape="0">
+            <a:outerShdw sx="100000" sy="100000" kx="0" ky="0" algn="bl" rotWithShape="0" blurRad="50800" dist="19050" dir="8100000">
               <a:srgbClr val="000000">
                 <a:alpha val="8000"/>
               </a:srgbClr>
@@ -16017,7 +16196,7 @@
           <a:bodyPr wrap="square" lIns="0" tIns="0" rIns="0" bIns="0" rtlCol="0" anchor="ctr"/>
           <a:lstStyle/>
           <a:p>
-            <a:pPr marL="0" indent="0">
+            <a:pPr indent="0" marL="0">
               <a:buNone/>
             </a:pPr>
             <a:r>
@@ -16056,7 +16235,7 @@
           <a:bodyPr wrap="square" lIns="0" tIns="0" rIns="0" bIns="0" rtlCol="0" anchor="t"/>
           <a:lstStyle/>
           <a:p>
-            <a:pPr marL="0" indent="0">
+            <a:pPr indent="0" marL="0">
               <a:buNone/>
             </a:pPr>
             <a:r>
@@ -16073,7 +16252,7 @@
             <a:endParaRPr lang="en-US" sz="1000" dirty="0"/>
           </a:p>
           <a:p>
-            <a:pPr marL="0" indent="0">
+            <a:pPr indent="0" marL="0">
               <a:buNone/>
             </a:pPr>
             <a:r>
@@ -16090,7 +16269,7 @@
             <a:endParaRPr lang="en-US" sz="1000" dirty="0"/>
           </a:p>
           <a:p>
-            <a:pPr marL="0" indent="0">
+            <a:pPr indent="0" marL="0">
               <a:buNone/>
             </a:pPr>
             <a:r>
@@ -16107,7 +16286,7 @@
             <a:endParaRPr lang="en-US" sz="1000" dirty="0"/>
           </a:p>
           <a:p>
-            <a:pPr marL="0" indent="0">
+            <a:pPr indent="0" marL="0">
               <a:buNone/>
             </a:pPr>
             <a:r>
@@ -16124,13 +16303,13 @@
             <a:endParaRPr lang="en-US" sz="1000" dirty="0"/>
           </a:p>
           <a:p>
-            <a:pPr marL="0" indent="0">
+            <a:pPr indent="0" marL="0">
               <a:buNone/>
             </a:pPr>
             <a:endParaRPr lang="en-US" sz="1000" dirty="0"/>
           </a:p>
           <a:p>
-            <a:pPr marL="0" indent="0">
+            <a:pPr indent="0" marL="0">
               <a:buNone/>
             </a:pPr>
             <a:r>
@@ -16147,7 +16326,7 @@
             <a:endParaRPr lang="en-US" sz="1000" dirty="0"/>
           </a:p>
           <a:p>
-            <a:pPr marL="0" indent="0">
+            <a:pPr indent="0" marL="0">
               <a:buNone/>
             </a:pPr>
             <a:r>
@@ -16184,7 +16363,7 @@
           </a:solidFill>
           <a:ln/>
           <a:effectLst>
-            <a:outerShdw blurRad="50800" dist="19050" dir="8100000" algn="bl" rotWithShape="0">
+            <a:outerShdw sx="100000" sy="100000" kx="0" ky="0" algn="bl" rotWithShape="0" blurRad="50800" dist="19050" dir="8100000">
               <a:srgbClr val="000000">
                 <a:alpha val="8000"/>
               </a:srgbClr>
@@ -16233,7 +16412,7 @@
           <a:bodyPr wrap="square" lIns="0" tIns="0" rIns="0" bIns="0" rtlCol="0" anchor="ctr"/>
           <a:lstStyle/>
           <a:p>
-            <a:pPr marL="0" indent="0">
+            <a:pPr indent="0" marL="0">
               <a:buNone/>
             </a:pPr>
             <a:r>
@@ -16272,7 +16451,7 @@
           <a:bodyPr wrap="square" lIns="0" tIns="0" rIns="0" bIns="0" rtlCol="0" anchor="t"/>
           <a:lstStyle/>
           <a:p>
-            <a:pPr marL="0" indent="0">
+            <a:pPr indent="0" marL="0">
               <a:buNone/>
             </a:pPr>
             <a:r>
@@ -16289,13 +16468,13 @@
             <a:endParaRPr lang="en-US" sz="1000" dirty="0"/>
           </a:p>
           <a:p>
-            <a:pPr marL="0" indent="0">
+            <a:pPr indent="0" marL="0">
               <a:buNone/>
             </a:pPr>
             <a:endParaRPr lang="en-US" sz="1000" dirty="0"/>
           </a:p>
           <a:p>
-            <a:pPr marL="0" indent="0">
+            <a:pPr indent="0" marL="0">
               <a:buNone/>
             </a:pPr>
             <a:r>
@@ -16312,7 +16491,7 @@
             <a:endParaRPr lang="en-US" sz="1000" dirty="0"/>
           </a:p>
           <a:p>
-            <a:pPr marL="0" indent="0">
+            <a:pPr indent="0" marL="0">
               <a:buNone/>
             </a:pPr>
             <a:r>
@@ -16329,7 +16508,7 @@
             <a:endParaRPr lang="en-US" sz="1000" dirty="0"/>
           </a:p>
           <a:p>
-            <a:pPr marL="0" indent="0">
+            <a:pPr indent="0" marL="0">
               <a:buNone/>
             </a:pPr>
             <a:r>
@@ -16346,13 +16525,13 @@
             <a:endParaRPr lang="en-US" sz="1000" dirty="0"/>
           </a:p>
           <a:p>
-            <a:pPr marL="0" indent="0">
+            <a:pPr indent="0" marL="0">
               <a:buNone/>
             </a:pPr>
             <a:endParaRPr lang="en-US" sz="1000" dirty="0"/>
           </a:p>
           <a:p>
-            <a:pPr marL="0" indent="0">
+            <a:pPr indent="0" marL="0">
               <a:buNone/>
             </a:pPr>
             <a:r>
@@ -16391,7 +16570,7 @@
           <a:bodyPr wrap="square" rtlCol="0" anchor="ctr"/>
           <a:lstStyle/>
           <a:p>
-            <a:pPr marL="0" indent="0" algn="r">
+            <a:pPr algn="r" indent="0" marL="0">
               <a:buNone/>
             </a:pPr>
             <a:r>
@@ -16425,7 +16604,6 @@
         <a:solidFill>
           <a:srgbClr val="F7F9FC"/>
         </a:solidFill>
-        <a:effectLst/>
       </p:bgPr>
     </p:bg>
     <p:spTree>
@@ -16463,7 +16641,7 @@
           <a:bodyPr wrap="square" lIns="0" tIns="0" rIns="0" bIns="0" rtlCol="0" anchor="ctr"/>
           <a:lstStyle/>
           <a:p>
-            <a:pPr marL="0" indent="0">
+            <a:pPr indent="0" marL="0">
               <a:buNone/>
             </a:pPr>
             <a:r>
@@ -16502,7 +16680,7 @@
           <a:bodyPr wrap="square" lIns="0" tIns="0" rIns="0" bIns="0" rtlCol="0" anchor="ctr"/>
           <a:lstStyle/>
           <a:p>
-            <a:pPr marL="0" indent="0" algn="ctr">
+            <a:pPr algn="ctr" indent="0" marL="0">
               <a:buNone/>
             </a:pPr>
             <a:r>
@@ -16541,7 +16719,7 @@
           <a:bodyPr wrap="square" lIns="0" tIns="0" rIns="0" bIns="0" rtlCol="0" anchor="ctr"/>
           <a:lstStyle/>
           <a:p>
-            <a:pPr marL="0" indent="0" algn="ctr">
+            <a:pPr algn="ctr" indent="0" marL="0">
               <a:buNone/>
             </a:pPr>
             <a:r>
@@ -16580,7 +16758,7 @@
           <a:bodyPr wrap="square" lIns="0" tIns="0" rIns="0" bIns="0" rtlCol="0" anchor="ctr"/>
           <a:lstStyle/>
           <a:p>
-            <a:pPr marL="0" indent="0" algn="ctr">
+            <a:pPr algn="ctr" indent="0" marL="0">
               <a:buNone/>
             </a:pPr>
             <a:r>
@@ -16619,7 +16797,7 @@
           <a:bodyPr wrap="square" lIns="0" tIns="0" rIns="0" bIns="0" rtlCol="0" anchor="ctr"/>
           <a:lstStyle/>
           <a:p>
-            <a:pPr marL="0" indent="0" algn="ctr">
+            <a:pPr algn="ctr" indent="0" marL="0">
               <a:buNone/>
             </a:pPr>
             <a:r>
@@ -16658,7 +16836,7 @@
           <a:bodyPr wrap="square" lIns="0" tIns="0" rIns="0" bIns="0" rtlCol="0" anchor="ctr"/>
           <a:lstStyle/>
           <a:p>
-            <a:pPr marL="0" indent="0" algn="ctr">
+            <a:pPr algn="ctr" indent="0" marL="0">
               <a:buNone/>
             </a:pPr>
             <a:r>
@@ -16697,7 +16875,7 @@
           <a:bodyPr wrap="square" lIns="0" tIns="0" rIns="0" bIns="0" rtlCol="0" anchor="ctr"/>
           <a:lstStyle/>
           <a:p>
-            <a:pPr marL="0" indent="0" algn="ctr">
+            <a:pPr algn="ctr" indent="0" marL="0">
               <a:buNone/>
             </a:pPr>
             <a:r>
@@ -16736,7 +16914,7 @@
           <a:bodyPr wrap="square" lIns="0" tIns="0" rIns="0" bIns="0" rtlCol="0" anchor="ctr"/>
           <a:lstStyle/>
           <a:p>
-            <a:pPr marL="0" indent="0" algn="ctr">
+            <a:pPr algn="ctr" indent="0" marL="0">
               <a:buNone/>
             </a:pPr>
             <a:r>
@@ -16775,7 +16953,7 @@
           <a:bodyPr wrap="square" lIns="0" tIns="0" rIns="0" bIns="0" rtlCol="0" anchor="ctr"/>
           <a:lstStyle/>
           <a:p>
-            <a:pPr marL="0" indent="0" algn="ctr">
+            <a:pPr algn="ctr" indent="0" marL="0">
               <a:buNone/>
             </a:pPr>
             <a:r>
@@ -16814,7 +16992,7 @@
           <a:bodyPr wrap="square" lIns="0" tIns="0" rIns="0" bIns="0" rtlCol="0" anchor="ctr"/>
           <a:lstStyle/>
           <a:p>
-            <a:pPr marL="0" indent="0" algn="ctr">
+            <a:pPr algn="ctr" indent="0" marL="0">
               <a:buNone/>
             </a:pPr>
             <a:r>
@@ -16853,7 +17031,7 @@
           <a:bodyPr wrap="square" lIns="0" tIns="0" rIns="0" bIns="0" rtlCol="0" anchor="ctr"/>
           <a:lstStyle/>
           <a:p>
-            <a:pPr marL="0" indent="0" algn="ctr">
+            <a:pPr algn="ctr" indent="0" marL="0">
               <a:buNone/>
             </a:pPr>
             <a:r>
@@ -16892,7 +17070,7 @@
           <a:bodyPr wrap="square" lIns="0" tIns="0" rIns="0" bIns="0" rtlCol="0" anchor="ctr"/>
           <a:lstStyle/>
           <a:p>
-            <a:pPr marL="0" indent="0" algn="ctr">
+            <a:pPr algn="ctr" indent="0" marL="0">
               <a:buNone/>
             </a:pPr>
             <a:r>
@@ -16931,7 +17109,7 @@
           <a:bodyPr wrap="square" lIns="0" tIns="0" rIns="0" bIns="0" rtlCol="0" anchor="ctr"/>
           <a:lstStyle/>
           <a:p>
-            <a:pPr marL="0" indent="0" algn="ctr">
+            <a:pPr algn="ctr" indent="0" marL="0">
               <a:buNone/>
             </a:pPr>
             <a:r>
@@ -16970,7 +17148,7 @@
           <a:bodyPr wrap="square" lIns="0" tIns="0" rIns="0" bIns="0" rtlCol="0" anchor="ctr"/>
           <a:lstStyle/>
           <a:p>
-            <a:pPr marL="0" indent="0" algn="ctr">
+            <a:pPr algn="ctr" indent="0" marL="0">
               <a:buNone/>
             </a:pPr>
             <a:r>
@@ -17009,7 +17187,7 @@
           <a:bodyPr wrap="square" lIns="0" tIns="0" rIns="0" bIns="0" rtlCol="0" anchor="ctr"/>
           <a:lstStyle/>
           <a:p>
-            <a:pPr marL="0" indent="0" algn="ctr">
+            <a:pPr algn="ctr" indent="0" marL="0">
               <a:buNone/>
             </a:pPr>
             <a:r>
@@ -17048,7 +17226,7 @@
           <a:bodyPr wrap="square" lIns="0" tIns="0" rIns="0" bIns="0" rtlCol="0" anchor="ctr"/>
           <a:lstStyle/>
           <a:p>
-            <a:pPr marL="0" indent="0" algn="ctr">
+            <a:pPr algn="ctr" indent="0" marL="0">
               <a:buNone/>
             </a:pPr>
             <a:r>
@@ -17068,7 +17246,7 @@
       </p:sp>
       <p:graphicFrame>
         <p:nvGraphicFramePr>
-          <p:cNvPr id="18" name="Table 0"/>
+          <p:cNvPr id="10" name="Table 0"/>
           <p:cNvGraphicFramePr>
             <a:graphicFrameLocks noGrp="1"/>
           </p:cNvGraphicFramePr>
@@ -17089,48 +17267,12 @@
             <a:tbl>
               <a:tblPr/>
               <a:tblGrid>
-                <a:gridCol w="1554480">
-                  <a:extLst>
-                    <a:ext uri="{9D8B030D-6E8A-4147-A177-3AD203B41FA5}">
-                      <a16:colId xmlns:a16="http://schemas.microsoft.com/office/drawing/2014/main" val="20000"/>
-                    </a:ext>
-                  </a:extLst>
-                </a:gridCol>
-                <a:gridCol w="1097280">
-                  <a:extLst>
-                    <a:ext uri="{9D8B030D-6E8A-4147-A177-3AD203B41FA5}">
-                      <a16:colId xmlns:a16="http://schemas.microsoft.com/office/drawing/2014/main" val="20001"/>
-                    </a:ext>
-                  </a:extLst>
-                </a:gridCol>
-                <a:gridCol w="1097280">
-                  <a:extLst>
-                    <a:ext uri="{9D8B030D-6E8A-4147-A177-3AD203B41FA5}">
-                      <a16:colId xmlns:a16="http://schemas.microsoft.com/office/drawing/2014/main" val="20002"/>
-                    </a:ext>
-                  </a:extLst>
-                </a:gridCol>
-                <a:gridCol w="1097280">
-                  <a:extLst>
-                    <a:ext uri="{9D8B030D-6E8A-4147-A177-3AD203B41FA5}">
-                      <a16:colId xmlns:a16="http://schemas.microsoft.com/office/drawing/2014/main" val="20003"/>
-                    </a:ext>
-                  </a:extLst>
-                </a:gridCol>
-                <a:gridCol w="822960">
-                  <a:extLst>
-                    <a:ext uri="{9D8B030D-6E8A-4147-A177-3AD203B41FA5}">
-                      <a16:colId xmlns:a16="http://schemas.microsoft.com/office/drawing/2014/main" val="20004"/>
-                    </a:ext>
-                  </a:extLst>
-                </a:gridCol>
-                <a:gridCol w="1097280">
-                  <a:extLst>
-                    <a:ext uri="{9D8B030D-6E8A-4147-A177-3AD203B41FA5}">
-                      <a16:colId xmlns:a16="http://schemas.microsoft.com/office/drawing/2014/main" val="20005"/>
-                    </a:ext>
-                  </a:extLst>
-                </a:gridCol>
+                <a:gridCol w="1554480"/>
+                <a:gridCol w="1097280"/>
+                <a:gridCol w="1097280"/>
+                <a:gridCol w="1097280"/>
+                <a:gridCol w="822960"/>
+                <a:gridCol w="1097280"/>
               </a:tblGrid>
               <a:tr h="292608">
                 <a:tc>
@@ -17138,7 +17280,7 @@
                     <a:bodyPr/>
                     <a:lstStyle/>
                     <a:p>
-                      <a:pPr marL="0" indent="0">
+                      <a:pPr indent="0" marL="0">
                         <a:buNone/>
                       </a:pPr>
                       <a:r>
@@ -17159,7 +17301,7 @@
                       </a:endParaRPr>
                     </a:p>
                   </a:txBody>
-                  <a:tcPr>
+                  <a:tcPr marL="91440" marR="91440" marT="45720" marB="45720">
                     <a:lnL w="6350" cap="flat" cmpd="sng" algn="ctr">
                       <a:solidFill>
                         <a:srgbClr val="E8ECF1"/>
@@ -17206,7 +17348,7 @@
                     <a:bodyPr/>
                     <a:lstStyle/>
                     <a:p>
-                      <a:pPr marL="0" indent="0">
+                      <a:pPr indent="0" marL="0">
                         <a:buNone/>
                       </a:pPr>
                       <a:r>
@@ -17227,7 +17369,7 @@
                       </a:endParaRPr>
                     </a:p>
                   </a:txBody>
-                  <a:tcPr>
+                  <a:tcPr marL="91440" marR="91440" marT="45720" marB="45720">
                     <a:lnL w="6350" cap="flat" cmpd="sng" algn="ctr">
                       <a:solidFill>
                         <a:srgbClr val="E8ECF1"/>
@@ -17274,7 +17416,7 @@
                     <a:bodyPr/>
                     <a:lstStyle/>
                     <a:p>
-                      <a:pPr marL="0" indent="0">
+                      <a:pPr indent="0" marL="0">
                         <a:buNone/>
                       </a:pPr>
                       <a:r>
@@ -17295,7 +17437,7 @@
                       </a:endParaRPr>
                     </a:p>
                   </a:txBody>
-                  <a:tcPr>
+                  <a:tcPr marL="91440" marR="91440" marT="45720" marB="45720">
                     <a:lnL w="6350" cap="flat" cmpd="sng" algn="ctr">
                       <a:solidFill>
                         <a:srgbClr val="E8ECF1"/>
@@ -17342,7 +17484,7 @@
                     <a:bodyPr/>
                     <a:lstStyle/>
                     <a:p>
-                      <a:pPr marL="0" indent="0">
+                      <a:pPr indent="0" marL="0">
                         <a:buNone/>
                       </a:pPr>
                       <a:r>
@@ -17363,7 +17505,7 @@
                       </a:endParaRPr>
                     </a:p>
                   </a:txBody>
-                  <a:tcPr>
+                  <a:tcPr marL="91440" marR="91440" marT="45720" marB="45720">
                     <a:lnL w="6350" cap="flat" cmpd="sng" algn="ctr">
                       <a:solidFill>
                         <a:srgbClr val="E8ECF1"/>
@@ -17410,7 +17552,7 @@
                     <a:bodyPr/>
                     <a:lstStyle/>
                     <a:p>
-                      <a:pPr marL="0" indent="0">
+                      <a:pPr indent="0" marL="0">
                         <a:buNone/>
                       </a:pPr>
                       <a:r>
@@ -17431,7 +17573,7 @@
                       </a:endParaRPr>
                     </a:p>
                   </a:txBody>
-                  <a:tcPr>
+                  <a:tcPr marL="91440" marR="91440" marT="45720" marB="45720">
                     <a:lnL w="6350" cap="flat" cmpd="sng" algn="ctr">
                       <a:solidFill>
                         <a:srgbClr val="E8ECF1"/>
@@ -17478,7 +17620,7 @@
                     <a:bodyPr/>
                     <a:lstStyle/>
                     <a:p>
-                      <a:pPr marL="0" indent="0">
+                      <a:pPr indent="0" marL="0">
                         <a:buNone/>
                       </a:pPr>
                       <a:r>
@@ -17499,7 +17641,7 @@
                       </a:endParaRPr>
                     </a:p>
                   </a:txBody>
-                  <a:tcPr>
+                  <a:tcPr marL="91440" marR="91440" marT="45720" marB="45720">
                     <a:lnL w="6350" cap="flat" cmpd="sng" algn="ctr">
                       <a:solidFill>
                         <a:srgbClr val="E8ECF1"/>
@@ -17541,11 +17683,6 @@
                     </a:solidFill>
                   </a:tcPr>
                 </a:tc>
-                <a:extLst>
-                  <a:ext uri="{0D108BD9-81ED-4DB2-BD59-A6C34878D82A}">
-                    <a16:rowId xmlns:a16="http://schemas.microsoft.com/office/drawing/2014/main" val="10000"/>
-                  </a:ext>
-                </a:extLst>
               </a:tr>
               <a:tr h="237744">
                 <a:tc>
@@ -17553,7 +17690,7 @@
                     <a:bodyPr/>
                     <a:lstStyle/>
                     <a:p>
-                      <a:pPr marL="0" indent="0">
+                      <a:pPr indent="0" marL="0">
                         <a:buNone/>
                       </a:pPr>
                       <a:r>
@@ -17574,7 +17711,7 @@
                       </a:endParaRPr>
                     </a:p>
                   </a:txBody>
-                  <a:tcPr>
+                  <a:tcPr marL="91440" marR="91440" marT="45720" marB="45720">
                     <a:lnL w="6350" cap="flat" cmpd="sng" algn="ctr">
                       <a:solidFill>
                         <a:srgbClr val="E8ECF1"/>
@@ -17618,7 +17755,7 @@
                     <a:bodyPr/>
                     <a:lstStyle/>
                     <a:p>
-                      <a:pPr marL="0" indent="0">
+                      <a:pPr indent="0" marL="0">
                         <a:buNone/>
                       </a:pPr>
                       <a:r>
@@ -17639,7 +17776,7 @@
                       </a:endParaRPr>
                     </a:p>
                   </a:txBody>
-                  <a:tcPr>
+                  <a:tcPr marL="91440" marR="91440" marT="45720" marB="45720">
                     <a:lnL w="6350" cap="flat" cmpd="sng" algn="ctr">
                       <a:solidFill>
                         <a:srgbClr val="E8ECF1"/>
@@ -17683,7 +17820,7 @@
                     <a:bodyPr/>
                     <a:lstStyle/>
                     <a:p>
-                      <a:pPr marL="0" indent="0">
+                      <a:pPr indent="0" marL="0">
                         <a:buNone/>
                       </a:pPr>
                       <a:r>
@@ -17704,7 +17841,7 @@
                       </a:endParaRPr>
                     </a:p>
                   </a:txBody>
-                  <a:tcPr>
+                  <a:tcPr marL="91440" marR="91440" marT="45720" marB="45720">
                     <a:lnL w="6350" cap="flat" cmpd="sng" algn="ctr">
                       <a:solidFill>
                         <a:srgbClr val="E8ECF1"/>
@@ -17748,7 +17885,7 @@
                     <a:bodyPr/>
                     <a:lstStyle/>
                     <a:p>
-                      <a:pPr marL="0" indent="0">
+                      <a:pPr indent="0" marL="0">
                         <a:buNone/>
                       </a:pPr>
                       <a:r>
@@ -17769,7 +17906,7 @@
                       </a:endParaRPr>
                     </a:p>
                   </a:txBody>
-                  <a:tcPr>
+                  <a:tcPr marL="91440" marR="91440" marT="45720" marB="45720">
                     <a:lnL w="6350" cap="flat" cmpd="sng" algn="ctr">
                       <a:solidFill>
                         <a:srgbClr val="E8ECF1"/>
@@ -17813,7 +17950,7 @@
                     <a:bodyPr/>
                     <a:lstStyle/>
                     <a:p>
-                      <a:pPr marL="0" indent="0">
+                      <a:pPr indent="0" marL="0">
                         <a:buNone/>
                       </a:pPr>
                       <a:r>
@@ -17834,7 +17971,7 @@
                       </a:endParaRPr>
                     </a:p>
                   </a:txBody>
-                  <a:tcPr>
+                  <a:tcPr marL="91440" marR="91440" marT="45720" marB="45720">
                     <a:lnL w="6350" cap="flat" cmpd="sng" algn="ctr">
                       <a:solidFill>
                         <a:srgbClr val="E8ECF1"/>
@@ -17878,7 +18015,7 @@
                     <a:bodyPr/>
                     <a:lstStyle/>
                     <a:p>
-                      <a:pPr marL="0" indent="0">
+                      <a:pPr indent="0" marL="0">
                         <a:buNone/>
                       </a:pPr>
                       <a:r>
@@ -17899,7 +18036,7 @@
                       </a:endParaRPr>
                     </a:p>
                   </a:txBody>
-                  <a:tcPr>
+                  <a:tcPr marL="91440" marR="91440" marT="45720" marB="45720">
                     <a:lnL w="6350" cap="flat" cmpd="sng" algn="ctr">
                       <a:solidFill>
                         <a:srgbClr val="E8ECF1"/>
@@ -17938,11 +18075,6 @@
                     </a:lnB>
                   </a:tcPr>
                 </a:tc>
-                <a:extLst>
-                  <a:ext uri="{0D108BD9-81ED-4DB2-BD59-A6C34878D82A}">
-                    <a16:rowId xmlns:a16="http://schemas.microsoft.com/office/drawing/2014/main" val="10001"/>
-                  </a:ext>
-                </a:extLst>
               </a:tr>
               <a:tr h="237744">
                 <a:tc>
@@ -17950,7 +18082,7 @@
                     <a:bodyPr/>
                     <a:lstStyle/>
                     <a:p>
-                      <a:pPr marL="0" indent="0">
+                      <a:pPr indent="0" marL="0">
                         <a:buNone/>
                       </a:pPr>
                       <a:r>
@@ -17971,7 +18103,7 @@
                       </a:endParaRPr>
                     </a:p>
                   </a:txBody>
-                  <a:tcPr>
+                  <a:tcPr marL="91440" marR="91440" marT="45720" marB="45720">
                     <a:lnL w="6350" cap="flat" cmpd="sng" algn="ctr">
                       <a:solidFill>
                         <a:srgbClr val="E8ECF1"/>
@@ -18015,7 +18147,7 @@
                     <a:bodyPr/>
                     <a:lstStyle/>
                     <a:p>
-                      <a:pPr marL="0" indent="0">
+                      <a:pPr indent="0" marL="0">
                         <a:buNone/>
                       </a:pPr>
                       <a:r>
@@ -18036,7 +18168,7 @@
                       </a:endParaRPr>
                     </a:p>
                   </a:txBody>
-                  <a:tcPr>
+                  <a:tcPr marL="91440" marR="91440" marT="45720" marB="45720">
                     <a:lnL w="6350" cap="flat" cmpd="sng" algn="ctr">
                       <a:solidFill>
                         <a:srgbClr val="E8ECF1"/>
@@ -18080,7 +18212,7 @@
                     <a:bodyPr/>
                     <a:lstStyle/>
                     <a:p>
-                      <a:pPr marL="0" indent="0">
+                      <a:pPr indent="0" marL="0">
                         <a:buNone/>
                       </a:pPr>
                       <a:r>
@@ -18101,7 +18233,7 @@
                       </a:endParaRPr>
                     </a:p>
                   </a:txBody>
-                  <a:tcPr>
+                  <a:tcPr marL="91440" marR="91440" marT="45720" marB="45720">
                     <a:lnL w="6350" cap="flat" cmpd="sng" algn="ctr">
                       <a:solidFill>
                         <a:srgbClr val="E8ECF1"/>
@@ -18145,7 +18277,7 @@
                     <a:bodyPr/>
                     <a:lstStyle/>
                     <a:p>
-                      <a:pPr marL="0" indent="0">
+                      <a:pPr indent="0" marL="0">
                         <a:buNone/>
                       </a:pPr>
                       <a:r>
@@ -18166,7 +18298,7 @@
                       </a:endParaRPr>
                     </a:p>
                   </a:txBody>
-                  <a:tcPr>
+                  <a:tcPr marL="91440" marR="91440" marT="45720" marB="45720">
                     <a:lnL w="6350" cap="flat" cmpd="sng" algn="ctr">
                       <a:solidFill>
                         <a:srgbClr val="E8ECF1"/>
@@ -18210,7 +18342,7 @@
                     <a:bodyPr/>
                     <a:lstStyle/>
                     <a:p>
-                      <a:pPr marL="0" indent="0">
+                      <a:pPr indent="0" marL="0">
                         <a:buNone/>
                       </a:pPr>
                       <a:r>
@@ -18231,7 +18363,7 @@
                       </a:endParaRPr>
                     </a:p>
                   </a:txBody>
-                  <a:tcPr>
+                  <a:tcPr marL="91440" marR="91440" marT="45720" marB="45720">
                     <a:lnL w="6350" cap="flat" cmpd="sng" algn="ctr">
                       <a:solidFill>
                         <a:srgbClr val="E8ECF1"/>
@@ -18275,7 +18407,7 @@
                     <a:bodyPr/>
                     <a:lstStyle/>
                     <a:p>
-                      <a:pPr marL="0" indent="0">
+                      <a:pPr indent="0" marL="0">
                         <a:buNone/>
                       </a:pPr>
                       <a:r>
@@ -18296,7 +18428,7 @@
                       </a:endParaRPr>
                     </a:p>
                   </a:txBody>
-                  <a:tcPr>
+                  <a:tcPr marL="91440" marR="91440" marT="45720" marB="45720">
                     <a:lnL w="6350" cap="flat" cmpd="sng" algn="ctr">
                       <a:solidFill>
                         <a:srgbClr val="E8ECF1"/>
@@ -18335,11 +18467,6 @@
                     </a:lnB>
                   </a:tcPr>
                 </a:tc>
-                <a:extLst>
-                  <a:ext uri="{0D108BD9-81ED-4DB2-BD59-A6C34878D82A}">
-                    <a16:rowId xmlns:a16="http://schemas.microsoft.com/office/drawing/2014/main" val="10002"/>
-                  </a:ext>
-                </a:extLst>
               </a:tr>
               <a:tr h="237744">
                 <a:tc>
@@ -18347,7 +18474,7 @@
                     <a:bodyPr/>
                     <a:lstStyle/>
                     <a:p>
-                      <a:pPr marL="0" indent="0">
+                      <a:pPr indent="0" marL="0">
                         <a:buNone/>
                       </a:pPr>
                       <a:r>
@@ -18368,7 +18495,7 @@
                       </a:endParaRPr>
                     </a:p>
                   </a:txBody>
-                  <a:tcPr>
+                  <a:tcPr marL="91440" marR="91440" marT="45720" marB="45720">
                     <a:lnL w="6350" cap="flat" cmpd="sng" algn="ctr">
                       <a:solidFill>
                         <a:srgbClr val="E8ECF1"/>
@@ -18412,7 +18539,7 @@
                     <a:bodyPr/>
                     <a:lstStyle/>
                     <a:p>
-                      <a:pPr marL="0" indent="0">
+                      <a:pPr indent="0" marL="0">
                         <a:buNone/>
                       </a:pPr>
                       <a:r>
@@ -18433,7 +18560,7 @@
                       </a:endParaRPr>
                     </a:p>
                   </a:txBody>
-                  <a:tcPr>
+                  <a:tcPr marL="91440" marR="91440" marT="45720" marB="45720">
                     <a:lnL w="6350" cap="flat" cmpd="sng" algn="ctr">
                       <a:solidFill>
                         <a:srgbClr val="E8ECF1"/>
@@ -18477,7 +18604,7 @@
                     <a:bodyPr/>
                     <a:lstStyle/>
                     <a:p>
-                      <a:pPr marL="0" indent="0">
+                      <a:pPr indent="0" marL="0">
                         <a:buNone/>
                       </a:pPr>
                       <a:r>
@@ -18498,7 +18625,7 @@
                       </a:endParaRPr>
                     </a:p>
                   </a:txBody>
-                  <a:tcPr>
+                  <a:tcPr marL="91440" marR="91440" marT="45720" marB="45720">
                     <a:lnL w="6350" cap="flat" cmpd="sng" algn="ctr">
                       <a:solidFill>
                         <a:srgbClr val="E8ECF1"/>
@@ -18542,7 +18669,7 @@
                     <a:bodyPr/>
                     <a:lstStyle/>
                     <a:p>
-                      <a:pPr marL="0" indent="0">
+                      <a:pPr indent="0" marL="0">
                         <a:buNone/>
                       </a:pPr>
                       <a:r>
@@ -18563,7 +18690,7 @@
                       </a:endParaRPr>
                     </a:p>
                   </a:txBody>
-                  <a:tcPr>
+                  <a:tcPr marL="91440" marR="91440" marT="45720" marB="45720">
                     <a:lnL w="6350" cap="flat" cmpd="sng" algn="ctr">
                       <a:solidFill>
                         <a:srgbClr val="E8ECF1"/>
@@ -18607,7 +18734,7 @@
                     <a:bodyPr/>
                     <a:lstStyle/>
                     <a:p>
-                      <a:pPr marL="0" indent="0">
+                      <a:pPr indent="0" marL="0">
                         <a:buNone/>
                       </a:pPr>
                       <a:r>
@@ -18628,7 +18755,7 @@
                       </a:endParaRPr>
                     </a:p>
                   </a:txBody>
-                  <a:tcPr>
+                  <a:tcPr marL="91440" marR="91440" marT="45720" marB="45720">
                     <a:lnL w="6350" cap="flat" cmpd="sng" algn="ctr">
                       <a:solidFill>
                         <a:srgbClr val="E8ECF1"/>
@@ -18672,7 +18799,7 @@
                     <a:bodyPr/>
                     <a:lstStyle/>
                     <a:p>
-                      <a:pPr marL="0" indent="0">
+                      <a:pPr indent="0" marL="0">
                         <a:buNone/>
                       </a:pPr>
                       <a:r>
@@ -18693,7 +18820,7 @@
                       </a:endParaRPr>
                     </a:p>
                   </a:txBody>
-                  <a:tcPr>
+                  <a:tcPr marL="91440" marR="91440" marT="45720" marB="45720">
                     <a:lnL w="6350" cap="flat" cmpd="sng" algn="ctr">
                       <a:solidFill>
                         <a:srgbClr val="E8ECF1"/>
@@ -18732,11 +18859,6 @@
                     </a:lnB>
                   </a:tcPr>
                 </a:tc>
-                <a:extLst>
-                  <a:ext uri="{0D108BD9-81ED-4DB2-BD59-A6C34878D82A}">
-                    <a16:rowId xmlns:a16="http://schemas.microsoft.com/office/drawing/2014/main" val="10003"/>
-                  </a:ext>
-                </a:extLst>
               </a:tr>
               <a:tr h="237744">
                 <a:tc>
@@ -18744,7 +18866,7 @@
                     <a:bodyPr/>
                     <a:lstStyle/>
                     <a:p>
-                      <a:pPr marL="0" indent="0">
+                      <a:pPr indent="0" marL="0">
                         <a:buNone/>
                       </a:pPr>
                       <a:r>
@@ -18765,7 +18887,7 @@
                       </a:endParaRPr>
                     </a:p>
                   </a:txBody>
-                  <a:tcPr>
+                  <a:tcPr marL="91440" marR="91440" marT="45720" marB="45720">
                     <a:lnL w="6350" cap="flat" cmpd="sng" algn="ctr">
                       <a:solidFill>
                         <a:srgbClr val="E8ECF1"/>
@@ -18809,7 +18931,7 @@
                     <a:bodyPr/>
                     <a:lstStyle/>
                     <a:p>
-                      <a:pPr marL="0" indent="0">
+                      <a:pPr indent="0" marL="0">
                         <a:buNone/>
                       </a:pPr>
                       <a:r>
@@ -18830,7 +18952,7 @@
                       </a:endParaRPr>
                     </a:p>
                   </a:txBody>
-                  <a:tcPr>
+                  <a:tcPr marL="91440" marR="91440" marT="45720" marB="45720">
                     <a:lnL w="6350" cap="flat" cmpd="sng" algn="ctr">
                       <a:solidFill>
                         <a:srgbClr val="E8ECF1"/>
@@ -18874,7 +18996,7 @@
                     <a:bodyPr/>
                     <a:lstStyle/>
                     <a:p>
-                      <a:pPr marL="0" indent="0">
+                      <a:pPr indent="0" marL="0">
                         <a:buNone/>
                       </a:pPr>
                       <a:r>
@@ -18895,7 +19017,7 @@
                       </a:endParaRPr>
                     </a:p>
                   </a:txBody>
-                  <a:tcPr>
+                  <a:tcPr marL="91440" marR="91440" marT="45720" marB="45720">
                     <a:lnL w="6350" cap="flat" cmpd="sng" algn="ctr">
                       <a:solidFill>
                         <a:srgbClr val="E8ECF1"/>
@@ -18939,7 +19061,7 @@
                     <a:bodyPr/>
                     <a:lstStyle/>
                     <a:p>
-                      <a:pPr marL="0" indent="0">
+                      <a:pPr indent="0" marL="0">
                         <a:buNone/>
                       </a:pPr>
                       <a:r>
@@ -18960,7 +19082,7 @@
                       </a:endParaRPr>
                     </a:p>
                   </a:txBody>
-                  <a:tcPr>
+                  <a:tcPr marL="91440" marR="91440" marT="45720" marB="45720">
                     <a:lnL w="6350" cap="flat" cmpd="sng" algn="ctr">
                       <a:solidFill>
                         <a:srgbClr val="E8ECF1"/>
@@ -19004,7 +19126,7 @@
                     <a:bodyPr/>
                     <a:lstStyle/>
                     <a:p>
-                      <a:pPr marL="0" indent="0">
+                      <a:pPr indent="0" marL="0">
                         <a:buNone/>
                       </a:pPr>
                       <a:r>
@@ -19025,7 +19147,7 @@
                       </a:endParaRPr>
                     </a:p>
                   </a:txBody>
-                  <a:tcPr>
+                  <a:tcPr marL="91440" marR="91440" marT="45720" marB="45720">
                     <a:lnL w="6350" cap="flat" cmpd="sng" algn="ctr">
                       <a:solidFill>
                         <a:srgbClr val="E8ECF1"/>
@@ -19069,7 +19191,7 @@
                     <a:bodyPr/>
                     <a:lstStyle/>
                     <a:p>
-                      <a:pPr marL="0" indent="0">
+                      <a:pPr indent="0" marL="0">
                         <a:buNone/>
                       </a:pPr>
                       <a:r>
@@ -19090,7 +19212,7 @@
                       </a:endParaRPr>
                     </a:p>
                   </a:txBody>
-                  <a:tcPr>
+                  <a:tcPr marL="91440" marR="91440" marT="45720" marB="45720">
                     <a:lnL w="6350" cap="flat" cmpd="sng" algn="ctr">
                       <a:solidFill>
                         <a:srgbClr val="E8ECF1"/>
@@ -19129,11 +19251,6 @@
                     </a:lnB>
                   </a:tcPr>
                 </a:tc>
-                <a:extLst>
-                  <a:ext uri="{0D108BD9-81ED-4DB2-BD59-A6C34878D82A}">
-                    <a16:rowId xmlns:a16="http://schemas.microsoft.com/office/drawing/2014/main" val="10004"/>
-                  </a:ext>
-                </a:extLst>
               </a:tr>
               <a:tr h="237744">
                 <a:tc>
@@ -19141,7 +19258,7 @@
                     <a:bodyPr/>
                     <a:lstStyle/>
                     <a:p>
-                      <a:pPr marL="0" indent="0">
+                      <a:pPr indent="0" marL="0">
                         <a:buNone/>
                       </a:pPr>
                       <a:r>
@@ -19162,7 +19279,7 @@
                       </a:endParaRPr>
                     </a:p>
                   </a:txBody>
-                  <a:tcPr>
+                  <a:tcPr marL="91440" marR="91440" marT="45720" marB="45720">
                     <a:lnL w="6350" cap="flat" cmpd="sng" algn="ctr">
                       <a:solidFill>
                         <a:srgbClr val="E8ECF1"/>
@@ -19206,7 +19323,7 @@
                     <a:bodyPr/>
                     <a:lstStyle/>
                     <a:p>
-                      <a:pPr marL="0" indent="0">
+                      <a:pPr indent="0" marL="0">
                         <a:buNone/>
                       </a:pPr>
                       <a:r>
@@ -19227,7 +19344,7 @@
                       </a:endParaRPr>
                     </a:p>
                   </a:txBody>
-                  <a:tcPr>
+                  <a:tcPr marL="91440" marR="91440" marT="45720" marB="45720">
                     <a:lnL w="6350" cap="flat" cmpd="sng" algn="ctr">
                       <a:solidFill>
                         <a:srgbClr val="E8ECF1"/>
@@ -19271,7 +19388,7 @@
                     <a:bodyPr/>
                     <a:lstStyle/>
                     <a:p>
-                      <a:pPr marL="0" indent="0">
+                      <a:pPr indent="0" marL="0">
                         <a:buNone/>
                       </a:pPr>
                       <a:r>
@@ -19292,7 +19409,7 @@
                       </a:endParaRPr>
                     </a:p>
                   </a:txBody>
-                  <a:tcPr>
+                  <a:tcPr marL="91440" marR="91440" marT="45720" marB="45720">
                     <a:lnL w="6350" cap="flat" cmpd="sng" algn="ctr">
                       <a:solidFill>
                         <a:srgbClr val="E8ECF1"/>
@@ -19336,7 +19453,7 @@
                     <a:bodyPr/>
                     <a:lstStyle/>
                     <a:p>
-                      <a:pPr marL="0" indent="0">
+                      <a:pPr indent="0" marL="0">
                         <a:buNone/>
                       </a:pPr>
                       <a:r>
@@ -19357,7 +19474,7 @@
                       </a:endParaRPr>
                     </a:p>
                   </a:txBody>
-                  <a:tcPr>
+                  <a:tcPr marL="91440" marR="91440" marT="45720" marB="45720">
                     <a:lnL w="6350" cap="flat" cmpd="sng" algn="ctr">
                       <a:solidFill>
                         <a:srgbClr val="E8ECF1"/>
@@ -19401,7 +19518,7 @@
                     <a:bodyPr/>
                     <a:lstStyle/>
                     <a:p>
-                      <a:pPr marL="0" indent="0">
+                      <a:pPr indent="0" marL="0">
                         <a:buNone/>
                       </a:pPr>
                       <a:r>
@@ -19422,7 +19539,7 @@
                       </a:endParaRPr>
                     </a:p>
                   </a:txBody>
-                  <a:tcPr>
+                  <a:tcPr marL="91440" marR="91440" marT="45720" marB="45720">
                     <a:lnL w="6350" cap="flat" cmpd="sng" algn="ctr">
                       <a:solidFill>
                         <a:srgbClr val="E8ECF1"/>
@@ -19466,7 +19583,7 @@
                     <a:bodyPr/>
                     <a:lstStyle/>
                     <a:p>
-                      <a:pPr marL="0" indent="0">
+                      <a:pPr indent="0" marL="0">
                         <a:buNone/>
                       </a:pPr>
                       <a:r>
@@ -19487,7 +19604,7 @@
                       </a:endParaRPr>
                     </a:p>
                   </a:txBody>
-                  <a:tcPr>
+                  <a:tcPr marL="91440" marR="91440" marT="45720" marB="45720">
                     <a:lnL w="6350" cap="flat" cmpd="sng" algn="ctr">
                       <a:solidFill>
                         <a:srgbClr val="E8ECF1"/>
@@ -19526,11 +19643,6 @@
                     </a:lnB>
                   </a:tcPr>
                 </a:tc>
-                <a:extLst>
-                  <a:ext uri="{0D108BD9-81ED-4DB2-BD59-A6C34878D82A}">
-                    <a16:rowId xmlns:a16="http://schemas.microsoft.com/office/drawing/2014/main" val="10005"/>
-                  </a:ext>
-                </a:extLst>
               </a:tr>
             </a:tbl>
           </a:graphicData>
@@ -19555,7 +19667,7 @@
           </a:solidFill>
           <a:ln/>
           <a:effectLst>
-            <a:outerShdw blurRad="50800" dist="19050" dir="8100000" algn="bl" rotWithShape="0">
+            <a:outerShdw sx="100000" sy="100000" kx="0" ky="0" algn="bl" rotWithShape="0" blurRad="50800" dist="19050" dir="8100000">
               <a:srgbClr val="000000">
                 <a:alpha val="8000"/>
               </a:srgbClr>
@@ -19584,7 +19696,7 @@
           <a:bodyPr wrap="square" lIns="0" tIns="0" rIns="0" bIns="0" rtlCol="0" anchor="ctr"/>
           <a:lstStyle/>
           <a:p>
-            <a:pPr marL="0" indent="0">
+            <a:pPr indent="0" marL="0">
               <a:buNone/>
             </a:pPr>
             <a:r>
@@ -19623,7 +19735,7 @@
           <a:bodyPr wrap="square" lIns="0" tIns="0" rIns="0" bIns="0" rtlCol="0" anchor="ctr"/>
           <a:lstStyle/>
           <a:p>
-            <a:pPr marL="0" indent="0">
+            <a:pPr indent="0" marL="0">
               <a:buNone/>
             </a:pPr>
             <a:r>
@@ -19637,6 +19749,9 @@
               </a:rPr>
               <a:t>行业普适性：</a:t>
             </a:r>
+            <a:pPr indent="0" marL="0">
+              <a:buNone/>
+            </a:pPr>
             <a:r>
               <a:rPr lang="en-US" sz="1000" dirty="0">
                 <a:solidFill>
@@ -19673,7 +19788,7 @@
           <a:bodyPr wrap="square" lIns="0" tIns="0" rIns="0" bIns="0" rtlCol="0" anchor="ctr"/>
           <a:lstStyle/>
           <a:p>
-            <a:pPr marL="0" indent="0">
+            <a:pPr indent="0" marL="0">
               <a:buNone/>
             </a:pPr>
             <a:r>
@@ -19687,6 +19802,9 @@
               </a:rPr>
               <a:t>回撤一致性：</a:t>
             </a:r>
+            <a:pPr indent="0" marL="0">
+              <a:buNone/>
+            </a:pPr>
             <a:r>
               <a:rPr lang="en-US" sz="1000" dirty="0">
                 <a:solidFill>
@@ -19723,7 +19841,7 @@
           <a:bodyPr wrap="square" lIns="0" tIns="0" rIns="0" bIns="0" rtlCol="0" anchor="ctr"/>
           <a:lstStyle/>
           <a:p>
-            <a:pPr marL="0" indent="0">
+            <a:pPr indent="0" marL="0">
               <a:buNone/>
             </a:pPr>
             <a:r>
@@ -19737,6 +19855,9 @@
               </a:rPr>
               <a:t>超额稳健性：</a:t>
             </a:r>
+            <a:pPr indent="0" marL="0">
+              <a:buNone/>
+            </a:pPr>
             <a:r>
               <a:rPr lang="en-US" sz="1000" dirty="0">
                 <a:solidFill>
@@ -19773,7 +19894,7 @@
           <a:bodyPr wrap="square" lIns="0" tIns="0" rIns="0" bIns="0" rtlCol="0" anchor="ctr"/>
           <a:lstStyle/>
           <a:p>
-            <a:pPr marL="0" indent="0">
+            <a:pPr indent="0" marL="0">
               <a:buNone/>
             </a:pPr>
             <a:r>
@@ -19787,6 +19908,9 @@
               </a:rPr>
               <a:t>对比单一指标：</a:t>
             </a:r>
+            <a:pPr indent="0" marL="0">
+              <a:buNone/>
+            </a:pPr>
             <a:r>
               <a:rPr lang="en-US" sz="1000" dirty="0">
                 <a:solidFill>
@@ -19823,7 +19947,7 @@
           <a:bodyPr wrap="square" rtlCol="0" anchor="ctr"/>
           <a:lstStyle/>
           <a:p>
-            <a:pPr marL="0" indent="0" algn="r">
+            <a:pPr algn="r" indent="0" marL="0">
               <a:buNone/>
             </a:pPr>
             <a:r>
@@ -20142,299 +20266,4 @@
     </a:ext>
   </a:extLst>
 </a:theme>
-</file>
-
-<file path=ppt/theme/theme2.xml><?xml version="1.0" encoding="utf-8"?>
-<a:theme xmlns:a="http://schemas.openxmlformats.org/drawingml/2006/main" name="Office 主题​​">
-  <a:themeElements>
-    <a:clrScheme name="Office">
-      <a:dk1>
-        <a:sysClr val="windowText" lastClr="000000"/>
-      </a:dk1>
-      <a:lt1>
-        <a:sysClr val="window" lastClr="FFFFFF"/>
-      </a:lt1>
-      <a:dk2>
-        <a:srgbClr val="44546A"/>
-      </a:dk2>
-      <a:lt2>
-        <a:srgbClr val="E7E6E6"/>
-      </a:lt2>
-      <a:accent1>
-        <a:srgbClr val="4472C4"/>
-      </a:accent1>
-      <a:accent2>
-        <a:srgbClr val="ED7D31"/>
-      </a:accent2>
-      <a:accent3>
-        <a:srgbClr val="A5A5A5"/>
-      </a:accent3>
-      <a:accent4>
-        <a:srgbClr val="FFC000"/>
-      </a:accent4>
-      <a:accent5>
-        <a:srgbClr val="5B9BD5"/>
-      </a:accent5>
-      <a:accent6>
-        <a:srgbClr val="70AD47"/>
-      </a:accent6>
-      <a:hlink>
-        <a:srgbClr val="0563C1"/>
-      </a:hlink>
-      <a:folHlink>
-        <a:srgbClr val="954F72"/>
-      </a:folHlink>
-    </a:clrScheme>
-    <a:fontScheme name="Office">
-      <a:majorFont>
-        <a:latin typeface="等线 Light" panose="020F0302020204030204"/>
-        <a:ea typeface=""/>
-        <a:cs typeface=""/>
-        <a:font script="Jpan" typeface="游ゴシック Light"/>
-        <a:font script="Hang" typeface="맑은 고딕"/>
-        <a:font script="Hans" typeface="等线 Light"/>
-        <a:font script="Hant" typeface="新細明體"/>
-        <a:font script="Arab" typeface="Times New Roman"/>
-        <a:font script="Hebr" typeface="Times New Roman"/>
-        <a:font script="Thai" typeface="Angsana New"/>
-        <a:font script="Ethi" typeface="Nyala"/>
-        <a:font script="Beng" typeface="Vrinda"/>
-        <a:font script="Gujr" typeface="Shruti"/>
-        <a:font script="Khmr" typeface="MoolBoran"/>
-        <a:font script="Knda" typeface="Tunga"/>
-        <a:font script="Guru" typeface="Raavi"/>
-        <a:font script="Cans" typeface="Euphemia"/>
-        <a:font script="Cher" typeface="Plantagenet Cherokee"/>
-        <a:font script="Yiii" typeface="Microsoft Yi Baiti"/>
-        <a:font script="Tibt" typeface="Microsoft Himalaya"/>
-        <a:font script="Thaa" typeface="MV Boli"/>
-        <a:font script="Deva" typeface="Mangal"/>
-        <a:font script="Telu" typeface="Gautami"/>
-        <a:font script="Taml" typeface="Latha"/>
-        <a:font script="Syrc" typeface="Estrangelo Edessa"/>
-        <a:font script="Orya" typeface="Kalinga"/>
-        <a:font script="Mlym" typeface="Kartika"/>
-        <a:font script="Laoo" typeface="DokChampa"/>
-        <a:font script="Sinh" typeface="Iskoola Pota"/>
-        <a:font script="Mong" typeface="Mongolian Baiti"/>
-        <a:font script="Viet" typeface="Times New Roman"/>
-        <a:font script="Uigh" typeface="Microsoft Uighur"/>
-        <a:font script="Geor" typeface="Sylfaen"/>
-        <a:font script="Armn" typeface="Arial"/>
-        <a:font script="Bugi" typeface="Leelawadee UI"/>
-        <a:font script="Bopo" typeface="Microsoft JhengHei"/>
-        <a:font script="Java" typeface="Javanese Text"/>
-        <a:font script="Lisu" typeface="Segoe UI"/>
-        <a:font script="Mymr" typeface="Myanmar Text"/>
-        <a:font script="Nkoo" typeface="Ebrima"/>
-        <a:font script="Olck" typeface="Nirmala UI"/>
-        <a:font script="Osma" typeface="Ebrima"/>
-        <a:font script="Phag" typeface="Phagspa"/>
-        <a:font script="Syrn" typeface="Estrangelo Edessa"/>
-        <a:font script="Syrj" typeface="Estrangelo Edessa"/>
-        <a:font script="Syre" typeface="Estrangelo Edessa"/>
-        <a:font script="Sora" typeface="Nirmala UI"/>
-        <a:font script="Tale" typeface="Microsoft Tai Le"/>
-        <a:font script="Talu" typeface="Microsoft New Tai Lue"/>
-        <a:font script="Tfng" typeface="Ebrima"/>
-      </a:majorFont>
-      <a:minorFont>
-        <a:latin typeface="等线" panose="020F0502020204030204"/>
-        <a:ea typeface=""/>
-        <a:cs typeface=""/>
-        <a:font script="Jpan" typeface="游ゴシック"/>
-        <a:font script="Hang" typeface="맑은 고딕"/>
-        <a:font script="Hans" typeface="等线"/>
-        <a:font script="Hant" typeface="新細明體"/>
-        <a:font script="Arab" typeface="Arial"/>
-        <a:font script="Hebr" typeface="Arial"/>
-        <a:font script="Thai" typeface="Cordia New"/>
-        <a:font script="Ethi" typeface="Nyala"/>
-        <a:font script="Beng" typeface="Vrinda"/>
-        <a:font script="Gujr" typeface="Shruti"/>
-        <a:font script="Khmr" typeface="DaunPenh"/>
-        <a:font script="Knda" typeface="Tunga"/>
-        <a:font script="Guru" typeface="Raavi"/>
-        <a:font script="Cans" typeface="Euphemia"/>
-        <a:font script="Cher" typeface="Plantagenet Cherokee"/>
-        <a:font script="Yiii" typeface="Microsoft Yi Baiti"/>
-        <a:font script="Tibt" typeface="Microsoft Himalaya"/>
-        <a:font script="Thaa" typeface="MV Boli"/>
-        <a:font script="Deva" typeface="Mangal"/>
-        <a:font script="Telu" typeface="Gautami"/>
-        <a:font script="Taml" typeface="Latha"/>
-        <a:font script="Syrc" typeface="Estrangelo Edessa"/>
-        <a:font script="Orya" typeface="Kalinga"/>
-        <a:font script="Mlym" typeface="Kartika"/>
-        <a:font script="Laoo" typeface="DokChampa"/>
-        <a:font script="Sinh" typeface="Iskoola Pota"/>
-        <a:font script="Mong" typeface="Mongolian Baiti"/>
-        <a:font script="Viet" typeface="Arial"/>
-        <a:font script="Uigh" typeface="Microsoft Uighur"/>
-        <a:font script="Geor" typeface="Sylfaen"/>
-        <a:font script="Armn" typeface="Arial"/>
-        <a:font script="Bugi" typeface="Leelawadee UI"/>
-        <a:font script="Bopo" typeface="Microsoft JhengHei"/>
-        <a:font script="Java" typeface="Javanese Text"/>
-        <a:font script="Lisu" typeface="Segoe UI"/>
-        <a:font script="Mymr" typeface="Myanmar Text"/>
-        <a:font script="Nkoo" typeface="Ebrima"/>
-        <a:font script="Olck" typeface="Nirmala UI"/>
-        <a:font script="Osma" typeface="Ebrima"/>
-        <a:font script="Phag" typeface="Phagspa"/>
-        <a:font script="Syrn" typeface="Estrangelo Edessa"/>
-        <a:font script="Syrj" typeface="Estrangelo Edessa"/>
-        <a:font script="Syre" typeface="Estrangelo Edessa"/>
-        <a:font script="Sora" typeface="Nirmala UI"/>
-        <a:font script="Tale" typeface="Microsoft Tai Le"/>
-        <a:font script="Talu" typeface="Microsoft New Tai Lue"/>
-        <a:font script="Tfng" typeface="Ebrima"/>
-      </a:minorFont>
-    </a:fontScheme>
-    <a:fmtScheme name="Office">
-      <a:fillStyleLst>
-        <a:solidFill>
-          <a:schemeClr val="phClr"/>
-        </a:solidFill>
-        <a:gradFill rotWithShape="1">
-          <a:gsLst>
-            <a:gs pos="0">
-              <a:schemeClr val="phClr">
-                <a:lumMod val="110000"/>
-                <a:satMod val="105000"/>
-                <a:tint val="67000"/>
-              </a:schemeClr>
-            </a:gs>
-            <a:gs pos="50000">
-              <a:schemeClr val="phClr">
-                <a:lumMod val="105000"/>
-                <a:satMod val="103000"/>
-                <a:tint val="73000"/>
-              </a:schemeClr>
-            </a:gs>
-            <a:gs pos="100000">
-              <a:schemeClr val="phClr">
-                <a:lumMod val="105000"/>
-                <a:satMod val="109000"/>
-                <a:tint val="81000"/>
-              </a:schemeClr>
-            </a:gs>
-          </a:gsLst>
-          <a:lin ang="5400000" scaled="0"/>
-        </a:gradFill>
-        <a:gradFill rotWithShape="1">
-          <a:gsLst>
-            <a:gs pos="0">
-              <a:schemeClr val="phClr">
-                <a:satMod val="103000"/>
-                <a:lumMod val="102000"/>
-                <a:tint val="94000"/>
-              </a:schemeClr>
-            </a:gs>
-            <a:gs pos="50000">
-              <a:schemeClr val="phClr">
-                <a:satMod val="110000"/>
-                <a:lumMod val="100000"/>
-                <a:shade val="100000"/>
-              </a:schemeClr>
-            </a:gs>
-            <a:gs pos="100000">
-              <a:schemeClr val="phClr">
-                <a:lumMod val="99000"/>
-                <a:satMod val="120000"/>
-                <a:shade val="78000"/>
-              </a:schemeClr>
-            </a:gs>
-          </a:gsLst>
-          <a:lin ang="5400000" scaled="0"/>
-        </a:gradFill>
-      </a:fillStyleLst>
-      <a:lnStyleLst>
-        <a:ln w="6350" cap="flat" cmpd="sng" algn="ctr">
-          <a:solidFill>
-            <a:schemeClr val="phClr"/>
-          </a:solidFill>
-          <a:prstDash val="solid"/>
-          <a:miter lim="800000"/>
-        </a:ln>
-        <a:ln w="12700" cap="flat" cmpd="sng" algn="ctr">
-          <a:solidFill>
-            <a:schemeClr val="phClr"/>
-          </a:solidFill>
-          <a:prstDash val="solid"/>
-          <a:miter lim="800000"/>
-        </a:ln>
-        <a:ln w="19050" cap="flat" cmpd="sng" algn="ctr">
-          <a:solidFill>
-            <a:schemeClr val="phClr"/>
-          </a:solidFill>
-          <a:prstDash val="solid"/>
-          <a:miter lim="800000"/>
-        </a:ln>
-      </a:lnStyleLst>
-      <a:effectStyleLst>
-        <a:effectStyle>
-          <a:effectLst/>
-        </a:effectStyle>
-        <a:effectStyle>
-          <a:effectLst/>
-        </a:effectStyle>
-        <a:effectStyle>
-          <a:effectLst>
-            <a:outerShdw blurRad="57150" dist="19050" dir="5400000" algn="ctr" rotWithShape="0">
-              <a:srgbClr val="000000">
-                <a:alpha val="63000"/>
-              </a:srgbClr>
-            </a:outerShdw>
-          </a:effectLst>
-        </a:effectStyle>
-      </a:effectStyleLst>
-      <a:bgFillStyleLst>
-        <a:solidFill>
-          <a:schemeClr val="phClr"/>
-        </a:solidFill>
-        <a:solidFill>
-          <a:schemeClr val="phClr">
-            <a:tint val="95000"/>
-            <a:satMod val="170000"/>
-          </a:schemeClr>
-        </a:solidFill>
-        <a:gradFill rotWithShape="1">
-          <a:gsLst>
-            <a:gs pos="0">
-              <a:schemeClr val="phClr">
-                <a:tint val="93000"/>
-                <a:satMod val="150000"/>
-                <a:shade val="98000"/>
-                <a:lumMod val="102000"/>
-              </a:schemeClr>
-            </a:gs>
-            <a:gs pos="50000">
-              <a:schemeClr val="phClr">
-                <a:tint val="98000"/>
-                <a:satMod val="130000"/>
-                <a:shade val="90000"/>
-                <a:lumMod val="103000"/>
-              </a:schemeClr>
-            </a:gs>
-            <a:gs pos="100000">
-              <a:schemeClr val="phClr">
-                <a:shade val="63000"/>
-                <a:satMod val="120000"/>
-              </a:schemeClr>
-            </a:gs>
-          </a:gsLst>
-          <a:lin ang="5400000" scaled="0"/>
-        </a:gradFill>
-      </a:bgFillStyleLst>
-    </a:fmtScheme>
-  </a:themeElements>
-  <a:objectDefaults/>
-  <a:extraClrSchemeLst/>
-  <a:extLst>
-    <a:ext uri="{05A4C25C-085E-4340-85A3-A5531E510DB2}">
-      <thm15:themeFamily xmlns:thm15="http://schemas.microsoft.com/office/thememl/2012/main" name="Office Theme" id="{62F939B6-93AF-4DB8-9C6B-D6C7DFDC589F}" vid="{4A3C46E8-61CC-4603-A589-7422A47A8E4A}"/>
-    </a:ext>
-  </a:extLst>
-</a:theme>
 </file>
--- a/ppt/答辩PPT_v3.pptx
+++ b/ppt/答辩PPT_v3.pptx
@@ -8406,7 +8406,7 @@
               <a:buNone/>
             </a:pPr>
             <a:r>
-              <a:rPr lang="en-US" sz="1300" dirty="0">
+              <a:rPr lang="en-US" sz="1200" dirty="0">
                 <a:solidFill>
                   <a:srgbClr val="4A90D9"/>
                 </a:solidFill>
@@ -8414,7 +8414,7 @@
                 <a:ea typeface="Calibri" pitchFamily="34" charset="-122"/>
                 <a:cs typeface="Calibri" pitchFamily="34" charset="-120"/>
               </a:rPr>
-              <a:t>quant-strategy.streamlit.app (在线演示)</a:t>
+              <a:t>quant-strategy-3nkwe9fzfgwskusbnx8lwz.streamlit.app</a:t>
             </a:r>
             <a:pPr indent="0" marL="0">
               <a:buNone/>

--- a/ppt/答辩PPT_v3.pptx
+++ b/ppt/答辩PPT_v3.pptx
@@ -4,6 +4,9 @@
   <p:sldMasterIdLst>
     <p:sldMasterId id="2147483648" r:id="rId1"/>
   </p:sldMasterIdLst>
+  <p:notesMasterIdLst>
+    <p:notesMasterId r:id="rId15"/>
+  </p:notesMasterIdLst>
   <p:sldIdLst>
     <p:sldId id="256" r:id="rId2"/>
     <p:sldId id="257" r:id="rId3"/>
@@ -19,10 +22,7 @@
     <p:sldId id="267" r:id="rId13"/>
     <p:sldId id="268" r:id="rId14"/>
   </p:sldIdLst>
-  <p:notesMasterIdLst>
-    <p:notesMasterId r:id="rId15"/>
-  </p:notesMasterIdLst>
-  <p:sldSz cx="9144000" cy="5143500"/>
+  <p:sldSz cx="9144000" cy="5143500" type="screen16x9"/>
   <p:notesSz cx="5143500" cy="9144000"/>
   <p:defaultTextStyle>
     <a:lvl1pPr marL="0" algn="l" defTabSz="914400" rtl="0" eaLnBrk="1" latinLnBrk="0" hangingPunct="1">
@@ -116,6 +116,11 @@
       </a:defRPr>
     </a:lvl9pPr>
   </p:defaultTextStyle>
+  <p:extLst>
+    <p:ext uri="{EFAFB233-063F-42B5-8137-9DF3F51BA10A}">
+      <p15:sldGuideLst xmlns:p15="http://schemas.microsoft.com/office/powerpoint/2012/main"/>
+    </p:ext>
+  </p:extLst>
 </p:presentation>
 </file>
 
@@ -141,234 +146,10 @@
           <a:chExt cx="0" cy="0"/>
         </a:xfrm>
       </p:grpSpPr>
-      <p:sp>
-        <p:nvSpPr>
-          <p:cNvPr id="2" name="Header Placeholder 1"/>
-          <p:cNvSpPr>
-            <a:spLocks noGrp="1"/>
-          </p:cNvSpPr>
-          <p:nvPr>
-            <p:ph type="hdr" sz="quarter"/>
-          </p:nvPr>
-        </p:nvSpPr>
-        <p:spPr>
-          <a:xfrm>
-            <a:off x="0" y="0"/>
-            <a:ext cx="2971800" cy="458788"/>
-          </a:xfrm>
-          <a:prstGeom prst="rect">
-            <a:avLst/>
-          </a:prstGeom>
-        </p:spPr>
-        <p:txBody>
-          <a:bodyPr vert="horz" lIns="91440" tIns="45720" rIns="91440" bIns="45720" rtlCol="0"/>
-          <a:lstStyle>
-            <a:lvl1pPr algn="l">
-              <a:defRPr sz="1200"/>
-            </a:lvl1pPr>
-          </a:lstStyle>
-          <a:p>
-            <a:endParaRPr lang="en-US"/>
-          </a:p>
-        </p:txBody>
-      </p:sp>
-      <p:sp>
-        <p:nvSpPr>
-          <p:cNvPr id="3" name="Date Placeholder 2"/>
-          <p:cNvSpPr>
-            <a:spLocks noGrp="1"/>
-          </p:cNvSpPr>
-          <p:nvPr>
-            <p:ph type="dt" idx="1"/>
-          </p:nvPr>
-        </p:nvSpPr>
-        <p:spPr>
-          <a:xfrm>
-            <a:off x="3884613" y="0"/>
-            <a:ext cx="2971800" cy="458788"/>
-          </a:xfrm>
-          <a:prstGeom prst="rect">
-            <a:avLst/>
-          </a:prstGeom>
-        </p:spPr>
-        <p:txBody>
-          <a:bodyPr vert="horz" lIns="91440" tIns="45720" rIns="91440" bIns="45720" rtlCol="0"/>
-          <a:lstStyle>
-            <a:lvl1pPr algn="r">
-              <a:defRPr sz="1200"/>
-            </a:lvl1pPr>
-          </a:lstStyle>
-          <a:p>
-            <a:fld id="{5282F153-3F37-0F45-9E97-73ACFA13230C}" type="datetimeFigureOut">
-              <a:rPr lang="en-US"/>
-              <a:t>7/23/19</a:t>
-            </a:fld>
-            <a:endParaRPr lang="en-US"/>
-          </a:p>
-        </p:txBody>
-      </p:sp>
-      <p:sp>
-        <p:nvSpPr>
-          <p:cNvPr id="4" name="Slide Image Placeholder 3"/>
-          <p:cNvSpPr>
-            <a:spLocks noGrp="1" noRot="1" noChangeAspect="1"/>
-          </p:cNvSpPr>
-          <p:nvPr>
-            <p:ph type="sldImg" idx="2"/>
-          </p:nvPr>
-        </p:nvSpPr>
-        <p:spPr>
-          <a:xfrm>
-            <a:off x="685800" y="1143000"/>
-            <a:ext cx="5486400" cy="3086100"/>
-          </a:xfrm>
-          <a:prstGeom prst="rect">
-            <a:avLst/>
-          </a:prstGeom>
-          <a:noFill/>
-          <a:ln w="12700">
-            <a:solidFill>
-              <a:prstClr val="black"/>
-            </a:solidFill>
-          </a:ln>
-        </p:spPr>
-        <p:txBody>
-          <a:bodyPr vert="horz" lIns="91440" tIns="45720" rIns="91440" bIns="45720" rtlCol="0" anchor="ctr"/>
-          <a:lstStyle/>
-          <a:p>
-            <a:endParaRPr lang="en-US"/>
-          </a:p>
-        </p:txBody>
-      </p:sp>
-      <p:sp>
-        <p:nvSpPr>
-          <p:cNvPr id="5" name="Notes Placeholder 4"/>
-          <p:cNvSpPr>
-            <a:spLocks noGrp="1"/>
-          </p:cNvSpPr>
-          <p:nvPr>
-            <p:ph type="body" sz="quarter" idx="3"/>
-          </p:nvPr>
-        </p:nvSpPr>
-        <p:spPr>
-          <a:xfrm>
-            <a:off x="685800" y="4400550"/>
-            <a:ext cx="5486400" cy="3600450"/>
-          </a:xfrm>
-          <a:prstGeom prst="rect">
-            <a:avLst/>
-          </a:prstGeom>
-        </p:spPr>
-        <p:txBody>
-          <a:bodyPr vert="horz" lIns="91440" tIns="45720" rIns="91440" bIns="45720" rtlCol="0"/>
-          <a:lstStyle/>
-          <a:p>
-            <a:pPr lvl="0"/>
-            <a:r>
-              <a:rPr lang="en-US"/>
-              <a:t>Click to edit Master text styles</a:t>
-            </a:r>
-          </a:p>
-          <a:p>
-            <a:pPr lvl="1"/>
-            <a:r>
-              <a:rPr lang="en-US"/>
-              <a:t>Second level</a:t>
-            </a:r>
-          </a:p>
-          <a:p>
-            <a:pPr lvl="2"/>
-            <a:r>
-              <a:rPr lang="en-US"/>
-              <a:t>Third level</a:t>
-            </a:r>
-          </a:p>
-          <a:p>
-            <a:pPr lvl="3"/>
-            <a:r>
-              <a:rPr lang="en-US"/>
-              <a:t>Fourth level</a:t>
-            </a:r>
-          </a:p>
-          <a:p>
-            <a:pPr lvl="4"/>
-            <a:r>
-              <a:rPr lang="en-US"/>
-              <a:t>Fifth level</a:t>
-            </a:r>
-          </a:p>
-        </p:txBody>
-      </p:sp>
-      <p:sp>
-        <p:nvSpPr>
-          <p:cNvPr id="6" name="Footer Placeholder 5"/>
-          <p:cNvSpPr>
-            <a:spLocks noGrp="1"/>
-          </p:cNvSpPr>
-          <p:nvPr>
-            <p:ph type="ftr" sz="quarter" idx="4"/>
-          </p:nvPr>
-        </p:nvSpPr>
-        <p:spPr>
-          <a:xfrm>
-            <a:off x="0" y="8685213"/>
-            <a:ext cx="2971800" cy="458787"/>
-          </a:xfrm>
-          <a:prstGeom prst="rect">
-            <a:avLst/>
-          </a:prstGeom>
-        </p:spPr>
-        <p:txBody>
-          <a:bodyPr vert="horz" lIns="91440" tIns="45720" rIns="91440" bIns="45720" rtlCol="0" anchor="b"/>
-          <a:lstStyle>
-            <a:lvl1pPr algn="l">
-              <a:defRPr sz="1200"/>
-            </a:lvl1pPr>
-          </a:lstStyle>
-          <a:p>
-            <a:endParaRPr lang="en-US"/>
-          </a:p>
-        </p:txBody>
-      </p:sp>
-      <p:sp>
-        <p:nvSpPr>
-          <p:cNvPr id="7" name="Slide Number Placeholder 6"/>
-          <p:cNvSpPr>
-            <a:spLocks noGrp="1"/>
-          </p:cNvSpPr>
-          <p:nvPr>
-            <p:ph type="sldNum" sz="quarter" idx="5"/>
-          </p:nvPr>
-        </p:nvSpPr>
-        <p:spPr>
-          <a:xfrm>
-            <a:off x="3884613" y="8685213"/>
-            <a:ext cx="2971800" cy="458787"/>
-          </a:xfrm>
-          <a:prstGeom prst="rect">
-            <a:avLst/>
-          </a:prstGeom>
-        </p:spPr>
-        <p:txBody>
-          <a:bodyPr vert="horz" lIns="91440" tIns="45720" rIns="91440" bIns="45720" rtlCol="0" anchor="b"/>
-          <a:lstStyle>
-            <a:lvl1pPr algn="r">
-              <a:defRPr sz="1200"/>
-            </a:lvl1pPr>
-          </a:lstStyle>
-          <a:p>
-            <a:fld id="{CE5E9CC1-C706-0F49-92D6-E571CC5EEA8F}" type="slidenum">
-              <a:rPr lang="en-US"/>
-              <a:t>‹#›</a:t>
-            </a:fld>
-            <a:endParaRPr lang="en-US"/>
-          </a:p>
-        </p:txBody>
-      </p:sp>
     </p:spTree>
     <p:extLst>
       <p:ext uri="{BB962C8B-B14F-4D97-AF65-F5344CB8AC3E}">
-        <p14:creationId xmlns:p14="http://schemas.microsoft.com/office/powerpoint/2010/main" val="1024086991"/>
+        <p14:creationId xmlns:p14="http://schemas.microsoft.com/office/powerpoint/2010/main" val="1105879143"/>
       </p:ext>
     </p:extLst>
   </p:cSld>
@@ -512,10 +293,6 @@
           <a:bodyPr/>
           <a:lstStyle/>
           <a:p>
-            <a:r>
-              <a:rPr lang="en-US" dirty="0"/>
-              <a:t/>
-            </a:r>
             <a:endParaRPr lang="en-US" dirty="0"/>
           </a:p>
         </p:txBody>
@@ -600,10 +377,6 @@
           <a:bodyPr/>
           <a:lstStyle/>
           <a:p>
-            <a:r>
-              <a:rPr lang="en-US" dirty="0"/>
-              <a:t/>
-            </a:r>
             <a:endParaRPr lang="en-US" dirty="0"/>
           </a:p>
         </p:txBody>
@@ -688,10 +461,6 @@
           <a:bodyPr/>
           <a:lstStyle/>
           <a:p>
-            <a:r>
-              <a:rPr lang="en-US" dirty="0"/>
-              <a:t/>
-            </a:r>
             <a:endParaRPr lang="en-US" dirty="0"/>
           </a:p>
         </p:txBody>
@@ -776,10 +545,6 @@
           <a:bodyPr/>
           <a:lstStyle/>
           <a:p>
-            <a:r>
-              <a:rPr lang="en-US" dirty="0"/>
-              <a:t/>
-            </a:r>
             <a:endParaRPr lang="en-US" dirty="0"/>
           </a:p>
         </p:txBody>
@@ -864,10 +629,6 @@
           <a:bodyPr/>
           <a:lstStyle/>
           <a:p>
-            <a:r>
-              <a:rPr lang="en-US" dirty="0"/>
-              <a:t/>
-            </a:r>
             <a:endParaRPr lang="en-US" dirty="0"/>
           </a:p>
         </p:txBody>
@@ -952,10 +713,6 @@
           <a:bodyPr/>
           <a:lstStyle/>
           <a:p>
-            <a:r>
-              <a:rPr lang="en-US" dirty="0"/>
-              <a:t/>
-            </a:r>
             <a:endParaRPr lang="en-US" dirty="0"/>
           </a:p>
         </p:txBody>
@@ -1040,10 +797,6 @@
           <a:bodyPr/>
           <a:lstStyle/>
           <a:p>
-            <a:r>
-              <a:rPr lang="en-US" dirty="0"/>
-              <a:t/>
-            </a:r>
             <a:endParaRPr lang="en-US" dirty="0"/>
           </a:p>
         </p:txBody>
@@ -1128,10 +881,6 @@
           <a:bodyPr/>
           <a:lstStyle/>
           <a:p>
-            <a:r>
-              <a:rPr lang="en-US" dirty="0"/>
-              <a:t/>
-            </a:r>
             <a:endParaRPr lang="en-US" dirty="0"/>
           </a:p>
         </p:txBody>
@@ -1216,10 +965,6 @@
           <a:bodyPr/>
           <a:lstStyle/>
           <a:p>
-            <a:r>
-              <a:rPr lang="en-US" dirty="0"/>
-              <a:t/>
-            </a:r>
             <a:endParaRPr lang="en-US" dirty="0"/>
           </a:p>
         </p:txBody>
@@ -1304,10 +1049,6 @@
           <a:bodyPr/>
           <a:lstStyle/>
           <a:p>
-            <a:r>
-              <a:rPr lang="en-US" dirty="0"/>
-              <a:t/>
-            </a:r>
             <a:endParaRPr lang="en-US" dirty="0"/>
           </a:p>
         </p:txBody>
@@ -1392,10 +1133,6 @@
           <a:bodyPr/>
           <a:lstStyle/>
           <a:p>
-            <a:r>
-              <a:rPr lang="en-US" dirty="0"/>
-              <a:t/>
-            </a:r>
             <a:endParaRPr lang="en-US" dirty="0"/>
           </a:p>
         </p:txBody>
@@ -1480,10 +1217,6 @@
           <a:bodyPr/>
           <a:lstStyle/>
           <a:p>
-            <a:r>
-              <a:rPr lang="en-US" dirty="0"/>
-              <a:t/>
-            </a:r>
             <a:endParaRPr lang="en-US" dirty="0"/>
           </a:p>
         </p:txBody>
@@ -1568,10 +1301,6 @@
           <a:bodyPr/>
           <a:lstStyle/>
           <a:p>
-            <a:r>
-              <a:rPr lang="en-US" dirty="0"/>
-              <a:t/>
-            </a:r>
             <a:endParaRPr lang="en-US" dirty="0"/>
           </a:p>
         </p:txBody>
@@ -1645,6 +1374,11 @@
 <file path=ppt/slideMasters/slideMaster1.xml><?xml version="1.0" encoding="utf-8"?>
 <p:sldMaster xmlns:a="http://schemas.openxmlformats.org/drawingml/2006/main" xmlns:r="http://schemas.openxmlformats.org/officeDocument/2006/relationships" xmlns:p="http://schemas.openxmlformats.org/presentationml/2006/main">
   <p:cSld>
+    <p:bg>
+      <p:bgRef idx="1001">
+        <a:schemeClr val="bg1"/>
+      </p:bgRef>
+    </p:bg>
     <p:spTree>
       <p:nvGrpSpPr>
         <p:cNvPr id="1" name=""/>
@@ -1927,6 +1661,7 @@
         <a:solidFill>
           <a:srgbClr val="0B1D3A"/>
         </a:solidFill>
+        <a:effectLst/>
       </p:bgPr>
     </p:bg>
     <p:spTree>
@@ -2006,7 +1741,7 @@
           <a:bodyPr wrap="square" lIns="0" tIns="0" rIns="0" bIns="0" rtlCol="0" anchor="ctr"/>
           <a:lstStyle/>
           <a:p>
-            <a:pPr indent="0" marL="0">
+            <a:pPr marL="0" indent="0">
               <a:buNone/>
             </a:pPr>
             <a:r>
@@ -2045,7 +1780,7 @@
           <a:bodyPr wrap="square" lIns="0" tIns="0" rIns="0" bIns="0" rtlCol="0" anchor="ctr"/>
           <a:lstStyle/>
           <a:p>
-            <a:pPr indent="0" marL="0">
+            <a:pPr marL="0" indent="0">
               <a:buNone/>
             </a:pPr>
             <a:r>
@@ -2104,7 +1839,7 @@
           <a:bodyPr wrap="square" lIns="0" tIns="0" rIns="0" bIns="0" rtlCol="0" anchor="ctr"/>
           <a:lstStyle/>
           <a:p>
-            <a:pPr indent="0" marL="0">
+            <a:pPr marL="0" indent="0">
               <a:buNone/>
             </a:pPr>
             <a:r>
@@ -2121,17 +1856,17 @@
             <a:endParaRPr lang="en-US" sz="1300" dirty="0"/>
           </a:p>
           <a:p>
-            <a:pPr indent="0" marL="0">
+            <a:pPr marL="0" indent="0">
               <a:buNone/>
             </a:pPr>
             <a:endParaRPr lang="en-US" sz="1300" dirty="0"/>
           </a:p>
           <a:p>
-            <a:pPr indent="0" marL="0">
-              <a:buNone/>
-            </a:pPr>
-            <a:r>
-              <a:rPr lang="en-US" sz="1400" dirty="0">
+            <a:pPr marL="0" indent="0">
+              <a:buNone/>
+            </a:pPr>
+            <a:r>
+              <a:rPr lang="zh-CN" altLang="en-US" sz="1400" dirty="0">
                 <a:solidFill>
                   <a:srgbClr val="FFFFFF"/>
                 </a:solidFill>
@@ -2139,12 +1874,19 @@
                 <a:ea typeface="Calibri" pitchFamily="34" charset="-122"/>
                 <a:cs typeface="Calibri" pitchFamily="34" charset="-120"/>
               </a:rPr>
-              <a:t>组员：张三 · 李四 · 王五 </a:t>
-            </a:r>
-            <a:endParaRPr lang="en-US" sz="1300" dirty="0"/>
-          </a:p>
-          <a:p>
-            <a:pPr indent="0" marL="0">
+              <a:t>四组李世祺</a:t>
+            </a:r>
+            <a:endParaRPr lang="en-US" altLang="zh-CN" sz="1400" dirty="0">
+              <a:solidFill>
+                <a:srgbClr val="FFFFFF"/>
+              </a:solidFill>
+              <a:latin typeface="Calibri" pitchFamily="34" charset="0"/>
+              <a:ea typeface="Calibri" pitchFamily="34" charset="-122"/>
+              <a:cs typeface="Calibri" pitchFamily="34" charset="-120"/>
+            </a:endParaRPr>
+          </a:p>
+          <a:p>
+            <a:pPr marL="0" indent="0">
               <a:buNone/>
             </a:pPr>
             <a:r>
@@ -2183,7 +1925,7 @@
           <a:bodyPr wrap="square" rtlCol="0" anchor="ctr"/>
           <a:lstStyle/>
           <a:p>
-            <a:pPr algn="r" indent="0" marL="0">
+            <a:pPr marL="0" indent="0" algn="r">
               <a:buNone/>
             </a:pPr>
             <a:r>
@@ -2217,6 +1959,7 @@
         <a:solidFill>
           <a:srgbClr val="F7F9FC"/>
         </a:solidFill>
+        <a:effectLst/>
       </p:bgPr>
     </p:bg>
     <p:spTree>
@@ -2254,7 +1997,7 @@
           <a:bodyPr wrap="square" lIns="0" tIns="0" rIns="0" bIns="0" rtlCol="0" anchor="ctr"/>
           <a:lstStyle/>
           <a:p>
-            <a:pPr indent="0" marL="0">
+            <a:pPr marL="0" indent="0">
               <a:buNone/>
             </a:pPr>
             <a:r>
@@ -2293,7 +2036,7 @@
           <a:bodyPr wrap="square" lIns="0" tIns="0" rIns="0" bIns="0" rtlCol="0" anchor="ctr"/>
           <a:lstStyle/>
           <a:p>
-            <a:pPr indent="0" marL="0">
+            <a:pPr marL="0" indent="0">
               <a:buNone/>
             </a:pPr>
             <a:r>
@@ -2334,10 +2077,34 @@
             <a:tbl>
               <a:tblPr/>
               <a:tblGrid>
-                <a:gridCol w="1005840"/>
-                <a:gridCol w="914400"/>
-                <a:gridCol w="914400"/>
-                <a:gridCol w="914400"/>
+                <a:gridCol w="1005840">
+                  <a:extLst>
+                    <a:ext uri="{9D8B030D-6E8A-4147-A177-3AD203B41FA5}">
+                      <a16:colId xmlns:a16="http://schemas.microsoft.com/office/drawing/2014/main" val="20000"/>
+                    </a:ext>
+                  </a:extLst>
+                </a:gridCol>
+                <a:gridCol w="914400">
+                  <a:extLst>
+                    <a:ext uri="{9D8B030D-6E8A-4147-A177-3AD203B41FA5}">
+                      <a16:colId xmlns:a16="http://schemas.microsoft.com/office/drawing/2014/main" val="20001"/>
+                    </a:ext>
+                  </a:extLst>
+                </a:gridCol>
+                <a:gridCol w="914400">
+                  <a:extLst>
+                    <a:ext uri="{9D8B030D-6E8A-4147-A177-3AD203B41FA5}">
+                      <a16:colId xmlns:a16="http://schemas.microsoft.com/office/drawing/2014/main" val="20002"/>
+                    </a:ext>
+                  </a:extLst>
+                </a:gridCol>
+                <a:gridCol w="914400">
+                  <a:extLst>
+                    <a:ext uri="{9D8B030D-6E8A-4147-A177-3AD203B41FA5}">
+                      <a16:colId xmlns:a16="http://schemas.microsoft.com/office/drawing/2014/main" val="20003"/>
+                    </a:ext>
+                  </a:extLst>
+                </a:gridCol>
               </a:tblGrid>
               <a:tr h="256032">
                 <a:tc>
@@ -2345,7 +2112,7 @@
                     <a:bodyPr/>
                     <a:lstStyle/>
                     <a:p>
-                      <a:pPr indent="0" marL="0">
+                      <a:pPr marL="0" indent="0">
                         <a:buNone/>
                       </a:pPr>
                       <a:r>
@@ -2366,7 +2133,7 @@
                       </a:endParaRPr>
                     </a:p>
                   </a:txBody>
-                  <a:tcPr marL="91440" marR="91440" marT="45720" marB="45720">
+                  <a:tcPr>
                     <a:lnL w="6350" cap="flat" cmpd="sng" algn="ctr">
                       <a:solidFill>
                         <a:srgbClr val="E8ECF1"/>
@@ -2413,7 +2180,7 @@
                     <a:bodyPr/>
                     <a:lstStyle/>
                     <a:p>
-                      <a:pPr indent="0" marL="0">
+                      <a:pPr marL="0" indent="0">
                         <a:buNone/>
                       </a:pPr>
                       <a:r>
@@ -2434,7 +2201,7 @@
                       </a:endParaRPr>
                     </a:p>
                   </a:txBody>
-                  <a:tcPr marL="91440" marR="91440" marT="45720" marB="45720">
+                  <a:tcPr>
                     <a:lnL w="6350" cap="flat" cmpd="sng" algn="ctr">
                       <a:solidFill>
                         <a:srgbClr val="E8ECF1"/>
@@ -2481,7 +2248,7 @@
                     <a:bodyPr/>
                     <a:lstStyle/>
                     <a:p>
-                      <a:pPr indent="0" marL="0">
+                      <a:pPr marL="0" indent="0">
                         <a:buNone/>
                       </a:pPr>
                       <a:r>
@@ -2502,7 +2269,7 @@
                       </a:endParaRPr>
                     </a:p>
                   </a:txBody>
-                  <a:tcPr marL="91440" marR="91440" marT="45720" marB="45720">
+                  <a:tcPr>
                     <a:lnL w="6350" cap="flat" cmpd="sng" algn="ctr">
                       <a:solidFill>
                         <a:srgbClr val="E8ECF1"/>
@@ -2549,7 +2316,7 @@
                     <a:bodyPr/>
                     <a:lstStyle/>
                     <a:p>
-                      <a:pPr indent="0" marL="0">
+                      <a:pPr marL="0" indent="0">
                         <a:buNone/>
                       </a:pPr>
                       <a:r>
@@ -2570,7 +2337,7 @@
                       </a:endParaRPr>
                     </a:p>
                   </a:txBody>
-                  <a:tcPr marL="91440" marR="91440" marT="45720" marB="45720">
+                  <a:tcPr>
                     <a:lnL w="6350" cap="flat" cmpd="sng" algn="ctr">
                       <a:solidFill>
                         <a:srgbClr val="E8ECF1"/>
@@ -2612,6 +2379,11 @@
                     </a:solidFill>
                   </a:tcPr>
                 </a:tc>
+                <a:extLst>
+                  <a:ext uri="{0D108BD9-81ED-4DB2-BD59-A6C34878D82A}">
+                    <a16:rowId xmlns:a16="http://schemas.microsoft.com/office/drawing/2014/main" val="10000"/>
+                  </a:ext>
+                </a:extLst>
               </a:tr>
               <a:tr h="228600">
                 <a:tc>
@@ -2619,7 +2391,7 @@
                     <a:bodyPr/>
                     <a:lstStyle/>
                     <a:p>
-                      <a:pPr indent="0" marL="0">
+                      <a:pPr marL="0" indent="0">
                         <a:buNone/>
                       </a:pPr>
                       <a:r>
@@ -2640,7 +2412,7 @@
                       </a:endParaRPr>
                     </a:p>
                   </a:txBody>
-                  <a:tcPr marL="91440" marR="91440" marT="45720" marB="45720">
+                  <a:tcPr>
                     <a:lnL w="6350" cap="flat" cmpd="sng" algn="ctr">
                       <a:solidFill>
                         <a:srgbClr val="E8ECF1"/>
@@ -2684,7 +2456,7 @@
                     <a:bodyPr/>
                     <a:lstStyle/>
                     <a:p>
-                      <a:pPr indent="0" marL="0">
+                      <a:pPr marL="0" indent="0">
                         <a:buNone/>
                       </a:pPr>
                       <a:r>
@@ -2705,7 +2477,7 @@
                       </a:endParaRPr>
                     </a:p>
                   </a:txBody>
-                  <a:tcPr marL="91440" marR="91440" marT="45720" marB="45720">
+                  <a:tcPr>
                     <a:lnL w="6350" cap="flat" cmpd="sng" algn="ctr">
                       <a:solidFill>
                         <a:srgbClr val="E8ECF1"/>
@@ -2749,7 +2521,7 @@
                     <a:bodyPr/>
                     <a:lstStyle/>
                     <a:p>
-                      <a:pPr indent="0" marL="0">
+                      <a:pPr marL="0" indent="0">
                         <a:buNone/>
                       </a:pPr>
                       <a:r>
@@ -2770,7 +2542,7 @@
                       </a:endParaRPr>
                     </a:p>
                   </a:txBody>
-                  <a:tcPr marL="91440" marR="91440" marT="45720" marB="45720">
+                  <a:tcPr>
                     <a:lnL w="6350" cap="flat" cmpd="sng" algn="ctr">
                       <a:solidFill>
                         <a:srgbClr val="E8ECF1"/>
@@ -2814,7 +2586,7 @@
                     <a:bodyPr/>
                     <a:lstStyle/>
                     <a:p>
-                      <a:pPr indent="0" marL="0">
+                      <a:pPr marL="0" indent="0">
                         <a:buNone/>
                       </a:pPr>
                       <a:r>
@@ -2835,7 +2607,7 @@
                       </a:endParaRPr>
                     </a:p>
                   </a:txBody>
-                  <a:tcPr marL="91440" marR="91440" marT="45720" marB="45720">
+                  <a:tcPr>
                     <a:lnL w="6350" cap="flat" cmpd="sng" algn="ctr">
                       <a:solidFill>
                         <a:srgbClr val="E8ECF1"/>
@@ -2874,6 +2646,11 @@
                     </a:lnB>
                   </a:tcPr>
                 </a:tc>
+                <a:extLst>
+                  <a:ext uri="{0D108BD9-81ED-4DB2-BD59-A6C34878D82A}">
+                    <a16:rowId xmlns:a16="http://schemas.microsoft.com/office/drawing/2014/main" val="10001"/>
+                  </a:ext>
+                </a:extLst>
               </a:tr>
               <a:tr h="228600">
                 <a:tc>
@@ -2881,7 +2658,7 @@
                     <a:bodyPr/>
                     <a:lstStyle/>
                     <a:p>
-                      <a:pPr indent="0" marL="0">
+                      <a:pPr marL="0" indent="0">
                         <a:buNone/>
                       </a:pPr>
                       <a:r>
@@ -2902,7 +2679,7 @@
                       </a:endParaRPr>
                     </a:p>
                   </a:txBody>
-                  <a:tcPr marL="91440" marR="91440" marT="45720" marB="45720">
+                  <a:tcPr>
                     <a:lnL w="6350" cap="flat" cmpd="sng" algn="ctr">
                       <a:solidFill>
                         <a:srgbClr val="E8ECF1"/>
@@ -2946,7 +2723,7 @@
                     <a:bodyPr/>
                     <a:lstStyle/>
                     <a:p>
-                      <a:pPr indent="0" marL="0">
+                      <a:pPr marL="0" indent="0">
                         <a:buNone/>
                       </a:pPr>
                       <a:r>
@@ -2967,7 +2744,7 @@
                       </a:endParaRPr>
                     </a:p>
                   </a:txBody>
-                  <a:tcPr marL="91440" marR="91440" marT="45720" marB="45720">
+                  <a:tcPr>
                     <a:lnL w="6350" cap="flat" cmpd="sng" algn="ctr">
                       <a:solidFill>
                         <a:srgbClr val="E8ECF1"/>
@@ -3011,7 +2788,7 @@
                     <a:bodyPr/>
                     <a:lstStyle/>
                     <a:p>
-                      <a:pPr indent="0" marL="0">
+                      <a:pPr marL="0" indent="0">
                         <a:buNone/>
                       </a:pPr>
                       <a:r>
@@ -3032,7 +2809,7 @@
                       </a:endParaRPr>
                     </a:p>
                   </a:txBody>
-                  <a:tcPr marL="91440" marR="91440" marT="45720" marB="45720">
+                  <a:tcPr>
                     <a:lnL w="6350" cap="flat" cmpd="sng" algn="ctr">
                       <a:solidFill>
                         <a:srgbClr val="E8ECF1"/>
@@ -3076,7 +2853,7 @@
                     <a:bodyPr/>
                     <a:lstStyle/>
                     <a:p>
-                      <a:pPr indent="0" marL="0">
+                      <a:pPr marL="0" indent="0">
                         <a:buNone/>
                       </a:pPr>
                       <a:r>
@@ -3097,7 +2874,7 @@
                       </a:endParaRPr>
                     </a:p>
                   </a:txBody>
-                  <a:tcPr marL="91440" marR="91440" marT="45720" marB="45720">
+                  <a:tcPr>
                     <a:lnL w="6350" cap="flat" cmpd="sng" algn="ctr">
                       <a:solidFill>
                         <a:srgbClr val="E8ECF1"/>
@@ -3136,6 +2913,11 @@
                     </a:lnB>
                   </a:tcPr>
                 </a:tc>
+                <a:extLst>
+                  <a:ext uri="{0D108BD9-81ED-4DB2-BD59-A6C34878D82A}">
+                    <a16:rowId xmlns:a16="http://schemas.microsoft.com/office/drawing/2014/main" val="10002"/>
+                  </a:ext>
+                </a:extLst>
               </a:tr>
               <a:tr h="228600">
                 <a:tc>
@@ -3143,7 +2925,7 @@
                     <a:bodyPr/>
                     <a:lstStyle/>
                     <a:p>
-                      <a:pPr indent="0" marL="0">
+                      <a:pPr marL="0" indent="0">
                         <a:buNone/>
                       </a:pPr>
                       <a:r>
@@ -3164,7 +2946,7 @@
                       </a:endParaRPr>
                     </a:p>
                   </a:txBody>
-                  <a:tcPr marL="91440" marR="91440" marT="45720" marB="45720">
+                  <a:tcPr>
                     <a:lnL w="6350" cap="flat" cmpd="sng" algn="ctr">
                       <a:solidFill>
                         <a:srgbClr val="E8ECF1"/>
@@ -3208,7 +2990,7 @@
                     <a:bodyPr/>
                     <a:lstStyle/>
                     <a:p>
-                      <a:pPr indent="0" marL="0">
+                      <a:pPr marL="0" indent="0">
                         <a:buNone/>
                       </a:pPr>
                       <a:r>
@@ -3229,7 +3011,7 @@
                       </a:endParaRPr>
                     </a:p>
                   </a:txBody>
-                  <a:tcPr marL="91440" marR="91440" marT="45720" marB="45720">
+                  <a:tcPr>
                     <a:lnL w="6350" cap="flat" cmpd="sng" algn="ctr">
                       <a:solidFill>
                         <a:srgbClr val="E8ECF1"/>
@@ -3273,7 +3055,7 @@
                     <a:bodyPr/>
                     <a:lstStyle/>
                     <a:p>
-                      <a:pPr indent="0" marL="0">
+                      <a:pPr marL="0" indent="0">
                         <a:buNone/>
                       </a:pPr>
                       <a:r>
@@ -3294,7 +3076,7 @@
                       </a:endParaRPr>
                     </a:p>
                   </a:txBody>
-                  <a:tcPr marL="91440" marR="91440" marT="45720" marB="45720">
+                  <a:tcPr>
                     <a:lnL w="6350" cap="flat" cmpd="sng" algn="ctr">
                       <a:solidFill>
                         <a:srgbClr val="E8ECF1"/>
@@ -3338,7 +3120,7 @@
                     <a:bodyPr/>
                     <a:lstStyle/>
                     <a:p>
-                      <a:pPr indent="0" marL="0">
+                      <a:pPr marL="0" indent="0">
                         <a:buNone/>
                       </a:pPr>
                       <a:r>
@@ -3359,7 +3141,7 @@
                       </a:endParaRPr>
                     </a:p>
                   </a:txBody>
-                  <a:tcPr marL="91440" marR="91440" marT="45720" marB="45720">
+                  <a:tcPr>
                     <a:lnL w="6350" cap="flat" cmpd="sng" algn="ctr">
                       <a:solidFill>
                         <a:srgbClr val="E8ECF1"/>
@@ -3398,6 +3180,11 @@
                     </a:lnB>
                   </a:tcPr>
                 </a:tc>
+                <a:extLst>
+                  <a:ext uri="{0D108BD9-81ED-4DB2-BD59-A6C34878D82A}">
+                    <a16:rowId xmlns:a16="http://schemas.microsoft.com/office/drawing/2014/main" val="10003"/>
+                  </a:ext>
+                </a:extLst>
               </a:tr>
               <a:tr h="228600">
                 <a:tc>
@@ -3405,7 +3192,7 @@
                     <a:bodyPr/>
                     <a:lstStyle/>
                     <a:p>
-                      <a:pPr indent="0" marL="0">
+                      <a:pPr marL="0" indent="0">
                         <a:buNone/>
                       </a:pPr>
                       <a:r>
@@ -3426,7 +3213,7 @@
                       </a:endParaRPr>
                     </a:p>
                   </a:txBody>
-                  <a:tcPr marL="91440" marR="91440" marT="45720" marB="45720">
+                  <a:tcPr>
                     <a:lnL w="6350" cap="flat" cmpd="sng" algn="ctr">
                       <a:solidFill>
                         <a:srgbClr val="E8ECF1"/>
@@ -3470,7 +3257,7 @@
                     <a:bodyPr/>
                     <a:lstStyle/>
                     <a:p>
-                      <a:pPr indent="0" marL="0">
+                      <a:pPr marL="0" indent="0">
                         <a:buNone/>
                       </a:pPr>
                       <a:r>
@@ -3491,7 +3278,7 @@
                       </a:endParaRPr>
                     </a:p>
                   </a:txBody>
-                  <a:tcPr marL="91440" marR="91440" marT="45720" marB="45720">
+                  <a:tcPr>
                     <a:lnL w="6350" cap="flat" cmpd="sng" algn="ctr">
                       <a:solidFill>
                         <a:srgbClr val="E8ECF1"/>
@@ -3535,7 +3322,7 @@
                     <a:bodyPr/>
                     <a:lstStyle/>
                     <a:p>
-                      <a:pPr indent="0" marL="0">
+                      <a:pPr marL="0" indent="0">
                         <a:buNone/>
                       </a:pPr>
                       <a:r>
@@ -3556,7 +3343,7 @@
                       </a:endParaRPr>
                     </a:p>
                   </a:txBody>
-                  <a:tcPr marL="91440" marR="91440" marT="45720" marB="45720">
+                  <a:tcPr>
                     <a:lnL w="6350" cap="flat" cmpd="sng" algn="ctr">
                       <a:solidFill>
                         <a:srgbClr val="E8ECF1"/>
@@ -3600,7 +3387,7 @@
                     <a:bodyPr/>
                     <a:lstStyle/>
                     <a:p>
-                      <a:pPr indent="0" marL="0">
+                      <a:pPr marL="0" indent="0">
                         <a:buNone/>
                       </a:pPr>
                       <a:r>
@@ -3621,7 +3408,7 @@
                       </a:endParaRPr>
                     </a:p>
                   </a:txBody>
-                  <a:tcPr marL="91440" marR="91440" marT="45720" marB="45720">
+                  <a:tcPr>
                     <a:lnL w="6350" cap="flat" cmpd="sng" algn="ctr">
                       <a:solidFill>
                         <a:srgbClr val="E8ECF1"/>
@@ -3660,6 +3447,11 @@
                     </a:lnB>
                   </a:tcPr>
                 </a:tc>
+                <a:extLst>
+                  <a:ext uri="{0D108BD9-81ED-4DB2-BD59-A6C34878D82A}">
+                    <a16:rowId xmlns:a16="http://schemas.microsoft.com/office/drawing/2014/main" val="10004"/>
+                  </a:ext>
+                </a:extLst>
               </a:tr>
             </a:tbl>
           </a:graphicData>
@@ -3686,7 +3478,7 @@
           <a:bodyPr wrap="square" lIns="0" tIns="0" rIns="0" bIns="0" rtlCol="0" anchor="ctr"/>
           <a:lstStyle/>
           <a:p>
-            <a:pPr indent="0" marL="0">
+            <a:pPr marL="0" indent="0">
               <a:buNone/>
             </a:pPr>
             <a:r>
@@ -3727,9 +3519,27 @@
             <a:tbl>
               <a:tblPr/>
               <a:tblGrid>
-                <a:gridCol w="1188720"/>
-                <a:gridCol w="1188720"/>
-                <a:gridCol w="1188720"/>
+                <a:gridCol w="1188720">
+                  <a:extLst>
+                    <a:ext uri="{9D8B030D-6E8A-4147-A177-3AD203B41FA5}">
+                      <a16:colId xmlns:a16="http://schemas.microsoft.com/office/drawing/2014/main" val="20000"/>
+                    </a:ext>
+                  </a:extLst>
+                </a:gridCol>
+                <a:gridCol w="1188720">
+                  <a:extLst>
+                    <a:ext uri="{9D8B030D-6E8A-4147-A177-3AD203B41FA5}">
+                      <a16:colId xmlns:a16="http://schemas.microsoft.com/office/drawing/2014/main" val="20001"/>
+                    </a:ext>
+                  </a:extLst>
+                </a:gridCol>
+                <a:gridCol w="1188720">
+                  <a:extLst>
+                    <a:ext uri="{9D8B030D-6E8A-4147-A177-3AD203B41FA5}">
+                      <a16:colId xmlns:a16="http://schemas.microsoft.com/office/drawing/2014/main" val="20002"/>
+                    </a:ext>
+                  </a:extLst>
+                </a:gridCol>
               </a:tblGrid>
               <a:tr h="256032">
                 <a:tc>
@@ -3737,7 +3547,7 @@
                     <a:bodyPr/>
                     <a:lstStyle/>
                     <a:p>
-                      <a:pPr indent="0" marL="0">
+                      <a:pPr marL="0" indent="0">
                         <a:buNone/>
                       </a:pPr>
                       <a:r>
@@ -3758,7 +3568,7 @@
                       </a:endParaRPr>
                     </a:p>
                   </a:txBody>
-                  <a:tcPr marL="91440" marR="91440" marT="45720" marB="45720">
+                  <a:tcPr>
                     <a:lnL w="6350" cap="flat" cmpd="sng" algn="ctr">
                       <a:solidFill>
                         <a:srgbClr val="E8ECF1"/>
@@ -3805,7 +3615,7 @@
                     <a:bodyPr/>
                     <a:lstStyle/>
                     <a:p>
-                      <a:pPr indent="0" marL="0">
+                      <a:pPr marL="0" indent="0">
                         <a:buNone/>
                       </a:pPr>
                       <a:r>
@@ -3826,7 +3636,7 @@
                       </a:endParaRPr>
                     </a:p>
                   </a:txBody>
-                  <a:tcPr marL="91440" marR="91440" marT="45720" marB="45720">
+                  <a:tcPr>
                     <a:lnL w="6350" cap="flat" cmpd="sng" algn="ctr">
                       <a:solidFill>
                         <a:srgbClr val="E8ECF1"/>
@@ -3873,7 +3683,7 @@
                     <a:bodyPr/>
                     <a:lstStyle/>
                     <a:p>
-                      <a:pPr indent="0" marL="0">
+                      <a:pPr marL="0" indent="0">
                         <a:buNone/>
                       </a:pPr>
                       <a:r>
@@ -3894,7 +3704,7 @@
                       </a:endParaRPr>
                     </a:p>
                   </a:txBody>
-                  <a:tcPr marL="91440" marR="91440" marT="45720" marB="45720">
+                  <a:tcPr>
                     <a:lnL w="6350" cap="flat" cmpd="sng" algn="ctr">
                       <a:solidFill>
                         <a:srgbClr val="E8ECF1"/>
@@ -3936,6 +3746,11 @@
                     </a:solidFill>
                   </a:tcPr>
                 </a:tc>
+                <a:extLst>
+                  <a:ext uri="{0D108BD9-81ED-4DB2-BD59-A6C34878D82A}">
+                    <a16:rowId xmlns:a16="http://schemas.microsoft.com/office/drawing/2014/main" val="10000"/>
+                  </a:ext>
+                </a:extLst>
               </a:tr>
               <a:tr h="228600">
                 <a:tc>
@@ -3943,7 +3758,7 @@
                     <a:bodyPr/>
                     <a:lstStyle/>
                     <a:p>
-                      <a:pPr indent="0" marL="0">
+                      <a:pPr marL="0" indent="0">
                         <a:buNone/>
                       </a:pPr>
                       <a:r>
@@ -3964,7 +3779,7 @@
                       </a:endParaRPr>
                     </a:p>
                   </a:txBody>
-                  <a:tcPr marL="91440" marR="91440" marT="45720" marB="45720">
+                  <a:tcPr>
                     <a:lnL w="6350" cap="flat" cmpd="sng" algn="ctr">
                       <a:solidFill>
                         <a:srgbClr val="E8ECF1"/>
@@ -4008,7 +3823,7 @@
                     <a:bodyPr/>
                     <a:lstStyle/>
                     <a:p>
-                      <a:pPr indent="0" marL="0">
+                      <a:pPr marL="0" indent="0">
                         <a:buNone/>
                       </a:pPr>
                       <a:r>
@@ -4029,7 +3844,7 @@
                       </a:endParaRPr>
                     </a:p>
                   </a:txBody>
-                  <a:tcPr marL="91440" marR="91440" marT="45720" marB="45720">
+                  <a:tcPr>
                     <a:lnL w="6350" cap="flat" cmpd="sng" algn="ctr">
                       <a:solidFill>
                         <a:srgbClr val="E8ECF1"/>
@@ -4073,7 +3888,7 @@
                     <a:bodyPr/>
                     <a:lstStyle/>
                     <a:p>
-                      <a:pPr indent="0" marL="0">
+                      <a:pPr marL="0" indent="0">
                         <a:buNone/>
                       </a:pPr>
                       <a:r>
@@ -4094,7 +3909,7 @@
                       </a:endParaRPr>
                     </a:p>
                   </a:txBody>
-                  <a:tcPr marL="91440" marR="91440" marT="45720" marB="45720">
+                  <a:tcPr>
                     <a:lnL w="6350" cap="flat" cmpd="sng" algn="ctr">
                       <a:solidFill>
                         <a:srgbClr val="E8ECF1"/>
@@ -4133,6 +3948,11 @@
                     </a:lnB>
                   </a:tcPr>
                 </a:tc>
+                <a:extLst>
+                  <a:ext uri="{0D108BD9-81ED-4DB2-BD59-A6C34878D82A}">
+                    <a16:rowId xmlns:a16="http://schemas.microsoft.com/office/drawing/2014/main" val="10001"/>
+                  </a:ext>
+                </a:extLst>
               </a:tr>
               <a:tr h="228600">
                 <a:tc>
@@ -4140,7 +3960,7 @@
                     <a:bodyPr/>
                     <a:lstStyle/>
                     <a:p>
-                      <a:pPr indent="0" marL="0">
+                      <a:pPr marL="0" indent="0">
                         <a:buNone/>
                       </a:pPr>
                       <a:r>
@@ -4161,7 +3981,7 @@
                       </a:endParaRPr>
                     </a:p>
                   </a:txBody>
-                  <a:tcPr marL="91440" marR="91440" marT="45720" marB="45720">
+                  <a:tcPr>
                     <a:lnL w="6350" cap="flat" cmpd="sng" algn="ctr">
                       <a:solidFill>
                         <a:srgbClr val="E8ECF1"/>
@@ -4205,7 +4025,7 @@
                     <a:bodyPr/>
                     <a:lstStyle/>
                     <a:p>
-                      <a:pPr indent="0" marL="0">
+                      <a:pPr marL="0" indent="0">
                         <a:buNone/>
                       </a:pPr>
                       <a:r>
@@ -4226,7 +4046,7 @@
                       </a:endParaRPr>
                     </a:p>
                   </a:txBody>
-                  <a:tcPr marL="91440" marR="91440" marT="45720" marB="45720">
+                  <a:tcPr>
                     <a:lnL w="6350" cap="flat" cmpd="sng" algn="ctr">
                       <a:solidFill>
                         <a:srgbClr val="E8ECF1"/>
@@ -4270,7 +4090,7 @@
                     <a:bodyPr/>
                     <a:lstStyle/>
                     <a:p>
-                      <a:pPr indent="0" marL="0">
+                      <a:pPr marL="0" indent="0">
                         <a:buNone/>
                       </a:pPr>
                       <a:r>
@@ -4291,7 +4111,7 @@
                       </a:endParaRPr>
                     </a:p>
                   </a:txBody>
-                  <a:tcPr marL="91440" marR="91440" marT="45720" marB="45720">
+                  <a:tcPr>
                     <a:lnL w="6350" cap="flat" cmpd="sng" algn="ctr">
                       <a:solidFill>
                         <a:srgbClr val="E8ECF1"/>
@@ -4330,6 +4150,11 @@
                     </a:lnB>
                   </a:tcPr>
                 </a:tc>
+                <a:extLst>
+                  <a:ext uri="{0D108BD9-81ED-4DB2-BD59-A6C34878D82A}">
+                    <a16:rowId xmlns:a16="http://schemas.microsoft.com/office/drawing/2014/main" val="10002"/>
+                  </a:ext>
+                </a:extLst>
               </a:tr>
               <a:tr h="228600">
                 <a:tc>
@@ -4337,7 +4162,7 @@
                     <a:bodyPr/>
                     <a:lstStyle/>
                     <a:p>
-                      <a:pPr indent="0" marL="0">
+                      <a:pPr marL="0" indent="0">
                         <a:buNone/>
                       </a:pPr>
                       <a:r>
@@ -4358,7 +4183,7 @@
                       </a:endParaRPr>
                     </a:p>
                   </a:txBody>
-                  <a:tcPr marL="91440" marR="91440" marT="45720" marB="45720">
+                  <a:tcPr>
                     <a:lnL w="6350" cap="flat" cmpd="sng" algn="ctr">
                       <a:solidFill>
                         <a:srgbClr val="E8ECF1"/>
@@ -4402,7 +4227,7 @@
                     <a:bodyPr/>
                     <a:lstStyle/>
                     <a:p>
-                      <a:pPr indent="0" marL="0">
+                      <a:pPr marL="0" indent="0">
                         <a:buNone/>
                       </a:pPr>
                       <a:r>
@@ -4423,7 +4248,7 @@
                       </a:endParaRPr>
                     </a:p>
                   </a:txBody>
-                  <a:tcPr marL="91440" marR="91440" marT="45720" marB="45720">
+                  <a:tcPr>
                     <a:lnL w="6350" cap="flat" cmpd="sng" algn="ctr">
                       <a:solidFill>
                         <a:srgbClr val="E8ECF1"/>
@@ -4467,7 +4292,7 @@
                     <a:bodyPr/>
                     <a:lstStyle/>
                     <a:p>
-                      <a:pPr indent="0" marL="0">
+                      <a:pPr marL="0" indent="0">
                         <a:buNone/>
                       </a:pPr>
                       <a:r>
@@ -4488,7 +4313,7 @@
                       </a:endParaRPr>
                     </a:p>
                   </a:txBody>
-                  <a:tcPr marL="91440" marR="91440" marT="45720" marB="45720">
+                  <a:tcPr>
                     <a:lnL w="6350" cap="flat" cmpd="sng" algn="ctr">
                       <a:solidFill>
                         <a:srgbClr val="E8ECF1"/>
@@ -4527,6 +4352,11 @@
                     </a:lnB>
                   </a:tcPr>
                 </a:tc>
+                <a:extLst>
+                  <a:ext uri="{0D108BD9-81ED-4DB2-BD59-A6C34878D82A}">
+                    <a16:rowId xmlns:a16="http://schemas.microsoft.com/office/drawing/2014/main" val="10003"/>
+                  </a:ext>
+                </a:extLst>
               </a:tr>
             </a:tbl>
           </a:graphicData>
@@ -4553,7 +4383,7 @@
           <a:bodyPr wrap="square" lIns="0" tIns="0" rIns="0" bIns="0" rtlCol="0" anchor="ctr"/>
           <a:lstStyle/>
           <a:p>
-            <a:pPr indent="0" marL="0">
+            <a:pPr marL="0" indent="0">
               <a:buNone/>
             </a:pPr>
             <a:r>
@@ -4594,11 +4424,41 @@
             <a:tbl>
               <a:tblPr/>
               <a:tblGrid>
-                <a:gridCol w="1371600"/>
-                <a:gridCol w="1371600"/>
-                <a:gridCol w="1371600"/>
-                <a:gridCol w="1371600"/>
-                <a:gridCol w="1691640"/>
+                <a:gridCol w="1371600">
+                  <a:extLst>
+                    <a:ext uri="{9D8B030D-6E8A-4147-A177-3AD203B41FA5}">
+                      <a16:colId xmlns:a16="http://schemas.microsoft.com/office/drawing/2014/main" val="20000"/>
+                    </a:ext>
+                  </a:extLst>
+                </a:gridCol>
+                <a:gridCol w="1371600">
+                  <a:extLst>
+                    <a:ext uri="{9D8B030D-6E8A-4147-A177-3AD203B41FA5}">
+                      <a16:colId xmlns:a16="http://schemas.microsoft.com/office/drawing/2014/main" val="20001"/>
+                    </a:ext>
+                  </a:extLst>
+                </a:gridCol>
+                <a:gridCol w="1371600">
+                  <a:extLst>
+                    <a:ext uri="{9D8B030D-6E8A-4147-A177-3AD203B41FA5}">
+                      <a16:colId xmlns:a16="http://schemas.microsoft.com/office/drawing/2014/main" val="20002"/>
+                    </a:ext>
+                  </a:extLst>
+                </a:gridCol>
+                <a:gridCol w="1371600">
+                  <a:extLst>
+                    <a:ext uri="{9D8B030D-6E8A-4147-A177-3AD203B41FA5}">
+                      <a16:colId xmlns:a16="http://schemas.microsoft.com/office/drawing/2014/main" val="20003"/>
+                    </a:ext>
+                  </a:extLst>
+                </a:gridCol>
+                <a:gridCol w="1691640">
+                  <a:extLst>
+                    <a:ext uri="{9D8B030D-6E8A-4147-A177-3AD203B41FA5}">
+                      <a16:colId xmlns:a16="http://schemas.microsoft.com/office/drawing/2014/main" val="20004"/>
+                    </a:ext>
+                  </a:extLst>
+                </a:gridCol>
               </a:tblGrid>
               <a:tr h="256032">
                 <a:tc>
@@ -4606,7 +4466,7 @@
                     <a:bodyPr/>
                     <a:lstStyle/>
                     <a:p>
-                      <a:pPr indent="0" marL="0">
+                      <a:pPr marL="0" indent="0">
                         <a:buNone/>
                       </a:pPr>
                       <a:r>
@@ -4627,7 +4487,7 @@
                       </a:endParaRPr>
                     </a:p>
                   </a:txBody>
-                  <a:tcPr marL="91440" marR="91440" marT="45720" marB="45720">
+                  <a:tcPr>
                     <a:lnL w="6350" cap="flat" cmpd="sng" algn="ctr">
                       <a:solidFill>
                         <a:srgbClr val="E8ECF1"/>
@@ -4674,7 +4534,7 @@
                     <a:bodyPr/>
                     <a:lstStyle/>
                     <a:p>
-                      <a:pPr indent="0" marL="0">
+                      <a:pPr marL="0" indent="0">
                         <a:buNone/>
                       </a:pPr>
                       <a:r>
@@ -4695,7 +4555,7 @@
                       </a:endParaRPr>
                     </a:p>
                   </a:txBody>
-                  <a:tcPr marL="91440" marR="91440" marT="45720" marB="45720">
+                  <a:tcPr>
                     <a:lnL w="6350" cap="flat" cmpd="sng" algn="ctr">
                       <a:solidFill>
                         <a:srgbClr val="E8ECF1"/>
@@ -4742,7 +4602,7 @@
                     <a:bodyPr/>
                     <a:lstStyle/>
                     <a:p>
-                      <a:pPr indent="0" marL="0">
+                      <a:pPr marL="0" indent="0">
                         <a:buNone/>
                       </a:pPr>
                       <a:r>
@@ -4763,7 +4623,7 @@
                       </a:endParaRPr>
                     </a:p>
                   </a:txBody>
-                  <a:tcPr marL="91440" marR="91440" marT="45720" marB="45720">
+                  <a:tcPr>
                     <a:lnL w="6350" cap="flat" cmpd="sng" algn="ctr">
                       <a:solidFill>
                         <a:srgbClr val="E8ECF1"/>
@@ -4810,7 +4670,7 @@
                     <a:bodyPr/>
                     <a:lstStyle/>
                     <a:p>
-                      <a:pPr indent="0" marL="0">
+                      <a:pPr marL="0" indent="0">
                         <a:buNone/>
                       </a:pPr>
                       <a:r>
@@ -4831,7 +4691,7 @@
                       </a:endParaRPr>
                     </a:p>
                   </a:txBody>
-                  <a:tcPr marL="91440" marR="91440" marT="45720" marB="45720">
+                  <a:tcPr>
                     <a:lnL w="6350" cap="flat" cmpd="sng" algn="ctr">
                       <a:solidFill>
                         <a:srgbClr val="E8ECF1"/>
@@ -4878,7 +4738,7 @@
                     <a:bodyPr/>
                     <a:lstStyle/>
                     <a:p>
-                      <a:pPr indent="0" marL="0">
+                      <a:pPr marL="0" indent="0">
                         <a:buNone/>
                       </a:pPr>
                       <a:r>
@@ -4899,7 +4759,7 @@
                       </a:endParaRPr>
                     </a:p>
                   </a:txBody>
-                  <a:tcPr marL="91440" marR="91440" marT="45720" marB="45720">
+                  <a:tcPr>
                     <a:lnL w="6350" cap="flat" cmpd="sng" algn="ctr">
                       <a:solidFill>
                         <a:srgbClr val="E8ECF1"/>
@@ -4941,6 +4801,11 @@
                     </a:solidFill>
                   </a:tcPr>
                 </a:tc>
+                <a:extLst>
+                  <a:ext uri="{0D108BD9-81ED-4DB2-BD59-A6C34878D82A}">
+                    <a16:rowId xmlns:a16="http://schemas.microsoft.com/office/drawing/2014/main" val="10000"/>
+                  </a:ext>
+                </a:extLst>
               </a:tr>
               <a:tr h="228600">
                 <a:tc>
@@ -4948,7 +4813,7 @@
                     <a:bodyPr/>
                     <a:lstStyle/>
                     <a:p>
-                      <a:pPr indent="0" marL="0">
+                      <a:pPr marL="0" indent="0">
                         <a:buNone/>
                       </a:pPr>
                       <a:r>
@@ -4969,7 +4834,7 @@
                       </a:endParaRPr>
                     </a:p>
                   </a:txBody>
-                  <a:tcPr marL="91440" marR="91440" marT="45720" marB="45720">
+                  <a:tcPr>
                     <a:lnL w="6350" cap="flat" cmpd="sng" algn="ctr">
                       <a:solidFill>
                         <a:srgbClr val="E8ECF1"/>
@@ -5013,7 +4878,7 @@
                     <a:bodyPr/>
                     <a:lstStyle/>
                     <a:p>
-                      <a:pPr indent="0" marL="0">
+                      <a:pPr marL="0" indent="0">
                         <a:buNone/>
                       </a:pPr>
                       <a:r>
@@ -5034,7 +4899,7 @@
                       </a:endParaRPr>
                     </a:p>
                   </a:txBody>
-                  <a:tcPr marL="91440" marR="91440" marT="45720" marB="45720">
+                  <a:tcPr>
                     <a:lnL w="6350" cap="flat" cmpd="sng" algn="ctr">
                       <a:solidFill>
                         <a:srgbClr val="E8ECF1"/>
@@ -5078,7 +4943,7 @@
                     <a:bodyPr/>
                     <a:lstStyle/>
                     <a:p>
-                      <a:pPr indent="0" marL="0">
+                      <a:pPr marL="0" indent="0">
                         <a:buNone/>
                       </a:pPr>
                       <a:r>
@@ -5099,7 +4964,7 @@
                       </a:endParaRPr>
                     </a:p>
                   </a:txBody>
-                  <a:tcPr marL="91440" marR="91440" marT="45720" marB="45720">
+                  <a:tcPr>
                     <a:lnL w="6350" cap="flat" cmpd="sng" algn="ctr">
                       <a:solidFill>
                         <a:srgbClr val="E8ECF1"/>
@@ -5143,7 +5008,7 @@
                     <a:bodyPr/>
                     <a:lstStyle/>
                     <a:p>
-                      <a:pPr indent="0" marL="0">
+                      <a:pPr marL="0" indent="0">
                         <a:buNone/>
                       </a:pPr>
                       <a:r>
@@ -5164,7 +5029,7 @@
                       </a:endParaRPr>
                     </a:p>
                   </a:txBody>
-                  <a:tcPr marL="91440" marR="91440" marT="45720" marB="45720">
+                  <a:tcPr>
                     <a:lnL w="6350" cap="flat" cmpd="sng" algn="ctr">
                       <a:solidFill>
                         <a:srgbClr val="E8ECF1"/>
@@ -5208,7 +5073,7 @@
                     <a:bodyPr/>
                     <a:lstStyle/>
                     <a:p>
-                      <a:pPr indent="0" marL="0">
+                      <a:pPr marL="0" indent="0">
                         <a:buNone/>
                       </a:pPr>
                       <a:r>
@@ -5229,7 +5094,7 @@
                       </a:endParaRPr>
                     </a:p>
                   </a:txBody>
-                  <a:tcPr marL="91440" marR="91440" marT="45720" marB="45720">
+                  <a:tcPr>
                     <a:lnL w="6350" cap="flat" cmpd="sng" algn="ctr">
                       <a:solidFill>
                         <a:srgbClr val="E8ECF1"/>
@@ -5268,6 +5133,11 @@
                     </a:lnB>
                   </a:tcPr>
                 </a:tc>
+                <a:extLst>
+                  <a:ext uri="{0D108BD9-81ED-4DB2-BD59-A6C34878D82A}">
+                    <a16:rowId xmlns:a16="http://schemas.microsoft.com/office/drawing/2014/main" val="10001"/>
+                  </a:ext>
+                </a:extLst>
               </a:tr>
               <a:tr h="228600">
                 <a:tc>
@@ -5275,7 +5145,7 @@
                     <a:bodyPr/>
                     <a:lstStyle/>
                     <a:p>
-                      <a:pPr indent="0" marL="0">
+                      <a:pPr marL="0" indent="0">
                         <a:buNone/>
                       </a:pPr>
                       <a:r>
@@ -5296,7 +5166,7 @@
                       </a:endParaRPr>
                     </a:p>
                   </a:txBody>
-                  <a:tcPr marL="91440" marR="91440" marT="45720" marB="45720">
+                  <a:tcPr>
                     <a:lnL w="6350" cap="flat" cmpd="sng" algn="ctr">
                       <a:solidFill>
                         <a:srgbClr val="E8ECF1"/>
@@ -5340,7 +5210,7 @@
                     <a:bodyPr/>
                     <a:lstStyle/>
                     <a:p>
-                      <a:pPr indent="0" marL="0">
+                      <a:pPr marL="0" indent="0">
                         <a:buNone/>
                       </a:pPr>
                       <a:r>
@@ -5361,7 +5231,7 @@
                       </a:endParaRPr>
                     </a:p>
                   </a:txBody>
-                  <a:tcPr marL="91440" marR="91440" marT="45720" marB="45720">
+                  <a:tcPr>
                     <a:lnL w="6350" cap="flat" cmpd="sng" algn="ctr">
                       <a:solidFill>
                         <a:srgbClr val="E8ECF1"/>
@@ -5405,7 +5275,7 @@
                     <a:bodyPr/>
                     <a:lstStyle/>
                     <a:p>
-                      <a:pPr indent="0" marL="0">
+                      <a:pPr marL="0" indent="0">
                         <a:buNone/>
                       </a:pPr>
                       <a:r>
@@ -5426,7 +5296,7 @@
                       </a:endParaRPr>
                     </a:p>
                   </a:txBody>
-                  <a:tcPr marL="91440" marR="91440" marT="45720" marB="45720">
+                  <a:tcPr>
                     <a:lnL w="6350" cap="flat" cmpd="sng" algn="ctr">
                       <a:solidFill>
                         <a:srgbClr val="E8ECF1"/>
@@ -5470,7 +5340,7 @@
                     <a:bodyPr/>
                     <a:lstStyle/>
                     <a:p>
-                      <a:pPr indent="0" marL="0">
+                      <a:pPr marL="0" indent="0">
                         <a:buNone/>
                       </a:pPr>
                       <a:r>
@@ -5491,7 +5361,7 @@
                       </a:endParaRPr>
                     </a:p>
                   </a:txBody>
-                  <a:tcPr marL="91440" marR="91440" marT="45720" marB="45720">
+                  <a:tcPr>
                     <a:lnL w="6350" cap="flat" cmpd="sng" algn="ctr">
                       <a:solidFill>
                         <a:srgbClr val="E8ECF1"/>
@@ -5535,7 +5405,7 @@
                     <a:bodyPr/>
                     <a:lstStyle/>
                     <a:p>
-                      <a:pPr indent="0" marL="0">
+                      <a:pPr marL="0" indent="0">
                         <a:buNone/>
                       </a:pPr>
                       <a:r>
@@ -5556,7 +5426,7 @@
                       </a:endParaRPr>
                     </a:p>
                   </a:txBody>
-                  <a:tcPr marL="91440" marR="91440" marT="45720" marB="45720">
+                  <a:tcPr>
                     <a:lnL w="6350" cap="flat" cmpd="sng" algn="ctr">
                       <a:solidFill>
                         <a:srgbClr val="E8ECF1"/>
@@ -5595,6 +5465,11 @@
                     </a:lnB>
                   </a:tcPr>
                 </a:tc>
+                <a:extLst>
+                  <a:ext uri="{0D108BD9-81ED-4DB2-BD59-A6C34878D82A}">
+                    <a16:rowId xmlns:a16="http://schemas.microsoft.com/office/drawing/2014/main" val="10002"/>
+                  </a:ext>
+                </a:extLst>
               </a:tr>
               <a:tr h="228600">
                 <a:tc>
@@ -5602,7 +5477,7 @@
                     <a:bodyPr/>
                     <a:lstStyle/>
                     <a:p>
-                      <a:pPr indent="0" marL="0">
+                      <a:pPr marL="0" indent="0">
                         <a:buNone/>
                       </a:pPr>
                       <a:r>
@@ -5623,7 +5498,7 @@
                       </a:endParaRPr>
                     </a:p>
                   </a:txBody>
-                  <a:tcPr marL="91440" marR="91440" marT="45720" marB="45720">
+                  <a:tcPr>
                     <a:lnL w="6350" cap="flat" cmpd="sng" algn="ctr">
                       <a:solidFill>
                         <a:srgbClr val="E8ECF1"/>
@@ -5667,7 +5542,7 @@
                     <a:bodyPr/>
                     <a:lstStyle/>
                     <a:p>
-                      <a:pPr indent="0" marL="0">
+                      <a:pPr marL="0" indent="0">
                         <a:buNone/>
                       </a:pPr>
                       <a:r>
@@ -5688,7 +5563,7 @@
                       </a:endParaRPr>
                     </a:p>
                   </a:txBody>
-                  <a:tcPr marL="91440" marR="91440" marT="45720" marB="45720">
+                  <a:tcPr>
                     <a:lnL w="6350" cap="flat" cmpd="sng" algn="ctr">
                       <a:solidFill>
                         <a:srgbClr val="E8ECF1"/>
@@ -5732,7 +5607,7 @@
                     <a:bodyPr/>
                     <a:lstStyle/>
                     <a:p>
-                      <a:pPr indent="0" marL="0">
+                      <a:pPr marL="0" indent="0">
                         <a:buNone/>
                       </a:pPr>
                       <a:r>
@@ -5753,7 +5628,7 @@
                       </a:endParaRPr>
                     </a:p>
                   </a:txBody>
-                  <a:tcPr marL="91440" marR="91440" marT="45720" marB="45720">
+                  <a:tcPr>
                     <a:lnL w="6350" cap="flat" cmpd="sng" algn="ctr">
                       <a:solidFill>
                         <a:srgbClr val="E8ECF1"/>
@@ -5797,7 +5672,7 @@
                     <a:bodyPr/>
                     <a:lstStyle/>
                     <a:p>
-                      <a:pPr indent="0" marL="0">
+                      <a:pPr marL="0" indent="0">
                         <a:buNone/>
                       </a:pPr>
                       <a:r>
@@ -5818,7 +5693,7 @@
                       </a:endParaRPr>
                     </a:p>
                   </a:txBody>
-                  <a:tcPr marL="91440" marR="91440" marT="45720" marB="45720">
+                  <a:tcPr>
                     <a:lnL w="6350" cap="flat" cmpd="sng" algn="ctr">
                       <a:solidFill>
                         <a:srgbClr val="E8ECF1"/>
@@ -5862,7 +5737,7 @@
                     <a:bodyPr/>
                     <a:lstStyle/>
                     <a:p>
-                      <a:pPr indent="0" marL="0">
+                      <a:pPr marL="0" indent="0">
                         <a:buNone/>
                       </a:pPr>
                       <a:r>
@@ -5883,7 +5758,7 @@
                       </a:endParaRPr>
                     </a:p>
                   </a:txBody>
-                  <a:tcPr marL="91440" marR="91440" marT="45720" marB="45720">
+                  <a:tcPr>
                     <a:lnL w="6350" cap="flat" cmpd="sng" algn="ctr">
                       <a:solidFill>
                         <a:srgbClr val="E8ECF1"/>
@@ -5922,6 +5797,11 @@
                     </a:lnB>
                   </a:tcPr>
                 </a:tc>
+                <a:extLst>
+                  <a:ext uri="{0D108BD9-81ED-4DB2-BD59-A6C34878D82A}">
+                    <a16:rowId xmlns:a16="http://schemas.microsoft.com/office/drawing/2014/main" val="10003"/>
+                  </a:ext>
+                </a:extLst>
               </a:tr>
             </a:tbl>
           </a:graphicData>
@@ -5968,7 +5848,7 @@
           <a:bodyPr wrap="square" lIns="0" tIns="0" rIns="0" bIns="0" rtlCol="0" anchor="ctr"/>
           <a:lstStyle/>
           <a:p>
-            <a:pPr indent="0" marL="0">
+            <a:pPr marL="0" indent="0">
               <a:buNone/>
             </a:pPr>
             <a:r>
@@ -5982,9 +5862,6 @@
               </a:rPr>
               <a:t>样本外结论：</a:t>
             </a:r>
-            <a:pPr indent="0" marL="0">
-              <a:buNone/>
-            </a:pPr>
             <a:r>
               <a:rPr lang="en-US" sz="1050" dirty="0">
                 <a:solidFill>
@@ -5996,9 +5873,6 @@
               </a:rPr>
               <a:t>5只标的超额全部为正。Sharpe从1.6-1.8衰减至1.2-1.5，但仍显著高于基准(0.5-0.7)。</a:t>
             </a:r>
-            <a:pPr indent="0" marL="0">
-              <a:buNone/>
-            </a:pPr>
             <a:r>
               <a:rPr lang="en-US" sz="1050" b="1" dirty="0">
                 <a:solidFill>
@@ -6016,7 +5890,7 @@
       </p:sp>
       <p:sp>
         <p:nvSpPr>
-          <p:cNvPr id="11" name="Text 6"/>
+          <p:cNvPr id="4" name="Text 6"/>
           <p:cNvSpPr/>
           <p:nvPr/>
         </p:nvSpPr>
@@ -6035,7 +5909,7 @@
           <a:bodyPr wrap="square" lIns="0" tIns="0" rIns="0" bIns="0" rtlCol="0" anchor="ctr"/>
           <a:lstStyle/>
           <a:p>
-            <a:pPr indent="0" marL="0">
+            <a:pPr marL="0" indent="0">
               <a:buNone/>
             </a:pPr>
             <a:r>
@@ -6074,7 +5948,7 @@
           <a:bodyPr wrap="square" lIns="0" tIns="0" rIns="0" bIns="0" rtlCol="0" anchor="ctr"/>
           <a:lstStyle/>
           <a:p>
-            <a:pPr indent="0" marL="0">
+            <a:pPr marL="0" indent="0">
               <a:buNone/>
             </a:pPr>
             <a:r>
@@ -6113,7 +5987,7 @@
           <a:bodyPr wrap="square" rtlCol="0" anchor="ctr"/>
           <a:lstStyle/>
           <a:p>
-            <a:pPr algn="r" indent="0" marL="0">
+            <a:pPr marL="0" indent="0" algn="r">
               <a:buNone/>
             </a:pPr>
             <a:r>
@@ -6147,6 +6021,7 @@
         <a:solidFill>
           <a:srgbClr val="F7F9FC"/>
         </a:solidFill>
+        <a:effectLst/>
       </p:bgPr>
     </p:bg>
     <p:spTree>
@@ -6184,7 +6059,7 @@
           <a:bodyPr wrap="square" lIns="0" tIns="0" rIns="0" bIns="0" rtlCol="0" anchor="ctr"/>
           <a:lstStyle/>
           <a:p>
-            <a:pPr indent="0" marL="0">
+            <a:pPr marL="0" indent="0">
               <a:buNone/>
             </a:pPr>
             <a:r>
@@ -6221,7 +6096,7 @@
           </a:solidFill>
           <a:ln/>
           <a:effectLst>
-            <a:outerShdw sx="100000" sy="100000" kx="0" ky="0" algn="bl" rotWithShape="0" blurRad="50800" dist="19050" dir="8100000">
+            <a:outerShdw blurRad="50800" dist="19050" dir="8100000" algn="bl" rotWithShape="0">
               <a:srgbClr val="000000">
                 <a:alpha val="8000"/>
               </a:srgbClr>
@@ -6270,7 +6145,7 @@
           <a:bodyPr wrap="square" lIns="0" tIns="0" rIns="0" bIns="0" rtlCol="0" anchor="ctr"/>
           <a:lstStyle/>
           <a:p>
-            <a:pPr indent="0" marL="0">
+            <a:pPr marL="0" indent="0">
               <a:buNone/>
             </a:pPr>
             <a:r>
@@ -6309,7 +6184,7 @@
           <a:bodyPr wrap="square" lIns="0" tIns="0" rIns="0" bIns="0" rtlCol="0" anchor="t"/>
           <a:lstStyle/>
           <a:p>
-            <a:pPr indent="0" marL="0">
+            <a:pPr marL="0" indent="0">
               <a:buNone/>
             </a:pPr>
             <a:r>
@@ -6326,7 +6201,7 @@
             <a:endParaRPr lang="en-US" sz="1000" dirty="0"/>
           </a:p>
           <a:p>
-            <a:pPr indent="0" marL="0">
+            <a:pPr marL="0" indent="0">
               <a:buNone/>
             </a:pPr>
             <a:r>
@@ -6343,7 +6218,7 @@
             <a:endParaRPr lang="en-US" sz="1000" dirty="0"/>
           </a:p>
           <a:p>
-            <a:pPr indent="0" marL="0">
+            <a:pPr marL="0" indent="0">
               <a:buNone/>
             </a:pPr>
             <a:r>
@@ -6360,7 +6235,7 @@
             <a:endParaRPr lang="en-US" sz="1000" dirty="0"/>
           </a:p>
           <a:p>
-            <a:pPr indent="0" marL="0">
+            <a:pPr marL="0" indent="0">
               <a:buNone/>
             </a:pPr>
             <a:r>
@@ -6377,7 +6252,7 @@
             <a:endParaRPr lang="en-US" sz="1000" dirty="0"/>
           </a:p>
           <a:p>
-            <a:pPr indent="0" marL="0">
+            <a:pPr marL="0" indent="0">
               <a:buNone/>
             </a:pPr>
             <a:r>
@@ -6414,7 +6289,7 @@
           </a:solidFill>
           <a:ln/>
           <a:effectLst>
-            <a:outerShdw sx="100000" sy="100000" kx="0" ky="0" algn="bl" rotWithShape="0" blurRad="50800" dist="19050" dir="8100000">
+            <a:outerShdw blurRad="50800" dist="19050" dir="8100000" algn="bl" rotWithShape="0">
               <a:srgbClr val="000000">
                 <a:alpha val="8000"/>
               </a:srgbClr>
@@ -6463,7 +6338,7 @@
           <a:bodyPr wrap="square" lIns="0" tIns="0" rIns="0" bIns="0" rtlCol="0" anchor="ctr"/>
           <a:lstStyle/>
           <a:p>
-            <a:pPr indent="0" marL="0">
+            <a:pPr marL="0" indent="0">
               <a:buNone/>
             </a:pPr>
             <a:r>
@@ -6502,7 +6377,7 @@
           <a:bodyPr wrap="square" lIns="0" tIns="0" rIns="0" bIns="0" rtlCol="0" anchor="t"/>
           <a:lstStyle/>
           <a:p>
-            <a:pPr indent="0" marL="0">
+            <a:pPr marL="0" indent="0">
               <a:buNone/>
             </a:pPr>
             <a:r>
@@ -6519,7 +6394,7 @@
             <a:endParaRPr lang="en-US" sz="1000" dirty="0"/>
           </a:p>
           <a:p>
-            <a:pPr indent="0" marL="0">
+            <a:pPr marL="0" indent="0">
               <a:buNone/>
             </a:pPr>
             <a:r>
@@ -6536,7 +6411,7 @@
             <a:endParaRPr lang="en-US" sz="1000" dirty="0"/>
           </a:p>
           <a:p>
-            <a:pPr indent="0" marL="0">
+            <a:pPr marL="0" indent="0">
               <a:buNone/>
             </a:pPr>
             <a:r>
@@ -6553,7 +6428,7 @@
             <a:endParaRPr lang="en-US" sz="1000" dirty="0"/>
           </a:p>
           <a:p>
-            <a:pPr indent="0" marL="0">
+            <a:pPr marL="0" indent="0">
               <a:buNone/>
             </a:pPr>
             <a:r>
@@ -6570,7 +6445,7 @@
             <a:endParaRPr lang="en-US" sz="1000" dirty="0"/>
           </a:p>
           <a:p>
-            <a:pPr indent="0" marL="0">
+            <a:pPr marL="0" indent="0">
               <a:buNone/>
             </a:pPr>
             <a:r>
@@ -6607,7 +6482,7 @@
           </a:solidFill>
           <a:ln/>
           <a:effectLst>
-            <a:outerShdw sx="100000" sy="100000" kx="0" ky="0" algn="bl" rotWithShape="0" blurRad="50800" dist="19050" dir="8100000">
+            <a:outerShdw blurRad="50800" dist="19050" dir="8100000" algn="bl" rotWithShape="0">
               <a:srgbClr val="000000">
                 <a:alpha val="8000"/>
               </a:srgbClr>
@@ -6656,7 +6531,7 @@
           <a:bodyPr wrap="square" lIns="0" tIns="0" rIns="0" bIns="0" rtlCol="0" anchor="ctr"/>
           <a:lstStyle/>
           <a:p>
-            <a:pPr indent="0" marL="0">
+            <a:pPr marL="0" indent="0">
               <a:buNone/>
             </a:pPr>
             <a:r>
@@ -6695,7 +6570,7 @@
           <a:bodyPr wrap="square" lIns="0" tIns="0" rIns="0" bIns="0" rtlCol="0" anchor="t"/>
           <a:lstStyle/>
           <a:p>
-            <a:pPr indent="0" marL="0">
+            <a:pPr marL="0" indent="0">
               <a:buNone/>
             </a:pPr>
             <a:r>
@@ -6712,7 +6587,7 @@
             <a:endParaRPr lang="en-US" sz="1000" dirty="0"/>
           </a:p>
           <a:p>
-            <a:pPr indent="0" marL="0">
+            <a:pPr marL="0" indent="0">
               <a:buNone/>
             </a:pPr>
             <a:r>
@@ -6729,7 +6604,7 @@
             <a:endParaRPr lang="en-US" sz="1000" dirty="0"/>
           </a:p>
           <a:p>
-            <a:pPr indent="0" marL="0">
+            <a:pPr marL="0" indent="0">
               <a:buNone/>
             </a:pPr>
             <a:r>
@@ -6746,7 +6621,7 @@
             <a:endParaRPr lang="en-US" sz="1000" dirty="0"/>
           </a:p>
           <a:p>
-            <a:pPr indent="0" marL="0">
+            <a:pPr marL="0" indent="0">
               <a:buNone/>
             </a:pPr>
             <a:r>
@@ -6763,7 +6638,7 @@
             <a:endParaRPr lang="en-US" sz="1000" dirty="0"/>
           </a:p>
           <a:p>
-            <a:pPr indent="0" marL="0">
+            <a:pPr marL="0" indent="0">
               <a:buNone/>
             </a:pPr>
             <a:r>
@@ -6800,7 +6675,7 @@
           </a:solidFill>
           <a:ln/>
           <a:effectLst>
-            <a:outerShdw sx="100000" sy="100000" kx="0" ky="0" algn="bl" rotWithShape="0" blurRad="50800" dist="19050" dir="8100000">
+            <a:outerShdw blurRad="50800" dist="19050" dir="8100000" algn="bl" rotWithShape="0">
               <a:srgbClr val="000000">
                 <a:alpha val="8000"/>
               </a:srgbClr>
@@ -6849,7 +6724,7 @@
           <a:bodyPr wrap="square" lIns="0" tIns="0" rIns="0" bIns="0" rtlCol="0" anchor="ctr"/>
           <a:lstStyle/>
           <a:p>
-            <a:pPr indent="0" marL="0">
+            <a:pPr marL="0" indent="0">
               <a:buNone/>
             </a:pPr>
             <a:r>
@@ -6888,7 +6763,7 @@
           <a:bodyPr wrap="square" lIns="0" tIns="0" rIns="0" bIns="0" rtlCol="0" anchor="t"/>
           <a:lstStyle/>
           <a:p>
-            <a:pPr indent="0" marL="0">
+            <a:pPr marL="0" indent="0">
               <a:buNone/>
             </a:pPr>
             <a:r>
@@ -6905,7 +6780,7 @@
             <a:endParaRPr lang="en-US" sz="1300" dirty="0"/>
           </a:p>
           <a:p>
-            <a:pPr indent="0" marL="0">
+            <a:pPr marL="0" indent="0">
               <a:buNone/>
             </a:pPr>
             <a:r>
@@ -6922,7 +6797,7 @@
             <a:endParaRPr lang="en-US" sz="1300" dirty="0"/>
           </a:p>
           <a:p>
-            <a:pPr indent="0" marL="0">
+            <a:pPr marL="0" indent="0">
               <a:buNone/>
             </a:pPr>
             <a:r>
@@ -6939,13 +6814,13 @@
             <a:endParaRPr lang="en-US" sz="1300" dirty="0"/>
           </a:p>
           <a:p>
-            <a:pPr indent="0" marL="0">
+            <a:pPr marL="0" indent="0">
               <a:buNone/>
             </a:pPr>
             <a:endParaRPr lang="en-US" sz="1300" dirty="0"/>
           </a:p>
           <a:p>
-            <a:pPr indent="0" marL="0">
+            <a:pPr marL="0" indent="0">
               <a:buNone/>
             </a:pPr>
             <a:r>
@@ -6962,7 +6837,7 @@
             <a:endParaRPr lang="en-US" sz="1300" dirty="0"/>
           </a:p>
           <a:p>
-            <a:pPr indent="0" marL="0">
+            <a:pPr marL="0" indent="0">
               <a:buNone/>
             </a:pPr>
             <a:r>
@@ -6979,7 +6854,7 @@
             <a:endParaRPr lang="en-US" sz="1300" dirty="0"/>
           </a:p>
           <a:p>
-            <a:pPr indent="0" marL="0">
+            <a:pPr marL="0" indent="0">
               <a:buNone/>
             </a:pPr>
             <a:r>
@@ -7018,7 +6893,7 @@
           <a:bodyPr wrap="square" lIns="0" tIns="0" rIns="0" bIns="0" rtlCol="0" anchor="ctr"/>
           <a:lstStyle/>
           <a:p>
-            <a:pPr indent="0" marL="0">
+            <a:pPr marL="0" indent="0">
               <a:buNone/>
             </a:pPr>
             <a:r>
@@ -7057,7 +6932,7 @@
           <a:bodyPr wrap="square" lIns="0" tIns="0" rIns="0" bIns="0" rtlCol="0" anchor="t"/>
           <a:lstStyle/>
           <a:p>
-            <a:pPr indent="0" marL="0">
+            <a:pPr marL="0" indent="0">
               <a:buNone/>
             </a:pPr>
             <a:r>
@@ -7074,7 +6949,7 @@
             <a:endParaRPr lang="en-US" sz="950" dirty="0"/>
           </a:p>
           <a:p>
-            <a:pPr indent="0" marL="0">
+            <a:pPr marL="0" indent="0">
               <a:buNone/>
             </a:pPr>
             <a:r>
@@ -7091,7 +6966,7 @@
             <a:endParaRPr lang="en-US" sz="950" dirty="0"/>
           </a:p>
           <a:p>
-            <a:pPr indent="0" marL="0">
+            <a:pPr marL="0" indent="0">
               <a:buNone/>
             </a:pPr>
             <a:r>
@@ -7108,7 +6983,7 @@
             <a:endParaRPr lang="en-US" sz="950" dirty="0"/>
           </a:p>
           <a:p>
-            <a:pPr indent="0" marL="0">
+            <a:pPr marL="0" indent="0">
               <a:buNone/>
             </a:pPr>
             <a:r>
@@ -7125,7 +7000,7 @@
             <a:endParaRPr lang="en-US" sz="950" dirty="0"/>
           </a:p>
           <a:p>
-            <a:pPr indent="0" marL="0">
+            <a:pPr marL="0" indent="0">
               <a:buNone/>
             </a:pPr>
             <a:r>
@@ -7142,7 +7017,7 @@
             <a:endParaRPr lang="en-US" sz="950" dirty="0"/>
           </a:p>
           <a:p>
-            <a:pPr indent="0" marL="0">
+            <a:pPr marL="0" indent="0">
               <a:buNone/>
             </a:pPr>
             <a:r>
@@ -7181,7 +7056,7 @@
           <a:bodyPr wrap="square" lIns="0" tIns="0" rIns="0" bIns="0" rtlCol="0" anchor="ctr"/>
           <a:lstStyle/>
           <a:p>
-            <a:pPr indent="0" marL="0">
+            <a:pPr marL="0" indent="0">
               <a:buNone/>
             </a:pPr>
             <a:r>
@@ -7220,7 +7095,7 @@
           <a:bodyPr wrap="square" rtlCol="0" anchor="ctr"/>
           <a:lstStyle/>
           <a:p>
-            <a:pPr algn="r" indent="0" marL="0">
+            <a:pPr marL="0" indent="0" algn="r">
               <a:buNone/>
             </a:pPr>
             <a:r>
@@ -7254,6 +7129,7 @@
         <a:solidFill>
           <a:srgbClr val="F7F9FC"/>
         </a:solidFill>
+        <a:effectLst/>
       </p:bgPr>
     </p:bg>
     <p:spTree>
@@ -7291,7 +7167,7 @@
           <a:bodyPr wrap="square" lIns="0" tIns="0" rIns="0" bIns="0" rtlCol="0" anchor="ctr"/>
           <a:lstStyle/>
           <a:p>
-            <a:pPr indent="0" marL="0">
+            <a:pPr marL="0" indent="0">
               <a:buNone/>
             </a:pPr>
             <a:r>
@@ -7330,7 +7206,7 @@
           <a:bodyPr wrap="square" lIns="0" tIns="0" rIns="0" bIns="0" rtlCol="0" anchor="ctr"/>
           <a:lstStyle/>
           <a:p>
-            <a:pPr indent="0" marL="0">
+            <a:pPr marL="0" indent="0">
               <a:buNone/>
             </a:pPr>
             <a:r>
@@ -7389,7 +7265,7 @@
           <a:bodyPr wrap="square" lIns="0" tIns="0" rIns="0" bIns="0" rtlCol="0" anchor="ctr"/>
           <a:lstStyle/>
           <a:p>
-            <a:pPr algn="ctr" indent="0" marL="0">
+            <a:pPr marL="0" indent="0" algn="ctr">
               <a:buNone/>
             </a:pPr>
             <a:r>
@@ -7428,7 +7304,7 @@
           <a:bodyPr wrap="square" lIns="0" tIns="0" rIns="0" bIns="0" rtlCol="0" anchor="ctr"/>
           <a:lstStyle/>
           <a:p>
-            <a:pPr indent="0" marL="0">
+            <a:pPr marL="0" indent="0">
               <a:buNone/>
             </a:pPr>
             <a:r>
@@ -7442,9 +7318,6 @@
               </a:rPr>
               <a:t>复合信号全面优于单一指标</a:t>
             </a:r>
-            <a:pPr indent="0" marL="0">
-              <a:buNone/>
-            </a:pPr>
             <a:r>
               <a:rPr lang="en-US" sz="1000" dirty="0">
                 <a:solidFill>
@@ -7501,7 +7374,7 @@
           <a:bodyPr wrap="square" lIns="0" tIns="0" rIns="0" bIns="0" rtlCol="0" anchor="ctr"/>
           <a:lstStyle/>
           <a:p>
-            <a:pPr algn="ctr" indent="0" marL="0">
+            <a:pPr marL="0" indent="0" algn="ctr">
               <a:buNone/>
             </a:pPr>
             <a:r>
@@ -7540,7 +7413,7 @@
           <a:bodyPr wrap="square" lIns="0" tIns="0" rIns="0" bIns="0" rtlCol="0" anchor="ctr"/>
           <a:lstStyle/>
           <a:p>
-            <a:pPr indent="0" marL="0">
+            <a:pPr marL="0" indent="0">
               <a:buNone/>
             </a:pPr>
             <a:r>
@@ -7554,9 +7427,6 @@
               </a:rPr>
               <a:t>动态仓位有效控制回撤</a:t>
             </a:r>
-            <a:pPr indent="0" marL="0">
-              <a:buNone/>
-            </a:pPr>
             <a:r>
               <a:rPr lang="en-US" sz="1000" dirty="0">
                 <a:solidFill>
@@ -7613,7 +7483,7 @@
           <a:bodyPr wrap="square" lIns="0" tIns="0" rIns="0" bIns="0" rtlCol="0" anchor="ctr"/>
           <a:lstStyle/>
           <a:p>
-            <a:pPr algn="ctr" indent="0" marL="0">
+            <a:pPr marL="0" indent="0" algn="ctr">
               <a:buNone/>
             </a:pPr>
             <a:r>
@@ -7652,7 +7522,7 @@
           <a:bodyPr wrap="square" lIns="0" tIns="0" rIns="0" bIns="0" rtlCol="0" anchor="ctr"/>
           <a:lstStyle/>
           <a:p>
-            <a:pPr indent="0" marL="0">
+            <a:pPr marL="0" indent="0">
               <a:buNone/>
             </a:pPr>
             <a:r>
@@ -7666,9 +7536,6 @@
               </a:rPr>
               <a:t>低换手是核心优势</a:t>
             </a:r>
-            <a:pPr indent="0" marL="0">
-              <a:buNone/>
-            </a:pPr>
             <a:r>
               <a:rPr lang="en-US" sz="1000" dirty="0">
                 <a:solidFill>
@@ -7725,7 +7592,7 @@
           <a:bodyPr wrap="square" lIns="0" tIns="0" rIns="0" bIns="0" rtlCol="0" anchor="ctr"/>
           <a:lstStyle/>
           <a:p>
-            <a:pPr algn="ctr" indent="0" marL="0">
+            <a:pPr marL="0" indent="0" algn="ctr">
               <a:buNone/>
             </a:pPr>
             <a:r>
@@ -7764,7 +7631,7 @@
           <a:bodyPr wrap="square" lIns="0" tIns="0" rIns="0" bIns="0" rtlCol="0" anchor="ctr"/>
           <a:lstStyle/>
           <a:p>
-            <a:pPr indent="0" marL="0">
+            <a:pPr marL="0" indent="0">
               <a:buNone/>
             </a:pPr>
             <a:r>
@@ -7778,9 +7645,6 @@
               </a:rPr>
               <a:t>策略具有初步稳健性</a:t>
             </a:r>
-            <a:pPr indent="0" marL="0">
-              <a:buNone/>
-            </a:pPr>
             <a:r>
               <a:rPr lang="en-US" sz="1000" dirty="0">
                 <a:solidFill>
@@ -7837,7 +7701,7 @@
           <a:bodyPr wrap="square" lIns="0" tIns="0" rIns="0" bIns="0" rtlCol="0" anchor="ctr"/>
           <a:lstStyle/>
           <a:p>
-            <a:pPr algn="ctr" indent="0" marL="0">
+            <a:pPr marL="0" indent="0" algn="ctr">
               <a:buNone/>
             </a:pPr>
             <a:r>
@@ -7876,7 +7740,7 @@
           <a:bodyPr wrap="square" lIns="0" tIns="0" rIns="0" bIns="0" rtlCol="0" anchor="ctr"/>
           <a:lstStyle/>
           <a:p>
-            <a:pPr indent="0" marL="0">
+            <a:pPr marL="0" indent="0">
               <a:buNone/>
             </a:pPr>
             <a:r>
@@ -7890,9 +7754,6 @@
               </a:rPr>
               <a:t>端到端闭环</a:t>
             </a:r>
-            <a:pPr indent="0" marL="0">
-              <a:buNone/>
-            </a:pPr>
             <a:r>
               <a:rPr lang="en-US" sz="1000" dirty="0">
                 <a:solidFill>
@@ -7949,7 +7810,7 @@
           <a:bodyPr wrap="square" lIns="0" tIns="0" rIns="0" bIns="0" rtlCol="0" anchor="ctr"/>
           <a:lstStyle/>
           <a:p>
-            <a:pPr indent="0" marL="0">
+            <a:pPr marL="0" indent="0">
               <a:buNone/>
             </a:pPr>
             <a:r>
@@ -7988,7 +7849,7 @@
           <a:bodyPr wrap="square" lIns="0" tIns="0" rIns="0" bIns="0" rtlCol="0" anchor="t"/>
           <a:lstStyle/>
           <a:p>
-            <a:pPr indent="0" marL="0">
+            <a:pPr marL="0" indent="0">
               <a:buNone/>
             </a:pPr>
             <a:r>
@@ -8005,7 +7866,7 @@
             <a:endParaRPr lang="en-US" sz="950" dirty="0"/>
           </a:p>
           <a:p>
-            <a:pPr indent="0" marL="0">
+            <a:pPr marL="0" indent="0">
               <a:buNone/>
             </a:pPr>
             <a:r>
@@ -8022,7 +7883,7 @@
             <a:endParaRPr lang="en-US" sz="950" dirty="0"/>
           </a:p>
           <a:p>
-            <a:pPr indent="0" marL="0">
+            <a:pPr marL="0" indent="0">
               <a:buNone/>
             </a:pPr>
             <a:r>
@@ -8039,7 +7900,7 @@
             <a:endParaRPr lang="en-US" sz="950" dirty="0"/>
           </a:p>
           <a:p>
-            <a:pPr indent="0" marL="0">
+            <a:pPr marL="0" indent="0">
               <a:buNone/>
             </a:pPr>
             <a:r>
@@ -8056,7 +7917,7 @@
             <a:endParaRPr lang="en-US" sz="950" dirty="0"/>
           </a:p>
           <a:p>
-            <a:pPr indent="0" marL="0">
+            <a:pPr marL="0" indent="0">
               <a:buNone/>
             </a:pPr>
             <a:r>
@@ -8073,7 +7934,7 @@
             <a:endParaRPr lang="en-US" sz="950" dirty="0"/>
           </a:p>
           <a:p>
-            <a:pPr indent="0" marL="0">
+            <a:pPr marL="0" indent="0">
               <a:buNone/>
             </a:pPr>
             <a:r>
@@ -8112,7 +7973,7 @@
           <a:bodyPr wrap="square" lIns="0" tIns="0" rIns="0" bIns="0" rtlCol="0" anchor="ctr"/>
           <a:lstStyle/>
           <a:p>
-            <a:pPr indent="0" marL="0">
+            <a:pPr marL="0" indent="0">
               <a:buNone/>
             </a:pPr>
             <a:r>
@@ -8151,7 +8012,7 @@
           <a:bodyPr wrap="square" rtlCol="0" anchor="ctr"/>
           <a:lstStyle/>
           <a:p>
-            <a:pPr algn="r" indent="0" marL="0">
+            <a:pPr marL="0" indent="0" algn="r">
               <a:buNone/>
             </a:pPr>
             <a:r>
@@ -8185,6 +8046,7 @@
         <a:solidFill>
           <a:srgbClr val="0B1D3A"/>
         </a:solidFill>
+        <a:effectLst/>
       </p:bgPr>
     </p:bg>
     <p:spTree>
@@ -8242,7 +8104,7 @@
           <a:bodyPr wrap="square" lIns="0" tIns="0" rIns="0" bIns="0" rtlCol="0" anchor="ctr"/>
           <a:lstStyle/>
           <a:p>
-            <a:pPr indent="0" marL="0">
+            <a:pPr marL="0" indent="0">
               <a:buNone/>
             </a:pPr>
             <a:r>
@@ -8281,7 +8143,7 @@
           <a:bodyPr wrap="square" lIns="0" tIns="0" rIns="0" bIns="0" rtlCol="0" anchor="ctr"/>
           <a:lstStyle/>
           <a:p>
-            <a:pPr indent="0" marL="0">
+            <a:pPr marL="0" indent="0">
               <a:buNone/>
             </a:pPr>
             <a:r>
@@ -8340,7 +8202,7 @@
           <a:bodyPr wrap="square" lIns="0" tIns="0" rIns="0" bIns="0" rtlCol="0" anchor="t"/>
           <a:lstStyle/>
           <a:p>
-            <a:pPr indent="0" marL="0">
+            <a:pPr marL="0" indent="0">
               <a:buNone/>
             </a:pPr>
             <a:r>
@@ -8354,9 +8216,6 @@
               </a:rPr>
               <a:t>GitHub：</a:t>
             </a:r>
-            <a:pPr indent="0" marL="0">
-              <a:buNone/>
-            </a:pPr>
             <a:r>
               <a:rPr lang="en-US" sz="1300" dirty="0">
                 <a:solidFill>
@@ -8368,9 +8227,6 @@
               </a:rPr>
               <a:t>github.com/7changecahng/quant-strategy</a:t>
             </a:r>
-            <a:pPr indent="0" marL="0">
-              <a:buNone/>
-            </a:pPr>
             <a:r>
               <a:rPr lang="en-US" sz="1100" dirty="0">
                 <a:solidFill>
@@ -8382,13 +8238,10 @@
               </a:rPr>
               <a:t>  (代码 + README + 39个测试)</a:t>
             </a:r>
-            <a:pPr indent="0" marL="0">
-              <a:buNone/>
-            </a:pPr>
             <a:endParaRPr lang="en-US" sz="1300" dirty="0"/>
           </a:p>
           <a:p>
-            <a:pPr indent="0" marL="0">
+            <a:pPr marL="0" indent="0">
               <a:buNone/>
             </a:pPr>
             <a:r>
@@ -8402,9 +8255,6 @@
               </a:rPr>
               <a:t>Dashboard：</a:t>
             </a:r>
-            <a:pPr indent="0" marL="0">
-              <a:buNone/>
-            </a:pPr>
             <a:r>
               <a:rPr lang="en-US" sz="1200" dirty="0">
                 <a:solidFill>
@@ -8416,13 +8266,10 @@
               </a:rPr>
               <a:t>quant-strategy-3nkwe9fzfgwskusbnx8lwz.streamlit.app</a:t>
             </a:r>
-            <a:pPr indent="0" marL="0">
-              <a:buNone/>
-            </a:pPr>
             <a:endParaRPr lang="en-US" sz="1300" dirty="0"/>
           </a:p>
           <a:p>
-            <a:pPr indent="0" marL="0">
+            <a:pPr marL="0" indent="0">
               <a:buNone/>
             </a:pPr>
             <a:r>
@@ -8461,7 +8308,7 @@
           <a:bodyPr wrap="square" rtlCol="0" anchor="ctr"/>
           <a:lstStyle/>
           <a:p>
-            <a:pPr algn="r" indent="0" marL="0">
+            <a:pPr marL="0" indent="0" algn="r">
               <a:buNone/>
             </a:pPr>
             <a:r>
@@ -8495,6 +8342,7 @@
         <a:solidFill>
           <a:srgbClr val="F7F9FC"/>
         </a:solidFill>
+        <a:effectLst/>
       </p:bgPr>
     </p:bg>
     <p:spTree>
@@ -8532,7 +8380,7 @@
           <a:bodyPr wrap="square" lIns="0" tIns="0" rIns="0" bIns="0" rtlCol="0" anchor="ctr"/>
           <a:lstStyle/>
           <a:p>
-            <a:pPr indent="0" marL="0">
+            <a:pPr marL="0" indent="0">
               <a:buNone/>
             </a:pPr>
             <a:r>
@@ -8591,7 +8439,7 @@
           <a:bodyPr wrap="square" lIns="0" tIns="0" rIns="0" bIns="0" rtlCol="0" anchor="ctr"/>
           <a:lstStyle/>
           <a:p>
-            <a:pPr algn="ctr" indent="0" marL="0">
+            <a:pPr marL="0" indent="0" algn="ctr">
               <a:buNone/>
             </a:pPr>
             <a:r>
@@ -8630,7 +8478,7 @@
           <a:bodyPr wrap="square" lIns="0" tIns="0" rIns="0" bIns="0" rtlCol="0" anchor="ctr"/>
           <a:lstStyle/>
           <a:p>
-            <a:pPr indent="0" marL="0">
+            <a:pPr marL="0" indent="0">
               <a:buNone/>
             </a:pPr>
             <a:r>
@@ -8669,7 +8517,7 @@
           <a:bodyPr wrap="square" lIns="0" tIns="0" rIns="0" bIns="0" rtlCol="0" anchor="ctr"/>
           <a:lstStyle/>
           <a:p>
-            <a:pPr indent="0" marL="0">
+            <a:pPr marL="0" indent="0">
               <a:buNone/>
             </a:pPr>
             <a:r>
@@ -8751,7 +8599,7 @@
           <a:bodyPr wrap="square" lIns="0" tIns="0" rIns="0" bIns="0" rtlCol="0" anchor="ctr"/>
           <a:lstStyle/>
           <a:p>
-            <a:pPr algn="ctr" indent="0" marL="0">
+            <a:pPr marL="0" indent="0" algn="ctr">
               <a:buNone/>
             </a:pPr>
             <a:r>
@@ -8790,7 +8638,7 @@
           <a:bodyPr wrap="square" lIns="0" tIns="0" rIns="0" bIns="0" rtlCol="0" anchor="ctr"/>
           <a:lstStyle/>
           <a:p>
-            <a:pPr indent="0" marL="0">
+            <a:pPr marL="0" indent="0">
               <a:buNone/>
             </a:pPr>
             <a:r>
@@ -8829,7 +8677,7 @@
           <a:bodyPr wrap="square" lIns="0" tIns="0" rIns="0" bIns="0" rtlCol="0" anchor="ctr"/>
           <a:lstStyle/>
           <a:p>
-            <a:pPr indent="0" marL="0">
+            <a:pPr marL="0" indent="0">
               <a:buNone/>
             </a:pPr>
             <a:r>
@@ -8911,7 +8759,7 @@
           <a:bodyPr wrap="square" lIns="0" tIns="0" rIns="0" bIns="0" rtlCol="0" anchor="ctr"/>
           <a:lstStyle/>
           <a:p>
-            <a:pPr algn="ctr" indent="0" marL="0">
+            <a:pPr marL="0" indent="0" algn="ctr">
               <a:buNone/>
             </a:pPr>
             <a:r>
@@ -8950,7 +8798,7 @@
           <a:bodyPr wrap="square" lIns="0" tIns="0" rIns="0" bIns="0" rtlCol="0" anchor="ctr"/>
           <a:lstStyle/>
           <a:p>
-            <a:pPr indent="0" marL="0">
+            <a:pPr marL="0" indent="0">
               <a:buNone/>
             </a:pPr>
             <a:r>
@@ -8989,7 +8837,7 @@
           <a:bodyPr wrap="square" lIns="0" tIns="0" rIns="0" bIns="0" rtlCol="0" anchor="ctr"/>
           <a:lstStyle/>
           <a:p>
-            <a:pPr indent="0" marL="0">
+            <a:pPr marL="0" indent="0">
               <a:buNone/>
             </a:pPr>
             <a:r>
@@ -9071,7 +8919,7 @@
           <a:bodyPr wrap="square" lIns="0" tIns="0" rIns="0" bIns="0" rtlCol="0" anchor="ctr"/>
           <a:lstStyle/>
           <a:p>
-            <a:pPr algn="ctr" indent="0" marL="0">
+            <a:pPr marL="0" indent="0" algn="ctr">
               <a:buNone/>
             </a:pPr>
             <a:r>
@@ -9110,7 +8958,7 @@
           <a:bodyPr wrap="square" lIns="0" tIns="0" rIns="0" bIns="0" rtlCol="0" anchor="ctr"/>
           <a:lstStyle/>
           <a:p>
-            <a:pPr indent="0" marL="0">
+            <a:pPr marL="0" indent="0">
               <a:buNone/>
             </a:pPr>
             <a:r>
@@ -9149,7 +8997,7 @@
           <a:bodyPr wrap="square" lIns="0" tIns="0" rIns="0" bIns="0" rtlCol="0" anchor="ctr"/>
           <a:lstStyle/>
           <a:p>
-            <a:pPr indent="0" marL="0">
+            <a:pPr marL="0" indent="0">
               <a:buNone/>
             </a:pPr>
             <a:r>
@@ -9186,7 +9034,7 @@
           </a:solidFill>
           <a:ln/>
           <a:effectLst>
-            <a:outerShdw sx="100000" sy="100000" kx="0" ky="0" algn="bl" rotWithShape="0" blurRad="50800" dist="19050" dir="8100000">
+            <a:outerShdw blurRad="50800" dist="19050" dir="8100000" algn="bl" rotWithShape="0">
               <a:srgbClr val="000000">
                 <a:alpha val="8000"/>
               </a:srgbClr>
@@ -9215,7 +9063,7 @@
           <a:bodyPr wrap="square" lIns="0" tIns="0" rIns="0" bIns="0" rtlCol="0" anchor="ctr"/>
           <a:lstStyle/>
           <a:p>
-            <a:pPr algn="ctr" indent="0" marL="0">
+            <a:pPr marL="0" indent="0" algn="ctr">
               <a:buNone/>
             </a:pPr>
             <a:r>
@@ -9274,7 +9122,7 @@
           <a:bodyPr wrap="square" lIns="0" tIns="0" rIns="0" bIns="0" rtlCol="0" anchor="t"/>
           <a:lstStyle/>
           <a:p>
-            <a:pPr indent="0" marL="0">
+            <a:pPr marL="0" indent="0">
               <a:buNone/>
             </a:pPr>
             <a:r>
@@ -9291,7 +9139,7 @@
             <a:endParaRPr lang="en-US" sz="1000" dirty="0"/>
           </a:p>
           <a:p>
-            <a:pPr indent="0" marL="0">
+            <a:pPr marL="0" indent="0">
               <a:buNone/>
             </a:pPr>
             <a:r>
@@ -9308,7 +9156,7 @@
             <a:endParaRPr lang="en-US" sz="1000" dirty="0"/>
           </a:p>
           <a:p>
-            <a:pPr indent="0" marL="0">
+            <a:pPr marL="0" indent="0">
               <a:buNone/>
             </a:pPr>
             <a:r>
@@ -9325,7 +9173,7 @@
             <a:endParaRPr lang="en-US" sz="1000" dirty="0"/>
           </a:p>
           <a:p>
-            <a:pPr indent="0" marL="0">
+            <a:pPr marL="0" indent="0">
               <a:buNone/>
             </a:pPr>
             <a:r>
@@ -9342,7 +9190,7 @@
             <a:endParaRPr lang="en-US" sz="1000" dirty="0"/>
           </a:p>
           <a:p>
-            <a:pPr indent="0" marL="0">
+            <a:pPr marL="0" indent="0">
               <a:buNone/>
             </a:pPr>
             <a:r>
@@ -9359,7 +9207,7 @@
             <a:endParaRPr lang="en-US" sz="1000" dirty="0"/>
           </a:p>
           <a:p>
-            <a:pPr indent="0" marL="0">
+            <a:pPr marL="0" indent="0">
               <a:buNone/>
             </a:pPr>
             <a:r>
@@ -9376,7 +9224,7 @@
             <a:endParaRPr lang="en-US" sz="1000" dirty="0"/>
           </a:p>
           <a:p>
-            <a:pPr indent="0" marL="0">
+            <a:pPr marL="0" indent="0">
               <a:buNone/>
             </a:pPr>
             <a:r>
@@ -9393,7 +9241,7 @@
             <a:endParaRPr lang="en-US" sz="1000" dirty="0"/>
           </a:p>
           <a:p>
-            <a:pPr indent="0" marL="0">
+            <a:pPr marL="0" indent="0">
               <a:buNone/>
             </a:pPr>
             <a:r>
@@ -9432,7 +9280,7 @@
           <a:bodyPr wrap="square" lIns="0" tIns="0" rIns="0" bIns="0" rtlCol="0" anchor="ctr"/>
           <a:lstStyle/>
           <a:p>
-            <a:pPr indent="0" marL="0">
+            <a:pPr marL="0" indent="0">
               <a:buNone/>
             </a:pPr>
             <a:r>
@@ -9471,7 +9319,7 @@
           <a:bodyPr wrap="square" rtlCol="0" anchor="ctr"/>
           <a:lstStyle/>
           <a:p>
-            <a:pPr algn="r" indent="0" marL="0">
+            <a:pPr marL="0" indent="0" algn="r">
               <a:buNone/>
             </a:pPr>
             <a:r>
@@ -9505,6 +9353,7 @@
         <a:solidFill>
           <a:srgbClr val="F7F9FC"/>
         </a:solidFill>
+        <a:effectLst/>
       </p:bgPr>
     </p:bg>
     <p:spTree>
@@ -9542,7 +9391,7 @@
           <a:bodyPr wrap="square" lIns="0" tIns="0" rIns="0" bIns="0" rtlCol="0" anchor="ctr"/>
           <a:lstStyle/>
           <a:p>
-            <a:pPr indent="0" marL="0">
+            <a:pPr marL="0" indent="0">
               <a:buNone/>
             </a:pPr>
             <a:r>
@@ -9579,7 +9428,7 @@
           </a:solidFill>
           <a:ln/>
           <a:effectLst>
-            <a:outerShdw sx="100000" sy="100000" kx="0" ky="0" algn="bl" rotWithShape="0" blurRad="50800" dist="19050" dir="8100000">
+            <a:outerShdw blurRad="50800" dist="19050" dir="8100000" algn="bl" rotWithShape="0">
               <a:srgbClr val="000000">
                 <a:alpha val="8000"/>
               </a:srgbClr>
@@ -9628,7 +9477,7 @@
           <a:bodyPr wrap="square" lIns="0" tIns="0" rIns="0" bIns="0" rtlCol="0" anchor="ctr"/>
           <a:lstStyle/>
           <a:p>
-            <a:pPr indent="0" marL="0">
+            <a:pPr marL="0" indent="0">
               <a:buNone/>
             </a:pPr>
             <a:r>
@@ -9667,7 +9516,7 @@
           <a:bodyPr wrap="square" lIns="0" tIns="0" rIns="0" bIns="0" rtlCol="0" anchor="t"/>
           <a:lstStyle/>
           <a:p>
-            <a:pPr indent="0" marL="0">
+            <a:pPr marL="0" indent="0">
               <a:buNone/>
             </a:pPr>
             <a:r>
@@ -9704,7 +9553,7 @@
           </a:solidFill>
           <a:ln/>
           <a:effectLst>
-            <a:outerShdw sx="100000" sy="100000" kx="0" ky="0" algn="bl" rotWithShape="0" blurRad="50800" dist="19050" dir="8100000">
+            <a:outerShdw blurRad="50800" dist="19050" dir="8100000" algn="bl" rotWithShape="0">
               <a:srgbClr val="000000">
                 <a:alpha val="8000"/>
               </a:srgbClr>
@@ -9753,7 +9602,7 @@
           <a:bodyPr wrap="square" lIns="0" tIns="0" rIns="0" bIns="0" rtlCol="0" anchor="ctr"/>
           <a:lstStyle/>
           <a:p>
-            <a:pPr indent="0" marL="0">
+            <a:pPr marL="0" indent="0">
               <a:buNone/>
             </a:pPr>
             <a:r>
@@ -9792,7 +9641,7 @@
           <a:bodyPr wrap="square" lIns="0" tIns="0" rIns="0" bIns="0" rtlCol="0" anchor="t"/>
           <a:lstStyle/>
           <a:p>
-            <a:pPr indent="0" marL="0">
+            <a:pPr marL="0" indent="0">
               <a:buNone/>
             </a:pPr>
             <a:r>
@@ -9829,7 +9678,7 @@
           </a:solidFill>
           <a:ln/>
           <a:effectLst>
-            <a:outerShdw sx="100000" sy="100000" kx="0" ky="0" algn="bl" rotWithShape="0" blurRad="50800" dist="19050" dir="8100000">
+            <a:outerShdw blurRad="50800" dist="19050" dir="8100000" algn="bl" rotWithShape="0">
               <a:srgbClr val="000000">
                 <a:alpha val="8000"/>
               </a:srgbClr>
@@ -9878,7 +9727,7 @@
           <a:bodyPr wrap="square" lIns="0" tIns="0" rIns="0" bIns="0" rtlCol="0" anchor="ctr"/>
           <a:lstStyle/>
           <a:p>
-            <a:pPr indent="0" marL="0">
+            <a:pPr marL="0" indent="0">
               <a:buNone/>
             </a:pPr>
             <a:r>
@@ -9917,7 +9766,7 @@
           <a:bodyPr wrap="square" lIns="0" tIns="0" rIns="0" bIns="0" rtlCol="0" anchor="t"/>
           <a:lstStyle/>
           <a:p>
-            <a:pPr indent="0" marL="0">
+            <a:pPr marL="0" indent="0">
               <a:buNone/>
             </a:pPr>
             <a:r>
@@ -9956,7 +9805,7 @@
           <a:bodyPr wrap="square" lIns="0" tIns="0" rIns="0" bIns="0" rtlCol="0" anchor="ctr"/>
           <a:lstStyle/>
           <a:p>
-            <a:pPr algn="ctr" indent="0" marL="0">
+            <a:pPr marL="0" indent="0" algn="ctr">
               <a:buNone/>
             </a:pPr>
             <a:r>
@@ -9993,7 +9842,7 @@
           </a:solidFill>
           <a:ln/>
           <a:effectLst>
-            <a:outerShdw sx="100000" sy="100000" kx="0" ky="0" algn="bl" rotWithShape="0" blurRad="50800" dist="19050" dir="8100000">
+            <a:outerShdw blurRad="50800" dist="19050" dir="8100000" algn="bl" rotWithShape="0">
               <a:srgbClr val="000000">
                 <a:alpha val="8000"/>
               </a:srgbClr>
@@ -10042,7 +9891,7 @@
           <a:bodyPr wrap="square" lIns="0" tIns="0" rIns="0" bIns="0" rtlCol="0" anchor="ctr"/>
           <a:lstStyle/>
           <a:p>
-            <a:pPr indent="0" marL="0">
+            <a:pPr marL="0" indent="0">
               <a:buNone/>
             </a:pPr>
             <a:r>
@@ -10081,7 +9930,7 @@
           <a:bodyPr wrap="square" lIns="0" tIns="0" rIns="0" bIns="0" rtlCol="0" anchor="ctr"/>
           <a:lstStyle/>
           <a:p>
-            <a:pPr indent="0" marL="0">
+            <a:pPr marL="0" indent="0">
               <a:buNone/>
             </a:pPr>
             <a:r>
@@ -10120,7 +9969,7 @@
           <a:bodyPr wrap="square" lIns="0" tIns="0" rIns="0" bIns="0" rtlCol="0" anchor="t"/>
           <a:lstStyle/>
           <a:p>
-            <a:pPr indent="0" marL="0">
+            <a:pPr marL="0" indent="0">
               <a:buNone/>
             </a:pPr>
             <a:r>
@@ -10137,7 +9986,7 @@
             <a:endParaRPr lang="en-US" sz="1000" dirty="0"/>
           </a:p>
           <a:p>
-            <a:pPr indent="0" marL="0">
+            <a:pPr marL="0" indent="0">
               <a:buNone/>
             </a:pPr>
             <a:r>
@@ -10196,7 +10045,7 @@
           <a:bodyPr wrap="square" lIns="0" tIns="0" rIns="0" bIns="0" rtlCol="0" anchor="ctr"/>
           <a:lstStyle/>
           <a:p>
-            <a:pPr indent="0" marL="0">
+            <a:pPr marL="0" indent="0">
               <a:buNone/>
             </a:pPr>
             <a:r>
@@ -10235,7 +10084,7 @@
           <a:bodyPr wrap="square" lIns="0" tIns="0" rIns="0" bIns="0" rtlCol="0" anchor="t"/>
           <a:lstStyle/>
           <a:p>
-            <a:pPr indent="0" marL="0">
+            <a:pPr marL="0" indent="0">
               <a:buNone/>
             </a:pPr>
             <a:r>
@@ -10252,7 +10101,7 @@
             <a:endParaRPr lang="en-US" sz="1000" dirty="0"/>
           </a:p>
           <a:p>
-            <a:pPr indent="0" marL="0">
+            <a:pPr marL="0" indent="0">
               <a:buNone/>
             </a:pPr>
             <a:r>
@@ -10311,7 +10160,7 @@
           <a:bodyPr wrap="square" lIns="0" tIns="0" rIns="0" bIns="0" rtlCol="0" anchor="ctr"/>
           <a:lstStyle/>
           <a:p>
-            <a:pPr indent="0" marL="0">
+            <a:pPr marL="0" indent="0">
               <a:buNone/>
             </a:pPr>
             <a:r>
@@ -10350,7 +10199,7 @@
           <a:bodyPr wrap="square" lIns="0" tIns="0" rIns="0" bIns="0" rtlCol="0" anchor="t"/>
           <a:lstStyle/>
           <a:p>
-            <a:pPr indent="0" marL="0">
+            <a:pPr marL="0" indent="0">
               <a:buNone/>
             </a:pPr>
             <a:r>
@@ -10367,7 +10216,7 @@
             <a:endParaRPr lang="en-US" sz="1000" dirty="0"/>
           </a:p>
           <a:p>
-            <a:pPr indent="0" marL="0">
+            <a:pPr marL="0" indent="0">
               <a:buNone/>
             </a:pPr>
             <a:r>
@@ -10406,7 +10255,7 @@
           <a:bodyPr wrap="square" rtlCol="0" anchor="ctr"/>
           <a:lstStyle/>
           <a:p>
-            <a:pPr algn="r" indent="0" marL="0">
+            <a:pPr marL="0" indent="0" algn="r">
               <a:buNone/>
             </a:pPr>
             <a:r>
@@ -10440,6 +10289,7 @@
         <a:solidFill>
           <a:srgbClr val="F7F9FC"/>
         </a:solidFill>
+        <a:effectLst/>
       </p:bgPr>
     </p:bg>
     <p:spTree>
@@ -10477,7 +10327,7 @@
           <a:bodyPr wrap="square" lIns="0" tIns="0" rIns="0" bIns="0" rtlCol="0" anchor="ctr"/>
           <a:lstStyle/>
           <a:p>
-            <a:pPr indent="0" marL="0">
+            <a:pPr marL="0" indent="0">
               <a:buNone/>
             </a:pPr>
             <a:r>
@@ -10511,15 +10361,27 @@
         </p:nvGraphicFramePr>
         <p:xfrm>
           <a:off x="457200" y="1005840"/>
-          <a:ext cx="4389120" cy="1554480"/>
+          <a:ext cx="4389120" cy="1417320"/>
         </p:xfrm>
         <a:graphic>
           <a:graphicData uri="http://schemas.openxmlformats.org/drawingml/2006/table">
             <a:tbl>
               <a:tblPr/>
               <a:tblGrid>
-                <a:gridCol w="1463040"/>
-                <a:gridCol w="2926080"/>
+                <a:gridCol w="1463040">
+                  <a:extLst>
+                    <a:ext uri="{9D8B030D-6E8A-4147-A177-3AD203B41FA5}">
+                      <a16:colId xmlns:a16="http://schemas.microsoft.com/office/drawing/2014/main" val="20000"/>
+                    </a:ext>
+                  </a:extLst>
+                </a:gridCol>
+                <a:gridCol w="2926080">
+                  <a:extLst>
+                    <a:ext uri="{9D8B030D-6E8A-4147-A177-3AD203B41FA5}">
+                      <a16:colId xmlns:a16="http://schemas.microsoft.com/office/drawing/2014/main" val="20001"/>
+                    </a:ext>
+                  </a:extLst>
+                </a:gridCol>
               </a:tblGrid>
               <a:tr h="320040">
                 <a:tc>
@@ -10527,7 +10389,7 @@
                     <a:bodyPr/>
                     <a:lstStyle/>
                     <a:p>
-                      <a:pPr indent="0" marL="0">
+                      <a:pPr marL="0" indent="0">
                         <a:buNone/>
                       </a:pPr>
                       <a:r>
@@ -10548,7 +10410,7 @@
                       </a:endParaRPr>
                     </a:p>
                   </a:txBody>
-                  <a:tcPr marL="91440" marR="91440" marT="45720" marB="45720">
+                  <a:tcPr>
                     <a:lnL w="6350" cap="flat" cmpd="sng" algn="ctr">
                       <a:solidFill>
                         <a:srgbClr val="E8ECF1"/>
@@ -10595,7 +10457,7 @@
                     <a:bodyPr/>
                     <a:lstStyle/>
                     <a:p>
-                      <a:pPr indent="0" marL="0">
+                      <a:pPr marL="0" indent="0">
                         <a:buNone/>
                       </a:pPr>
                       <a:r>
@@ -10616,7 +10478,7 @@
                       </a:endParaRPr>
                     </a:p>
                   </a:txBody>
-                  <a:tcPr marL="91440" marR="91440" marT="45720" marB="45720">
+                  <a:tcPr>
                     <a:lnL w="6350" cap="flat" cmpd="sng" algn="ctr">
                       <a:solidFill>
                         <a:srgbClr val="E8ECF1"/>
@@ -10658,6 +10520,11 @@
                     </a:solidFill>
                   </a:tcPr>
                 </a:tc>
+                <a:extLst>
+                  <a:ext uri="{0D108BD9-81ED-4DB2-BD59-A6C34878D82A}">
+                    <a16:rowId xmlns:a16="http://schemas.microsoft.com/office/drawing/2014/main" val="10000"/>
+                  </a:ext>
+                </a:extLst>
               </a:tr>
               <a:tr h="274320">
                 <a:tc>
@@ -10665,7 +10532,7 @@
                     <a:bodyPr/>
                     <a:lstStyle/>
                     <a:p>
-                      <a:pPr indent="0" marL="0">
+                      <a:pPr marL="0" indent="0">
                         <a:buNone/>
                       </a:pPr>
                       <a:r>
@@ -10686,7 +10553,7 @@
                       </a:endParaRPr>
                     </a:p>
                   </a:txBody>
-                  <a:tcPr marL="91440" marR="91440" marT="45720" marB="45720">
+                  <a:tcPr>
                     <a:lnL w="6350" cap="flat" cmpd="sng" algn="ctr">
                       <a:solidFill>
                         <a:srgbClr val="E8ECF1"/>
@@ -10730,7 +10597,7 @@
                     <a:bodyPr/>
                     <a:lstStyle/>
                     <a:p>
-                      <a:pPr indent="0" marL="0">
+                      <a:pPr marL="0" indent="0">
                         <a:buNone/>
                       </a:pPr>
                       <a:r>
@@ -10751,7 +10618,7 @@
                       </a:endParaRPr>
                     </a:p>
                   </a:txBody>
-                  <a:tcPr marL="91440" marR="91440" marT="45720" marB="45720">
+                  <a:tcPr>
                     <a:lnL w="6350" cap="flat" cmpd="sng" algn="ctr">
                       <a:solidFill>
                         <a:srgbClr val="E8ECF1"/>
@@ -10790,6 +10657,11 @@
                     </a:lnB>
                   </a:tcPr>
                 </a:tc>
+                <a:extLst>
+                  <a:ext uri="{0D108BD9-81ED-4DB2-BD59-A6C34878D82A}">
+                    <a16:rowId xmlns:a16="http://schemas.microsoft.com/office/drawing/2014/main" val="10001"/>
+                  </a:ext>
+                </a:extLst>
               </a:tr>
               <a:tr h="274320">
                 <a:tc>
@@ -10797,7 +10669,7 @@
                     <a:bodyPr/>
                     <a:lstStyle/>
                     <a:p>
-                      <a:pPr indent="0" marL="0">
+                      <a:pPr marL="0" indent="0">
                         <a:buNone/>
                       </a:pPr>
                       <a:r>
@@ -10818,7 +10690,7 @@
                       </a:endParaRPr>
                     </a:p>
                   </a:txBody>
-                  <a:tcPr marL="91440" marR="91440" marT="45720" marB="45720">
+                  <a:tcPr>
                     <a:lnL w="6350" cap="flat" cmpd="sng" algn="ctr">
                       <a:solidFill>
                         <a:srgbClr val="E8ECF1"/>
@@ -10862,7 +10734,7 @@
                     <a:bodyPr/>
                     <a:lstStyle/>
                     <a:p>
-                      <a:pPr indent="0" marL="0">
+                      <a:pPr marL="0" indent="0">
                         <a:buNone/>
                       </a:pPr>
                       <a:r>
@@ -10883,7 +10755,7 @@
                       </a:endParaRPr>
                     </a:p>
                   </a:txBody>
-                  <a:tcPr marL="91440" marR="91440" marT="45720" marB="45720">
+                  <a:tcPr>
                     <a:lnL w="6350" cap="flat" cmpd="sng" algn="ctr">
                       <a:solidFill>
                         <a:srgbClr val="E8ECF1"/>
@@ -10922,6 +10794,11 @@
                     </a:lnB>
                   </a:tcPr>
                 </a:tc>
+                <a:extLst>
+                  <a:ext uri="{0D108BD9-81ED-4DB2-BD59-A6C34878D82A}">
+                    <a16:rowId xmlns:a16="http://schemas.microsoft.com/office/drawing/2014/main" val="10002"/>
+                  </a:ext>
+                </a:extLst>
               </a:tr>
               <a:tr h="274320">
                 <a:tc>
@@ -10929,7 +10806,7 @@
                     <a:bodyPr/>
                     <a:lstStyle/>
                     <a:p>
-                      <a:pPr indent="0" marL="0">
+                      <a:pPr marL="0" indent="0">
                         <a:buNone/>
                       </a:pPr>
                       <a:r>
@@ -10950,7 +10827,7 @@
                       </a:endParaRPr>
                     </a:p>
                   </a:txBody>
-                  <a:tcPr marL="91440" marR="91440" marT="45720" marB="45720">
+                  <a:tcPr>
                     <a:lnL w="6350" cap="flat" cmpd="sng" algn="ctr">
                       <a:solidFill>
                         <a:srgbClr val="E8ECF1"/>
@@ -10994,7 +10871,7 @@
                     <a:bodyPr/>
                     <a:lstStyle/>
                     <a:p>
-                      <a:pPr indent="0" marL="0">
+                      <a:pPr marL="0" indent="0">
                         <a:buNone/>
                       </a:pPr>
                       <a:r>
@@ -11015,7 +10892,7 @@
                       </a:endParaRPr>
                     </a:p>
                   </a:txBody>
-                  <a:tcPr marL="91440" marR="91440" marT="45720" marB="45720">
+                  <a:tcPr>
                     <a:lnL w="6350" cap="flat" cmpd="sng" algn="ctr">
                       <a:solidFill>
                         <a:srgbClr val="E8ECF1"/>
@@ -11054,6 +10931,11 @@
                     </a:lnB>
                   </a:tcPr>
                 </a:tc>
+                <a:extLst>
+                  <a:ext uri="{0D108BD9-81ED-4DB2-BD59-A6C34878D82A}">
+                    <a16:rowId xmlns:a16="http://schemas.microsoft.com/office/drawing/2014/main" val="10003"/>
+                  </a:ext>
+                </a:extLst>
               </a:tr>
               <a:tr h="274320">
                 <a:tc>
@@ -11061,7 +10943,7 @@
                     <a:bodyPr/>
                     <a:lstStyle/>
                     <a:p>
-                      <a:pPr indent="0" marL="0">
+                      <a:pPr marL="0" indent="0">
                         <a:buNone/>
                       </a:pPr>
                       <a:r>
@@ -11082,7 +10964,7 @@
                       </a:endParaRPr>
                     </a:p>
                   </a:txBody>
-                  <a:tcPr marL="91440" marR="91440" marT="45720" marB="45720">
+                  <a:tcPr>
                     <a:lnL w="6350" cap="flat" cmpd="sng" algn="ctr">
                       <a:solidFill>
                         <a:srgbClr val="E8ECF1"/>
@@ -11126,7 +11008,7 @@
                     <a:bodyPr/>
                     <a:lstStyle/>
                     <a:p>
-                      <a:pPr indent="0" marL="0">
+                      <a:pPr marL="0" indent="0">
                         <a:buNone/>
                       </a:pPr>
                       <a:r>
@@ -11147,7 +11029,7 @@
                       </a:endParaRPr>
                     </a:p>
                   </a:txBody>
-                  <a:tcPr marL="91440" marR="91440" marT="45720" marB="45720">
+                  <a:tcPr>
                     <a:lnL w="6350" cap="flat" cmpd="sng" algn="ctr">
                       <a:solidFill>
                         <a:srgbClr val="E8ECF1"/>
@@ -11186,6 +11068,11 @@
                     </a:lnB>
                   </a:tcPr>
                 </a:tc>
+                <a:extLst>
+                  <a:ext uri="{0D108BD9-81ED-4DB2-BD59-A6C34878D82A}">
+                    <a16:rowId xmlns:a16="http://schemas.microsoft.com/office/drawing/2014/main" val="10004"/>
+                  </a:ext>
+                </a:extLst>
               </a:tr>
             </a:tbl>
           </a:graphicData>
@@ -11210,7 +11097,7 @@
           </a:solidFill>
           <a:ln/>
           <a:effectLst>
-            <a:outerShdw sx="100000" sy="100000" kx="0" ky="0" algn="bl" rotWithShape="0" blurRad="50800" dist="19050" dir="8100000">
+            <a:outerShdw blurRad="50800" dist="19050" dir="8100000" algn="bl" rotWithShape="0">
               <a:srgbClr val="000000">
                 <a:alpha val="8000"/>
               </a:srgbClr>
@@ -11220,7 +11107,7 @@
       </p:sp>
       <p:sp>
         <p:nvSpPr>
-          <p:cNvPr id="5" name="Text 2"/>
+          <p:cNvPr id="3" name="Text 2"/>
           <p:cNvSpPr/>
           <p:nvPr/>
         </p:nvSpPr>
@@ -11239,7 +11126,7 @@
           <a:bodyPr wrap="square" lIns="0" tIns="0" rIns="0" bIns="0" rtlCol="0" anchor="ctr"/>
           <a:lstStyle/>
           <a:p>
-            <a:pPr indent="0" marL="0">
+            <a:pPr marL="0" indent="0">
               <a:buNone/>
             </a:pPr>
             <a:r>
@@ -11278,7 +11165,7 @@
           <a:bodyPr wrap="square" lIns="0" tIns="0" rIns="0" bIns="0" rtlCol="0" anchor="t"/>
           <a:lstStyle/>
           <a:p>
-            <a:pPr indent="0" marL="0">
+            <a:pPr marL="0" indent="0">
               <a:lnSpc>
                 <a:spcPct val="150000"/>
               </a:lnSpc>
@@ -11293,9 +11180,12 @@
                 <a:ea typeface="Calibri" pitchFamily="34" charset="-122"/>
                 <a:cs typeface="Calibri" pitchFamily="34" charset="-120"/>
               </a:rPr>
-              <a:t>贵州茅台  </a:t>
-            </a:r>
-            <a:pPr indent="0" marL="0">
+              <a:t>贵州茅台  五粮液  </a:t>
+            </a:r>
+            <a:endParaRPr lang="en-US" sz="900" dirty="0"/>
+          </a:p>
+          <a:p>
+            <a:pPr marL="0" indent="0">
               <a:lnSpc>
                 <a:spcPct val="150000"/>
               </a:lnSpc>
@@ -11310,12 +11200,23 @@
                 <a:ea typeface="Calibri" pitchFamily="34" charset="-122"/>
                 <a:cs typeface="Calibri" pitchFamily="34" charset="-120"/>
               </a:rPr>
-              <a:t>五粮液  </a:t>
+              <a:t>伊利股份  </a:t>
+            </a:r>
+            <a:r>
+              <a:rPr lang="en-US" sz="900" dirty="0">
+                <a:solidFill>
+                  <a:srgbClr val="2D6FB5"/>
+                </a:solidFill>
+                <a:latin typeface="Calibri" pitchFamily="34" charset="0"/>
+                <a:ea typeface="Calibri" pitchFamily="34" charset="-122"/>
+                <a:cs typeface="Calibri" pitchFamily="34" charset="-120"/>
+              </a:rPr>
+              <a:t>中国平安  </a:t>
             </a:r>
             <a:endParaRPr lang="en-US" sz="900" dirty="0"/>
           </a:p>
           <a:p>
-            <a:pPr indent="0" marL="0">
+            <a:pPr marL="0" indent="0">
               <a:lnSpc>
                 <a:spcPct val="150000"/>
               </a:lnSpc>
@@ -11324,15 +11225,29 @@
             <a:r>
               <a:rPr lang="en-US" sz="900" dirty="0">
                 <a:solidFill>
-                  <a:srgbClr val="EF4444"/>
-                </a:solidFill>
-                <a:latin typeface="Calibri" pitchFamily="34" charset="0"/>
-                <a:ea typeface="Calibri" pitchFamily="34" charset="-122"/>
-                <a:cs typeface="Calibri" pitchFamily="34" charset="-120"/>
-              </a:rPr>
-              <a:t>伊利股份  </a:t>
-            </a:r>
-            <a:pPr indent="0" marL="0">
+                  <a:srgbClr val="2D6FB5"/>
+                </a:solidFill>
+                <a:latin typeface="Calibri" pitchFamily="34" charset="0"/>
+                <a:ea typeface="Calibri" pitchFamily="34" charset="-122"/>
+                <a:cs typeface="Calibri" pitchFamily="34" charset="-120"/>
+              </a:rPr>
+              <a:t>招商银行  </a:t>
+            </a:r>
+            <a:r>
+              <a:rPr lang="en-US" sz="900" dirty="0">
+                <a:solidFill>
+                  <a:srgbClr val="7C3AED"/>
+                </a:solidFill>
+                <a:latin typeface="Calibri" pitchFamily="34" charset="0"/>
+                <a:ea typeface="Calibri" pitchFamily="34" charset="-122"/>
+                <a:cs typeface="Calibri" pitchFamily="34" charset="-120"/>
+              </a:rPr>
+              <a:t>宁德时代  </a:t>
+            </a:r>
+            <a:endParaRPr lang="en-US" sz="900" dirty="0"/>
+          </a:p>
+          <a:p>
+            <a:pPr marL="0" indent="0">
               <a:lnSpc>
                 <a:spcPct val="150000"/>
               </a:lnSpc>
@@ -11341,18 +11256,29 @@
             <a:r>
               <a:rPr lang="en-US" sz="900" dirty="0">
                 <a:solidFill>
-                  <a:srgbClr val="2D6FB5"/>
-                </a:solidFill>
-                <a:latin typeface="Calibri" pitchFamily="34" charset="0"/>
-                <a:ea typeface="Calibri" pitchFamily="34" charset="-122"/>
-                <a:cs typeface="Calibri" pitchFamily="34" charset="-120"/>
-              </a:rPr>
-              <a:t>中国平安  </a:t>
+                  <a:srgbClr val="7C3AED"/>
+                </a:solidFill>
+                <a:latin typeface="Calibri" pitchFamily="34" charset="0"/>
+                <a:ea typeface="Calibri" pitchFamily="34" charset="-122"/>
+                <a:cs typeface="Calibri" pitchFamily="34" charset="-120"/>
+              </a:rPr>
+              <a:t>海康威视  </a:t>
+            </a:r>
+            <a:r>
+              <a:rPr lang="en-US" sz="900" dirty="0">
+                <a:solidFill>
+                  <a:srgbClr val="0891B2"/>
+                </a:solidFill>
+                <a:latin typeface="Calibri" pitchFamily="34" charset="0"/>
+                <a:ea typeface="Calibri" pitchFamily="34" charset="-122"/>
+                <a:cs typeface="Calibri" pitchFamily="34" charset="-120"/>
+              </a:rPr>
+              <a:t>恒瑞医药  </a:t>
             </a:r>
             <a:endParaRPr lang="en-US" sz="900" dirty="0"/>
           </a:p>
           <a:p>
-            <a:pPr indent="0" marL="0">
+            <a:pPr marL="0" indent="0">
               <a:lnSpc>
                 <a:spcPct val="150000"/>
               </a:lnSpc>
@@ -11361,104 +11287,13 @@
             <a:r>
               <a:rPr lang="en-US" sz="900" dirty="0">
                 <a:solidFill>
-                  <a:srgbClr val="2D6FB5"/>
-                </a:solidFill>
-                <a:latin typeface="Calibri" pitchFamily="34" charset="0"/>
-                <a:ea typeface="Calibri" pitchFamily="34" charset="-122"/>
-                <a:cs typeface="Calibri" pitchFamily="34" charset="-120"/>
-              </a:rPr>
-              <a:t>招商银行  </a:t>
-            </a:r>
-            <a:pPr indent="0" marL="0">
-              <a:lnSpc>
-                <a:spcPct val="150000"/>
-              </a:lnSpc>
-              <a:buNone/>
-            </a:pPr>
-            <a:r>
-              <a:rPr lang="en-US" sz="900" dirty="0">
-                <a:solidFill>
-                  <a:srgbClr val="7C3AED"/>
-                </a:solidFill>
-                <a:latin typeface="Calibri" pitchFamily="34" charset="0"/>
-                <a:ea typeface="Calibri" pitchFamily="34" charset="-122"/>
-                <a:cs typeface="Calibri" pitchFamily="34" charset="-120"/>
-              </a:rPr>
-              <a:t>宁德时代  </a:t>
-            </a:r>
-            <a:endParaRPr lang="en-US" sz="900" dirty="0"/>
-          </a:p>
-          <a:p>
-            <a:pPr indent="0" marL="0">
-              <a:lnSpc>
-                <a:spcPct val="150000"/>
-              </a:lnSpc>
-              <a:buNone/>
-            </a:pPr>
-            <a:r>
-              <a:rPr lang="en-US" sz="900" dirty="0">
-                <a:solidFill>
-                  <a:srgbClr val="7C3AED"/>
-                </a:solidFill>
-                <a:latin typeface="Calibri" pitchFamily="34" charset="0"/>
-                <a:ea typeface="Calibri" pitchFamily="34" charset="-122"/>
-                <a:cs typeface="Calibri" pitchFamily="34" charset="-120"/>
-              </a:rPr>
-              <a:t>海康威视  </a:t>
-            </a:r>
-            <a:pPr indent="0" marL="0">
-              <a:lnSpc>
-                <a:spcPct val="150000"/>
-              </a:lnSpc>
-              <a:buNone/>
-            </a:pPr>
-            <a:r>
-              <a:rPr lang="en-US" sz="900" dirty="0">
-                <a:solidFill>
                   <a:srgbClr val="0891B2"/>
                 </a:solidFill>
                 <a:latin typeface="Calibri" pitchFamily="34" charset="0"/>
                 <a:ea typeface="Calibri" pitchFamily="34" charset="-122"/>
                 <a:cs typeface="Calibri" pitchFamily="34" charset="-120"/>
               </a:rPr>
-              <a:t>恒瑞医药  </a:t>
-            </a:r>
-            <a:endParaRPr lang="en-US" sz="900" dirty="0"/>
-          </a:p>
-          <a:p>
-            <a:pPr indent="0" marL="0">
-              <a:lnSpc>
-                <a:spcPct val="150000"/>
-              </a:lnSpc>
-              <a:buNone/>
-            </a:pPr>
-            <a:r>
-              <a:rPr lang="en-US" sz="900" dirty="0">
-                <a:solidFill>
-                  <a:srgbClr val="0891B2"/>
-                </a:solidFill>
-                <a:latin typeface="Calibri" pitchFamily="34" charset="0"/>
-                <a:ea typeface="Calibri" pitchFamily="34" charset="-122"/>
-                <a:cs typeface="Calibri" pitchFamily="34" charset="-120"/>
-              </a:rPr>
-              <a:t>隆基绿能  </a:t>
-            </a:r>
-            <a:pPr indent="0" marL="0">
-              <a:lnSpc>
-                <a:spcPct val="150000"/>
-              </a:lnSpc>
-              <a:buNone/>
-            </a:pPr>
-            <a:r>
-              <a:rPr lang="en-US" sz="900" dirty="0">
-                <a:solidFill>
-                  <a:srgbClr val="0891B2"/>
-                </a:solidFill>
-                <a:latin typeface="Calibri" pitchFamily="34" charset="0"/>
-                <a:ea typeface="Calibri" pitchFamily="34" charset="-122"/>
-                <a:cs typeface="Calibri" pitchFamily="34" charset="-120"/>
-              </a:rPr>
-              <a:t>美的集团  </a:t>
+              <a:t>隆基绿能  美的集团  </a:t>
             </a:r>
             <a:endParaRPr lang="en-US" sz="900" dirty="0"/>
           </a:p>
@@ -11485,7 +11320,7 @@
           <a:bodyPr wrap="square" lIns="0" tIns="0" rIns="0" bIns="0" rtlCol="0" anchor="ctr"/>
           <a:lstStyle/>
           <a:p>
-            <a:pPr indent="0" marL="0">
+            <a:pPr marL="0" indent="0">
               <a:buNone/>
             </a:pPr>
             <a:r>
@@ -11522,7 +11357,7 @@
           </a:solidFill>
           <a:ln/>
           <a:effectLst>
-            <a:outerShdw sx="100000" sy="100000" kx="0" ky="0" algn="bl" rotWithShape="0" blurRad="50800" dist="19050" dir="8100000">
+            <a:outerShdw blurRad="50800" dist="19050" dir="8100000" algn="bl" rotWithShape="0">
               <a:srgbClr val="000000">
                 <a:alpha val="8000"/>
               </a:srgbClr>
@@ -11551,7 +11386,7 @@
           <a:bodyPr wrap="square" lIns="0" tIns="0" rIns="0" bIns="0" rtlCol="0" anchor="ctr"/>
           <a:lstStyle/>
           <a:p>
-            <a:pPr algn="ctr" indent="0" marL="0">
+            <a:pPr marL="0" indent="0" algn="ctr">
               <a:buNone/>
             </a:pPr>
             <a:r>
@@ -11568,7 +11403,7 @@
             <a:endParaRPr lang="en-US" sz="950" dirty="0"/>
           </a:p>
           <a:p>
-            <a:pPr algn="ctr" indent="0" marL="0">
+            <a:pPr marL="0" indent="0" algn="ctr">
               <a:buNone/>
             </a:pPr>
             <a:r>
@@ -11607,7 +11442,7 @@
           <a:bodyPr wrap="square" lIns="0" tIns="0" rIns="0" bIns="0" rtlCol="0" anchor="ctr"/>
           <a:lstStyle/>
           <a:p>
-            <a:pPr algn="ctr" indent="0" marL="0">
+            <a:pPr marL="0" indent="0" algn="ctr">
               <a:buNone/>
             </a:pPr>
             <a:r>
@@ -11644,7 +11479,7 @@
           </a:solidFill>
           <a:ln/>
           <a:effectLst>
-            <a:outerShdw sx="100000" sy="100000" kx="0" ky="0" algn="bl" rotWithShape="0" blurRad="50800" dist="19050" dir="8100000">
+            <a:outerShdw blurRad="50800" dist="19050" dir="8100000" algn="bl" rotWithShape="0">
               <a:srgbClr val="000000">
                 <a:alpha val="8000"/>
               </a:srgbClr>
@@ -11673,7 +11508,7 @@
           <a:bodyPr wrap="square" lIns="0" tIns="0" rIns="0" bIns="0" rtlCol="0" anchor="ctr"/>
           <a:lstStyle/>
           <a:p>
-            <a:pPr algn="ctr" indent="0" marL="0">
+            <a:pPr marL="0" indent="0" algn="ctr">
               <a:buNone/>
             </a:pPr>
             <a:r>
@@ -11690,7 +11525,7 @@
             <a:endParaRPr lang="en-US" sz="950" dirty="0"/>
           </a:p>
           <a:p>
-            <a:pPr algn="ctr" indent="0" marL="0">
+            <a:pPr marL="0" indent="0" algn="ctr">
               <a:buNone/>
             </a:pPr>
             <a:r>
@@ -11729,7 +11564,7 @@
           <a:bodyPr wrap="square" lIns="0" tIns="0" rIns="0" bIns="0" rtlCol="0" anchor="ctr"/>
           <a:lstStyle/>
           <a:p>
-            <a:pPr algn="ctr" indent="0" marL="0">
+            <a:pPr marL="0" indent="0" algn="ctr">
               <a:buNone/>
             </a:pPr>
             <a:r>
@@ -11766,7 +11601,7 @@
           </a:solidFill>
           <a:ln/>
           <a:effectLst>
-            <a:outerShdw sx="100000" sy="100000" kx="0" ky="0" algn="bl" rotWithShape="0" blurRad="50800" dist="19050" dir="8100000">
+            <a:outerShdw blurRad="50800" dist="19050" dir="8100000" algn="bl" rotWithShape="0">
               <a:srgbClr val="000000">
                 <a:alpha val="8000"/>
               </a:srgbClr>
@@ -11795,7 +11630,7 @@
           <a:bodyPr wrap="square" lIns="0" tIns="0" rIns="0" bIns="0" rtlCol="0" anchor="ctr"/>
           <a:lstStyle/>
           <a:p>
-            <a:pPr algn="ctr" indent="0" marL="0">
+            <a:pPr marL="0" indent="0" algn="ctr">
               <a:buNone/>
             </a:pPr>
             <a:r>
@@ -11812,7 +11647,7 @@
             <a:endParaRPr lang="en-US" sz="950" dirty="0"/>
           </a:p>
           <a:p>
-            <a:pPr algn="ctr" indent="0" marL="0">
+            <a:pPr marL="0" indent="0" algn="ctr">
               <a:buNone/>
             </a:pPr>
             <a:r>
@@ -11851,7 +11686,7 @@
           <a:bodyPr wrap="square" lIns="0" tIns="0" rIns="0" bIns="0" rtlCol="0" anchor="ctr"/>
           <a:lstStyle/>
           <a:p>
-            <a:pPr algn="ctr" indent="0" marL="0">
+            <a:pPr marL="0" indent="0" algn="ctr">
               <a:buNone/>
             </a:pPr>
             <a:r>
@@ -11888,7 +11723,7 @@
           </a:solidFill>
           <a:ln/>
           <a:effectLst>
-            <a:outerShdw sx="100000" sy="100000" kx="0" ky="0" algn="bl" rotWithShape="0" blurRad="50800" dist="19050" dir="8100000">
+            <a:outerShdw blurRad="50800" dist="19050" dir="8100000" algn="bl" rotWithShape="0">
               <a:srgbClr val="000000">
                 <a:alpha val="8000"/>
               </a:srgbClr>
@@ -11917,7 +11752,7 @@
           <a:bodyPr wrap="square" lIns="0" tIns="0" rIns="0" bIns="0" rtlCol="0" anchor="ctr"/>
           <a:lstStyle/>
           <a:p>
-            <a:pPr algn="ctr" indent="0" marL="0">
+            <a:pPr marL="0" indent="0" algn="ctr">
               <a:buNone/>
             </a:pPr>
             <a:r>
@@ -11934,7 +11769,7 @@
             <a:endParaRPr lang="en-US" sz="950" dirty="0"/>
           </a:p>
           <a:p>
-            <a:pPr algn="ctr" indent="0" marL="0">
+            <a:pPr marL="0" indent="0" algn="ctr">
               <a:buNone/>
             </a:pPr>
             <a:r>
@@ -11973,7 +11808,7 @@
           <a:bodyPr wrap="square" lIns="0" tIns="0" rIns="0" bIns="0" rtlCol="0" anchor="ctr"/>
           <a:lstStyle/>
           <a:p>
-            <a:pPr algn="ctr" indent="0" marL="0">
+            <a:pPr marL="0" indent="0" algn="ctr">
               <a:buNone/>
             </a:pPr>
             <a:r>
@@ -12010,7 +11845,7 @@
           </a:solidFill>
           <a:ln/>
           <a:effectLst>
-            <a:outerShdw sx="100000" sy="100000" kx="0" ky="0" algn="bl" rotWithShape="0" blurRad="50800" dist="19050" dir="8100000">
+            <a:outerShdw blurRad="50800" dist="19050" dir="8100000" algn="bl" rotWithShape="0">
               <a:srgbClr val="000000">
                 <a:alpha val="8000"/>
               </a:srgbClr>
@@ -12039,7 +11874,7 @@
           <a:bodyPr wrap="square" lIns="0" tIns="0" rIns="0" bIns="0" rtlCol="0" anchor="ctr"/>
           <a:lstStyle/>
           <a:p>
-            <a:pPr algn="ctr" indent="0" marL="0">
+            <a:pPr marL="0" indent="0" algn="ctr">
               <a:buNone/>
             </a:pPr>
             <a:r>
@@ -12056,7 +11891,7 @@
             <a:endParaRPr lang="en-US" sz="950" dirty="0"/>
           </a:p>
           <a:p>
-            <a:pPr algn="ctr" indent="0" marL="0">
+            <a:pPr marL="0" indent="0" algn="ctr">
               <a:buNone/>
             </a:pPr>
             <a:r>
@@ -12095,7 +11930,7 @@
           <a:bodyPr wrap="square" lIns="0" tIns="0" rIns="0" bIns="0" rtlCol="0" anchor="ctr"/>
           <a:lstStyle/>
           <a:p>
-            <a:pPr algn="ctr" indent="0" marL="0">
+            <a:pPr marL="0" indent="0" algn="ctr">
               <a:buNone/>
             </a:pPr>
             <a:r>
@@ -12132,7 +11967,7 @@
           </a:solidFill>
           <a:ln/>
           <a:effectLst>
-            <a:outerShdw sx="100000" sy="100000" kx="0" ky="0" algn="bl" rotWithShape="0" blurRad="50800" dist="19050" dir="8100000">
+            <a:outerShdw blurRad="50800" dist="19050" dir="8100000" algn="bl" rotWithShape="0">
               <a:srgbClr val="000000">
                 <a:alpha val="8000"/>
               </a:srgbClr>
@@ -12161,7 +11996,7 @@
           <a:bodyPr wrap="square" lIns="0" tIns="0" rIns="0" bIns="0" rtlCol="0" anchor="ctr"/>
           <a:lstStyle/>
           <a:p>
-            <a:pPr algn="ctr" indent="0" marL="0">
+            <a:pPr marL="0" indent="0" algn="ctr">
               <a:buNone/>
             </a:pPr>
             <a:r>
@@ -12178,7 +12013,7 @@
             <a:endParaRPr lang="en-US" sz="950" dirty="0"/>
           </a:p>
           <a:p>
-            <a:pPr algn="ctr" indent="0" marL="0">
+            <a:pPr marL="0" indent="0" algn="ctr">
               <a:buNone/>
             </a:pPr>
             <a:r>
@@ -12237,7 +12072,7 @@
           <a:bodyPr wrap="square" lIns="0" tIns="0" rIns="0" bIns="0" rtlCol="0" anchor="ctr"/>
           <a:lstStyle/>
           <a:p>
-            <a:pPr indent="0" marL="0">
+            <a:pPr marL="0" indent="0">
               <a:buNone/>
             </a:pPr>
             <a:r>
@@ -12251,9 +12086,6 @@
               </a:rPr>
               <a:t>时间跨度：2022.01 - 2025.12 (4年, ~1000交易日)  |  </a:t>
             </a:r>
-            <a:pPr indent="0" marL="0">
-              <a:buNone/>
-            </a:pPr>
             <a:r>
               <a:rPr lang="en-US" sz="1000" b="1" dirty="0">
                 <a:solidFill>
@@ -12265,9 +12097,6 @@
               </a:rPr>
               <a:t>样本外测试：2026 Q1 (60交易日，完全独立)  |  </a:t>
             </a:r>
-            <a:pPr indent="0" marL="0">
-              <a:buNone/>
-            </a:pPr>
             <a:r>
               <a:rPr lang="en-US" sz="1000" dirty="0">
                 <a:solidFill>
@@ -12304,7 +12133,7 @@
           <a:bodyPr wrap="square" rtlCol="0" anchor="ctr"/>
           <a:lstStyle/>
           <a:p>
-            <a:pPr algn="r" indent="0" marL="0">
+            <a:pPr marL="0" indent="0" algn="r">
               <a:buNone/>
             </a:pPr>
             <a:r>
@@ -12338,6 +12167,7 @@
         <a:solidFill>
           <a:srgbClr val="F7F9FC"/>
         </a:solidFill>
+        <a:effectLst/>
       </p:bgPr>
     </p:bg>
     <p:spTree>
@@ -12375,7 +12205,7 @@
           <a:bodyPr wrap="square" lIns="0" tIns="0" rIns="0" bIns="0" rtlCol="0" anchor="ctr"/>
           <a:lstStyle/>
           <a:p>
-            <a:pPr indent="0" marL="0">
+            <a:pPr marL="0" indent="0">
               <a:buNone/>
             </a:pPr>
             <a:r>
@@ -12412,7 +12242,7 @@
           </a:solidFill>
           <a:ln/>
           <a:effectLst>
-            <a:outerShdw sx="100000" sy="100000" kx="0" ky="0" algn="bl" rotWithShape="0" blurRad="50800" dist="19050" dir="8100000">
+            <a:outerShdw blurRad="50800" dist="19050" dir="8100000" algn="bl" rotWithShape="0">
               <a:srgbClr val="000000">
                 <a:alpha val="8000"/>
               </a:srgbClr>
@@ -12461,7 +12291,7 @@
           <a:bodyPr wrap="square" lIns="0" tIns="0" rIns="0" bIns="0" rtlCol="0" anchor="ctr"/>
           <a:lstStyle/>
           <a:p>
-            <a:pPr indent="0" marL="0">
+            <a:pPr marL="0" indent="0">
               <a:buNone/>
             </a:pPr>
             <a:r>
@@ -12500,7 +12330,7 @@
           <a:bodyPr wrap="square" lIns="0" tIns="0" rIns="0" bIns="0" rtlCol="0" anchor="t"/>
           <a:lstStyle/>
           <a:p>
-            <a:pPr indent="0" marL="0">
+            <a:pPr marL="0" indent="0">
               <a:spcAft>
                 <a:spcPts val="200"/>
               </a:spcAft>
@@ -12520,7 +12350,7 @@
             <a:endParaRPr lang="en-US" sz="1000" dirty="0"/>
           </a:p>
           <a:p>
-            <a:pPr indent="0" marL="0">
+            <a:pPr marL="0" indent="0">
               <a:spcAft>
                 <a:spcPts val="200"/>
               </a:spcAft>
@@ -12540,7 +12370,7 @@
             <a:endParaRPr lang="en-US" sz="1000" dirty="0"/>
           </a:p>
           <a:p>
-            <a:pPr indent="0" marL="0">
+            <a:pPr marL="0" indent="0">
               <a:spcAft>
                 <a:spcPts val="200"/>
               </a:spcAft>
@@ -12560,7 +12390,7 @@
             <a:endParaRPr lang="en-US" sz="1000" dirty="0"/>
           </a:p>
           <a:p>
-            <a:pPr indent="0" marL="0">
+            <a:pPr marL="0" indent="0">
               <a:spcAft>
                 <a:spcPts val="200"/>
               </a:spcAft>
@@ -12569,7 +12399,7 @@
             <a:endParaRPr lang="en-US" sz="1000" dirty="0"/>
           </a:p>
           <a:p>
-            <a:pPr indent="0" marL="0">
+            <a:pPr marL="0" indent="0">
               <a:spcAft>
                 <a:spcPts val="200"/>
               </a:spcAft>
@@ -12589,7 +12419,7 @@
             <a:endParaRPr lang="en-US" sz="1000" dirty="0"/>
           </a:p>
           <a:p>
-            <a:pPr indent="0" marL="0">
+            <a:pPr marL="0" indent="0">
               <a:spcAft>
                 <a:spcPts val="200"/>
               </a:spcAft>
@@ -12609,7 +12439,7 @@
             <a:endParaRPr lang="en-US" sz="1000" dirty="0"/>
           </a:p>
           <a:p>
-            <a:pPr indent="0" marL="0">
+            <a:pPr marL="0" indent="0">
               <a:spcAft>
                 <a:spcPts val="200"/>
               </a:spcAft>
@@ -12629,7 +12459,7 @@
             <a:endParaRPr lang="en-US" sz="1000" dirty="0"/>
           </a:p>
           <a:p>
-            <a:pPr indent="0" marL="0">
+            <a:pPr marL="0" indent="0">
               <a:spcAft>
                 <a:spcPts val="200"/>
               </a:spcAft>
@@ -12638,7 +12468,7 @@
             <a:endParaRPr lang="en-US" sz="1000" dirty="0"/>
           </a:p>
           <a:p>
-            <a:pPr indent="0" marL="0">
+            <a:pPr marL="0" indent="0">
               <a:spcAft>
                 <a:spcPts val="200"/>
               </a:spcAft>
@@ -12658,7 +12488,7 @@
             <a:endParaRPr lang="en-US" sz="1000" dirty="0"/>
           </a:p>
           <a:p>
-            <a:pPr indent="0" marL="0">
+            <a:pPr marL="0" indent="0">
               <a:spcAft>
                 <a:spcPts val="200"/>
               </a:spcAft>
@@ -12678,7 +12508,7 @@
             <a:endParaRPr lang="en-US" sz="1000" dirty="0"/>
           </a:p>
           <a:p>
-            <a:pPr indent="0" marL="0">
+            <a:pPr marL="0" indent="0">
               <a:spcAft>
                 <a:spcPts val="200"/>
               </a:spcAft>
@@ -12698,7 +12528,7 @@
             <a:endParaRPr lang="en-US" sz="1000" dirty="0"/>
           </a:p>
           <a:p>
-            <a:pPr indent="0" marL="0">
+            <a:pPr marL="0" indent="0">
               <a:spcAft>
                 <a:spcPts val="200"/>
               </a:spcAft>
@@ -12707,7 +12537,7 @@
             <a:endParaRPr lang="en-US" sz="1000" dirty="0"/>
           </a:p>
           <a:p>
-            <a:pPr indent="0" marL="0">
+            <a:pPr marL="0" indent="0">
               <a:spcAft>
                 <a:spcPts val="200"/>
               </a:spcAft>
@@ -12727,7 +12557,7 @@
             <a:endParaRPr lang="en-US" sz="1000" dirty="0"/>
           </a:p>
           <a:p>
-            <a:pPr indent="0" marL="0">
+            <a:pPr marL="0" indent="0">
               <a:spcAft>
                 <a:spcPts val="200"/>
               </a:spcAft>
@@ -12747,7 +12577,7 @@
             <a:endParaRPr lang="en-US" sz="1000" dirty="0"/>
           </a:p>
           <a:p>
-            <a:pPr indent="0" marL="0">
+            <a:pPr marL="0" indent="0">
               <a:spcAft>
                 <a:spcPts val="200"/>
               </a:spcAft>
@@ -12787,7 +12617,7 @@
           </a:solidFill>
           <a:ln/>
           <a:effectLst>
-            <a:outerShdw sx="100000" sy="100000" kx="0" ky="0" algn="bl" rotWithShape="0" blurRad="50800" dist="19050" dir="8100000">
+            <a:outerShdw blurRad="50800" dist="19050" dir="8100000" algn="bl" rotWithShape="0">
               <a:srgbClr val="000000">
                 <a:alpha val="8000"/>
               </a:srgbClr>
@@ -12836,7 +12666,7 @@
           <a:bodyPr wrap="square" lIns="0" tIns="0" rIns="0" bIns="0" rtlCol="0" anchor="ctr"/>
           <a:lstStyle/>
           <a:p>
-            <a:pPr indent="0" marL="0">
+            <a:pPr marL="0" indent="0">
               <a:buNone/>
             </a:pPr>
             <a:r>
@@ -12875,7 +12705,7 @@
           <a:bodyPr wrap="square" lIns="0" tIns="0" rIns="0" bIns="0" rtlCol="0" anchor="t"/>
           <a:lstStyle/>
           <a:p>
-            <a:pPr indent="0" marL="0">
+            <a:pPr marL="0" indent="0">
               <a:spcAft>
                 <a:spcPts val="200"/>
               </a:spcAft>
@@ -12895,7 +12725,7 @@
             <a:endParaRPr lang="en-US" sz="1000" dirty="0"/>
           </a:p>
           <a:p>
-            <a:pPr indent="0" marL="0">
+            <a:pPr marL="0" indent="0">
               <a:spcAft>
                 <a:spcPts val="200"/>
               </a:spcAft>
@@ -12915,7 +12745,7 @@
             <a:endParaRPr lang="en-US" sz="1000" dirty="0"/>
           </a:p>
           <a:p>
-            <a:pPr indent="0" marL="0">
+            <a:pPr marL="0" indent="0">
               <a:spcAft>
                 <a:spcPts val="200"/>
               </a:spcAft>
@@ -12935,7 +12765,7 @@
             <a:endParaRPr lang="en-US" sz="1000" dirty="0"/>
           </a:p>
           <a:p>
-            <a:pPr indent="0" marL="0">
+            <a:pPr marL="0" indent="0">
               <a:spcAft>
                 <a:spcPts val="200"/>
               </a:spcAft>
@@ -12955,7 +12785,7 @@
             <a:endParaRPr lang="en-US" sz="1000" dirty="0"/>
           </a:p>
           <a:p>
-            <a:pPr indent="0" marL="0">
+            <a:pPr marL="0" indent="0">
               <a:spcAft>
                 <a:spcPts val="200"/>
               </a:spcAft>
@@ -12975,7 +12805,7 @@
             <a:endParaRPr lang="en-US" sz="1000" dirty="0"/>
           </a:p>
           <a:p>
-            <a:pPr indent="0" marL="0">
+            <a:pPr marL="0" indent="0">
               <a:spcAft>
                 <a:spcPts val="200"/>
               </a:spcAft>
@@ -12995,7 +12825,7 @@
             <a:endParaRPr lang="en-US" sz="1000" dirty="0"/>
           </a:p>
           <a:p>
-            <a:pPr indent="0" marL="0">
+            <a:pPr marL="0" indent="0">
               <a:spcAft>
                 <a:spcPts val="200"/>
               </a:spcAft>
@@ -13004,7 +12834,7 @@
             <a:endParaRPr lang="en-US" sz="1000" dirty="0"/>
           </a:p>
           <a:p>
-            <a:pPr indent="0" marL="0">
+            <a:pPr marL="0" indent="0">
               <a:spcAft>
                 <a:spcPts val="200"/>
               </a:spcAft>
@@ -13024,7 +12854,7 @@
             <a:endParaRPr lang="en-US" sz="1000" dirty="0"/>
           </a:p>
           <a:p>
-            <a:pPr indent="0" marL="0">
+            <a:pPr marL="0" indent="0">
               <a:spcAft>
                 <a:spcPts val="200"/>
               </a:spcAft>
@@ -13044,7 +12874,7 @@
             <a:endParaRPr lang="en-US" sz="1000" dirty="0"/>
           </a:p>
           <a:p>
-            <a:pPr indent="0" marL="0">
+            <a:pPr marL="0" indent="0">
               <a:spcAft>
                 <a:spcPts val="200"/>
               </a:spcAft>
@@ -13064,7 +12894,7 @@
             <a:endParaRPr lang="en-US" sz="1000" dirty="0"/>
           </a:p>
           <a:p>
-            <a:pPr indent="0" marL="0">
+            <a:pPr marL="0" indent="0">
               <a:spcAft>
                 <a:spcPts val="200"/>
               </a:spcAft>
@@ -13073,7 +12903,7 @@
             <a:endParaRPr lang="en-US" sz="1000" dirty="0"/>
           </a:p>
           <a:p>
-            <a:pPr indent="0" marL="0">
+            <a:pPr marL="0" indent="0">
               <a:spcAft>
                 <a:spcPts val="200"/>
               </a:spcAft>
@@ -13093,7 +12923,7 @@
             <a:endParaRPr lang="en-US" sz="1000" dirty="0"/>
           </a:p>
           <a:p>
-            <a:pPr indent="0" marL="0">
+            <a:pPr marL="0" indent="0">
               <a:spcAft>
                 <a:spcPts val="200"/>
               </a:spcAft>
@@ -13113,7 +12943,7 @@
             <a:endParaRPr lang="en-US" sz="1000" dirty="0"/>
           </a:p>
           <a:p>
-            <a:pPr indent="0" marL="0">
+            <a:pPr marL="0" indent="0">
               <a:spcAft>
                 <a:spcPts val="200"/>
               </a:spcAft>
@@ -13133,7 +12963,7 @@
             <a:endParaRPr lang="en-US" sz="1000" dirty="0"/>
           </a:p>
           <a:p>
-            <a:pPr indent="0" marL="0">
+            <a:pPr marL="0" indent="0">
               <a:spcAft>
                 <a:spcPts val="200"/>
               </a:spcAft>
@@ -13173,7 +13003,7 @@
           </a:solidFill>
           <a:ln/>
           <a:effectLst>
-            <a:outerShdw sx="100000" sy="100000" kx="0" ky="0" algn="bl" rotWithShape="0" blurRad="50800" dist="19050" dir="8100000">
+            <a:outerShdw blurRad="50800" dist="19050" dir="8100000" algn="bl" rotWithShape="0">
               <a:srgbClr val="000000">
                 <a:alpha val="8000"/>
               </a:srgbClr>
@@ -13222,7 +13052,7 @@
           <a:bodyPr wrap="square" lIns="0" tIns="0" rIns="0" bIns="0" rtlCol="0" anchor="ctr"/>
           <a:lstStyle/>
           <a:p>
-            <a:pPr indent="0" marL="0">
+            <a:pPr marL="0" indent="0">
               <a:buNone/>
             </a:pPr>
             <a:r>
@@ -13261,7 +13091,7 @@
           <a:bodyPr wrap="square" lIns="0" tIns="0" rIns="0" bIns="0" rtlCol="0" anchor="t"/>
           <a:lstStyle/>
           <a:p>
-            <a:pPr indent="0" marL="0">
+            <a:pPr marL="0" indent="0">
               <a:spcAft>
                 <a:spcPts val="200"/>
               </a:spcAft>
@@ -13281,7 +13111,7 @@
             <a:endParaRPr lang="en-US" sz="1000" dirty="0"/>
           </a:p>
           <a:p>
-            <a:pPr indent="0" marL="0">
+            <a:pPr marL="0" indent="0">
               <a:spcAft>
                 <a:spcPts val="200"/>
               </a:spcAft>
@@ -13301,7 +13131,7 @@
             <a:endParaRPr lang="en-US" sz="1000" dirty="0"/>
           </a:p>
           <a:p>
-            <a:pPr indent="0" marL="0">
+            <a:pPr marL="0" indent="0">
               <a:spcAft>
                 <a:spcPts val="200"/>
               </a:spcAft>
@@ -13321,7 +13151,7 @@
             <a:endParaRPr lang="en-US" sz="1000" dirty="0"/>
           </a:p>
           <a:p>
-            <a:pPr indent="0" marL="0">
+            <a:pPr marL="0" indent="0">
               <a:spcAft>
                 <a:spcPts val="200"/>
               </a:spcAft>
@@ -13341,7 +13171,7 @@
             <a:endParaRPr lang="en-US" sz="1000" dirty="0"/>
           </a:p>
           <a:p>
-            <a:pPr indent="0" marL="0">
+            <a:pPr marL="0" indent="0">
               <a:spcAft>
                 <a:spcPts val="200"/>
               </a:spcAft>
@@ -13361,7 +13191,7 @@
             <a:endParaRPr lang="en-US" sz="1000" dirty="0"/>
           </a:p>
           <a:p>
-            <a:pPr indent="0" marL="0">
+            <a:pPr marL="0" indent="0">
               <a:spcAft>
                 <a:spcPts val="200"/>
               </a:spcAft>
@@ -13370,7 +13200,7 @@
             <a:endParaRPr lang="en-US" sz="1000" dirty="0"/>
           </a:p>
           <a:p>
-            <a:pPr indent="0" marL="0">
+            <a:pPr marL="0" indent="0">
               <a:spcAft>
                 <a:spcPts val="200"/>
               </a:spcAft>
@@ -13390,7 +13220,7 @@
             <a:endParaRPr lang="en-US" sz="1000" dirty="0"/>
           </a:p>
           <a:p>
-            <a:pPr indent="0" marL="0">
+            <a:pPr marL="0" indent="0">
               <a:spcAft>
                 <a:spcPts val="200"/>
               </a:spcAft>
@@ -13410,7 +13240,7 @@
             <a:endParaRPr lang="en-US" sz="1000" dirty="0"/>
           </a:p>
           <a:p>
-            <a:pPr indent="0" marL="0">
+            <a:pPr marL="0" indent="0">
               <a:spcAft>
                 <a:spcPts val="200"/>
               </a:spcAft>
@@ -13430,7 +13260,7 @@
             <a:endParaRPr lang="en-US" sz="1000" dirty="0"/>
           </a:p>
           <a:p>
-            <a:pPr indent="0" marL="0">
+            <a:pPr marL="0" indent="0">
               <a:spcAft>
                 <a:spcPts val="200"/>
               </a:spcAft>
@@ -13439,7 +13269,7 @@
             <a:endParaRPr lang="en-US" sz="1000" dirty="0"/>
           </a:p>
           <a:p>
-            <a:pPr indent="0" marL="0">
+            <a:pPr marL="0" indent="0">
               <a:spcAft>
                 <a:spcPts val="200"/>
               </a:spcAft>
@@ -13459,7 +13289,7 @@
             <a:endParaRPr lang="en-US" sz="1000" dirty="0"/>
           </a:p>
           <a:p>
-            <a:pPr indent="0" marL="0">
+            <a:pPr marL="0" indent="0">
               <a:spcAft>
                 <a:spcPts val="200"/>
               </a:spcAft>
@@ -13479,7 +13309,7 @@
             <a:endParaRPr lang="en-US" sz="1000" dirty="0"/>
           </a:p>
           <a:p>
-            <a:pPr indent="0" marL="0">
+            <a:pPr marL="0" indent="0">
               <a:spcAft>
                 <a:spcPts val="200"/>
               </a:spcAft>
@@ -13499,7 +13329,7 @@
             <a:endParaRPr lang="en-US" sz="1000" dirty="0"/>
           </a:p>
           <a:p>
-            <a:pPr indent="0" marL="0">
+            <a:pPr marL="0" indent="0">
               <a:spcAft>
                 <a:spcPts val="200"/>
               </a:spcAft>
@@ -13519,7 +13349,7 @@
             <a:endParaRPr lang="en-US" sz="1000" dirty="0"/>
           </a:p>
           <a:p>
-            <a:pPr indent="0" marL="0">
+            <a:pPr marL="0" indent="0">
               <a:spcAft>
                 <a:spcPts val="200"/>
               </a:spcAft>
@@ -13561,7 +13391,7 @@
           <a:bodyPr wrap="square" lIns="0" tIns="0" rIns="0" bIns="0" rtlCol="0" anchor="ctr"/>
           <a:lstStyle/>
           <a:p>
-            <a:pPr indent="0" marL="0">
+            <a:pPr marL="0" indent="0">
               <a:buNone/>
             </a:pPr>
             <a:r>
@@ -13600,7 +13430,7 @@
           <a:bodyPr wrap="square" rtlCol="0" anchor="ctr"/>
           <a:lstStyle/>
           <a:p>
-            <a:pPr algn="r" indent="0" marL="0">
+            <a:pPr marL="0" indent="0" algn="r">
               <a:buNone/>
             </a:pPr>
             <a:r>
@@ -13634,6 +13464,7 @@
         <a:solidFill>
           <a:srgbClr val="F7F9FC"/>
         </a:solidFill>
+        <a:effectLst/>
       </p:bgPr>
     </p:bg>
     <p:spTree>
@@ -13671,7 +13502,7 @@
           <a:bodyPr wrap="square" lIns="0" tIns="0" rIns="0" bIns="0" rtlCol="0" anchor="ctr"/>
           <a:lstStyle/>
           <a:p>
-            <a:pPr indent="0" marL="0">
+            <a:pPr marL="0" indent="0">
               <a:buNone/>
             </a:pPr>
             <a:r>
@@ -13708,7 +13539,7 @@
           </a:solidFill>
           <a:ln/>
           <a:effectLst>
-            <a:outerShdw sx="100000" sy="100000" kx="0" ky="0" algn="bl" rotWithShape="0" blurRad="50800" dist="19050" dir="8100000">
+            <a:outerShdw blurRad="50800" dist="19050" dir="8100000" algn="bl" rotWithShape="0">
               <a:srgbClr val="000000">
                 <a:alpha val="8000"/>
               </a:srgbClr>
@@ -13757,7 +13588,7 @@
           <a:bodyPr wrap="square" lIns="0" tIns="0" rIns="0" bIns="0" rtlCol="0" anchor="ctr"/>
           <a:lstStyle/>
           <a:p>
-            <a:pPr indent="0" marL="0">
+            <a:pPr marL="0" indent="0">
               <a:buNone/>
             </a:pPr>
             <a:r>
@@ -13796,7 +13627,7 @@
           <a:bodyPr wrap="square" lIns="0" tIns="0" rIns="0" bIns="0" rtlCol="0" anchor="t"/>
           <a:lstStyle/>
           <a:p>
-            <a:pPr indent="0" marL="0">
+            <a:pPr marL="0" indent="0">
               <a:buNone/>
             </a:pPr>
             <a:r>
@@ -13813,7 +13644,7 @@
             <a:endParaRPr lang="en-US" sz="1000" dirty="0"/>
           </a:p>
           <a:p>
-            <a:pPr indent="0" marL="0">
+            <a:pPr marL="0" indent="0">
               <a:buNone/>
             </a:pPr>
             <a:r>
@@ -13830,13 +13661,13 @@
             <a:endParaRPr lang="en-US" sz="1000" dirty="0"/>
           </a:p>
           <a:p>
-            <a:pPr indent="0" marL="0">
+            <a:pPr marL="0" indent="0">
               <a:buNone/>
             </a:pPr>
             <a:endParaRPr lang="en-US" sz="1000" dirty="0"/>
           </a:p>
           <a:p>
-            <a:pPr indent="0" marL="0">
+            <a:pPr marL="0" indent="0">
               <a:buNone/>
             </a:pPr>
             <a:r>
@@ -13853,7 +13684,7 @@
             <a:endParaRPr lang="en-US" sz="1000" dirty="0"/>
           </a:p>
           <a:p>
-            <a:pPr indent="0" marL="0">
+            <a:pPr marL="0" indent="0">
               <a:buNone/>
             </a:pPr>
             <a:r>
@@ -13870,7 +13701,7 @@
             <a:endParaRPr lang="en-US" sz="1000" dirty="0"/>
           </a:p>
           <a:p>
-            <a:pPr indent="0" marL="0">
+            <a:pPr marL="0" indent="0">
               <a:buNone/>
             </a:pPr>
             <a:r>
@@ -13907,7 +13738,7 @@
           </a:solidFill>
           <a:ln/>
           <a:effectLst>
-            <a:outerShdw sx="100000" sy="100000" kx="0" ky="0" algn="bl" rotWithShape="0" blurRad="50800" dist="19050" dir="8100000">
+            <a:outerShdw blurRad="50800" dist="19050" dir="8100000" algn="bl" rotWithShape="0">
               <a:srgbClr val="000000">
                 <a:alpha val="8000"/>
               </a:srgbClr>
@@ -13956,7 +13787,7 @@
           <a:bodyPr wrap="square" lIns="0" tIns="0" rIns="0" bIns="0" rtlCol="0" anchor="ctr"/>
           <a:lstStyle/>
           <a:p>
-            <a:pPr indent="0" marL="0">
+            <a:pPr marL="0" indent="0">
               <a:buNone/>
             </a:pPr>
             <a:r>
@@ -13995,7 +13826,7 @@
           <a:bodyPr wrap="square" lIns="0" tIns="0" rIns="0" bIns="0" rtlCol="0" anchor="t"/>
           <a:lstStyle/>
           <a:p>
-            <a:pPr indent="0" marL="0">
+            <a:pPr marL="0" indent="0">
               <a:buNone/>
             </a:pPr>
             <a:r>
@@ -14012,7 +13843,7 @@
             <a:endParaRPr lang="en-US" sz="1000" dirty="0"/>
           </a:p>
           <a:p>
-            <a:pPr indent="0" marL="0">
+            <a:pPr marL="0" indent="0">
               <a:buNone/>
             </a:pPr>
             <a:r>
@@ -14029,13 +13860,13 @@
             <a:endParaRPr lang="en-US" sz="1000" dirty="0"/>
           </a:p>
           <a:p>
-            <a:pPr indent="0" marL="0">
+            <a:pPr marL="0" indent="0">
               <a:buNone/>
             </a:pPr>
             <a:endParaRPr lang="en-US" sz="1000" dirty="0"/>
           </a:p>
           <a:p>
-            <a:pPr indent="0" marL="0">
+            <a:pPr marL="0" indent="0">
               <a:buNone/>
             </a:pPr>
             <a:r>
@@ -14052,7 +13883,7 @@
             <a:endParaRPr lang="en-US" sz="1000" dirty="0"/>
           </a:p>
           <a:p>
-            <a:pPr indent="0" marL="0">
+            <a:pPr marL="0" indent="0">
               <a:buNone/>
             </a:pPr>
             <a:r>
@@ -14069,7 +13900,7 @@
             <a:endParaRPr lang="en-US" sz="1000" dirty="0"/>
           </a:p>
           <a:p>
-            <a:pPr indent="0" marL="0">
+            <a:pPr marL="0" indent="0">
               <a:buNone/>
             </a:pPr>
             <a:r>
@@ -14148,7 +13979,7 @@
           <a:bodyPr wrap="square" lIns="0" tIns="0" rIns="0" bIns="0" rtlCol="0" anchor="ctr"/>
           <a:lstStyle/>
           <a:p>
-            <a:pPr indent="0" marL="0">
+            <a:pPr marL="0" indent="0">
               <a:buNone/>
             </a:pPr>
             <a:r>
@@ -14187,7 +14018,7 @@
           <a:bodyPr wrap="square" lIns="0" tIns="0" rIns="0" bIns="0" rtlCol="0" anchor="ctr"/>
           <a:lstStyle/>
           <a:p>
-            <a:pPr indent="0" marL="0">
+            <a:pPr marL="0" indent="0">
               <a:buNone/>
             </a:pPr>
             <a:r>
@@ -14201,9 +14032,6 @@
               </a:rPr>
               <a:t>signal_raw =   </a:t>
             </a:r>
-            <a:pPr indent="0" marL="0">
-              <a:buNone/>
-            </a:pPr>
             <a:r>
               <a:rPr lang="en-US" sz="1100" b="1" dirty="0">
                 <a:solidFill>
@@ -14215,9 +14043,6 @@
               </a:rPr>
               <a:t>𝟙[MA(5)&gt;MA(20)]</a:t>
             </a:r>
-            <a:pPr indent="0" marL="0">
-              <a:buNone/>
-            </a:pPr>
             <a:r>
               <a:rPr lang="en-US" sz="1100" dirty="0">
                 <a:solidFill>
@@ -14229,9 +14054,6 @@
               </a:rPr>
               <a:t>  ∧  </a:t>
             </a:r>
-            <a:pPr indent="0" marL="0">
-              <a:buNone/>
-            </a:pPr>
             <a:r>
               <a:rPr lang="en-US" sz="1100" b="1" dirty="0">
                 <a:solidFill>
@@ -14243,9 +14065,6 @@
               </a:rPr>
               <a:t>𝟙[MACD柱&gt;0]</a:t>
             </a:r>
-            <a:pPr indent="0" marL="0">
-              <a:buNone/>
-            </a:pPr>
             <a:r>
               <a:rPr lang="en-US" sz="1100" dirty="0">
                 <a:solidFill>
@@ -14257,9 +14076,6 @@
               </a:rPr>
               <a:t>  ∧  </a:t>
             </a:r>
-            <a:pPr indent="0" marL="0">
-              <a:buNone/>
-            </a:pPr>
             <a:r>
               <a:rPr lang="en-US" sz="1100" b="1" dirty="0">
                 <a:solidFill>
@@ -14271,9 +14087,6 @@
               </a:rPr>
               <a:t>𝟙[RSI&lt;70]</a:t>
             </a:r>
-            <a:pPr indent="0" marL="0">
-              <a:buNone/>
-            </a:pPr>
             <a:r>
               <a:rPr lang="en-US" sz="1100" dirty="0">
                 <a:solidFill>
@@ -14285,9 +14098,6 @@
               </a:rPr>
               <a:t>  ∧  </a:t>
             </a:r>
-            <a:pPr indent="0" marL="0">
-              <a:buNone/>
-            </a:pPr>
             <a:r>
               <a:rPr lang="en-US" sz="1100" b="1" dirty="0">
                 <a:solidFill>
@@ -14299,9 +14109,6 @@
               </a:rPr>
               <a:t>𝟙[close&gt;BBˡᵒʷᵉʳ]</a:t>
             </a:r>
-            <a:pPr indent="0" marL="0">
-              <a:buNone/>
-            </a:pPr>
             <a:r>
               <a:rPr lang="en-US" sz="1100" dirty="0">
                 <a:solidFill>
@@ -14313,9 +14120,6 @@
               </a:rPr>
               <a:t>  ∧  </a:t>
             </a:r>
-            <a:pPr indent="0" marL="0">
-              <a:buNone/>
-            </a:pPr>
             <a:r>
               <a:rPr lang="en-US" sz="1100" b="1" dirty="0">
                 <a:solidFill>
@@ -14352,7 +14156,7 @@
           <a:bodyPr wrap="square" lIns="0" tIns="0" rIns="0" bIns="0" rtlCol="0" anchor="t"/>
           <a:lstStyle/>
           <a:p>
-            <a:pPr indent="0" marL="0">
+            <a:pPr marL="0" indent="0">
               <a:buNone/>
             </a:pPr>
             <a:r>
@@ -14369,7 +14173,7 @@
             <a:endParaRPr lang="en-US" sz="1150" dirty="0"/>
           </a:p>
           <a:p>
-            <a:pPr indent="0" marL="0">
+            <a:pPr marL="0" indent="0">
               <a:buNone/>
             </a:pPr>
             <a:r>
@@ -14386,7 +14190,7 @@
             <a:endParaRPr lang="en-US" sz="1150" dirty="0"/>
           </a:p>
           <a:p>
-            <a:pPr indent="0" marL="0">
+            <a:pPr marL="0" indent="0">
               <a:buNone/>
             </a:pPr>
             <a:r>
@@ -14403,7 +14207,7 @@
             <a:endParaRPr lang="en-US" sz="1150" dirty="0"/>
           </a:p>
           <a:p>
-            <a:pPr indent="0" marL="0">
+            <a:pPr marL="0" indent="0">
               <a:buNone/>
             </a:pPr>
             <a:r>
@@ -14462,7 +14266,7 @@
           <a:bodyPr wrap="square" lIns="0" tIns="0" rIns="0" bIns="0" rtlCol="0" anchor="ctr"/>
           <a:lstStyle/>
           <a:p>
-            <a:pPr indent="0" marL="0">
+            <a:pPr marL="0" indent="0">
               <a:buNone/>
             </a:pPr>
             <a:r>
@@ -14501,7 +14305,7 @@
           <a:bodyPr wrap="square" lIns="0" tIns="0" rIns="0" bIns="0" rtlCol="0" anchor="t"/>
           <a:lstStyle/>
           <a:p>
-            <a:pPr indent="0" marL="0">
+            <a:pPr marL="0" indent="0">
               <a:spcAft>
                 <a:spcPts val="200"/>
               </a:spcAft>
@@ -14521,7 +14325,7 @@
             <a:endParaRPr lang="en-US" sz="1000" dirty="0"/>
           </a:p>
           <a:p>
-            <a:pPr indent="0" marL="0">
+            <a:pPr marL="0" indent="0">
               <a:spcAft>
                 <a:spcPts val="200"/>
               </a:spcAft>
@@ -14541,7 +14345,7 @@
             <a:endParaRPr lang="en-US" sz="1000" dirty="0"/>
           </a:p>
           <a:p>
-            <a:pPr indent="0" marL="0">
+            <a:pPr marL="0" indent="0">
               <a:spcAft>
                 <a:spcPts val="200"/>
               </a:spcAft>
@@ -14561,7 +14365,7 @@
             <a:endParaRPr lang="en-US" sz="1000" dirty="0"/>
           </a:p>
           <a:p>
-            <a:pPr indent="0" marL="0">
+            <a:pPr marL="0" indent="0">
               <a:spcAft>
                 <a:spcPts val="200"/>
               </a:spcAft>
@@ -14581,7 +14385,7 @@
             <a:endParaRPr lang="en-US" sz="1000" dirty="0"/>
           </a:p>
           <a:p>
-            <a:pPr indent="0" marL="0">
+            <a:pPr marL="0" indent="0">
               <a:spcAft>
                 <a:spcPts val="200"/>
               </a:spcAft>
@@ -14623,7 +14427,7 @@
           <a:bodyPr wrap="square" rtlCol="0" anchor="ctr"/>
           <a:lstStyle/>
           <a:p>
-            <a:pPr algn="r" indent="0" marL="0">
+            <a:pPr marL="0" indent="0" algn="r">
               <a:buNone/>
             </a:pPr>
             <a:r>
@@ -14657,6 +14461,7 @@
         <a:solidFill>
           <a:srgbClr val="F7F9FC"/>
         </a:solidFill>
+        <a:effectLst/>
       </p:bgPr>
     </p:bg>
     <p:spTree>
@@ -14694,7 +14499,7 @@
           <a:bodyPr wrap="square" lIns="0" tIns="0" rIns="0" bIns="0" rtlCol="0" anchor="ctr"/>
           <a:lstStyle/>
           <a:p>
-            <a:pPr indent="0" marL="0">
+            <a:pPr marL="0" indent="0">
               <a:buNone/>
             </a:pPr>
             <a:r>
@@ -14731,7 +14536,7 @@
           </a:solidFill>
           <a:ln/>
           <a:effectLst>
-            <a:outerShdw sx="100000" sy="100000" kx="0" ky="0" algn="bl" rotWithShape="0" blurRad="50800" dist="19050" dir="8100000">
+            <a:outerShdw blurRad="50800" dist="19050" dir="8100000" algn="bl" rotWithShape="0">
               <a:srgbClr val="000000">
                 <a:alpha val="8000"/>
               </a:srgbClr>
@@ -14780,7 +14585,7 @@
           <a:bodyPr wrap="square" lIns="0" tIns="0" rIns="0" bIns="0" rtlCol="0" anchor="ctr"/>
           <a:lstStyle/>
           <a:p>
-            <a:pPr indent="0" marL="0">
+            <a:pPr marL="0" indent="0">
               <a:buNone/>
             </a:pPr>
             <a:r>
@@ -14819,7 +14624,7 @@
           <a:bodyPr wrap="square" lIns="0" tIns="0" rIns="0" bIns="0" rtlCol="0" anchor="t"/>
           <a:lstStyle/>
           <a:p>
-            <a:pPr indent="0" marL="0">
+            <a:pPr marL="0" indent="0">
               <a:spcAft>
                 <a:spcPts val="200"/>
               </a:spcAft>
@@ -14839,7 +14644,7 @@
             <a:endParaRPr lang="en-US" sz="850" dirty="0"/>
           </a:p>
           <a:p>
-            <a:pPr indent="0" marL="0">
+            <a:pPr marL="0" indent="0">
               <a:spcAft>
                 <a:spcPts val="200"/>
               </a:spcAft>
@@ -14859,7 +14664,7 @@
             <a:endParaRPr lang="en-US" sz="850" dirty="0"/>
           </a:p>
           <a:p>
-            <a:pPr indent="0" marL="0">
+            <a:pPr marL="0" indent="0">
               <a:spcAft>
                 <a:spcPts val="200"/>
               </a:spcAft>
@@ -14879,7 +14684,7 @@
             <a:endParaRPr lang="en-US" sz="850" dirty="0"/>
           </a:p>
           <a:p>
-            <a:pPr indent="0" marL="0">
+            <a:pPr marL="0" indent="0">
               <a:spcAft>
                 <a:spcPts val="200"/>
               </a:spcAft>
@@ -14899,7 +14704,7 @@
             <a:endParaRPr lang="en-US" sz="850" dirty="0"/>
           </a:p>
           <a:p>
-            <a:pPr indent="0" marL="0">
+            <a:pPr marL="0" indent="0">
               <a:spcAft>
                 <a:spcPts val="200"/>
               </a:spcAft>
@@ -14919,7 +14724,7 @@
             <a:endParaRPr lang="en-US" sz="850" dirty="0"/>
           </a:p>
           <a:p>
-            <a:pPr indent="0" marL="0">
+            <a:pPr marL="0" indent="0">
               <a:spcAft>
                 <a:spcPts val="200"/>
               </a:spcAft>
@@ -14939,7 +14744,7 @@
             <a:endParaRPr lang="en-US" sz="850" dirty="0"/>
           </a:p>
           <a:p>
-            <a:pPr indent="0" marL="0">
+            <a:pPr marL="0" indent="0">
               <a:spcAft>
                 <a:spcPts val="200"/>
               </a:spcAft>
@@ -14959,7 +14764,7 @@
             <a:endParaRPr lang="en-US" sz="850" dirty="0"/>
           </a:p>
           <a:p>
-            <a:pPr indent="0" marL="0">
+            <a:pPr marL="0" indent="0">
               <a:spcAft>
                 <a:spcPts val="200"/>
               </a:spcAft>
@@ -14979,7 +14784,7 @@
             <a:endParaRPr lang="en-US" sz="850" dirty="0"/>
           </a:p>
           <a:p>
-            <a:pPr indent="0" marL="0">
+            <a:pPr marL="0" indent="0">
               <a:spcAft>
                 <a:spcPts val="200"/>
               </a:spcAft>
@@ -14988,7 +14793,7 @@
             <a:endParaRPr lang="en-US" sz="850" dirty="0"/>
           </a:p>
           <a:p>
-            <a:pPr indent="0" marL="0">
+            <a:pPr marL="0" indent="0">
               <a:spcAft>
                 <a:spcPts val="200"/>
               </a:spcAft>
@@ -15008,7 +14813,7 @@
             <a:endParaRPr lang="en-US" sz="850" dirty="0"/>
           </a:p>
           <a:p>
-            <a:pPr indent="0" marL="0">
+            <a:pPr marL="0" indent="0">
               <a:spcAft>
                 <a:spcPts val="200"/>
               </a:spcAft>
@@ -15028,7 +14833,7 @@
             <a:endParaRPr lang="en-US" sz="850" dirty="0"/>
           </a:p>
           <a:p>
-            <a:pPr indent="0" marL="0">
+            <a:pPr marL="0" indent="0">
               <a:spcAft>
                 <a:spcPts val="200"/>
               </a:spcAft>
@@ -15068,7 +14873,7 @@
           </a:solidFill>
           <a:ln/>
           <a:effectLst>
-            <a:outerShdw sx="100000" sy="100000" kx="0" ky="0" algn="bl" rotWithShape="0" blurRad="50800" dist="19050" dir="8100000">
+            <a:outerShdw blurRad="50800" dist="19050" dir="8100000" algn="bl" rotWithShape="0">
               <a:srgbClr val="000000">
                 <a:alpha val="8000"/>
               </a:srgbClr>
@@ -15117,7 +14922,7 @@
           <a:bodyPr wrap="square" lIns="0" tIns="0" rIns="0" bIns="0" rtlCol="0" anchor="ctr"/>
           <a:lstStyle/>
           <a:p>
-            <a:pPr indent="0" marL="0">
+            <a:pPr marL="0" indent="0">
               <a:buNone/>
             </a:pPr>
             <a:r>
@@ -15156,7 +14961,7 @@
           <a:bodyPr wrap="square" lIns="0" tIns="0" rIns="0" bIns="0" rtlCol="0" anchor="t"/>
           <a:lstStyle/>
           <a:p>
-            <a:pPr indent="0" marL="0">
+            <a:pPr marL="0" indent="0">
               <a:spcAft>
                 <a:spcPts val="200"/>
               </a:spcAft>
@@ -15176,7 +14981,7 @@
             <a:endParaRPr lang="en-US" sz="800" dirty="0"/>
           </a:p>
           <a:p>
-            <a:pPr indent="0" marL="0">
+            <a:pPr marL="0" indent="0">
               <a:spcAft>
                 <a:spcPts val="200"/>
               </a:spcAft>
@@ -15196,7 +15001,7 @@
             <a:endParaRPr lang="en-US" sz="800" dirty="0"/>
           </a:p>
           <a:p>
-            <a:pPr indent="0" marL="0">
+            <a:pPr marL="0" indent="0">
               <a:spcAft>
                 <a:spcPts val="200"/>
               </a:spcAft>
@@ -15216,7 +15021,7 @@
             <a:endParaRPr lang="en-US" sz="800" dirty="0"/>
           </a:p>
           <a:p>
-            <a:pPr indent="0" marL="0">
+            <a:pPr marL="0" indent="0">
               <a:spcAft>
                 <a:spcPts val="200"/>
               </a:spcAft>
@@ -15236,7 +15041,7 @@
             <a:endParaRPr lang="en-US" sz="800" dirty="0"/>
           </a:p>
           <a:p>
-            <a:pPr indent="0" marL="0">
+            <a:pPr marL="0" indent="0">
               <a:spcAft>
                 <a:spcPts val="200"/>
               </a:spcAft>
@@ -15256,7 +15061,7 @@
             <a:endParaRPr lang="en-US" sz="800" dirty="0"/>
           </a:p>
           <a:p>
-            <a:pPr indent="0" marL="0">
+            <a:pPr marL="0" indent="0">
               <a:spcAft>
                 <a:spcPts val="200"/>
               </a:spcAft>
@@ -15265,7 +15070,7 @@
             <a:endParaRPr lang="en-US" sz="800" dirty="0"/>
           </a:p>
           <a:p>
-            <a:pPr indent="0" marL="0">
+            <a:pPr marL="0" indent="0">
               <a:spcAft>
                 <a:spcPts val="200"/>
               </a:spcAft>
@@ -15285,7 +15090,7 @@
             <a:endParaRPr lang="en-US" sz="800" dirty="0"/>
           </a:p>
           <a:p>
-            <a:pPr indent="0" marL="0">
+            <a:pPr marL="0" indent="0">
               <a:spcAft>
                 <a:spcPts val="200"/>
               </a:spcAft>
@@ -15305,7 +15110,7 @@
             <a:endParaRPr lang="en-US" sz="800" dirty="0"/>
           </a:p>
           <a:p>
-            <a:pPr indent="0" marL="0">
+            <a:pPr marL="0" indent="0">
               <a:spcAft>
                 <a:spcPts val="200"/>
               </a:spcAft>
@@ -15314,7 +15119,7 @@
             <a:endParaRPr lang="en-US" sz="800" dirty="0"/>
           </a:p>
           <a:p>
-            <a:pPr indent="0" marL="0">
+            <a:pPr marL="0" indent="0">
               <a:spcAft>
                 <a:spcPts val="200"/>
               </a:spcAft>
@@ -15334,7 +15139,7 @@
             <a:endParaRPr lang="en-US" sz="800" dirty="0"/>
           </a:p>
           <a:p>
-            <a:pPr indent="0" marL="0">
+            <a:pPr marL="0" indent="0">
               <a:spcAft>
                 <a:spcPts val="200"/>
               </a:spcAft>
@@ -15354,7 +15159,7 @@
             <a:endParaRPr lang="en-US" sz="800" dirty="0"/>
           </a:p>
           <a:p>
-            <a:pPr indent="0" marL="0">
+            <a:pPr marL="0" indent="0">
               <a:spcAft>
                 <a:spcPts val="200"/>
               </a:spcAft>
@@ -15436,7 +15241,7 @@
           <a:bodyPr wrap="square" lIns="0" tIns="0" rIns="0" bIns="0" rtlCol="0" anchor="ctr"/>
           <a:lstStyle/>
           <a:p>
-            <a:pPr indent="0" marL="0">
+            <a:pPr marL="0" indent="0">
               <a:buNone/>
             </a:pPr>
             <a:r>
@@ -15475,7 +15280,7 @@
           <a:bodyPr wrap="square" lIns="0" tIns="0" rIns="0" bIns="0" rtlCol="0" anchor="t"/>
           <a:lstStyle/>
           <a:p>
-            <a:pPr indent="0" marL="0">
+            <a:pPr marL="0" indent="0">
               <a:spcAft>
                 <a:spcPts val="200"/>
               </a:spcAft>
@@ -15495,7 +15300,7 @@
             <a:endParaRPr lang="en-US" sz="900" dirty="0"/>
           </a:p>
           <a:p>
-            <a:pPr indent="0" marL="0">
+            <a:pPr marL="0" indent="0">
               <a:spcAft>
                 <a:spcPts val="200"/>
               </a:spcAft>
@@ -15515,7 +15320,7 @@
             <a:endParaRPr lang="en-US" sz="900" dirty="0"/>
           </a:p>
           <a:p>
-            <a:pPr indent="0" marL="0">
+            <a:pPr marL="0" indent="0">
               <a:spcAft>
                 <a:spcPts val="200"/>
               </a:spcAft>
@@ -15535,7 +15340,7 @@
             <a:endParaRPr lang="en-US" sz="900" dirty="0"/>
           </a:p>
           <a:p>
-            <a:pPr indent="0" marL="0">
+            <a:pPr marL="0" indent="0">
               <a:spcAft>
                 <a:spcPts val="200"/>
               </a:spcAft>
@@ -15555,7 +15360,7 @@
             <a:endParaRPr lang="en-US" sz="900" dirty="0"/>
           </a:p>
           <a:p>
-            <a:pPr indent="0" marL="0">
+            <a:pPr marL="0" indent="0">
               <a:spcAft>
                 <a:spcPts val="200"/>
               </a:spcAft>
@@ -15597,7 +15402,7 @@
           <a:bodyPr wrap="square" lIns="0" tIns="0" rIns="0" bIns="0" rtlCol="0" anchor="ctr"/>
           <a:lstStyle/>
           <a:p>
-            <a:pPr indent="0" marL="0">
+            <a:pPr marL="0" indent="0">
               <a:buNone/>
             </a:pPr>
             <a:r>
@@ -15636,7 +15441,7 @@
           <a:bodyPr wrap="square" lIns="0" tIns="0" rIns="0" bIns="0" rtlCol="0" anchor="t"/>
           <a:lstStyle/>
           <a:p>
-            <a:pPr indent="0" marL="0">
+            <a:pPr marL="0" indent="0">
               <a:buNone/>
             </a:pPr>
             <a:r>
@@ -15653,7 +15458,7 @@
             <a:endParaRPr lang="en-US" sz="900" dirty="0"/>
           </a:p>
           <a:p>
-            <a:pPr indent="0" marL="0">
+            <a:pPr marL="0" indent="0">
               <a:buNone/>
             </a:pPr>
             <a:r>
@@ -15670,7 +15475,7 @@
             <a:endParaRPr lang="en-US" sz="900" dirty="0"/>
           </a:p>
           <a:p>
-            <a:pPr indent="0" marL="0">
+            <a:pPr marL="0" indent="0">
               <a:buNone/>
             </a:pPr>
             <a:r>
@@ -15687,13 +15492,13 @@
             <a:endParaRPr lang="en-US" sz="900" dirty="0"/>
           </a:p>
           <a:p>
-            <a:pPr indent="0" marL="0">
+            <a:pPr marL="0" indent="0">
               <a:buNone/>
             </a:pPr>
             <a:endParaRPr lang="en-US" sz="900" dirty="0"/>
           </a:p>
           <a:p>
-            <a:pPr indent="0" marL="0">
+            <a:pPr marL="0" indent="0">
               <a:buNone/>
             </a:pPr>
             <a:r>
@@ -15710,7 +15515,7 @@
             <a:endParaRPr lang="en-US" sz="900" dirty="0"/>
           </a:p>
           <a:p>
-            <a:pPr indent="0" marL="0">
+            <a:pPr marL="0" indent="0">
               <a:buNone/>
             </a:pPr>
             <a:r>
@@ -15727,7 +15532,7 @@
             <a:endParaRPr lang="en-US" sz="900" dirty="0"/>
           </a:p>
           <a:p>
-            <a:pPr indent="0" marL="0">
+            <a:pPr marL="0" indent="0">
               <a:buNone/>
             </a:pPr>
             <a:r>
@@ -15744,7 +15549,7 @@
             <a:endParaRPr lang="en-US" sz="900" dirty="0"/>
           </a:p>
           <a:p>
-            <a:pPr indent="0" marL="0">
+            <a:pPr marL="0" indent="0">
               <a:buNone/>
             </a:pPr>
             <a:r>
@@ -15761,13 +15566,13 @@
             <a:endParaRPr lang="en-US" sz="900" dirty="0"/>
           </a:p>
           <a:p>
-            <a:pPr indent="0" marL="0">
+            <a:pPr marL="0" indent="0">
               <a:buNone/>
             </a:pPr>
             <a:endParaRPr lang="en-US" sz="900" dirty="0"/>
           </a:p>
           <a:p>
-            <a:pPr indent="0" marL="0">
+            <a:pPr marL="0" indent="0">
               <a:buNone/>
             </a:pPr>
             <a:r>
@@ -15806,7 +15611,7 @@
           <a:bodyPr wrap="square" rtlCol="0" anchor="ctr"/>
           <a:lstStyle/>
           <a:p>
-            <a:pPr algn="r" indent="0" marL="0">
+            <a:pPr marL="0" indent="0" algn="r">
               <a:buNone/>
             </a:pPr>
             <a:r>
@@ -15840,6 +15645,7 @@
         <a:solidFill>
           <a:srgbClr val="F7F9FC"/>
         </a:solidFill>
+        <a:effectLst/>
       </p:bgPr>
     </p:bg>
     <p:spTree>
@@ -15877,7 +15683,7 @@
           <a:bodyPr wrap="square" lIns="0" tIns="0" rIns="0" bIns="0" rtlCol="0" anchor="ctr"/>
           <a:lstStyle/>
           <a:p>
-            <a:pPr indent="0" marL="0">
+            <a:pPr marL="0" indent="0">
               <a:buNone/>
             </a:pPr>
             <a:r>
@@ -15914,7 +15720,7 @@
           </a:solidFill>
           <a:ln/>
           <a:effectLst>
-            <a:outerShdw sx="100000" sy="100000" kx="0" ky="0" algn="bl" rotWithShape="0" blurRad="50800" dist="19050" dir="8100000">
+            <a:outerShdw blurRad="50800" dist="19050" dir="8100000" algn="bl" rotWithShape="0">
               <a:srgbClr val="000000">
                 <a:alpha val="8000"/>
               </a:srgbClr>
@@ -15963,7 +15769,7 @@
           <a:bodyPr wrap="square" lIns="0" tIns="0" rIns="0" bIns="0" rtlCol="0" anchor="ctr"/>
           <a:lstStyle/>
           <a:p>
-            <a:pPr indent="0" marL="0">
+            <a:pPr marL="0" indent="0">
               <a:buNone/>
             </a:pPr>
             <a:r>
@@ -16002,7 +15808,7 @@
           <a:bodyPr wrap="square" lIns="0" tIns="0" rIns="0" bIns="0" rtlCol="0" anchor="t"/>
           <a:lstStyle/>
           <a:p>
-            <a:pPr indent="0" marL="0">
+            <a:pPr marL="0" indent="0">
               <a:buNone/>
             </a:pPr>
             <a:r>
@@ -16019,7 +15825,7 @@
             <a:endParaRPr lang="en-US" sz="1000" dirty="0"/>
           </a:p>
           <a:p>
-            <a:pPr indent="0" marL="0">
+            <a:pPr marL="0" indent="0">
               <a:buNone/>
             </a:pPr>
             <a:r>
@@ -16036,7 +15842,7 @@
             <a:endParaRPr lang="en-US" sz="1000" dirty="0"/>
           </a:p>
           <a:p>
-            <a:pPr indent="0" marL="0">
+            <a:pPr marL="0" indent="0">
               <a:buNone/>
             </a:pPr>
             <a:r>
@@ -16053,7 +15859,7 @@
             <a:endParaRPr lang="en-US" sz="1000" dirty="0"/>
           </a:p>
           <a:p>
-            <a:pPr indent="0" marL="0">
+            <a:pPr marL="0" indent="0">
               <a:buNone/>
             </a:pPr>
             <a:r>
@@ -16070,7 +15876,7 @@
             <a:endParaRPr lang="en-US" sz="1000" dirty="0"/>
           </a:p>
           <a:p>
-            <a:pPr indent="0" marL="0">
+            <a:pPr marL="0" indent="0">
               <a:buNone/>
             </a:pPr>
             <a:r>
@@ -16087,13 +15893,13 @@
             <a:endParaRPr lang="en-US" sz="1000" dirty="0"/>
           </a:p>
           <a:p>
-            <a:pPr indent="0" marL="0">
+            <a:pPr marL="0" indent="0">
               <a:buNone/>
             </a:pPr>
             <a:endParaRPr lang="en-US" sz="1000" dirty="0"/>
           </a:p>
           <a:p>
-            <a:pPr indent="0" marL="0">
+            <a:pPr marL="0" indent="0">
               <a:buNone/>
             </a:pPr>
             <a:r>
@@ -16110,7 +15916,7 @@
             <a:endParaRPr lang="en-US" sz="1000" dirty="0"/>
           </a:p>
           <a:p>
-            <a:pPr indent="0" marL="0">
+            <a:pPr marL="0" indent="0">
               <a:buNone/>
             </a:pPr>
             <a:r>
@@ -16147,7 +15953,7 @@
           </a:solidFill>
           <a:ln/>
           <a:effectLst>
-            <a:outerShdw sx="100000" sy="100000" kx="0" ky="0" algn="bl" rotWithShape="0" blurRad="50800" dist="19050" dir="8100000">
+            <a:outerShdw blurRad="50800" dist="19050" dir="8100000" algn="bl" rotWithShape="0">
               <a:srgbClr val="000000">
                 <a:alpha val="8000"/>
               </a:srgbClr>
@@ -16196,7 +16002,7 @@
           <a:bodyPr wrap="square" lIns="0" tIns="0" rIns="0" bIns="0" rtlCol="0" anchor="ctr"/>
           <a:lstStyle/>
           <a:p>
-            <a:pPr indent="0" marL="0">
+            <a:pPr marL="0" indent="0">
               <a:buNone/>
             </a:pPr>
             <a:r>
@@ -16235,7 +16041,7 @@
           <a:bodyPr wrap="square" lIns="0" tIns="0" rIns="0" bIns="0" rtlCol="0" anchor="t"/>
           <a:lstStyle/>
           <a:p>
-            <a:pPr indent="0" marL="0">
+            <a:pPr marL="0" indent="0">
               <a:buNone/>
             </a:pPr>
             <a:r>
@@ -16252,7 +16058,7 @@
             <a:endParaRPr lang="en-US" sz="1000" dirty="0"/>
           </a:p>
           <a:p>
-            <a:pPr indent="0" marL="0">
+            <a:pPr marL="0" indent="0">
               <a:buNone/>
             </a:pPr>
             <a:r>
@@ -16269,7 +16075,7 @@
             <a:endParaRPr lang="en-US" sz="1000" dirty="0"/>
           </a:p>
           <a:p>
-            <a:pPr indent="0" marL="0">
+            <a:pPr marL="0" indent="0">
               <a:buNone/>
             </a:pPr>
             <a:r>
@@ -16286,7 +16092,7 @@
             <a:endParaRPr lang="en-US" sz="1000" dirty="0"/>
           </a:p>
           <a:p>
-            <a:pPr indent="0" marL="0">
+            <a:pPr marL="0" indent="0">
               <a:buNone/>
             </a:pPr>
             <a:r>
@@ -16303,13 +16109,13 @@
             <a:endParaRPr lang="en-US" sz="1000" dirty="0"/>
           </a:p>
           <a:p>
-            <a:pPr indent="0" marL="0">
+            <a:pPr marL="0" indent="0">
               <a:buNone/>
             </a:pPr>
             <a:endParaRPr lang="en-US" sz="1000" dirty="0"/>
           </a:p>
           <a:p>
-            <a:pPr indent="0" marL="0">
+            <a:pPr marL="0" indent="0">
               <a:buNone/>
             </a:pPr>
             <a:r>
@@ -16326,7 +16132,7 @@
             <a:endParaRPr lang="en-US" sz="1000" dirty="0"/>
           </a:p>
           <a:p>
-            <a:pPr indent="0" marL="0">
+            <a:pPr marL="0" indent="0">
               <a:buNone/>
             </a:pPr>
             <a:r>
@@ -16363,7 +16169,7 @@
           </a:solidFill>
           <a:ln/>
           <a:effectLst>
-            <a:outerShdw sx="100000" sy="100000" kx="0" ky="0" algn="bl" rotWithShape="0" blurRad="50800" dist="19050" dir="8100000">
+            <a:outerShdw blurRad="50800" dist="19050" dir="8100000" algn="bl" rotWithShape="0">
               <a:srgbClr val="000000">
                 <a:alpha val="8000"/>
               </a:srgbClr>
@@ -16412,7 +16218,7 @@
           <a:bodyPr wrap="square" lIns="0" tIns="0" rIns="0" bIns="0" rtlCol="0" anchor="ctr"/>
           <a:lstStyle/>
           <a:p>
-            <a:pPr indent="0" marL="0">
+            <a:pPr marL="0" indent="0">
               <a:buNone/>
             </a:pPr>
             <a:r>
@@ -16451,7 +16257,7 @@
           <a:bodyPr wrap="square" lIns="0" tIns="0" rIns="0" bIns="0" rtlCol="0" anchor="t"/>
           <a:lstStyle/>
           <a:p>
-            <a:pPr indent="0" marL="0">
+            <a:pPr marL="0" indent="0">
               <a:buNone/>
             </a:pPr>
             <a:r>
@@ -16468,13 +16274,13 @@
             <a:endParaRPr lang="en-US" sz="1000" dirty="0"/>
           </a:p>
           <a:p>
-            <a:pPr indent="0" marL="0">
+            <a:pPr marL="0" indent="0">
               <a:buNone/>
             </a:pPr>
             <a:endParaRPr lang="en-US" sz="1000" dirty="0"/>
           </a:p>
           <a:p>
-            <a:pPr indent="0" marL="0">
+            <a:pPr marL="0" indent="0">
               <a:buNone/>
             </a:pPr>
             <a:r>
@@ -16491,7 +16297,7 @@
             <a:endParaRPr lang="en-US" sz="1000" dirty="0"/>
           </a:p>
           <a:p>
-            <a:pPr indent="0" marL="0">
+            <a:pPr marL="0" indent="0">
               <a:buNone/>
             </a:pPr>
             <a:r>
@@ -16508,7 +16314,7 @@
             <a:endParaRPr lang="en-US" sz="1000" dirty="0"/>
           </a:p>
           <a:p>
-            <a:pPr indent="0" marL="0">
+            <a:pPr marL="0" indent="0">
               <a:buNone/>
             </a:pPr>
             <a:r>
@@ -16525,13 +16331,13 @@
             <a:endParaRPr lang="en-US" sz="1000" dirty="0"/>
           </a:p>
           <a:p>
-            <a:pPr indent="0" marL="0">
+            <a:pPr marL="0" indent="0">
               <a:buNone/>
             </a:pPr>
             <a:endParaRPr lang="en-US" sz="1000" dirty="0"/>
           </a:p>
           <a:p>
-            <a:pPr indent="0" marL="0">
+            <a:pPr marL="0" indent="0">
               <a:buNone/>
             </a:pPr>
             <a:r>
@@ -16570,7 +16376,7 @@
           <a:bodyPr wrap="square" rtlCol="0" anchor="ctr"/>
           <a:lstStyle/>
           <a:p>
-            <a:pPr algn="r" indent="0" marL="0">
+            <a:pPr marL="0" indent="0" algn="r">
               <a:buNone/>
             </a:pPr>
             <a:r>
@@ -16604,6 +16410,7 @@
         <a:solidFill>
           <a:srgbClr val="F7F9FC"/>
         </a:solidFill>
+        <a:effectLst/>
       </p:bgPr>
     </p:bg>
     <p:spTree>
@@ -16641,7 +16448,7 @@
           <a:bodyPr wrap="square" lIns="0" tIns="0" rIns="0" bIns="0" rtlCol="0" anchor="ctr"/>
           <a:lstStyle/>
           <a:p>
-            <a:pPr indent="0" marL="0">
+            <a:pPr marL="0" indent="0">
               <a:buNone/>
             </a:pPr>
             <a:r>
@@ -16680,7 +16487,7 @@
           <a:bodyPr wrap="square" lIns="0" tIns="0" rIns="0" bIns="0" rtlCol="0" anchor="ctr"/>
           <a:lstStyle/>
           <a:p>
-            <a:pPr algn="ctr" indent="0" marL="0">
+            <a:pPr marL="0" indent="0" algn="ctr">
               <a:buNone/>
             </a:pPr>
             <a:r>
@@ -16719,7 +16526,7 @@
           <a:bodyPr wrap="square" lIns="0" tIns="0" rIns="0" bIns="0" rtlCol="0" anchor="ctr"/>
           <a:lstStyle/>
           <a:p>
-            <a:pPr algn="ctr" indent="0" marL="0">
+            <a:pPr marL="0" indent="0" algn="ctr">
               <a:buNone/>
             </a:pPr>
             <a:r>
@@ -16758,7 +16565,7 @@
           <a:bodyPr wrap="square" lIns="0" tIns="0" rIns="0" bIns="0" rtlCol="0" anchor="ctr"/>
           <a:lstStyle/>
           <a:p>
-            <a:pPr algn="ctr" indent="0" marL="0">
+            <a:pPr marL="0" indent="0" algn="ctr">
               <a:buNone/>
             </a:pPr>
             <a:r>
@@ -16797,7 +16604,7 @@
           <a:bodyPr wrap="square" lIns="0" tIns="0" rIns="0" bIns="0" rtlCol="0" anchor="ctr"/>
           <a:lstStyle/>
           <a:p>
-            <a:pPr algn="ctr" indent="0" marL="0">
+            <a:pPr marL="0" indent="0" algn="ctr">
               <a:buNone/>
             </a:pPr>
             <a:r>
@@ -16836,7 +16643,7 @@
           <a:bodyPr wrap="square" lIns="0" tIns="0" rIns="0" bIns="0" rtlCol="0" anchor="ctr"/>
           <a:lstStyle/>
           <a:p>
-            <a:pPr algn="ctr" indent="0" marL="0">
+            <a:pPr marL="0" indent="0" algn="ctr">
               <a:buNone/>
             </a:pPr>
             <a:r>
@@ -16875,7 +16682,7 @@
           <a:bodyPr wrap="square" lIns="0" tIns="0" rIns="0" bIns="0" rtlCol="0" anchor="ctr"/>
           <a:lstStyle/>
           <a:p>
-            <a:pPr algn="ctr" indent="0" marL="0">
+            <a:pPr marL="0" indent="0" algn="ctr">
               <a:buNone/>
             </a:pPr>
             <a:r>
@@ -16914,7 +16721,7 @@
           <a:bodyPr wrap="square" lIns="0" tIns="0" rIns="0" bIns="0" rtlCol="0" anchor="ctr"/>
           <a:lstStyle/>
           <a:p>
-            <a:pPr algn="ctr" indent="0" marL="0">
+            <a:pPr marL="0" indent="0" algn="ctr">
               <a:buNone/>
             </a:pPr>
             <a:r>
@@ -16953,7 +16760,7 @@
           <a:bodyPr wrap="square" lIns="0" tIns="0" rIns="0" bIns="0" rtlCol="0" anchor="ctr"/>
           <a:lstStyle/>
           <a:p>
-            <a:pPr algn="ctr" indent="0" marL="0">
+            <a:pPr marL="0" indent="0" algn="ctr">
               <a:buNone/>
             </a:pPr>
             <a:r>
@@ -16992,7 +16799,7 @@
           <a:bodyPr wrap="square" lIns="0" tIns="0" rIns="0" bIns="0" rtlCol="0" anchor="ctr"/>
           <a:lstStyle/>
           <a:p>
-            <a:pPr algn="ctr" indent="0" marL="0">
+            <a:pPr marL="0" indent="0" algn="ctr">
               <a:buNone/>
             </a:pPr>
             <a:r>
@@ -17031,7 +16838,7 @@
           <a:bodyPr wrap="square" lIns="0" tIns="0" rIns="0" bIns="0" rtlCol="0" anchor="ctr"/>
           <a:lstStyle/>
           <a:p>
-            <a:pPr algn="ctr" indent="0" marL="0">
+            <a:pPr marL="0" indent="0" algn="ctr">
               <a:buNone/>
             </a:pPr>
             <a:r>
@@ -17070,7 +16877,7 @@
           <a:bodyPr wrap="square" lIns="0" tIns="0" rIns="0" bIns="0" rtlCol="0" anchor="ctr"/>
           <a:lstStyle/>
           <a:p>
-            <a:pPr algn="ctr" indent="0" marL="0">
+            <a:pPr marL="0" indent="0" algn="ctr">
               <a:buNone/>
             </a:pPr>
             <a:r>
@@ -17109,7 +16916,7 @@
           <a:bodyPr wrap="square" lIns="0" tIns="0" rIns="0" bIns="0" rtlCol="0" anchor="ctr"/>
           <a:lstStyle/>
           <a:p>
-            <a:pPr algn="ctr" indent="0" marL="0">
+            <a:pPr marL="0" indent="0" algn="ctr">
               <a:buNone/>
             </a:pPr>
             <a:r>
@@ -17148,7 +16955,7 @@
           <a:bodyPr wrap="square" lIns="0" tIns="0" rIns="0" bIns="0" rtlCol="0" anchor="ctr"/>
           <a:lstStyle/>
           <a:p>
-            <a:pPr algn="ctr" indent="0" marL="0">
+            <a:pPr marL="0" indent="0" algn="ctr">
               <a:buNone/>
             </a:pPr>
             <a:r>
@@ -17187,7 +16994,7 @@
           <a:bodyPr wrap="square" lIns="0" tIns="0" rIns="0" bIns="0" rtlCol="0" anchor="ctr"/>
           <a:lstStyle/>
           <a:p>
-            <a:pPr algn="ctr" indent="0" marL="0">
+            <a:pPr marL="0" indent="0" algn="ctr">
               <a:buNone/>
             </a:pPr>
             <a:r>
@@ -17226,7 +17033,7 @@
           <a:bodyPr wrap="square" lIns="0" tIns="0" rIns="0" bIns="0" rtlCol="0" anchor="ctr"/>
           <a:lstStyle/>
           <a:p>
-            <a:pPr algn="ctr" indent="0" marL="0">
+            <a:pPr marL="0" indent="0" algn="ctr">
               <a:buNone/>
             </a:pPr>
             <a:r>
@@ -17246,7 +17053,7 @@
       </p:sp>
       <p:graphicFrame>
         <p:nvGraphicFramePr>
-          <p:cNvPr id="10" name="Table 0"/>
+          <p:cNvPr id="18" name="Table 0"/>
           <p:cNvGraphicFramePr>
             <a:graphicFrameLocks noGrp="1"/>
           </p:cNvGraphicFramePr>
@@ -17267,12 +17074,48 @@
             <a:tbl>
               <a:tblPr/>
               <a:tblGrid>
-                <a:gridCol w="1554480"/>
-                <a:gridCol w="1097280"/>
-                <a:gridCol w="1097280"/>
-                <a:gridCol w="1097280"/>
-                <a:gridCol w="822960"/>
-                <a:gridCol w="1097280"/>
+                <a:gridCol w="1554480">
+                  <a:extLst>
+                    <a:ext uri="{9D8B030D-6E8A-4147-A177-3AD203B41FA5}">
+                      <a16:colId xmlns:a16="http://schemas.microsoft.com/office/drawing/2014/main" val="20000"/>
+                    </a:ext>
+                  </a:extLst>
+                </a:gridCol>
+                <a:gridCol w="1097280">
+                  <a:extLst>
+                    <a:ext uri="{9D8B030D-6E8A-4147-A177-3AD203B41FA5}">
+                      <a16:colId xmlns:a16="http://schemas.microsoft.com/office/drawing/2014/main" val="20001"/>
+                    </a:ext>
+                  </a:extLst>
+                </a:gridCol>
+                <a:gridCol w="1097280">
+                  <a:extLst>
+                    <a:ext uri="{9D8B030D-6E8A-4147-A177-3AD203B41FA5}">
+                      <a16:colId xmlns:a16="http://schemas.microsoft.com/office/drawing/2014/main" val="20002"/>
+                    </a:ext>
+                  </a:extLst>
+                </a:gridCol>
+                <a:gridCol w="1097280">
+                  <a:extLst>
+                    <a:ext uri="{9D8B030D-6E8A-4147-A177-3AD203B41FA5}">
+                      <a16:colId xmlns:a16="http://schemas.microsoft.com/office/drawing/2014/main" val="20003"/>
+                    </a:ext>
+                  </a:extLst>
+                </a:gridCol>
+                <a:gridCol w="822960">
+                  <a:extLst>
+                    <a:ext uri="{9D8B030D-6E8A-4147-A177-3AD203B41FA5}">
+                      <a16:colId xmlns:a16="http://schemas.microsoft.com/office/drawing/2014/main" val="20004"/>
+                    </a:ext>
+                  </a:extLst>
+                </a:gridCol>
+                <a:gridCol w="1097280">
+                  <a:extLst>
+                    <a:ext uri="{9D8B030D-6E8A-4147-A177-3AD203B41FA5}">
+                      <a16:colId xmlns:a16="http://schemas.microsoft.com/office/drawing/2014/main" val="20005"/>
+                    </a:ext>
+                  </a:extLst>
+                </a:gridCol>
               </a:tblGrid>
               <a:tr h="292608">
                 <a:tc>
@@ -17280,7 +17123,7 @@
                     <a:bodyPr/>
                     <a:lstStyle/>
                     <a:p>
-                      <a:pPr indent="0" marL="0">
+                      <a:pPr marL="0" indent="0">
                         <a:buNone/>
                       </a:pPr>
                       <a:r>
@@ -17301,7 +17144,7 @@
                       </a:endParaRPr>
                     </a:p>
                   </a:txBody>
-                  <a:tcPr marL="91440" marR="91440" marT="45720" marB="45720">
+                  <a:tcPr>
                     <a:lnL w="6350" cap="flat" cmpd="sng" algn="ctr">
                       <a:solidFill>
                         <a:srgbClr val="E8ECF1"/>
@@ -17348,7 +17191,7 @@
                     <a:bodyPr/>
                     <a:lstStyle/>
                     <a:p>
-                      <a:pPr indent="0" marL="0">
+                      <a:pPr marL="0" indent="0">
                         <a:buNone/>
                       </a:pPr>
                       <a:r>
@@ -17369,7 +17212,7 @@
                       </a:endParaRPr>
                     </a:p>
                   </a:txBody>
-                  <a:tcPr marL="91440" marR="91440" marT="45720" marB="45720">
+                  <a:tcPr>
                     <a:lnL w="6350" cap="flat" cmpd="sng" algn="ctr">
                       <a:solidFill>
                         <a:srgbClr val="E8ECF1"/>
@@ -17416,7 +17259,7 @@
                     <a:bodyPr/>
                     <a:lstStyle/>
                     <a:p>
-                      <a:pPr indent="0" marL="0">
+                      <a:pPr marL="0" indent="0">
                         <a:buNone/>
                       </a:pPr>
                       <a:r>
@@ -17437,7 +17280,7 @@
                       </a:endParaRPr>
                     </a:p>
                   </a:txBody>
-                  <a:tcPr marL="91440" marR="91440" marT="45720" marB="45720">
+                  <a:tcPr>
                     <a:lnL w="6350" cap="flat" cmpd="sng" algn="ctr">
                       <a:solidFill>
                         <a:srgbClr val="E8ECF1"/>
@@ -17484,7 +17327,7 @@
                     <a:bodyPr/>
                     <a:lstStyle/>
                     <a:p>
-                      <a:pPr indent="0" marL="0">
+                      <a:pPr marL="0" indent="0">
                         <a:buNone/>
                       </a:pPr>
                       <a:r>
@@ -17505,7 +17348,7 @@
                       </a:endParaRPr>
                     </a:p>
                   </a:txBody>
-                  <a:tcPr marL="91440" marR="91440" marT="45720" marB="45720">
+                  <a:tcPr>
                     <a:lnL w="6350" cap="flat" cmpd="sng" algn="ctr">
                       <a:solidFill>
                         <a:srgbClr val="E8ECF1"/>
@@ -17552,7 +17395,7 @@
                     <a:bodyPr/>
                     <a:lstStyle/>
                     <a:p>
-                      <a:pPr indent="0" marL="0">
+                      <a:pPr marL="0" indent="0">
                         <a:buNone/>
                       </a:pPr>
                       <a:r>
@@ -17573,7 +17416,7 @@
                       </a:endParaRPr>
                     </a:p>
                   </a:txBody>
-                  <a:tcPr marL="91440" marR="91440" marT="45720" marB="45720">
+                  <a:tcPr>
                     <a:lnL w="6350" cap="flat" cmpd="sng" algn="ctr">
                       <a:solidFill>
                         <a:srgbClr val="E8ECF1"/>
@@ -17620,7 +17463,7 @@
                     <a:bodyPr/>
                     <a:lstStyle/>
                     <a:p>
-                      <a:pPr indent="0" marL="0">
+                      <a:pPr marL="0" indent="0">
                         <a:buNone/>
                       </a:pPr>
                       <a:r>
@@ -17641,7 +17484,7 @@
                       </a:endParaRPr>
                     </a:p>
                   </a:txBody>
-                  <a:tcPr marL="91440" marR="91440" marT="45720" marB="45720">
+                  <a:tcPr>
                     <a:lnL w="6350" cap="flat" cmpd="sng" algn="ctr">
                       <a:solidFill>
                         <a:srgbClr val="E8ECF1"/>
@@ -17683,6 +17526,11 @@
                     </a:solidFill>
                   </a:tcPr>
                 </a:tc>
+                <a:extLst>
+                  <a:ext uri="{0D108BD9-81ED-4DB2-BD59-A6C34878D82A}">
+                    <a16:rowId xmlns:a16="http://schemas.microsoft.com/office/drawing/2014/main" val="10000"/>
+                  </a:ext>
+                </a:extLst>
               </a:tr>
               <a:tr h="237744">
                 <a:tc>
@@ -17690,7 +17538,7 @@
                     <a:bodyPr/>
                     <a:lstStyle/>
                     <a:p>
-                      <a:pPr indent="0" marL="0">
+                      <a:pPr marL="0" indent="0">
                         <a:buNone/>
                       </a:pPr>
                       <a:r>
@@ -17711,7 +17559,7 @@
                       </a:endParaRPr>
                     </a:p>
                   </a:txBody>
-                  <a:tcPr marL="91440" marR="91440" marT="45720" marB="45720">
+                  <a:tcPr>
                     <a:lnL w="6350" cap="flat" cmpd="sng" algn="ctr">
                       <a:solidFill>
                         <a:srgbClr val="E8ECF1"/>
@@ -17755,7 +17603,7 @@
                     <a:bodyPr/>
                     <a:lstStyle/>
                     <a:p>
-                      <a:pPr indent="0" marL="0">
+                      <a:pPr marL="0" indent="0">
                         <a:buNone/>
                       </a:pPr>
                       <a:r>
@@ -17776,7 +17624,7 @@
                       </a:endParaRPr>
                     </a:p>
                   </a:txBody>
-                  <a:tcPr marL="91440" marR="91440" marT="45720" marB="45720">
+                  <a:tcPr>
                     <a:lnL w="6350" cap="flat" cmpd="sng" algn="ctr">
                       <a:solidFill>
                         <a:srgbClr val="E8ECF1"/>
@@ -17820,7 +17668,7 @@
                     <a:bodyPr/>
                     <a:lstStyle/>
                     <a:p>
-                      <a:pPr indent="0" marL="0">
+                      <a:pPr marL="0" indent="0">
                         <a:buNone/>
                       </a:pPr>
                       <a:r>
@@ -17841,7 +17689,7 @@
                       </a:endParaRPr>
                     </a:p>
                   </a:txBody>
-                  <a:tcPr marL="91440" marR="91440" marT="45720" marB="45720">
+                  <a:tcPr>
                     <a:lnL w="6350" cap="flat" cmpd="sng" algn="ctr">
                       <a:solidFill>
                         <a:srgbClr val="E8ECF1"/>
@@ -17885,7 +17733,7 @@
                     <a:bodyPr/>
                     <a:lstStyle/>
                     <a:p>
-                      <a:pPr indent="0" marL="0">
+                      <a:pPr marL="0" indent="0">
                         <a:buNone/>
                       </a:pPr>
                       <a:r>
@@ -17906,7 +17754,7 @@
                       </a:endParaRPr>
                     </a:p>
                   </a:txBody>
-                  <a:tcPr marL="91440" marR="91440" marT="45720" marB="45720">
+                  <a:tcPr>
                     <a:lnL w="6350" cap="flat" cmpd="sng" algn="ctr">
                       <a:solidFill>
                         <a:srgbClr val="E8ECF1"/>
@@ -17950,7 +17798,7 @@
                     <a:bodyPr/>
                     <a:lstStyle/>
                     <a:p>
-                      <a:pPr indent="0" marL="0">
+                      <a:pPr marL="0" indent="0">
                         <a:buNone/>
                       </a:pPr>
                       <a:r>
@@ -17971,7 +17819,7 @@
                       </a:endParaRPr>
                     </a:p>
                   </a:txBody>
-                  <a:tcPr marL="91440" marR="91440" marT="45720" marB="45720">
+                  <a:tcPr>
                     <a:lnL w="6350" cap="flat" cmpd="sng" algn="ctr">
                       <a:solidFill>
                         <a:srgbClr val="E8ECF1"/>
@@ -18015,7 +17863,7 @@
                     <a:bodyPr/>
                     <a:lstStyle/>
                     <a:p>
-                      <a:pPr indent="0" marL="0">
+                      <a:pPr marL="0" indent="0">
                         <a:buNone/>
                       </a:pPr>
                       <a:r>
@@ -18036,7 +17884,7 @@
                       </a:endParaRPr>
                     </a:p>
                   </a:txBody>
-                  <a:tcPr marL="91440" marR="91440" marT="45720" marB="45720">
+                  <a:tcPr>
                     <a:lnL w="6350" cap="flat" cmpd="sng" algn="ctr">
                       <a:solidFill>
                         <a:srgbClr val="E8ECF1"/>
@@ -18075,6 +17923,11 @@
                     </a:lnB>
                   </a:tcPr>
                 </a:tc>
+                <a:extLst>
+                  <a:ext uri="{0D108BD9-81ED-4DB2-BD59-A6C34878D82A}">
+                    <a16:rowId xmlns:a16="http://schemas.microsoft.com/office/drawing/2014/main" val="10001"/>
+                  </a:ext>
+                </a:extLst>
               </a:tr>
               <a:tr h="237744">
                 <a:tc>
@@ -18082,7 +17935,7 @@
                     <a:bodyPr/>
                     <a:lstStyle/>
                     <a:p>
-                      <a:pPr indent="0" marL="0">
+                      <a:pPr marL="0" indent="0">
                         <a:buNone/>
                       </a:pPr>
                       <a:r>
@@ -18103,7 +17956,7 @@
                       </a:endParaRPr>
                     </a:p>
                   </a:txBody>
-                  <a:tcPr marL="91440" marR="91440" marT="45720" marB="45720">
+                  <a:tcPr>
                     <a:lnL w="6350" cap="flat" cmpd="sng" algn="ctr">
                       <a:solidFill>
                         <a:srgbClr val="E8ECF1"/>
@@ -18147,7 +18000,7 @@
                     <a:bodyPr/>
                     <a:lstStyle/>
                     <a:p>
-                      <a:pPr indent="0" marL="0">
+                      <a:pPr marL="0" indent="0">
                         <a:buNone/>
                       </a:pPr>
                       <a:r>
@@ -18168,7 +18021,7 @@
                       </a:endParaRPr>
                     </a:p>
                   </a:txBody>
-                  <a:tcPr marL="91440" marR="91440" marT="45720" marB="45720">
+                  <a:tcPr>
                     <a:lnL w="6350" cap="flat" cmpd="sng" algn="ctr">
                       <a:solidFill>
                         <a:srgbClr val="E8ECF1"/>
@@ -18212,7 +18065,7 @@
                     <a:bodyPr/>
                     <a:lstStyle/>
                     <a:p>
-                      <a:pPr indent="0" marL="0">
+                      <a:pPr marL="0" indent="0">
                         <a:buNone/>
                       </a:pPr>
                       <a:r>
@@ -18233,7 +18086,7 @@
                       </a:endParaRPr>
                     </a:p>
                   </a:txBody>
-                  <a:tcPr marL="91440" marR="91440" marT="45720" marB="45720">
+                  <a:tcPr>
                     <a:lnL w="6350" cap="flat" cmpd="sng" algn="ctr">
                       <a:solidFill>
                         <a:srgbClr val="E8ECF1"/>
@@ -18277,7 +18130,7 @@
                     <a:bodyPr/>
                     <a:lstStyle/>
                     <a:p>
-                      <a:pPr indent="0" marL="0">
+                      <a:pPr marL="0" indent="0">
                         <a:buNone/>
                       </a:pPr>
                       <a:r>
@@ -18298,7 +18151,7 @@
                       </a:endParaRPr>
                     </a:p>
                   </a:txBody>
-                  <a:tcPr marL="91440" marR="91440" marT="45720" marB="45720">
+                  <a:tcPr>
                     <a:lnL w="6350" cap="flat" cmpd="sng" algn="ctr">
                       <a:solidFill>
                         <a:srgbClr val="E8ECF1"/>
@@ -18342,7 +18195,7 @@
                     <a:bodyPr/>
                     <a:lstStyle/>
                     <a:p>
-                      <a:pPr indent="0" marL="0">
+                      <a:pPr marL="0" indent="0">
                         <a:buNone/>
                       </a:pPr>
                       <a:r>
@@ -18363,7 +18216,7 @@
                       </a:endParaRPr>
                     </a:p>
                   </a:txBody>
-                  <a:tcPr marL="91440" marR="91440" marT="45720" marB="45720">
+                  <a:tcPr>
                     <a:lnL w="6350" cap="flat" cmpd="sng" algn="ctr">
                       <a:solidFill>
                         <a:srgbClr val="E8ECF1"/>
@@ -18407,7 +18260,7 @@
                     <a:bodyPr/>
                     <a:lstStyle/>
                     <a:p>
-                      <a:pPr indent="0" marL="0">
+                      <a:pPr marL="0" indent="0">
                         <a:buNone/>
                       </a:pPr>
                       <a:r>
@@ -18428,7 +18281,7 @@
                       </a:endParaRPr>
                     </a:p>
                   </a:txBody>
-                  <a:tcPr marL="91440" marR="91440" marT="45720" marB="45720">
+                  <a:tcPr>
                     <a:lnL w="6350" cap="flat" cmpd="sng" algn="ctr">
                       <a:solidFill>
                         <a:srgbClr val="E8ECF1"/>
@@ -18467,6 +18320,11 @@
                     </a:lnB>
                   </a:tcPr>
                 </a:tc>
+                <a:extLst>
+                  <a:ext uri="{0D108BD9-81ED-4DB2-BD59-A6C34878D82A}">
+                    <a16:rowId xmlns:a16="http://schemas.microsoft.com/office/drawing/2014/main" val="10002"/>
+                  </a:ext>
+                </a:extLst>
               </a:tr>
               <a:tr h="237744">
                 <a:tc>
@@ -18474,7 +18332,7 @@
                     <a:bodyPr/>
                     <a:lstStyle/>
                     <a:p>
-                      <a:pPr indent="0" marL="0">
+                      <a:pPr marL="0" indent="0">
                         <a:buNone/>
                       </a:pPr>
                       <a:r>
@@ -18495,7 +18353,7 @@
                       </a:endParaRPr>
                     </a:p>
                   </a:txBody>
-                  <a:tcPr marL="91440" marR="91440" marT="45720" marB="45720">
+                  <a:tcPr>
                     <a:lnL w="6350" cap="flat" cmpd="sng" algn="ctr">
                       <a:solidFill>
                         <a:srgbClr val="E8ECF1"/>
@@ -18539,7 +18397,7 @@
                     <a:bodyPr/>
                     <a:lstStyle/>
                     <a:p>
-                      <a:pPr indent="0" marL="0">
+                      <a:pPr marL="0" indent="0">
                         <a:buNone/>
                       </a:pPr>
                       <a:r>
@@ -18560,7 +18418,7 @@
                       </a:endParaRPr>
                     </a:p>
                   </a:txBody>
-                  <a:tcPr marL="91440" marR="91440" marT="45720" marB="45720">
+                  <a:tcPr>
                     <a:lnL w="6350" cap="flat" cmpd="sng" algn="ctr">
                       <a:solidFill>
                         <a:srgbClr val="E8ECF1"/>
@@ -18604,7 +18462,7 @@
                     <a:bodyPr/>
                     <a:lstStyle/>
                     <a:p>
-                      <a:pPr indent="0" marL="0">
+                      <a:pPr marL="0" indent="0">
                         <a:buNone/>
                       </a:pPr>
                       <a:r>
@@ -18625,7 +18483,7 @@
                       </a:endParaRPr>
                     </a:p>
                   </a:txBody>
-                  <a:tcPr marL="91440" marR="91440" marT="45720" marB="45720">
+                  <a:tcPr>
                     <a:lnL w="6350" cap="flat" cmpd="sng" algn="ctr">
                       <a:solidFill>
                         <a:srgbClr val="E8ECF1"/>
@@ -18669,7 +18527,7 @@
                     <a:bodyPr/>
                     <a:lstStyle/>
                     <a:p>
-                      <a:pPr indent="0" marL="0">
+                      <a:pPr marL="0" indent="0">
                         <a:buNone/>
                       </a:pPr>
                       <a:r>
@@ -18690,7 +18548,7 @@
                       </a:endParaRPr>
                     </a:p>
                   </a:txBody>
-                  <a:tcPr marL="91440" marR="91440" marT="45720" marB="45720">
+                  <a:tcPr>
                     <a:lnL w="6350" cap="flat" cmpd="sng" algn="ctr">
                       <a:solidFill>
                         <a:srgbClr val="E8ECF1"/>
@@ -18734,7 +18592,7 @@
                     <a:bodyPr/>
                     <a:lstStyle/>
                     <a:p>
-                      <a:pPr indent="0" marL="0">
+                      <a:pPr marL="0" indent="0">
                         <a:buNone/>
                       </a:pPr>
                       <a:r>
@@ -18755,7 +18613,7 @@
                       </a:endParaRPr>
                     </a:p>
                   </a:txBody>
-                  <a:tcPr marL="91440" marR="91440" marT="45720" marB="45720">
+                  <a:tcPr>
                     <a:lnL w="6350" cap="flat" cmpd="sng" algn="ctr">
                       <a:solidFill>
                         <a:srgbClr val="E8ECF1"/>
@@ -18799,7 +18657,7 @@
                     <a:bodyPr/>
                     <a:lstStyle/>
                     <a:p>
-                      <a:pPr indent="0" marL="0">
+                      <a:pPr marL="0" indent="0">
                         <a:buNone/>
                       </a:pPr>
                       <a:r>
@@ -18820,7 +18678,7 @@
                       </a:endParaRPr>
                     </a:p>
                   </a:txBody>
-                  <a:tcPr marL="91440" marR="91440" marT="45720" marB="45720">
+                  <a:tcPr>
                     <a:lnL w="6350" cap="flat" cmpd="sng" algn="ctr">
                       <a:solidFill>
                         <a:srgbClr val="E8ECF1"/>
@@ -18859,6 +18717,11 @@
                     </a:lnB>
                   </a:tcPr>
                 </a:tc>
+                <a:extLst>
+                  <a:ext uri="{0D108BD9-81ED-4DB2-BD59-A6C34878D82A}">
+                    <a16:rowId xmlns:a16="http://schemas.microsoft.com/office/drawing/2014/main" val="10003"/>
+                  </a:ext>
+                </a:extLst>
               </a:tr>
               <a:tr h="237744">
                 <a:tc>
@@ -18866,7 +18729,7 @@
                     <a:bodyPr/>
                     <a:lstStyle/>
                     <a:p>
-                      <a:pPr indent="0" marL="0">
+                      <a:pPr marL="0" indent="0">
                         <a:buNone/>
                       </a:pPr>
                       <a:r>
@@ -18887,7 +18750,7 @@
                       </a:endParaRPr>
                     </a:p>
                   </a:txBody>
-                  <a:tcPr marL="91440" marR="91440" marT="45720" marB="45720">
+                  <a:tcPr>
                     <a:lnL w="6350" cap="flat" cmpd="sng" algn="ctr">
                       <a:solidFill>
                         <a:srgbClr val="E8ECF1"/>
@@ -18931,7 +18794,7 @@
                     <a:bodyPr/>
                     <a:lstStyle/>
                     <a:p>
-                      <a:pPr indent="0" marL="0">
+                      <a:pPr marL="0" indent="0">
                         <a:buNone/>
                       </a:pPr>
                       <a:r>
@@ -18952,7 +18815,7 @@
                       </a:endParaRPr>
                     </a:p>
                   </a:txBody>
-                  <a:tcPr marL="91440" marR="91440" marT="45720" marB="45720">
+                  <a:tcPr>
                     <a:lnL w="6350" cap="flat" cmpd="sng" algn="ctr">
                       <a:solidFill>
                         <a:srgbClr val="E8ECF1"/>
@@ -18996,7 +18859,7 @@
                     <a:bodyPr/>
                     <a:lstStyle/>
                     <a:p>
-                      <a:pPr indent="0" marL="0">
+                      <a:pPr marL="0" indent="0">
                         <a:buNone/>
                       </a:pPr>
                       <a:r>
@@ -19017,7 +18880,7 @@
                       </a:endParaRPr>
                     </a:p>
                   </a:txBody>
-                  <a:tcPr marL="91440" marR="91440" marT="45720" marB="45720">
+                  <a:tcPr>
                     <a:lnL w="6350" cap="flat" cmpd="sng" algn="ctr">
                       <a:solidFill>
                         <a:srgbClr val="E8ECF1"/>
@@ -19061,7 +18924,7 @@
                     <a:bodyPr/>
                     <a:lstStyle/>
                     <a:p>
-                      <a:pPr indent="0" marL="0">
+                      <a:pPr marL="0" indent="0">
                         <a:buNone/>
                       </a:pPr>
                       <a:r>
@@ -19082,7 +18945,7 @@
                       </a:endParaRPr>
                     </a:p>
                   </a:txBody>
-                  <a:tcPr marL="91440" marR="91440" marT="45720" marB="45720">
+                  <a:tcPr>
                     <a:lnL w="6350" cap="flat" cmpd="sng" algn="ctr">
                       <a:solidFill>
                         <a:srgbClr val="E8ECF1"/>
@@ -19126,7 +18989,7 @@
                     <a:bodyPr/>
                     <a:lstStyle/>
                     <a:p>
-                      <a:pPr indent="0" marL="0">
+                      <a:pPr marL="0" indent="0">
                         <a:buNone/>
                       </a:pPr>
                       <a:r>
@@ -19147,7 +19010,7 @@
                       </a:endParaRPr>
                     </a:p>
                   </a:txBody>
-                  <a:tcPr marL="91440" marR="91440" marT="45720" marB="45720">
+                  <a:tcPr>
                     <a:lnL w="6350" cap="flat" cmpd="sng" algn="ctr">
                       <a:solidFill>
                         <a:srgbClr val="E8ECF1"/>
@@ -19191,7 +19054,7 @@
                     <a:bodyPr/>
                     <a:lstStyle/>
                     <a:p>
-                      <a:pPr indent="0" marL="0">
+                      <a:pPr marL="0" indent="0">
                         <a:buNone/>
                       </a:pPr>
                       <a:r>
@@ -19212,7 +19075,7 @@
                       </a:endParaRPr>
                     </a:p>
                   </a:txBody>
-                  <a:tcPr marL="91440" marR="91440" marT="45720" marB="45720">
+                  <a:tcPr>
                     <a:lnL w="6350" cap="flat" cmpd="sng" algn="ctr">
                       <a:solidFill>
                         <a:srgbClr val="E8ECF1"/>
@@ -19251,6 +19114,11 @@
                     </a:lnB>
                   </a:tcPr>
                 </a:tc>
+                <a:extLst>
+                  <a:ext uri="{0D108BD9-81ED-4DB2-BD59-A6C34878D82A}">
+                    <a16:rowId xmlns:a16="http://schemas.microsoft.com/office/drawing/2014/main" val="10004"/>
+                  </a:ext>
+                </a:extLst>
               </a:tr>
               <a:tr h="237744">
                 <a:tc>
@@ -19258,7 +19126,7 @@
                     <a:bodyPr/>
                     <a:lstStyle/>
                     <a:p>
-                      <a:pPr indent="0" marL="0">
+                      <a:pPr marL="0" indent="0">
                         <a:buNone/>
                       </a:pPr>
                       <a:r>
@@ -19279,7 +19147,7 @@
                       </a:endParaRPr>
                     </a:p>
                   </a:txBody>
-                  <a:tcPr marL="91440" marR="91440" marT="45720" marB="45720">
+                  <a:tcPr>
                     <a:lnL w="6350" cap="flat" cmpd="sng" algn="ctr">
                       <a:solidFill>
                         <a:srgbClr val="E8ECF1"/>
@@ -19323,7 +19191,7 @@
                     <a:bodyPr/>
                     <a:lstStyle/>
                     <a:p>
-                      <a:pPr indent="0" marL="0">
+                      <a:pPr marL="0" indent="0">
                         <a:buNone/>
                       </a:pPr>
                       <a:r>
@@ -19344,7 +19212,7 @@
                       </a:endParaRPr>
                     </a:p>
                   </a:txBody>
-                  <a:tcPr marL="91440" marR="91440" marT="45720" marB="45720">
+                  <a:tcPr>
                     <a:lnL w="6350" cap="flat" cmpd="sng" algn="ctr">
                       <a:solidFill>
                         <a:srgbClr val="E8ECF1"/>
@@ -19388,7 +19256,7 @@
                     <a:bodyPr/>
                     <a:lstStyle/>
                     <a:p>
-                      <a:pPr indent="0" marL="0">
+                      <a:pPr marL="0" indent="0">
                         <a:buNone/>
                       </a:pPr>
                       <a:r>
@@ -19409,7 +19277,7 @@
                       </a:endParaRPr>
                     </a:p>
                   </a:txBody>
-                  <a:tcPr marL="91440" marR="91440" marT="45720" marB="45720">
+                  <a:tcPr>
                     <a:lnL w="6350" cap="flat" cmpd="sng" algn="ctr">
                       <a:solidFill>
                         <a:srgbClr val="E8ECF1"/>
@@ -19453,7 +19321,7 @@
                     <a:bodyPr/>
                     <a:lstStyle/>
                     <a:p>
-                      <a:pPr indent="0" marL="0">
+                      <a:pPr marL="0" indent="0">
                         <a:buNone/>
                       </a:pPr>
                       <a:r>
@@ -19474,7 +19342,7 @@
                       </a:endParaRPr>
                     </a:p>
                   </a:txBody>
-                  <a:tcPr marL="91440" marR="91440" marT="45720" marB="45720">
+                  <a:tcPr>
                     <a:lnL w="6350" cap="flat" cmpd="sng" algn="ctr">
                       <a:solidFill>
                         <a:srgbClr val="E8ECF1"/>
@@ -19518,7 +19386,7 @@
                     <a:bodyPr/>
                     <a:lstStyle/>
                     <a:p>
-                      <a:pPr indent="0" marL="0">
+                      <a:pPr marL="0" indent="0">
                         <a:buNone/>
                       </a:pPr>
                       <a:r>
@@ -19539,7 +19407,7 @@
                       </a:endParaRPr>
                     </a:p>
                   </a:txBody>
-                  <a:tcPr marL="91440" marR="91440" marT="45720" marB="45720">
+                  <a:tcPr>
                     <a:lnL w="6350" cap="flat" cmpd="sng" algn="ctr">
                       <a:solidFill>
                         <a:srgbClr val="E8ECF1"/>
@@ -19583,7 +19451,7 @@
                     <a:bodyPr/>
                     <a:lstStyle/>
                     <a:p>
-                      <a:pPr indent="0" marL="0">
+                      <a:pPr marL="0" indent="0">
                         <a:buNone/>
                       </a:pPr>
                       <a:r>
@@ -19604,7 +19472,7 @@
                       </a:endParaRPr>
                     </a:p>
                   </a:txBody>
-                  <a:tcPr marL="91440" marR="91440" marT="45720" marB="45720">
+                  <a:tcPr>
                     <a:lnL w="6350" cap="flat" cmpd="sng" algn="ctr">
                       <a:solidFill>
                         <a:srgbClr val="E8ECF1"/>
@@ -19643,6 +19511,11 @@
                     </a:lnB>
                   </a:tcPr>
                 </a:tc>
+                <a:extLst>
+                  <a:ext uri="{0D108BD9-81ED-4DB2-BD59-A6C34878D82A}">
+                    <a16:rowId xmlns:a16="http://schemas.microsoft.com/office/drawing/2014/main" val="10005"/>
+                  </a:ext>
+                </a:extLst>
               </a:tr>
             </a:tbl>
           </a:graphicData>
@@ -19667,7 +19540,7 @@
           </a:solidFill>
           <a:ln/>
           <a:effectLst>
-            <a:outerShdw sx="100000" sy="100000" kx="0" ky="0" algn="bl" rotWithShape="0" blurRad="50800" dist="19050" dir="8100000">
+            <a:outerShdw blurRad="50800" dist="19050" dir="8100000" algn="bl" rotWithShape="0">
               <a:srgbClr val="000000">
                 <a:alpha val="8000"/>
               </a:srgbClr>
@@ -19696,7 +19569,7 @@
           <a:bodyPr wrap="square" lIns="0" tIns="0" rIns="0" bIns="0" rtlCol="0" anchor="ctr"/>
           <a:lstStyle/>
           <a:p>
-            <a:pPr indent="0" marL="0">
+            <a:pPr marL="0" indent="0">
               <a:buNone/>
             </a:pPr>
             <a:r>
@@ -19735,7 +19608,7 @@
           <a:bodyPr wrap="square" lIns="0" tIns="0" rIns="0" bIns="0" rtlCol="0" anchor="ctr"/>
           <a:lstStyle/>
           <a:p>
-            <a:pPr indent="0" marL="0">
+            <a:pPr marL="0" indent="0">
               <a:buNone/>
             </a:pPr>
             <a:r>
@@ -19749,9 +19622,6 @@
               </a:rPr>
               <a:t>行业普适性：</a:t>
             </a:r>
-            <a:pPr indent="0" marL="0">
-              <a:buNone/>
-            </a:pPr>
             <a:r>
               <a:rPr lang="en-US" sz="1000" dirty="0">
                 <a:solidFill>
@@ -19788,7 +19658,7 @@
           <a:bodyPr wrap="square" lIns="0" tIns="0" rIns="0" bIns="0" rtlCol="0" anchor="ctr"/>
           <a:lstStyle/>
           <a:p>
-            <a:pPr indent="0" marL="0">
+            <a:pPr marL="0" indent="0">
               <a:buNone/>
             </a:pPr>
             <a:r>
@@ -19802,9 +19672,6 @@
               </a:rPr>
               <a:t>回撤一致性：</a:t>
             </a:r>
-            <a:pPr indent="0" marL="0">
-              <a:buNone/>
-            </a:pPr>
             <a:r>
               <a:rPr lang="en-US" sz="1000" dirty="0">
                 <a:solidFill>
@@ -19841,7 +19708,7 @@
           <a:bodyPr wrap="square" lIns="0" tIns="0" rIns="0" bIns="0" rtlCol="0" anchor="ctr"/>
           <a:lstStyle/>
           <a:p>
-            <a:pPr indent="0" marL="0">
+            <a:pPr marL="0" indent="0">
               <a:buNone/>
             </a:pPr>
             <a:r>
@@ -19855,9 +19722,6 @@
               </a:rPr>
               <a:t>超额稳健性：</a:t>
             </a:r>
-            <a:pPr indent="0" marL="0">
-              <a:buNone/>
-            </a:pPr>
             <a:r>
               <a:rPr lang="en-US" sz="1000" dirty="0">
                 <a:solidFill>
@@ -19894,7 +19758,7 @@
           <a:bodyPr wrap="square" lIns="0" tIns="0" rIns="0" bIns="0" rtlCol="0" anchor="ctr"/>
           <a:lstStyle/>
           <a:p>
-            <a:pPr indent="0" marL="0">
+            <a:pPr marL="0" indent="0">
               <a:buNone/>
             </a:pPr>
             <a:r>
@@ -19908,9 +19772,6 @@
               </a:rPr>
               <a:t>对比单一指标：</a:t>
             </a:r>
-            <a:pPr indent="0" marL="0">
-              <a:buNone/>
-            </a:pPr>
             <a:r>
               <a:rPr lang="en-US" sz="1000" dirty="0">
                 <a:solidFill>
@@ -19947,7 +19808,7 @@
           <a:bodyPr wrap="square" rtlCol="0" anchor="ctr"/>
           <a:lstStyle/>
           <a:p>
-            <a:pPr algn="r" indent="0" marL="0">
+            <a:pPr marL="0" indent="0" algn="r">
               <a:buNone/>
             </a:pPr>
             <a:r>
@@ -20266,4 +20127,299 @@
     </a:ext>
   </a:extLst>
 </a:theme>
+</file>
+
+<file path=ppt/theme/theme2.xml><?xml version="1.0" encoding="utf-8"?>
+<a:theme xmlns:a="http://schemas.openxmlformats.org/drawingml/2006/main" name="Office 主题​​">
+  <a:themeElements>
+    <a:clrScheme name="Office">
+      <a:dk1>
+        <a:sysClr val="windowText" lastClr="000000"/>
+      </a:dk1>
+      <a:lt1>
+        <a:sysClr val="window" lastClr="FFFFFF"/>
+      </a:lt1>
+      <a:dk2>
+        <a:srgbClr val="44546A"/>
+      </a:dk2>
+      <a:lt2>
+        <a:srgbClr val="E7E6E6"/>
+      </a:lt2>
+      <a:accent1>
+        <a:srgbClr val="4472C4"/>
+      </a:accent1>
+      <a:accent2>
+        <a:srgbClr val="ED7D31"/>
+      </a:accent2>
+      <a:accent3>
+        <a:srgbClr val="A5A5A5"/>
+      </a:accent3>
+      <a:accent4>
+        <a:srgbClr val="FFC000"/>
+      </a:accent4>
+      <a:accent5>
+        <a:srgbClr val="5B9BD5"/>
+      </a:accent5>
+      <a:accent6>
+        <a:srgbClr val="70AD47"/>
+      </a:accent6>
+      <a:hlink>
+        <a:srgbClr val="0563C1"/>
+      </a:hlink>
+      <a:folHlink>
+        <a:srgbClr val="954F72"/>
+      </a:folHlink>
+    </a:clrScheme>
+    <a:fontScheme name="Office">
+      <a:majorFont>
+        <a:latin typeface="等线 Light" panose="020F0302020204030204"/>
+        <a:ea typeface=""/>
+        <a:cs typeface=""/>
+        <a:font script="Jpan" typeface="游ゴシック Light"/>
+        <a:font script="Hang" typeface="맑은 고딕"/>
+        <a:font script="Hans" typeface="等线 Light"/>
+        <a:font script="Hant" typeface="新細明體"/>
+        <a:font script="Arab" typeface="Times New Roman"/>
+        <a:font script="Hebr" typeface="Times New Roman"/>
+        <a:font script="Thai" typeface="Angsana New"/>
+        <a:font script="Ethi" typeface="Nyala"/>
+        <a:font script="Beng" typeface="Vrinda"/>
+        <a:font script="Gujr" typeface="Shruti"/>
+        <a:font script="Khmr" typeface="MoolBoran"/>
+        <a:font script="Knda" typeface="Tunga"/>
+        <a:font script="Guru" typeface="Raavi"/>
+        <a:font script="Cans" typeface="Euphemia"/>
+        <a:font script="Cher" typeface="Plantagenet Cherokee"/>
+        <a:font script="Yiii" typeface="Microsoft Yi Baiti"/>
+        <a:font script="Tibt" typeface="Microsoft Himalaya"/>
+        <a:font script="Thaa" typeface="MV Boli"/>
+        <a:font script="Deva" typeface="Mangal"/>
+        <a:font script="Telu" typeface="Gautami"/>
+        <a:font script="Taml" typeface="Latha"/>
+        <a:font script="Syrc" typeface="Estrangelo Edessa"/>
+        <a:font script="Orya" typeface="Kalinga"/>
+        <a:font script="Mlym" typeface="Kartika"/>
+        <a:font script="Laoo" typeface="DokChampa"/>
+        <a:font script="Sinh" typeface="Iskoola Pota"/>
+        <a:font script="Mong" typeface="Mongolian Baiti"/>
+        <a:font script="Viet" typeface="Times New Roman"/>
+        <a:font script="Uigh" typeface="Microsoft Uighur"/>
+        <a:font script="Geor" typeface="Sylfaen"/>
+        <a:font script="Armn" typeface="Arial"/>
+        <a:font script="Bugi" typeface="Leelawadee UI"/>
+        <a:font script="Bopo" typeface="Microsoft JhengHei"/>
+        <a:font script="Java" typeface="Javanese Text"/>
+        <a:font script="Lisu" typeface="Segoe UI"/>
+        <a:font script="Mymr" typeface="Myanmar Text"/>
+        <a:font script="Nkoo" typeface="Ebrima"/>
+        <a:font script="Olck" typeface="Nirmala UI"/>
+        <a:font script="Osma" typeface="Ebrima"/>
+        <a:font script="Phag" typeface="Phagspa"/>
+        <a:font script="Syrn" typeface="Estrangelo Edessa"/>
+        <a:font script="Syrj" typeface="Estrangelo Edessa"/>
+        <a:font script="Syre" typeface="Estrangelo Edessa"/>
+        <a:font script="Sora" typeface="Nirmala UI"/>
+        <a:font script="Tale" typeface="Microsoft Tai Le"/>
+        <a:font script="Talu" typeface="Microsoft New Tai Lue"/>
+        <a:font script="Tfng" typeface="Ebrima"/>
+      </a:majorFont>
+      <a:minorFont>
+        <a:latin typeface="等线" panose="020F0502020204030204"/>
+        <a:ea typeface=""/>
+        <a:cs typeface=""/>
+        <a:font script="Jpan" typeface="游ゴシック"/>
+        <a:font script="Hang" typeface="맑은 고딕"/>
+        <a:font script="Hans" typeface="等线"/>
+        <a:font script="Hant" typeface="新細明體"/>
+        <a:font script="Arab" typeface="Arial"/>
+        <a:font script="Hebr" typeface="Arial"/>
+        <a:font script="Thai" typeface="Cordia New"/>
+        <a:font script="Ethi" typeface="Nyala"/>
+        <a:font script="Beng" typeface="Vrinda"/>
+        <a:font script="Gujr" typeface="Shruti"/>
+        <a:font script="Khmr" typeface="DaunPenh"/>
+        <a:font script="Knda" typeface="Tunga"/>
+        <a:font script="Guru" typeface="Raavi"/>
+        <a:font script="Cans" typeface="Euphemia"/>
+        <a:font script="Cher" typeface="Plantagenet Cherokee"/>
+        <a:font script="Yiii" typeface="Microsoft Yi Baiti"/>
+        <a:font script="Tibt" typeface="Microsoft Himalaya"/>
+        <a:font script="Thaa" typeface="MV Boli"/>
+        <a:font script="Deva" typeface="Mangal"/>
+        <a:font script="Telu" typeface="Gautami"/>
+        <a:font script="Taml" typeface="Latha"/>
+        <a:font script="Syrc" typeface="Estrangelo Edessa"/>
+        <a:font script="Orya" typeface="Kalinga"/>
+        <a:font script="Mlym" typeface="Kartika"/>
+        <a:font script="Laoo" typeface="DokChampa"/>
+        <a:font script="Sinh" typeface="Iskoola Pota"/>
+        <a:font script="Mong" typeface="Mongolian Baiti"/>
+        <a:font script="Viet" typeface="Arial"/>
+        <a:font script="Uigh" typeface="Microsoft Uighur"/>
+        <a:font script="Geor" typeface="Sylfaen"/>
+        <a:font script="Armn" typeface="Arial"/>
+        <a:font script="Bugi" typeface="Leelawadee UI"/>
+        <a:font script="Bopo" typeface="Microsoft JhengHei"/>
+        <a:font script="Java" typeface="Javanese Text"/>
+        <a:font script="Lisu" typeface="Segoe UI"/>
+        <a:font script="Mymr" typeface="Myanmar Text"/>
+        <a:font script="Nkoo" typeface="Ebrima"/>
+        <a:font script="Olck" typeface="Nirmala UI"/>
+        <a:font script="Osma" typeface="Ebrima"/>
+        <a:font script="Phag" typeface="Phagspa"/>
+        <a:font script="Syrn" typeface="Estrangelo Edessa"/>
+        <a:font script="Syrj" typeface="Estrangelo Edessa"/>
+        <a:font script="Syre" typeface="Estrangelo Edessa"/>
+        <a:font script="Sora" typeface="Nirmala UI"/>
+        <a:font script="Tale" typeface="Microsoft Tai Le"/>
+        <a:font script="Talu" typeface="Microsoft New Tai Lue"/>
+        <a:font script="Tfng" typeface="Ebrima"/>
+      </a:minorFont>
+    </a:fontScheme>
+    <a:fmtScheme name="Office">
+      <a:fillStyleLst>
+        <a:solidFill>
+          <a:schemeClr val="phClr"/>
+        </a:solidFill>
+        <a:gradFill rotWithShape="1">
+          <a:gsLst>
+            <a:gs pos="0">
+              <a:schemeClr val="phClr">
+                <a:lumMod val="110000"/>
+                <a:satMod val="105000"/>
+                <a:tint val="67000"/>
+              </a:schemeClr>
+            </a:gs>
+            <a:gs pos="50000">
+              <a:schemeClr val="phClr">
+                <a:lumMod val="105000"/>
+                <a:satMod val="103000"/>
+                <a:tint val="73000"/>
+              </a:schemeClr>
+            </a:gs>
+            <a:gs pos="100000">
+              <a:schemeClr val="phClr">
+                <a:lumMod val="105000"/>
+                <a:satMod val="109000"/>
+                <a:tint val="81000"/>
+              </a:schemeClr>
+            </a:gs>
+          </a:gsLst>
+          <a:lin ang="5400000" scaled="0"/>
+        </a:gradFill>
+        <a:gradFill rotWithShape="1">
+          <a:gsLst>
+            <a:gs pos="0">
+              <a:schemeClr val="phClr">
+                <a:satMod val="103000"/>
+                <a:lumMod val="102000"/>
+                <a:tint val="94000"/>
+              </a:schemeClr>
+            </a:gs>
+            <a:gs pos="50000">
+              <a:schemeClr val="phClr">
+                <a:satMod val="110000"/>
+                <a:lumMod val="100000"/>
+                <a:shade val="100000"/>
+              </a:schemeClr>
+            </a:gs>
+            <a:gs pos="100000">
+              <a:schemeClr val="phClr">
+                <a:lumMod val="99000"/>
+                <a:satMod val="120000"/>
+                <a:shade val="78000"/>
+              </a:schemeClr>
+            </a:gs>
+          </a:gsLst>
+          <a:lin ang="5400000" scaled="0"/>
+        </a:gradFill>
+      </a:fillStyleLst>
+      <a:lnStyleLst>
+        <a:ln w="6350" cap="flat" cmpd="sng" algn="ctr">
+          <a:solidFill>
+            <a:schemeClr val="phClr"/>
+          </a:solidFill>
+          <a:prstDash val="solid"/>
+          <a:miter lim="800000"/>
+        </a:ln>
+        <a:ln w="12700" cap="flat" cmpd="sng" algn="ctr">
+          <a:solidFill>
+            <a:schemeClr val="phClr"/>
+          </a:solidFill>
+          <a:prstDash val="solid"/>
+          <a:miter lim="800000"/>
+        </a:ln>
+        <a:ln w="19050" cap="flat" cmpd="sng" algn="ctr">
+          <a:solidFill>
+            <a:schemeClr val="phClr"/>
+          </a:solidFill>
+          <a:prstDash val="solid"/>
+          <a:miter lim="800000"/>
+        </a:ln>
+      </a:lnStyleLst>
+      <a:effectStyleLst>
+        <a:effectStyle>
+          <a:effectLst/>
+        </a:effectStyle>
+        <a:effectStyle>
+          <a:effectLst/>
+        </a:effectStyle>
+        <a:effectStyle>
+          <a:effectLst>
+            <a:outerShdw blurRad="57150" dist="19050" dir="5400000" algn="ctr" rotWithShape="0">
+              <a:srgbClr val="000000">
+                <a:alpha val="63000"/>
+              </a:srgbClr>
+            </a:outerShdw>
+          </a:effectLst>
+        </a:effectStyle>
+      </a:effectStyleLst>
+      <a:bgFillStyleLst>
+        <a:solidFill>
+          <a:schemeClr val="phClr"/>
+        </a:solidFill>
+        <a:solidFill>
+          <a:schemeClr val="phClr">
+            <a:tint val="95000"/>
+            <a:satMod val="170000"/>
+          </a:schemeClr>
+        </a:solidFill>
+        <a:gradFill rotWithShape="1">
+          <a:gsLst>
+            <a:gs pos="0">
+              <a:schemeClr val="phClr">
+                <a:tint val="93000"/>
+                <a:satMod val="150000"/>
+                <a:shade val="98000"/>
+                <a:lumMod val="102000"/>
+              </a:schemeClr>
+            </a:gs>
+            <a:gs pos="50000">
+              <a:schemeClr val="phClr">
+                <a:tint val="98000"/>
+                <a:satMod val="130000"/>
+                <a:shade val="90000"/>
+                <a:lumMod val="103000"/>
+              </a:schemeClr>
+            </a:gs>
+            <a:gs pos="100000">
+              <a:schemeClr val="phClr">
+                <a:shade val="63000"/>
+                <a:satMod val="120000"/>
+              </a:schemeClr>
+            </a:gs>
+          </a:gsLst>
+          <a:lin ang="5400000" scaled="0"/>
+        </a:gradFill>
+      </a:bgFillStyleLst>
+    </a:fmtScheme>
+  </a:themeElements>
+  <a:objectDefaults/>
+  <a:extraClrSchemeLst/>
+  <a:extLst>
+    <a:ext uri="{05A4C25C-085E-4340-85A3-A5531E510DB2}">
+      <thm15:themeFamily xmlns:thm15="http://schemas.microsoft.com/office/thememl/2012/main" name="Office Theme" id="{62F939B6-93AF-4DB8-9C6B-D6C7DFDC589F}" vid="{4A3C46E8-61CC-4603-A589-7422A47A8E4A}"/>
+    </a:ext>
+  </a:extLst>
+</a:theme>
 </file>